--- a/FINALDOCS/POSTER/FINAL/M_RAG_A1_FINAL_EDITABLE.pptx
+++ b/FINALDOCS/POSTER/FINAL/M_RAG_A1_FINAL_EDITABLE.pptx
@@ -2,13 +2,13 @@
 <file path=ppt/presentation.xml><?xml version="1.0" encoding="utf-8"?>
 <p:presentation xmlns:p="http://schemas.openxmlformats.org/presentationml/2006/main">
   <p:sldMasterIdLst>
-    <p:sldMasterId xmlns:r="http://schemas.openxmlformats.org/officeDocument/2006/relationships" id="2147483648" r:id="R1d9eda4321294c62"/>
+    <p:sldMasterId xmlns:r="http://schemas.openxmlformats.org/officeDocument/2006/relationships" id="2147483648" r:id="Rf6cc408cd4424066"/>
   </p:sldMasterIdLst>
   <p:notesMasterIdLst>
-    <p:notesMasterId xmlns:r="http://schemas.openxmlformats.org/officeDocument/2006/relationships" r:id="R183c765c7d9c4233"/>
+    <p:notesMasterId xmlns:r="http://schemas.openxmlformats.org/officeDocument/2006/relationships" r:id="Rbc1939e328104470"/>
   </p:notesMasterIdLst>
   <p:sldIdLst>
-    <p:sldId xmlns:r="http://schemas.openxmlformats.org/officeDocument/2006/relationships" id="256" r:id="R629085d5e3e0476a"/>
+    <p:sldId xmlns:r="http://schemas.openxmlformats.org/officeDocument/2006/relationships" id="256" r:id="R7c84f456f7774943"/>
   </p:sldIdLst>
   <p:sldSz cx="21384000" cy="30276000"/>
   <p:notesSz cx="6858000" cy="9144000"/>
@@ -529,7 +529,7 @@
                 <a:cs typeface="+mj-lt"/>
               </a:defRPr>
             </a:defPPr>
-            <a:lvl1pPr marL="0" indent="0">
+            <a:lvl1pPr marL="0" indent="0" algn="ctr">
               <a:lnSpc>
                 <a:spcPct val="110000"/>
               </a:lnSpc>
@@ -540,8 +540,16 @@
                 <a:spcPts val="0"/>
               </a:spcAft>
               <a:buNone/>
+              <a:defRPr sz="8419" b="1">
+                <a:solidFill>
+                  <a:schemeClr val="tx1"/>
+                </a:solidFill>
+                <a:latin typeface="+mj-lt"/>
+                <a:ea typeface="+mj-lt"/>
+                <a:cs typeface="+mj-lt"/>
+              </a:defRPr>
             </a:lvl1pPr>
-            <a:lvl2pPr marL="0" indent="0">
+            <a:lvl2pPr marL="0" indent="0" algn="ctr">
               <a:lnSpc>
                 <a:spcPct val="110000"/>
               </a:lnSpc>
@@ -552,8 +560,16 @@
                 <a:spcPts val="0"/>
               </a:spcAft>
               <a:buNone/>
+              <a:defRPr sz="8419" b="1">
+                <a:solidFill>
+                  <a:schemeClr val="tx1"/>
+                </a:solidFill>
+                <a:latin typeface="+mj-lt"/>
+                <a:ea typeface="+mj-lt"/>
+                <a:cs typeface="+mj-lt"/>
+              </a:defRPr>
             </a:lvl2pPr>
-            <a:lvl3pPr marL="0" indent="0">
+            <a:lvl3pPr marL="0" indent="0" algn="ctr">
               <a:lnSpc>
                 <a:spcPct val="110000"/>
               </a:lnSpc>
@@ -564,8 +580,16 @@
                 <a:spcPts val="0"/>
               </a:spcAft>
               <a:buNone/>
+              <a:defRPr sz="8419" b="1">
+                <a:solidFill>
+                  <a:schemeClr val="tx1"/>
+                </a:solidFill>
+                <a:latin typeface="+mj-lt"/>
+                <a:ea typeface="+mj-lt"/>
+                <a:cs typeface="+mj-lt"/>
+              </a:defRPr>
             </a:lvl3pPr>
-            <a:lvl4pPr marL="0" indent="0">
+            <a:lvl4pPr marL="0" indent="0" algn="ctr">
               <a:lnSpc>
                 <a:spcPct val="110000"/>
               </a:lnSpc>
@@ -576,8 +600,16 @@
                 <a:spcPts val="0"/>
               </a:spcAft>
               <a:buNone/>
+              <a:defRPr sz="8419" b="1">
+                <a:solidFill>
+                  <a:schemeClr val="tx1"/>
+                </a:solidFill>
+                <a:latin typeface="+mj-lt"/>
+                <a:ea typeface="+mj-lt"/>
+                <a:cs typeface="+mj-lt"/>
+              </a:defRPr>
             </a:lvl4pPr>
-            <a:lvl5pPr marL="0" indent="0">
+            <a:lvl5pPr marL="0" indent="0" algn="ctr">
               <a:lnSpc>
                 <a:spcPct val="110000"/>
               </a:lnSpc>
@@ -588,8 +620,16 @@
                 <a:spcPts val="0"/>
               </a:spcAft>
               <a:buNone/>
+              <a:defRPr sz="8419" b="1">
+                <a:solidFill>
+                  <a:schemeClr val="tx1"/>
+                </a:solidFill>
+                <a:latin typeface="+mj-lt"/>
+                <a:ea typeface="+mj-lt"/>
+                <a:cs typeface="+mj-lt"/>
+              </a:defRPr>
             </a:lvl5pPr>
-            <a:lvl6pPr marL="0" indent="0">
+            <a:lvl6pPr marL="0" indent="0" algn="ctr">
               <a:lnSpc>
                 <a:spcPct val="110000"/>
               </a:lnSpc>
@@ -600,8 +640,16 @@
                 <a:spcPts val="0"/>
               </a:spcAft>
               <a:buNone/>
+              <a:defRPr sz="8419" b="1">
+                <a:solidFill>
+                  <a:schemeClr val="tx1"/>
+                </a:solidFill>
+                <a:latin typeface="+mj-lt"/>
+                <a:ea typeface="+mj-lt"/>
+                <a:cs typeface="+mj-lt"/>
+              </a:defRPr>
             </a:lvl6pPr>
-            <a:lvl7pPr marL="0" indent="0">
+            <a:lvl7pPr marL="0" indent="0" algn="ctr">
               <a:lnSpc>
                 <a:spcPct val="110000"/>
               </a:lnSpc>
@@ -612,8 +660,16 @@
                 <a:spcPts val="0"/>
               </a:spcAft>
               <a:buNone/>
+              <a:defRPr sz="8419" b="1">
+                <a:solidFill>
+                  <a:schemeClr val="tx1"/>
+                </a:solidFill>
+                <a:latin typeface="+mj-lt"/>
+                <a:ea typeface="+mj-lt"/>
+                <a:cs typeface="+mj-lt"/>
+              </a:defRPr>
             </a:lvl7pPr>
-            <a:lvl8pPr marL="0" indent="0">
+            <a:lvl8pPr marL="0" indent="0" algn="ctr">
               <a:lnSpc>
                 <a:spcPct val="110000"/>
               </a:lnSpc>
@@ -624,8 +680,16 @@
                 <a:spcPts val="0"/>
               </a:spcAft>
               <a:buNone/>
+              <a:defRPr sz="8419" b="1">
+                <a:solidFill>
+                  <a:schemeClr val="tx1"/>
+                </a:solidFill>
+                <a:latin typeface="+mj-lt"/>
+                <a:ea typeface="+mj-lt"/>
+                <a:cs typeface="+mj-lt"/>
+              </a:defRPr>
             </a:lvl8pPr>
-            <a:lvl9pPr marL="0" indent="0">
+            <a:lvl9pPr marL="0" indent="0" algn="ctr">
               <a:lnSpc>
                 <a:spcPct val="110000"/>
               </a:lnSpc>
@@ -636,6 +700,14 @@
                 <a:spcPts val="0"/>
               </a:spcAft>
               <a:buNone/>
+              <a:defRPr sz="8419" b="1">
+                <a:solidFill>
+                  <a:schemeClr val="tx1"/>
+                </a:solidFill>
+                <a:latin typeface="+mj-lt"/>
+                <a:ea typeface="+mj-lt"/>
+                <a:cs typeface="+mj-lt"/>
+              </a:defRPr>
             </a:lvl9pPr>
           </a:lstStyle>
           <a:p xmlns:a="http://schemas.openxmlformats.org/drawingml/2006/main"/>
@@ -686,7 +758,7 @@
                 <a:cs typeface="+mn-lt"/>
               </a:defRPr>
             </a:defPPr>
-            <a:lvl1pPr marL="0" indent="0">
+            <a:lvl1pPr marL="0" indent="0" algn="ctr">
               <a:lnSpc>
                 <a:spcPct val="110000"/>
               </a:lnSpc>
@@ -697,8 +769,16 @@
                 <a:spcPts val="0"/>
               </a:spcAft>
               <a:buNone/>
+              <a:defRPr sz="3683" b="0">
+                <a:solidFill>
+                  <a:schemeClr val="tx1"/>
+                </a:solidFill>
+                <a:latin typeface="+mn-lt"/>
+                <a:ea typeface="+mn-lt"/>
+                <a:cs typeface="+mn-lt"/>
+              </a:defRPr>
             </a:lvl1pPr>
-            <a:lvl2pPr marL="0" indent="0">
+            <a:lvl2pPr marL="0" indent="0" algn="ctr">
               <a:lnSpc>
                 <a:spcPct val="110000"/>
               </a:lnSpc>
@@ -709,8 +789,16 @@
                 <a:spcPts val="0"/>
               </a:spcAft>
               <a:buNone/>
+              <a:defRPr sz="3683" b="0">
+                <a:solidFill>
+                  <a:schemeClr val="tx1"/>
+                </a:solidFill>
+                <a:latin typeface="+mn-lt"/>
+                <a:ea typeface="+mn-lt"/>
+                <a:cs typeface="+mn-lt"/>
+              </a:defRPr>
             </a:lvl2pPr>
-            <a:lvl3pPr marL="0" indent="0">
+            <a:lvl3pPr marL="0" indent="0" algn="ctr">
               <a:lnSpc>
                 <a:spcPct val="110000"/>
               </a:lnSpc>
@@ -721,8 +809,16 @@
                 <a:spcPts val="0"/>
               </a:spcAft>
               <a:buNone/>
+              <a:defRPr sz="3683" b="0">
+                <a:solidFill>
+                  <a:schemeClr val="tx1"/>
+                </a:solidFill>
+                <a:latin typeface="+mn-lt"/>
+                <a:ea typeface="+mn-lt"/>
+                <a:cs typeface="+mn-lt"/>
+              </a:defRPr>
             </a:lvl3pPr>
-            <a:lvl4pPr marL="0" indent="0">
+            <a:lvl4pPr marL="0" indent="0" algn="ctr">
               <a:lnSpc>
                 <a:spcPct val="110000"/>
               </a:lnSpc>
@@ -733,8 +829,16 @@
                 <a:spcPts val="0"/>
               </a:spcAft>
               <a:buNone/>
+              <a:defRPr sz="3683" b="0">
+                <a:solidFill>
+                  <a:schemeClr val="tx1"/>
+                </a:solidFill>
+                <a:latin typeface="+mn-lt"/>
+                <a:ea typeface="+mn-lt"/>
+                <a:cs typeface="+mn-lt"/>
+              </a:defRPr>
             </a:lvl4pPr>
-            <a:lvl5pPr marL="0" indent="0">
+            <a:lvl5pPr marL="0" indent="0" algn="ctr">
               <a:lnSpc>
                 <a:spcPct val="110000"/>
               </a:lnSpc>
@@ -745,8 +849,16 @@
                 <a:spcPts val="0"/>
               </a:spcAft>
               <a:buNone/>
+              <a:defRPr sz="3683" b="0">
+                <a:solidFill>
+                  <a:schemeClr val="tx1"/>
+                </a:solidFill>
+                <a:latin typeface="+mn-lt"/>
+                <a:ea typeface="+mn-lt"/>
+                <a:cs typeface="+mn-lt"/>
+              </a:defRPr>
             </a:lvl5pPr>
-            <a:lvl6pPr marL="0" indent="0">
+            <a:lvl6pPr marL="0" indent="0" algn="ctr">
               <a:lnSpc>
                 <a:spcPct val="110000"/>
               </a:lnSpc>
@@ -757,8 +869,16 @@
                 <a:spcPts val="0"/>
               </a:spcAft>
               <a:buNone/>
+              <a:defRPr sz="3683" b="0">
+                <a:solidFill>
+                  <a:schemeClr val="tx1"/>
+                </a:solidFill>
+                <a:latin typeface="+mn-lt"/>
+                <a:ea typeface="+mn-lt"/>
+                <a:cs typeface="+mn-lt"/>
+              </a:defRPr>
             </a:lvl6pPr>
-            <a:lvl7pPr marL="0" indent="0">
+            <a:lvl7pPr marL="0" indent="0" algn="ctr">
               <a:lnSpc>
                 <a:spcPct val="110000"/>
               </a:lnSpc>
@@ -769,8 +889,16 @@
                 <a:spcPts val="0"/>
               </a:spcAft>
               <a:buNone/>
+              <a:defRPr sz="3683" b="0">
+                <a:solidFill>
+                  <a:schemeClr val="tx1"/>
+                </a:solidFill>
+                <a:latin typeface="+mn-lt"/>
+                <a:ea typeface="+mn-lt"/>
+                <a:cs typeface="+mn-lt"/>
+              </a:defRPr>
             </a:lvl7pPr>
-            <a:lvl8pPr marL="0" indent="0">
+            <a:lvl8pPr marL="0" indent="0" algn="ctr">
               <a:lnSpc>
                 <a:spcPct val="110000"/>
               </a:lnSpc>
@@ -781,8 +909,16 @@
                 <a:spcPts val="0"/>
               </a:spcAft>
               <a:buNone/>
+              <a:defRPr sz="3683" b="0">
+                <a:solidFill>
+                  <a:schemeClr val="tx1"/>
+                </a:solidFill>
+                <a:latin typeface="+mn-lt"/>
+                <a:ea typeface="+mn-lt"/>
+                <a:cs typeface="+mn-lt"/>
+              </a:defRPr>
             </a:lvl8pPr>
-            <a:lvl9pPr marL="0" indent="0">
+            <a:lvl9pPr marL="0" indent="0" algn="ctr">
               <a:lnSpc>
                 <a:spcPct val="110000"/>
               </a:lnSpc>
@@ -793,6 +929,14 @@
                 <a:spcPts val="0"/>
               </a:spcAft>
               <a:buNone/>
+              <a:defRPr sz="3683" b="0">
+                <a:solidFill>
+                  <a:schemeClr val="tx1"/>
+                </a:solidFill>
+                <a:latin typeface="+mn-lt"/>
+                <a:ea typeface="+mn-lt"/>
+                <a:cs typeface="+mn-lt"/>
+              </a:defRPr>
             </a:lvl9pPr>
           </a:lstStyle>
           <a:p xmlns:a="http://schemas.openxmlformats.org/drawingml/2006/main"/>
@@ -860,7 +1004,7 @@
                 <a:cs typeface="+mj-lt"/>
               </a:defRPr>
             </a:defPPr>
-            <a:lvl1pPr marL="0" indent="0">
+            <a:lvl1pPr marL="0" indent="0" algn="ctr">
               <a:lnSpc>
                 <a:spcPct val="110000"/>
               </a:lnSpc>
@@ -871,8 +1015,16 @@
                 <a:spcPts val="0"/>
               </a:spcAft>
               <a:buNone/>
+              <a:defRPr sz="7367" b="1">
+                <a:solidFill>
+                  <a:schemeClr val="tx1"/>
+                </a:solidFill>
+                <a:latin typeface="+mj-lt"/>
+                <a:ea typeface="+mj-lt"/>
+                <a:cs typeface="+mj-lt"/>
+              </a:defRPr>
             </a:lvl1pPr>
-            <a:lvl2pPr marL="0" indent="0">
+            <a:lvl2pPr marL="0" indent="0" algn="ctr">
               <a:lnSpc>
                 <a:spcPct val="110000"/>
               </a:lnSpc>
@@ -883,8 +1035,16 @@
                 <a:spcPts val="0"/>
               </a:spcAft>
               <a:buNone/>
+              <a:defRPr sz="7367" b="1">
+                <a:solidFill>
+                  <a:schemeClr val="tx1"/>
+                </a:solidFill>
+                <a:latin typeface="+mj-lt"/>
+                <a:ea typeface="+mj-lt"/>
+                <a:cs typeface="+mj-lt"/>
+              </a:defRPr>
             </a:lvl2pPr>
-            <a:lvl3pPr marL="0" indent="0">
+            <a:lvl3pPr marL="0" indent="0" algn="ctr">
               <a:lnSpc>
                 <a:spcPct val="110000"/>
               </a:lnSpc>
@@ -895,8 +1055,16 @@
                 <a:spcPts val="0"/>
               </a:spcAft>
               <a:buNone/>
+              <a:defRPr sz="7367" b="1">
+                <a:solidFill>
+                  <a:schemeClr val="tx1"/>
+                </a:solidFill>
+                <a:latin typeface="+mj-lt"/>
+                <a:ea typeface="+mj-lt"/>
+                <a:cs typeface="+mj-lt"/>
+              </a:defRPr>
             </a:lvl3pPr>
-            <a:lvl4pPr marL="0" indent="0">
+            <a:lvl4pPr marL="0" indent="0" algn="ctr">
               <a:lnSpc>
                 <a:spcPct val="110000"/>
               </a:lnSpc>
@@ -907,8 +1075,16 @@
                 <a:spcPts val="0"/>
               </a:spcAft>
               <a:buNone/>
+              <a:defRPr sz="7367" b="1">
+                <a:solidFill>
+                  <a:schemeClr val="tx1"/>
+                </a:solidFill>
+                <a:latin typeface="+mj-lt"/>
+                <a:ea typeface="+mj-lt"/>
+                <a:cs typeface="+mj-lt"/>
+              </a:defRPr>
             </a:lvl4pPr>
-            <a:lvl5pPr marL="0" indent="0">
+            <a:lvl5pPr marL="0" indent="0" algn="ctr">
               <a:lnSpc>
                 <a:spcPct val="110000"/>
               </a:lnSpc>
@@ -919,8 +1095,16 @@
                 <a:spcPts val="0"/>
               </a:spcAft>
               <a:buNone/>
+              <a:defRPr sz="7367" b="1">
+                <a:solidFill>
+                  <a:schemeClr val="tx1"/>
+                </a:solidFill>
+                <a:latin typeface="+mj-lt"/>
+                <a:ea typeface="+mj-lt"/>
+                <a:cs typeface="+mj-lt"/>
+              </a:defRPr>
             </a:lvl5pPr>
-            <a:lvl6pPr marL="0" indent="0">
+            <a:lvl6pPr marL="0" indent="0" algn="ctr">
               <a:lnSpc>
                 <a:spcPct val="110000"/>
               </a:lnSpc>
@@ -931,8 +1115,16 @@
                 <a:spcPts val="0"/>
               </a:spcAft>
               <a:buNone/>
+              <a:defRPr sz="7367" b="1">
+                <a:solidFill>
+                  <a:schemeClr val="tx1"/>
+                </a:solidFill>
+                <a:latin typeface="+mj-lt"/>
+                <a:ea typeface="+mj-lt"/>
+                <a:cs typeface="+mj-lt"/>
+              </a:defRPr>
             </a:lvl6pPr>
-            <a:lvl7pPr marL="0" indent="0">
+            <a:lvl7pPr marL="0" indent="0" algn="ctr">
               <a:lnSpc>
                 <a:spcPct val="110000"/>
               </a:lnSpc>
@@ -943,8 +1135,16 @@
                 <a:spcPts val="0"/>
               </a:spcAft>
               <a:buNone/>
+              <a:defRPr sz="7367" b="1">
+                <a:solidFill>
+                  <a:schemeClr val="tx1"/>
+                </a:solidFill>
+                <a:latin typeface="+mj-lt"/>
+                <a:ea typeface="+mj-lt"/>
+                <a:cs typeface="+mj-lt"/>
+              </a:defRPr>
             </a:lvl7pPr>
-            <a:lvl8pPr marL="0" indent="0">
+            <a:lvl8pPr marL="0" indent="0" algn="ctr">
               <a:lnSpc>
                 <a:spcPct val="110000"/>
               </a:lnSpc>
@@ -955,8 +1155,16 @@
                 <a:spcPts val="0"/>
               </a:spcAft>
               <a:buNone/>
+              <a:defRPr sz="7367" b="1">
+                <a:solidFill>
+                  <a:schemeClr val="tx1"/>
+                </a:solidFill>
+                <a:latin typeface="+mj-lt"/>
+                <a:ea typeface="+mj-lt"/>
+                <a:cs typeface="+mj-lt"/>
+              </a:defRPr>
             </a:lvl8pPr>
-            <a:lvl9pPr marL="0" indent="0">
+            <a:lvl9pPr marL="0" indent="0" algn="ctr">
               <a:lnSpc>
                 <a:spcPct val="110000"/>
               </a:lnSpc>
@@ -967,6 +1175,14 @@
                 <a:spcPts val="0"/>
               </a:spcAft>
               <a:buNone/>
+              <a:defRPr sz="7367" b="1">
+                <a:solidFill>
+                  <a:schemeClr val="tx1"/>
+                </a:solidFill>
+                <a:latin typeface="+mj-lt"/>
+                <a:ea typeface="+mj-lt"/>
+                <a:cs typeface="+mj-lt"/>
+              </a:defRPr>
             </a:lvl9pPr>
           </a:lstStyle>
           <a:p xmlns:a="http://schemas.openxmlformats.org/drawingml/2006/main"/>
@@ -1034,7 +1250,7 @@
                 <a:cs typeface="+mj-lt"/>
               </a:defRPr>
             </a:defPPr>
-            <a:lvl1pPr marL="0" indent="0">
+            <a:lvl1pPr marL="0" indent="0" algn="l">
               <a:lnSpc>
                 <a:spcPct val="110000"/>
               </a:lnSpc>
@@ -1045,8 +1261,16 @@
                 <a:spcPts val="0"/>
               </a:spcAft>
               <a:buNone/>
+              <a:defRPr sz="5788" b="1">
+                <a:solidFill>
+                  <a:schemeClr val="tx1"/>
+                </a:solidFill>
+                <a:latin typeface="+mj-lt"/>
+                <a:ea typeface="+mj-lt"/>
+                <a:cs typeface="+mj-lt"/>
+              </a:defRPr>
             </a:lvl1pPr>
-            <a:lvl2pPr marL="0" indent="0">
+            <a:lvl2pPr marL="0" indent="0" algn="l">
               <a:lnSpc>
                 <a:spcPct val="110000"/>
               </a:lnSpc>
@@ -1057,8 +1281,16 @@
                 <a:spcPts val="0"/>
               </a:spcAft>
               <a:buNone/>
+              <a:defRPr sz="5788" b="1">
+                <a:solidFill>
+                  <a:schemeClr val="tx1"/>
+                </a:solidFill>
+                <a:latin typeface="+mj-lt"/>
+                <a:ea typeface="+mj-lt"/>
+                <a:cs typeface="+mj-lt"/>
+              </a:defRPr>
             </a:lvl2pPr>
-            <a:lvl3pPr marL="0" indent="0">
+            <a:lvl3pPr marL="0" indent="0" algn="l">
               <a:lnSpc>
                 <a:spcPct val="110000"/>
               </a:lnSpc>
@@ -1069,8 +1301,16 @@
                 <a:spcPts val="0"/>
               </a:spcAft>
               <a:buNone/>
+              <a:defRPr sz="5788" b="1">
+                <a:solidFill>
+                  <a:schemeClr val="tx1"/>
+                </a:solidFill>
+                <a:latin typeface="+mj-lt"/>
+                <a:ea typeface="+mj-lt"/>
+                <a:cs typeface="+mj-lt"/>
+              </a:defRPr>
             </a:lvl3pPr>
-            <a:lvl4pPr marL="0" indent="0">
+            <a:lvl4pPr marL="0" indent="0" algn="l">
               <a:lnSpc>
                 <a:spcPct val="110000"/>
               </a:lnSpc>
@@ -1081,8 +1321,16 @@
                 <a:spcPts val="0"/>
               </a:spcAft>
               <a:buNone/>
+              <a:defRPr sz="5788" b="1">
+                <a:solidFill>
+                  <a:schemeClr val="tx1"/>
+                </a:solidFill>
+                <a:latin typeface="+mj-lt"/>
+                <a:ea typeface="+mj-lt"/>
+                <a:cs typeface="+mj-lt"/>
+              </a:defRPr>
             </a:lvl4pPr>
-            <a:lvl5pPr marL="0" indent="0">
+            <a:lvl5pPr marL="0" indent="0" algn="l">
               <a:lnSpc>
                 <a:spcPct val="110000"/>
               </a:lnSpc>
@@ -1093,8 +1341,16 @@
                 <a:spcPts val="0"/>
               </a:spcAft>
               <a:buNone/>
+              <a:defRPr sz="5788" b="1">
+                <a:solidFill>
+                  <a:schemeClr val="tx1"/>
+                </a:solidFill>
+                <a:latin typeface="+mj-lt"/>
+                <a:ea typeface="+mj-lt"/>
+                <a:cs typeface="+mj-lt"/>
+              </a:defRPr>
             </a:lvl5pPr>
-            <a:lvl6pPr marL="0" indent="0">
+            <a:lvl6pPr marL="0" indent="0" algn="l">
               <a:lnSpc>
                 <a:spcPct val="110000"/>
               </a:lnSpc>
@@ -1105,8 +1361,16 @@
                 <a:spcPts val="0"/>
               </a:spcAft>
               <a:buNone/>
+              <a:defRPr sz="5788" b="1">
+                <a:solidFill>
+                  <a:schemeClr val="tx1"/>
+                </a:solidFill>
+                <a:latin typeface="+mj-lt"/>
+                <a:ea typeface="+mj-lt"/>
+                <a:cs typeface="+mj-lt"/>
+              </a:defRPr>
             </a:lvl6pPr>
-            <a:lvl7pPr marL="0" indent="0">
+            <a:lvl7pPr marL="0" indent="0" algn="l">
               <a:lnSpc>
                 <a:spcPct val="110000"/>
               </a:lnSpc>
@@ -1117,8 +1381,16 @@
                 <a:spcPts val="0"/>
               </a:spcAft>
               <a:buNone/>
+              <a:defRPr sz="5788" b="1">
+                <a:solidFill>
+                  <a:schemeClr val="tx1"/>
+                </a:solidFill>
+                <a:latin typeface="+mj-lt"/>
+                <a:ea typeface="+mj-lt"/>
+                <a:cs typeface="+mj-lt"/>
+              </a:defRPr>
             </a:lvl7pPr>
-            <a:lvl8pPr marL="0" indent="0">
+            <a:lvl8pPr marL="0" indent="0" algn="l">
               <a:lnSpc>
                 <a:spcPct val="110000"/>
               </a:lnSpc>
@@ -1129,8 +1401,16 @@
                 <a:spcPts val="0"/>
               </a:spcAft>
               <a:buNone/>
+              <a:defRPr sz="5788" b="1">
+                <a:solidFill>
+                  <a:schemeClr val="tx1"/>
+                </a:solidFill>
+                <a:latin typeface="+mj-lt"/>
+                <a:ea typeface="+mj-lt"/>
+                <a:cs typeface="+mj-lt"/>
+              </a:defRPr>
             </a:lvl8pPr>
-            <a:lvl9pPr marL="0" indent="0">
+            <a:lvl9pPr marL="0" indent="0" algn="l">
               <a:lnSpc>
                 <a:spcPct val="110000"/>
               </a:lnSpc>
@@ -1141,6 +1421,14 @@
                 <a:spcPts val="0"/>
               </a:spcAft>
               <a:buNone/>
+              <a:defRPr sz="5788" b="1">
+                <a:solidFill>
+                  <a:schemeClr val="tx1"/>
+                </a:solidFill>
+                <a:latin typeface="+mj-lt"/>
+                <a:ea typeface="+mj-lt"/>
+                <a:cs typeface="+mj-lt"/>
+              </a:defRPr>
             </a:lvl9pPr>
           </a:lstStyle>
           <a:p xmlns:a="http://schemas.openxmlformats.org/drawingml/2006/main"/>
@@ -1191,7 +1479,7 @@
                 <a:cs typeface="+mn-lt"/>
               </a:defRPr>
             </a:defPPr>
-            <a:lvl1pPr marL="400950" indent="-400950">
+            <a:lvl1pPr marL="400950" indent="-400950" algn="l">
               <a:lnSpc>
                 <a:spcPct val="110000"/>
               </a:lnSpc>
@@ -1202,8 +1490,16 @@
                 <a:spcPts val="2105"/>
               </a:spcAft>
               <a:buChar char="•"/>
+              <a:defRPr sz="3946" b="0">
+                <a:solidFill>
+                  <a:schemeClr val="tx1"/>
+                </a:solidFill>
+                <a:latin typeface="+mn-lt"/>
+                <a:ea typeface="+mn-lt"/>
+                <a:cs typeface="+mn-lt"/>
+              </a:defRPr>
             </a:lvl1pPr>
-            <a:lvl2pPr marL="935550" indent="-400950">
+            <a:lvl2pPr marL="935550" indent="-400950" algn="l">
               <a:lnSpc>
                 <a:spcPct val="110000"/>
               </a:lnSpc>
@@ -1214,8 +1510,16 @@
                 <a:spcPts val="2105"/>
               </a:spcAft>
               <a:buChar char="•"/>
+              <a:defRPr sz="3946" b="0">
+                <a:solidFill>
+                  <a:schemeClr val="tx1"/>
+                </a:solidFill>
+                <a:latin typeface="+mn-lt"/>
+                <a:ea typeface="+mn-lt"/>
+                <a:cs typeface="+mn-lt"/>
+              </a:defRPr>
             </a:lvl2pPr>
-            <a:lvl3pPr marL="1470150" indent="-400950">
+            <a:lvl3pPr marL="1470150" indent="-400950" algn="l">
               <a:lnSpc>
                 <a:spcPct val="110000"/>
               </a:lnSpc>
@@ -1226,8 +1530,16 @@
                 <a:spcPts val="2105"/>
               </a:spcAft>
               <a:buChar char="•"/>
+              <a:defRPr sz="3946" b="0">
+                <a:solidFill>
+                  <a:schemeClr val="tx1"/>
+                </a:solidFill>
+                <a:latin typeface="+mn-lt"/>
+                <a:ea typeface="+mn-lt"/>
+                <a:cs typeface="+mn-lt"/>
+              </a:defRPr>
             </a:lvl3pPr>
-            <a:lvl4pPr marL="2004750" indent="-400950">
+            <a:lvl4pPr marL="2004750" indent="-400950" algn="l">
               <a:lnSpc>
                 <a:spcPct val="110000"/>
               </a:lnSpc>
@@ -1238,8 +1550,16 @@
                 <a:spcPts val="2105"/>
               </a:spcAft>
               <a:buChar char="•"/>
+              <a:defRPr sz="3946" b="0">
+                <a:solidFill>
+                  <a:schemeClr val="tx1"/>
+                </a:solidFill>
+                <a:latin typeface="+mn-lt"/>
+                <a:ea typeface="+mn-lt"/>
+                <a:cs typeface="+mn-lt"/>
+              </a:defRPr>
             </a:lvl4pPr>
-            <a:lvl5pPr marL="2539350" indent="-400950">
+            <a:lvl5pPr marL="2539350" indent="-400950" algn="l">
               <a:lnSpc>
                 <a:spcPct val="110000"/>
               </a:lnSpc>
@@ -1250,8 +1570,16 @@
                 <a:spcPts val="2105"/>
               </a:spcAft>
               <a:buChar char="•"/>
+              <a:defRPr sz="3946" b="0">
+                <a:solidFill>
+                  <a:schemeClr val="tx1"/>
+                </a:solidFill>
+                <a:latin typeface="+mn-lt"/>
+                <a:ea typeface="+mn-lt"/>
+                <a:cs typeface="+mn-lt"/>
+              </a:defRPr>
             </a:lvl5pPr>
-            <a:lvl6pPr marL="3073950" indent="-400950">
+            <a:lvl6pPr marL="3073950" indent="-400950" algn="l">
               <a:lnSpc>
                 <a:spcPct val="110000"/>
               </a:lnSpc>
@@ -1262,8 +1590,16 @@
                 <a:spcPts val="2105"/>
               </a:spcAft>
               <a:buChar char="•"/>
+              <a:defRPr sz="3946" b="0">
+                <a:solidFill>
+                  <a:schemeClr val="tx1"/>
+                </a:solidFill>
+                <a:latin typeface="+mn-lt"/>
+                <a:ea typeface="+mn-lt"/>
+                <a:cs typeface="+mn-lt"/>
+              </a:defRPr>
             </a:lvl6pPr>
-            <a:lvl7pPr marL="3608550" indent="-400950">
+            <a:lvl7pPr marL="3608550" indent="-400950" algn="l">
               <a:lnSpc>
                 <a:spcPct val="110000"/>
               </a:lnSpc>
@@ -1274,8 +1610,16 @@
                 <a:spcPts val="2105"/>
               </a:spcAft>
               <a:buChar char="•"/>
+              <a:defRPr sz="3946" b="0">
+                <a:solidFill>
+                  <a:schemeClr val="tx1"/>
+                </a:solidFill>
+                <a:latin typeface="+mn-lt"/>
+                <a:ea typeface="+mn-lt"/>
+                <a:cs typeface="+mn-lt"/>
+              </a:defRPr>
             </a:lvl7pPr>
-            <a:lvl8pPr marL="4143150" indent="-400950">
+            <a:lvl8pPr marL="4143150" indent="-400950" algn="l">
               <a:lnSpc>
                 <a:spcPct val="110000"/>
               </a:lnSpc>
@@ -1286,8 +1630,16 @@
                 <a:spcPts val="2105"/>
               </a:spcAft>
               <a:buChar char="•"/>
+              <a:defRPr sz="3946" b="0">
+                <a:solidFill>
+                  <a:schemeClr val="tx1"/>
+                </a:solidFill>
+                <a:latin typeface="+mn-lt"/>
+                <a:ea typeface="+mn-lt"/>
+                <a:cs typeface="+mn-lt"/>
+              </a:defRPr>
             </a:lvl8pPr>
-            <a:lvl9pPr marL="4677750" indent="-400950">
+            <a:lvl9pPr marL="4677750" indent="-400950" algn="l">
               <a:lnSpc>
                 <a:spcPct val="110000"/>
               </a:lnSpc>
@@ -1298,6 +1650,14 @@
                 <a:spcPts val="2105"/>
               </a:spcAft>
               <a:buChar char="•"/>
+              <a:defRPr sz="3946" b="0">
+                <a:solidFill>
+                  <a:schemeClr val="tx1"/>
+                </a:solidFill>
+                <a:latin typeface="+mn-lt"/>
+                <a:ea typeface="+mn-lt"/>
+                <a:cs typeface="+mn-lt"/>
+              </a:defRPr>
             </a:lvl9pPr>
           </a:lstStyle>
           <a:p xmlns:a="http://schemas.openxmlformats.org/drawingml/2006/main"/>
@@ -1365,7 +1725,7 @@
                 <a:cs typeface="+mj-lt"/>
               </a:defRPr>
             </a:defPPr>
-            <a:lvl1pPr marL="0" indent="0">
+            <a:lvl1pPr marL="0" indent="0" algn="l">
               <a:lnSpc>
                 <a:spcPct val="110000"/>
               </a:lnSpc>
@@ -1376,8 +1736,16 @@
                 <a:spcPts val="0"/>
               </a:spcAft>
               <a:buNone/>
+              <a:defRPr sz="5788" b="1">
+                <a:solidFill>
+                  <a:schemeClr val="tx1"/>
+                </a:solidFill>
+                <a:latin typeface="+mj-lt"/>
+                <a:ea typeface="+mj-lt"/>
+                <a:cs typeface="+mj-lt"/>
+              </a:defRPr>
             </a:lvl1pPr>
-            <a:lvl2pPr marL="0" indent="0">
+            <a:lvl2pPr marL="0" indent="0" algn="l">
               <a:lnSpc>
                 <a:spcPct val="110000"/>
               </a:lnSpc>
@@ -1388,8 +1756,16 @@
                 <a:spcPts val="0"/>
               </a:spcAft>
               <a:buNone/>
+              <a:defRPr sz="5788" b="1">
+                <a:solidFill>
+                  <a:schemeClr val="tx1"/>
+                </a:solidFill>
+                <a:latin typeface="+mj-lt"/>
+                <a:ea typeface="+mj-lt"/>
+                <a:cs typeface="+mj-lt"/>
+              </a:defRPr>
             </a:lvl2pPr>
-            <a:lvl3pPr marL="0" indent="0">
+            <a:lvl3pPr marL="0" indent="0" algn="l">
               <a:lnSpc>
                 <a:spcPct val="110000"/>
               </a:lnSpc>
@@ -1400,8 +1776,16 @@
                 <a:spcPts val="0"/>
               </a:spcAft>
               <a:buNone/>
+              <a:defRPr sz="5788" b="1">
+                <a:solidFill>
+                  <a:schemeClr val="tx1"/>
+                </a:solidFill>
+                <a:latin typeface="+mj-lt"/>
+                <a:ea typeface="+mj-lt"/>
+                <a:cs typeface="+mj-lt"/>
+              </a:defRPr>
             </a:lvl3pPr>
-            <a:lvl4pPr marL="0" indent="0">
+            <a:lvl4pPr marL="0" indent="0" algn="l">
               <a:lnSpc>
                 <a:spcPct val="110000"/>
               </a:lnSpc>
@@ -1412,8 +1796,16 @@
                 <a:spcPts val="0"/>
               </a:spcAft>
               <a:buNone/>
+              <a:defRPr sz="5788" b="1">
+                <a:solidFill>
+                  <a:schemeClr val="tx1"/>
+                </a:solidFill>
+                <a:latin typeface="+mj-lt"/>
+                <a:ea typeface="+mj-lt"/>
+                <a:cs typeface="+mj-lt"/>
+              </a:defRPr>
             </a:lvl4pPr>
-            <a:lvl5pPr marL="0" indent="0">
+            <a:lvl5pPr marL="0" indent="0" algn="l">
               <a:lnSpc>
                 <a:spcPct val="110000"/>
               </a:lnSpc>
@@ -1424,8 +1816,16 @@
                 <a:spcPts val="0"/>
               </a:spcAft>
               <a:buNone/>
+              <a:defRPr sz="5788" b="1">
+                <a:solidFill>
+                  <a:schemeClr val="tx1"/>
+                </a:solidFill>
+                <a:latin typeface="+mj-lt"/>
+                <a:ea typeface="+mj-lt"/>
+                <a:cs typeface="+mj-lt"/>
+              </a:defRPr>
             </a:lvl5pPr>
-            <a:lvl6pPr marL="0" indent="0">
+            <a:lvl6pPr marL="0" indent="0" algn="l">
               <a:lnSpc>
                 <a:spcPct val="110000"/>
               </a:lnSpc>
@@ -1436,8 +1836,16 @@
                 <a:spcPts val="0"/>
               </a:spcAft>
               <a:buNone/>
+              <a:defRPr sz="5788" b="1">
+                <a:solidFill>
+                  <a:schemeClr val="tx1"/>
+                </a:solidFill>
+                <a:latin typeface="+mj-lt"/>
+                <a:ea typeface="+mj-lt"/>
+                <a:cs typeface="+mj-lt"/>
+              </a:defRPr>
             </a:lvl6pPr>
-            <a:lvl7pPr marL="0" indent="0">
+            <a:lvl7pPr marL="0" indent="0" algn="l">
               <a:lnSpc>
                 <a:spcPct val="110000"/>
               </a:lnSpc>
@@ -1448,8 +1856,16 @@
                 <a:spcPts val="0"/>
               </a:spcAft>
               <a:buNone/>
+              <a:defRPr sz="5788" b="1">
+                <a:solidFill>
+                  <a:schemeClr val="tx1"/>
+                </a:solidFill>
+                <a:latin typeface="+mj-lt"/>
+                <a:ea typeface="+mj-lt"/>
+                <a:cs typeface="+mj-lt"/>
+              </a:defRPr>
             </a:lvl7pPr>
-            <a:lvl8pPr marL="0" indent="0">
+            <a:lvl8pPr marL="0" indent="0" algn="l">
               <a:lnSpc>
                 <a:spcPct val="110000"/>
               </a:lnSpc>
@@ -1460,8 +1876,16 @@
                 <a:spcPts val="0"/>
               </a:spcAft>
               <a:buNone/>
+              <a:defRPr sz="5788" b="1">
+                <a:solidFill>
+                  <a:schemeClr val="tx1"/>
+                </a:solidFill>
+                <a:latin typeface="+mj-lt"/>
+                <a:ea typeface="+mj-lt"/>
+                <a:cs typeface="+mj-lt"/>
+              </a:defRPr>
             </a:lvl8pPr>
-            <a:lvl9pPr marL="0" indent="0">
+            <a:lvl9pPr marL="0" indent="0" algn="l">
               <a:lnSpc>
                 <a:spcPct val="110000"/>
               </a:lnSpc>
@@ -1472,6 +1896,14 @@
                 <a:spcPts val="0"/>
               </a:spcAft>
               <a:buNone/>
+              <a:defRPr sz="5788" b="1">
+                <a:solidFill>
+                  <a:schemeClr val="tx1"/>
+                </a:solidFill>
+                <a:latin typeface="+mj-lt"/>
+                <a:ea typeface="+mj-lt"/>
+                <a:cs typeface="+mj-lt"/>
+              </a:defRPr>
             </a:lvl9pPr>
           </a:lstStyle>
           <a:p xmlns:a="http://schemas.openxmlformats.org/drawingml/2006/main"/>
@@ -1522,7 +1954,7 @@
                 <a:cs typeface="+mn-lt"/>
               </a:defRPr>
             </a:defPPr>
-            <a:lvl1pPr marL="400950" indent="-400950">
+            <a:lvl1pPr marL="400950" indent="-400950" algn="l">
               <a:lnSpc>
                 <a:spcPct val="110000"/>
               </a:lnSpc>
@@ -1533,8 +1965,16 @@
                 <a:spcPts val="2105"/>
               </a:spcAft>
               <a:buChar char="•"/>
+              <a:defRPr sz="3683" b="0">
+                <a:solidFill>
+                  <a:schemeClr val="tx1"/>
+                </a:solidFill>
+                <a:latin typeface="+mn-lt"/>
+                <a:ea typeface="+mn-lt"/>
+                <a:cs typeface="+mn-lt"/>
+              </a:defRPr>
             </a:lvl1pPr>
-            <a:lvl2pPr marL="935550" indent="-400950">
+            <a:lvl2pPr marL="935550" indent="-400950" algn="l">
               <a:lnSpc>
                 <a:spcPct val="110000"/>
               </a:lnSpc>
@@ -1545,8 +1985,16 @@
                 <a:spcPts val="2105"/>
               </a:spcAft>
               <a:buChar char="•"/>
+              <a:defRPr sz="3683" b="0">
+                <a:solidFill>
+                  <a:schemeClr val="tx1"/>
+                </a:solidFill>
+                <a:latin typeface="+mn-lt"/>
+                <a:ea typeface="+mn-lt"/>
+                <a:cs typeface="+mn-lt"/>
+              </a:defRPr>
             </a:lvl2pPr>
-            <a:lvl3pPr marL="1470150" indent="-400950">
+            <a:lvl3pPr marL="1470150" indent="-400950" algn="l">
               <a:lnSpc>
                 <a:spcPct val="110000"/>
               </a:lnSpc>
@@ -1557,8 +2005,16 @@
                 <a:spcPts val="2105"/>
               </a:spcAft>
               <a:buChar char="•"/>
+              <a:defRPr sz="3683" b="0">
+                <a:solidFill>
+                  <a:schemeClr val="tx1"/>
+                </a:solidFill>
+                <a:latin typeface="+mn-lt"/>
+                <a:ea typeface="+mn-lt"/>
+                <a:cs typeface="+mn-lt"/>
+              </a:defRPr>
             </a:lvl3pPr>
-            <a:lvl4pPr marL="2004750" indent="-400950">
+            <a:lvl4pPr marL="2004750" indent="-400950" algn="l">
               <a:lnSpc>
                 <a:spcPct val="110000"/>
               </a:lnSpc>
@@ -1569,8 +2025,16 @@
                 <a:spcPts val="2105"/>
               </a:spcAft>
               <a:buChar char="•"/>
+              <a:defRPr sz="3683" b="0">
+                <a:solidFill>
+                  <a:schemeClr val="tx1"/>
+                </a:solidFill>
+                <a:latin typeface="+mn-lt"/>
+                <a:ea typeface="+mn-lt"/>
+                <a:cs typeface="+mn-lt"/>
+              </a:defRPr>
             </a:lvl4pPr>
-            <a:lvl5pPr marL="2539350" indent="-400950">
+            <a:lvl5pPr marL="2539350" indent="-400950" algn="l">
               <a:lnSpc>
                 <a:spcPct val="110000"/>
               </a:lnSpc>
@@ -1581,8 +2045,16 @@
                 <a:spcPts val="2105"/>
               </a:spcAft>
               <a:buChar char="•"/>
+              <a:defRPr sz="3683" b="0">
+                <a:solidFill>
+                  <a:schemeClr val="tx1"/>
+                </a:solidFill>
+                <a:latin typeface="+mn-lt"/>
+                <a:ea typeface="+mn-lt"/>
+                <a:cs typeface="+mn-lt"/>
+              </a:defRPr>
             </a:lvl5pPr>
-            <a:lvl6pPr marL="3073950" indent="-400950">
+            <a:lvl6pPr marL="3073950" indent="-400950" algn="l">
               <a:lnSpc>
                 <a:spcPct val="110000"/>
               </a:lnSpc>
@@ -1593,8 +2065,16 @@
                 <a:spcPts val="2105"/>
               </a:spcAft>
               <a:buChar char="•"/>
+              <a:defRPr sz="3683" b="0">
+                <a:solidFill>
+                  <a:schemeClr val="tx1"/>
+                </a:solidFill>
+                <a:latin typeface="+mn-lt"/>
+                <a:ea typeface="+mn-lt"/>
+                <a:cs typeface="+mn-lt"/>
+              </a:defRPr>
             </a:lvl6pPr>
-            <a:lvl7pPr marL="3608550" indent="-400950">
+            <a:lvl7pPr marL="3608550" indent="-400950" algn="l">
               <a:lnSpc>
                 <a:spcPct val="110000"/>
               </a:lnSpc>
@@ -1605,8 +2085,16 @@
                 <a:spcPts val="2105"/>
               </a:spcAft>
               <a:buChar char="•"/>
+              <a:defRPr sz="3683" b="0">
+                <a:solidFill>
+                  <a:schemeClr val="tx1"/>
+                </a:solidFill>
+                <a:latin typeface="+mn-lt"/>
+                <a:ea typeface="+mn-lt"/>
+                <a:cs typeface="+mn-lt"/>
+              </a:defRPr>
             </a:lvl7pPr>
-            <a:lvl8pPr marL="4143150" indent="-400950">
+            <a:lvl8pPr marL="4143150" indent="-400950" algn="l">
               <a:lnSpc>
                 <a:spcPct val="110000"/>
               </a:lnSpc>
@@ -1617,8 +2105,16 @@
                 <a:spcPts val="2105"/>
               </a:spcAft>
               <a:buChar char="•"/>
+              <a:defRPr sz="3683" b="0">
+                <a:solidFill>
+                  <a:schemeClr val="tx1"/>
+                </a:solidFill>
+                <a:latin typeface="+mn-lt"/>
+                <a:ea typeface="+mn-lt"/>
+                <a:cs typeface="+mn-lt"/>
+              </a:defRPr>
             </a:lvl8pPr>
-            <a:lvl9pPr marL="4677750" indent="-400950">
+            <a:lvl9pPr marL="4677750" indent="-400950" algn="l">
               <a:lnSpc>
                 <a:spcPct val="110000"/>
               </a:lnSpc>
@@ -1629,6 +2125,14 @@
                 <a:spcPts val="2105"/>
               </a:spcAft>
               <a:buChar char="•"/>
+              <a:defRPr sz="3683" b="0">
+                <a:solidFill>
+                  <a:schemeClr val="tx1"/>
+                </a:solidFill>
+                <a:latin typeface="+mn-lt"/>
+                <a:ea typeface="+mn-lt"/>
+                <a:cs typeface="+mn-lt"/>
+              </a:defRPr>
             </a:lvl9pPr>
           </a:lstStyle>
           <a:p xmlns:a="http://schemas.openxmlformats.org/drawingml/2006/main"/>
@@ -1679,7 +2183,7 @@
                 <a:cs typeface="+mn-lt"/>
               </a:defRPr>
             </a:defPPr>
-            <a:lvl1pPr marL="400950" indent="-400950">
+            <a:lvl1pPr marL="400950" indent="-400950" algn="l">
               <a:lnSpc>
                 <a:spcPct val="110000"/>
               </a:lnSpc>
@@ -1690,8 +2194,16 @@
                 <a:spcPts val="2105"/>
               </a:spcAft>
               <a:buChar char="•"/>
+              <a:defRPr sz="3683" b="0">
+                <a:solidFill>
+                  <a:schemeClr val="tx1"/>
+                </a:solidFill>
+                <a:latin typeface="+mn-lt"/>
+                <a:ea typeface="+mn-lt"/>
+                <a:cs typeface="+mn-lt"/>
+              </a:defRPr>
             </a:lvl1pPr>
-            <a:lvl2pPr marL="935550" indent="-400950">
+            <a:lvl2pPr marL="935550" indent="-400950" algn="l">
               <a:lnSpc>
                 <a:spcPct val="110000"/>
               </a:lnSpc>
@@ -1702,8 +2214,16 @@
                 <a:spcPts val="2105"/>
               </a:spcAft>
               <a:buChar char="•"/>
+              <a:defRPr sz="3683" b="0">
+                <a:solidFill>
+                  <a:schemeClr val="tx1"/>
+                </a:solidFill>
+                <a:latin typeface="+mn-lt"/>
+                <a:ea typeface="+mn-lt"/>
+                <a:cs typeface="+mn-lt"/>
+              </a:defRPr>
             </a:lvl2pPr>
-            <a:lvl3pPr marL="1470150" indent="-400950">
+            <a:lvl3pPr marL="1470150" indent="-400950" algn="l">
               <a:lnSpc>
                 <a:spcPct val="110000"/>
               </a:lnSpc>
@@ -1714,8 +2234,16 @@
                 <a:spcPts val="2105"/>
               </a:spcAft>
               <a:buChar char="•"/>
+              <a:defRPr sz="3683" b="0">
+                <a:solidFill>
+                  <a:schemeClr val="tx1"/>
+                </a:solidFill>
+                <a:latin typeface="+mn-lt"/>
+                <a:ea typeface="+mn-lt"/>
+                <a:cs typeface="+mn-lt"/>
+              </a:defRPr>
             </a:lvl3pPr>
-            <a:lvl4pPr marL="2004750" indent="-400950">
+            <a:lvl4pPr marL="2004750" indent="-400950" algn="l">
               <a:lnSpc>
                 <a:spcPct val="110000"/>
               </a:lnSpc>
@@ -1726,8 +2254,16 @@
                 <a:spcPts val="2105"/>
               </a:spcAft>
               <a:buChar char="•"/>
+              <a:defRPr sz="3683" b="0">
+                <a:solidFill>
+                  <a:schemeClr val="tx1"/>
+                </a:solidFill>
+                <a:latin typeface="+mn-lt"/>
+                <a:ea typeface="+mn-lt"/>
+                <a:cs typeface="+mn-lt"/>
+              </a:defRPr>
             </a:lvl4pPr>
-            <a:lvl5pPr marL="2539350" indent="-400950">
+            <a:lvl5pPr marL="2539350" indent="-400950" algn="l">
               <a:lnSpc>
                 <a:spcPct val="110000"/>
               </a:lnSpc>
@@ -1738,8 +2274,16 @@
                 <a:spcPts val="2105"/>
               </a:spcAft>
               <a:buChar char="•"/>
+              <a:defRPr sz="3683" b="0">
+                <a:solidFill>
+                  <a:schemeClr val="tx1"/>
+                </a:solidFill>
+                <a:latin typeface="+mn-lt"/>
+                <a:ea typeface="+mn-lt"/>
+                <a:cs typeface="+mn-lt"/>
+              </a:defRPr>
             </a:lvl5pPr>
-            <a:lvl6pPr marL="3073950" indent="-400950">
+            <a:lvl6pPr marL="3073950" indent="-400950" algn="l">
               <a:lnSpc>
                 <a:spcPct val="110000"/>
               </a:lnSpc>
@@ -1750,8 +2294,16 @@
                 <a:spcPts val="2105"/>
               </a:spcAft>
               <a:buChar char="•"/>
+              <a:defRPr sz="3683" b="0">
+                <a:solidFill>
+                  <a:schemeClr val="tx1"/>
+                </a:solidFill>
+                <a:latin typeface="+mn-lt"/>
+                <a:ea typeface="+mn-lt"/>
+                <a:cs typeface="+mn-lt"/>
+              </a:defRPr>
             </a:lvl6pPr>
-            <a:lvl7pPr marL="3608550" indent="-400950">
+            <a:lvl7pPr marL="3608550" indent="-400950" algn="l">
               <a:lnSpc>
                 <a:spcPct val="110000"/>
               </a:lnSpc>
@@ -1762,8 +2314,16 @@
                 <a:spcPts val="2105"/>
               </a:spcAft>
               <a:buChar char="•"/>
+              <a:defRPr sz="3683" b="0">
+                <a:solidFill>
+                  <a:schemeClr val="tx1"/>
+                </a:solidFill>
+                <a:latin typeface="+mn-lt"/>
+                <a:ea typeface="+mn-lt"/>
+                <a:cs typeface="+mn-lt"/>
+              </a:defRPr>
             </a:lvl7pPr>
-            <a:lvl8pPr marL="4143150" indent="-400950">
+            <a:lvl8pPr marL="4143150" indent="-400950" algn="l">
               <a:lnSpc>
                 <a:spcPct val="110000"/>
               </a:lnSpc>
@@ -1774,8 +2334,16 @@
                 <a:spcPts val="2105"/>
               </a:spcAft>
               <a:buChar char="•"/>
+              <a:defRPr sz="3683" b="0">
+                <a:solidFill>
+                  <a:schemeClr val="tx1"/>
+                </a:solidFill>
+                <a:latin typeface="+mn-lt"/>
+                <a:ea typeface="+mn-lt"/>
+                <a:cs typeface="+mn-lt"/>
+              </a:defRPr>
             </a:lvl8pPr>
-            <a:lvl9pPr marL="4677750" indent="-400950">
+            <a:lvl9pPr marL="4677750" indent="-400950" algn="l">
               <a:lnSpc>
                 <a:spcPct val="110000"/>
               </a:lnSpc>
@@ -1786,6 +2354,14 @@
                 <a:spcPts val="2105"/>
               </a:spcAft>
               <a:buChar char="•"/>
+              <a:defRPr sz="3683" b="0">
+                <a:solidFill>
+                  <a:schemeClr val="tx1"/>
+                </a:solidFill>
+                <a:latin typeface="+mn-lt"/>
+                <a:ea typeface="+mn-lt"/>
+                <a:cs typeface="+mn-lt"/>
+              </a:defRPr>
             </a:lvl9pPr>
           </a:lstStyle>
           <a:p xmlns:a="http://schemas.openxmlformats.org/drawingml/2006/main"/>
@@ -1853,7 +2429,7 @@
                 <a:cs typeface="+mj-lt"/>
               </a:defRPr>
             </a:defPPr>
-            <a:lvl1pPr marL="0" indent="0">
+            <a:lvl1pPr marL="0" indent="0" algn="l">
               <a:lnSpc>
                 <a:spcPct val="110000"/>
               </a:lnSpc>
@@ -1864,8 +2440,16 @@
                 <a:spcPts val="0"/>
               </a:spcAft>
               <a:buNone/>
+              <a:defRPr sz="5788" b="1">
+                <a:solidFill>
+                  <a:schemeClr val="tx1"/>
+                </a:solidFill>
+                <a:latin typeface="+mj-lt"/>
+                <a:ea typeface="+mj-lt"/>
+                <a:cs typeface="+mj-lt"/>
+              </a:defRPr>
             </a:lvl1pPr>
-            <a:lvl2pPr marL="0" indent="0">
+            <a:lvl2pPr marL="0" indent="0" algn="l">
               <a:lnSpc>
                 <a:spcPct val="110000"/>
               </a:lnSpc>
@@ -1876,8 +2460,16 @@
                 <a:spcPts val="0"/>
               </a:spcAft>
               <a:buNone/>
+              <a:defRPr sz="5788" b="1">
+                <a:solidFill>
+                  <a:schemeClr val="tx1"/>
+                </a:solidFill>
+                <a:latin typeface="+mj-lt"/>
+                <a:ea typeface="+mj-lt"/>
+                <a:cs typeface="+mj-lt"/>
+              </a:defRPr>
             </a:lvl2pPr>
-            <a:lvl3pPr marL="0" indent="0">
+            <a:lvl3pPr marL="0" indent="0" algn="l">
               <a:lnSpc>
                 <a:spcPct val="110000"/>
               </a:lnSpc>
@@ -1888,8 +2480,16 @@
                 <a:spcPts val="0"/>
               </a:spcAft>
               <a:buNone/>
+              <a:defRPr sz="5788" b="1">
+                <a:solidFill>
+                  <a:schemeClr val="tx1"/>
+                </a:solidFill>
+                <a:latin typeface="+mj-lt"/>
+                <a:ea typeface="+mj-lt"/>
+                <a:cs typeface="+mj-lt"/>
+              </a:defRPr>
             </a:lvl3pPr>
-            <a:lvl4pPr marL="0" indent="0">
+            <a:lvl4pPr marL="0" indent="0" algn="l">
               <a:lnSpc>
                 <a:spcPct val="110000"/>
               </a:lnSpc>
@@ -1900,8 +2500,16 @@
                 <a:spcPts val="0"/>
               </a:spcAft>
               <a:buNone/>
+              <a:defRPr sz="5788" b="1">
+                <a:solidFill>
+                  <a:schemeClr val="tx1"/>
+                </a:solidFill>
+                <a:latin typeface="+mj-lt"/>
+                <a:ea typeface="+mj-lt"/>
+                <a:cs typeface="+mj-lt"/>
+              </a:defRPr>
             </a:lvl4pPr>
-            <a:lvl5pPr marL="0" indent="0">
+            <a:lvl5pPr marL="0" indent="0" algn="l">
               <a:lnSpc>
                 <a:spcPct val="110000"/>
               </a:lnSpc>
@@ -1912,8 +2520,16 @@
                 <a:spcPts val="0"/>
               </a:spcAft>
               <a:buNone/>
+              <a:defRPr sz="5788" b="1">
+                <a:solidFill>
+                  <a:schemeClr val="tx1"/>
+                </a:solidFill>
+                <a:latin typeface="+mj-lt"/>
+                <a:ea typeface="+mj-lt"/>
+                <a:cs typeface="+mj-lt"/>
+              </a:defRPr>
             </a:lvl5pPr>
-            <a:lvl6pPr marL="0" indent="0">
+            <a:lvl6pPr marL="0" indent="0" algn="l">
               <a:lnSpc>
                 <a:spcPct val="110000"/>
               </a:lnSpc>
@@ -1924,8 +2540,16 @@
                 <a:spcPts val="0"/>
               </a:spcAft>
               <a:buNone/>
+              <a:defRPr sz="5788" b="1">
+                <a:solidFill>
+                  <a:schemeClr val="tx1"/>
+                </a:solidFill>
+                <a:latin typeface="+mj-lt"/>
+                <a:ea typeface="+mj-lt"/>
+                <a:cs typeface="+mj-lt"/>
+              </a:defRPr>
             </a:lvl6pPr>
-            <a:lvl7pPr marL="0" indent="0">
+            <a:lvl7pPr marL="0" indent="0" algn="l">
               <a:lnSpc>
                 <a:spcPct val="110000"/>
               </a:lnSpc>
@@ -1936,8 +2560,16 @@
                 <a:spcPts val="0"/>
               </a:spcAft>
               <a:buNone/>
+              <a:defRPr sz="5788" b="1">
+                <a:solidFill>
+                  <a:schemeClr val="tx1"/>
+                </a:solidFill>
+                <a:latin typeface="+mj-lt"/>
+                <a:ea typeface="+mj-lt"/>
+                <a:cs typeface="+mj-lt"/>
+              </a:defRPr>
             </a:lvl7pPr>
-            <a:lvl8pPr marL="0" indent="0">
+            <a:lvl8pPr marL="0" indent="0" algn="l">
               <a:lnSpc>
                 <a:spcPct val="110000"/>
               </a:lnSpc>
@@ -1948,8 +2580,16 @@
                 <a:spcPts val="0"/>
               </a:spcAft>
               <a:buNone/>
+              <a:defRPr sz="5788" b="1">
+                <a:solidFill>
+                  <a:schemeClr val="tx1"/>
+                </a:solidFill>
+                <a:latin typeface="+mj-lt"/>
+                <a:ea typeface="+mj-lt"/>
+                <a:cs typeface="+mj-lt"/>
+              </a:defRPr>
             </a:lvl8pPr>
-            <a:lvl9pPr marL="0" indent="0">
+            <a:lvl9pPr marL="0" indent="0" algn="l">
               <a:lnSpc>
                 <a:spcPct val="110000"/>
               </a:lnSpc>
@@ -1960,6 +2600,14 @@
                 <a:spcPts val="0"/>
               </a:spcAft>
               <a:buNone/>
+              <a:defRPr sz="5788" b="1">
+                <a:solidFill>
+                  <a:schemeClr val="tx1"/>
+                </a:solidFill>
+                <a:latin typeface="+mj-lt"/>
+                <a:ea typeface="+mj-lt"/>
+                <a:cs typeface="+mj-lt"/>
+              </a:defRPr>
             </a:lvl9pPr>
           </a:lstStyle>
           <a:p xmlns:a="http://schemas.openxmlformats.org/drawingml/2006/main"/>
@@ -2010,7 +2658,7 @@
                 <a:cs typeface="+mn-lt"/>
               </a:defRPr>
             </a:defPPr>
-            <a:lvl1pPr marL="400950" indent="-400950">
+            <a:lvl1pPr marL="400950" indent="-400950" algn="l">
               <a:lnSpc>
                 <a:spcPct val="110000"/>
               </a:lnSpc>
@@ -2021,8 +2669,16 @@
                 <a:spcPts val="2105"/>
               </a:spcAft>
               <a:buChar char="•"/>
+              <a:defRPr sz="3946" b="0">
+                <a:solidFill>
+                  <a:schemeClr val="tx1"/>
+                </a:solidFill>
+                <a:latin typeface="+mn-lt"/>
+                <a:ea typeface="+mn-lt"/>
+                <a:cs typeface="+mn-lt"/>
+              </a:defRPr>
             </a:lvl1pPr>
-            <a:lvl2pPr marL="935550" indent="-400950">
+            <a:lvl2pPr marL="935550" indent="-400950" algn="l">
               <a:lnSpc>
                 <a:spcPct val="110000"/>
               </a:lnSpc>
@@ -2033,8 +2689,16 @@
                 <a:spcPts val="2105"/>
               </a:spcAft>
               <a:buChar char="•"/>
+              <a:defRPr sz="3946" b="0">
+                <a:solidFill>
+                  <a:schemeClr val="tx1"/>
+                </a:solidFill>
+                <a:latin typeface="+mn-lt"/>
+                <a:ea typeface="+mn-lt"/>
+                <a:cs typeface="+mn-lt"/>
+              </a:defRPr>
             </a:lvl2pPr>
-            <a:lvl3pPr marL="1470150" indent="-400950">
+            <a:lvl3pPr marL="1470150" indent="-400950" algn="l">
               <a:lnSpc>
                 <a:spcPct val="110000"/>
               </a:lnSpc>
@@ -2045,8 +2709,16 @@
                 <a:spcPts val="2105"/>
               </a:spcAft>
               <a:buChar char="•"/>
+              <a:defRPr sz="3946" b="0">
+                <a:solidFill>
+                  <a:schemeClr val="tx1"/>
+                </a:solidFill>
+                <a:latin typeface="+mn-lt"/>
+                <a:ea typeface="+mn-lt"/>
+                <a:cs typeface="+mn-lt"/>
+              </a:defRPr>
             </a:lvl3pPr>
-            <a:lvl4pPr marL="2004750" indent="-400950">
+            <a:lvl4pPr marL="2004750" indent="-400950" algn="l">
               <a:lnSpc>
                 <a:spcPct val="110000"/>
               </a:lnSpc>
@@ -2057,8 +2729,16 @@
                 <a:spcPts val="2105"/>
               </a:spcAft>
               <a:buChar char="•"/>
+              <a:defRPr sz="3946" b="0">
+                <a:solidFill>
+                  <a:schemeClr val="tx1"/>
+                </a:solidFill>
+                <a:latin typeface="+mn-lt"/>
+                <a:ea typeface="+mn-lt"/>
+                <a:cs typeface="+mn-lt"/>
+              </a:defRPr>
             </a:lvl4pPr>
-            <a:lvl5pPr marL="2539350" indent="-400950">
+            <a:lvl5pPr marL="2539350" indent="-400950" algn="l">
               <a:lnSpc>
                 <a:spcPct val="110000"/>
               </a:lnSpc>
@@ -2069,8 +2749,16 @@
                 <a:spcPts val="2105"/>
               </a:spcAft>
               <a:buChar char="•"/>
+              <a:defRPr sz="3946" b="0">
+                <a:solidFill>
+                  <a:schemeClr val="tx1"/>
+                </a:solidFill>
+                <a:latin typeface="+mn-lt"/>
+                <a:ea typeface="+mn-lt"/>
+                <a:cs typeface="+mn-lt"/>
+              </a:defRPr>
             </a:lvl5pPr>
-            <a:lvl6pPr marL="3073950" indent="-400950">
+            <a:lvl6pPr marL="3073950" indent="-400950" algn="l">
               <a:lnSpc>
                 <a:spcPct val="110000"/>
               </a:lnSpc>
@@ -2081,8 +2769,16 @@
                 <a:spcPts val="2105"/>
               </a:spcAft>
               <a:buChar char="•"/>
+              <a:defRPr sz="3946" b="0">
+                <a:solidFill>
+                  <a:schemeClr val="tx1"/>
+                </a:solidFill>
+                <a:latin typeface="+mn-lt"/>
+                <a:ea typeface="+mn-lt"/>
+                <a:cs typeface="+mn-lt"/>
+              </a:defRPr>
             </a:lvl6pPr>
-            <a:lvl7pPr marL="3608550" indent="-400950">
+            <a:lvl7pPr marL="3608550" indent="-400950" algn="l">
               <a:lnSpc>
                 <a:spcPct val="110000"/>
               </a:lnSpc>
@@ -2093,8 +2789,16 @@
                 <a:spcPts val="2105"/>
               </a:spcAft>
               <a:buChar char="•"/>
+              <a:defRPr sz="3946" b="0">
+                <a:solidFill>
+                  <a:schemeClr val="tx1"/>
+                </a:solidFill>
+                <a:latin typeface="+mn-lt"/>
+                <a:ea typeface="+mn-lt"/>
+                <a:cs typeface="+mn-lt"/>
+              </a:defRPr>
             </a:lvl7pPr>
-            <a:lvl8pPr marL="4143150" indent="-400950">
+            <a:lvl8pPr marL="4143150" indent="-400950" algn="l">
               <a:lnSpc>
                 <a:spcPct val="110000"/>
               </a:lnSpc>
@@ -2105,8 +2809,16 @@
                 <a:spcPts val="2105"/>
               </a:spcAft>
               <a:buChar char="•"/>
+              <a:defRPr sz="3946" b="0">
+                <a:solidFill>
+                  <a:schemeClr val="tx1"/>
+                </a:solidFill>
+                <a:latin typeface="+mn-lt"/>
+                <a:ea typeface="+mn-lt"/>
+                <a:cs typeface="+mn-lt"/>
+              </a:defRPr>
             </a:lvl8pPr>
-            <a:lvl9pPr marL="4677750" indent="-400950">
+            <a:lvl9pPr marL="4677750" indent="-400950" algn="l">
               <a:lnSpc>
                 <a:spcPct val="110000"/>
               </a:lnSpc>
@@ -2117,6 +2829,14 @@
                 <a:spcPts val="2105"/>
               </a:spcAft>
               <a:buChar char="•"/>
+              <a:defRPr sz="3946" b="0">
+                <a:solidFill>
+                  <a:schemeClr val="tx1"/>
+                </a:solidFill>
+                <a:latin typeface="+mn-lt"/>
+                <a:ea typeface="+mn-lt"/>
+                <a:cs typeface="+mn-lt"/>
+              </a:defRPr>
             </a:lvl9pPr>
           </a:lstStyle>
           <a:p xmlns:a="http://schemas.openxmlformats.org/drawingml/2006/main"/>
@@ -2165,12 +2885,12 @@
   </p:cSld>
   <p:clrMap bg1="lt1" tx1="dk1" bg2="lt2" tx2="dk2" accent1="accent1" accent2="accent2" accent3="accent3" accent4="accent4" accent5="accent5" accent6="accent6" hlink="hlink" folHlink="folHlink"/>
   <p:sldLayoutIdLst>
-    <p:sldLayoutId xmlns:r="http://schemas.openxmlformats.org/officeDocument/2006/relationships" id="2147483649" r:id="Rf857f396295c43c2"/>
-    <p:sldLayoutId xmlns:r="http://schemas.openxmlformats.org/officeDocument/2006/relationships" id="2147483650" r:id="Rc7972f5c0d854c31"/>
-    <p:sldLayoutId xmlns:r="http://schemas.openxmlformats.org/officeDocument/2006/relationships" id="2147483651" r:id="Rdfe4df60e88e4982"/>
-    <p:sldLayoutId xmlns:r="http://schemas.openxmlformats.org/officeDocument/2006/relationships" id="2147483652" r:id="R32f3c1265a244fe4"/>
-    <p:sldLayoutId xmlns:r="http://schemas.openxmlformats.org/officeDocument/2006/relationships" id="2147483653" r:id="R1b1196517acb4894"/>
-    <p:sldLayoutId xmlns:r="http://schemas.openxmlformats.org/officeDocument/2006/relationships" id="2147483654" r:id="R0993f68c06244e85"/>
+    <p:sldLayoutId xmlns:r="http://schemas.openxmlformats.org/officeDocument/2006/relationships" id="2147483649" r:id="R95710aeefba64c27"/>
+    <p:sldLayoutId xmlns:r="http://schemas.openxmlformats.org/officeDocument/2006/relationships" id="2147483650" r:id="Rf712e709639e4f80"/>
+    <p:sldLayoutId xmlns:r="http://schemas.openxmlformats.org/officeDocument/2006/relationships" id="2147483651" r:id="R29734f7a68a84798"/>
+    <p:sldLayoutId xmlns:r="http://schemas.openxmlformats.org/officeDocument/2006/relationships" id="2147483652" r:id="R9d52fba0e0bf461a"/>
+    <p:sldLayoutId xmlns:r="http://schemas.openxmlformats.org/officeDocument/2006/relationships" id="2147483653" r:id="Ra2ed83a587e6470f"/>
+    <p:sldLayoutId xmlns:r="http://schemas.openxmlformats.org/officeDocument/2006/relationships" id="2147483654" r:id="Rd555bde63c2d4c94"/>
   </p:sldLayoutIdLst>
   <p:txStyles>
     <p:titleStyle>
@@ -2789,9 +3509,100 @@
                 <a:cs typeface="Malgun Gothic"/>
               </a:defRPr>
             </a:defPPr>
+            <a:lvl1pPr algn="ctr">
+              <a:defRPr sz="5200" b="0">
+                <a:solidFill>
+                  <a:srgbClr val="FFFFFF"/>
+                </a:solidFill>
+                <a:latin typeface="Malgun Gothic"/>
+                <a:ea typeface="Malgun Gothic"/>
+                <a:cs typeface="Malgun Gothic"/>
+              </a:defRPr>
+            </a:lvl1pPr>
+            <a:lvl2pPr algn="ctr">
+              <a:defRPr sz="5200" b="0">
+                <a:solidFill>
+                  <a:srgbClr val="FFFFFF"/>
+                </a:solidFill>
+                <a:latin typeface="Malgun Gothic"/>
+                <a:ea typeface="Malgun Gothic"/>
+                <a:cs typeface="Malgun Gothic"/>
+              </a:defRPr>
+            </a:lvl2pPr>
+            <a:lvl3pPr algn="ctr">
+              <a:defRPr sz="5200" b="0">
+                <a:solidFill>
+                  <a:srgbClr val="FFFFFF"/>
+                </a:solidFill>
+                <a:latin typeface="Malgun Gothic"/>
+                <a:ea typeface="Malgun Gothic"/>
+                <a:cs typeface="Malgun Gothic"/>
+              </a:defRPr>
+            </a:lvl3pPr>
+            <a:lvl4pPr algn="ctr">
+              <a:defRPr sz="5200" b="0">
+                <a:solidFill>
+                  <a:srgbClr val="FFFFFF"/>
+                </a:solidFill>
+                <a:latin typeface="Malgun Gothic"/>
+                <a:ea typeface="Malgun Gothic"/>
+                <a:cs typeface="Malgun Gothic"/>
+              </a:defRPr>
+            </a:lvl4pPr>
+            <a:lvl5pPr algn="ctr">
+              <a:defRPr sz="5200" b="0">
+                <a:solidFill>
+                  <a:srgbClr val="FFFFFF"/>
+                </a:solidFill>
+                <a:latin typeface="Malgun Gothic"/>
+                <a:ea typeface="Malgun Gothic"/>
+                <a:cs typeface="Malgun Gothic"/>
+              </a:defRPr>
+            </a:lvl5pPr>
+            <a:lvl6pPr algn="ctr">
+              <a:defRPr sz="5200" b="0">
+                <a:solidFill>
+                  <a:srgbClr val="FFFFFF"/>
+                </a:solidFill>
+                <a:latin typeface="Malgun Gothic"/>
+                <a:ea typeface="Malgun Gothic"/>
+                <a:cs typeface="Malgun Gothic"/>
+              </a:defRPr>
+            </a:lvl6pPr>
+            <a:lvl7pPr algn="ctr">
+              <a:defRPr sz="5200" b="0">
+                <a:solidFill>
+                  <a:srgbClr val="FFFFFF"/>
+                </a:solidFill>
+                <a:latin typeface="Malgun Gothic"/>
+                <a:ea typeface="Malgun Gothic"/>
+                <a:cs typeface="Malgun Gothic"/>
+              </a:defRPr>
+            </a:lvl7pPr>
+            <a:lvl8pPr algn="ctr">
+              <a:defRPr sz="5200" b="0">
+                <a:solidFill>
+                  <a:srgbClr val="FFFFFF"/>
+                </a:solidFill>
+                <a:latin typeface="Malgun Gothic"/>
+                <a:ea typeface="Malgun Gothic"/>
+                <a:cs typeface="Malgun Gothic"/>
+              </a:defRPr>
+            </a:lvl8pPr>
+            <a:lvl9pPr algn="ctr">
+              <a:defRPr sz="5200" b="0">
+                <a:solidFill>
+                  <a:srgbClr val="FFFFFF"/>
+                </a:solidFill>
+                <a:latin typeface="Malgun Gothic"/>
+                <a:ea typeface="Malgun Gothic"/>
+                <a:cs typeface="Malgun Gothic"/>
+              </a:defRPr>
+            </a:lvl9pPr>
           </a:lstStyle>
           <a:p xmlns:a="http://schemas.openxmlformats.org/drawingml/2006/main">
             <a:pPr algn="ctr">
+              <a:buNone/>
               <a:defRPr sz="5200" b="0">
                 <a:solidFill>
                   <a:srgbClr val="FFFFFF"/>
@@ -2857,9 +3668,100 @@
                 <a:cs typeface="Malgun Gothic"/>
               </a:defRPr>
             </a:defPPr>
+            <a:lvl1pPr algn="ctr">
+              <a:defRPr sz="5200" b="0">
+                <a:solidFill>
+                  <a:srgbClr val="FFFFFF"/>
+                </a:solidFill>
+                <a:latin typeface="Malgun Gothic"/>
+                <a:ea typeface="Malgun Gothic"/>
+                <a:cs typeface="Malgun Gothic"/>
+              </a:defRPr>
+            </a:lvl1pPr>
+            <a:lvl2pPr algn="ctr">
+              <a:defRPr sz="5200" b="0">
+                <a:solidFill>
+                  <a:srgbClr val="FFFFFF"/>
+                </a:solidFill>
+                <a:latin typeface="Malgun Gothic"/>
+                <a:ea typeface="Malgun Gothic"/>
+                <a:cs typeface="Malgun Gothic"/>
+              </a:defRPr>
+            </a:lvl2pPr>
+            <a:lvl3pPr algn="ctr">
+              <a:defRPr sz="5200" b="0">
+                <a:solidFill>
+                  <a:srgbClr val="FFFFFF"/>
+                </a:solidFill>
+                <a:latin typeface="Malgun Gothic"/>
+                <a:ea typeface="Malgun Gothic"/>
+                <a:cs typeface="Malgun Gothic"/>
+              </a:defRPr>
+            </a:lvl3pPr>
+            <a:lvl4pPr algn="ctr">
+              <a:defRPr sz="5200" b="0">
+                <a:solidFill>
+                  <a:srgbClr val="FFFFFF"/>
+                </a:solidFill>
+                <a:latin typeface="Malgun Gothic"/>
+                <a:ea typeface="Malgun Gothic"/>
+                <a:cs typeface="Malgun Gothic"/>
+              </a:defRPr>
+            </a:lvl4pPr>
+            <a:lvl5pPr algn="ctr">
+              <a:defRPr sz="5200" b="0">
+                <a:solidFill>
+                  <a:srgbClr val="FFFFFF"/>
+                </a:solidFill>
+                <a:latin typeface="Malgun Gothic"/>
+                <a:ea typeface="Malgun Gothic"/>
+                <a:cs typeface="Malgun Gothic"/>
+              </a:defRPr>
+            </a:lvl5pPr>
+            <a:lvl6pPr algn="ctr">
+              <a:defRPr sz="5200" b="0">
+                <a:solidFill>
+                  <a:srgbClr val="FFFFFF"/>
+                </a:solidFill>
+                <a:latin typeface="Malgun Gothic"/>
+                <a:ea typeface="Malgun Gothic"/>
+                <a:cs typeface="Malgun Gothic"/>
+              </a:defRPr>
+            </a:lvl6pPr>
+            <a:lvl7pPr algn="ctr">
+              <a:defRPr sz="5200" b="0">
+                <a:solidFill>
+                  <a:srgbClr val="FFFFFF"/>
+                </a:solidFill>
+                <a:latin typeface="Malgun Gothic"/>
+                <a:ea typeface="Malgun Gothic"/>
+                <a:cs typeface="Malgun Gothic"/>
+              </a:defRPr>
+            </a:lvl7pPr>
+            <a:lvl8pPr algn="ctr">
+              <a:defRPr sz="5200" b="0">
+                <a:solidFill>
+                  <a:srgbClr val="FFFFFF"/>
+                </a:solidFill>
+                <a:latin typeface="Malgun Gothic"/>
+                <a:ea typeface="Malgun Gothic"/>
+                <a:cs typeface="Malgun Gothic"/>
+              </a:defRPr>
+            </a:lvl8pPr>
+            <a:lvl9pPr algn="ctr">
+              <a:defRPr sz="5200" b="0">
+                <a:solidFill>
+                  <a:srgbClr val="FFFFFF"/>
+                </a:solidFill>
+                <a:latin typeface="Malgun Gothic"/>
+                <a:ea typeface="Malgun Gothic"/>
+                <a:cs typeface="Malgun Gothic"/>
+              </a:defRPr>
+            </a:lvl9pPr>
           </a:lstStyle>
           <a:p xmlns:a="http://schemas.openxmlformats.org/drawingml/2006/main">
             <a:pPr algn="ctr">
+              <a:buNone/>
               <a:defRPr sz="5200" b="0">
                 <a:solidFill>
                   <a:srgbClr val="FFFFFF"/>
@@ -2925,9 +3827,100 @@
                 <a:cs typeface="Malgun Gothic"/>
               </a:defRPr>
             </a:defPPr>
+            <a:lvl1pPr algn="ctr">
+              <a:defRPr sz="2000" b="0">
+                <a:solidFill>
+                  <a:srgbClr val="FFFFFF"/>
+                </a:solidFill>
+                <a:latin typeface="Malgun Gothic"/>
+                <a:ea typeface="Malgun Gothic"/>
+                <a:cs typeface="Malgun Gothic"/>
+              </a:defRPr>
+            </a:lvl1pPr>
+            <a:lvl2pPr algn="ctr">
+              <a:defRPr sz="2000" b="0">
+                <a:solidFill>
+                  <a:srgbClr val="FFFFFF"/>
+                </a:solidFill>
+                <a:latin typeface="Malgun Gothic"/>
+                <a:ea typeface="Malgun Gothic"/>
+                <a:cs typeface="Malgun Gothic"/>
+              </a:defRPr>
+            </a:lvl2pPr>
+            <a:lvl3pPr algn="ctr">
+              <a:defRPr sz="2000" b="0">
+                <a:solidFill>
+                  <a:srgbClr val="FFFFFF"/>
+                </a:solidFill>
+                <a:latin typeface="Malgun Gothic"/>
+                <a:ea typeface="Malgun Gothic"/>
+                <a:cs typeface="Malgun Gothic"/>
+              </a:defRPr>
+            </a:lvl3pPr>
+            <a:lvl4pPr algn="ctr">
+              <a:defRPr sz="2000" b="0">
+                <a:solidFill>
+                  <a:srgbClr val="FFFFFF"/>
+                </a:solidFill>
+                <a:latin typeface="Malgun Gothic"/>
+                <a:ea typeface="Malgun Gothic"/>
+                <a:cs typeface="Malgun Gothic"/>
+              </a:defRPr>
+            </a:lvl4pPr>
+            <a:lvl5pPr algn="ctr">
+              <a:defRPr sz="2000" b="0">
+                <a:solidFill>
+                  <a:srgbClr val="FFFFFF"/>
+                </a:solidFill>
+                <a:latin typeface="Malgun Gothic"/>
+                <a:ea typeface="Malgun Gothic"/>
+                <a:cs typeface="Malgun Gothic"/>
+              </a:defRPr>
+            </a:lvl5pPr>
+            <a:lvl6pPr algn="ctr">
+              <a:defRPr sz="2000" b="0">
+                <a:solidFill>
+                  <a:srgbClr val="FFFFFF"/>
+                </a:solidFill>
+                <a:latin typeface="Malgun Gothic"/>
+                <a:ea typeface="Malgun Gothic"/>
+                <a:cs typeface="Malgun Gothic"/>
+              </a:defRPr>
+            </a:lvl6pPr>
+            <a:lvl7pPr algn="ctr">
+              <a:defRPr sz="2000" b="0">
+                <a:solidFill>
+                  <a:srgbClr val="FFFFFF"/>
+                </a:solidFill>
+                <a:latin typeface="Malgun Gothic"/>
+                <a:ea typeface="Malgun Gothic"/>
+                <a:cs typeface="Malgun Gothic"/>
+              </a:defRPr>
+            </a:lvl7pPr>
+            <a:lvl8pPr algn="ctr">
+              <a:defRPr sz="2000" b="0">
+                <a:solidFill>
+                  <a:srgbClr val="FFFFFF"/>
+                </a:solidFill>
+                <a:latin typeface="Malgun Gothic"/>
+                <a:ea typeface="Malgun Gothic"/>
+                <a:cs typeface="Malgun Gothic"/>
+              </a:defRPr>
+            </a:lvl8pPr>
+            <a:lvl9pPr algn="ctr">
+              <a:defRPr sz="2000" b="0">
+                <a:solidFill>
+                  <a:srgbClr val="FFFFFF"/>
+                </a:solidFill>
+                <a:latin typeface="Malgun Gothic"/>
+                <a:ea typeface="Malgun Gothic"/>
+                <a:cs typeface="Malgun Gothic"/>
+              </a:defRPr>
+            </a:lvl9pPr>
           </a:lstStyle>
           <a:p xmlns:a="http://schemas.openxmlformats.org/drawingml/2006/main">
             <a:pPr algn="ctr">
+              <a:buNone/>
               <a:defRPr sz="2000" b="0">
                 <a:solidFill>
                   <a:srgbClr val="FFFFFF"/>
@@ -3024,9 +4017,100 @@
                 <a:cs typeface="Malgun Gothic"/>
               </a:defRPr>
             </a:defPPr>
+            <a:lvl1pPr algn="l">
+              <a:defRPr sz="2400" b="0">
+                <a:solidFill>
+                  <a:srgbClr val="FFFFFF"/>
+                </a:solidFill>
+                <a:latin typeface="Malgun Gothic"/>
+                <a:ea typeface="Malgun Gothic"/>
+                <a:cs typeface="Malgun Gothic"/>
+              </a:defRPr>
+            </a:lvl1pPr>
+            <a:lvl2pPr algn="l">
+              <a:defRPr sz="2400" b="0">
+                <a:solidFill>
+                  <a:srgbClr val="FFFFFF"/>
+                </a:solidFill>
+                <a:latin typeface="Malgun Gothic"/>
+                <a:ea typeface="Malgun Gothic"/>
+                <a:cs typeface="Malgun Gothic"/>
+              </a:defRPr>
+            </a:lvl2pPr>
+            <a:lvl3pPr algn="l">
+              <a:defRPr sz="2400" b="0">
+                <a:solidFill>
+                  <a:srgbClr val="FFFFFF"/>
+                </a:solidFill>
+                <a:latin typeface="Malgun Gothic"/>
+                <a:ea typeface="Malgun Gothic"/>
+                <a:cs typeface="Malgun Gothic"/>
+              </a:defRPr>
+            </a:lvl3pPr>
+            <a:lvl4pPr algn="l">
+              <a:defRPr sz="2400" b="0">
+                <a:solidFill>
+                  <a:srgbClr val="FFFFFF"/>
+                </a:solidFill>
+                <a:latin typeface="Malgun Gothic"/>
+                <a:ea typeface="Malgun Gothic"/>
+                <a:cs typeface="Malgun Gothic"/>
+              </a:defRPr>
+            </a:lvl4pPr>
+            <a:lvl5pPr algn="l">
+              <a:defRPr sz="2400" b="0">
+                <a:solidFill>
+                  <a:srgbClr val="FFFFFF"/>
+                </a:solidFill>
+                <a:latin typeface="Malgun Gothic"/>
+                <a:ea typeface="Malgun Gothic"/>
+                <a:cs typeface="Malgun Gothic"/>
+              </a:defRPr>
+            </a:lvl5pPr>
+            <a:lvl6pPr algn="l">
+              <a:defRPr sz="2400" b="0">
+                <a:solidFill>
+                  <a:srgbClr val="FFFFFF"/>
+                </a:solidFill>
+                <a:latin typeface="Malgun Gothic"/>
+                <a:ea typeface="Malgun Gothic"/>
+                <a:cs typeface="Malgun Gothic"/>
+              </a:defRPr>
+            </a:lvl6pPr>
+            <a:lvl7pPr algn="l">
+              <a:defRPr sz="2400" b="0">
+                <a:solidFill>
+                  <a:srgbClr val="FFFFFF"/>
+                </a:solidFill>
+                <a:latin typeface="Malgun Gothic"/>
+                <a:ea typeface="Malgun Gothic"/>
+                <a:cs typeface="Malgun Gothic"/>
+              </a:defRPr>
+            </a:lvl7pPr>
+            <a:lvl8pPr algn="l">
+              <a:defRPr sz="2400" b="0">
+                <a:solidFill>
+                  <a:srgbClr val="FFFFFF"/>
+                </a:solidFill>
+                <a:latin typeface="Malgun Gothic"/>
+                <a:ea typeface="Malgun Gothic"/>
+                <a:cs typeface="Malgun Gothic"/>
+              </a:defRPr>
+            </a:lvl8pPr>
+            <a:lvl9pPr algn="l">
+              <a:defRPr sz="2400" b="0">
+                <a:solidFill>
+                  <a:srgbClr val="FFFFFF"/>
+                </a:solidFill>
+                <a:latin typeface="Malgun Gothic"/>
+                <a:ea typeface="Malgun Gothic"/>
+                <a:cs typeface="Malgun Gothic"/>
+              </a:defRPr>
+            </a:lvl9pPr>
           </a:lstStyle>
           <a:p xmlns:a="http://schemas.openxmlformats.org/drawingml/2006/main">
             <a:pPr algn="l">
+              <a:buNone/>
               <a:defRPr sz="2400" b="0">
                 <a:solidFill>
                   <a:srgbClr val="FFFFFF"/>
@@ -3092,9 +4176,100 @@
                 <a:cs typeface="Malgun Gothic"/>
               </a:defRPr>
             </a:defPPr>
+            <a:lvl1pPr algn="l">
+              <a:defRPr sz="1800" b="0">
+                <a:solidFill>
+                  <a:srgbClr val="24324A"/>
+                </a:solidFill>
+                <a:latin typeface="Malgun Gothic"/>
+                <a:ea typeface="Malgun Gothic"/>
+                <a:cs typeface="Malgun Gothic"/>
+              </a:defRPr>
+            </a:lvl1pPr>
+            <a:lvl2pPr algn="l">
+              <a:defRPr sz="1800" b="0">
+                <a:solidFill>
+                  <a:srgbClr val="24324A"/>
+                </a:solidFill>
+                <a:latin typeface="Malgun Gothic"/>
+                <a:ea typeface="Malgun Gothic"/>
+                <a:cs typeface="Malgun Gothic"/>
+              </a:defRPr>
+            </a:lvl2pPr>
+            <a:lvl3pPr algn="l">
+              <a:defRPr sz="1800" b="0">
+                <a:solidFill>
+                  <a:srgbClr val="24324A"/>
+                </a:solidFill>
+                <a:latin typeface="Malgun Gothic"/>
+                <a:ea typeface="Malgun Gothic"/>
+                <a:cs typeface="Malgun Gothic"/>
+              </a:defRPr>
+            </a:lvl3pPr>
+            <a:lvl4pPr algn="l">
+              <a:defRPr sz="1800" b="0">
+                <a:solidFill>
+                  <a:srgbClr val="24324A"/>
+                </a:solidFill>
+                <a:latin typeface="Malgun Gothic"/>
+                <a:ea typeface="Malgun Gothic"/>
+                <a:cs typeface="Malgun Gothic"/>
+              </a:defRPr>
+            </a:lvl4pPr>
+            <a:lvl5pPr algn="l">
+              <a:defRPr sz="1800" b="0">
+                <a:solidFill>
+                  <a:srgbClr val="24324A"/>
+                </a:solidFill>
+                <a:latin typeface="Malgun Gothic"/>
+                <a:ea typeface="Malgun Gothic"/>
+                <a:cs typeface="Malgun Gothic"/>
+              </a:defRPr>
+            </a:lvl5pPr>
+            <a:lvl6pPr algn="l">
+              <a:defRPr sz="1800" b="0">
+                <a:solidFill>
+                  <a:srgbClr val="24324A"/>
+                </a:solidFill>
+                <a:latin typeface="Malgun Gothic"/>
+                <a:ea typeface="Malgun Gothic"/>
+                <a:cs typeface="Malgun Gothic"/>
+              </a:defRPr>
+            </a:lvl6pPr>
+            <a:lvl7pPr algn="l">
+              <a:defRPr sz="1800" b="0">
+                <a:solidFill>
+                  <a:srgbClr val="24324A"/>
+                </a:solidFill>
+                <a:latin typeface="Malgun Gothic"/>
+                <a:ea typeface="Malgun Gothic"/>
+                <a:cs typeface="Malgun Gothic"/>
+              </a:defRPr>
+            </a:lvl7pPr>
+            <a:lvl8pPr algn="l">
+              <a:defRPr sz="1800" b="0">
+                <a:solidFill>
+                  <a:srgbClr val="24324A"/>
+                </a:solidFill>
+                <a:latin typeface="Malgun Gothic"/>
+                <a:ea typeface="Malgun Gothic"/>
+                <a:cs typeface="Malgun Gothic"/>
+              </a:defRPr>
+            </a:lvl8pPr>
+            <a:lvl9pPr algn="l">
+              <a:defRPr sz="1800" b="0">
+                <a:solidFill>
+                  <a:srgbClr val="24324A"/>
+                </a:solidFill>
+                <a:latin typeface="Malgun Gothic"/>
+                <a:ea typeface="Malgun Gothic"/>
+                <a:cs typeface="Malgun Gothic"/>
+              </a:defRPr>
+            </a:lvl9pPr>
           </a:lstStyle>
           <a:p xmlns:a="http://schemas.openxmlformats.org/drawingml/2006/main">
             <a:pPr algn="l">
+              <a:buNone/>
               <a:defRPr sz="1800" b="0">
                 <a:solidFill>
                   <a:srgbClr val="24324A"/>
@@ -3118,6 +4293,7 @@
           </a:p>
           <a:p xmlns:a="http://schemas.openxmlformats.org/drawingml/2006/main">
             <a:pPr algn="l">
+              <a:buNone/>
               <a:defRPr sz="1800" b="0">
                 <a:solidFill>
                   <a:srgbClr val="24324A"/>
@@ -3183,9 +4359,100 @@
                 <a:cs typeface="Malgun Gothic"/>
               </a:defRPr>
             </a:defPPr>
+            <a:lvl1pPr algn="l">
+              <a:defRPr sz="1800" b="0">
+                <a:solidFill>
+                  <a:srgbClr val="24324A"/>
+                </a:solidFill>
+                <a:latin typeface="Malgun Gothic"/>
+                <a:ea typeface="Malgun Gothic"/>
+                <a:cs typeface="Malgun Gothic"/>
+              </a:defRPr>
+            </a:lvl1pPr>
+            <a:lvl2pPr algn="l">
+              <a:defRPr sz="1800" b="0">
+                <a:solidFill>
+                  <a:srgbClr val="24324A"/>
+                </a:solidFill>
+                <a:latin typeface="Malgun Gothic"/>
+                <a:ea typeface="Malgun Gothic"/>
+                <a:cs typeface="Malgun Gothic"/>
+              </a:defRPr>
+            </a:lvl2pPr>
+            <a:lvl3pPr algn="l">
+              <a:defRPr sz="1800" b="0">
+                <a:solidFill>
+                  <a:srgbClr val="24324A"/>
+                </a:solidFill>
+                <a:latin typeface="Malgun Gothic"/>
+                <a:ea typeface="Malgun Gothic"/>
+                <a:cs typeface="Malgun Gothic"/>
+              </a:defRPr>
+            </a:lvl3pPr>
+            <a:lvl4pPr algn="l">
+              <a:defRPr sz="1800" b="0">
+                <a:solidFill>
+                  <a:srgbClr val="24324A"/>
+                </a:solidFill>
+                <a:latin typeface="Malgun Gothic"/>
+                <a:ea typeface="Malgun Gothic"/>
+                <a:cs typeface="Malgun Gothic"/>
+              </a:defRPr>
+            </a:lvl4pPr>
+            <a:lvl5pPr algn="l">
+              <a:defRPr sz="1800" b="0">
+                <a:solidFill>
+                  <a:srgbClr val="24324A"/>
+                </a:solidFill>
+                <a:latin typeface="Malgun Gothic"/>
+                <a:ea typeface="Malgun Gothic"/>
+                <a:cs typeface="Malgun Gothic"/>
+              </a:defRPr>
+            </a:lvl5pPr>
+            <a:lvl6pPr algn="l">
+              <a:defRPr sz="1800" b="0">
+                <a:solidFill>
+                  <a:srgbClr val="24324A"/>
+                </a:solidFill>
+                <a:latin typeface="Malgun Gothic"/>
+                <a:ea typeface="Malgun Gothic"/>
+                <a:cs typeface="Malgun Gothic"/>
+              </a:defRPr>
+            </a:lvl6pPr>
+            <a:lvl7pPr algn="l">
+              <a:defRPr sz="1800" b="0">
+                <a:solidFill>
+                  <a:srgbClr val="24324A"/>
+                </a:solidFill>
+                <a:latin typeface="Malgun Gothic"/>
+                <a:ea typeface="Malgun Gothic"/>
+                <a:cs typeface="Malgun Gothic"/>
+              </a:defRPr>
+            </a:lvl7pPr>
+            <a:lvl8pPr algn="l">
+              <a:defRPr sz="1800" b="0">
+                <a:solidFill>
+                  <a:srgbClr val="24324A"/>
+                </a:solidFill>
+                <a:latin typeface="Malgun Gothic"/>
+                <a:ea typeface="Malgun Gothic"/>
+                <a:cs typeface="Malgun Gothic"/>
+              </a:defRPr>
+            </a:lvl8pPr>
+            <a:lvl9pPr algn="l">
+              <a:defRPr sz="1800" b="0">
+                <a:solidFill>
+                  <a:srgbClr val="24324A"/>
+                </a:solidFill>
+                <a:latin typeface="Malgun Gothic"/>
+                <a:ea typeface="Malgun Gothic"/>
+                <a:cs typeface="Malgun Gothic"/>
+              </a:defRPr>
+            </a:lvl9pPr>
           </a:lstStyle>
           <a:p xmlns:a="http://schemas.openxmlformats.org/drawingml/2006/main">
             <a:pPr algn="l">
+              <a:buNone/>
               <a:defRPr sz="1800" b="0">
                 <a:solidFill>
                   <a:srgbClr val="24324A"/>
@@ -3209,6 +4476,7 @@
           </a:p>
           <a:p xmlns:a="http://schemas.openxmlformats.org/drawingml/2006/main">
             <a:pPr algn="l">
+              <a:buNone/>
               <a:defRPr sz="1800" b="0">
                 <a:solidFill>
                   <a:srgbClr val="24324A"/>
@@ -3232,6 +4500,7 @@
           </a:p>
           <a:p xmlns:a="http://schemas.openxmlformats.org/drawingml/2006/main">
             <a:pPr algn="l">
+              <a:buNone/>
               <a:defRPr sz="1800" b="0">
                 <a:solidFill>
                   <a:srgbClr val="24324A"/>
@@ -3255,6 +4524,7 @@
           </a:p>
           <a:p xmlns:a="http://schemas.openxmlformats.org/drawingml/2006/main">
             <a:pPr algn="l">
+              <a:buNone/>
               <a:defRPr sz="1800" b="0">
                 <a:solidFill>
                   <a:srgbClr val="24324A"/>
@@ -3278,6 +4548,7 @@
           </a:p>
           <a:p xmlns:a="http://schemas.openxmlformats.org/drawingml/2006/main">
             <a:pPr algn="l">
+              <a:buNone/>
               <a:defRPr sz="1800" b="0">
                 <a:solidFill>
                   <a:srgbClr val="24324A"/>
@@ -3301,6 +4572,7 @@
           </a:p>
           <a:p xmlns:a="http://schemas.openxmlformats.org/drawingml/2006/main">
             <a:pPr algn="l">
+              <a:buNone/>
               <a:defRPr sz="1800" b="0">
                 <a:solidFill>
                   <a:srgbClr val="24324A"/>
@@ -3366,9 +4638,100 @@
                 <a:cs typeface="Malgun Gothic"/>
               </a:defRPr>
             </a:defPPr>
+            <a:lvl1pPr algn="l">
+              <a:defRPr sz="1800" b="1">
+                <a:solidFill>
+                  <a:srgbClr val="24324A"/>
+                </a:solidFill>
+                <a:latin typeface="Malgun Gothic"/>
+                <a:ea typeface="Malgun Gothic"/>
+                <a:cs typeface="Malgun Gothic"/>
+              </a:defRPr>
+            </a:lvl1pPr>
+            <a:lvl2pPr algn="l">
+              <a:defRPr sz="1800" b="1">
+                <a:solidFill>
+                  <a:srgbClr val="24324A"/>
+                </a:solidFill>
+                <a:latin typeface="Malgun Gothic"/>
+                <a:ea typeface="Malgun Gothic"/>
+                <a:cs typeface="Malgun Gothic"/>
+              </a:defRPr>
+            </a:lvl2pPr>
+            <a:lvl3pPr algn="l">
+              <a:defRPr sz="1800" b="1">
+                <a:solidFill>
+                  <a:srgbClr val="24324A"/>
+                </a:solidFill>
+                <a:latin typeface="Malgun Gothic"/>
+                <a:ea typeface="Malgun Gothic"/>
+                <a:cs typeface="Malgun Gothic"/>
+              </a:defRPr>
+            </a:lvl3pPr>
+            <a:lvl4pPr algn="l">
+              <a:defRPr sz="1800" b="1">
+                <a:solidFill>
+                  <a:srgbClr val="24324A"/>
+                </a:solidFill>
+                <a:latin typeface="Malgun Gothic"/>
+                <a:ea typeface="Malgun Gothic"/>
+                <a:cs typeface="Malgun Gothic"/>
+              </a:defRPr>
+            </a:lvl4pPr>
+            <a:lvl5pPr algn="l">
+              <a:defRPr sz="1800" b="1">
+                <a:solidFill>
+                  <a:srgbClr val="24324A"/>
+                </a:solidFill>
+                <a:latin typeface="Malgun Gothic"/>
+                <a:ea typeface="Malgun Gothic"/>
+                <a:cs typeface="Malgun Gothic"/>
+              </a:defRPr>
+            </a:lvl5pPr>
+            <a:lvl6pPr algn="l">
+              <a:defRPr sz="1800" b="1">
+                <a:solidFill>
+                  <a:srgbClr val="24324A"/>
+                </a:solidFill>
+                <a:latin typeface="Malgun Gothic"/>
+                <a:ea typeface="Malgun Gothic"/>
+                <a:cs typeface="Malgun Gothic"/>
+              </a:defRPr>
+            </a:lvl6pPr>
+            <a:lvl7pPr algn="l">
+              <a:defRPr sz="1800" b="1">
+                <a:solidFill>
+                  <a:srgbClr val="24324A"/>
+                </a:solidFill>
+                <a:latin typeface="Malgun Gothic"/>
+                <a:ea typeface="Malgun Gothic"/>
+                <a:cs typeface="Malgun Gothic"/>
+              </a:defRPr>
+            </a:lvl7pPr>
+            <a:lvl8pPr algn="l">
+              <a:defRPr sz="1800" b="1">
+                <a:solidFill>
+                  <a:srgbClr val="24324A"/>
+                </a:solidFill>
+                <a:latin typeface="Malgun Gothic"/>
+                <a:ea typeface="Malgun Gothic"/>
+                <a:cs typeface="Malgun Gothic"/>
+              </a:defRPr>
+            </a:lvl8pPr>
+            <a:lvl9pPr algn="l">
+              <a:defRPr sz="1800" b="1">
+                <a:solidFill>
+                  <a:srgbClr val="24324A"/>
+                </a:solidFill>
+                <a:latin typeface="Malgun Gothic"/>
+                <a:ea typeface="Malgun Gothic"/>
+                <a:cs typeface="Malgun Gothic"/>
+              </a:defRPr>
+            </a:lvl9pPr>
           </a:lstStyle>
           <a:p xmlns:a="http://schemas.openxmlformats.org/drawingml/2006/main">
             <a:pPr algn="l">
+              <a:buNone/>
               <a:defRPr sz="1800" b="1">
                 <a:solidFill>
                   <a:srgbClr val="24324A"/>
@@ -3392,6 +4755,7 @@
           </a:p>
           <a:p xmlns:a="http://schemas.openxmlformats.org/drawingml/2006/main">
             <a:pPr algn="l">
+              <a:buNone/>
               <a:defRPr sz="1800" b="1">
                 <a:solidFill>
                   <a:srgbClr val="24324A"/>
@@ -3410,11 +4774,12 @@
                 <a:ea typeface="Malgun Gothic"/>
                 <a:cs typeface="Malgun Gothic"/>
               </a:rPr>
-              <a:t>본 연구는 한국어 질의–영어 근거의 표현·출력 언어 문제를</a:t>
+              <a:t>한국어 질의–영어 문서 환경에서 HyDE·CAD·SCD의</a:t>
             </a:r>
           </a:p>
           <a:p xmlns:a="http://schemas.openxmlformats.org/drawingml/2006/main">
             <a:pPr algn="l">
+              <a:buNone/>
               <a:defRPr sz="1800" b="1">
                 <a:solidFill>
                   <a:srgbClr val="24324A"/>
@@ -3433,7 +4798,7 @@
                 <a:ea typeface="Malgun Gothic"/>
                 <a:cs typeface="Malgun Gothic"/>
               </a:rPr>
-              <a:t>동일 파이프라인에서 세 기법의 개별·조합 효과로 비교한다.</a:t>
+              <a:t>개별 차이와 조합 효과를 같은 파이프라인에서 비교하였다.</a:t>
             </a:r>
           </a:p>
         </p:txBody>
@@ -3511,9 +4876,100 @@
                 <a:cs typeface="Malgun Gothic"/>
               </a:defRPr>
             </a:defPPr>
+            <a:lvl1pPr algn="l">
+              <a:defRPr sz="2400" b="0">
+                <a:solidFill>
+                  <a:srgbClr val="FFFFFF"/>
+                </a:solidFill>
+                <a:latin typeface="Malgun Gothic"/>
+                <a:ea typeface="Malgun Gothic"/>
+                <a:cs typeface="Malgun Gothic"/>
+              </a:defRPr>
+            </a:lvl1pPr>
+            <a:lvl2pPr algn="l">
+              <a:defRPr sz="2400" b="0">
+                <a:solidFill>
+                  <a:srgbClr val="FFFFFF"/>
+                </a:solidFill>
+                <a:latin typeface="Malgun Gothic"/>
+                <a:ea typeface="Malgun Gothic"/>
+                <a:cs typeface="Malgun Gothic"/>
+              </a:defRPr>
+            </a:lvl2pPr>
+            <a:lvl3pPr algn="l">
+              <a:defRPr sz="2400" b="0">
+                <a:solidFill>
+                  <a:srgbClr val="FFFFFF"/>
+                </a:solidFill>
+                <a:latin typeface="Malgun Gothic"/>
+                <a:ea typeface="Malgun Gothic"/>
+                <a:cs typeface="Malgun Gothic"/>
+              </a:defRPr>
+            </a:lvl3pPr>
+            <a:lvl4pPr algn="l">
+              <a:defRPr sz="2400" b="0">
+                <a:solidFill>
+                  <a:srgbClr val="FFFFFF"/>
+                </a:solidFill>
+                <a:latin typeface="Malgun Gothic"/>
+                <a:ea typeface="Malgun Gothic"/>
+                <a:cs typeface="Malgun Gothic"/>
+              </a:defRPr>
+            </a:lvl4pPr>
+            <a:lvl5pPr algn="l">
+              <a:defRPr sz="2400" b="0">
+                <a:solidFill>
+                  <a:srgbClr val="FFFFFF"/>
+                </a:solidFill>
+                <a:latin typeface="Malgun Gothic"/>
+                <a:ea typeface="Malgun Gothic"/>
+                <a:cs typeface="Malgun Gothic"/>
+              </a:defRPr>
+            </a:lvl5pPr>
+            <a:lvl6pPr algn="l">
+              <a:defRPr sz="2400" b="0">
+                <a:solidFill>
+                  <a:srgbClr val="FFFFFF"/>
+                </a:solidFill>
+                <a:latin typeface="Malgun Gothic"/>
+                <a:ea typeface="Malgun Gothic"/>
+                <a:cs typeface="Malgun Gothic"/>
+              </a:defRPr>
+            </a:lvl6pPr>
+            <a:lvl7pPr algn="l">
+              <a:defRPr sz="2400" b="0">
+                <a:solidFill>
+                  <a:srgbClr val="FFFFFF"/>
+                </a:solidFill>
+                <a:latin typeface="Malgun Gothic"/>
+                <a:ea typeface="Malgun Gothic"/>
+                <a:cs typeface="Malgun Gothic"/>
+              </a:defRPr>
+            </a:lvl7pPr>
+            <a:lvl8pPr algn="l">
+              <a:defRPr sz="2400" b="0">
+                <a:solidFill>
+                  <a:srgbClr val="FFFFFF"/>
+                </a:solidFill>
+                <a:latin typeface="Malgun Gothic"/>
+                <a:ea typeface="Malgun Gothic"/>
+                <a:cs typeface="Malgun Gothic"/>
+              </a:defRPr>
+            </a:lvl8pPr>
+            <a:lvl9pPr algn="l">
+              <a:defRPr sz="2400" b="0">
+                <a:solidFill>
+                  <a:srgbClr val="FFFFFF"/>
+                </a:solidFill>
+                <a:latin typeface="Malgun Gothic"/>
+                <a:ea typeface="Malgun Gothic"/>
+                <a:cs typeface="Malgun Gothic"/>
+              </a:defRPr>
+            </a:lvl9pPr>
           </a:lstStyle>
           <a:p xmlns:a="http://schemas.openxmlformats.org/drawingml/2006/main">
             <a:pPr algn="l">
+              <a:buNone/>
               <a:defRPr sz="2400" b="0">
                 <a:solidFill>
                   <a:srgbClr val="FFFFFF"/>
@@ -3579,9 +5035,100 @@
                 <a:cs typeface="Malgun Gothic"/>
               </a:defRPr>
             </a:defPPr>
+            <a:lvl1pPr algn="l">
+              <a:defRPr sz="1800" b="0">
+                <a:solidFill>
+                  <a:srgbClr val="24324A"/>
+                </a:solidFill>
+                <a:latin typeface="Malgun Gothic"/>
+                <a:ea typeface="Malgun Gothic"/>
+                <a:cs typeface="Malgun Gothic"/>
+              </a:defRPr>
+            </a:lvl1pPr>
+            <a:lvl2pPr algn="l">
+              <a:defRPr sz="1800" b="0">
+                <a:solidFill>
+                  <a:srgbClr val="24324A"/>
+                </a:solidFill>
+                <a:latin typeface="Malgun Gothic"/>
+                <a:ea typeface="Malgun Gothic"/>
+                <a:cs typeface="Malgun Gothic"/>
+              </a:defRPr>
+            </a:lvl2pPr>
+            <a:lvl3pPr algn="l">
+              <a:defRPr sz="1800" b="0">
+                <a:solidFill>
+                  <a:srgbClr val="24324A"/>
+                </a:solidFill>
+                <a:latin typeface="Malgun Gothic"/>
+                <a:ea typeface="Malgun Gothic"/>
+                <a:cs typeface="Malgun Gothic"/>
+              </a:defRPr>
+            </a:lvl3pPr>
+            <a:lvl4pPr algn="l">
+              <a:defRPr sz="1800" b="0">
+                <a:solidFill>
+                  <a:srgbClr val="24324A"/>
+                </a:solidFill>
+                <a:latin typeface="Malgun Gothic"/>
+                <a:ea typeface="Malgun Gothic"/>
+                <a:cs typeface="Malgun Gothic"/>
+              </a:defRPr>
+            </a:lvl4pPr>
+            <a:lvl5pPr algn="l">
+              <a:defRPr sz="1800" b="0">
+                <a:solidFill>
+                  <a:srgbClr val="24324A"/>
+                </a:solidFill>
+                <a:latin typeface="Malgun Gothic"/>
+                <a:ea typeface="Malgun Gothic"/>
+                <a:cs typeface="Malgun Gothic"/>
+              </a:defRPr>
+            </a:lvl5pPr>
+            <a:lvl6pPr algn="l">
+              <a:defRPr sz="1800" b="0">
+                <a:solidFill>
+                  <a:srgbClr val="24324A"/>
+                </a:solidFill>
+                <a:latin typeface="Malgun Gothic"/>
+                <a:ea typeface="Malgun Gothic"/>
+                <a:cs typeface="Malgun Gothic"/>
+              </a:defRPr>
+            </a:lvl6pPr>
+            <a:lvl7pPr algn="l">
+              <a:defRPr sz="1800" b="0">
+                <a:solidFill>
+                  <a:srgbClr val="24324A"/>
+                </a:solidFill>
+                <a:latin typeface="Malgun Gothic"/>
+                <a:ea typeface="Malgun Gothic"/>
+                <a:cs typeface="Malgun Gothic"/>
+              </a:defRPr>
+            </a:lvl7pPr>
+            <a:lvl8pPr algn="l">
+              <a:defRPr sz="1800" b="0">
+                <a:solidFill>
+                  <a:srgbClr val="24324A"/>
+                </a:solidFill>
+                <a:latin typeface="Malgun Gothic"/>
+                <a:ea typeface="Malgun Gothic"/>
+                <a:cs typeface="Malgun Gothic"/>
+              </a:defRPr>
+            </a:lvl8pPr>
+            <a:lvl9pPr algn="l">
+              <a:defRPr sz="1800" b="0">
+                <a:solidFill>
+                  <a:srgbClr val="24324A"/>
+                </a:solidFill>
+                <a:latin typeface="Malgun Gothic"/>
+                <a:ea typeface="Malgun Gothic"/>
+                <a:cs typeface="Malgun Gothic"/>
+              </a:defRPr>
+            </a:lvl9pPr>
           </a:lstStyle>
           <a:p xmlns:a="http://schemas.openxmlformats.org/drawingml/2006/main">
             <a:pPr algn="l">
+              <a:buNone/>
               <a:defRPr sz="1800" b="0">
                 <a:solidFill>
                   <a:srgbClr val="24324A"/>
@@ -3600,7 +5147,7 @@
                 <a:ea typeface="Malgun Gothic"/>
                 <a:cs typeface="Malgun Gothic"/>
               </a:rPr>
-              <a:t>Paper-RAG는 본 연구의 고정 검색·생성 파이프라인이다.</a:t>
+              <a:t>Paper-RAG는 실험에 사용한 고정 검색·생성 파이프라인이다.</a:t>
             </a:r>
           </a:p>
         </p:txBody>
@@ -3680,9 +5227,100 @@
                 <a:cs typeface="Malgun Gothic"/>
               </a:defRPr>
             </a:defPPr>
+            <a:lvl1pPr algn="ctr">
+              <a:defRPr sz="1800" b="0">
+                <a:solidFill>
+                  <a:srgbClr val="24324A"/>
+                </a:solidFill>
+                <a:latin typeface="Malgun Gothic"/>
+                <a:ea typeface="Malgun Gothic"/>
+                <a:cs typeface="Malgun Gothic"/>
+              </a:defRPr>
+            </a:lvl1pPr>
+            <a:lvl2pPr algn="ctr">
+              <a:defRPr sz="1800" b="0">
+                <a:solidFill>
+                  <a:srgbClr val="24324A"/>
+                </a:solidFill>
+                <a:latin typeface="Malgun Gothic"/>
+                <a:ea typeface="Malgun Gothic"/>
+                <a:cs typeface="Malgun Gothic"/>
+              </a:defRPr>
+            </a:lvl2pPr>
+            <a:lvl3pPr algn="ctr">
+              <a:defRPr sz="1800" b="0">
+                <a:solidFill>
+                  <a:srgbClr val="24324A"/>
+                </a:solidFill>
+                <a:latin typeface="Malgun Gothic"/>
+                <a:ea typeface="Malgun Gothic"/>
+                <a:cs typeface="Malgun Gothic"/>
+              </a:defRPr>
+            </a:lvl3pPr>
+            <a:lvl4pPr algn="ctr">
+              <a:defRPr sz="1800" b="0">
+                <a:solidFill>
+                  <a:srgbClr val="24324A"/>
+                </a:solidFill>
+                <a:latin typeface="Malgun Gothic"/>
+                <a:ea typeface="Malgun Gothic"/>
+                <a:cs typeface="Malgun Gothic"/>
+              </a:defRPr>
+            </a:lvl4pPr>
+            <a:lvl5pPr algn="ctr">
+              <a:defRPr sz="1800" b="0">
+                <a:solidFill>
+                  <a:srgbClr val="24324A"/>
+                </a:solidFill>
+                <a:latin typeface="Malgun Gothic"/>
+                <a:ea typeface="Malgun Gothic"/>
+                <a:cs typeface="Malgun Gothic"/>
+              </a:defRPr>
+            </a:lvl5pPr>
+            <a:lvl6pPr algn="ctr">
+              <a:defRPr sz="1800" b="0">
+                <a:solidFill>
+                  <a:srgbClr val="24324A"/>
+                </a:solidFill>
+                <a:latin typeface="Malgun Gothic"/>
+                <a:ea typeface="Malgun Gothic"/>
+                <a:cs typeface="Malgun Gothic"/>
+              </a:defRPr>
+            </a:lvl6pPr>
+            <a:lvl7pPr algn="ctr">
+              <a:defRPr sz="1800" b="0">
+                <a:solidFill>
+                  <a:srgbClr val="24324A"/>
+                </a:solidFill>
+                <a:latin typeface="Malgun Gothic"/>
+                <a:ea typeface="Malgun Gothic"/>
+                <a:cs typeface="Malgun Gothic"/>
+              </a:defRPr>
+            </a:lvl7pPr>
+            <a:lvl8pPr algn="ctr">
+              <a:defRPr sz="1800" b="0">
+                <a:solidFill>
+                  <a:srgbClr val="24324A"/>
+                </a:solidFill>
+                <a:latin typeface="Malgun Gothic"/>
+                <a:ea typeface="Malgun Gothic"/>
+                <a:cs typeface="Malgun Gothic"/>
+              </a:defRPr>
+            </a:lvl8pPr>
+            <a:lvl9pPr algn="ctr">
+              <a:defRPr sz="1800" b="0">
+                <a:solidFill>
+                  <a:srgbClr val="24324A"/>
+                </a:solidFill>
+                <a:latin typeface="Malgun Gothic"/>
+                <a:ea typeface="Malgun Gothic"/>
+                <a:cs typeface="Malgun Gothic"/>
+              </a:defRPr>
+            </a:lvl9pPr>
           </a:lstStyle>
           <a:p xmlns:a="http://schemas.openxmlformats.org/drawingml/2006/main">
             <a:pPr algn="ctr">
+              <a:buNone/>
               <a:defRPr sz="1800" b="0">
                 <a:solidFill>
                   <a:srgbClr val="24324A"/>
@@ -3706,6 +5344,7 @@
           </a:p>
           <a:p xmlns:a="http://schemas.openxmlformats.org/drawingml/2006/main">
             <a:pPr algn="ctr">
+              <a:buNone/>
               <a:defRPr sz="1800" b="0">
                 <a:solidFill>
                   <a:srgbClr val="24324A"/>
@@ -3729,6 +5368,7 @@
           </a:p>
           <a:p xmlns:a="http://schemas.openxmlformats.org/drawingml/2006/main">
             <a:pPr algn="ctr">
+              <a:buNone/>
               <a:defRPr sz="1800" b="0">
                 <a:solidFill>
                   <a:srgbClr val="24324A"/>
@@ -3827,9 +5467,100 @@
                 <a:cs typeface="Malgun Gothic"/>
               </a:defRPr>
             </a:defPPr>
+            <a:lvl1pPr algn="ctr">
+              <a:defRPr sz="1800" b="0">
+                <a:solidFill>
+                  <a:srgbClr val="24324A"/>
+                </a:solidFill>
+                <a:latin typeface="Malgun Gothic"/>
+                <a:ea typeface="Malgun Gothic"/>
+                <a:cs typeface="Malgun Gothic"/>
+              </a:defRPr>
+            </a:lvl1pPr>
+            <a:lvl2pPr algn="ctr">
+              <a:defRPr sz="1800" b="0">
+                <a:solidFill>
+                  <a:srgbClr val="24324A"/>
+                </a:solidFill>
+                <a:latin typeface="Malgun Gothic"/>
+                <a:ea typeface="Malgun Gothic"/>
+                <a:cs typeface="Malgun Gothic"/>
+              </a:defRPr>
+            </a:lvl2pPr>
+            <a:lvl3pPr algn="ctr">
+              <a:defRPr sz="1800" b="0">
+                <a:solidFill>
+                  <a:srgbClr val="24324A"/>
+                </a:solidFill>
+                <a:latin typeface="Malgun Gothic"/>
+                <a:ea typeface="Malgun Gothic"/>
+                <a:cs typeface="Malgun Gothic"/>
+              </a:defRPr>
+            </a:lvl3pPr>
+            <a:lvl4pPr algn="ctr">
+              <a:defRPr sz="1800" b="0">
+                <a:solidFill>
+                  <a:srgbClr val="24324A"/>
+                </a:solidFill>
+                <a:latin typeface="Malgun Gothic"/>
+                <a:ea typeface="Malgun Gothic"/>
+                <a:cs typeface="Malgun Gothic"/>
+              </a:defRPr>
+            </a:lvl4pPr>
+            <a:lvl5pPr algn="ctr">
+              <a:defRPr sz="1800" b="0">
+                <a:solidFill>
+                  <a:srgbClr val="24324A"/>
+                </a:solidFill>
+                <a:latin typeface="Malgun Gothic"/>
+                <a:ea typeface="Malgun Gothic"/>
+                <a:cs typeface="Malgun Gothic"/>
+              </a:defRPr>
+            </a:lvl5pPr>
+            <a:lvl6pPr algn="ctr">
+              <a:defRPr sz="1800" b="0">
+                <a:solidFill>
+                  <a:srgbClr val="24324A"/>
+                </a:solidFill>
+                <a:latin typeface="Malgun Gothic"/>
+                <a:ea typeface="Malgun Gothic"/>
+                <a:cs typeface="Malgun Gothic"/>
+              </a:defRPr>
+            </a:lvl6pPr>
+            <a:lvl7pPr algn="ctr">
+              <a:defRPr sz="1800" b="0">
+                <a:solidFill>
+                  <a:srgbClr val="24324A"/>
+                </a:solidFill>
+                <a:latin typeface="Malgun Gothic"/>
+                <a:ea typeface="Malgun Gothic"/>
+                <a:cs typeface="Malgun Gothic"/>
+              </a:defRPr>
+            </a:lvl7pPr>
+            <a:lvl8pPr algn="ctr">
+              <a:defRPr sz="1800" b="0">
+                <a:solidFill>
+                  <a:srgbClr val="24324A"/>
+                </a:solidFill>
+                <a:latin typeface="Malgun Gothic"/>
+                <a:ea typeface="Malgun Gothic"/>
+                <a:cs typeface="Malgun Gothic"/>
+              </a:defRPr>
+            </a:lvl8pPr>
+            <a:lvl9pPr algn="ctr">
+              <a:defRPr sz="1800" b="0">
+                <a:solidFill>
+                  <a:srgbClr val="24324A"/>
+                </a:solidFill>
+                <a:latin typeface="Malgun Gothic"/>
+                <a:ea typeface="Malgun Gothic"/>
+                <a:cs typeface="Malgun Gothic"/>
+              </a:defRPr>
+            </a:lvl9pPr>
           </a:lstStyle>
           <a:p xmlns:a="http://schemas.openxmlformats.org/drawingml/2006/main">
             <a:pPr algn="ctr">
+              <a:buNone/>
               <a:defRPr sz="1800" b="0">
                 <a:solidFill>
                   <a:srgbClr val="24324A"/>
@@ -3853,6 +5584,7 @@
           </a:p>
           <a:p xmlns:a="http://schemas.openxmlformats.org/drawingml/2006/main">
             <a:pPr algn="ctr">
+              <a:buNone/>
               <a:defRPr sz="1800" b="0">
                 <a:solidFill>
                   <a:srgbClr val="24324A"/>
@@ -3951,9 +5683,100 @@
                 <a:cs typeface="Malgun Gothic"/>
               </a:defRPr>
             </a:defPPr>
+            <a:lvl1pPr algn="ctr">
+              <a:defRPr sz="1800" b="0">
+                <a:solidFill>
+                  <a:srgbClr val="24324A"/>
+                </a:solidFill>
+                <a:latin typeface="Malgun Gothic"/>
+                <a:ea typeface="Malgun Gothic"/>
+                <a:cs typeface="Malgun Gothic"/>
+              </a:defRPr>
+            </a:lvl1pPr>
+            <a:lvl2pPr algn="ctr">
+              <a:defRPr sz="1800" b="0">
+                <a:solidFill>
+                  <a:srgbClr val="24324A"/>
+                </a:solidFill>
+                <a:latin typeface="Malgun Gothic"/>
+                <a:ea typeface="Malgun Gothic"/>
+                <a:cs typeface="Malgun Gothic"/>
+              </a:defRPr>
+            </a:lvl2pPr>
+            <a:lvl3pPr algn="ctr">
+              <a:defRPr sz="1800" b="0">
+                <a:solidFill>
+                  <a:srgbClr val="24324A"/>
+                </a:solidFill>
+                <a:latin typeface="Malgun Gothic"/>
+                <a:ea typeface="Malgun Gothic"/>
+                <a:cs typeface="Malgun Gothic"/>
+              </a:defRPr>
+            </a:lvl3pPr>
+            <a:lvl4pPr algn="ctr">
+              <a:defRPr sz="1800" b="0">
+                <a:solidFill>
+                  <a:srgbClr val="24324A"/>
+                </a:solidFill>
+                <a:latin typeface="Malgun Gothic"/>
+                <a:ea typeface="Malgun Gothic"/>
+                <a:cs typeface="Malgun Gothic"/>
+              </a:defRPr>
+            </a:lvl4pPr>
+            <a:lvl5pPr algn="ctr">
+              <a:defRPr sz="1800" b="0">
+                <a:solidFill>
+                  <a:srgbClr val="24324A"/>
+                </a:solidFill>
+                <a:latin typeface="Malgun Gothic"/>
+                <a:ea typeface="Malgun Gothic"/>
+                <a:cs typeface="Malgun Gothic"/>
+              </a:defRPr>
+            </a:lvl5pPr>
+            <a:lvl6pPr algn="ctr">
+              <a:defRPr sz="1800" b="0">
+                <a:solidFill>
+                  <a:srgbClr val="24324A"/>
+                </a:solidFill>
+                <a:latin typeface="Malgun Gothic"/>
+                <a:ea typeface="Malgun Gothic"/>
+                <a:cs typeface="Malgun Gothic"/>
+              </a:defRPr>
+            </a:lvl6pPr>
+            <a:lvl7pPr algn="ctr">
+              <a:defRPr sz="1800" b="0">
+                <a:solidFill>
+                  <a:srgbClr val="24324A"/>
+                </a:solidFill>
+                <a:latin typeface="Malgun Gothic"/>
+                <a:ea typeface="Malgun Gothic"/>
+                <a:cs typeface="Malgun Gothic"/>
+              </a:defRPr>
+            </a:lvl7pPr>
+            <a:lvl8pPr algn="ctr">
+              <a:defRPr sz="1800" b="0">
+                <a:solidFill>
+                  <a:srgbClr val="24324A"/>
+                </a:solidFill>
+                <a:latin typeface="Malgun Gothic"/>
+                <a:ea typeface="Malgun Gothic"/>
+                <a:cs typeface="Malgun Gothic"/>
+              </a:defRPr>
+            </a:lvl8pPr>
+            <a:lvl9pPr algn="ctr">
+              <a:defRPr sz="1800" b="0">
+                <a:solidFill>
+                  <a:srgbClr val="24324A"/>
+                </a:solidFill>
+                <a:latin typeface="Malgun Gothic"/>
+                <a:ea typeface="Malgun Gothic"/>
+                <a:cs typeface="Malgun Gothic"/>
+              </a:defRPr>
+            </a:lvl9pPr>
           </a:lstStyle>
           <a:p xmlns:a="http://schemas.openxmlformats.org/drawingml/2006/main">
             <a:pPr algn="ctr">
+              <a:buNone/>
               <a:defRPr sz="1800" b="0">
                 <a:solidFill>
                   <a:srgbClr val="24324A"/>
@@ -4052,9 +5875,100 @@
                 <a:cs typeface="Malgun Gothic"/>
               </a:defRPr>
             </a:defPPr>
+            <a:lvl1pPr algn="ctr">
+              <a:defRPr sz="1800" b="0">
+                <a:solidFill>
+                  <a:srgbClr val="24324A"/>
+                </a:solidFill>
+                <a:latin typeface="Malgun Gothic"/>
+                <a:ea typeface="Malgun Gothic"/>
+                <a:cs typeface="Malgun Gothic"/>
+              </a:defRPr>
+            </a:lvl1pPr>
+            <a:lvl2pPr algn="ctr">
+              <a:defRPr sz="1800" b="0">
+                <a:solidFill>
+                  <a:srgbClr val="24324A"/>
+                </a:solidFill>
+                <a:latin typeface="Malgun Gothic"/>
+                <a:ea typeface="Malgun Gothic"/>
+                <a:cs typeface="Malgun Gothic"/>
+              </a:defRPr>
+            </a:lvl2pPr>
+            <a:lvl3pPr algn="ctr">
+              <a:defRPr sz="1800" b="0">
+                <a:solidFill>
+                  <a:srgbClr val="24324A"/>
+                </a:solidFill>
+                <a:latin typeface="Malgun Gothic"/>
+                <a:ea typeface="Malgun Gothic"/>
+                <a:cs typeface="Malgun Gothic"/>
+              </a:defRPr>
+            </a:lvl3pPr>
+            <a:lvl4pPr algn="ctr">
+              <a:defRPr sz="1800" b="0">
+                <a:solidFill>
+                  <a:srgbClr val="24324A"/>
+                </a:solidFill>
+                <a:latin typeface="Malgun Gothic"/>
+                <a:ea typeface="Malgun Gothic"/>
+                <a:cs typeface="Malgun Gothic"/>
+              </a:defRPr>
+            </a:lvl4pPr>
+            <a:lvl5pPr algn="ctr">
+              <a:defRPr sz="1800" b="0">
+                <a:solidFill>
+                  <a:srgbClr val="24324A"/>
+                </a:solidFill>
+                <a:latin typeface="Malgun Gothic"/>
+                <a:ea typeface="Malgun Gothic"/>
+                <a:cs typeface="Malgun Gothic"/>
+              </a:defRPr>
+            </a:lvl5pPr>
+            <a:lvl6pPr algn="ctr">
+              <a:defRPr sz="1800" b="0">
+                <a:solidFill>
+                  <a:srgbClr val="24324A"/>
+                </a:solidFill>
+                <a:latin typeface="Malgun Gothic"/>
+                <a:ea typeface="Malgun Gothic"/>
+                <a:cs typeface="Malgun Gothic"/>
+              </a:defRPr>
+            </a:lvl6pPr>
+            <a:lvl7pPr algn="ctr">
+              <a:defRPr sz="1800" b="0">
+                <a:solidFill>
+                  <a:srgbClr val="24324A"/>
+                </a:solidFill>
+                <a:latin typeface="Malgun Gothic"/>
+                <a:ea typeface="Malgun Gothic"/>
+                <a:cs typeface="Malgun Gothic"/>
+              </a:defRPr>
+            </a:lvl7pPr>
+            <a:lvl8pPr algn="ctr">
+              <a:defRPr sz="1800" b="0">
+                <a:solidFill>
+                  <a:srgbClr val="24324A"/>
+                </a:solidFill>
+                <a:latin typeface="Malgun Gothic"/>
+                <a:ea typeface="Malgun Gothic"/>
+                <a:cs typeface="Malgun Gothic"/>
+              </a:defRPr>
+            </a:lvl8pPr>
+            <a:lvl9pPr algn="ctr">
+              <a:defRPr sz="1800" b="0">
+                <a:solidFill>
+                  <a:srgbClr val="24324A"/>
+                </a:solidFill>
+                <a:latin typeface="Malgun Gothic"/>
+                <a:ea typeface="Malgun Gothic"/>
+                <a:cs typeface="Malgun Gothic"/>
+              </a:defRPr>
+            </a:lvl9pPr>
           </a:lstStyle>
           <a:p xmlns:a="http://schemas.openxmlformats.org/drawingml/2006/main">
             <a:pPr algn="ctr">
+              <a:buNone/>
               <a:defRPr sz="1800" b="0">
                 <a:solidFill>
                   <a:srgbClr val="24324A"/>
@@ -4078,6 +5992,7 @@
           </a:p>
           <a:p xmlns:a="http://schemas.openxmlformats.org/drawingml/2006/main">
             <a:pPr algn="ctr">
+              <a:buNone/>
               <a:defRPr sz="1800" b="0">
                 <a:solidFill>
                   <a:srgbClr val="24324A"/>
@@ -4272,9 +6187,100 @@
                 <a:cs typeface="Malgun Gothic"/>
               </a:defRPr>
             </a:defPPr>
+            <a:lvl1pPr algn="ctr">
+              <a:defRPr sz="1800" b="0">
+                <a:solidFill>
+                  <a:srgbClr val="24324A"/>
+                </a:solidFill>
+                <a:latin typeface="Malgun Gothic"/>
+                <a:ea typeface="Malgun Gothic"/>
+                <a:cs typeface="Malgun Gothic"/>
+              </a:defRPr>
+            </a:lvl1pPr>
+            <a:lvl2pPr algn="ctr">
+              <a:defRPr sz="1800" b="0">
+                <a:solidFill>
+                  <a:srgbClr val="24324A"/>
+                </a:solidFill>
+                <a:latin typeface="Malgun Gothic"/>
+                <a:ea typeface="Malgun Gothic"/>
+                <a:cs typeface="Malgun Gothic"/>
+              </a:defRPr>
+            </a:lvl2pPr>
+            <a:lvl3pPr algn="ctr">
+              <a:defRPr sz="1800" b="0">
+                <a:solidFill>
+                  <a:srgbClr val="24324A"/>
+                </a:solidFill>
+                <a:latin typeface="Malgun Gothic"/>
+                <a:ea typeface="Malgun Gothic"/>
+                <a:cs typeface="Malgun Gothic"/>
+              </a:defRPr>
+            </a:lvl3pPr>
+            <a:lvl4pPr algn="ctr">
+              <a:defRPr sz="1800" b="0">
+                <a:solidFill>
+                  <a:srgbClr val="24324A"/>
+                </a:solidFill>
+                <a:latin typeface="Malgun Gothic"/>
+                <a:ea typeface="Malgun Gothic"/>
+                <a:cs typeface="Malgun Gothic"/>
+              </a:defRPr>
+            </a:lvl4pPr>
+            <a:lvl5pPr algn="ctr">
+              <a:defRPr sz="1800" b="0">
+                <a:solidFill>
+                  <a:srgbClr val="24324A"/>
+                </a:solidFill>
+                <a:latin typeface="Malgun Gothic"/>
+                <a:ea typeface="Malgun Gothic"/>
+                <a:cs typeface="Malgun Gothic"/>
+              </a:defRPr>
+            </a:lvl5pPr>
+            <a:lvl6pPr algn="ctr">
+              <a:defRPr sz="1800" b="0">
+                <a:solidFill>
+                  <a:srgbClr val="24324A"/>
+                </a:solidFill>
+                <a:latin typeface="Malgun Gothic"/>
+                <a:ea typeface="Malgun Gothic"/>
+                <a:cs typeface="Malgun Gothic"/>
+              </a:defRPr>
+            </a:lvl6pPr>
+            <a:lvl7pPr algn="ctr">
+              <a:defRPr sz="1800" b="0">
+                <a:solidFill>
+                  <a:srgbClr val="24324A"/>
+                </a:solidFill>
+                <a:latin typeface="Malgun Gothic"/>
+                <a:ea typeface="Malgun Gothic"/>
+                <a:cs typeface="Malgun Gothic"/>
+              </a:defRPr>
+            </a:lvl7pPr>
+            <a:lvl8pPr algn="ctr">
+              <a:defRPr sz="1800" b="0">
+                <a:solidFill>
+                  <a:srgbClr val="24324A"/>
+                </a:solidFill>
+                <a:latin typeface="Malgun Gothic"/>
+                <a:ea typeface="Malgun Gothic"/>
+                <a:cs typeface="Malgun Gothic"/>
+              </a:defRPr>
+            </a:lvl8pPr>
+            <a:lvl9pPr algn="ctr">
+              <a:defRPr sz="1800" b="0">
+                <a:solidFill>
+                  <a:srgbClr val="24324A"/>
+                </a:solidFill>
+                <a:latin typeface="Malgun Gothic"/>
+                <a:ea typeface="Malgun Gothic"/>
+                <a:cs typeface="Malgun Gothic"/>
+              </a:defRPr>
+            </a:lvl9pPr>
           </a:lstStyle>
           <a:p xmlns:a="http://schemas.openxmlformats.org/drawingml/2006/main">
             <a:pPr algn="ctr">
+              <a:buNone/>
               <a:defRPr sz="1800" b="0">
                 <a:solidFill>
                   <a:srgbClr val="24324A"/>
@@ -4298,6 +6304,7 @@
           </a:p>
           <a:p xmlns:a="http://schemas.openxmlformats.org/drawingml/2006/main">
             <a:pPr algn="ctr">
+              <a:buNone/>
               <a:defRPr sz="1800" b="0">
                 <a:solidFill>
                   <a:srgbClr val="24324A"/>
@@ -4396,9 +6403,100 @@
                 <a:cs typeface="Malgun Gothic"/>
               </a:defRPr>
             </a:defPPr>
+            <a:lvl1pPr algn="ctr">
+              <a:defRPr sz="1800" b="0">
+                <a:solidFill>
+                  <a:srgbClr val="24324A"/>
+                </a:solidFill>
+                <a:latin typeface="Malgun Gothic"/>
+                <a:ea typeface="Malgun Gothic"/>
+                <a:cs typeface="Malgun Gothic"/>
+              </a:defRPr>
+            </a:lvl1pPr>
+            <a:lvl2pPr algn="ctr">
+              <a:defRPr sz="1800" b="0">
+                <a:solidFill>
+                  <a:srgbClr val="24324A"/>
+                </a:solidFill>
+                <a:latin typeface="Malgun Gothic"/>
+                <a:ea typeface="Malgun Gothic"/>
+                <a:cs typeface="Malgun Gothic"/>
+              </a:defRPr>
+            </a:lvl2pPr>
+            <a:lvl3pPr algn="ctr">
+              <a:defRPr sz="1800" b="0">
+                <a:solidFill>
+                  <a:srgbClr val="24324A"/>
+                </a:solidFill>
+                <a:latin typeface="Malgun Gothic"/>
+                <a:ea typeface="Malgun Gothic"/>
+                <a:cs typeface="Malgun Gothic"/>
+              </a:defRPr>
+            </a:lvl3pPr>
+            <a:lvl4pPr algn="ctr">
+              <a:defRPr sz="1800" b="0">
+                <a:solidFill>
+                  <a:srgbClr val="24324A"/>
+                </a:solidFill>
+                <a:latin typeface="Malgun Gothic"/>
+                <a:ea typeface="Malgun Gothic"/>
+                <a:cs typeface="Malgun Gothic"/>
+              </a:defRPr>
+            </a:lvl4pPr>
+            <a:lvl5pPr algn="ctr">
+              <a:defRPr sz="1800" b="0">
+                <a:solidFill>
+                  <a:srgbClr val="24324A"/>
+                </a:solidFill>
+                <a:latin typeface="Malgun Gothic"/>
+                <a:ea typeface="Malgun Gothic"/>
+                <a:cs typeface="Malgun Gothic"/>
+              </a:defRPr>
+            </a:lvl5pPr>
+            <a:lvl6pPr algn="ctr">
+              <a:defRPr sz="1800" b="0">
+                <a:solidFill>
+                  <a:srgbClr val="24324A"/>
+                </a:solidFill>
+                <a:latin typeface="Malgun Gothic"/>
+                <a:ea typeface="Malgun Gothic"/>
+                <a:cs typeface="Malgun Gothic"/>
+              </a:defRPr>
+            </a:lvl6pPr>
+            <a:lvl7pPr algn="ctr">
+              <a:defRPr sz="1800" b="0">
+                <a:solidFill>
+                  <a:srgbClr val="24324A"/>
+                </a:solidFill>
+                <a:latin typeface="Malgun Gothic"/>
+                <a:ea typeface="Malgun Gothic"/>
+                <a:cs typeface="Malgun Gothic"/>
+              </a:defRPr>
+            </a:lvl7pPr>
+            <a:lvl8pPr algn="ctr">
+              <a:defRPr sz="1800" b="0">
+                <a:solidFill>
+                  <a:srgbClr val="24324A"/>
+                </a:solidFill>
+                <a:latin typeface="Malgun Gothic"/>
+                <a:ea typeface="Malgun Gothic"/>
+                <a:cs typeface="Malgun Gothic"/>
+              </a:defRPr>
+            </a:lvl8pPr>
+            <a:lvl9pPr algn="ctr">
+              <a:defRPr sz="1800" b="0">
+                <a:solidFill>
+                  <a:srgbClr val="24324A"/>
+                </a:solidFill>
+                <a:latin typeface="Malgun Gothic"/>
+                <a:ea typeface="Malgun Gothic"/>
+                <a:cs typeface="Malgun Gothic"/>
+              </a:defRPr>
+            </a:lvl9pPr>
           </a:lstStyle>
           <a:p xmlns:a="http://schemas.openxmlformats.org/drawingml/2006/main">
             <a:pPr algn="ctr">
+              <a:buNone/>
               <a:defRPr sz="1800" b="0">
                 <a:solidFill>
                   <a:srgbClr val="24324A"/>
@@ -4422,6 +6520,7 @@
           </a:p>
           <a:p xmlns:a="http://schemas.openxmlformats.org/drawingml/2006/main">
             <a:pPr algn="ctr">
+              <a:buNone/>
               <a:defRPr sz="1800" b="0">
                 <a:solidFill>
                   <a:srgbClr val="24324A"/>
@@ -4582,9 +6681,100 @@
                 <a:cs typeface="Malgun Gothic"/>
               </a:defRPr>
             </a:defPPr>
+            <a:lvl1pPr algn="l">
+              <a:defRPr sz="2400" b="0">
+                <a:solidFill>
+                  <a:srgbClr val="FFFFFF"/>
+                </a:solidFill>
+                <a:latin typeface="Malgun Gothic"/>
+                <a:ea typeface="Malgun Gothic"/>
+                <a:cs typeface="Malgun Gothic"/>
+              </a:defRPr>
+            </a:lvl1pPr>
+            <a:lvl2pPr algn="l">
+              <a:defRPr sz="2400" b="0">
+                <a:solidFill>
+                  <a:srgbClr val="FFFFFF"/>
+                </a:solidFill>
+                <a:latin typeface="Malgun Gothic"/>
+                <a:ea typeface="Malgun Gothic"/>
+                <a:cs typeface="Malgun Gothic"/>
+              </a:defRPr>
+            </a:lvl2pPr>
+            <a:lvl3pPr algn="l">
+              <a:defRPr sz="2400" b="0">
+                <a:solidFill>
+                  <a:srgbClr val="FFFFFF"/>
+                </a:solidFill>
+                <a:latin typeface="Malgun Gothic"/>
+                <a:ea typeface="Malgun Gothic"/>
+                <a:cs typeface="Malgun Gothic"/>
+              </a:defRPr>
+            </a:lvl3pPr>
+            <a:lvl4pPr algn="l">
+              <a:defRPr sz="2400" b="0">
+                <a:solidFill>
+                  <a:srgbClr val="FFFFFF"/>
+                </a:solidFill>
+                <a:latin typeface="Malgun Gothic"/>
+                <a:ea typeface="Malgun Gothic"/>
+                <a:cs typeface="Malgun Gothic"/>
+              </a:defRPr>
+            </a:lvl4pPr>
+            <a:lvl5pPr algn="l">
+              <a:defRPr sz="2400" b="0">
+                <a:solidFill>
+                  <a:srgbClr val="FFFFFF"/>
+                </a:solidFill>
+                <a:latin typeface="Malgun Gothic"/>
+                <a:ea typeface="Malgun Gothic"/>
+                <a:cs typeface="Malgun Gothic"/>
+              </a:defRPr>
+            </a:lvl5pPr>
+            <a:lvl6pPr algn="l">
+              <a:defRPr sz="2400" b="0">
+                <a:solidFill>
+                  <a:srgbClr val="FFFFFF"/>
+                </a:solidFill>
+                <a:latin typeface="Malgun Gothic"/>
+                <a:ea typeface="Malgun Gothic"/>
+                <a:cs typeface="Malgun Gothic"/>
+              </a:defRPr>
+            </a:lvl6pPr>
+            <a:lvl7pPr algn="l">
+              <a:defRPr sz="2400" b="0">
+                <a:solidFill>
+                  <a:srgbClr val="FFFFFF"/>
+                </a:solidFill>
+                <a:latin typeface="Malgun Gothic"/>
+                <a:ea typeface="Malgun Gothic"/>
+                <a:cs typeface="Malgun Gothic"/>
+              </a:defRPr>
+            </a:lvl7pPr>
+            <a:lvl8pPr algn="l">
+              <a:defRPr sz="2400" b="0">
+                <a:solidFill>
+                  <a:srgbClr val="FFFFFF"/>
+                </a:solidFill>
+                <a:latin typeface="Malgun Gothic"/>
+                <a:ea typeface="Malgun Gothic"/>
+                <a:cs typeface="Malgun Gothic"/>
+              </a:defRPr>
+            </a:lvl8pPr>
+            <a:lvl9pPr algn="l">
+              <a:defRPr sz="2400" b="0">
+                <a:solidFill>
+                  <a:srgbClr val="FFFFFF"/>
+                </a:solidFill>
+                <a:latin typeface="Malgun Gothic"/>
+                <a:ea typeface="Malgun Gothic"/>
+                <a:cs typeface="Malgun Gothic"/>
+              </a:defRPr>
+            </a:lvl9pPr>
           </a:lstStyle>
           <a:p xmlns:a="http://schemas.openxmlformats.org/drawingml/2006/main">
             <a:pPr algn="l">
+              <a:buNone/>
               <a:defRPr sz="2400" b="0">
                 <a:solidFill>
                   <a:srgbClr val="FFFFFF"/>
@@ -4650,9 +6840,100 @@
                 <a:cs typeface="Malgun Gothic"/>
               </a:defRPr>
             </a:defPPr>
+            <a:lvl1pPr algn="l">
+              <a:defRPr sz="1800" b="0">
+                <a:solidFill>
+                  <a:srgbClr val="24324A"/>
+                </a:solidFill>
+                <a:latin typeface="Malgun Gothic"/>
+                <a:ea typeface="Malgun Gothic"/>
+                <a:cs typeface="Malgun Gothic"/>
+              </a:defRPr>
+            </a:lvl1pPr>
+            <a:lvl2pPr algn="l">
+              <a:defRPr sz="1800" b="0">
+                <a:solidFill>
+                  <a:srgbClr val="24324A"/>
+                </a:solidFill>
+                <a:latin typeface="Malgun Gothic"/>
+                <a:ea typeface="Malgun Gothic"/>
+                <a:cs typeface="Malgun Gothic"/>
+              </a:defRPr>
+            </a:lvl2pPr>
+            <a:lvl3pPr algn="l">
+              <a:defRPr sz="1800" b="0">
+                <a:solidFill>
+                  <a:srgbClr val="24324A"/>
+                </a:solidFill>
+                <a:latin typeface="Malgun Gothic"/>
+                <a:ea typeface="Malgun Gothic"/>
+                <a:cs typeface="Malgun Gothic"/>
+              </a:defRPr>
+            </a:lvl3pPr>
+            <a:lvl4pPr algn="l">
+              <a:defRPr sz="1800" b="0">
+                <a:solidFill>
+                  <a:srgbClr val="24324A"/>
+                </a:solidFill>
+                <a:latin typeface="Malgun Gothic"/>
+                <a:ea typeface="Malgun Gothic"/>
+                <a:cs typeface="Malgun Gothic"/>
+              </a:defRPr>
+            </a:lvl4pPr>
+            <a:lvl5pPr algn="l">
+              <a:defRPr sz="1800" b="0">
+                <a:solidFill>
+                  <a:srgbClr val="24324A"/>
+                </a:solidFill>
+                <a:latin typeface="Malgun Gothic"/>
+                <a:ea typeface="Malgun Gothic"/>
+                <a:cs typeface="Malgun Gothic"/>
+              </a:defRPr>
+            </a:lvl5pPr>
+            <a:lvl6pPr algn="l">
+              <a:defRPr sz="1800" b="0">
+                <a:solidFill>
+                  <a:srgbClr val="24324A"/>
+                </a:solidFill>
+                <a:latin typeface="Malgun Gothic"/>
+                <a:ea typeface="Malgun Gothic"/>
+                <a:cs typeface="Malgun Gothic"/>
+              </a:defRPr>
+            </a:lvl6pPr>
+            <a:lvl7pPr algn="l">
+              <a:defRPr sz="1800" b="0">
+                <a:solidFill>
+                  <a:srgbClr val="24324A"/>
+                </a:solidFill>
+                <a:latin typeface="Malgun Gothic"/>
+                <a:ea typeface="Malgun Gothic"/>
+                <a:cs typeface="Malgun Gothic"/>
+              </a:defRPr>
+            </a:lvl7pPr>
+            <a:lvl8pPr algn="l">
+              <a:defRPr sz="1800" b="0">
+                <a:solidFill>
+                  <a:srgbClr val="24324A"/>
+                </a:solidFill>
+                <a:latin typeface="Malgun Gothic"/>
+                <a:ea typeface="Malgun Gothic"/>
+                <a:cs typeface="Malgun Gothic"/>
+              </a:defRPr>
+            </a:lvl8pPr>
+            <a:lvl9pPr algn="l">
+              <a:defRPr sz="1800" b="0">
+                <a:solidFill>
+                  <a:srgbClr val="24324A"/>
+                </a:solidFill>
+                <a:latin typeface="Malgun Gothic"/>
+                <a:ea typeface="Malgun Gothic"/>
+                <a:cs typeface="Malgun Gothic"/>
+              </a:defRPr>
+            </a:lvl9pPr>
           </a:lstStyle>
           <a:p xmlns:a="http://schemas.openxmlformats.org/drawingml/2006/main">
             <a:pPr algn="l">
+              <a:buNone/>
               <a:defRPr sz="1800" b="0">
                 <a:solidFill>
                   <a:srgbClr val="24324A"/>
@@ -4681,7 +6962,7 @@
           <p:cNvPr id="33" name="">
             <a:extLst xmlns:a="http://schemas.openxmlformats.org/drawingml/2006/main">
               <a:ext uri="{FF2B5EF4-FFF2-40B4-BE49-F238E27FC236}">
-                <a16:creationId xmlns:a16="http://schemas.microsoft.com/office/drawing/2014/main" id="{CB14E32A-5FB3-419C-8228-36C76F28DDC8}"/>
+                <a16:creationId xmlns:a16="http://schemas.microsoft.com/office/drawing/2014/main" id="{827ADEC0-AA42-41F6-97FA-F99E4014E9E7}"/>
               </a:ext>
             </a:extLst>
           </p:cNvPr>
@@ -4710,7 +6991,9 @@
                     </a:bodyPr>
                     <a:lstStyle/>
                     <a:p>
-                      <a:pPr algn="ctr"/>
+                      <a:pPr algn="ctr">
+                        <a:buNone/>
+                      </a:pPr>
                       <a:r>
                         <a:rPr sz="1800" b="1">
                           <a:solidFill>
@@ -4761,7 +7044,9 @@
                     </a:bodyPr>
                     <a:lstStyle/>
                     <a:p>
-                      <a:pPr algn="ctr"/>
+                      <a:pPr algn="ctr">
+                        <a:buNone/>
+                      </a:pPr>
                       <a:r>
                         <a:rPr sz="1800" b="1">
                           <a:solidFill>
@@ -4806,7 +7091,9 @@
                     </a:bodyPr>
                     <a:lstStyle/>
                     <a:p>
-                      <a:pPr algn="ctr"/>
+                      <a:pPr algn="ctr">
+                        <a:buNone/>
+                      </a:pPr>
                       <a:r>
                         <a:rPr sz="1800" b="1">
                           <a:solidFill>
@@ -4851,7 +7138,9 @@
                     </a:bodyPr>
                     <a:lstStyle/>
                     <a:p>
-                      <a:pPr algn="ctr"/>
+                      <a:pPr algn="ctr">
+                        <a:buNone/>
+                      </a:pPr>
                       <a:r>
                         <a:rPr sz="1800" b="1">
                           <a:solidFill>
@@ -4898,7 +7187,9 @@
                     </a:bodyPr>
                     <a:lstStyle/>
                     <a:p>
-                      <a:pPr algn="ctr"/>
+                      <a:pPr algn="ctr">
+                        <a:buNone/>
+                      </a:pPr>
                       <a:r>
                         <a:rPr sz="1800" b="0">
                           <a:solidFill>
@@ -4943,7 +7234,9 @@
                     </a:bodyPr>
                     <a:lstStyle/>
                     <a:p>
-                      <a:pPr algn="ctr"/>
+                      <a:pPr algn="ctr">
+                        <a:buNone/>
+                      </a:pPr>
                       <a:r>
                         <a:rPr sz="1800" b="0">
                           <a:solidFill>
@@ -4982,7 +7275,9 @@
                     </a:bodyPr>
                     <a:lstStyle/>
                     <a:p>
-                      <a:pPr algn="ctr"/>
+                      <a:pPr algn="ctr">
+                        <a:buNone/>
+                      </a:pPr>
                       <a:r>
                         <a:rPr sz="1800" b="0">
                           <a:solidFill>
@@ -5021,7 +7316,9 @@
                     </a:bodyPr>
                     <a:lstStyle/>
                     <a:p>
-                      <a:pPr algn="ctr"/>
+                      <a:pPr algn="ctr">
+                        <a:buNone/>
+                      </a:pPr>
                       <a:r>
                         <a:rPr sz="1800" b="0">
                           <a:solidFill>
@@ -5062,7 +7359,9 @@
                     </a:bodyPr>
                     <a:lstStyle/>
                     <a:p>
-                      <a:pPr algn="ctr"/>
+                      <a:pPr algn="ctr">
+                        <a:buNone/>
+                      </a:pPr>
                       <a:r>
                         <a:rPr sz="1800" b="0">
                           <a:solidFill>
@@ -5107,7 +7406,9 @@
                     </a:bodyPr>
                     <a:lstStyle/>
                     <a:p>
-                      <a:pPr algn="ctr"/>
+                      <a:pPr algn="ctr">
+                        <a:buNone/>
+                      </a:pPr>
                       <a:r>
                         <a:rPr sz="1800" b="0">
                           <a:solidFill>
@@ -5146,7 +7447,9 @@
                     </a:bodyPr>
                     <a:lstStyle/>
                     <a:p>
-                      <a:pPr algn="ctr"/>
+                      <a:pPr algn="ctr">
+                        <a:buNone/>
+                      </a:pPr>
                       <a:r>
                         <a:rPr sz="1800" b="0">
                           <a:solidFill>
@@ -5185,7 +7488,9 @@
                     </a:bodyPr>
                     <a:lstStyle/>
                     <a:p>
-                      <a:pPr algn="ctr"/>
+                      <a:pPr algn="ctr">
+                        <a:buNone/>
+                      </a:pPr>
                       <a:r>
                         <a:rPr sz="1800" b="0">
                           <a:solidFill>
@@ -5226,7 +7531,9 @@
                     </a:bodyPr>
                     <a:lstStyle/>
                     <a:p>
-                      <a:pPr algn="ctr"/>
+                      <a:pPr algn="ctr">
+                        <a:buNone/>
+                      </a:pPr>
                       <a:r>
                         <a:rPr sz="1800" b="0">
                           <a:solidFill>
@@ -5271,7 +7578,9 @@
                     </a:bodyPr>
                     <a:lstStyle/>
                     <a:p>
-                      <a:pPr algn="ctr"/>
+                      <a:pPr algn="ctr">
+                        <a:buNone/>
+                      </a:pPr>
                       <a:r>
                         <a:rPr sz="1800" b="0">
                           <a:solidFill>
@@ -5310,7 +7619,9 @@
                     </a:bodyPr>
                     <a:lstStyle/>
                     <a:p>
-                      <a:pPr algn="ctr"/>
+                      <a:pPr algn="ctr">
+                        <a:buNone/>
+                      </a:pPr>
                       <a:r>
                         <a:rPr sz="1800" b="0">
                           <a:solidFill>
@@ -5349,7 +7660,9 @@
                     </a:bodyPr>
                     <a:lstStyle/>
                     <a:p>
-                      <a:pPr algn="ctr"/>
+                      <a:pPr algn="ctr">
+                        <a:buNone/>
+                      </a:pPr>
                       <a:r>
                         <a:rPr sz="1800" b="0">
                           <a:solidFill>
@@ -5390,7 +7703,9 @@
                     </a:bodyPr>
                     <a:lstStyle/>
                     <a:p>
-                      <a:pPr algn="ctr"/>
+                      <a:pPr algn="ctr">
+                        <a:buNone/>
+                      </a:pPr>
                       <a:r>
                         <a:rPr sz="1800" b="0">
                           <a:solidFill>
@@ -5435,7 +7750,9 @@
                     </a:bodyPr>
                     <a:lstStyle/>
                     <a:p>
-                      <a:pPr algn="ctr"/>
+                      <a:pPr algn="ctr">
+                        <a:buNone/>
+                      </a:pPr>
                       <a:r>
                         <a:rPr sz="1800" b="0">
                           <a:solidFill>
@@ -5474,7 +7791,9 @@
                     </a:bodyPr>
                     <a:lstStyle/>
                     <a:p>
-                      <a:pPr algn="ctr"/>
+                      <a:pPr algn="ctr">
+                        <a:buNone/>
+                      </a:pPr>
                       <a:r>
                         <a:rPr sz="1800" b="0">
                           <a:solidFill>
@@ -5513,7 +7832,9 @@
                     </a:bodyPr>
                     <a:lstStyle/>
                     <a:p>
-                      <a:pPr algn="ctr"/>
+                      <a:pPr algn="ctr">
+                        <a:buNone/>
+                      </a:pPr>
                       <a:r>
                         <a:rPr sz="1800" b="0">
                           <a:solidFill>
@@ -5554,7 +7875,9 @@
                     </a:bodyPr>
                     <a:lstStyle/>
                     <a:p>
-                      <a:pPr algn="ctr"/>
+                      <a:pPr algn="ctr">
+                        <a:buNone/>
+                      </a:pPr>
                       <a:r>
                         <a:rPr sz="1800" b="0">
                           <a:solidFill>
@@ -5599,7 +7922,9 @@
                     </a:bodyPr>
                     <a:lstStyle/>
                     <a:p>
-                      <a:pPr algn="ctr"/>
+                      <a:pPr algn="ctr">
+                        <a:buNone/>
+                      </a:pPr>
                       <a:r>
                         <a:rPr sz="1800" b="0">
                           <a:solidFill>
@@ -5638,7 +7963,9 @@
                     </a:bodyPr>
                     <a:lstStyle/>
                     <a:p>
-                      <a:pPr algn="ctr"/>
+                      <a:pPr algn="ctr">
+                        <a:buNone/>
+                      </a:pPr>
                       <a:r>
                         <a:rPr sz="1800" b="0">
                           <a:solidFill>
@@ -5677,7 +8004,9 @@
                     </a:bodyPr>
                     <a:lstStyle/>
                     <a:p>
-                      <a:pPr algn="ctr"/>
+                      <a:pPr algn="ctr">
+                        <a:buNone/>
+                      </a:pPr>
                       <a:r>
                         <a:rPr sz="1800" b="0">
                           <a:solidFill>
@@ -5718,7 +8047,9 @@
                     </a:bodyPr>
                     <a:lstStyle/>
                     <a:p>
-                      <a:pPr algn="ctr"/>
+                      <a:pPr algn="ctr">
+                        <a:buNone/>
+                      </a:pPr>
                       <a:r>
                         <a:rPr sz="1800" b="0">
                           <a:solidFill>
@@ -5763,7 +8094,9 @@
                     </a:bodyPr>
                     <a:lstStyle/>
                     <a:p>
-                      <a:pPr algn="ctr"/>
+                      <a:pPr algn="ctr">
+                        <a:buNone/>
+                      </a:pPr>
                       <a:r>
                         <a:rPr sz="1800" b="0">
                           <a:solidFill>
@@ -5802,7 +8135,9 @@
                     </a:bodyPr>
                     <a:lstStyle/>
                     <a:p>
-                      <a:pPr algn="ctr"/>
+                      <a:pPr algn="ctr">
+                        <a:buNone/>
+                      </a:pPr>
                       <a:r>
                         <a:rPr sz="1800" b="0">
                           <a:solidFill>
@@ -5841,7 +8176,9 @@
                     </a:bodyPr>
                     <a:lstStyle/>
                     <a:p>
-                      <a:pPr algn="ctr"/>
+                      <a:pPr algn="ctr">
+                        <a:buNone/>
+                      </a:pPr>
                       <a:r>
                         <a:rPr sz="1800" b="0">
                           <a:solidFill>
@@ -5882,7 +8219,9 @@
                     </a:bodyPr>
                     <a:lstStyle/>
                     <a:p>
-                      <a:pPr algn="ctr"/>
+                      <a:pPr algn="ctr">
+                        <a:buNone/>
+                      </a:pPr>
                       <a:r>
                         <a:rPr sz="1800" b="0">
                           <a:solidFill>
@@ -5927,7 +8266,9 @@
                     </a:bodyPr>
                     <a:lstStyle/>
                     <a:p>
-                      <a:pPr algn="ctr"/>
+                      <a:pPr algn="ctr">
+                        <a:buNone/>
+                      </a:pPr>
                       <a:r>
                         <a:rPr sz="1800" b="0">
                           <a:solidFill>
@@ -5966,7 +8307,9 @@
                     </a:bodyPr>
                     <a:lstStyle/>
                     <a:p>
-                      <a:pPr algn="ctr"/>
+                      <a:pPr algn="ctr">
+                        <a:buNone/>
+                      </a:pPr>
                       <a:r>
                         <a:rPr sz="1800" b="0">
                           <a:solidFill>
@@ -6005,7 +8348,9 @@
                     </a:bodyPr>
                     <a:lstStyle/>
                     <a:p>
-                      <a:pPr algn="ctr"/>
+                      <a:pPr algn="ctr">
+                        <a:buNone/>
+                      </a:pPr>
                       <a:r>
                         <a:rPr sz="1800" b="0">
                           <a:solidFill>
@@ -6046,7 +8391,9 @@
                     </a:bodyPr>
                     <a:lstStyle/>
                     <a:p>
-                      <a:pPr algn="ctr"/>
+                      <a:pPr algn="ctr">
+                        <a:buNone/>
+                      </a:pPr>
                       <a:r>
                         <a:rPr sz="1800" b="0">
                           <a:solidFill>
@@ -6091,7 +8438,9 @@
                     </a:bodyPr>
                     <a:lstStyle/>
                     <a:p>
-                      <a:pPr algn="ctr"/>
+                      <a:pPr algn="ctr">
+                        <a:buNone/>
+                      </a:pPr>
                       <a:r>
                         <a:rPr sz="1800" b="0">
                           <a:solidFill>
@@ -6130,7 +8479,9 @@
                     </a:bodyPr>
                     <a:lstStyle/>
                     <a:p>
-                      <a:pPr algn="ctr"/>
+                      <a:pPr algn="ctr">
+                        <a:buNone/>
+                      </a:pPr>
                       <a:r>
                         <a:rPr sz="1800" b="0">
                           <a:solidFill>
@@ -6169,7 +8520,9 @@
                     </a:bodyPr>
                     <a:lstStyle/>
                     <a:p>
-                      <a:pPr algn="ctr"/>
+                      <a:pPr algn="ctr">
+                        <a:buNone/>
+                      </a:pPr>
                       <a:r>
                         <a:rPr sz="1800" b="0">
                           <a:solidFill>
@@ -6248,9 +8601,100 @@
                 <a:cs typeface="Malgun Gothic"/>
               </a:defRPr>
             </a:defPPr>
+            <a:lvl1pPr algn="l">
+              <a:defRPr sz="1800" b="1">
+                <a:solidFill>
+                  <a:srgbClr val="24324A"/>
+                </a:solidFill>
+                <a:latin typeface="Malgun Gothic"/>
+                <a:ea typeface="Malgun Gothic"/>
+                <a:cs typeface="Malgun Gothic"/>
+              </a:defRPr>
+            </a:lvl1pPr>
+            <a:lvl2pPr algn="l">
+              <a:defRPr sz="1800" b="1">
+                <a:solidFill>
+                  <a:srgbClr val="24324A"/>
+                </a:solidFill>
+                <a:latin typeface="Malgun Gothic"/>
+                <a:ea typeface="Malgun Gothic"/>
+                <a:cs typeface="Malgun Gothic"/>
+              </a:defRPr>
+            </a:lvl2pPr>
+            <a:lvl3pPr algn="l">
+              <a:defRPr sz="1800" b="1">
+                <a:solidFill>
+                  <a:srgbClr val="24324A"/>
+                </a:solidFill>
+                <a:latin typeface="Malgun Gothic"/>
+                <a:ea typeface="Malgun Gothic"/>
+                <a:cs typeface="Malgun Gothic"/>
+              </a:defRPr>
+            </a:lvl3pPr>
+            <a:lvl4pPr algn="l">
+              <a:defRPr sz="1800" b="1">
+                <a:solidFill>
+                  <a:srgbClr val="24324A"/>
+                </a:solidFill>
+                <a:latin typeface="Malgun Gothic"/>
+                <a:ea typeface="Malgun Gothic"/>
+                <a:cs typeface="Malgun Gothic"/>
+              </a:defRPr>
+            </a:lvl4pPr>
+            <a:lvl5pPr algn="l">
+              <a:defRPr sz="1800" b="1">
+                <a:solidFill>
+                  <a:srgbClr val="24324A"/>
+                </a:solidFill>
+                <a:latin typeface="Malgun Gothic"/>
+                <a:ea typeface="Malgun Gothic"/>
+                <a:cs typeface="Malgun Gothic"/>
+              </a:defRPr>
+            </a:lvl5pPr>
+            <a:lvl6pPr algn="l">
+              <a:defRPr sz="1800" b="1">
+                <a:solidFill>
+                  <a:srgbClr val="24324A"/>
+                </a:solidFill>
+                <a:latin typeface="Malgun Gothic"/>
+                <a:ea typeface="Malgun Gothic"/>
+                <a:cs typeface="Malgun Gothic"/>
+              </a:defRPr>
+            </a:lvl6pPr>
+            <a:lvl7pPr algn="l">
+              <a:defRPr sz="1800" b="1">
+                <a:solidFill>
+                  <a:srgbClr val="24324A"/>
+                </a:solidFill>
+                <a:latin typeface="Malgun Gothic"/>
+                <a:ea typeface="Malgun Gothic"/>
+                <a:cs typeface="Malgun Gothic"/>
+              </a:defRPr>
+            </a:lvl7pPr>
+            <a:lvl8pPr algn="l">
+              <a:defRPr sz="1800" b="1">
+                <a:solidFill>
+                  <a:srgbClr val="24324A"/>
+                </a:solidFill>
+                <a:latin typeface="Malgun Gothic"/>
+                <a:ea typeface="Malgun Gothic"/>
+                <a:cs typeface="Malgun Gothic"/>
+              </a:defRPr>
+            </a:lvl8pPr>
+            <a:lvl9pPr algn="l">
+              <a:defRPr sz="1800" b="1">
+                <a:solidFill>
+                  <a:srgbClr val="24324A"/>
+                </a:solidFill>
+                <a:latin typeface="Malgun Gothic"/>
+                <a:ea typeface="Malgun Gothic"/>
+                <a:cs typeface="Malgun Gothic"/>
+              </a:defRPr>
+            </a:lvl9pPr>
           </a:lstStyle>
           <a:p xmlns:a="http://schemas.openxmlformats.org/drawingml/2006/main">
             <a:pPr algn="l">
+              <a:buNone/>
               <a:defRPr sz="1800" b="1">
                 <a:solidFill>
                   <a:srgbClr val="24324A"/>
@@ -6316,9 +8760,100 @@
                 <a:cs typeface="Malgun Gothic"/>
               </a:defRPr>
             </a:defPPr>
+            <a:lvl1pPr algn="l">
+              <a:defRPr sz="1800" b="0">
+                <a:solidFill>
+                  <a:srgbClr val="24324A"/>
+                </a:solidFill>
+                <a:latin typeface="Malgun Gothic"/>
+                <a:ea typeface="Malgun Gothic"/>
+                <a:cs typeface="Malgun Gothic"/>
+              </a:defRPr>
+            </a:lvl1pPr>
+            <a:lvl2pPr algn="l">
+              <a:defRPr sz="1800" b="0">
+                <a:solidFill>
+                  <a:srgbClr val="24324A"/>
+                </a:solidFill>
+                <a:latin typeface="Malgun Gothic"/>
+                <a:ea typeface="Malgun Gothic"/>
+                <a:cs typeface="Malgun Gothic"/>
+              </a:defRPr>
+            </a:lvl2pPr>
+            <a:lvl3pPr algn="l">
+              <a:defRPr sz="1800" b="0">
+                <a:solidFill>
+                  <a:srgbClr val="24324A"/>
+                </a:solidFill>
+                <a:latin typeface="Malgun Gothic"/>
+                <a:ea typeface="Malgun Gothic"/>
+                <a:cs typeface="Malgun Gothic"/>
+              </a:defRPr>
+            </a:lvl3pPr>
+            <a:lvl4pPr algn="l">
+              <a:defRPr sz="1800" b="0">
+                <a:solidFill>
+                  <a:srgbClr val="24324A"/>
+                </a:solidFill>
+                <a:latin typeface="Malgun Gothic"/>
+                <a:ea typeface="Malgun Gothic"/>
+                <a:cs typeface="Malgun Gothic"/>
+              </a:defRPr>
+            </a:lvl4pPr>
+            <a:lvl5pPr algn="l">
+              <a:defRPr sz="1800" b="0">
+                <a:solidFill>
+                  <a:srgbClr val="24324A"/>
+                </a:solidFill>
+                <a:latin typeface="Malgun Gothic"/>
+                <a:ea typeface="Malgun Gothic"/>
+                <a:cs typeface="Malgun Gothic"/>
+              </a:defRPr>
+            </a:lvl5pPr>
+            <a:lvl6pPr algn="l">
+              <a:defRPr sz="1800" b="0">
+                <a:solidFill>
+                  <a:srgbClr val="24324A"/>
+                </a:solidFill>
+                <a:latin typeface="Malgun Gothic"/>
+                <a:ea typeface="Malgun Gothic"/>
+                <a:cs typeface="Malgun Gothic"/>
+              </a:defRPr>
+            </a:lvl6pPr>
+            <a:lvl7pPr algn="l">
+              <a:defRPr sz="1800" b="0">
+                <a:solidFill>
+                  <a:srgbClr val="24324A"/>
+                </a:solidFill>
+                <a:latin typeface="Malgun Gothic"/>
+                <a:ea typeface="Malgun Gothic"/>
+                <a:cs typeface="Malgun Gothic"/>
+              </a:defRPr>
+            </a:lvl7pPr>
+            <a:lvl8pPr algn="l">
+              <a:defRPr sz="1800" b="0">
+                <a:solidFill>
+                  <a:srgbClr val="24324A"/>
+                </a:solidFill>
+                <a:latin typeface="Malgun Gothic"/>
+                <a:ea typeface="Malgun Gothic"/>
+                <a:cs typeface="Malgun Gothic"/>
+              </a:defRPr>
+            </a:lvl8pPr>
+            <a:lvl9pPr algn="l">
+              <a:defRPr sz="1800" b="0">
+                <a:solidFill>
+                  <a:srgbClr val="24324A"/>
+                </a:solidFill>
+                <a:latin typeface="Malgun Gothic"/>
+                <a:ea typeface="Malgun Gothic"/>
+                <a:cs typeface="Malgun Gothic"/>
+              </a:defRPr>
+            </a:lvl9pPr>
           </a:lstStyle>
           <a:p xmlns:a="http://schemas.openxmlformats.org/drawingml/2006/main">
             <a:pPr algn="l">
+              <a:buNone/>
               <a:defRPr sz="1800" b="0">
                 <a:solidFill>
                   <a:srgbClr val="24324A"/>
@@ -6384,9 +8919,100 @@
                 <a:cs typeface="Malgun Gothic"/>
               </a:defRPr>
             </a:defPPr>
+            <a:lvl1pPr algn="l">
+              <a:defRPr sz="1800" b="0">
+                <a:solidFill>
+                  <a:srgbClr val="24324A"/>
+                </a:solidFill>
+                <a:latin typeface="Malgun Gothic"/>
+                <a:ea typeface="Malgun Gothic"/>
+                <a:cs typeface="Malgun Gothic"/>
+              </a:defRPr>
+            </a:lvl1pPr>
+            <a:lvl2pPr algn="l">
+              <a:defRPr sz="1800" b="0">
+                <a:solidFill>
+                  <a:srgbClr val="24324A"/>
+                </a:solidFill>
+                <a:latin typeface="Malgun Gothic"/>
+                <a:ea typeface="Malgun Gothic"/>
+                <a:cs typeface="Malgun Gothic"/>
+              </a:defRPr>
+            </a:lvl2pPr>
+            <a:lvl3pPr algn="l">
+              <a:defRPr sz="1800" b="0">
+                <a:solidFill>
+                  <a:srgbClr val="24324A"/>
+                </a:solidFill>
+                <a:latin typeface="Malgun Gothic"/>
+                <a:ea typeface="Malgun Gothic"/>
+                <a:cs typeface="Malgun Gothic"/>
+              </a:defRPr>
+            </a:lvl3pPr>
+            <a:lvl4pPr algn="l">
+              <a:defRPr sz="1800" b="0">
+                <a:solidFill>
+                  <a:srgbClr val="24324A"/>
+                </a:solidFill>
+                <a:latin typeface="Malgun Gothic"/>
+                <a:ea typeface="Malgun Gothic"/>
+                <a:cs typeface="Malgun Gothic"/>
+              </a:defRPr>
+            </a:lvl4pPr>
+            <a:lvl5pPr algn="l">
+              <a:defRPr sz="1800" b="0">
+                <a:solidFill>
+                  <a:srgbClr val="24324A"/>
+                </a:solidFill>
+                <a:latin typeface="Malgun Gothic"/>
+                <a:ea typeface="Malgun Gothic"/>
+                <a:cs typeface="Malgun Gothic"/>
+              </a:defRPr>
+            </a:lvl5pPr>
+            <a:lvl6pPr algn="l">
+              <a:defRPr sz="1800" b="0">
+                <a:solidFill>
+                  <a:srgbClr val="24324A"/>
+                </a:solidFill>
+                <a:latin typeface="Malgun Gothic"/>
+                <a:ea typeface="Malgun Gothic"/>
+                <a:cs typeface="Malgun Gothic"/>
+              </a:defRPr>
+            </a:lvl6pPr>
+            <a:lvl7pPr algn="l">
+              <a:defRPr sz="1800" b="0">
+                <a:solidFill>
+                  <a:srgbClr val="24324A"/>
+                </a:solidFill>
+                <a:latin typeface="Malgun Gothic"/>
+                <a:ea typeface="Malgun Gothic"/>
+                <a:cs typeface="Malgun Gothic"/>
+              </a:defRPr>
+            </a:lvl7pPr>
+            <a:lvl8pPr algn="l">
+              <a:defRPr sz="1800" b="0">
+                <a:solidFill>
+                  <a:srgbClr val="24324A"/>
+                </a:solidFill>
+                <a:latin typeface="Malgun Gothic"/>
+                <a:ea typeface="Malgun Gothic"/>
+                <a:cs typeface="Malgun Gothic"/>
+              </a:defRPr>
+            </a:lvl8pPr>
+            <a:lvl9pPr algn="l">
+              <a:defRPr sz="1800" b="0">
+                <a:solidFill>
+                  <a:srgbClr val="24324A"/>
+                </a:solidFill>
+                <a:latin typeface="Malgun Gothic"/>
+                <a:ea typeface="Malgun Gothic"/>
+                <a:cs typeface="Malgun Gothic"/>
+              </a:defRPr>
+            </a:lvl9pPr>
           </a:lstStyle>
           <a:p xmlns:a="http://schemas.openxmlformats.org/drawingml/2006/main">
             <a:pPr algn="l">
+              <a:buNone/>
               <a:defRPr sz="1800" b="0">
                 <a:solidFill>
                   <a:srgbClr val="24324A"/>
@@ -6410,6 +9036,7 @@
           </a:p>
           <a:p xmlns:a="http://schemas.openxmlformats.org/drawingml/2006/main">
             <a:pPr algn="l">
+              <a:buNone/>
               <a:defRPr sz="1800" b="0">
                 <a:solidFill>
                   <a:srgbClr val="24324A"/>
@@ -6506,9 +9133,100 @@
                 <a:cs typeface="Malgun Gothic"/>
               </a:defRPr>
             </a:defPPr>
+            <a:lvl1pPr algn="l">
+              <a:defRPr sz="2400" b="0">
+                <a:solidFill>
+                  <a:srgbClr val="FFFFFF"/>
+                </a:solidFill>
+                <a:latin typeface="Malgun Gothic"/>
+                <a:ea typeface="Malgun Gothic"/>
+                <a:cs typeface="Malgun Gothic"/>
+              </a:defRPr>
+            </a:lvl1pPr>
+            <a:lvl2pPr algn="l">
+              <a:defRPr sz="2400" b="0">
+                <a:solidFill>
+                  <a:srgbClr val="FFFFFF"/>
+                </a:solidFill>
+                <a:latin typeface="Malgun Gothic"/>
+                <a:ea typeface="Malgun Gothic"/>
+                <a:cs typeface="Malgun Gothic"/>
+              </a:defRPr>
+            </a:lvl2pPr>
+            <a:lvl3pPr algn="l">
+              <a:defRPr sz="2400" b="0">
+                <a:solidFill>
+                  <a:srgbClr val="FFFFFF"/>
+                </a:solidFill>
+                <a:latin typeface="Malgun Gothic"/>
+                <a:ea typeface="Malgun Gothic"/>
+                <a:cs typeface="Malgun Gothic"/>
+              </a:defRPr>
+            </a:lvl3pPr>
+            <a:lvl4pPr algn="l">
+              <a:defRPr sz="2400" b="0">
+                <a:solidFill>
+                  <a:srgbClr val="FFFFFF"/>
+                </a:solidFill>
+                <a:latin typeface="Malgun Gothic"/>
+                <a:ea typeface="Malgun Gothic"/>
+                <a:cs typeface="Malgun Gothic"/>
+              </a:defRPr>
+            </a:lvl4pPr>
+            <a:lvl5pPr algn="l">
+              <a:defRPr sz="2400" b="0">
+                <a:solidFill>
+                  <a:srgbClr val="FFFFFF"/>
+                </a:solidFill>
+                <a:latin typeface="Malgun Gothic"/>
+                <a:ea typeface="Malgun Gothic"/>
+                <a:cs typeface="Malgun Gothic"/>
+              </a:defRPr>
+            </a:lvl5pPr>
+            <a:lvl6pPr algn="l">
+              <a:defRPr sz="2400" b="0">
+                <a:solidFill>
+                  <a:srgbClr val="FFFFFF"/>
+                </a:solidFill>
+                <a:latin typeface="Malgun Gothic"/>
+                <a:ea typeface="Malgun Gothic"/>
+                <a:cs typeface="Malgun Gothic"/>
+              </a:defRPr>
+            </a:lvl6pPr>
+            <a:lvl7pPr algn="l">
+              <a:defRPr sz="2400" b="0">
+                <a:solidFill>
+                  <a:srgbClr val="FFFFFF"/>
+                </a:solidFill>
+                <a:latin typeface="Malgun Gothic"/>
+                <a:ea typeface="Malgun Gothic"/>
+                <a:cs typeface="Malgun Gothic"/>
+              </a:defRPr>
+            </a:lvl7pPr>
+            <a:lvl8pPr algn="l">
+              <a:defRPr sz="2400" b="0">
+                <a:solidFill>
+                  <a:srgbClr val="FFFFFF"/>
+                </a:solidFill>
+                <a:latin typeface="Malgun Gothic"/>
+                <a:ea typeface="Malgun Gothic"/>
+                <a:cs typeface="Malgun Gothic"/>
+              </a:defRPr>
+            </a:lvl8pPr>
+            <a:lvl9pPr algn="l">
+              <a:defRPr sz="2400" b="0">
+                <a:solidFill>
+                  <a:srgbClr val="FFFFFF"/>
+                </a:solidFill>
+                <a:latin typeface="Malgun Gothic"/>
+                <a:ea typeface="Malgun Gothic"/>
+                <a:cs typeface="Malgun Gothic"/>
+              </a:defRPr>
+            </a:lvl9pPr>
           </a:lstStyle>
           <a:p xmlns:a="http://schemas.openxmlformats.org/drawingml/2006/main">
             <a:pPr algn="l">
+              <a:buNone/>
               <a:defRPr sz="2400" b="0">
                 <a:solidFill>
                   <a:srgbClr val="FFFFFF"/>
@@ -6574,9 +9292,100 @@
                 <a:cs typeface="Malgun Gothic"/>
               </a:defRPr>
             </a:defPPr>
+            <a:lvl1pPr algn="l">
+              <a:defRPr sz="1800" b="0">
+                <a:solidFill>
+                  <a:srgbClr val="24324A"/>
+                </a:solidFill>
+                <a:latin typeface="Malgun Gothic"/>
+                <a:ea typeface="Malgun Gothic"/>
+                <a:cs typeface="Malgun Gothic"/>
+              </a:defRPr>
+            </a:lvl1pPr>
+            <a:lvl2pPr algn="l">
+              <a:defRPr sz="1800" b="0">
+                <a:solidFill>
+                  <a:srgbClr val="24324A"/>
+                </a:solidFill>
+                <a:latin typeface="Malgun Gothic"/>
+                <a:ea typeface="Malgun Gothic"/>
+                <a:cs typeface="Malgun Gothic"/>
+              </a:defRPr>
+            </a:lvl2pPr>
+            <a:lvl3pPr algn="l">
+              <a:defRPr sz="1800" b="0">
+                <a:solidFill>
+                  <a:srgbClr val="24324A"/>
+                </a:solidFill>
+                <a:latin typeface="Malgun Gothic"/>
+                <a:ea typeface="Malgun Gothic"/>
+                <a:cs typeface="Malgun Gothic"/>
+              </a:defRPr>
+            </a:lvl3pPr>
+            <a:lvl4pPr algn="l">
+              <a:defRPr sz="1800" b="0">
+                <a:solidFill>
+                  <a:srgbClr val="24324A"/>
+                </a:solidFill>
+                <a:latin typeface="Malgun Gothic"/>
+                <a:ea typeface="Malgun Gothic"/>
+                <a:cs typeface="Malgun Gothic"/>
+              </a:defRPr>
+            </a:lvl4pPr>
+            <a:lvl5pPr algn="l">
+              <a:defRPr sz="1800" b="0">
+                <a:solidFill>
+                  <a:srgbClr val="24324A"/>
+                </a:solidFill>
+                <a:latin typeface="Malgun Gothic"/>
+                <a:ea typeface="Malgun Gothic"/>
+                <a:cs typeface="Malgun Gothic"/>
+              </a:defRPr>
+            </a:lvl5pPr>
+            <a:lvl6pPr algn="l">
+              <a:defRPr sz="1800" b="0">
+                <a:solidFill>
+                  <a:srgbClr val="24324A"/>
+                </a:solidFill>
+                <a:latin typeface="Malgun Gothic"/>
+                <a:ea typeface="Malgun Gothic"/>
+                <a:cs typeface="Malgun Gothic"/>
+              </a:defRPr>
+            </a:lvl6pPr>
+            <a:lvl7pPr algn="l">
+              <a:defRPr sz="1800" b="0">
+                <a:solidFill>
+                  <a:srgbClr val="24324A"/>
+                </a:solidFill>
+                <a:latin typeface="Malgun Gothic"/>
+                <a:ea typeface="Malgun Gothic"/>
+                <a:cs typeface="Malgun Gothic"/>
+              </a:defRPr>
+            </a:lvl7pPr>
+            <a:lvl8pPr algn="l">
+              <a:defRPr sz="1800" b="0">
+                <a:solidFill>
+                  <a:srgbClr val="24324A"/>
+                </a:solidFill>
+                <a:latin typeface="Malgun Gothic"/>
+                <a:ea typeface="Malgun Gothic"/>
+                <a:cs typeface="Malgun Gothic"/>
+              </a:defRPr>
+            </a:lvl8pPr>
+            <a:lvl9pPr algn="l">
+              <a:defRPr sz="1800" b="0">
+                <a:solidFill>
+                  <a:srgbClr val="24324A"/>
+                </a:solidFill>
+                <a:latin typeface="Malgun Gothic"/>
+                <a:ea typeface="Malgun Gothic"/>
+                <a:cs typeface="Malgun Gothic"/>
+              </a:defRPr>
+            </a:lvl9pPr>
           </a:lstStyle>
           <a:p xmlns:a="http://schemas.openxmlformats.org/drawingml/2006/main">
             <a:pPr algn="l">
+              <a:buNone/>
               <a:defRPr sz="1800" b="0">
                 <a:solidFill>
                   <a:srgbClr val="24324A"/>
@@ -6600,6 +9409,7 @@
           </a:p>
           <a:p xmlns:a="http://schemas.openxmlformats.org/drawingml/2006/main">
             <a:pPr algn="l">
+              <a:buNone/>
               <a:defRPr sz="1800" b="0">
                 <a:solidFill>
                   <a:srgbClr val="24324A"/>
@@ -6623,6 +9433,7 @@
           </a:p>
           <a:p xmlns:a="http://schemas.openxmlformats.org/drawingml/2006/main">
             <a:pPr algn="l">
+              <a:buNone/>
               <a:defRPr sz="1800" b="0">
                 <a:solidFill>
                   <a:srgbClr val="24324A"/>
@@ -6646,6 +9457,7 @@
           </a:p>
           <a:p xmlns:a="http://schemas.openxmlformats.org/drawingml/2006/main">
             <a:pPr algn="l">
+              <a:buNone/>
               <a:defRPr sz="1800" b="0">
                 <a:solidFill>
                   <a:srgbClr val="24324A"/>
@@ -6669,6 +9481,7 @@
           </a:p>
           <a:p xmlns:a="http://schemas.openxmlformats.org/drawingml/2006/main">
             <a:pPr algn="l">
+              <a:buNone/>
               <a:defRPr sz="1800" b="0">
                 <a:solidFill>
                   <a:srgbClr val="24324A"/>
@@ -6734,9 +9547,100 @@
                 <a:cs typeface="Malgun Gothic"/>
               </a:defRPr>
             </a:defPPr>
+            <a:lvl1pPr algn="l">
+              <a:defRPr sz="1800" b="0">
+                <a:solidFill>
+                  <a:srgbClr val="24324A"/>
+                </a:solidFill>
+                <a:latin typeface="Malgun Gothic"/>
+                <a:ea typeface="Malgun Gothic"/>
+                <a:cs typeface="Malgun Gothic"/>
+              </a:defRPr>
+            </a:lvl1pPr>
+            <a:lvl2pPr algn="l">
+              <a:defRPr sz="1800" b="0">
+                <a:solidFill>
+                  <a:srgbClr val="24324A"/>
+                </a:solidFill>
+                <a:latin typeface="Malgun Gothic"/>
+                <a:ea typeface="Malgun Gothic"/>
+                <a:cs typeface="Malgun Gothic"/>
+              </a:defRPr>
+            </a:lvl2pPr>
+            <a:lvl3pPr algn="l">
+              <a:defRPr sz="1800" b="0">
+                <a:solidFill>
+                  <a:srgbClr val="24324A"/>
+                </a:solidFill>
+                <a:latin typeface="Malgun Gothic"/>
+                <a:ea typeface="Malgun Gothic"/>
+                <a:cs typeface="Malgun Gothic"/>
+              </a:defRPr>
+            </a:lvl3pPr>
+            <a:lvl4pPr algn="l">
+              <a:defRPr sz="1800" b="0">
+                <a:solidFill>
+                  <a:srgbClr val="24324A"/>
+                </a:solidFill>
+                <a:latin typeface="Malgun Gothic"/>
+                <a:ea typeface="Malgun Gothic"/>
+                <a:cs typeface="Malgun Gothic"/>
+              </a:defRPr>
+            </a:lvl4pPr>
+            <a:lvl5pPr algn="l">
+              <a:defRPr sz="1800" b="0">
+                <a:solidFill>
+                  <a:srgbClr val="24324A"/>
+                </a:solidFill>
+                <a:latin typeface="Malgun Gothic"/>
+                <a:ea typeface="Malgun Gothic"/>
+                <a:cs typeface="Malgun Gothic"/>
+              </a:defRPr>
+            </a:lvl5pPr>
+            <a:lvl6pPr algn="l">
+              <a:defRPr sz="1800" b="0">
+                <a:solidFill>
+                  <a:srgbClr val="24324A"/>
+                </a:solidFill>
+                <a:latin typeface="Malgun Gothic"/>
+                <a:ea typeface="Malgun Gothic"/>
+                <a:cs typeface="Malgun Gothic"/>
+              </a:defRPr>
+            </a:lvl6pPr>
+            <a:lvl7pPr algn="l">
+              <a:defRPr sz="1800" b="0">
+                <a:solidFill>
+                  <a:srgbClr val="24324A"/>
+                </a:solidFill>
+                <a:latin typeface="Malgun Gothic"/>
+                <a:ea typeface="Malgun Gothic"/>
+                <a:cs typeface="Malgun Gothic"/>
+              </a:defRPr>
+            </a:lvl7pPr>
+            <a:lvl8pPr algn="l">
+              <a:defRPr sz="1800" b="0">
+                <a:solidFill>
+                  <a:srgbClr val="24324A"/>
+                </a:solidFill>
+                <a:latin typeface="Malgun Gothic"/>
+                <a:ea typeface="Malgun Gothic"/>
+                <a:cs typeface="Malgun Gothic"/>
+              </a:defRPr>
+            </a:lvl8pPr>
+            <a:lvl9pPr algn="l">
+              <a:defRPr sz="1800" b="0">
+                <a:solidFill>
+                  <a:srgbClr val="24324A"/>
+                </a:solidFill>
+                <a:latin typeface="Malgun Gothic"/>
+                <a:ea typeface="Malgun Gothic"/>
+                <a:cs typeface="Malgun Gothic"/>
+              </a:defRPr>
+            </a:lvl9pPr>
           </a:lstStyle>
           <a:p xmlns:a="http://schemas.openxmlformats.org/drawingml/2006/main">
             <a:pPr algn="l">
+              <a:buNone/>
               <a:defRPr sz="1800" b="0">
                 <a:solidFill>
                   <a:srgbClr val="24324A"/>
@@ -6760,6 +9664,7 @@
           </a:p>
           <a:p xmlns:a="http://schemas.openxmlformats.org/drawingml/2006/main">
             <a:pPr algn="l">
+              <a:buNone/>
               <a:defRPr sz="1800" b="0">
                 <a:solidFill>
                   <a:srgbClr val="24324A"/>
@@ -6783,6 +9688,7 @@
           </a:p>
           <a:p xmlns:a="http://schemas.openxmlformats.org/drawingml/2006/main">
             <a:pPr algn="l">
+              <a:buNone/>
               <a:defRPr sz="1800" b="0">
                 <a:solidFill>
                   <a:srgbClr val="24324A"/>
@@ -6848,9 +9754,100 @@
                 <a:cs typeface="Malgun Gothic"/>
               </a:defRPr>
             </a:defPPr>
+            <a:lvl1pPr algn="l">
+              <a:defRPr sz="1800" b="1">
+                <a:solidFill>
+                  <a:srgbClr val="24324A"/>
+                </a:solidFill>
+                <a:latin typeface="Malgun Gothic"/>
+                <a:ea typeface="Malgun Gothic"/>
+                <a:cs typeface="Malgun Gothic"/>
+              </a:defRPr>
+            </a:lvl1pPr>
+            <a:lvl2pPr algn="l">
+              <a:defRPr sz="1800" b="1">
+                <a:solidFill>
+                  <a:srgbClr val="24324A"/>
+                </a:solidFill>
+                <a:latin typeface="Malgun Gothic"/>
+                <a:ea typeface="Malgun Gothic"/>
+                <a:cs typeface="Malgun Gothic"/>
+              </a:defRPr>
+            </a:lvl2pPr>
+            <a:lvl3pPr algn="l">
+              <a:defRPr sz="1800" b="1">
+                <a:solidFill>
+                  <a:srgbClr val="24324A"/>
+                </a:solidFill>
+                <a:latin typeface="Malgun Gothic"/>
+                <a:ea typeface="Malgun Gothic"/>
+                <a:cs typeface="Malgun Gothic"/>
+              </a:defRPr>
+            </a:lvl3pPr>
+            <a:lvl4pPr algn="l">
+              <a:defRPr sz="1800" b="1">
+                <a:solidFill>
+                  <a:srgbClr val="24324A"/>
+                </a:solidFill>
+                <a:latin typeface="Malgun Gothic"/>
+                <a:ea typeface="Malgun Gothic"/>
+                <a:cs typeface="Malgun Gothic"/>
+              </a:defRPr>
+            </a:lvl4pPr>
+            <a:lvl5pPr algn="l">
+              <a:defRPr sz="1800" b="1">
+                <a:solidFill>
+                  <a:srgbClr val="24324A"/>
+                </a:solidFill>
+                <a:latin typeface="Malgun Gothic"/>
+                <a:ea typeface="Malgun Gothic"/>
+                <a:cs typeface="Malgun Gothic"/>
+              </a:defRPr>
+            </a:lvl5pPr>
+            <a:lvl6pPr algn="l">
+              <a:defRPr sz="1800" b="1">
+                <a:solidFill>
+                  <a:srgbClr val="24324A"/>
+                </a:solidFill>
+                <a:latin typeface="Malgun Gothic"/>
+                <a:ea typeface="Malgun Gothic"/>
+                <a:cs typeface="Malgun Gothic"/>
+              </a:defRPr>
+            </a:lvl6pPr>
+            <a:lvl7pPr algn="l">
+              <a:defRPr sz="1800" b="1">
+                <a:solidFill>
+                  <a:srgbClr val="24324A"/>
+                </a:solidFill>
+                <a:latin typeface="Malgun Gothic"/>
+                <a:ea typeface="Malgun Gothic"/>
+                <a:cs typeface="Malgun Gothic"/>
+              </a:defRPr>
+            </a:lvl7pPr>
+            <a:lvl8pPr algn="l">
+              <a:defRPr sz="1800" b="1">
+                <a:solidFill>
+                  <a:srgbClr val="24324A"/>
+                </a:solidFill>
+                <a:latin typeface="Malgun Gothic"/>
+                <a:ea typeface="Malgun Gothic"/>
+                <a:cs typeface="Malgun Gothic"/>
+              </a:defRPr>
+            </a:lvl8pPr>
+            <a:lvl9pPr algn="l">
+              <a:defRPr sz="1800" b="1">
+                <a:solidFill>
+                  <a:srgbClr val="24324A"/>
+                </a:solidFill>
+                <a:latin typeface="Malgun Gothic"/>
+                <a:ea typeface="Malgun Gothic"/>
+                <a:cs typeface="Malgun Gothic"/>
+              </a:defRPr>
+            </a:lvl9pPr>
           </a:lstStyle>
           <a:p xmlns:a="http://schemas.openxmlformats.org/drawingml/2006/main">
             <a:pPr algn="l">
+              <a:buNone/>
               <a:defRPr sz="1800" b="1">
                 <a:solidFill>
                   <a:srgbClr val="24324A"/>
@@ -6916,9 +9913,100 @@
                 <a:cs typeface="Malgun Gothic"/>
               </a:defRPr>
             </a:defPPr>
+            <a:lvl1pPr algn="l">
+              <a:defRPr sz="1800" b="0">
+                <a:solidFill>
+                  <a:srgbClr val="24324A"/>
+                </a:solidFill>
+                <a:latin typeface="Malgun Gothic"/>
+                <a:ea typeface="Malgun Gothic"/>
+                <a:cs typeface="Malgun Gothic"/>
+              </a:defRPr>
+            </a:lvl1pPr>
+            <a:lvl2pPr algn="l">
+              <a:defRPr sz="1800" b="0">
+                <a:solidFill>
+                  <a:srgbClr val="24324A"/>
+                </a:solidFill>
+                <a:latin typeface="Malgun Gothic"/>
+                <a:ea typeface="Malgun Gothic"/>
+                <a:cs typeface="Malgun Gothic"/>
+              </a:defRPr>
+            </a:lvl2pPr>
+            <a:lvl3pPr algn="l">
+              <a:defRPr sz="1800" b="0">
+                <a:solidFill>
+                  <a:srgbClr val="24324A"/>
+                </a:solidFill>
+                <a:latin typeface="Malgun Gothic"/>
+                <a:ea typeface="Malgun Gothic"/>
+                <a:cs typeface="Malgun Gothic"/>
+              </a:defRPr>
+            </a:lvl3pPr>
+            <a:lvl4pPr algn="l">
+              <a:defRPr sz="1800" b="0">
+                <a:solidFill>
+                  <a:srgbClr val="24324A"/>
+                </a:solidFill>
+                <a:latin typeface="Malgun Gothic"/>
+                <a:ea typeface="Malgun Gothic"/>
+                <a:cs typeface="Malgun Gothic"/>
+              </a:defRPr>
+            </a:lvl4pPr>
+            <a:lvl5pPr algn="l">
+              <a:defRPr sz="1800" b="0">
+                <a:solidFill>
+                  <a:srgbClr val="24324A"/>
+                </a:solidFill>
+                <a:latin typeface="Malgun Gothic"/>
+                <a:ea typeface="Malgun Gothic"/>
+                <a:cs typeface="Malgun Gothic"/>
+              </a:defRPr>
+            </a:lvl5pPr>
+            <a:lvl6pPr algn="l">
+              <a:defRPr sz="1800" b="0">
+                <a:solidFill>
+                  <a:srgbClr val="24324A"/>
+                </a:solidFill>
+                <a:latin typeface="Malgun Gothic"/>
+                <a:ea typeface="Malgun Gothic"/>
+                <a:cs typeface="Malgun Gothic"/>
+              </a:defRPr>
+            </a:lvl6pPr>
+            <a:lvl7pPr algn="l">
+              <a:defRPr sz="1800" b="0">
+                <a:solidFill>
+                  <a:srgbClr val="24324A"/>
+                </a:solidFill>
+                <a:latin typeface="Malgun Gothic"/>
+                <a:ea typeface="Malgun Gothic"/>
+                <a:cs typeface="Malgun Gothic"/>
+              </a:defRPr>
+            </a:lvl7pPr>
+            <a:lvl8pPr algn="l">
+              <a:defRPr sz="1800" b="0">
+                <a:solidFill>
+                  <a:srgbClr val="24324A"/>
+                </a:solidFill>
+                <a:latin typeface="Malgun Gothic"/>
+                <a:ea typeface="Malgun Gothic"/>
+                <a:cs typeface="Malgun Gothic"/>
+              </a:defRPr>
+            </a:lvl8pPr>
+            <a:lvl9pPr algn="l">
+              <a:defRPr sz="1800" b="0">
+                <a:solidFill>
+                  <a:srgbClr val="24324A"/>
+                </a:solidFill>
+                <a:latin typeface="Malgun Gothic"/>
+                <a:ea typeface="Malgun Gothic"/>
+                <a:cs typeface="Malgun Gothic"/>
+              </a:defRPr>
+            </a:lvl9pPr>
           </a:lstStyle>
           <a:p xmlns:a="http://schemas.openxmlformats.org/drawingml/2006/main">
             <a:pPr algn="l">
+              <a:buNone/>
               <a:defRPr sz="1800" b="0">
                 <a:solidFill>
                   <a:srgbClr val="24324A"/>
@@ -6942,6 +10030,7 @@
           </a:p>
           <a:p xmlns:a="http://schemas.openxmlformats.org/drawingml/2006/main">
             <a:pPr algn="l">
+              <a:buNone/>
               <a:defRPr sz="1800" b="0">
                 <a:solidFill>
                   <a:srgbClr val="24324A"/>
@@ -7007,9 +10096,100 @@
                 <a:cs typeface="Malgun Gothic"/>
               </a:defRPr>
             </a:defPPr>
+            <a:lvl1pPr algn="l">
+              <a:defRPr sz="1800" b="0">
+                <a:solidFill>
+                  <a:srgbClr val="24324A"/>
+                </a:solidFill>
+                <a:latin typeface="Malgun Gothic"/>
+                <a:ea typeface="Malgun Gothic"/>
+                <a:cs typeface="Malgun Gothic"/>
+              </a:defRPr>
+            </a:lvl1pPr>
+            <a:lvl2pPr algn="l">
+              <a:defRPr sz="1800" b="0">
+                <a:solidFill>
+                  <a:srgbClr val="24324A"/>
+                </a:solidFill>
+                <a:latin typeface="Malgun Gothic"/>
+                <a:ea typeface="Malgun Gothic"/>
+                <a:cs typeface="Malgun Gothic"/>
+              </a:defRPr>
+            </a:lvl2pPr>
+            <a:lvl3pPr algn="l">
+              <a:defRPr sz="1800" b="0">
+                <a:solidFill>
+                  <a:srgbClr val="24324A"/>
+                </a:solidFill>
+                <a:latin typeface="Malgun Gothic"/>
+                <a:ea typeface="Malgun Gothic"/>
+                <a:cs typeface="Malgun Gothic"/>
+              </a:defRPr>
+            </a:lvl3pPr>
+            <a:lvl4pPr algn="l">
+              <a:defRPr sz="1800" b="0">
+                <a:solidFill>
+                  <a:srgbClr val="24324A"/>
+                </a:solidFill>
+                <a:latin typeface="Malgun Gothic"/>
+                <a:ea typeface="Malgun Gothic"/>
+                <a:cs typeface="Malgun Gothic"/>
+              </a:defRPr>
+            </a:lvl4pPr>
+            <a:lvl5pPr algn="l">
+              <a:defRPr sz="1800" b="0">
+                <a:solidFill>
+                  <a:srgbClr val="24324A"/>
+                </a:solidFill>
+                <a:latin typeface="Malgun Gothic"/>
+                <a:ea typeface="Malgun Gothic"/>
+                <a:cs typeface="Malgun Gothic"/>
+              </a:defRPr>
+            </a:lvl5pPr>
+            <a:lvl6pPr algn="l">
+              <a:defRPr sz="1800" b="0">
+                <a:solidFill>
+                  <a:srgbClr val="24324A"/>
+                </a:solidFill>
+                <a:latin typeface="Malgun Gothic"/>
+                <a:ea typeface="Malgun Gothic"/>
+                <a:cs typeface="Malgun Gothic"/>
+              </a:defRPr>
+            </a:lvl6pPr>
+            <a:lvl7pPr algn="l">
+              <a:defRPr sz="1800" b="0">
+                <a:solidFill>
+                  <a:srgbClr val="24324A"/>
+                </a:solidFill>
+                <a:latin typeface="Malgun Gothic"/>
+                <a:ea typeface="Malgun Gothic"/>
+                <a:cs typeface="Malgun Gothic"/>
+              </a:defRPr>
+            </a:lvl7pPr>
+            <a:lvl8pPr algn="l">
+              <a:defRPr sz="1800" b="0">
+                <a:solidFill>
+                  <a:srgbClr val="24324A"/>
+                </a:solidFill>
+                <a:latin typeface="Malgun Gothic"/>
+                <a:ea typeface="Malgun Gothic"/>
+                <a:cs typeface="Malgun Gothic"/>
+              </a:defRPr>
+            </a:lvl8pPr>
+            <a:lvl9pPr algn="l">
+              <a:defRPr sz="1800" b="0">
+                <a:solidFill>
+                  <a:srgbClr val="24324A"/>
+                </a:solidFill>
+                <a:latin typeface="Malgun Gothic"/>
+                <a:ea typeface="Malgun Gothic"/>
+                <a:cs typeface="Malgun Gothic"/>
+              </a:defRPr>
+            </a:lvl9pPr>
           </a:lstStyle>
           <a:p xmlns:a="http://schemas.openxmlformats.org/drawingml/2006/main">
             <a:pPr algn="l">
+              <a:buNone/>
               <a:defRPr sz="1800" b="0">
                 <a:solidFill>
                   <a:srgbClr val="24324A"/>
@@ -7033,6 +10213,7 @@
           </a:p>
           <a:p xmlns:a="http://schemas.openxmlformats.org/drawingml/2006/main">
             <a:pPr algn="l">
+              <a:buNone/>
               <a:defRPr sz="1800" b="0">
                 <a:solidFill>
                   <a:srgbClr val="24324A"/>
@@ -7056,6 +10237,7 @@
           </a:p>
           <a:p xmlns:a="http://schemas.openxmlformats.org/drawingml/2006/main">
             <a:pPr algn="l">
+              <a:buNone/>
               <a:defRPr sz="1800" b="0">
                 <a:solidFill>
                   <a:srgbClr val="24324A"/>
@@ -7121,9 +10303,100 @@
                 <a:cs typeface="Malgun Gothic"/>
               </a:defRPr>
             </a:defPPr>
+            <a:lvl1pPr algn="l">
+              <a:defRPr sz="1800" b="0">
+                <a:solidFill>
+                  <a:srgbClr val="24324A"/>
+                </a:solidFill>
+                <a:latin typeface="Malgun Gothic"/>
+                <a:ea typeface="Malgun Gothic"/>
+                <a:cs typeface="Malgun Gothic"/>
+              </a:defRPr>
+            </a:lvl1pPr>
+            <a:lvl2pPr algn="l">
+              <a:defRPr sz="1800" b="0">
+                <a:solidFill>
+                  <a:srgbClr val="24324A"/>
+                </a:solidFill>
+                <a:latin typeface="Malgun Gothic"/>
+                <a:ea typeface="Malgun Gothic"/>
+                <a:cs typeface="Malgun Gothic"/>
+              </a:defRPr>
+            </a:lvl2pPr>
+            <a:lvl3pPr algn="l">
+              <a:defRPr sz="1800" b="0">
+                <a:solidFill>
+                  <a:srgbClr val="24324A"/>
+                </a:solidFill>
+                <a:latin typeface="Malgun Gothic"/>
+                <a:ea typeface="Malgun Gothic"/>
+                <a:cs typeface="Malgun Gothic"/>
+              </a:defRPr>
+            </a:lvl3pPr>
+            <a:lvl4pPr algn="l">
+              <a:defRPr sz="1800" b="0">
+                <a:solidFill>
+                  <a:srgbClr val="24324A"/>
+                </a:solidFill>
+                <a:latin typeface="Malgun Gothic"/>
+                <a:ea typeface="Malgun Gothic"/>
+                <a:cs typeface="Malgun Gothic"/>
+              </a:defRPr>
+            </a:lvl4pPr>
+            <a:lvl5pPr algn="l">
+              <a:defRPr sz="1800" b="0">
+                <a:solidFill>
+                  <a:srgbClr val="24324A"/>
+                </a:solidFill>
+                <a:latin typeface="Malgun Gothic"/>
+                <a:ea typeface="Malgun Gothic"/>
+                <a:cs typeface="Malgun Gothic"/>
+              </a:defRPr>
+            </a:lvl5pPr>
+            <a:lvl6pPr algn="l">
+              <a:defRPr sz="1800" b="0">
+                <a:solidFill>
+                  <a:srgbClr val="24324A"/>
+                </a:solidFill>
+                <a:latin typeface="Malgun Gothic"/>
+                <a:ea typeface="Malgun Gothic"/>
+                <a:cs typeface="Malgun Gothic"/>
+              </a:defRPr>
+            </a:lvl6pPr>
+            <a:lvl7pPr algn="l">
+              <a:defRPr sz="1800" b="0">
+                <a:solidFill>
+                  <a:srgbClr val="24324A"/>
+                </a:solidFill>
+                <a:latin typeface="Malgun Gothic"/>
+                <a:ea typeface="Malgun Gothic"/>
+                <a:cs typeface="Malgun Gothic"/>
+              </a:defRPr>
+            </a:lvl7pPr>
+            <a:lvl8pPr algn="l">
+              <a:defRPr sz="1800" b="0">
+                <a:solidFill>
+                  <a:srgbClr val="24324A"/>
+                </a:solidFill>
+                <a:latin typeface="Malgun Gothic"/>
+                <a:ea typeface="Malgun Gothic"/>
+                <a:cs typeface="Malgun Gothic"/>
+              </a:defRPr>
+            </a:lvl8pPr>
+            <a:lvl9pPr algn="l">
+              <a:defRPr sz="1800" b="0">
+                <a:solidFill>
+                  <a:srgbClr val="24324A"/>
+                </a:solidFill>
+                <a:latin typeface="Malgun Gothic"/>
+                <a:ea typeface="Malgun Gothic"/>
+                <a:cs typeface="Malgun Gothic"/>
+              </a:defRPr>
+            </a:lvl9pPr>
           </a:lstStyle>
           <a:p xmlns:a="http://schemas.openxmlformats.org/drawingml/2006/main">
             <a:pPr algn="l">
+              <a:buNone/>
               <a:defRPr sz="1800" b="0">
                 <a:solidFill>
                   <a:srgbClr val="24324A"/>
@@ -7147,6 +10420,7 @@
           </a:p>
           <a:p xmlns:a="http://schemas.openxmlformats.org/drawingml/2006/main">
             <a:pPr algn="l">
+              <a:buNone/>
               <a:defRPr sz="1800" b="0">
                 <a:solidFill>
                   <a:srgbClr val="24324A"/>
@@ -7212,9 +10486,100 @@
                 <a:cs typeface="Malgun Gothic"/>
               </a:defRPr>
             </a:defPPr>
+            <a:lvl1pPr algn="l">
+              <a:defRPr sz="1800" b="0">
+                <a:solidFill>
+                  <a:srgbClr val="24324A"/>
+                </a:solidFill>
+                <a:latin typeface="Malgun Gothic"/>
+                <a:ea typeface="Malgun Gothic"/>
+                <a:cs typeface="Malgun Gothic"/>
+              </a:defRPr>
+            </a:lvl1pPr>
+            <a:lvl2pPr algn="l">
+              <a:defRPr sz="1800" b="0">
+                <a:solidFill>
+                  <a:srgbClr val="24324A"/>
+                </a:solidFill>
+                <a:latin typeface="Malgun Gothic"/>
+                <a:ea typeface="Malgun Gothic"/>
+                <a:cs typeface="Malgun Gothic"/>
+              </a:defRPr>
+            </a:lvl2pPr>
+            <a:lvl3pPr algn="l">
+              <a:defRPr sz="1800" b="0">
+                <a:solidFill>
+                  <a:srgbClr val="24324A"/>
+                </a:solidFill>
+                <a:latin typeface="Malgun Gothic"/>
+                <a:ea typeface="Malgun Gothic"/>
+                <a:cs typeface="Malgun Gothic"/>
+              </a:defRPr>
+            </a:lvl3pPr>
+            <a:lvl4pPr algn="l">
+              <a:defRPr sz="1800" b="0">
+                <a:solidFill>
+                  <a:srgbClr val="24324A"/>
+                </a:solidFill>
+                <a:latin typeface="Malgun Gothic"/>
+                <a:ea typeface="Malgun Gothic"/>
+                <a:cs typeface="Malgun Gothic"/>
+              </a:defRPr>
+            </a:lvl4pPr>
+            <a:lvl5pPr algn="l">
+              <a:defRPr sz="1800" b="0">
+                <a:solidFill>
+                  <a:srgbClr val="24324A"/>
+                </a:solidFill>
+                <a:latin typeface="Malgun Gothic"/>
+                <a:ea typeface="Malgun Gothic"/>
+                <a:cs typeface="Malgun Gothic"/>
+              </a:defRPr>
+            </a:lvl5pPr>
+            <a:lvl6pPr algn="l">
+              <a:defRPr sz="1800" b="0">
+                <a:solidFill>
+                  <a:srgbClr val="24324A"/>
+                </a:solidFill>
+                <a:latin typeface="Malgun Gothic"/>
+                <a:ea typeface="Malgun Gothic"/>
+                <a:cs typeface="Malgun Gothic"/>
+              </a:defRPr>
+            </a:lvl6pPr>
+            <a:lvl7pPr algn="l">
+              <a:defRPr sz="1800" b="0">
+                <a:solidFill>
+                  <a:srgbClr val="24324A"/>
+                </a:solidFill>
+                <a:latin typeface="Malgun Gothic"/>
+                <a:ea typeface="Malgun Gothic"/>
+                <a:cs typeface="Malgun Gothic"/>
+              </a:defRPr>
+            </a:lvl7pPr>
+            <a:lvl8pPr algn="l">
+              <a:defRPr sz="1800" b="0">
+                <a:solidFill>
+                  <a:srgbClr val="24324A"/>
+                </a:solidFill>
+                <a:latin typeface="Malgun Gothic"/>
+                <a:ea typeface="Malgun Gothic"/>
+                <a:cs typeface="Malgun Gothic"/>
+              </a:defRPr>
+            </a:lvl8pPr>
+            <a:lvl9pPr algn="l">
+              <a:defRPr sz="1800" b="0">
+                <a:solidFill>
+                  <a:srgbClr val="24324A"/>
+                </a:solidFill>
+                <a:latin typeface="Malgun Gothic"/>
+                <a:ea typeface="Malgun Gothic"/>
+                <a:cs typeface="Malgun Gothic"/>
+              </a:defRPr>
+            </a:lvl9pPr>
           </a:lstStyle>
           <a:p xmlns:a="http://schemas.openxmlformats.org/drawingml/2006/main">
             <a:pPr algn="l">
+              <a:buNone/>
               <a:defRPr sz="1800" b="0">
                 <a:solidFill>
                   <a:srgbClr val="24324A"/>
@@ -7238,6 +10603,7 @@
           </a:p>
           <a:p xmlns:a="http://schemas.openxmlformats.org/drawingml/2006/main">
             <a:pPr algn="l">
+              <a:buNone/>
               <a:defRPr sz="1800" b="0">
                 <a:solidFill>
                   <a:srgbClr val="24324A"/>
@@ -7303,9 +10669,100 @@
                 <a:cs typeface="Malgun Gothic"/>
               </a:defRPr>
             </a:defPPr>
+            <a:lvl1pPr algn="l">
+              <a:defRPr sz="1800" b="0">
+                <a:solidFill>
+                  <a:srgbClr val="24324A"/>
+                </a:solidFill>
+                <a:latin typeface="Malgun Gothic"/>
+                <a:ea typeface="Malgun Gothic"/>
+                <a:cs typeface="Malgun Gothic"/>
+              </a:defRPr>
+            </a:lvl1pPr>
+            <a:lvl2pPr algn="l">
+              <a:defRPr sz="1800" b="0">
+                <a:solidFill>
+                  <a:srgbClr val="24324A"/>
+                </a:solidFill>
+                <a:latin typeface="Malgun Gothic"/>
+                <a:ea typeface="Malgun Gothic"/>
+                <a:cs typeface="Malgun Gothic"/>
+              </a:defRPr>
+            </a:lvl2pPr>
+            <a:lvl3pPr algn="l">
+              <a:defRPr sz="1800" b="0">
+                <a:solidFill>
+                  <a:srgbClr val="24324A"/>
+                </a:solidFill>
+                <a:latin typeface="Malgun Gothic"/>
+                <a:ea typeface="Malgun Gothic"/>
+                <a:cs typeface="Malgun Gothic"/>
+              </a:defRPr>
+            </a:lvl3pPr>
+            <a:lvl4pPr algn="l">
+              <a:defRPr sz="1800" b="0">
+                <a:solidFill>
+                  <a:srgbClr val="24324A"/>
+                </a:solidFill>
+                <a:latin typeface="Malgun Gothic"/>
+                <a:ea typeface="Malgun Gothic"/>
+                <a:cs typeface="Malgun Gothic"/>
+              </a:defRPr>
+            </a:lvl4pPr>
+            <a:lvl5pPr algn="l">
+              <a:defRPr sz="1800" b="0">
+                <a:solidFill>
+                  <a:srgbClr val="24324A"/>
+                </a:solidFill>
+                <a:latin typeface="Malgun Gothic"/>
+                <a:ea typeface="Malgun Gothic"/>
+                <a:cs typeface="Malgun Gothic"/>
+              </a:defRPr>
+            </a:lvl5pPr>
+            <a:lvl6pPr algn="l">
+              <a:defRPr sz="1800" b="0">
+                <a:solidFill>
+                  <a:srgbClr val="24324A"/>
+                </a:solidFill>
+                <a:latin typeface="Malgun Gothic"/>
+                <a:ea typeface="Malgun Gothic"/>
+                <a:cs typeface="Malgun Gothic"/>
+              </a:defRPr>
+            </a:lvl6pPr>
+            <a:lvl7pPr algn="l">
+              <a:defRPr sz="1800" b="0">
+                <a:solidFill>
+                  <a:srgbClr val="24324A"/>
+                </a:solidFill>
+                <a:latin typeface="Malgun Gothic"/>
+                <a:ea typeface="Malgun Gothic"/>
+                <a:cs typeface="Malgun Gothic"/>
+              </a:defRPr>
+            </a:lvl7pPr>
+            <a:lvl8pPr algn="l">
+              <a:defRPr sz="1800" b="0">
+                <a:solidFill>
+                  <a:srgbClr val="24324A"/>
+                </a:solidFill>
+                <a:latin typeface="Malgun Gothic"/>
+                <a:ea typeface="Malgun Gothic"/>
+                <a:cs typeface="Malgun Gothic"/>
+              </a:defRPr>
+            </a:lvl8pPr>
+            <a:lvl9pPr algn="l">
+              <a:defRPr sz="1800" b="0">
+                <a:solidFill>
+                  <a:srgbClr val="24324A"/>
+                </a:solidFill>
+                <a:latin typeface="Malgun Gothic"/>
+                <a:ea typeface="Malgun Gothic"/>
+                <a:cs typeface="Malgun Gothic"/>
+              </a:defRPr>
+            </a:lvl9pPr>
           </a:lstStyle>
           <a:p xmlns:a="http://schemas.openxmlformats.org/drawingml/2006/main">
             <a:pPr algn="l">
+              <a:buNone/>
               <a:defRPr sz="1800" b="0">
                 <a:solidFill>
                   <a:srgbClr val="24324A"/>
@@ -7329,6 +10786,7 @@
           </a:p>
           <a:p xmlns:a="http://schemas.openxmlformats.org/drawingml/2006/main">
             <a:pPr algn="l">
+              <a:buNone/>
               <a:defRPr sz="1800" b="0">
                 <a:solidFill>
                   <a:srgbClr val="24324A"/>
@@ -7394,9 +10852,100 @@
                 <a:cs typeface="Malgun Gothic"/>
               </a:defRPr>
             </a:defPPr>
+            <a:lvl1pPr algn="l">
+              <a:defRPr sz="1800" b="0">
+                <a:solidFill>
+                  <a:srgbClr val="24324A"/>
+                </a:solidFill>
+                <a:latin typeface="Malgun Gothic"/>
+                <a:ea typeface="Malgun Gothic"/>
+                <a:cs typeface="Malgun Gothic"/>
+              </a:defRPr>
+            </a:lvl1pPr>
+            <a:lvl2pPr algn="l">
+              <a:defRPr sz="1800" b="0">
+                <a:solidFill>
+                  <a:srgbClr val="24324A"/>
+                </a:solidFill>
+                <a:latin typeface="Malgun Gothic"/>
+                <a:ea typeface="Malgun Gothic"/>
+                <a:cs typeface="Malgun Gothic"/>
+              </a:defRPr>
+            </a:lvl2pPr>
+            <a:lvl3pPr algn="l">
+              <a:defRPr sz="1800" b="0">
+                <a:solidFill>
+                  <a:srgbClr val="24324A"/>
+                </a:solidFill>
+                <a:latin typeface="Malgun Gothic"/>
+                <a:ea typeface="Malgun Gothic"/>
+                <a:cs typeface="Malgun Gothic"/>
+              </a:defRPr>
+            </a:lvl3pPr>
+            <a:lvl4pPr algn="l">
+              <a:defRPr sz="1800" b="0">
+                <a:solidFill>
+                  <a:srgbClr val="24324A"/>
+                </a:solidFill>
+                <a:latin typeface="Malgun Gothic"/>
+                <a:ea typeface="Malgun Gothic"/>
+                <a:cs typeface="Malgun Gothic"/>
+              </a:defRPr>
+            </a:lvl4pPr>
+            <a:lvl5pPr algn="l">
+              <a:defRPr sz="1800" b="0">
+                <a:solidFill>
+                  <a:srgbClr val="24324A"/>
+                </a:solidFill>
+                <a:latin typeface="Malgun Gothic"/>
+                <a:ea typeface="Malgun Gothic"/>
+                <a:cs typeface="Malgun Gothic"/>
+              </a:defRPr>
+            </a:lvl5pPr>
+            <a:lvl6pPr algn="l">
+              <a:defRPr sz="1800" b="0">
+                <a:solidFill>
+                  <a:srgbClr val="24324A"/>
+                </a:solidFill>
+                <a:latin typeface="Malgun Gothic"/>
+                <a:ea typeface="Malgun Gothic"/>
+                <a:cs typeface="Malgun Gothic"/>
+              </a:defRPr>
+            </a:lvl6pPr>
+            <a:lvl7pPr algn="l">
+              <a:defRPr sz="1800" b="0">
+                <a:solidFill>
+                  <a:srgbClr val="24324A"/>
+                </a:solidFill>
+                <a:latin typeface="Malgun Gothic"/>
+                <a:ea typeface="Malgun Gothic"/>
+                <a:cs typeface="Malgun Gothic"/>
+              </a:defRPr>
+            </a:lvl7pPr>
+            <a:lvl8pPr algn="l">
+              <a:defRPr sz="1800" b="0">
+                <a:solidFill>
+                  <a:srgbClr val="24324A"/>
+                </a:solidFill>
+                <a:latin typeface="Malgun Gothic"/>
+                <a:ea typeface="Malgun Gothic"/>
+                <a:cs typeface="Malgun Gothic"/>
+              </a:defRPr>
+            </a:lvl8pPr>
+            <a:lvl9pPr algn="l">
+              <a:defRPr sz="1800" b="0">
+                <a:solidFill>
+                  <a:srgbClr val="24324A"/>
+                </a:solidFill>
+                <a:latin typeface="Malgun Gothic"/>
+                <a:ea typeface="Malgun Gothic"/>
+                <a:cs typeface="Malgun Gothic"/>
+              </a:defRPr>
+            </a:lvl9pPr>
           </a:lstStyle>
           <a:p xmlns:a="http://schemas.openxmlformats.org/drawingml/2006/main">
             <a:pPr algn="l">
+              <a:buNone/>
               <a:defRPr sz="1800" b="0">
                 <a:solidFill>
                   <a:srgbClr val="24324A"/>
@@ -7420,6 +10969,7 @@
           </a:p>
           <a:p xmlns:a="http://schemas.openxmlformats.org/drawingml/2006/main">
             <a:pPr algn="l">
+              <a:buNone/>
               <a:defRPr sz="1800" b="0">
                 <a:solidFill>
                   <a:srgbClr val="24324A"/>
@@ -7485,9 +11035,100 @@
                 <a:cs typeface="Malgun Gothic"/>
               </a:defRPr>
             </a:defPPr>
+            <a:lvl1pPr algn="l">
+              <a:defRPr sz="1800" b="1">
+                <a:solidFill>
+                  <a:srgbClr val="24324A"/>
+                </a:solidFill>
+                <a:latin typeface="Malgun Gothic"/>
+                <a:ea typeface="Malgun Gothic"/>
+                <a:cs typeface="Malgun Gothic"/>
+              </a:defRPr>
+            </a:lvl1pPr>
+            <a:lvl2pPr algn="l">
+              <a:defRPr sz="1800" b="1">
+                <a:solidFill>
+                  <a:srgbClr val="24324A"/>
+                </a:solidFill>
+                <a:latin typeface="Malgun Gothic"/>
+                <a:ea typeface="Malgun Gothic"/>
+                <a:cs typeface="Malgun Gothic"/>
+              </a:defRPr>
+            </a:lvl2pPr>
+            <a:lvl3pPr algn="l">
+              <a:defRPr sz="1800" b="1">
+                <a:solidFill>
+                  <a:srgbClr val="24324A"/>
+                </a:solidFill>
+                <a:latin typeface="Malgun Gothic"/>
+                <a:ea typeface="Malgun Gothic"/>
+                <a:cs typeface="Malgun Gothic"/>
+              </a:defRPr>
+            </a:lvl3pPr>
+            <a:lvl4pPr algn="l">
+              <a:defRPr sz="1800" b="1">
+                <a:solidFill>
+                  <a:srgbClr val="24324A"/>
+                </a:solidFill>
+                <a:latin typeface="Malgun Gothic"/>
+                <a:ea typeface="Malgun Gothic"/>
+                <a:cs typeface="Malgun Gothic"/>
+              </a:defRPr>
+            </a:lvl4pPr>
+            <a:lvl5pPr algn="l">
+              <a:defRPr sz="1800" b="1">
+                <a:solidFill>
+                  <a:srgbClr val="24324A"/>
+                </a:solidFill>
+                <a:latin typeface="Malgun Gothic"/>
+                <a:ea typeface="Malgun Gothic"/>
+                <a:cs typeface="Malgun Gothic"/>
+              </a:defRPr>
+            </a:lvl5pPr>
+            <a:lvl6pPr algn="l">
+              <a:defRPr sz="1800" b="1">
+                <a:solidFill>
+                  <a:srgbClr val="24324A"/>
+                </a:solidFill>
+                <a:latin typeface="Malgun Gothic"/>
+                <a:ea typeface="Malgun Gothic"/>
+                <a:cs typeface="Malgun Gothic"/>
+              </a:defRPr>
+            </a:lvl6pPr>
+            <a:lvl7pPr algn="l">
+              <a:defRPr sz="1800" b="1">
+                <a:solidFill>
+                  <a:srgbClr val="24324A"/>
+                </a:solidFill>
+                <a:latin typeface="Malgun Gothic"/>
+                <a:ea typeface="Malgun Gothic"/>
+                <a:cs typeface="Malgun Gothic"/>
+              </a:defRPr>
+            </a:lvl7pPr>
+            <a:lvl8pPr algn="l">
+              <a:defRPr sz="1800" b="1">
+                <a:solidFill>
+                  <a:srgbClr val="24324A"/>
+                </a:solidFill>
+                <a:latin typeface="Malgun Gothic"/>
+                <a:ea typeface="Malgun Gothic"/>
+                <a:cs typeface="Malgun Gothic"/>
+              </a:defRPr>
+            </a:lvl8pPr>
+            <a:lvl9pPr algn="l">
+              <a:defRPr sz="1800" b="1">
+                <a:solidFill>
+                  <a:srgbClr val="24324A"/>
+                </a:solidFill>
+                <a:latin typeface="Malgun Gothic"/>
+                <a:ea typeface="Malgun Gothic"/>
+                <a:cs typeface="Malgun Gothic"/>
+              </a:defRPr>
+            </a:lvl9pPr>
           </a:lstStyle>
           <a:p xmlns:a="http://schemas.openxmlformats.org/drawingml/2006/main">
             <a:pPr algn="l">
+              <a:buNone/>
               <a:defRPr sz="1800" b="1">
                 <a:solidFill>
                   <a:srgbClr val="24324A"/>
@@ -7511,6 +11152,7 @@
           </a:p>
           <a:p xmlns:a="http://schemas.openxmlformats.org/drawingml/2006/main">
             <a:pPr algn="l">
+              <a:buNone/>
               <a:defRPr sz="1800" b="1">
                 <a:solidFill>
                   <a:srgbClr val="24324A"/>
@@ -7607,9 +11249,100 @@
                 <a:cs typeface="Malgun Gothic"/>
               </a:defRPr>
             </a:defPPr>
+            <a:lvl1pPr algn="l">
+              <a:defRPr sz="2400" b="0">
+                <a:solidFill>
+                  <a:srgbClr val="FFFFFF"/>
+                </a:solidFill>
+                <a:latin typeface="Malgun Gothic"/>
+                <a:ea typeface="Malgun Gothic"/>
+                <a:cs typeface="Malgun Gothic"/>
+              </a:defRPr>
+            </a:lvl1pPr>
+            <a:lvl2pPr algn="l">
+              <a:defRPr sz="2400" b="0">
+                <a:solidFill>
+                  <a:srgbClr val="FFFFFF"/>
+                </a:solidFill>
+                <a:latin typeface="Malgun Gothic"/>
+                <a:ea typeface="Malgun Gothic"/>
+                <a:cs typeface="Malgun Gothic"/>
+              </a:defRPr>
+            </a:lvl2pPr>
+            <a:lvl3pPr algn="l">
+              <a:defRPr sz="2400" b="0">
+                <a:solidFill>
+                  <a:srgbClr val="FFFFFF"/>
+                </a:solidFill>
+                <a:latin typeface="Malgun Gothic"/>
+                <a:ea typeface="Malgun Gothic"/>
+                <a:cs typeface="Malgun Gothic"/>
+              </a:defRPr>
+            </a:lvl3pPr>
+            <a:lvl4pPr algn="l">
+              <a:defRPr sz="2400" b="0">
+                <a:solidFill>
+                  <a:srgbClr val="FFFFFF"/>
+                </a:solidFill>
+                <a:latin typeface="Malgun Gothic"/>
+                <a:ea typeface="Malgun Gothic"/>
+                <a:cs typeface="Malgun Gothic"/>
+              </a:defRPr>
+            </a:lvl4pPr>
+            <a:lvl5pPr algn="l">
+              <a:defRPr sz="2400" b="0">
+                <a:solidFill>
+                  <a:srgbClr val="FFFFFF"/>
+                </a:solidFill>
+                <a:latin typeface="Malgun Gothic"/>
+                <a:ea typeface="Malgun Gothic"/>
+                <a:cs typeface="Malgun Gothic"/>
+              </a:defRPr>
+            </a:lvl5pPr>
+            <a:lvl6pPr algn="l">
+              <a:defRPr sz="2400" b="0">
+                <a:solidFill>
+                  <a:srgbClr val="FFFFFF"/>
+                </a:solidFill>
+                <a:latin typeface="Malgun Gothic"/>
+                <a:ea typeface="Malgun Gothic"/>
+                <a:cs typeface="Malgun Gothic"/>
+              </a:defRPr>
+            </a:lvl6pPr>
+            <a:lvl7pPr algn="l">
+              <a:defRPr sz="2400" b="0">
+                <a:solidFill>
+                  <a:srgbClr val="FFFFFF"/>
+                </a:solidFill>
+                <a:latin typeface="Malgun Gothic"/>
+                <a:ea typeface="Malgun Gothic"/>
+                <a:cs typeface="Malgun Gothic"/>
+              </a:defRPr>
+            </a:lvl7pPr>
+            <a:lvl8pPr algn="l">
+              <a:defRPr sz="2400" b="0">
+                <a:solidFill>
+                  <a:srgbClr val="FFFFFF"/>
+                </a:solidFill>
+                <a:latin typeface="Malgun Gothic"/>
+                <a:ea typeface="Malgun Gothic"/>
+                <a:cs typeface="Malgun Gothic"/>
+              </a:defRPr>
+            </a:lvl8pPr>
+            <a:lvl9pPr algn="l">
+              <a:defRPr sz="2400" b="0">
+                <a:solidFill>
+                  <a:srgbClr val="FFFFFF"/>
+                </a:solidFill>
+                <a:latin typeface="Malgun Gothic"/>
+                <a:ea typeface="Malgun Gothic"/>
+                <a:cs typeface="Malgun Gothic"/>
+              </a:defRPr>
+            </a:lvl9pPr>
           </a:lstStyle>
           <a:p xmlns:a="http://schemas.openxmlformats.org/drawingml/2006/main">
             <a:pPr algn="l">
+              <a:buNone/>
               <a:defRPr sz="2400" b="0">
                 <a:solidFill>
                   <a:srgbClr val="FFFFFF"/>
@@ -7675,9 +11408,100 @@
                 <a:cs typeface="Malgun Gothic"/>
               </a:defRPr>
             </a:defPPr>
+            <a:lvl1pPr algn="l">
+              <a:defRPr sz="1800" b="1">
+                <a:solidFill>
+                  <a:srgbClr val="24324A"/>
+                </a:solidFill>
+                <a:latin typeface="Malgun Gothic"/>
+                <a:ea typeface="Malgun Gothic"/>
+                <a:cs typeface="Malgun Gothic"/>
+              </a:defRPr>
+            </a:lvl1pPr>
+            <a:lvl2pPr algn="l">
+              <a:defRPr sz="1800" b="1">
+                <a:solidFill>
+                  <a:srgbClr val="24324A"/>
+                </a:solidFill>
+                <a:latin typeface="Malgun Gothic"/>
+                <a:ea typeface="Malgun Gothic"/>
+                <a:cs typeface="Malgun Gothic"/>
+              </a:defRPr>
+            </a:lvl2pPr>
+            <a:lvl3pPr algn="l">
+              <a:defRPr sz="1800" b="1">
+                <a:solidFill>
+                  <a:srgbClr val="24324A"/>
+                </a:solidFill>
+                <a:latin typeface="Malgun Gothic"/>
+                <a:ea typeface="Malgun Gothic"/>
+                <a:cs typeface="Malgun Gothic"/>
+              </a:defRPr>
+            </a:lvl3pPr>
+            <a:lvl4pPr algn="l">
+              <a:defRPr sz="1800" b="1">
+                <a:solidFill>
+                  <a:srgbClr val="24324A"/>
+                </a:solidFill>
+                <a:latin typeface="Malgun Gothic"/>
+                <a:ea typeface="Malgun Gothic"/>
+                <a:cs typeface="Malgun Gothic"/>
+              </a:defRPr>
+            </a:lvl4pPr>
+            <a:lvl5pPr algn="l">
+              <a:defRPr sz="1800" b="1">
+                <a:solidFill>
+                  <a:srgbClr val="24324A"/>
+                </a:solidFill>
+                <a:latin typeface="Malgun Gothic"/>
+                <a:ea typeface="Malgun Gothic"/>
+                <a:cs typeface="Malgun Gothic"/>
+              </a:defRPr>
+            </a:lvl5pPr>
+            <a:lvl6pPr algn="l">
+              <a:defRPr sz="1800" b="1">
+                <a:solidFill>
+                  <a:srgbClr val="24324A"/>
+                </a:solidFill>
+                <a:latin typeface="Malgun Gothic"/>
+                <a:ea typeface="Malgun Gothic"/>
+                <a:cs typeface="Malgun Gothic"/>
+              </a:defRPr>
+            </a:lvl6pPr>
+            <a:lvl7pPr algn="l">
+              <a:defRPr sz="1800" b="1">
+                <a:solidFill>
+                  <a:srgbClr val="24324A"/>
+                </a:solidFill>
+                <a:latin typeface="Malgun Gothic"/>
+                <a:ea typeface="Malgun Gothic"/>
+                <a:cs typeface="Malgun Gothic"/>
+              </a:defRPr>
+            </a:lvl7pPr>
+            <a:lvl8pPr algn="l">
+              <a:defRPr sz="1800" b="1">
+                <a:solidFill>
+                  <a:srgbClr val="24324A"/>
+                </a:solidFill>
+                <a:latin typeface="Malgun Gothic"/>
+                <a:ea typeface="Malgun Gothic"/>
+                <a:cs typeface="Malgun Gothic"/>
+              </a:defRPr>
+            </a:lvl8pPr>
+            <a:lvl9pPr algn="l">
+              <a:defRPr sz="1800" b="1">
+                <a:solidFill>
+                  <a:srgbClr val="24324A"/>
+                </a:solidFill>
+                <a:latin typeface="Malgun Gothic"/>
+                <a:ea typeface="Malgun Gothic"/>
+                <a:cs typeface="Malgun Gothic"/>
+              </a:defRPr>
+            </a:lvl9pPr>
           </a:lstStyle>
           <a:p xmlns:a="http://schemas.openxmlformats.org/drawingml/2006/main">
             <a:pPr algn="l">
+              <a:buNone/>
               <a:defRPr sz="1800" b="1">
                 <a:solidFill>
                   <a:srgbClr val="24324A"/>
@@ -7706,7 +11530,7 @@
           <p:cNvPr id="52" name="">
             <a:extLst xmlns:a="http://schemas.openxmlformats.org/drawingml/2006/main">
               <a:ext uri="{FF2B5EF4-FFF2-40B4-BE49-F238E27FC236}">
-                <a16:creationId xmlns:a16="http://schemas.microsoft.com/office/drawing/2014/main" id="{46132889-9852-4B1F-BAD5-9F3C9281BBC8}"/>
+                <a16:creationId xmlns:a16="http://schemas.microsoft.com/office/drawing/2014/main" id="{5E562212-B51C-472A-92F9-3520A6B1D575}"/>
               </a:ext>
             </a:extLst>
           </p:cNvPr>
@@ -7738,7 +11562,9 @@
                     </a:bodyPr>
                     <a:lstStyle/>
                     <a:p>
-                      <a:pPr algn="ctr"/>
+                      <a:pPr algn="ctr">
+                        <a:buNone/>
+                      </a:pPr>
                       <a:r>
                         <a:rPr sz="1800" b="1">
                           <a:solidFill>
@@ -7789,7 +11615,9 @@
                     </a:bodyPr>
                     <a:lstStyle/>
                     <a:p>
-                      <a:pPr algn="ctr"/>
+                      <a:pPr algn="ctr">
+                        <a:buNone/>
+                      </a:pPr>
                       <a:r>
                         <a:rPr sz="1800" b="1">
                           <a:solidFill>
@@ -7803,7 +11631,9 @@
                       </a:r>
                     </a:p>
                     <a:p>
-                      <a:pPr algn="ctr"/>
+                      <a:pPr algn="ctr">
+                        <a:buNone/>
+                      </a:pPr>
                       <a:r>
                         <a:rPr sz="1800" b="1">
                           <a:solidFill>
@@ -7848,7 +11678,9 @@
                     </a:bodyPr>
                     <a:lstStyle/>
                     <a:p>
-                      <a:pPr algn="ctr"/>
+                      <a:pPr algn="ctr">
+                        <a:buNone/>
+                      </a:pPr>
                       <a:r>
                         <a:rPr sz="1800" b="1">
                           <a:solidFill>
@@ -7862,7 +11694,9 @@
                       </a:r>
                     </a:p>
                     <a:p>
-                      <a:pPr algn="ctr"/>
+                      <a:pPr algn="ctr">
+                        <a:buNone/>
+                      </a:pPr>
                       <a:r>
                         <a:rPr sz="1800" b="1">
                           <a:solidFill>
@@ -7907,7 +11741,9 @@
                     </a:bodyPr>
                     <a:lstStyle/>
                     <a:p>
-                      <a:pPr algn="ctr"/>
+                      <a:pPr algn="ctr">
+                        <a:buNone/>
+                      </a:pPr>
                       <a:r>
                         <a:rPr sz="1800" b="1">
                           <a:solidFill>
@@ -7921,7 +11757,9 @@
                       </a:r>
                     </a:p>
                     <a:p>
-                      <a:pPr algn="ctr"/>
+                      <a:pPr algn="ctr">
+                        <a:buNone/>
+                      </a:pPr>
                       <a:r>
                         <a:rPr sz="1800" b="1">
                           <a:solidFill>
@@ -7966,7 +11804,9 @@
                     </a:bodyPr>
                     <a:lstStyle/>
                     <a:p>
-                      <a:pPr algn="ctr"/>
+                      <a:pPr algn="ctr">
+                        <a:buNone/>
+                      </a:pPr>
                       <a:r>
                         <a:rPr sz="1800" b="1">
                           <a:solidFill>
@@ -7980,7 +11820,9 @@
                       </a:r>
                     </a:p>
                     <a:p>
-                      <a:pPr algn="ctr"/>
+                      <a:pPr algn="ctr">
+                        <a:buNone/>
+                      </a:pPr>
                       <a:r>
                         <a:rPr sz="1800" b="1">
                           <a:solidFill>
@@ -8025,7 +11867,9 @@
                     </a:bodyPr>
                     <a:lstStyle/>
                     <a:p>
-                      <a:pPr algn="ctr"/>
+                      <a:pPr algn="ctr">
+                        <a:buNone/>
+                      </a:pPr>
                       <a:r>
                         <a:rPr sz="1800" b="1">
                           <a:solidFill>
@@ -8039,7 +11883,9 @@
                       </a:r>
                     </a:p>
                     <a:p>
-                      <a:pPr algn="ctr"/>
+                      <a:pPr algn="ctr">
+                        <a:buNone/>
+                      </a:pPr>
                       <a:r>
                         <a:rPr sz="1800" b="1">
                           <a:solidFill>
@@ -8084,7 +11930,9 @@
                     </a:bodyPr>
                     <a:lstStyle/>
                     <a:p>
-                      <a:pPr algn="ctr"/>
+                      <a:pPr algn="ctr">
+                        <a:buNone/>
+                      </a:pPr>
                       <a:r>
                         <a:rPr sz="1800" b="1">
                           <a:solidFill>
@@ -8098,7 +11946,9 @@
                       </a:r>
                     </a:p>
                     <a:p>
-                      <a:pPr algn="ctr"/>
+                      <a:pPr algn="ctr">
+                        <a:buNone/>
+                      </a:pPr>
                       <a:r>
                         <a:rPr sz="1800" b="1">
                           <a:solidFill>
@@ -8145,7 +11995,9 @@
                     </a:bodyPr>
                     <a:lstStyle/>
                     <a:p>
-                      <a:pPr algn="ctr"/>
+                      <a:pPr algn="ctr">
+                        <a:buNone/>
+                      </a:pPr>
                       <a:r>
                         <a:rPr sz="1800" b="0">
                           <a:solidFill>
@@ -8190,7 +12042,9 @@
                     </a:bodyPr>
                     <a:lstStyle/>
                     <a:p>
-                      <a:pPr algn="r"/>
+                      <a:pPr algn="r">
+                        <a:buNone/>
+                      </a:pPr>
                       <a:r>
                         <a:rPr sz="1800" b="0">
                           <a:solidFill>
@@ -8204,7 +12058,9 @@
                       </a:r>
                     </a:p>
                     <a:p>
-                      <a:pPr algn="r"/>
+                      <a:pPr algn="r">
+                        <a:buNone/>
+                      </a:pPr>
                       <a:r>
                         <a:rPr sz="1800" b="0">
                           <a:solidFill>
@@ -8243,7 +12099,9 @@
                     </a:bodyPr>
                     <a:lstStyle/>
                     <a:p>
-                      <a:pPr algn="r"/>
+                      <a:pPr algn="r">
+                        <a:buNone/>
+                      </a:pPr>
                       <a:r>
                         <a:rPr sz="1800" b="0">
                           <a:solidFill>
@@ -8257,7 +12115,9 @@
                       </a:r>
                     </a:p>
                     <a:p>
-                      <a:pPr algn="r"/>
+                      <a:pPr algn="r">
+                        <a:buNone/>
+                      </a:pPr>
                       <a:r>
                         <a:rPr sz="1800" b="0">
                           <a:solidFill>
@@ -8296,7 +12156,9 @@
                     </a:bodyPr>
                     <a:lstStyle/>
                     <a:p>
-                      <a:pPr algn="r"/>
+                      <a:pPr algn="r">
+                        <a:buNone/>
+                      </a:pPr>
                       <a:r>
                         <a:rPr sz="1800" b="0">
                           <a:solidFill>
@@ -8310,7 +12172,9 @@
                       </a:r>
                     </a:p>
                     <a:p>
-                      <a:pPr algn="r"/>
+                      <a:pPr algn="r">
+                        <a:buNone/>
+                      </a:pPr>
                       <a:r>
                         <a:rPr sz="1800" b="0">
                           <a:solidFill>
@@ -8349,7 +12213,9 @@
                     </a:bodyPr>
                     <a:lstStyle/>
                     <a:p>
-                      <a:pPr algn="r"/>
+                      <a:pPr algn="r">
+                        <a:buNone/>
+                      </a:pPr>
                       <a:r>
                         <a:rPr sz="1800" b="0">
                           <a:solidFill>
@@ -8363,7 +12229,9 @@
                       </a:r>
                     </a:p>
                     <a:p>
-                      <a:pPr algn="r"/>
+                      <a:pPr algn="r">
+                        <a:buNone/>
+                      </a:pPr>
                       <a:r>
                         <a:rPr sz="1800" b="0">
                           <a:solidFill>
@@ -8402,7 +12270,9 @@
                     </a:bodyPr>
                     <a:lstStyle/>
                     <a:p>
-                      <a:pPr algn="r"/>
+                      <a:pPr algn="r">
+                        <a:buNone/>
+                      </a:pPr>
                       <a:r>
                         <a:rPr sz="1800" b="0">
                           <a:solidFill>
@@ -8416,7 +12286,9 @@
                       </a:r>
                     </a:p>
                     <a:p>
-                      <a:pPr algn="r"/>
+                      <a:pPr algn="r">
+                        <a:buNone/>
+                      </a:pPr>
                       <a:r>
                         <a:rPr sz="1800" b="0">
                           <a:solidFill>
@@ -8455,7 +12327,9 @@
                     </a:bodyPr>
                     <a:lstStyle/>
                     <a:p>
-                      <a:pPr algn="r"/>
+                      <a:pPr algn="r">
+                        <a:buNone/>
+                      </a:pPr>
                       <a:r>
                         <a:rPr sz="1800" b="0">
                           <a:solidFill>
@@ -8469,7 +12343,9 @@
                       </a:r>
                     </a:p>
                     <a:p>
-                      <a:pPr algn="r"/>
+                      <a:pPr algn="r">
+                        <a:buNone/>
+                      </a:pPr>
                       <a:r>
                         <a:rPr sz="1800" b="0">
                           <a:solidFill>
@@ -8510,7 +12386,9 @@
                     </a:bodyPr>
                     <a:lstStyle/>
                     <a:p>
-                      <a:pPr algn="ctr"/>
+                      <a:pPr algn="ctr">
+                        <a:buNone/>
+                      </a:pPr>
                       <a:r>
                         <a:rPr sz="1800" b="0">
                           <a:solidFill>
@@ -8555,7 +12433,9 @@
                     </a:bodyPr>
                     <a:lstStyle/>
                     <a:p>
-                      <a:pPr algn="r"/>
+                      <a:pPr algn="r">
+                        <a:buNone/>
+                      </a:pPr>
                       <a:r>
                         <a:rPr sz="1800" b="0">
                           <a:solidFill>
@@ -8569,7 +12449,9 @@
                       </a:r>
                     </a:p>
                     <a:p>
-                      <a:pPr algn="r"/>
+                      <a:pPr algn="r">
+                        <a:buNone/>
+                      </a:pPr>
                       <a:r>
                         <a:rPr sz="1800" b="0">
                           <a:solidFill>
@@ -8608,7 +12490,9 @@
                     </a:bodyPr>
                     <a:lstStyle/>
                     <a:p>
-                      <a:pPr algn="r"/>
+                      <a:pPr algn="r">
+                        <a:buNone/>
+                      </a:pPr>
                       <a:r>
                         <a:rPr sz="1800" b="0">
                           <a:solidFill>
@@ -8622,7 +12506,9 @@
                       </a:r>
                     </a:p>
                     <a:p>
-                      <a:pPr algn="r"/>
+                      <a:pPr algn="r">
+                        <a:buNone/>
+                      </a:pPr>
                       <a:r>
                         <a:rPr sz="1800" b="0">
                           <a:solidFill>
@@ -8661,7 +12547,9 @@
                     </a:bodyPr>
                     <a:lstStyle/>
                     <a:p>
-                      <a:pPr algn="r"/>
+                      <a:pPr algn="r">
+                        <a:buNone/>
+                      </a:pPr>
                       <a:r>
                         <a:rPr sz="1800" b="0">
                           <a:solidFill>
@@ -8675,7 +12563,9 @@
                       </a:r>
                     </a:p>
                     <a:p>
-                      <a:pPr algn="r"/>
+                      <a:pPr algn="r">
+                        <a:buNone/>
+                      </a:pPr>
                       <a:r>
                         <a:rPr sz="1800" b="0">
                           <a:solidFill>
@@ -8714,7 +12604,9 @@
                     </a:bodyPr>
                     <a:lstStyle/>
                     <a:p>
-                      <a:pPr algn="r"/>
+                      <a:pPr algn="r">
+                        <a:buNone/>
+                      </a:pPr>
                       <a:r>
                         <a:rPr sz="1800" b="0">
                           <a:solidFill>
@@ -8728,7 +12620,9 @@
                       </a:r>
                     </a:p>
                     <a:p>
-                      <a:pPr algn="r"/>
+                      <a:pPr algn="r">
+                        <a:buNone/>
+                      </a:pPr>
                       <a:r>
                         <a:rPr sz="1800" b="0">
                           <a:solidFill>
@@ -8767,7 +12661,9 @@
                     </a:bodyPr>
                     <a:lstStyle/>
                     <a:p>
-                      <a:pPr algn="r"/>
+                      <a:pPr algn="r">
+                        <a:buNone/>
+                      </a:pPr>
                       <a:r>
                         <a:rPr sz="1800" b="0">
                           <a:solidFill>
@@ -8781,7 +12677,9 @@
                       </a:r>
                     </a:p>
                     <a:p>
-                      <a:pPr algn="r"/>
+                      <a:pPr algn="r">
+                        <a:buNone/>
+                      </a:pPr>
                       <a:r>
                         <a:rPr sz="1800" b="0">
                           <a:solidFill>
@@ -8820,7 +12718,9 @@
                     </a:bodyPr>
                     <a:lstStyle/>
                     <a:p>
-                      <a:pPr algn="r"/>
+                      <a:pPr algn="r">
+                        <a:buNone/>
+                      </a:pPr>
                       <a:r>
                         <a:rPr sz="1800" b="0">
                           <a:solidFill>
@@ -8834,7 +12734,9 @@
                       </a:r>
                     </a:p>
                     <a:p>
-                      <a:pPr algn="r"/>
+                      <a:pPr algn="r">
+                        <a:buNone/>
+                      </a:pPr>
                       <a:r>
                         <a:rPr sz="1800" b="0">
                           <a:solidFill>
@@ -8875,7 +12777,9 @@
                     </a:bodyPr>
                     <a:lstStyle/>
                     <a:p>
-                      <a:pPr algn="ctr"/>
+                      <a:pPr algn="ctr">
+                        <a:buNone/>
+                      </a:pPr>
                       <a:r>
                         <a:rPr sz="1800" b="0">
                           <a:solidFill>
@@ -8920,7 +12824,9 @@
                     </a:bodyPr>
                     <a:lstStyle/>
                     <a:p>
-                      <a:pPr algn="r"/>
+                      <a:pPr algn="r">
+                        <a:buNone/>
+                      </a:pPr>
                       <a:r>
                         <a:rPr sz="1800" b="0">
                           <a:solidFill>
@@ -8934,7 +12840,9 @@
                       </a:r>
                     </a:p>
                     <a:p>
-                      <a:pPr algn="r"/>
+                      <a:pPr algn="r">
+                        <a:buNone/>
+                      </a:pPr>
                       <a:r>
                         <a:rPr sz="1800" b="0">
                           <a:solidFill>
@@ -8973,7 +12881,9 @@
                     </a:bodyPr>
                     <a:lstStyle/>
                     <a:p>
-                      <a:pPr algn="r"/>
+                      <a:pPr algn="r">
+                        <a:buNone/>
+                      </a:pPr>
                       <a:r>
                         <a:rPr sz="1800" b="0">
                           <a:solidFill>
@@ -8987,7 +12897,9 @@
                       </a:r>
                     </a:p>
                     <a:p>
-                      <a:pPr algn="r"/>
+                      <a:pPr algn="r">
+                        <a:buNone/>
+                      </a:pPr>
                       <a:r>
                         <a:rPr sz="1800" b="0">
                           <a:solidFill>
@@ -9026,7 +12938,9 @@
                     </a:bodyPr>
                     <a:lstStyle/>
                     <a:p>
-                      <a:pPr algn="r"/>
+                      <a:pPr algn="r">
+                        <a:buNone/>
+                      </a:pPr>
                       <a:r>
                         <a:rPr sz="1800" b="0">
                           <a:solidFill>
@@ -9040,7 +12954,9 @@
                       </a:r>
                     </a:p>
                     <a:p>
-                      <a:pPr algn="r"/>
+                      <a:pPr algn="r">
+                        <a:buNone/>
+                      </a:pPr>
                       <a:r>
                         <a:rPr sz="1800" b="0">
                           <a:solidFill>
@@ -9079,7 +12995,9 @@
                     </a:bodyPr>
                     <a:lstStyle/>
                     <a:p>
-                      <a:pPr algn="r"/>
+                      <a:pPr algn="r">
+                        <a:buNone/>
+                      </a:pPr>
                       <a:r>
                         <a:rPr sz="1800" b="0">
                           <a:solidFill>
@@ -9093,7 +13011,9 @@
                       </a:r>
                     </a:p>
                     <a:p>
-                      <a:pPr algn="r"/>
+                      <a:pPr algn="r">
+                        <a:buNone/>
+                      </a:pPr>
                       <a:r>
                         <a:rPr sz="1800" b="0">
                           <a:solidFill>
@@ -9132,7 +13052,9 @@
                     </a:bodyPr>
                     <a:lstStyle/>
                     <a:p>
-                      <a:pPr algn="r"/>
+                      <a:pPr algn="r">
+                        <a:buNone/>
+                      </a:pPr>
                       <a:r>
                         <a:rPr sz="1800" b="0">
                           <a:solidFill>
@@ -9146,7 +13068,9 @@
                       </a:r>
                     </a:p>
                     <a:p>
-                      <a:pPr algn="r"/>
+                      <a:pPr algn="r">
+                        <a:buNone/>
+                      </a:pPr>
                       <a:r>
                         <a:rPr sz="1800" b="0">
                           <a:solidFill>
@@ -9185,7 +13109,9 @@
                     </a:bodyPr>
                     <a:lstStyle/>
                     <a:p>
-                      <a:pPr algn="r"/>
+                      <a:pPr algn="r">
+                        <a:buNone/>
+                      </a:pPr>
                       <a:r>
                         <a:rPr sz="1800" b="0">
                           <a:solidFill>
@@ -9199,7 +13125,9 @@
                       </a:r>
                     </a:p>
                     <a:p>
-                      <a:pPr algn="r"/>
+                      <a:pPr algn="r">
+                        <a:buNone/>
+                      </a:pPr>
                       <a:r>
                         <a:rPr sz="1800" b="0">
                           <a:solidFill>
@@ -9240,7 +13168,9 @@
                     </a:bodyPr>
                     <a:lstStyle/>
                     <a:p>
-                      <a:pPr algn="ctr"/>
+                      <a:pPr algn="ctr">
+                        <a:buNone/>
+                      </a:pPr>
                       <a:r>
                         <a:rPr sz="1800" b="0">
                           <a:solidFill>
@@ -9285,7 +13215,9 @@
                     </a:bodyPr>
                     <a:lstStyle/>
                     <a:p>
-                      <a:pPr algn="r"/>
+                      <a:pPr algn="r">
+                        <a:buNone/>
+                      </a:pPr>
                       <a:r>
                         <a:rPr sz="1800" b="0">
                           <a:solidFill>
@@ -9299,7 +13231,9 @@
                       </a:r>
                     </a:p>
                     <a:p>
-                      <a:pPr algn="r"/>
+                      <a:pPr algn="r">
+                        <a:buNone/>
+                      </a:pPr>
                       <a:r>
                         <a:rPr sz="1800" b="0">
                           <a:solidFill>
@@ -9338,7 +13272,9 @@
                     </a:bodyPr>
                     <a:lstStyle/>
                     <a:p>
-                      <a:pPr algn="r"/>
+                      <a:pPr algn="r">
+                        <a:buNone/>
+                      </a:pPr>
                       <a:r>
                         <a:rPr sz="1800" b="0">
                           <a:solidFill>
@@ -9352,7 +13288,9 @@
                       </a:r>
                     </a:p>
                     <a:p>
-                      <a:pPr algn="r"/>
+                      <a:pPr algn="r">
+                        <a:buNone/>
+                      </a:pPr>
                       <a:r>
                         <a:rPr sz="1800" b="0">
                           <a:solidFill>
@@ -9391,7 +13329,9 @@
                     </a:bodyPr>
                     <a:lstStyle/>
                     <a:p>
-                      <a:pPr algn="r"/>
+                      <a:pPr algn="r">
+                        <a:buNone/>
+                      </a:pPr>
                       <a:r>
                         <a:rPr sz="1800" b="0">
                           <a:solidFill>
@@ -9405,7 +13345,9 @@
                       </a:r>
                     </a:p>
                     <a:p>
-                      <a:pPr algn="r"/>
+                      <a:pPr algn="r">
+                        <a:buNone/>
+                      </a:pPr>
                       <a:r>
                         <a:rPr sz="1800" b="0">
                           <a:solidFill>
@@ -9444,7 +13386,9 @@
                     </a:bodyPr>
                     <a:lstStyle/>
                     <a:p>
-                      <a:pPr algn="r"/>
+                      <a:pPr algn="r">
+                        <a:buNone/>
+                      </a:pPr>
                       <a:r>
                         <a:rPr sz="1800" b="0">
                           <a:solidFill>
@@ -9458,7 +13402,9 @@
                       </a:r>
                     </a:p>
                     <a:p>
-                      <a:pPr algn="r"/>
+                      <a:pPr algn="r">
+                        <a:buNone/>
+                      </a:pPr>
                       <a:r>
                         <a:rPr sz="1800" b="0">
                           <a:solidFill>
@@ -9497,7 +13443,9 @@
                     </a:bodyPr>
                     <a:lstStyle/>
                     <a:p>
-                      <a:pPr algn="r"/>
+                      <a:pPr algn="r">
+                        <a:buNone/>
+                      </a:pPr>
                       <a:r>
                         <a:rPr sz="1800" b="0">
                           <a:solidFill>
@@ -9511,7 +13459,9 @@
                       </a:r>
                     </a:p>
                     <a:p>
-                      <a:pPr algn="r"/>
+                      <a:pPr algn="r">
+                        <a:buNone/>
+                      </a:pPr>
                       <a:r>
                         <a:rPr sz="1800" b="0">
                           <a:solidFill>
@@ -9550,7 +13500,9 @@
                     </a:bodyPr>
                     <a:lstStyle/>
                     <a:p>
-                      <a:pPr algn="r"/>
+                      <a:pPr algn="r">
+                        <a:buNone/>
+                      </a:pPr>
                       <a:r>
                         <a:rPr sz="1800" b="0">
                           <a:solidFill>
@@ -9564,7 +13516,9 @@
                       </a:r>
                     </a:p>
                     <a:p>
-                      <a:pPr algn="r"/>
+                      <a:pPr algn="r">
+                        <a:buNone/>
+                      </a:pPr>
                       <a:r>
                         <a:rPr sz="1800" b="0">
                           <a:solidFill>
@@ -9605,7 +13559,9 @@
                     </a:bodyPr>
                     <a:lstStyle/>
                     <a:p>
-                      <a:pPr algn="ctr"/>
+                      <a:pPr algn="ctr">
+                        <a:buNone/>
+                      </a:pPr>
                       <a:r>
                         <a:rPr sz="1800" b="0">
                           <a:solidFill>
@@ -9650,7 +13606,9 @@
                     </a:bodyPr>
                     <a:lstStyle/>
                     <a:p>
-                      <a:pPr algn="r"/>
+                      <a:pPr algn="r">
+                        <a:buNone/>
+                      </a:pPr>
                       <a:r>
                         <a:rPr sz="1800" b="0">
                           <a:solidFill>
@@ -9664,7 +13622,9 @@
                       </a:r>
                     </a:p>
                     <a:p>
-                      <a:pPr algn="r"/>
+                      <a:pPr algn="r">
+                        <a:buNone/>
+                      </a:pPr>
                       <a:r>
                         <a:rPr sz="1800" b="0">
                           <a:solidFill>
@@ -9703,7 +13663,9 @@
                     </a:bodyPr>
                     <a:lstStyle/>
                     <a:p>
-                      <a:pPr algn="r"/>
+                      <a:pPr algn="r">
+                        <a:buNone/>
+                      </a:pPr>
                       <a:r>
                         <a:rPr sz="1800" b="0">
                           <a:solidFill>
@@ -9717,7 +13679,9 @@
                       </a:r>
                     </a:p>
                     <a:p>
-                      <a:pPr algn="r"/>
+                      <a:pPr algn="r">
+                        <a:buNone/>
+                      </a:pPr>
                       <a:r>
                         <a:rPr sz="1800" b="0">
                           <a:solidFill>
@@ -9756,7 +13720,9 @@
                     </a:bodyPr>
                     <a:lstStyle/>
                     <a:p>
-                      <a:pPr algn="r"/>
+                      <a:pPr algn="r">
+                        <a:buNone/>
+                      </a:pPr>
                       <a:r>
                         <a:rPr sz="1800" b="0">
                           <a:solidFill>
@@ -9770,7 +13736,9 @@
                       </a:r>
                     </a:p>
                     <a:p>
-                      <a:pPr algn="r"/>
+                      <a:pPr algn="r">
+                        <a:buNone/>
+                      </a:pPr>
                       <a:r>
                         <a:rPr sz="1800" b="0">
                           <a:solidFill>
@@ -9809,7 +13777,9 @@
                     </a:bodyPr>
                     <a:lstStyle/>
                     <a:p>
-                      <a:pPr algn="r"/>
+                      <a:pPr algn="r">
+                        <a:buNone/>
+                      </a:pPr>
                       <a:r>
                         <a:rPr sz="1800" b="0">
                           <a:solidFill>
@@ -9823,7 +13793,9 @@
                       </a:r>
                     </a:p>
                     <a:p>
-                      <a:pPr algn="r"/>
+                      <a:pPr algn="r">
+                        <a:buNone/>
+                      </a:pPr>
                       <a:r>
                         <a:rPr sz="1800" b="0">
                           <a:solidFill>
@@ -9862,7 +13834,9 @@
                     </a:bodyPr>
                     <a:lstStyle/>
                     <a:p>
-                      <a:pPr algn="r"/>
+                      <a:pPr algn="r">
+                        <a:buNone/>
+                      </a:pPr>
                       <a:r>
                         <a:rPr sz="1800" b="0">
                           <a:solidFill>
@@ -9876,7 +13850,9 @@
                       </a:r>
                     </a:p>
                     <a:p>
-                      <a:pPr algn="r"/>
+                      <a:pPr algn="r">
+                        <a:buNone/>
+                      </a:pPr>
                       <a:r>
                         <a:rPr sz="1800" b="0">
                           <a:solidFill>
@@ -9915,7 +13891,9 @@
                     </a:bodyPr>
                     <a:lstStyle/>
                     <a:p>
-                      <a:pPr algn="r"/>
+                      <a:pPr algn="r">
+                        <a:buNone/>
+                      </a:pPr>
                       <a:r>
                         <a:rPr sz="1800" b="0">
                           <a:solidFill>
@@ -9929,7 +13907,9 @@
                       </a:r>
                     </a:p>
                     <a:p>
-                      <a:pPr algn="r"/>
+                      <a:pPr algn="r">
+                        <a:buNone/>
+                      </a:pPr>
                       <a:r>
                         <a:rPr sz="1800" b="0">
                           <a:solidFill>
@@ -9970,7 +13950,9 @@
                     </a:bodyPr>
                     <a:lstStyle/>
                     <a:p>
-                      <a:pPr algn="ctr"/>
+                      <a:pPr algn="ctr">
+                        <a:buNone/>
+                      </a:pPr>
                       <a:r>
                         <a:rPr sz="1800" b="0">
                           <a:solidFill>
@@ -10015,7 +13997,9 @@
                     </a:bodyPr>
                     <a:lstStyle/>
                     <a:p>
-                      <a:pPr algn="r"/>
+                      <a:pPr algn="r">
+                        <a:buNone/>
+                      </a:pPr>
                       <a:r>
                         <a:rPr sz="1800" b="0">
                           <a:solidFill>
@@ -10029,7 +14013,9 @@
                       </a:r>
                     </a:p>
                     <a:p>
-                      <a:pPr algn="r"/>
+                      <a:pPr algn="r">
+                        <a:buNone/>
+                      </a:pPr>
                       <a:r>
                         <a:rPr sz="1800" b="0">
                           <a:solidFill>
@@ -10068,7 +14054,9 @@
                     </a:bodyPr>
                     <a:lstStyle/>
                     <a:p>
-                      <a:pPr algn="r"/>
+                      <a:pPr algn="r">
+                        <a:buNone/>
+                      </a:pPr>
                       <a:r>
                         <a:rPr sz="1800" b="0">
                           <a:solidFill>
@@ -10082,7 +14070,9 @@
                       </a:r>
                     </a:p>
                     <a:p>
-                      <a:pPr algn="r"/>
+                      <a:pPr algn="r">
+                        <a:buNone/>
+                      </a:pPr>
                       <a:r>
                         <a:rPr sz="1800" b="0">
                           <a:solidFill>
@@ -10121,7 +14111,9 @@
                     </a:bodyPr>
                     <a:lstStyle/>
                     <a:p>
-                      <a:pPr algn="r"/>
+                      <a:pPr algn="r">
+                        <a:buNone/>
+                      </a:pPr>
                       <a:r>
                         <a:rPr sz="1800" b="0">
                           <a:solidFill>
@@ -10135,7 +14127,9 @@
                       </a:r>
                     </a:p>
                     <a:p>
-                      <a:pPr algn="r"/>
+                      <a:pPr algn="r">
+                        <a:buNone/>
+                      </a:pPr>
                       <a:r>
                         <a:rPr sz="1800" b="0">
                           <a:solidFill>
@@ -10174,7 +14168,9 @@
                     </a:bodyPr>
                     <a:lstStyle/>
                     <a:p>
-                      <a:pPr algn="r"/>
+                      <a:pPr algn="r">
+                        <a:buNone/>
+                      </a:pPr>
                       <a:r>
                         <a:rPr sz="1800" b="0">
                           <a:solidFill>
@@ -10188,7 +14184,9 @@
                       </a:r>
                     </a:p>
                     <a:p>
-                      <a:pPr algn="r"/>
+                      <a:pPr algn="r">
+                        <a:buNone/>
+                      </a:pPr>
                       <a:r>
                         <a:rPr sz="1800" b="0">
                           <a:solidFill>
@@ -10227,7 +14225,9 @@
                     </a:bodyPr>
                     <a:lstStyle/>
                     <a:p>
-                      <a:pPr algn="r"/>
+                      <a:pPr algn="r">
+                        <a:buNone/>
+                      </a:pPr>
                       <a:r>
                         <a:rPr sz="1800" b="0">
                           <a:solidFill>
@@ -10241,7 +14241,9 @@
                       </a:r>
                     </a:p>
                     <a:p>
-                      <a:pPr algn="r"/>
+                      <a:pPr algn="r">
+                        <a:buNone/>
+                      </a:pPr>
                       <a:r>
                         <a:rPr sz="1800" b="0">
                           <a:solidFill>
@@ -10280,7 +14282,9 @@
                     </a:bodyPr>
                     <a:lstStyle/>
                     <a:p>
-                      <a:pPr algn="r"/>
+                      <a:pPr algn="r">
+                        <a:buNone/>
+                      </a:pPr>
                       <a:r>
                         <a:rPr sz="1800" b="0">
                           <a:solidFill>
@@ -10294,7 +14298,9 @@
                       </a:r>
                     </a:p>
                     <a:p>
-                      <a:pPr algn="r"/>
+                      <a:pPr algn="r">
+                        <a:buNone/>
+                      </a:pPr>
                       <a:r>
                         <a:rPr sz="1800" b="0">
                           <a:solidFill>
@@ -10335,7 +14341,9 @@
                     </a:bodyPr>
                     <a:lstStyle/>
                     <a:p>
-                      <a:pPr algn="ctr"/>
+                      <a:pPr algn="ctr">
+                        <a:buNone/>
+                      </a:pPr>
                       <a:r>
                         <a:rPr sz="1800" b="0">
                           <a:solidFill>
@@ -10380,7 +14388,9 @@
                     </a:bodyPr>
                     <a:lstStyle/>
                     <a:p>
-                      <a:pPr algn="r"/>
+                      <a:pPr algn="r">
+                        <a:buNone/>
+                      </a:pPr>
                       <a:r>
                         <a:rPr sz="1800" b="0">
                           <a:solidFill>
@@ -10394,7 +14404,9 @@
                       </a:r>
                     </a:p>
                     <a:p>
-                      <a:pPr algn="r"/>
+                      <a:pPr algn="r">
+                        <a:buNone/>
+                      </a:pPr>
                       <a:r>
                         <a:rPr sz="1800" b="0">
                           <a:solidFill>
@@ -10433,7 +14445,9 @@
                     </a:bodyPr>
                     <a:lstStyle/>
                     <a:p>
-                      <a:pPr algn="r"/>
+                      <a:pPr algn="r">
+                        <a:buNone/>
+                      </a:pPr>
                       <a:r>
                         <a:rPr sz="1800" b="0">
                           <a:solidFill>
@@ -10447,7 +14461,9 @@
                       </a:r>
                     </a:p>
                     <a:p>
-                      <a:pPr algn="r"/>
+                      <a:pPr algn="r">
+                        <a:buNone/>
+                      </a:pPr>
                       <a:r>
                         <a:rPr sz="1800" b="0">
                           <a:solidFill>
@@ -10486,7 +14502,9 @@
                     </a:bodyPr>
                     <a:lstStyle/>
                     <a:p>
-                      <a:pPr algn="r"/>
+                      <a:pPr algn="r">
+                        <a:buNone/>
+                      </a:pPr>
                       <a:r>
                         <a:rPr sz="1800" b="0">
                           <a:solidFill>
@@ -10500,7 +14518,9 @@
                       </a:r>
                     </a:p>
                     <a:p>
-                      <a:pPr algn="r"/>
+                      <a:pPr algn="r">
+                        <a:buNone/>
+                      </a:pPr>
                       <a:r>
                         <a:rPr sz="1800" b="0">
                           <a:solidFill>
@@ -10539,7 +14559,9 @@
                     </a:bodyPr>
                     <a:lstStyle/>
                     <a:p>
-                      <a:pPr algn="r"/>
+                      <a:pPr algn="r">
+                        <a:buNone/>
+                      </a:pPr>
                       <a:r>
                         <a:rPr sz="1800" b="0">
                           <a:solidFill>
@@ -10553,7 +14575,9 @@
                       </a:r>
                     </a:p>
                     <a:p>
-                      <a:pPr algn="r"/>
+                      <a:pPr algn="r">
+                        <a:buNone/>
+                      </a:pPr>
                       <a:r>
                         <a:rPr sz="1800" b="0">
                           <a:solidFill>
@@ -10592,7 +14616,9 @@
                     </a:bodyPr>
                     <a:lstStyle/>
                     <a:p>
-                      <a:pPr algn="r"/>
+                      <a:pPr algn="r">
+                        <a:buNone/>
+                      </a:pPr>
                       <a:r>
                         <a:rPr sz="1800" b="0">
                           <a:solidFill>
@@ -10606,7 +14632,9 @@
                       </a:r>
                     </a:p>
                     <a:p>
-                      <a:pPr algn="r"/>
+                      <a:pPr algn="r">
+                        <a:buNone/>
+                      </a:pPr>
                       <a:r>
                         <a:rPr sz="1800" b="0">
                           <a:solidFill>
@@ -10645,7 +14673,9 @@
                     </a:bodyPr>
                     <a:lstStyle/>
                     <a:p>
-                      <a:pPr algn="r"/>
+                      <a:pPr algn="r">
+                        <a:buNone/>
+                      </a:pPr>
                       <a:r>
                         <a:rPr sz="1800" b="0">
                           <a:solidFill>
@@ -10659,7 +14689,9 @@
                       </a:r>
                     </a:p>
                     <a:p>
-                      <a:pPr algn="r"/>
+                      <a:pPr algn="r">
+                        <a:buNone/>
+                      </a:pPr>
                       <a:r>
                         <a:rPr sz="1800" b="0">
                           <a:solidFill>
@@ -10700,7 +14732,9 @@
                     </a:bodyPr>
                     <a:lstStyle/>
                     <a:p>
-                      <a:pPr algn="ctr"/>
+                      <a:pPr algn="ctr">
+                        <a:buNone/>
+                      </a:pPr>
                       <a:r>
                         <a:rPr sz="1800" b="0">
                           <a:solidFill>
@@ -10745,7 +14779,9 @@
                     </a:bodyPr>
                     <a:lstStyle/>
                     <a:p>
-                      <a:pPr algn="r"/>
+                      <a:pPr algn="r">
+                        <a:buNone/>
+                      </a:pPr>
                       <a:r>
                         <a:rPr sz="1800" b="0">
                           <a:solidFill>
@@ -10759,7 +14795,9 @@
                       </a:r>
                     </a:p>
                     <a:p>
-                      <a:pPr algn="r"/>
+                      <a:pPr algn="r">
+                        <a:buNone/>
+                      </a:pPr>
                       <a:r>
                         <a:rPr sz="1800" b="0">
                           <a:solidFill>
@@ -10798,7 +14836,9 @@
                     </a:bodyPr>
                     <a:lstStyle/>
                     <a:p>
-                      <a:pPr algn="r"/>
+                      <a:pPr algn="r">
+                        <a:buNone/>
+                      </a:pPr>
                       <a:r>
                         <a:rPr sz="1800" b="0">
                           <a:solidFill>
@@ -10812,7 +14852,9 @@
                       </a:r>
                     </a:p>
                     <a:p>
-                      <a:pPr algn="r"/>
+                      <a:pPr algn="r">
+                        <a:buNone/>
+                      </a:pPr>
                       <a:r>
                         <a:rPr sz="1800" b="0">
                           <a:solidFill>
@@ -10851,7 +14893,9 @@
                     </a:bodyPr>
                     <a:lstStyle/>
                     <a:p>
-                      <a:pPr algn="r"/>
+                      <a:pPr algn="r">
+                        <a:buNone/>
+                      </a:pPr>
                       <a:r>
                         <a:rPr sz="1800" b="0">
                           <a:solidFill>
@@ -10865,7 +14909,9 @@
                       </a:r>
                     </a:p>
                     <a:p>
-                      <a:pPr algn="r"/>
+                      <a:pPr algn="r">
+                        <a:buNone/>
+                      </a:pPr>
                       <a:r>
                         <a:rPr sz="1800" b="0">
                           <a:solidFill>
@@ -10904,7 +14950,9 @@
                     </a:bodyPr>
                     <a:lstStyle/>
                     <a:p>
-                      <a:pPr algn="r"/>
+                      <a:pPr algn="r">
+                        <a:buNone/>
+                      </a:pPr>
                       <a:r>
                         <a:rPr sz="1800" b="0">
                           <a:solidFill>
@@ -10918,7 +14966,9 @@
                       </a:r>
                     </a:p>
                     <a:p>
-                      <a:pPr algn="r"/>
+                      <a:pPr algn="r">
+                        <a:buNone/>
+                      </a:pPr>
                       <a:r>
                         <a:rPr sz="1800" b="0">
                           <a:solidFill>
@@ -10957,7 +15007,9 @@
                     </a:bodyPr>
                     <a:lstStyle/>
                     <a:p>
-                      <a:pPr algn="r"/>
+                      <a:pPr algn="r">
+                        <a:buNone/>
+                      </a:pPr>
                       <a:r>
                         <a:rPr sz="1800" b="0">
                           <a:solidFill>
@@ -10971,7 +15023,9 @@
                       </a:r>
                     </a:p>
                     <a:p>
-                      <a:pPr algn="r"/>
+                      <a:pPr algn="r">
+                        <a:buNone/>
+                      </a:pPr>
                       <a:r>
                         <a:rPr sz="1800" b="0">
                           <a:solidFill>
@@ -11010,7 +15064,9 @@
                     </a:bodyPr>
                     <a:lstStyle/>
                     <a:p>
-                      <a:pPr algn="r"/>
+                      <a:pPr algn="r">
+                        <a:buNone/>
+                      </a:pPr>
                       <a:r>
                         <a:rPr sz="1800" b="0">
                           <a:solidFill>
@@ -11024,7 +15080,9 @@
                       </a:r>
                     </a:p>
                     <a:p>
-                      <a:pPr algn="r"/>
+                      <a:pPr algn="r">
+                        <a:buNone/>
+                      </a:pPr>
                       <a:r>
                         <a:rPr sz="1800" b="0">
                           <a:solidFill>
@@ -11134,9 +15192,100 @@
                 <a:cs typeface="Malgun Gothic"/>
               </a:defRPr>
             </a:defPPr>
+            <a:lvl1pPr algn="l">
+              <a:defRPr sz="1800" b="0">
+                <a:solidFill>
+                  <a:srgbClr val="24324A"/>
+                </a:solidFill>
+                <a:latin typeface="Malgun Gothic"/>
+                <a:ea typeface="Malgun Gothic"/>
+                <a:cs typeface="Malgun Gothic"/>
+              </a:defRPr>
+            </a:lvl1pPr>
+            <a:lvl2pPr algn="l">
+              <a:defRPr sz="1800" b="0">
+                <a:solidFill>
+                  <a:srgbClr val="24324A"/>
+                </a:solidFill>
+                <a:latin typeface="Malgun Gothic"/>
+                <a:ea typeface="Malgun Gothic"/>
+                <a:cs typeface="Malgun Gothic"/>
+              </a:defRPr>
+            </a:lvl2pPr>
+            <a:lvl3pPr algn="l">
+              <a:defRPr sz="1800" b="0">
+                <a:solidFill>
+                  <a:srgbClr val="24324A"/>
+                </a:solidFill>
+                <a:latin typeface="Malgun Gothic"/>
+                <a:ea typeface="Malgun Gothic"/>
+                <a:cs typeface="Malgun Gothic"/>
+              </a:defRPr>
+            </a:lvl3pPr>
+            <a:lvl4pPr algn="l">
+              <a:defRPr sz="1800" b="0">
+                <a:solidFill>
+                  <a:srgbClr val="24324A"/>
+                </a:solidFill>
+                <a:latin typeface="Malgun Gothic"/>
+                <a:ea typeface="Malgun Gothic"/>
+                <a:cs typeface="Malgun Gothic"/>
+              </a:defRPr>
+            </a:lvl4pPr>
+            <a:lvl5pPr algn="l">
+              <a:defRPr sz="1800" b="0">
+                <a:solidFill>
+                  <a:srgbClr val="24324A"/>
+                </a:solidFill>
+                <a:latin typeface="Malgun Gothic"/>
+                <a:ea typeface="Malgun Gothic"/>
+                <a:cs typeface="Malgun Gothic"/>
+              </a:defRPr>
+            </a:lvl5pPr>
+            <a:lvl6pPr algn="l">
+              <a:defRPr sz="1800" b="0">
+                <a:solidFill>
+                  <a:srgbClr val="24324A"/>
+                </a:solidFill>
+                <a:latin typeface="Malgun Gothic"/>
+                <a:ea typeface="Malgun Gothic"/>
+                <a:cs typeface="Malgun Gothic"/>
+              </a:defRPr>
+            </a:lvl6pPr>
+            <a:lvl7pPr algn="l">
+              <a:defRPr sz="1800" b="0">
+                <a:solidFill>
+                  <a:srgbClr val="24324A"/>
+                </a:solidFill>
+                <a:latin typeface="Malgun Gothic"/>
+                <a:ea typeface="Malgun Gothic"/>
+                <a:cs typeface="Malgun Gothic"/>
+              </a:defRPr>
+            </a:lvl7pPr>
+            <a:lvl8pPr algn="l">
+              <a:defRPr sz="1800" b="0">
+                <a:solidFill>
+                  <a:srgbClr val="24324A"/>
+                </a:solidFill>
+                <a:latin typeface="Malgun Gothic"/>
+                <a:ea typeface="Malgun Gothic"/>
+                <a:cs typeface="Malgun Gothic"/>
+              </a:defRPr>
+            </a:lvl8pPr>
+            <a:lvl9pPr algn="l">
+              <a:defRPr sz="1800" b="0">
+                <a:solidFill>
+                  <a:srgbClr val="24324A"/>
+                </a:solidFill>
+                <a:latin typeface="Malgun Gothic"/>
+                <a:ea typeface="Malgun Gothic"/>
+                <a:cs typeface="Malgun Gothic"/>
+              </a:defRPr>
+            </a:lvl9pPr>
           </a:lstStyle>
           <a:p xmlns:a="http://schemas.openxmlformats.org/drawingml/2006/main">
             <a:pPr algn="l">
+              <a:buNone/>
               <a:defRPr sz="1800" b="0">
                 <a:solidFill>
                   <a:srgbClr val="24324A"/>
@@ -11160,6 +15309,7 @@
           </a:p>
           <a:p xmlns:a="http://schemas.openxmlformats.org/drawingml/2006/main">
             <a:pPr algn="l">
+              <a:buNone/>
               <a:defRPr sz="1800" b="0">
                 <a:solidFill>
                   <a:srgbClr val="24324A"/>
@@ -11183,6 +15333,7 @@
           </a:p>
           <a:p xmlns:a="http://schemas.openxmlformats.org/drawingml/2006/main">
             <a:pPr algn="l">
+              <a:buNone/>
               <a:defRPr sz="1800" b="0">
                 <a:solidFill>
                   <a:srgbClr val="24324A"/>
@@ -11248,9 +15399,100 @@
                 <a:cs typeface="Malgun Gothic"/>
               </a:defRPr>
             </a:defPPr>
+            <a:lvl1pPr algn="l">
+              <a:defRPr sz="1800" b="1">
+                <a:solidFill>
+                  <a:srgbClr val="24324A"/>
+                </a:solidFill>
+                <a:latin typeface="Malgun Gothic"/>
+                <a:ea typeface="Malgun Gothic"/>
+                <a:cs typeface="Malgun Gothic"/>
+              </a:defRPr>
+            </a:lvl1pPr>
+            <a:lvl2pPr algn="l">
+              <a:defRPr sz="1800" b="1">
+                <a:solidFill>
+                  <a:srgbClr val="24324A"/>
+                </a:solidFill>
+                <a:latin typeface="Malgun Gothic"/>
+                <a:ea typeface="Malgun Gothic"/>
+                <a:cs typeface="Malgun Gothic"/>
+              </a:defRPr>
+            </a:lvl2pPr>
+            <a:lvl3pPr algn="l">
+              <a:defRPr sz="1800" b="1">
+                <a:solidFill>
+                  <a:srgbClr val="24324A"/>
+                </a:solidFill>
+                <a:latin typeface="Malgun Gothic"/>
+                <a:ea typeface="Malgun Gothic"/>
+                <a:cs typeface="Malgun Gothic"/>
+              </a:defRPr>
+            </a:lvl3pPr>
+            <a:lvl4pPr algn="l">
+              <a:defRPr sz="1800" b="1">
+                <a:solidFill>
+                  <a:srgbClr val="24324A"/>
+                </a:solidFill>
+                <a:latin typeface="Malgun Gothic"/>
+                <a:ea typeface="Malgun Gothic"/>
+                <a:cs typeface="Malgun Gothic"/>
+              </a:defRPr>
+            </a:lvl4pPr>
+            <a:lvl5pPr algn="l">
+              <a:defRPr sz="1800" b="1">
+                <a:solidFill>
+                  <a:srgbClr val="24324A"/>
+                </a:solidFill>
+                <a:latin typeface="Malgun Gothic"/>
+                <a:ea typeface="Malgun Gothic"/>
+                <a:cs typeface="Malgun Gothic"/>
+              </a:defRPr>
+            </a:lvl5pPr>
+            <a:lvl6pPr algn="l">
+              <a:defRPr sz="1800" b="1">
+                <a:solidFill>
+                  <a:srgbClr val="24324A"/>
+                </a:solidFill>
+                <a:latin typeface="Malgun Gothic"/>
+                <a:ea typeface="Malgun Gothic"/>
+                <a:cs typeface="Malgun Gothic"/>
+              </a:defRPr>
+            </a:lvl6pPr>
+            <a:lvl7pPr algn="l">
+              <a:defRPr sz="1800" b="1">
+                <a:solidFill>
+                  <a:srgbClr val="24324A"/>
+                </a:solidFill>
+                <a:latin typeface="Malgun Gothic"/>
+                <a:ea typeface="Malgun Gothic"/>
+                <a:cs typeface="Malgun Gothic"/>
+              </a:defRPr>
+            </a:lvl7pPr>
+            <a:lvl8pPr algn="l">
+              <a:defRPr sz="1800" b="1">
+                <a:solidFill>
+                  <a:srgbClr val="24324A"/>
+                </a:solidFill>
+                <a:latin typeface="Malgun Gothic"/>
+                <a:ea typeface="Malgun Gothic"/>
+                <a:cs typeface="Malgun Gothic"/>
+              </a:defRPr>
+            </a:lvl8pPr>
+            <a:lvl9pPr algn="l">
+              <a:defRPr sz="1800" b="1">
+                <a:solidFill>
+                  <a:srgbClr val="24324A"/>
+                </a:solidFill>
+                <a:latin typeface="Malgun Gothic"/>
+                <a:ea typeface="Malgun Gothic"/>
+                <a:cs typeface="Malgun Gothic"/>
+              </a:defRPr>
+            </a:lvl9pPr>
           </a:lstStyle>
           <a:p xmlns:a="http://schemas.openxmlformats.org/drawingml/2006/main">
             <a:pPr algn="l">
+              <a:buNone/>
               <a:defRPr sz="1800" b="1">
                 <a:solidFill>
                   <a:srgbClr val="24324A"/>
@@ -11279,7 +15521,7 @@
           <p:cNvPr id="56" name="">
             <a:extLst xmlns:a="http://schemas.openxmlformats.org/drawingml/2006/main">
               <a:ext uri="{FF2B5EF4-FFF2-40B4-BE49-F238E27FC236}">
-                <a16:creationId xmlns:a16="http://schemas.microsoft.com/office/drawing/2014/main" id="{145E0A38-A25B-45CF-A80B-F846EB3C0717}"/>
+                <a16:creationId xmlns:a16="http://schemas.microsoft.com/office/drawing/2014/main" id="{01E93656-F1C1-486B-9527-17888CB09419}"/>
               </a:ext>
             </a:extLst>
           </p:cNvPr>
@@ -11309,7 +15551,9 @@
                     </a:bodyPr>
                     <a:lstStyle/>
                     <a:p>
-                      <a:pPr algn="ctr"/>
+                      <a:pPr algn="ctr">
+                        <a:buNone/>
+                      </a:pPr>
                       <a:r>
                         <a:rPr sz="1800" b="1">
                           <a:solidFill>
@@ -11360,7 +15604,9 @@
                     </a:bodyPr>
                     <a:lstStyle/>
                     <a:p>
-                      <a:pPr algn="ctr"/>
+                      <a:pPr algn="ctr">
+                        <a:buNone/>
+                      </a:pPr>
                       <a:r>
                         <a:rPr sz="1800" b="1">
                           <a:solidFill>
@@ -11374,7 +15620,9 @@
                       </a:r>
                     </a:p>
                     <a:p>
-                      <a:pPr algn="ctr"/>
+                      <a:pPr algn="ctr">
+                        <a:buNone/>
+                      </a:pPr>
                       <a:r>
                         <a:rPr sz="1800" b="1">
                           <a:solidFill>
@@ -11419,7 +15667,9 @@
                     </a:bodyPr>
                     <a:lstStyle/>
                     <a:p>
-                      <a:pPr algn="ctr"/>
+                      <a:pPr algn="ctr">
+                        <a:buNone/>
+                      </a:pPr>
                       <a:r>
                         <a:rPr sz="1800" b="1">
                           <a:solidFill>
@@ -11464,7 +15714,9 @@
                     </a:bodyPr>
                     <a:lstStyle/>
                     <a:p>
-                      <a:pPr algn="ctr"/>
+                      <a:pPr algn="ctr">
+                        <a:buNone/>
+                      </a:pPr>
                       <a:r>
                         <a:rPr sz="1800" b="1">
                           <a:solidFill>
@@ -11478,7 +15730,9 @@
                       </a:r>
                     </a:p>
                     <a:p>
-                      <a:pPr algn="ctr"/>
+                      <a:pPr algn="ctr">
+                        <a:buNone/>
+                      </a:pPr>
                       <a:r>
                         <a:rPr sz="1800" b="1">
                           <a:solidFill>
@@ -11523,7 +15777,9 @@
                     </a:bodyPr>
                     <a:lstStyle/>
                     <a:p>
-                      <a:pPr algn="ctr"/>
+                      <a:pPr algn="ctr">
+                        <a:buNone/>
+                      </a:pPr>
                       <a:r>
                         <a:rPr sz="1800" b="1">
                           <a:solidFill>
@@ -11570,7 +15826,9 @@
                     </a:bodyPr>
                     <a:lstStyle/>
                     <a:p>
-                      <a:pPr algn="ctr"/>
+                      <a:pPr algn="ctr">
+                        <a:buNone/>
+                      </a:pPr>
                       <a:r>
                         <a:rPr sz="1800" b="0">
                           <a:solidFill>
@@ -11615,7 +15873,9 @@
                     </a:bodyPr>
                     <a:lstStyle/>
                     <a:p>
-                      <a:pPr algn="r"/>
+                      <a:pPr algn="r">
+                        <a:buNone/>
+                      </a:pPr>
                       <a:r>
                         <a:rPr sz="1800" b="0">
                           <a:solidFill>
@@ -11654,7 +15914,9 @@
                     </a:bodyPr>
                     <a:lstStyle/>
                     <a:p>
-                      <a:pPr algn="r"/>
+                      <a:pPr algn="r">
+                        <a:buNone/>
+                      </a:pPr>
                       <a:r>
                         <a:rPr sz="1800" b="0">
                           <a:solidFill>
@@ -11693,7 +15955,9 @@
                     </a:bodyPr>
                     <a:lstStyle/>
                     <a:p>
-                      <a:pPr algn="r"/>
+                      <a:pPr algn="r">
+                        <a:buNone/>
+                      </a:pPr>
                       <a:r>
                         <a:rPr sz="1800" b="0">
                           <a:solidFill>
@@ -11732,7 +15996,9 @@
                     </a:bodyPr>
                     <a:lstStyle/>
                     <a:p>
-                      <a:pPr algn="r"/>
+                      <a:pPr algn="r">
+                        <a:buNone/>
+                      </a:pPr>
                       <a:r>
                         <a:rPr sz="1800" b="0">
                           <a:solidFill>
@@ -11773,7 +16039,9 @@
                     </a:bodyPr>
                     <a:lstStyle/>
                     <a:p>
-                      <a:pPr algn="ctr"/>
+                      <a:pPr algn="ctr">
+                        <a:buNone/>
+                      </a:pPr>
                       <a:r>
                         <a:rPr sz="1800" b="0">
                           <a:solidFill>
@@ -11818,7 +16086,9 @@
                     </a:bodyPr>
                     <a:lstStyle/>
                     <a:p>
-                      <a:pPr algn="r"/>
+                      <a:pPr algn="r">
+                        <a:buNone/>
+                      </a:pPr>
                       <a:r>
                         <a:rPr sz="1800" b="0">
                           <a:solidFill>
@@ -11857,7 +16127,9 @@
                     </a:bodyPr>
                     <a:lstStyle/>
                     <a:p>
-                      <a:pPr algn="r"/>
+                      <a:pPr algn="r">
+                        <a:buNone/>
+                      </a:pPr>
                       <a:r>
                         <a:rPr sz="1800" b="0">
                           <a:solidFill>
@@ -11896,7 +16168,9 @@
                     </a:bodyPr>
                     <a:lstStyle/>
                     <a:p>
-                      <a:pPr algn="r"/>
+                      <a:pPr algn="r">
+                        <a:buNone/>
+                      </a:pPr>
                       <a:r>
                         <a:rPr sz="1800" b="0">
                           <a:solidFill>
@@ -11935,7 +16209,9 @@
                     </a:bodyPr>
                     <a:lstStyle/>
                     <a:p>
-                      <a:pPr algn="r"/>
+                      <a:pPr algn="r">
+                        <a:buNone/>
+                      </a:pPr>
                       <a:r>
                         <a:rPr sz="1800" b="0">
                           <a:solidFill>
@@ -11976,7 +16252,9 @@
                     </a:bodyPr>
                     <a:lstStyle/>
                     <a:p>
-                      <a:pPr algn="ctr"/>
+                      <a:pPr algn="ctr">
+                        <a:buNone/>
+                      </a:pPr>
                       <a:r>
                         <a:rPr sz="1800" b="0">
                           <a:solidFill>
@@ -12021,7 +16299,9 @@
                     </a:bodyPr>
                     <a:lstStyle/>
                     <a:p>
-                      <a:pPr algn="r"/>
+                      <a:pPr algn="r">
+                        <a:buNone/>
+                      </a:pPr>
                       <a:r>
                         <a:rPr sz="1800" b="0">
                           <a:solidFill>
@@ -12060,7 +16340,9 @@
                     </a:bodyPr>
                     <a:lstStyle/>
                     <a:p>
-                      <a:pPr algn="r"/>
+                      <a:pPr algn="r">
+                        <a:buNone/>
+                      </a:pPr>
                       <a:r>
                         <a:rPr sz="1800" b="0">
                           <a:solidFill>
@@ -12099,7 +16381,9 @@
                     </a:bodyPr>
                     <a:lstStyle/>
                     <a:p>
-                      <a:pPr algn="r"/>
+                      <a:pPr algn="r">
+                        <a:buNone/>
+                      </a:pPr>
                       <a:r>
                         <a:rPr sz="1800" b="0">
                           <a:solidFill>
@@ -12138,7 +16422,9 @@
                     </a:bodyPr>
                     <a:lstStyle/>
                     <a:p>
-                      <a:pPr algn="r"/>
+                      <a:pPr algn="r">
+                        <a:buNone/>
+                      </a:pPr>
                       <a:r>
                         <a:rPr sz="1800" b="0">
                           <a:solidFill>
@@ -12179,7 +16465,9 @@
                     </a:bodyPr>
                     <a:lstStyle/>
                     <a:p>
-                      <a:pPr algn="ctr"/>
+                      <a:pPr algn="ctr">
+                        <a:buNone/>
+                      </a:pPr>
                       <a:r>
                         <a:rPr sz="1800" b="0">
                           <a:solidFill>
@@ -12224,7 +16512,9 @@
                     </a:bodyPr>
                     <a:lstStyle/>
                     <a:p>
-                      <a:pPr algn="r"/>
+                      <a:pPr algn="r">
+                        <a:buNone/>
+                      </a:pPr>
                       <a:r>
                         <a:rPr sz="1800" b="0">
                           <a:solidFill>
@@ -12263,7 +16553,9 @@
                     </a:bodyPr>
                     <a:lstStyle/>
                     <a:p>
-                      <a:pPr algn="r"/>
+                      <a:pPr algn="r">
+                        <a:buNone/>
+                      </a:pPr>
                       <a:r>
                         <a:rPr sz="1800" b="0">
                           <a:solidFill>
@@ -12302,7 +16594,9 @@
                     </a:bodyPr>
                     <a:lstStyle/>
                     <a:p>
-                      <a:pPr algn="r"/>
+                      <a:pPr algn="r">
+                        <a:buNone/>
+                      </a:pPr>
                       <a:r>
                         <a:rPr sz="1800" b="0">
                           <a:solidFill>
@@ -12341,7 +16635,9 @@
                     </a:bodyPr>
                     <a:lstStyle/>
                     <a:p>
-                      <a:pPr algn="r"/>
+                      <a:pPr algn="r">
+                        <a:buNone/>
+                      </a:pPr>
                       <a:r>
                         <a:rPr sz="1800" b="0">
                           <a:solidFill>
@@ -12382,7 +16678,9 @@
                     </a:bodyPr>
                     <a:lstStyle/>
                     <a:p>
-                      <a:pPr algn="ctr"/>
+                      <a:pPr algn="ctr">
+                        <a:buNone/>
+                      </a:pPr>
                       <a:r>
                         <a:rPr sz="1800" b="0">
                           <a:solidFill>
@@ -12427,7 +16725,9 @@
                     </a:bodyPr>
                     <a:lstStyle/>
                     <a:p>
-                      <a:pPr algn="r"/>
+                      <a:pPr algn="r">
+                        <a:buNone/>
+                      </a:pPr>
                       <a:r>
                         <a:rPr sz="1800" b="0">
                           <a:solidFill>
@@ -12466,7 +16766,9 @@
                     </a:bodyPr>
                     <a:lstStyle/>
                     <a:p>
-                      <a:pPr algn="r"/>
+                      <a:pPr algn="r">
+                        <a:buNone/>
+                      </a:pPr>
                       <a:r>
                         <a:rPr sz="1800" b="0">
                           <a:solidFill>
@@ -12505,7 +16807,9 @@
                     </a:bodyPr>
                     <a:lstStyle/>
                     <a:p>
-                      <a:pPr algn="r"/>
+                      <a:pPr algn="r">
+                        <a:buNone/>
+                      </a:pPr>
                       <a:r>
                         <a:rPr sz="1800" b="0">
                           <a:solidFill>
@@ -12544,7 +16848,9 @@
                     </a:bodyPr>
                     <a:lstStyle/>
                     <a:p>
-                      <a:pPr algn="r"/>
+                      <a:pPr algn="r">
+                        <a:buNone/>
+                      </a:pPr>
                       <a:r>
                         <a:rPr sz="1800" b="0">
                           <a:solidFill>
@@ -12585,7 +16891,9 @@
                     </a:bodyPr>
                     <a:lstStyle/>
                     <a:p>
-                      <a:pPr algn="ctr"/>
+                      <a:pPr algn="ctr">
+                        <a:buNone/>
+                      </a:pPr>
                       <a:r>
                         <a:rPr sz="1800" b="0">
                           <a:solidFill>
@@ -12630,7 +16938,9 @@
                     </a:bodyPr>
                     <a:lstStyle/>
                     <a:p>
-                      <a:pPr algn="r"/>
+                      <a:pPr algn="r">
+                        <a:buNone/>
+                      </a:pPr>
                       <a:r>
                         <a:rPr sz="1800" b="0">
                           <a:solidFill>
@@ -12669,7 +16979,9 @@
                     </a:bodyPr>
                     <a:lstStyle/>
                     <a:p>
-                      <a:pPr algn="r"/>
+                      <a:pPr algn="r">
+                        <a:buNone/>
+                      </a:pPr>
                       <a:r>
                         <a:rPr sz="1800" b="0">
                           <a:solidFill>
@@ -12708,7 +17020,9 @@
                     </a:bodyPr>
                     <a:lstStyle/>
                     <a:p>
-                      <a:pPr algn="r"/>
+                      <a:pPr algn="r">
+                        <a:buNone/>
+                      </a:pPr>
                       <a:r>
                         <a:rPr sz="1800" b="0">
                           <a:solidFill>
@@ -12747,7 +17061,9 @@
                     </a:bodyPr>
                     <a:lstStyle/>
                     <a:p>
-                      <a:pPr algn="r"/>
+                      <a:pPr algn="r">
+                        <a:buNone/>
+                      </a:pPr>
                       <a:r>
                         <a:rPr sz="1800" b="0">
                           <a:solidFill>
@@ -12788,7 +17104,9 @@
                     </a:bodyPr>
                     <a:lstStyle/>
                     <a:p>
-                      <a:pPr algn="ctr"/>
+                      <a:pPr algn="ctr">
+                        <a:buNone/>
+                      </a:pPr>
                       <a:r>
                         <a:rPr sz="1800" b="0">
                           <a:solidFill>
@@ -12833,7 +17151,9 @@
                     </a:bodyPr>
                     <a:lstStyle/>
                     <a:p>
-                      <a:pPr algn="r"/>
+                      <a:pPr algn="r">
+                        <a:buNone/>
+                      </a:pPr>
                       <a:r>
                         <a:rPr sz="1800" b="0">
                           <a:solidFill>
@@ -12872,7 +17192,9 @@
                     </a:bodyPr>
                     <a:lstStyle/>
                     <a:p>
-                      <a:pPr algn="r"/>
+                      <a:pPr algn="r">
+                        <a:buNone/>
+                      </a:pPr>
                       <a:r>
                         <a:rPr sz="1800" b="0">
                           <a:solidFill>
@@ -12911,7 +17233,9 @@
                     </a:bodyPr>
                     <a:lstStyle/>
                     <a:p>
-                      <a:pPr algn="r"/>
+                      <a:pPr algn="r">
+                        <a:buNone/>
+                      </a:pPr>
                       <a:r>
                         <a:rPr sz="1800" b="0">
                           <a:solidFill>
@@ -12950,7 +17274,9 @@
                     </a:bodyPr>
                     <a:lstStyle/>
                     <a:p>
-                      <a:pPr algn="r"/>
+                      <a:pPr algn="r">
+                        <a:buNone/>
+                      </a:pPr>
                       <a:r>
                         <a:rPr sz="1800" b="0">
                           <a:solidFill>
@@ -13029,9 +17355,100 @@
                 <a:cs typeface="Malgun Gothic"/>
               </a:defRPr>
             </a:defPPr>
+            <a:lvl1pPr algn="l">
+              <a:defRPr sz="1800" b="0">
+                <a:solidFill>
+                  <a:srgbClr val="24324A"/>
+                </a:solidFill>
+                <a:latin typeface="Malgun Gothic"/>
+                <a:ea typeface="Malgun Gothic"/>
+                <a:cs typeface="Malgun Gothic"/>
+              </a:defRPr>
+            </a:lvl1pPr>
+            <a:lvl2pPr algn="l">
+              <a:defRPr sz="1800" b="0">
+                <a:solidFill>
+                  <a:srgbClr val="24324A"/>
+                </a:solidFill>
+                <a:latin typeface="Malgun Gothic"/>
+                <a:ea typeface="Malgun Gothic"/>
+                <a:cs typeface="Malgun Gothic"/>
+              </a:defRPr>
+            </a:lvl2pPr>
+            <a:lvl3pPr algn="l">
+              <a:defRPr sz="1800" b="0">
+                <a:solidFill>
+                  <a:srgbClr val="24324A"/>
+                </a:solidFill>
+                <a:latin typeface="Malgun Gothic"/>
+                <a:ea typeface="Malgun Gothic"/>
+                <a:cs typeface="Malgun Gothic"/>
+              </a:defRPr>
+            </a:lvl3pPr>
+            <a:lvl4pPr algn="l">
+              <a:defRPr sz="1800" b="0">
+                <a:solidFill>
+                  <a:srgbClr val="24324A"/>
+                </a:solidFill>
+                <a:latin typeface="Malgun Gothic"/>
+                <a:ea typeface="Malgun Gothic"/>
+                <a:cs typeface="Malgun Gothic"/>
+              </a:defRPr>
+            </a:lvl4pPr>
+            <a:lvl5pPr algn="l">
+              <a:defRPr sz="1800" b="0">
+                <a:solidFill>
+                  <a:srgbClr val="24324A"/>
+                </a:solidFill>
+                <a:latin typeface="Malgun Gothic"/>
+                <a:ea typeface="Malgun Gothic"/>
+                <a:cs typeface="Malgun Gothic"/>
+              </a:defRPr>
+            </a:lvl5pPr>
+            <a:lvl6pPr algn="l">
+              <a:defRPr sz="1800" b="0">
+                <a:solidFill>
+                  <a:srgbClr val="24324A"/>
+                </a:solidFill>
+                <a:latin typeface="Malgun Gothic"/>
+                <a:ea typeface="Malgun Gothic"/>
+                <a:cs typeface="Malgun Gothic"/>
+              </a:defRPr>
+            </a:lvl6pPr>
+            <a:lvl7pPr algn="l">
+              <a:defRPr sz="1800" b="0">
+                <a:solidFill>
+                  <a:srgbClr val="24324A"/>
+                </a:solidFill>
+                <a:latin typeface="Malgun Gothic"/>
+                <a:ea typeface="Malgun Gothic"/>
+                <a:cs typeface="Malgun Gothic"/>
+              </a:defRPr>
+            </a:lvl7pPr>
+            <a:lvl8pPr algn="l">
+              <a:defRPr sz="1800" b="0">
+                <a:solidFill>
+                  <a:srgbClr val="24324A"/>
+                </a:solidFill>
+                <a:latin typeface="Malgun Gothic"/>
+                <a:ea typeface="Malgun Gothic"/>
+                <a:cs typeface="Malgun Gothic"/>
+              </a:defRPr>
+            </a:lvl8pPr>
+            <a:lvl9pPr algn="l">
+              <a:defRPr sz="1800" b="0">
+                <a:solidFill>
+                  <a:srgbClr val="24324A"/>
+                </a:solidFill>
+                <a:latin typeface="Malgun Gothic"/>
+                <a:ea typeface="Malgun Gothic"/>
+                <a:cs typeface="Malgun Gothic"/>
+              </a:defRPr>
+            </a:lvl9pPr>
           </a:lstStyle>
           <a:p xmlns:a="http://schemas.openxmlformats.org/drawingml/2006/main">
             <a:pPr algn="l">
+              <a:buNone/>
               <a:defRPr sz="1800" b="0">
                 <a:solidFill>
                   <a:srgbClr val="24324A"/>
@@ -13055,6 +17472,7 @@
           </a:p>
           <a:p xmlns:a="http://schemas.openxmlformats.org/drawingml/2006/main">
             <a:pPr algn="l">
+              <a:buNone/>
               <a:defRPr sz="1800" b="0">
                 <a:solidFill>
                   <a:srgbClr val="24324A"/>
@@ -13078,6 +17496,7 @@
           </a:p>
           <a:p xmlns:a="http://schemas.openxmlformats.org/drawingml/2006/main">
             <a:pPr algn="l">
+              <a:buNone/>
               <a:defRPr sz="1800" b="0">
                 <a:solidFill>
                   <a:srgbClr val="24324A"/>
@@ -13143,9 +17562,100 @@
                 <a:cs typeface="Malgun Gothic"/>
               </a:defRPr>
             </a:defPPr>
+            <a:lvl1pPr algn="l">
+              <a:defRPr sz="1800" b="1">
+                <a:solidFill>
+                  <a:srgbClr val="24324A"/>
+                </a:solidFill>
+                <a:latin typeface="Malgun Gothic"/>
+                <a:ea typeface="Malgun Gothic"/>
+                <a:cs typeface="Malgun Gothic"/>
+              </a:defRPr>
+            </a:lvl1pPr>
+            <a:lvl2pPr algn="l">
+              <a:defRPr sz="1800" b="1">
+                <a:solidFill>
+                  <a:srgbClr val="24324A"/>
+                </a:solidFill>
+                <a:latin typeface="Malgun Gothic"/>
+                <a:ea typeface="Malgun Gothic"/>
+                <a:cs typeface="Malgun Gothic"/>
+              </a:defRPr>
+            </a:lvl2pPr>
+            <a:lvl3pPr algn="l">
+              <a:defRPr sz="1800" b="1">
+                <a:solidFill>
+                  <a:srgbClr val="24324A"/>
+                </a:solidFill>
+                <a:latin typeface="Malgun Gothic"/>
+                <a:ea typeface="Malgun Gothic"/>
+                <a:cs typeface="Malgun Gothic"/>
+              </a:defRPr>
+            </a:lvl3pPr>
+            <a:lvl4pPr algn="l">
+              <a:defRPr sz="1800" b="1">
+                <a:solidFill>
+                  <a:srgbClr val="24324A"/>
+                </a:solidFill>
+                <a:latin typeface="Malgun Gothic"/>
+                <a:ea typeface="Malgun Gothic"/>
+                <a:cs typeface="Malgun Gothic"/>
+              </a:defRPr>
+            </a:lvl4pPr>
+            <a:lvl5pPr algn="l">
+              <a:defRPr sz="1800" b="1">
+                <a:solidFill>
+                  <a:srgbClr val="24324A"/>
+                </a:solidFill>
+                <a:latin typeface="Malgun Gothic"/>
+                <a:ea typeface="Malgun Gothic"/>
+                <a:cs typeface="Malgun Gothic"/>
+              </a:defRPr>
+            </a:lvl5pPr>
+            <a:lvl6pPr algn="l">
+              <a:defRPr sz="1800" b="1">
+                <a:solidFill>
+                  <a:srgbClr val="24324A"/>
+                </a:solidFill>
+                <a:latin typeface="Malgun Gothic"/>
+                <a:ea typeface="Malgun Gothic"/>
+                <a:cs typeface="Malgun Gothic"/>
+              </a:defRPr>
+            </a:lvl6pPr>
+            <a:lvl7pPr algn="l">
+              <a:defRPr sz="1800" b="1">
+                <a:solidFill>
+                  <a:srgbClr val="24324A"/>
+                </a:solidFill>
+                <a:latin typeface="Malgun Gothic"/>
+                <a:ea typeface="Malgun Gothic"/>
+                <a:cs typeface="Malgun Gothic"/>
+              </a:defRPr>
+            </a:lvl7pPr>
+            <a:lvl8pPr algn="l">
+              <a:defRPr sz="1800" b="1">
+                <a:solidFill>
+                  <a:srgbClr val="24324A"/>
+                </a:solidFill>
+                <a:latin typeface="Malgun Gothic"/>
+                <a:ea typeface="Malgun Gothic"/>
+                <a:cs typeface="Malgun Gothic"/>
+              </a:defRPr>
+            </a:lvl8pPr>
+            <a:lvl9pPr algn="l">
+              <a:defRPr sz="1800" b="1">
+                <a:solidFill>
+                  <a:srgbClr val="24324A"/>
+                </a:solidFill>
+                <a:latin typeface="Malgun Gothic"/>
+                <a:ea typeface="Malgun Gothic"/>
+                <a:cs typeface="Malgun Gothic"/>
+              </a:defRPr>
+            </a:lvl9pPr>
           </a:lstStyle>
           <a:p xmlns:a="http://schemas.openxmlformats.org/drawingml/2006/main">
             <a:pPr algn="l">
+              <a:buNone/>
               <a:defRPr sz="1800" b="1">
                 <a:solidFill>
                   <a:srgbClr val="24324A"/>
@@ -13174,7 +17684,7 @@
           <p:cNvPr id="59" name="">
             <a:extLst xmlns:a="http://schemas.openxmlformats.org/drawingml/2006/main">
               <a:ext uri="{FF2B5EF4-FFF2-40B4-BE49-F238E27FC236}">
-                <a16:creationId xmlns:a16="http://schemas.microsoft.com/office/drawing/2014/main" id="{3CCF2F32-0EA6-429C-A8DC-8844FCB11730}"/>
+                <a16:creationId xmlns:a16="http://schemas.microsoft.com/office/drawing/2014/main" id="{5B8A7DEB-9875-4EF4-9179-2CB8A1141FC7}"/>
               </a:ext>
             </a:extLst>
           </p:cNvPr>
@@ -13204,7 +17714,9 @@
                     </a:bodyPr>
                     <a:lstStyle/>
                     <a:p>
-                      <a:pPr algn="ctr"/>
+                      <a:pPr algn="ctr">
+                        <a:buNone/>
+                      </a:pPr>
                       <a:r>
                         <a:rPr sz="1800" b="1">
                           <a:solidFill>
@@ -13255,7 +17767,9 @@
                     </a:bodyPr>
                     <a:lstStyle/>
                     <a:p>
-                      <a:pPr algn="ctr"/>
+                      <a:pPr algn="ctr">
+                        <a:buNone/>
+                      </a:pPr>
                       <a:r>
                         <a:rPr sz="1800" b="1">
                           <a:solidFill>
@@ -13269,7 +17783,9 @@
                       </a:r>
                     </a:p>
                     <a:p>
-                      <a:pPr algn="ctr"/>
+                      <a:pPr algn="ctr">
+                        <a:buNone/>
+                      </a:pPr>
                       <a:r>
                         <a:rPr sz="1800" b="1">
                           <a:solidFill>
@@ -13314,7 +17830,9 @@
                     </a:bodyPr>
                     <a:lstStyle/>
                     <a:p>
-                      <a:pPr algn="ctr"/>
+                      <a:pPr algn="ctr">
+                        <a:buNone/>
+                      </a:pPr>
                       <a:r>
                         <a:rPr sz="1800" b="1">
                           <a:solidFill>
@@ -13359,7 +17877,9 @@
                     </a:bodyPr>
                     <a:lstStyle/>
                     <a:p>
-                      <a:pPr algn="ctr"/>
+                      <a:pPr algn="ctr">
+                        <a:buNone/>
+                      </a:pPr>
                       <a:r>
                         <a:rPr sz="1800" b="1">
                           <a:solidFill>
@@ -13373,7 +17893,9 @@
                       </a:r>
                     </a:p>
                     <a:p>
-                      <a:pPr algn="ctr"/>
+                      <a:pPr algn="ctr">
+                        <a:buNone/>
+                      </a:pPr>
                       <a:r>
                         <a:rPr sz="1800" b="1">
                           <a:solidFill>
@@ -13418,7 +17940,9 @@
                     </a:bodyPr>
                     <a:lstStyle/>
                     <a:p>
-                      <a:pPr algn="ctr"/>
+                      <a:pPr algn="ctr">
+                        <a:buNone/>
+                      </a:pPr>
                       <a:r>
                         <a:rPr sz="1800" b="1">
                           <a:solidFill>
@@ -13432,7 +17956,9 @@
                       </a:r>
                     </a:p>
                     <a:p>
-                      <a:pPr algn="ctr"/>
+                      <a:pPr algn="ctr">
+                        <a:buNone/>
+                      </a:pPr>
                       <a:r>
                         <a:rPr sz="1800" b="1">
                           <a:solidFill>
@@ -13479,7 +18005,9 @@
                     </a:bodyPr>
                     <a:lstStyle/>
                     <a:p>
-                      <a:pPr algn="l"/>
+                      <a:pPr algn="l">
+                        <a:buNone/>
+                      </a:pPr>
                       <a:r>
                         <a:rPr sz="1800" b="0">
                           <a:solidFill>
@@ -13493,7 +18021,9 @@
                       </a:r>
                     </a:p>
                     <a:p>
-                      <a:pPr algn="l"/>
+                      <a:pPr algn="l">
+                        <a:buNone/>
+                      </a:pPr>
                       <a:r>
                         <a:rPr sz="1800" b="0">
                           <a:solidFill>
@@ -13538,7 +18068,9 @@
                     </a:bodyPr>
                     <a:lstStyle/>
                     <a:p>
-                      <a:pPr algn="r"/>
+                      <a:pPr algn="r">
+                        <a:buNone/>
+                      </a:pPr>
                       <a:r>
                         <a:rPr sz="1800" b="0">
                           <a:solidFill>
@@ -13552,7 +18084,9 @@
                       </a:r>
                     </a:p>
                     <a:p>
-                      <a:pPr algn="r"/>
+                      <a:pPr algn="r">
+                        <a:buNone/>
+                      </a:pPr>
                       <a:r>
                         <a:rPr sz="1800" b="0">
                           <a:solidFill>
@@ -13591,7 +18125,9 @@
                     </a:bodyPr>
                     <a:lstStyle/>
                     <a:p>
-                      <a:pPr algn="r"/>
+                      <a:pPr algn="r">
+                        <a:buNone/>
+                      </a:pPr>
                       <a:r>
                         <a:rPr sz="1800" b="0">
                           <a:solidFill>
@@ -13605,7 +18141,9 @@
                       </a:r>
                     </a:p>
                     <a:p>
-                      <a:pPr algn="r"/>
+                      <a:pPr algn="r">
+                        <a:buNone/>
+                      </a:pPr>
                       <a:r>
                         <a:rPr sz="1800" b="0">
                           <a:solidFill>
@@ -13644,7 +18182,9 @@
                     </a:bodyPr>
                     <a:lstStyle/>
                     <a:p>
-                      <a:pPr algn="r"/>
+                      <a:pPr algn="r">
+                        <a:buNone/>
+                      </a:pPr>
                       <a:r>
                         <a:rPr sz="1800" b="0">
                           <a:solidFill>
@@ -13683,7 +18223,9 @@
                     </a:bodyPr>
                     <a:lstStyle/>
                     <a:p>
-                      <a:pPr algn="r"/>
+                      <a:pPr algn="r">
+                        <a:buNone/>
+                      </a:pPr>
                       <a:r>
                         <a:rPr sz="1800" b="0">
                           <a:solidFill>
@@ -13724,7 +18266,9 @@
                     </a:bodyPr>
                     <a:lstStyle/>
                     <a:p>
-                      <a:pPr algn="l"/>
+                      <a:pPr algn="l">
+                        <a:buNone/>
+                      </a:pPr>
                       <a:r>
                         <a:rPr sz="1800" b="0">
                           <a:solidFill>
@@ -13738,7 +18282,9 @@
                       </a:r>
                     </a:p>
                     <a:p>
-                      <a:pPr algn="l"/>
+                      <a:pPr algn="l">
+                        <a:buNone/>
+                      </a:pPr>
                       <a:r>
                         <a:rPr sz="1800" b="0">
                           <a:solidFill>
@@ -13783,7 +18329,9 @@
                     </a:bodyPr>
                     <a:lstStyle/>
                     <a:p>
-                      <a:pPr algn="r"/>
+                      <a:pPr algn="r">
+                        <a:buNone/>
+                      </a:pPr>
                       <a:r>
                         <a:rPr sz="1800" b="0">
                           <a:solidFill>
@@ -13797,7 +18345,9 @@
                       </a:r>
                     </a:p>
                     <a:p>
-                      <a:pPr algn="r"/>
+                      <a:pPr algn="r">
+                        <a:buNone/>
+                      </a:pPr>
                       <a:r>
                         <a:rPr sz="1800" b="0">
                           <a:solidFill>
@@ -13836,7 +18386,9 @@
                     </a:bodyPr>
                     <a:lstStyle/>
                     <a:p>
-                      <a:pPr algn="r"/>
+                      <a:pPr algn="r">
+                        <a:buNone/>
+                      </a:pPr>
                       <a:r>
                         <a:rPr sz="1800" b="0">
                           <a:solidFill>
@@ -13850,7 +18402,9 @@
                       </a:r>
                     </a:p>
                     <a:p>
-                      <a:pPr algn="r"/>
+                      <a:pPr algn="r">
+                        <a:buNone/>
+                      </a:pPr>
                       <a:r>
                         <a:rPr sz="1800" b="0">
                           <a:solidFill>
@@ -13889,7 +18443,9 @@
                     </a:bodyPr>
                     <a:lstStyle/>
                     <a:p>
-                      <a:pPr algn="r"/>
+                      <a:pPr algn="r">
+                        <a:buNone/>
+                      </a:pPr>
                       <a:r>
                         <a:rPr sz="1800" b="0">
                           <a:solidFill>
@@ -13928,7 +18484,9 @@
                     </a:bodyPr>
                     <a:lstStyle/>
                     <a:p>
-                      <a:pPr algn="r"/>
+                      <a:pPr algn="r">
+                        <a:buNone/>
+                      </a:pPr>
                       <a:r>
                         <a:rPr sz="1800" b="0">
                           <a:solidFill>
@@ -13969,7 +18527,9 @@
                     </a:bodyPr>
                     <a:lstStyle/>
                     <a:p>
-                      <a:pPr algn="l"/>
+                      <a:pPr algn="l">
+                        <a:buNone/>
+                      </a:pPr>
                       <a:r>
                         <a:rPr sz="1800" b="0">
                           <a:solidFill>
@@ -13983,7 +18543,9 @@
                       </a:r>
                     </a:p>
                     <a:p>
-                      <a:pPr algn="l"/>
+                      <a:pPr algn="l">
+                        <a:buNone/>
+                      </a:pPr>
                       <a:r>
                         <a:rPr sz="1800" b="0">
                           <a:solidFill>
@@ -14028,7 +18590,9 @@
                     </a:bodyPr>
                     <a:lstStyle/>
                     <a:p>
-                      <a:pPr algn="r"/>
+                      <a:pPr algn="r">
+                        <a:buNone/>
+                      </a:pPr>
                       <a:r>
                         <a:rPr sz="1800" b="0">
                           <a:solidFill>
@@ -14042,7 +18606,9 @@
                       </a:r>
                     </a:p>
                     <a:p>
-                      <a:pPr algn="r"/>
+                      <a:pPr algn="r">
+                        <a:buNone/>
+                      </a:pPr>
                       <a:r>
                         <a:rPr sz="1800" b="0">
                           <a:solidFill>
@@ -14081,7 +18647,9 @@
                     </a:bodyPr>
                     <a:lstStyle/>
                     <a:p>
-                      <a:pPr algn="r"/>
+                      <a:pPr algn="r">
+                        <a:buNone/>
+                      </a:pPr>
                       <a:r>
                         <a:rPr sz="1800" b="0">
                           <a:solidFill>
@@ -14095,7 +18663,9 @@
                       </a:r>
                     </a:p>
                     <a:p>
-                      <a:pPr algn="r"/>
+                      <a:pPr algn="r">
+                        <a:buNone/>
+                      </a:pPr>
                       <a:r>
                         <a:rPr sz="1800" b="0">
                           <a:solidFill>
@@ -14134,7 +18704,9 @@
                     </a:bodyPr>
                     <a:lstStyle/>
                     <a:p>
-                      <a:pPr algn="r"/>
+                      <a:pPr algn="r">
+                        <a:buNone/>
+                      </a:pPr>
                       <a:r>
                         <a:rPr sz="1800" b="0">
                           <a:solidFill>
@@ -14173,7 +18745,9 @@
                     </a:bodyPr>
                     <a:lstStyle/>
                     <a:p>
-                      <a:pPr algn="r"/>
+                      <a:pPr algn="r">
+                        <a:buNone/>
+                      </a:pPr>
                       <a:r>
                         <a:rPr sz="1800" b="0">
                           <a:solidFill>
@@ -14252,9 +18826,100 @@
                 <a:cs typeface="Malgun Gothic"/>
               </a:defRPr>
             </a:defPPr>
+            <a:lvl1pPr algn="l">
+              <a:defRPr sz="1800" b="0">
+                <a:solidFill>
+                  <a:srgbClr val="24324A"/>
+                </a:solidFill>
+                <a:latin typeface="Malgun Gothic"/>
+                <a:ea typeface="Malgun Gothic"/>
+                <a:cs typeface="Malgun Gothic"/>
+              </a:defRPr>
+            </a:lvl1pPr>
+            <a:lvl2pPr algn="l">
+              <a:defRPr sz="1800" b="0">
+                <a:solidFill>
+                  <a:srgbClr val="24324A"/>
+                </a:solidFill>
+                <a:latin typeface="Malgun Gothic"/>
+                <a:ea typeface="Malgun Gothic"/>
+                <a:cs typeface="Malgun Gothic"/>
+              </a:defRPr>
+            </a:lvl2pPr>
+            <a:lvl3pPr algn="l">
+              <a:defRPr sz="1800" b="0">
+                <a:solidFill>
+                  <a:srgbClr val="24324A"/>
+                </a:solidFill>
+                <a:latin typeface="Malgun Gothic"/>
+                <a:ea typeface="Malgun Gothic"/>
+                <a:cs typeface="Malgun Gothic"/>
+              </a:defRPr>
+            </a:lvl3pPr>
+            <a:lvl4pPr algn="l">
+              <a:defRPr sz="1800" b="0">
+                <a:solidFill>
+                  <a:srgbClr val="24324A"/>
+                </a:solidFill>
+                <a:latin typeface="Malgun Gothic"/>
+                <a:ea typeface="Malgun Gothic"/>
+                <a:cs typeface="Malgun Gothic"/>
+              </a:defRPr>
+            </a:lvl4pPr>
+            <a:lvl5pPr algn="l">
+              <a:defRPr sz="1800" b="0">
+                <a:solidFill>
+                  <a:srgbClr val="24324A"/>
+                </a:solidFill>
+                <a:latin typeface="Malgun Gothic"/>
+                <a:ea typeface="Malgun Gothic"/>
+                <a:cs typeface="Malgun Gothic"/>
+              </a:defRPr>
+            </a:lvl5pPr>
+            <a:lvl6pPr algn="l">
+              <a:defRPr sz="1800" b="0">
+                <a:solidFill>
+                  <a:srgbClr val="24324A"/>
+                </a:solidFill>
+                <a:latin typeface="Malgun Gothic"/>
+                <a:ea typeface="Malgun Gothic"/>
+                <a:cs typeface="Malgun Gothic"/>
+              </a:defRPr>
+            </a:lvl6pPr>
+            <a:lvl7pPr algn="l">
+              <a:defRPr sz="1800" b="0">
+                <a:solidFill>
+                  <a:srgbClr val="24324A"/>
+                </a:solidFill>
+                <a:latin typeface="Malgun Gothic"/>
+                <a:ea typeface="Malgun Gothic"/>
+                <a:cs typeface="Malgun Gothic"/>
+              </a:defRPr>
+            </a:lvl7pPr>
+            <a:lvl8pPr algn="l">
+              <a:defRPr sz="1800" b="0">
+                <a:solidFill>
+                  <a:srgbClr val="24324A"/>
+                </a:solidFill>
+                <a:latin typeface="Malgun Gothic"/>
+                <a:ea typeface="Malgun Gothic"/>
+                <a:cs typeface="Malgun Gothic"/>
+              </a:defRPr>
+            </a:lvl8pPr>
+            <a:lvl9pPr algn="l">
+              <a:defRPr sz="1800" b="0">
+                <a:solidFill>
+                  <a:srgbClr val="24324A"/>
+                </a:solidFill>
+                <a:latin typeface="Malgun Gothic"/>
+                <a:ea typeface="Malgun Gothic"/>
+                <a:cs typeface="Malgun Gothic"/>
+              </a:defRPr>
+            </a:lvl9pPr>
           </a:lstStyle>
           <a:p xmlns:a="http://schemas.openxmlformats.org/drawingml/2006/main">
             <a:pPr algn="l">
+              <a:buNone/>
               <a:defRPr sz="1800" b="0">
                 <a:solidFill>
                   <a:srgbClr val="24324A"/>
@@ -14278,6 +18943,7 @@
           </a:p>
           <a:p xmlns:a="http://schemas.openxmlformats.org/drawingml/2006/main">
             <a:pPr algn="l">
+              <a:buNone/>
               <a:defRPr sz="1800" b="0">
                 <a:solidFill>
                   <a:srgbClr val="24324A"/>
@@ -14301,6 +18967,7 @@
           </a:p>
           <a:p xmlns:a="http://schemas.openxmlformats.org/drawingml/2006/main">
             <a:pPr algn="l">
+              <a:buNone/>
               <a:defRPr sz="1800" b="0">
                 <a:solidFill>
                   <a:srgbClr val="24324A"/>
@@ -14324,6 +18991,7 @@
           </a:p>
           <a:p xmlns:a="http://schemas.openxmlformats.org/drawingml/2006/main">
             <a:pPr algn="l">
+              <a:buNone/>
               <a:defRPr sz="1800" b="0">
                 <a:solidFill>
                   <a:srgbClr val="24324A"/>
@@ -14420,9 +19088,100 @@
                 <a:cs typeface="Malgun Gothic"/>
               </a:defRPr>
             </a:defPPr>
+            <a:lvl1pPr algn="l">
+              <a:defRPr sz="2400" b="0">
+                <a:solidFill>
+                  <a:srgbClr val="FFFFFF"/>
+                </a:solidFill>
+                <a:latin typeface="Malgun Gothic"/>
+                <a:ea typeface="Malgun Gothic"/>
+                <a:cs typeface="Malgun Gothic"/>
+              </a:defRPr>
+            </a:lvl1pPr>
+            <a:lvl2pPr algn="l">
+              <a:defRPr sz="2400" b="0">
+                <a:solidFill>
+                  <a:srgbClr val="FFFFFF"/>
+                </a:solidFill>
+                <a:latin typeface="Malgun Gothic"/>
+                <a:ea typeface="Malgun Gothic"/>
+                <a:cs typeface="Malgun Gothic"/>
+              </a:defRPr>
+            </a:lvl2pPr>
+            <a:lvl3pPr algn="l">
+              <a:defRPr sz="2400" b="0">
+                <a:solidFill>
+                  <a:srgbClr val="FFFFFF"/>
+                </a:solidFill>
+                <a:latin typeface="Malgun Gothic"/>
+                <a:ea typeface="Malgun Gothic"/>
+                <a:cs typeface="Malgun Gothic"/>
+              </a:defRPr>
+            </a:lvl3pPr>
+            <a:lvl4pPr algn="l">
+              <a:defRPr sz="2400" b="0">
+                <a:solidFill>
+                  <a:srgbClr val="FFFFFF"/>
+                </a:solidFill>
+                <a:latin typeface="Malgun Gothic"/>
+                <a:ea typeface="Malgun Gothic"/>
+                <a:cs typeface="Malgun Gothic"/>
+              </a:defRPr>
+            </a:lvl4pPr>
+            <a:lvl5pPr algn="l">
+              <a:defRPr sz="2400" b="0">
+                <a:solidFill>
+                  <a:srgbClr val="FFFFFF"/>
+                </a:solidFill>
+                <a:latin typeface="Malgun Gothic"/>
+                <a:ea typeface="Malgun Gothic"/>
+                <a:cs typeface="Malgun Gothic"/>
+              </a:defRPr>
+            </a:lvl5pPr>
+            <a:lvl6pPr algn="l">
+              <a:defRPr sz="2400" b="0">
+                <a:solidFill>
+                  <a:srgbClr val="FFFFFF"/>
+                </a:solidFill>
+                <a:latin typeface="Malgun Gothic"/>
+                <a:ea typeface="Malgun Gothic"/>
+                <a:cs typeface="Malgun Gothic"/>
+              </a:defRPr>
+            </a:lvl6pPr>
+            <a:lvl7pPr algn="l">
+              <a:defRPr sz="2400" b="0">
+                <a:solidFill>
+                  <a:srgbClr val="FFFFFF"/>
+                </a:solidFill>
+                <a:latin typeface="Malgun Gothic"/>
+                <a:ea typeface="Malgun Gothic"/>
+                <a:cs typeface="Malgun Gothic"/>
+              </a:defRPr>
+            </a:lvl7pPr>
+            <a:lvl8pPr algn="l">
+              <a:defRPr sz="2400" b="0">
+                <a:solidFill>
+                  <a:srgbClr val="FFFFFF"/>
+                </a:solidFill>
+                <a:latin typeface="Malgun Gothic"/>
+                <a:ea typeface="Malgun Gothic"/>
+                <a:cs typeface="Malgun Gothic"/>
+              </a:defRPr>
+            </a:lvl8pPr>
+            <a:lvl9pPr algn="l">
+              <a:defRPr sz="2400" b="0">
+                <a:solidFill>
+                  <a:srgbClr val="FFFFFF"/>
+                </a:solidFill>
+                <a:latin typeface="Malgun Gothic"/>
+                <a:ea typeface="Malgun Gothic"/>
+                <a:cs typeface="Malgun Gothic"/>
+              </a:defRPr>
+            </a:lvl9pPr>
           </a:lstStyle>
           <a:p xmlns:a="http://schemas.openxmlformats.org/drawingml/2006/main">
             <a:pPr algn="l">
+              <a:buNone/>
               <a:defRPr sz="2400" b="0">
                 <a:solidFill>
                   <a:srgbClr val="FFFFFF"/>
@@ -14488,9 +19247,100 @@
                 <a:cs typeface="Malgun Gothic"/>
               </a:defRPr>
             </a:defPPr>
+            <a:lvl1pPr algn="l">
+              <a:defRPr sz="1800" b="0">
+                <a:solidFill>
+                  <a:srgbClr val="24324A"/>
+                </a:solidFill>
+                <a:latin typeface="Malgun Gothic"/>
+                <a:ea typeface="Malgun Gothic"/>
+                <a:cs typeface="Malgun Gothic"/>
+              </a:defRPr>
+            </a:lvl1pPr>
+            <a:lvl2pPr algn="l">
+              <a:defRPr sz="1800" b="0">
+                <a:solidFill>
+                  <a:srgbClr val="24324A"/>
+                </a:solidFill>
+                <a:latin typeface="Malgun Gothic"/>
+                <a:ea typeface="Malgun Gothic"/>
+                <a:cs typeface="Malgun Gothic"/>
+              </a:defRPr>
+            </a:lvl2pPr>
+            <a:lvl3pPr algn="l">
+              <a:defRPr sz="1800" b="0">
+                <a:solidFill>
+                  <a:srgbClr val="24324A"/>
+                </a:solidFill>
+                <a:latin typeface="Malgun Gothic"/>
+                <a:ea typeface="Malgun Gothic"/>
+                <a:cs typeface="Malgun Gothic"/>
+              </a:defRPr>
+            </a:lvl3pPr>
+            <a:lvl4pPr algn="l">
+              <a:defRPr sz="1800" b="0">
+                <a:solidFill>
+                  <a:srgbClr val="24324A"/>
+                </a:solidFill>
+                <a:latin typeface="Malgun Gothic"/>
+                <a:ea typeface="Malgun Gothic"/>
+                <a:cs typeface="Malgun Gothic"/>
+              </a:defRPr>
+            </a:lvl4pPr>
+            <a:lvl5pPr algn="l">
+              <a:defRPr sz="1800" b="0">
+                <a:solidFill>
+                  <a:srgbClr val="24324A"/>
+                </a:solidFill>
+                <a:latin typeface="Malgun Gothic"/>
+                <a:ea typeface="Malgun Gothic"/>
+                <a:cs typeface="Malgun Gothic"/>
+              </a:defRPr>
+            </a:lvl5pPr>
+            <a:lvl6pPr algn="l">
+              <a:defRPr sz="1800" b="0">
+                <a:solidFill>
+                  <a:srgbClr val="24324A"/>
+                </a:solidFill>
+                <a:latin typeface="Malgun Gothic"/>
+                <a:ea typeface="Malgun Gothic"/>
+                <a:cs typeface="Malgun Gothic"/>
+              </a:defRPr>
+            </a:lvl6pPr>
+            <a:lvl7pPr algn="l">
+              <a:defRPr sz="1800" b="0">
+                <a:solidFill>
+                  <a:srgbClr val="24324A"/>
+                </a:solidFill>
+                <a:latin typeface="Malgun Gothic"/>
+                <a:ea typeface="Malgun Gothic"/>
+                <a:cs typeface="Malgun Gothic"/>
+              </a:defRPr>
+            </a:lvl7pPr>
+            <a:lvl8pPr algn="l">
+              <a:defRPr sz="1800" b="0">
+                <a:solidFill>
+                  <a:srgbClr val="24324A"/>
+                </a:solidFill>
+                <a:latin typeface="Malgun Gothic"/>
+                <a:ea typeface="Malgun Gothic"/>
+                <a:cs typeface="Malgun Gothic"/>
+              </a:defRPr>
+            </a:lvl8pPr>
+            <a:lvl9pPr algn="l">
+              <a:defRPr sz="1800" b="0">
+                <a:solidFill>
+                  <a:srgbClr val="24324A"/>
+                </a:solidFill>
+                <a:latin typeface="Malgun Gothic"/>
+                <a:ea typeface="Malgun Gothic"/>
+                <a:cs typeface="Malgun Gothic"/>
+              </a:defRPr>
+            </a:lvl9pPr>
           </a:lstStyle>
           <a:p xmlns:a="http://schemas.openxmlformats.org/drawingml/2006/main">
             <a:pPr algn="l">
+              <a:buNone/>
               <a:defRPr sz="1800" b="0">
                 <a:solidFill>
                   <a:srgbClr val="24324A"/>
@@ -14509,11 +19359,12 @@
                 <a:ea typeface="Malgun Gothic"/>
                 <a:cs typeface="Malgun Gothic"/>
               </a:rPr>
-              <a:t>HyDE의 양의 관련성 차이는 다중비교 보정 결과와 함께 해석한다.</a:t>
+              <a:t>HyDE 관련성은 평균 +0.080점, Holm 보정 p=0.117이었다.</a:t>
             </a:r>
           </a:p>
           <a:p xmlns:a="http://schemas.openxmlformats.org/drawingml/2006/main">
             <a:pPr algn="l">
+              <a:buNone/>
               <a:defRPr sz="1800" b="0">
                 <a:solidFill>
                   <a:srgbClr val="24324A"/>
@@ -14532,11 +19383,12 @@
                 <a:ea typeface="Malgun Gothic"/>
                 <a:cs typeface="Malgun Gothic"/>
               </a:rPr>
-              <a:t>CAD는 질의별 충실도 변동과 추가 실행 시간을 함께 비교한다.</a:t>
+              <a:t>CAD 충실도는 평균 +0.029점이며 질의별 증감이 달랐다.</a:t>
             </a:r>
           </a:p>
           <a:p xmlns:a="http://schemas.openxmlformats.org/drawingml/2006/main">
             <a:pPr algn="l">
+              <a:buNone/>
               <a:defRPr sz="1800" b="0">
                 <a:solidFill>
                   <a:srgbClr val="24324A"/>
@@ -14555,11 +19407,12 @@
                 <a:ea typeface="Malgun Gothic"/>
                 <a:cs typeface="Malgun Gothic"/>
               </a:rPr>
-              <a:t>SCD의 효과는 생성 답변에서 한글이 차지하는 비중의 증가다.</a:t>
+              <a:t>SCD 주 비교의 한국어 문자 비율은 평균 21.822%p 높았다.</a:t>
             </a:r>
           </a:p>
           <a:p xmlns:a="http://schemas.openxmlformats.org/drawingml/2006/main">
             <a:pPr algn="l">
+              <a:buNone/>
               <a:defRPr sz="1800" b="0">
                 <a:solidFill>
                   <a:srgbClr val="24324A"/>
@@ -14578,7 +19431,7 @@
                 <a:ea typeface="Malgun Gothic"/>
                 <a:cs typeface="Malgun Gothic"/>
               </a:rPr>
-              <a:t>시간의 C×S 상호작용은 SCD별 CAD 시간 증가가 다름을 뜻한다.</a:t>
+              <a:t>CAD 시간 증가: SCD OFF +46.583초 / ON +37.747초.</a:t>
             </a:r>
           </a:p>
         </p:txBody>
@@ -14656,9 +19509,100 @@
                 <a:cs typeface="Malgun Gothic"/>
               </a:defRPr>
             </a:defPPr>
+            <a:lvl1pPr algn="l">
+              <a:defRPr sz="2400" b="0">
+                <a:solidFill>
+                  <a:srgbClr val="FFFFFF"/>
+                </a:solidFill>
+                <a:latin typeface="Malgun Gothic"/>
+                <a:ea typeface="Malgun Gothic"/>
+                <a:cs typeface="Malgun Gothic"/>
+              </a:defRPr>
+            </a:lvl1pPr>
+            <a:lvl2pPr algn="l">
+              <a:defRPr sz="2400" b="0">
+                <a:solidFill>
+                  <a:srgbClr val="FFFFFF"/>
+                </a:solidFill>
+                <a:latin typeface="Malgun Gothic"/>
+                <a:ea typeface="Malgun Gothic"/>
+                <a:cs typeface="Malgun Gothic"/>
+              </a:defRPr>
+            </a:lvl2pPr>
+            <a:lvl3pPr algn="l">
+              <a:defRPr sz="2400" b="0">
+                <a:solidFill>
+                  <a:srgbClr val="FFFFFF"/>
+                </a:solidFill>
+                <a:latin typeface="Malgun Gothic"/>
+                <a:ea typeface="Malgun Gothic"/>
+                <a:cs typeface="Malgun Gothic"/>
+              </a:defRPr>
+            </a:lvl3pPr>
+            <a:lvl4pPr algn="l">
+              <a:defRPr sz="2400" b="0">
+                <a:solidFill>
+                  <a:srgbClr val="FFFFFF"/>
+                </a:solidFill>
+                <a:latin typeface="Malgun Gothic"/>
+                <a:ea typeface="Malgun Gothic"/>
+                <a:cs typeface="Malgun Gothic"/>
+              </a:defRPr>
+            </a:lvl4pPr>
+            <a:lvl5pPr algn="l">
+              <a:defRPr sz="2400" b="0">
+                <a:solidFill>
+                  <a:srgbClr val="FFFFFF"/>
+                </a:solidFill>
+                <a:latin typeface="Malgun Gothic"/>
+                <a:ea typeface="Malgun Gothic"/>
+                <a:cs typeface="Malgun Gothic"/>
+              </a:defRPr>
+            </a:lvl5pPr>
+            <a:lvl6pPr algn="l">
+              <a:defRPr sz="2400" b="0">
+                <a:solidFill>
+                  <a:srgbClr val="FFFFFF"/>
+                </a:solidFill>
+                <a:latin typeface="Malgun Gothic"/>
+                <a:ea typeface="Malgun Gothic"/>
+                <a:cs typeface="Malgun Gothic"/>
+              </a:defRPr>
+            </a:lvl6pPr>
+            <a:lvl7pPr algn="l">
+              <a:defRPr sz="2400" b="0">
+                <a:solidFill>
+                  <a:srgbClr val="FFFFFF"/>
+                </a:solidFill>
+                <a:latin typeface="Malgun Gothic"/>
+                <a:ea typeface="Malgun Gothic"/>
+                <a:cs typeface="Malgun Gothic"/>
+              </a:defRPr>
+            </a:lvl7pPr>
+            <a:lvl8pPr algn="l">
+              <a:defRPr sz="2400" b="0">
+                <a:solidFill>
+                  <a:srgbClr val="FFFFFF"/>
+                </a:solidFill>
+                <a:latin typeface="Malgun Gothic"/>
+                <a:ea typeface="Malgun Gothic"/>
+                <a:cs typeface="Malgun Gothic"/>
+              </a:defRPr>
+            </a:lvl8pPr>
+            <a:lvl9pPr algn="l">
+              <a:defRPr sz="2400" b="0">
+                <a:solidFill>
+                  <a:srgbClr val="FFFFFF"/>
+                </a:solidFill>
+                <a:latin typeface="Malgun Gothic"/>
+                <a:ea typeface="Malgun Gothic"/>
+                <a:cs typeface="Malgun Gothic"/>
+              </a:defRPr>
+            </a:lvl9pPr>
           </a:lstStyle>
           <a:p xmlns:a="http://schemas.openxmlformats.org/drawingml/2006/main">
             <a:pPr algn="l">
+              <a:buNone/>
               <a:defRPr sz="2400" b="0">
                 <a:solidFill>
                   <a:srgbClr val="FFFFFF"/>
@@ -14724,9 +19668,100 @@
                 <a:cs typeface="Malgun Gothic"/>
               </a:defRPr>
             </a:defPPr>
+            <a:lvl1pPr algn="l">
+              <a:defRPr sz="1800" b="0">
+                <a:solidFill>
+                  <a:srgbClr val="24324A"/>
+                </a:solidFill>
+                <a:latin typeface="Malgun Gothic"/>
+                <a:ea typeface="Malgun Gothic"/>
+                <a:cs typeface="Malgun Gothic"/>
+              </a:defRPr>
+            </a:lvl1pPr>
+            <a:lvl2pPr algn="l">
+              <a:defRPr sz="1800" b="0">
+                <a:solidFill>
+                  <a:srgbClr val="24324A"/>
+                </a:solidFill>
+                <a:latin typeface="Malgun Gothic"/>
+                <a:ea typeface="Malgun Gothic"/>
+                <a:cs typeface="Malgun Gothic"/>
+              </a:defRPr>
+            </a:lvl2pPr>
+            <a:lvl3pPr algn="l">
+              <a:defRPr sz="1800" b="0">
+                <a:solidFill>
+                  <a:srgbClr val="24324A"/>
+                </a:solidFill>
+                <a:latin typeface="Malgun Gothic"/>
+                <a:ea typeface="Malgun Gothic"/>
+                <a:cs typeface="Malgun Gothic"/>
+              </a:defRPr>
+            </a:lvl3pPr>
+            <a:lvl4pPr algn="l">
+              <a:defRPr sz="1800" b="0">
+                <a:solidFill>
+                  <a:srgbClr val="24324A"/>
+                </a:solidFill>
+                <a:latin typeface="Malgun Gothic"/>
+                <a:ea typeface="Malgun Gothic"/>
+                <a:cs typeface="Malgun Gothic"/>
+              </a:defRPr>
+            </a:lvl4pPr>
+            <a:lvl5pPr algn="l">
+              <a:defRPr sz="1800" b="0">
+                <a:solidFill>
+                  <a:srgbClr val="24324A"/>
+                </a:solidFill>
+                <a:latin typeface="Malgun Gothic"/>
+                <a:ea typeface="Malgun Gothic"/>
+                <a:cs typeface="Malgun Gothic"/>
+              </a:defRPr>
+            </a:lvl5pPr>
+            <a:lvl6pPr algn="l">
+              <a:defRPr sz="1800" b="0">
+                <a:solidFill>
+                  <a:srgbClr val="24324A"/>
+                </a:solidFill>
+                <a:latin typeface="Malgun Gothic"/>
+                <a:ea typeface="Malgun Gothic"/>
+                <a:cs typeface="Malgun Gothic"/>
+              </a:defRPr>
+            </a:lvl6pPr>
+            <a:lvl7pPr algn="l">
+              <a:defRPr sz="1800" b="0">
+                <a:solidFill>
+                  <a:srgbClr val="24324A"/>
+                </a:solidFill>
+                <a:latin typeface="Malgun Gothic"/>
+                <a:ea typeface="Malgun Gothic"/>
+                <a:cs typeface="Malgun Gothic"/>
+              </a:defRPr>
+            </a:lvl7pPr>
+            <a:lvl8pPr algn="l">
+              <a:defRPr sz="1800" b="0">
+                <a:solidFill>
+                  <a:srgbClr val="24324A"/>
+                </a:solidFill>
+                <a:latin typeface="Malgun Gothic"/>
+                <a:ea typeface="Malgun Gothic"/>
+                <a:cs typeface="Malgun Gothic"/>
+              </a:defRPr>
+            </a:lvl8pPr>
+            <a:lvl9pPr algn="l">
+              <a:defRPr sz="1800" b="0">
+                <a:solidFill>
+                  <a:srgbClr val="24324A"/>
+                </a:solidFill>
+                <a:latin typeface="Malgun Gothic"/>
+                <a:ea typeface="Malgun Gothic"/>
+                <a:cs typeface="Malgun Gothic"/>
+              </a:defRPr>
+            </a:lvl9pPr>
           </a:lstStyle>
           <a:p xmlns:a="http://schemas.openxmlformats.org/drawingml/2006/main">
             <a:pPr algn="l">
+              <a:buNone/>
               <a:defRPr sz="1800" b="0">
                 <a:solidFill>
                   <a:srgbClr val="24324A"/>
@@ -14745,11 +19780,12 @@
                 <a:ea typeface="Malgun Gothic"/>
                 <a:cs typeface="Malgun Gothic"/>
               </a:rPr>
-              <a:t>답변 품질은 평균 대응 차이와 보정 검정 결과로 판단한다.</a:t>
+              <a:t>HyDE 관련성과 CAD 충실도는 Holm 보정 후 유의하지 않았다.</a:t>
             </a:r>
           </a:p>
           <a:p xmlns:a="http://schemas.openxmlformats.org/drawingml/2006/main">
             <a:pPr algn="l">
+              <a:buNone/>
               <a:defRPr sz="1800" b="0">
                 <a:solidFill>
                   <a:srgbClr val="24324A"/>
@@ -14768,11 +19804,12 @@
                 <a:ea typeface="Malgun Gothic"/>
                 <a:cs typeface="Malgun Gothic"/>
               </a:rPr>
-              <a:t>한국어 사용 비중을 높이는 목적에는 SCD 결과를 참고한다.</a:t>
+              <a:t>SCD는 같은 영어 근거에서 한국어 사용 비중을 높였다.</a:t>
             </a:r>
           </a:p>
           <a:p xmlns:a="http://schemas.openxmlformats.org/drawingml/2006/main">
             <a:pPr algn="l">
+              <a:buNone/>
               <a:defRPr sz="1800" b="0">
                 <a:solidFill>
                   <a:srgbClr val="24324A"/>
@@ -14791,11 +19828,12 @@
                 <a:ea typeface="Malgun Gothic"/>
                 <a:cs typeface="Malgun Gothic"/>
               </a:rPr>
-              <a:t>CAD 적용은 질의별 충실도와 추가 실행 시간을 함께 검토한다.</a:t>
+              <a:t>CAD는 두 SCD 상태 모두 실행 시간이 늘었다.</a:t>
             </a:r>
           </a:p>
           <a:p xmlns:a="http://schemas.openxmlformats.org/drawingml/2006/main">
             <a:pPr algn="l">
+              <a:buNone/>
               <a:defRPr sz="1800" b="0">
                 <a:solidFill>
                   <a:srgbClr val="24324A"/>
@@ -14814,11 +19852,12 @@
                 <a:ea typeface="Malgun Gothic"/>
                 <a:cs typeface="Malgun Gothic"/>
               </a:rPr>
-              <a:t>HyDE 적용은 번역·가상 문서 생성과 검색 결과를 함께 비교한다.</a:t>
+              <a:t>HyDE 비교에는 질의 번역과 가상 문서 생성이 함께 포함됐다.</a:t>
             </a:r>
           </a:p>
           <a:p xmlns:a="http://schemas.openxmlformats.org/drawingml/2006/main">
             <a:pPr algn="l">
+              <a:buNone/>
               <a:defRPr sz="1800" b="0">
                 <a:solidFill>
                   <a:srgbClr val="24324A"/>
@@ -14837,7 +19876,7 @@
                 <a:ea typeface="Malgun Gothic"/>
                 <a:cs typeface="Malgun Gothic"/>
               </a:rPr>
-              <a:t>최종 조합은 목표 언어·품질·허용 시간을 기준으로 선택한다.</a:t>
+              <a:t>후속 실험: 번역 단독 조건, 반복 생성·평가, 한국어 사람 평가.</a:t>
             </a:r>
           </a:p>
         </p:txBody>
@@ -14915,9 +19954,100 @@
                 <a:cs typeface="Malgun Gothic"/>
               </a:defRPr>
             </a:defPPr>
+            <a:lvl1pPr algn="l">
+              <a:defRPr sz="2400" b="0">
+                <a:solidFill>
+                  <a:srgbClr val="FFFFFF"/>
+                </a:solidFill>
+                <a:latin typeface="Malgun Gothic"/>
+                <a:ea typeface="Malgun Gothic"/>
+                <a:cs typeface="Malgun Gothic"/>
+              </a:defRPr>
+            </a:lvl1pPr>
+            <a:lvl2pPr algn="l">
+              <a:defRPr sz="2400" b="0">
+                <a:solidFill>
+                  <a:srgbClr val="FFFFFF"/>
+                </a:solidFill>
+                <a:latin typeface="Malgun Gothic"/>
+                <a:ea typeface="Malgun Gothic"/>
+                <a:cs typeface="Malgun Gothic"/>
+              </a:defRPr>
+            </a:lvl2pPr>
+            <a:lvl3pPr algn="l">
+              <a:defRPr sz="2400" b="0">
+                <a:solidFill>
+                  <a:srgbClr val="FFFFFF"/>
+                </a:solidFill>
+                <a:latin typeface="Malgun Gothic"/>
+                <a:ea typeface="Malgun Gothic"/>
+                <a:cs typeface="Malgun Gothic"/>
+              </a:defRPr>
+            </a:lvl3pPr>
+            <a:lvl4pPr algn="l">
+              <a:defRPr sz="2400" b="0">
+                <a:solidFill>
+                  <a:srgbClr val="FFFFFF"/>
+                </a:solidFill>
+                <a:latin typeface="Malgun Gothic"/>
+                <a:ea typeface="Malgun Gothic"/>
+                <a:cs typeface="Malgun Gothic"/>
+              </a:defRPr>
+            </a:lvl4pPr>
+            <a:lvl5pPr algn="l">
+              <a:defRPr sz="2400" b="0">
+                <a:solidFill>
+                  <a:srgbClr val="FFFFFF"/>
+                </a:solidFill>
+                <a:latin typeface="Malgun Gothic"/>
+                <a:ea typeface="Malgun Gothic"/>
+                <a:cs typeface="Malgun Gothic"/>
+              </a:defRPr>
+            </a:lvl5pPr>
+            <a:lvl6pPr algn="l">
+              <a:defRPr sz="2400" b="0">
+                <a:solidFill>
+                  <a:srgbClr val="FFFFFF"/>
+                </a:solidFill>
+                <a:latin typeface="Malgun Gothic"/>
+                <a:ea typeface="Malgun Gothic"/>
+                <a:cs typeface="Malgun Gothic"/>
+              </a:defRPr>
+            </a:lvl6pPr>
+            <a:lvl7pPr algn="l">
+              <a:defRPr sz="2400" b="0">
+                <a:solidFill>
+                  <a:srgbClr val="FFFFFF"/>
+                </a:solidFill>
+                <a:latin typeface="Malgun Gothic"/>
+                <a:ea typeface="Malgun Gothic"/>
+                <a:cs typeface="Malgun Gothic"/>
+              </a:defRPr>
+            </a:lvl7pPr>
+            <a:lvl8pPr algn="l">
+              <a:defRPr sz="2400" b="0">
+                <a:solidFill>
+                  <a:srgbClr val="FFFFFF"/>
+                </a:solidFill>
+                <a:latin typeface="Malgun Gothic"/>
+                <a:ea typeface="Malgun Gothic"/>
+                <a:cs typeface="Malgun Gothic"/>
+              </a:defRPr>
+            </a:lvl8pPr>
+            <a:lvl9pPr algn="l">
+              <a:defRPr sz="2400" b="0">
+                <a:solidFill>
+                  <a:srgbClr val="FFFFFF"/>
+                </a:solidFill>
+                <a:latin typeface="Malgun Gothic"/>
+                <a:ea typeface="Malgun Gothic"/>
+                <a:cs typeface="Malgun Gothic"/>
+              </a:defRPr>
+            </a:lvl9pPr>
           </a:lstStyle>
           <a:p xmlns:a="http://schemas.openxmlformats.org/drawingml/2006/main">
             <a:pPr algn="l">
+              <a:buNone/>
               <a:defRPr sz="2400" b="0">
                 <a:solidFill>
                   <a:srgbClr val="FFFFFF"/>
@@ -14983,9 +20113,100 @@
                 <a:cs typeface="Malgun Gothic"/>
               </a:defRPr>
             </a:defPPr>
+            <a:lvl1pPr algn="l">
+              <a:defRPr sz="1600" b="0">
+                <a:solidFill>
+                  <a:srgbClr val="24324A"/>
+                </a:solidFill>
+                <a:latin typeface="Malgun Gothic"/>
+                <a:ea typeface="Malgun Gothic"/>
+                <a:cs typeface="Malgun Gothic"/>
+              </a:defRPr>
+            </a:lvl1pPr>
+            <a:lvl2pPr algn="l">
+              <a:defRPr sz="1600" b="0">
+                <a:solidFill>
+                  <a:srgbClr val="24324A"/>
+                </a:solidFill>
+                <a:latin typeface="Malgun Gothic"/>
+                <a:ea typeface="Malgun Gothic"/>
+                <a:cs typeface="Malgun Gothic"/>
+              </a:defRPr>
+            </a:lvl2pPr>
+            <a:lvl3pPr algn="l">
+              <a:defRPr sz="1600" b="0">
+                <a:solidFill>
+                  <a:srgbClr val="24324A"/>
+                </a:solidFill>
+                <a:latin typeface="Malgun Gothic"/>
+                <a:ea typeface="Malgun Gothic"/>
+                <a:cs typeface="Malgun Gothic"/>
+              </a:defRPr>
+            </a:lvl3pPr>
+            <a:lvl4pPr algn="l">
+              <a:defRPr sz="1600" b="0">
+                <a:solidFill>
+                  <a:srgbClr val="24324A"/>
+                </a:solidFill>
+                <a:latin typeface="Malgun Gothic"/>
+                <a:ea typeface="Malgun Gothic"/>
+                <a:cs typeface="Malgun Gothic"/>
+              </a:defRPr>
+            </a:lvl4pPr>
+            <a:lvl5pPr algn="l">
+              <a:defRPr sz="1600" b="0">
+                <a:solidFill>
+                  <a:srgbClr val="24324A"/>
+                </a:solidFill>
+                <a:latin typeface="Malgun Gothic"/>
+                <a:ea typeface="Malgun Gothic"/>
+                <a:cs typeface="Malgun Gothic"/>
+              </a:defRPr>
+            </a:lvl5pPr>
+            <a:lvl6pPr algn="l">
+              <a:defRPr sz="1600" b="0">
+                <a:solidFill>
+                  <a:srgbClr val="24324A"/>
+                </a:solidFill>
+                <a:latin typeface="Malgun Gothic"/>
+                <a:ea typeface="Malgun Gothic"/>
+                <a:cs typeface="Malgun Gothic"/>
+              </a:defRPr>
+            </a:lvl6pPr>
+            <a:lvl7pPr algn="l">
+              <a:defRPr sz="1600" b="0">
+                <a:solidFill>
+                  <a:srgbClr val="24324A"/>
+                </a:solidFill>
+                <a:latin typeface="Malgun Gothic"/>
+                <a:ea typeface="Malgun Gothic"/>
+                <a:cs typeface="Malgun Gothic"/>
+              </a:defRPr>
+            </a:lvl7pPr>
+            <a:lvl8pPr algn="l">
+              <a:defRPr sz="1600" b="0">
+                <a:solidFill>
+                  <a:srgbClr val="24324A"/>
+                </a:solidFill>
+                <a:latin typeface="Malgun Gothic"/>
+                <a:ea typeface="Malgun Gothic"/>
+                <a:cs typeface="Malgun Gothic"/>
+              </a:defRPr>
+            </a:lvl8pPr>
+            <a:lvl9pPr algn="l">
+              <a:defRPr sz="1600" b="0">
+                <a:solidFill>
+                  <a:srgbClr val="24324A"/>
+                </a:solidFill>
+                <a:latin typeface="Malgun Gothic"/>
+                <a:ea typeface="Malgun Gothic"/>
+                <a:cs typeface="Malgun Gothic"/>
+              </a:defRPr>
+            </a:lvl9pPr>
           </a:lstStyle>
           <a:p xmlns:a="http://schemas.openxmlformats.org/drawingml/2006/main">
             <a:pPr algn="l">
+              <a:buNone/>
               <a:defRPr sz="1600" b="0">
                 <a:solidFill>
                   <a:srgbClr val="24324A"/>
@@ -15009,6 +20230,7 @@
           </a:p>
           <a:p xmlns:a="http://schemas.openxmlformats.org/drawingml/2006/main">
             <a:pPr algn="l">
+              <a:buNone/>
               <a:defRPr sz="1600" b="0">
                 <a:solidFill>
                   <a:srgbClr val="24324A"/>
@@ -15032,6 +20254,7 @@
           </a:p>
           <a:p xmlns:a="http://schemas.openxmlformats.org/drawingml/2006/main">
             <a:pPr algn="l">
+              <a:buNone/>
               <a:defRPr sz="1600" b="0">
                 <a:solidFill>
                   <a:srgbClr val="24324A"/>
@@ -15097,9 +20320,100 @@
                 <a:cs typeface="Malgun Gothic"/>
               </a:defRPr>
             </a:defPPr>
+            <a:lvl1pPr algn="l">
+              <a:defRPr sz="1600" b="0">
+                <a:solidFill>
+                  <a:srgbClr val="24324A"/>
+                </a:solidFill>
+                <a:latin typeface="Malgun Gothic"/>
+                <a:ea typeface="Malgun Gothic"/>
+                <a:cs typeface="Malgun Gothic"/>
+              </a:defRPr>
+            </a:lvl1pPr>
+            <a:lvl2pPr algn="l">
+              <a:defRPr sz="1600" b="0">
+                <a:solidFill>
+                  <a:srgbClr val="24324A"/>
+                </a:solidFill>
+                <a:latin typeface="Malgun Gothic"/>
+                <a:ea typeface="Malgun Gothic"/>
+                <a:cs typeface="Malgun Gothic"/>
+              </a:defRPr>
+            </a:lvl2pPr>
+            <a:lvl3pPr algn="l">
+              <a:defRPr sz="1600" b="0">
+                <a:solidFill>
+                  <a:srgbClr val="24324A"/>
+                </a:solidFill>
+                <a:latin typeface="Malgun Gothic"/>
+                <a:ea typeface="Malgun Gothic"/>
+                <a:cs typeface="Malgun Gothic"/>
+              </a:defRPr>
+            </a:lvl3pPr>
+            <a:lvl4pPr algn="l">
+              <a:defRPr sz="1600" b="0">
+                <a:solidFill>
+                  <a:srgbClr val="24324A"/>
+                </a:solidFill>
+                <a:latin typeface="Malgun Gothic"/>
+                <a:ea typeface="Malgun Gothic"/>
+                <a:cs typeface="Malgun Gothic"/>
+              </a:defRPr>
+            </a:lvl4pPr>
+            <a:lvl5pPr algn="l">
+              <a:defRPr sz="1600" b="0">
+                <a:solidFill>
+                  <a:srgbClr val="24324A"/>
+                </a:solidFill>
+                <a:latin typeface="Malgun Gothic"/>
+                <a:ea typeface="Malgun Gothic"/>
+                <a:cs typeface="Malgun Gothic"/>
+              </a:defRPr>
+            </a:lvl5pPr>
+            <a:lvl6pPr algn="l">
+              <a:defRPr sz="1600" b="0">
+                <a:solidFill>
+                  <a:srgbClr val="24324A"/>
+                </a:solidFill>
+                <a:latin typeface="Malgun Gothic"/>
+                <a:ea typeface="Malgun Gothic"/>
+                <a:cs typeface="Malgun Gothic"/>
+              </a:defRPr>
+            </a:lvl6pPr>
+            <a:lvl7pPr algn="l">
+              <a:defRPr sz="1600" b="0">
+                <a:solidFill>
+                  <a:srgbClr val="24324A"/>
+                </a:solidFill>
+                <a:latin typeface="Malgun Gothic"/>
+                <a:ea typeface="Malgun Gothic"/>
+                <a:cs typeface="Malgun Gothic"/>
+              </a:defRPr>
+            </a:lvl7pPr>
+            <a:lvl8pPr algn="l">
+              <a:defRPr sz="1600" b="0">
+                <a:solidFill>
+                  <a:srgbClr val="24324A"/>
+                </a:solidFill>
+                <a:latin typeface="Malgun Gothic"/>
+                <a:ea typeface="Malgun Gothic"/>
+                <a:cs typeface="Malgun Gothic"/>
+              </a:defRPr>
+            </a:lvl8pPr>
+            <a:lvl9pPr algn="l">
+              <a:defRPr sz="1600" b="0">
+                <a:solidFill>
+                  <a:srgbClr val="24324A"/>
+                </a:solidFill>
+                <a:latin typeface="Malgun Gothic"/>
+                <a:ea typeface="Malgun Gothic"/>
+                <a:cs typeface="Malgun Gothic"/>
+              </a:defRPr>
+            </a:lvl9pPr>
           </a:lstStyle>
           <a:p xmlns:a="http://schemas.openxmlformats.org/drawingml/2006/main">
             <a:pPr algn="l">
+              <a:buNone/>
               <a:defRPr sz="1600" b="0">
                 <a:solidFill>
                   <a:srgbClr val="24324A"/>
@@ -15123,6 +20437,7 @@
           </a:p>
           <a:p xmlns:a="http://schemas.openxmlformats.org/drawingml/2006/main">
             <a:pPr algn="l">
+              <a:buNone/>
               <a:defRPr sz="1600" b="0">
                 <a:solidFill>
                   <a:srgbClr val="24324A"/>
@@ -15146,6 +20461,7 @@
           </a:p>
           <a:p xmlns:a="http://schemas.openxmlformats.org/drawingml/2006/main">
             <a:pPr algn="l">
+              <a:buNone/>
               <a:defRPr sz="1600" b="0">
                 <a:solidFill>
                   <a:srgbClr val="24324A"/>
@@ -15211,9 +20527,100 @@
                 <a:cs typeface="Malgun Gothic"/>
               </a:defRPr>
             </a:defPPr>
+            <a:lvl1pPr algn="l">
+              <a:defRPr sz="1600" b="0">
+                <a:solidFill>
+                  <a:srgbClr val="24324A"/>
+                </a:solidFill>
+                <a:latin typeface="Malgun Gothic"/>
+                <a:ea typeface="Malgun Gothic"/>
+                <a:cs typeface="Malgun Gothic"/>
+              </a:defRPr>
+            </a:lvl1pPr>
+            <a:lvl2pPr algn="l">
+              <a:defRPr sz="1600" b="0">
+                <a:solidFill>
+                  <a:srgbClr val="24324A"/>
+                </a:solidFill>
+                <a:latin typeface="Malgun Gothic"/>
+                <a:ea typeface="Malgun Gothic"/>
+                <a:cs typeface="Malgun Gothic"/>
+              </a:defRPr>
+            </a:lvl2pPr>
+            <a:lvl3pPr algn="l">
+              <a:defRPr sz="1600" b="0">
+                <a:solidFill>
+                  <a:srgbClr val="24324A"/>
+                </a:solidFill>
+                <a:latin typeface="Malgun Gothic"/>
+                <a:ea typeface="Malgun Gothic"/>
+                <a:cs typeface="Malgun Gothic"/>
+              </a:defRPr>
+            </a:lvl3pPr>
+            <a:lvl4pPr algn="l">
+              <a:defRPr sz="1600" b="0">
+                <a:solidFill>
+                  <a:srgbClr val="24324A"/>
+                </a:solidFill>
+                <a:latin typeface="Malgun Gothic"/>
+                <a:ea typeface="Malgun Gothic"/>
+                <a:cs typeface="Malgun Gothic"/>
+              </a:defRPr>
+            </a:lvl4pPr>
+            <a:lvl5pPr algn="l">
+              <a:defRPr sz="1600" b="0">
+                <a:solidFill>
+                  <a:srgbClr val="24324A"/>
+                </a:solidFill>
+                <a:latin typeface="Malgun Gothic"/>
+                <a:ea typeface="Malgun Gothic"/>
+                <a:cs typeface="Malgun Gothic"/>
+              </a:defRPr>
+            </a:lvl5pPr>
+            <a:lvl6pPr algn="l">
+              <a:defRPr sz="1600" b="0">
+                <a:solidFill>
+                  <a:srgbClr val="24324A"/>
+                </a:solidFill>
+                <a:latin typeface="Malgun Gothic"/>
+                <a:ea typeface="Malgun Gothic"/>
+                <a:cs typeface="Malgun Gothic"/>
+              </a:defRPr>
+            </a:lvl6pPr>
+            <a:lvl7pPr algn="l">
+              <a:defRPr sz="1600" b="0">
+                <a:solidFill>
+                  <a:srgbClr val="24324A"/>
+                </a:solidFill>
+                <a:latin typeface="Malgun Gothic"/>
+                <a:ea typeface="Malgun Gothic"/>
+                <a:cs typeface="Malgun Gothic"/>
+              </a:defRPr>
+            </a:lvl7pPr>
+            <a:lvl8pPr algn="l">
+              <a:defRPr sz="1600" b="0">
+                <a:solidFill>
+                  <a:srgbClr val="24324A"/>
+                </a:solidFill>
+                <a:latin typeface="Malgun Gothic"/>
+                <a:ea typeface="Malgun Gothic"/>
+                <a:cs typeface="Malgun Gothic"/>
+              </a:defRPr>
+            </a:lvl8pPr>
+            <a:lvl9pPr algn="l">
+              <a:defRPr sz="1600" b="0">
+                <a:solidFill>
+                  <a:srgbClr val="24324A"/>
+                </a:solidFill>
+                <a:latin typeface="Malgun Gothic"/>
+                <a:ea typeface="Malgun Gothic"/>
+                <a:cs typeface="Malgun Gothic"/>
+              </a:defRPr>
+            </a:lvl9pPr>
           </a:lstStyle>
           <a:p xmlns:a="http://schemas.openxmlformats.org/drawingml/2006/main">
             <a:pPr algn="l">
+              <a:buNone/>
               <a:defRPr sz="1600" b="0">
                 <a:solidFill>
                   <a:srgbClr val="24324A"/>
@@ -15237,6 +20644,7 @@
           </a:p>
           <a:p xmlns:a="http://schemas.openxmlformats.org/drawingml/2006/main">
             <a:pPr algn="l">
+              <a:buNone/>
               <a:defRPr sz="1600" b="0">
                 <a:solidFill>
                   <a:srgbClr val="24324A"/>
@@ -15302,9 +20710,100 @@
                 <a:cs typeface="Malgun Gothic"/>
               </a:defRPr>
             </a:defPPr>
+            <a:lvl1pPr algn="l">
+              <a:defRPr sz="1600" b="0">
+                <a:solidFill>
+                  <a:srgbClr val="24324A"/>
+                </a:solidFill>
+                <a:latin typeface="Malgun Gothic"/>
+                <a:ea typeface="Malgun Gothic"/>
+                <a:cs typeface="Malgun Gothic"/>
+              </a:defRPr>
+            </a:lvl1pPr>
+            <a:lvl2pPr algn="l">
+              <a:defRPr sz="1600" b="0">
+                <a:solidFill>
+                  <a:srgbClr val="24324A"/>
+                </a:solidFill>
+                <a:latin typeface="Malgun Gothic"/>
+                <a:ea typeface="Malgun Gothic"/>
+                <a:cs typeface="Malgun Gothic"/>
+              </a:defRPr>
+            </a:lvl2pPr>
+            <a:lvl3pPr algn="l">
+              <a:defRPr sz="1600" b="0">
+                <a:solidFill>
+                  <a:srgbClr val="24324A"/>
+                </a:solidFill>
+                <a:latin typeface="Malgun Gothic"/>
+                <a:ea typeface="Malgun Gothic"/>
+                <a:cs typeface="Malgun Gothic"/>
+              </a:defRPr>
+            </a:lvl3pPr>
+            <a:lvl4pPr algn="l">
+              <a:defRPr sz="1600" b="0">
+                <a:solidFill>
+                  <a:srgbClr val="24324A"/>
+                </a:solidFill>
+                <a:latin typeface="Malgun Gothic"/>
+                <a:ea typeface="Malgun Gothic"/>
+                <a:cs typeface="Malgun Gothic"/>
+              </a:defRPr>
+            </a:lvl4pPr>
+            <a:lvl5pPr algn="l">
+              <a:defRPr sz="1600" b="0">
+                <a:solidFill>
+                  <a:srgbClr val="24324A"/>
+                </a:solidFill>
+                <a:latin typeface="Malgun Gothic"/>
+                <a:ea typeface="Malgun Gothic"/>
+                <a:cs typeface="Malgun Gothic"/>
+              </a:defRPr>
+            </a:lvl5pPr>
+            <a:lvl6pPr algn="l">
+              <a:defRPr sz="1600" b="0">
+                <a:solidFill>
+                  <a:srgbClr val="24324A"/>
+                </a:solidFill>
+                <a:latin typeface="Malgun Gothic"/>
+                <a:ea typeface="Malgun Gothic"/>
+                <a:cs typeface="Malgun Gothic"/>
+              </a:defRPr>
+            </a:lvl6pPr>
+            <a:lvl7pPr algn="l">
+              <a:defRPr sz="1600" b="0">
+                <a:solidFill>
+                  <a:srgbClr val="24324A"/>
+                </a:solidFill>
+                <a:latin typeface="Malgun Gothic"/>
+                <a:ea typeface="Malgun Gothic"/>
+                <a:cs typeface="Malgun Gothic"/>
+              </a:defRPr>
+            </a:lvl7pPr>
+            <a:lvl8pPr algn="l">
+              <a:defRPr sz="1600" b="0">
+                <a:solidFill>
+                  <a:srgbClr val="24324A"/>
+                </a:solidFill>
+                <a:latin typeface="Malgun Gothic"/>
+                <a:ea typeface="Malgun Gothic"/>
+                <a:cs typeface="Malgun Gothic"/>
+              </a:defRPr>
+            </a:lvl8pPr>
+            <a:lvl9pPr algn="l">
+              <a:defRPr sz="1600" b="0">
+                <a:solidFill>
+                  <a:srgbClr val="24324A"/>
+                </a:solidFill>
+                <a:latin typeface="Malgun Gothic"/>
+                <a:ea typeface="Malgun Gothic"/>
+                <a:cs typeface="Malgun Gothic"/>
+              </a:defRPr>
+            </a:lvl9pPr>
           </a:lstStyle>
           <a:p xmlns:a="http://schemas.openxmlformats.org/drawingml/2006/main">
             <a:pPr algn="l">
+              <a:buNone/>
               <a:defRPr sz="1600" b="0">
                 <a:solidFill>
                   <a:srgbClr val="24324A"/>
@@ -15328,6 +20827,7 @@
           </a:p>
           <a:p xmlns:a="http://schemas.openxmlformats.org/drawingml/2006/main">
             <a:pPr algn="l">
+              <a:buNone/>
               <a:defRPr sz="1600" b="0">
                 <a:solidFill>
                   <a:srgbClr val="24324A"/>
@@ -15393,9 +20893,100 @@
                 <a:cs typeface="Malgun Gothic"/>
               </a:defRPr>
             </a:defPPr>
+            <a:lvl1pPr algn="l">
+              <a:defRPr sz="1600" b="0">
+                <a:solidFill>
+                  <a:srgbClr val="24324A"/>
+                </a:solidFill>
+                <a:latin typeface="Malgun Gothic"/>
+                <a:ea typeface="Malgun Gothic"/>
+                <a:cs typeface="Malgun Gothic"/>
+              </a:defRPr>
+            </a:lvl1pPr>
+            <a:lvl2pPr algn="l">
+              <a:defRPr sz="1600" b="0">
+                <a:solidFill>
+                  <a:srgbClr val="24324A"/>
+                </a:solidFill>
+                <a:latin typeface="Malgun Gothic"/>
+                <a:ea typeface="Malgun Gothic"/>
+                <a:cs typeface="Malgun Gothic"/>
+              </a:defRPr>
+            </a:lvl2pPr>
+            <a:lvl3pPr algn="l">
+              <a:defRPr sz="1600" b="0">
+                <a:solidFill>
+                  <a:srgbClr val="24324A"/>
+                </a:solidFill>
+                <a:latin typeface="Malgun Gothic"/>
+                <a:ea typeface="Malgun Gothic"/>
+                <a:cs typeface="Malgun Gothic"/>
+              </a:defRPr>
+            </a:lvl3pPr>
+            <a:lvl4pPr algn="l">
+              <a:defRPr sz="1600" b="0">
+                <a:solidFill>
+                  <a:srgbClr val="24324A"/>
+                </a:solidFill>
+                <a:latin typeface="Malgun Gothic"/>
+                <a:ea typeface="Malgun Gothic"/>
+                <a:cs typeface="Malgun Gothic"/>
+              </a:defRPr>
+            </a:lvl4pPr>
+            <a:lvl5pPr algn="l">
+              <a:defRPr sz="1600" b="0">
+                <a:solidFill>
+                  <a:srgbClr val="24324A"/>
+                </a:solidFill>
+                <a:latin typeface="Malgun Gothic"/>
+                <a:ea typeface="Malgun Gothic"/>
+                <a:cs typeface="Malgun Gothic"/>
+              </a:defRPr>
+            </a:lvl5pPr>
+            <a:lvl6pPr algn="l">
+              <a:defRPr sz="1600" b="0">
+                <a:solidFill>
+                  <a:srgbClr val="24324A"/>
+                </a:solidFill>
+                <a:latin typeface="Malgun Gothic"/>
+                <a:ea typeface="Malgun Gothic"/>
+                <a:cs typeface="Malgun Gothic"/>
+              </a:defRPr>
+            </a:lvl6pPr>
+            <a:lvl7pPr algn="l">
+              <a:defRPr sz="1600" b="0">
+                <a:solidFill>
+                  <a:srgbClr val="24324A"/>
+                </a:solidFill>
+                <a:latin typeface="Malgun Gothic"/>
+                <a:ea typeface="Malgun Gothic"/>
+                <a:cs typeface="Malgun Gothic"/>
+              </a:defRPr>
+            </a:lvl7pPr>
+            <a:lvl8pPr algn="l">
+              <a:defRPr sz="1600" b="0">
+                <a:solidFill>
+                  <a:srgbClr val="24324A"/>
+                </a:solidFill>
+                <a:latin typeface="Malgun Gothic"/>
+                <a:ea typeface="Malgun Gothic"/>
+                <a:cs typeface="Malgun Gothic"/>
+              </a:defRPr>
+            </a:lvl8pPr>
+            <a:lvl9pPr algn="l">
+              <a:defRPr sz="1600" b="0">
+                <a:solidFill>
+                  <a:srgbClr val="24324A"/>
+                </a:solidFill>
+                <a:latin typeface="Malgun Gothic"/>
+                <a:ea typeface="Malgun Gothic"/>
+                <a:cs typeface="Malgun Gothic"/>
+              </a:defRPr>
+            </a:lvl9pPr>
           </a:lstStyle>
           <a:p xmlns:a="http://schemas.openxmlformats.org/drawingml/2006/main">
             <a:pPr algn="l">
+              <a:buNone/>
               <a:defRPr sz="1600" b="0">
                 <a:solidFill>
                   <a:srgbClr val="24324A"/>
@@ -15414,7 +21005,7 @@
                 <a:ea typeface="Malgun Gothic"/>
                 <a:cs typeface="Malgun Gothic"/>
               </a:rPr>
-              <a:t>학술 22편·모델·자료 출처: 동봉 POSTER_REFERENCES_FULL.md · 통계·결측·민감도 분석: 동봉 상세표</a:t>
+              <a:t>학술 22편·모델·자료 출처: FINALDOCS/VALIDATION/REFERENCES.md · 통계·민감도: 동봉 상세표</a:t>
             </a:r>
           </a:p>
         </p:txBody>
@@ -15461,9 +21052,100 @@
                 <a:cs typeface="Malgun Gothic"/>
               </a:defRPr>
             </a:defPPr>
+            <a:lvl1pPr algn="l">
+              <a:defRPr sz="1400" b="0">
+                <a:solidFill>
+                  <a:srgbClr val="695184"/>
+                </a:solidFill>
+                <a:latin typeface="Malgun Gothic"/>
+                <a:ea typeface="Malgun Gothic"/>
+                <a:cs typeface="Malgun Gothic"/>
+              </a:defRPr>
+            </a:lvl1pPr>
+            <a:lvl2pPr algn="l">
+              <a:defRPr sz="1400" b="0">
+                <a:solidFill>
+                  <a:srgbClr val="695184"/>
+                </a:solidFill>
+                <a:latin typeface="Malgun Gothic"/>
+                <a:ea typeface="Malgun Gothic"/>
+                <a:cs typeface="Malgun Gothic"/>
+              </a:defRPr>
+            </a:lvl2pPr>
+            <a:lvl3pPr algn="l">
+              <a:defRPr sz="1400" b="0">
+                <a:solidFill>
+                  <a:srgbClr val="695184"/>
+                </a:solidFill>
+                <a:latin typeface="Malgun Gothic"/>
+                <a:ea typeface="Malgun Gothic"/>
+                <a:cs typeface="Malgun Gothic"/>
+              </a:defRPr>
+            </a:lvl3pPr>
+            <a:lvl4pPr algn="l">
+              <a:defRPr sz="1400" b="0">
+                <a:solidFill>
+                  <a:srgbClr val="695184"/>
+                </a:solidFill>
+                <a:latin typeface="Malgun Gothic"/>
+                <a:ea typeface="Malgun Gothic"/>
+                <a:cs typeface="Malgun Gothic"/>
+              </a:defRPr>
+            </a:lvl4pPr>
+            <a:lvl5pPr algn="l">
+              <a:defRPr sz="1400" b="0">
+                <a:solidFill>
+                  <a:srgbClr val="695184"/>
+                </a:solidFill>
+                <a:latin typeface="Malgun Gothic"/>
+                <a:ea typeface="Malgun Gothic"/>
+                <a:cs typeface="Malgun Gothic"/>
+              </a:defRPr>
+            </a:lvl5pPr>
+            <a:lvl6pPr algn="l">
+              <a:defRPr sz="1400" b="0">
+                <a:solidFill>
+                  <a:srgbClr val="695184"/>
+                </a:solidFill>
+                <a:latin typeface="Malgun Gothic"/>
+                <a:ea typeface="Malgun Gothic"/>
+                <a:cs typeface="Malgun Gothic"/>
+              </a:defRPr>
+            </a:lvl6pPr>
+            <a:lvl7pPr algn="l">
+              <a:defRPr sz="1400" b="0">
+                <a:solidFill>
+                  <a:srgbClr val="695184"/>
+                </a:solidFill>
+                <a:latin typeface="Malgun Gothic"/>
+                <a:ea typeface="Malgun Gothic"/>
+                <a:cs typeface="Malgun Gothic"/>
+              </a:defRPr>
+            </a:lvl7pPr>
+            <a:lvl8pPr algn="l">
+              <a:defRPr sz="1400" b="0">
+                <a:solidFill>
+                  <a:srgbClr val="695184"/>
+                </a:solidFill>
+                <a:latin typeface="Malgun Gothic"/>
+                <a:ea typeface="Malgun Gothic"/>
+                <a:cs typeface="Malgun Gothic"/>
+              </a:defRPr>
+            </a:lvl8pPr>
+            <a:lvl9pPr algn="l">
+              <a:defRPr sz="1400" b="0">
+                <a:solidFill>
+                  <a:srgbClr val="695184"/>
+                </a:solidFill>
+                <a:latin typeface="Malgun Gothic"/>
+                <a:ea typeface="Malgun Gothic"/>
+                <a:cs typeface="Malgun Gothic"/>
+              </a:defRPr>
+            </a:lvl9pPr>
           </a:lstStyle>
           <a:p xmlns:a="http://schemas.openxmlformats.org/drawingml/2006/main">
             <a:pPr algn="l">
+              <a:buNone/>
               <a:defRPr sz="1400" b="0">
                 <a:solidFill>
                   <a:srgbClr val="695184"/>
@@ -15529,9 +21211,100 @@
                 <a:cs typeface="Malgun Gothic"/>
               </a:defRPr>
             </a:defPPr>
+            <a:lvl1pPr algn="r">
+              <a:defRPr sz="1050" b="0">
+                <a:solidFill>
+                  <a:srgbClr val="695184"/>
+                </a:solidFill>
+                <a:latin typeface="Malgun Gothic"/>
+                <a:ea typeface="Malgun Gothic"/>
+                <a:cs typeface="Malgun Gothic"/>
+              </a:defRPr>
+            </a:lvl1pPr>
+            <a:lvl2pPr algn="r">
+              <a:defRPr sz="1050" b="0">
+                <a:solidFill>
+                  <a:srgbClr val="695184"/>
+                </a:solidFill>
+                <a:latin typeface="Malgun Gothic"/>
+                <a:ea typeface="Malgun Gothic"/>
+                <a:cs typeface="Malgun Gothic"/>
+              </a:defRPr>
+            </a:lvl2pPr>
+            <a:lvl3pPr algn="r">
+              <a:defRPr sz="1050" b="0">
+                <a:solidFill>
+                  <a:srgbClr val="695184"/>
+                </a:solidFill>
+                <a:latin typeface="Malgun Gothic"/>
+                <a:ea typeface="Malgun Gothic"/>
+                <a:cs typeface="Malgun Gothic"/>
+              </a:defRPr>
+            </a:lvl3pPr>
+            <a:lvl4pPr algn="r">
+              <a:defRPr sz="1050" b="0">
+                <a:solidFill>
+                  <a:srgbClr val="695184"/>
+                </a:solidFill>
+                <a:latin typeface="Malgun Gothic"/>
+                <a:ea typeface="Malgun Gothic"/>
+                <a:cs typeface="Malgun Gothic"/>
+              </a:defRPr>
+            </a:lvl4pPr>
+            <a:lvl5pPr algn="r">
+              <a:defRPr sz="1050" b="0">
+                <a:solidFill>
+                  <a:srgbClr val="695184"/>
+                </a:solidFill>
+                <a:latin typeface="Malgun Gothic"/>
+                <a:ea typeface="Malgun Gothic"/>
+                <a:cs typeface="Malgun Gothic"/>
+              </a:defRPr>
+            </a:lvl5pPr>
+            <a:lvl6pPr algn="r">
+              <a:defRPr sz="1050" b="0">
+                <a:solidFill>
+                  <a:srgbClr val="695184"/>
+                </a:solidFill>
+                <a:latin typeface="Malgun Gothic"/>
+                <a:ea typeface="Malgun Gothic"/>
+                <a:cs typeface="Malgun Gothic"/>
+              </a:defRPr>
+            </a:lvl6pPr>
+            <a:lvl7pPr algn="r">
+              <a:defRPr sz="1050" b="0">
+                <a:solidFill>
+                  <a:srgbClr val="695184"/>
+                </a:solidFill>
+                <a:latin typeface="Malgun Gothic"/>
+                <a:ea typeface="Malgun Gothic"/>
+                <a:cs typeface="Malgun Gothic"/>
+              </a:defRPr>
+            </a:lvl7pPr>
+            <a:lvl8pPr algn="r">
+              <a:defRPr sz="1050" b="0">
+                <a:solidFill>
+                  <a:srgbClr val="695184"/>
+                </a:solidFill>
+                <a:latin typeface="Malgun Gothic"/>
+                <a:ea typeface="Malgun Gothic"/>
+                <a:cs typeface="Malgun Gothic"/>
+              </a:defRPr>
+            </a:lvl8pPr>
+            <a:lvl9pPr algn="r">
+              <a:defRPr sz="1050" b="0">
+                <a:solidFill>
+                  <a:srgbClr val="695184"/>
+                </a:solidFill>
+                <a:latin typeface="Malgun Gothic"/>
+                <a:ea typeface="Malgun Gothic"/>
+                <a:cs typeface="Malgun Gothic"/>
+              </a:defRPr>
+            </a:lvl9pPr>
           </a:lstStyle>
           <a:p xmlns:a="http://schemas.openxmlformats.org/drawingml/2006/main">
             <a:pPr algn="r">
+              <a:buNone/>
               <a:defRPr sz="1050" b="0">
                 <a:solidFill>
                   <a:srgbClr val="695184"/>

--- a/FINALDOCS/POSTER/FINAL/M_RAG_A1_FINAL_EDITABLE.pptx
+++ b/FINALDOCS/POSTER/FINAL/M_RAG_A1_FINAL_EDITABLE.pptx
@@ -2,13 +2,13 @@
 <file path=ppt/presentation.xml><?xml version="1.0" encoding="utf-8"?>
 <p:presentation xmlns:p="http://schemas.openxmlformats.org/presentationml/2006/main">
   <p:sldMasterIdLst>
-    <p:sldMasterId xmlns:r="http://schemas.openxmlformats.org/officeDocument/2006/relationships" id="2147483648" r:id="Rf6cc408cd4424066"/>
+    <p:sldMasterId xmlns:r="http://schemas.openxmlformats.org/officeDocument/2006/relationships" id="2147483648" r:id="R5417218fc1ae4ba1"/>
   </p:sldMasterIdLst>
   <p:notesMasterIdLst>
-    <p:notesMasterId xmlns:r="http://schemas.openxmlformats.org/officeDocument/2006/relationships" r:id="Rbc1939e328104470"/>
+    <p:notesMasterId xmlns:r="http://schemas.openxmlformats.org/officeDocument/2006/relationships" r:id="R49f02fc842f04598"/>
   </p:notesMasterIdLst>
   <p:sldIdLst>
-    <p:sldId xmlns:r="http://schemas.openxmlformats.org/officeDocument/2006/relationships" id="256" r:id="R7c84f456f7774943"/>
+    <p:sldId xmlns:r="http://schemas.openxmlformats.org/officeDocument/2006/relationships" id="256" r:id="Reae5f24be768419a"/>
   </p:sldIdLst>
   <p:sldSz cx="21384000" cy="30276000"/>
   <p:notesSz cx="6858000" cy="9144000"/>
@@ -442,7 +442,7 @@
           <a:lstStyle xmlns:a="http://schemas.openxmlformats.org/drawingml/2006/main"/>
           <a:p xmlns:a="http://schemas.openxmlformats.org/drawingml/2006/main">
             <a:r>
-              <a:t>Research sources and full statistics: FINALDOCS/DATA/FACTORIAL_STATISTICS_60Q.json; FINALDOCS/MANUSCRIPT/GRADUATION_REPORT_TRANSFER_KO_60Q.md. The exploratory analysis uses query-level repeated measures and Holm-adjusted hypothesis families. Editable tables follow explicit data-type alignment. Reference [4] https://ojs.aaai.org/index.php/AAAI/article/view/40417; [8] https://doi.org/10.1145/3331184.3331317 is conceptual ranking background, not the implemented CEDR architecture. [M1] https://huggingface.co/K-intelligence/Midm-2.0-Base-Instruct; [M2] https://huggingface.co/cross-encoder/ms-marco-MiniLM-L6-v2. The English case evidence is a contiguous saved context excerpt (PDF p.9), reference evidence is on PDF p.20. References follow manuscript numbering.</a:t>
+              <a:t>Research sources and full statistics: FINALDOCS/DATA/TTEST_ANOVA_60Q.json; FINALDOCS/MANUSCRIPT/GRADUATION_REPORT_TRANSFER_KO_60Q.md. The exploratory analysis uses query-level paired t-tests and repeated-measures ANOVA with two-sided alpha 0.05 and no multiplicity adjustment. Editable tables follow explicit data-type alignment. Reference [4] https://ojs.aaai.org/index.php/AAAI/article/view/40417; [8] https://doi.org/10.1145/3331184.3331317 is conceptual ranking background, not the implemented CEDR architecture. [M1] https://huggingface.co/K-intelligence/Midm-2.0-Base-Instruct; [M2] https://huggingface.co/cross-encoder/ms-marco-MiniLM-L6-v2. The English case evidence is a contiguous saved context excerpt (PDF p.9), reference evidence is on PDF p.20. References follow manuscript numbering.</a:t>
             </a:r>
           </a:p>
         </p:txBody>
@@ -489,7 +489,7 @@
           <p:cNvPr id="3" name="Title">
             <a:extLst xmlns:a="http://schemas.openxmlformats.org/drawingml/2006/main">
               <a:ext uri="{FF2B5EF4-FFF2-40B4-BE49-F238E27FC236}">
-                <a16:creationId xmlns:a16="http://schemas.microsoft.com/office/drawing/2014/main" id="{18C2D189-7F74-4993-8549-C9919680D29E}"/>
+                <a16:creationId xmlns:a16="http://schemas.microsoft.com/office/drawing/2014/main" id="{707AB210-BD38-4486-97DB-EA36056D05B3}"/>
               </a:ext>
             </a:extLst>
           </p:cNvPr>
@@ -718,7 +718,7 @@
           <p:cNvPr id="2" name="Subtitle">
             <a:extLst xmlns:a="http://schemas.openxmlformats.org/drawingml/2006/main">
               <a:ext uri="{FF2B5EF4-FFF2-40B4-BE49-F238E27FC236}">
-                <a16:creationId xmlns:a16="http://schemas.microsoft.com/office/drawing/2014/main" id="{95258C7D-128B-4FB5-9036-1B1FA2C5D61A}"/>
+                <a16:creationId xmlns:a16="http://schemas.microsoft.com/office/drawing/2014/main" id="{812D2440-1B0F-4561-8FF5-5C56FF7FABBE}"/>
               </a:ext>
             </a:extLst>
           </p:cNvPr>
@@ -964,7 +964,7 @@
           <p:cNvPr id="2" name="Section title">
             <a:extLst xmlns:a="http://schemas.openxmlformats.org/drawingml/2006/main">
               <a:ext uri="{FF2B5EF4-FFF2-40B4-BE49-F238E27FC236}">
-                <a16:creationId xmlns:a16="http://schemas.microsoft.com/office/drawing/2014/main" id="{3664E239-E601-43E3-A7E1-4889C93DD8C0}"/>
+                <a16:creationId xmlns:a16="http://schemas.microsoft.com/office/drawing/2014/main" id="{8CB89280-5C8C-45A9-8BD8-A6F9CC1EE3DC}"/>
               </a:ext>
             </a:extLst>
           </p:cNvPr>
@@ -1210,7 +1210,7 @@
           <p:cNvPr id="3" name="Title">
             <a:extLst xmlns:a="http://schemas.openxmlformats.org/drawingml/2006/main">
               <a:ext uri="{FF2B5EF4-FFF2-40B4-BE49-F238E27FC236}">
-                <a16:creationId xmlns:a16="http://schemas.microsoft.com/office/drawing/2014/main" id="{2D40143D-9B87-4255-9D7A-9C933C582688}"/>
+                <a16:creationId xmlns:a16="http://schemas.microsoft.com/office/drawing/2014/main" id="{088BABFC-DA41-4346-8F53-202C7A4AA4F6}"/>
               </a:ext>
             </a:extLst>
           </p:cNvPr>
@@ -1439,7 +1439,7 @@
           <p:cNvPr id="2" name="Body">
             <a:extLst xmlns:a="http://schemas.openxmlformats.org/drawingml/2006/main">
               <a:ext uri="{FF2B5EF4-FFF2-40B4-BE49-F238E27FC236}">
-                <a16:creationId xmlns:a16="http://schemas.microsoft.com/office/drawing/2014/main" id="{BF3B3B9A-7488-49EE-AE4A-2B44892DA9B8}"/>
+                <a16:creationId xmlns:a16="http://schemas.microsoft.com/office/drawing/2014/main" id="{02A25B0B-B3B5-4736-8FA4-621DB9F0DC31}"/>
               </a:ext>
             </a:extLst>
           </p:cNvPr>
@@ -1685,7 +1685,7 @@
           <p:cNvPr id="4" name="Title">
             <a:extLst xmlns:a="http://schemas.openxmlformats.org/drawingml/2006/main">
               <a:ext uri="{FF2B5EF4-FFF2-40B4-BE49-F238E27FC236}">
-                <a16:creationId xmlns:a16="http://schemas.microsoft.com/office/drawing/2014/main" id="{64E8CCEA-31BC-4362-8B39-988B09536E5B}"/>
+                <a16:creationId xmlns:a16="http://schemas.microsoft.com/office/drawing/2014/main" id="{9B8AB8E3-6DB0-4918-BF61-4EE2258585C8}"/>
               </a:ext>
             </a:extLst>
           </p:cNvPr>
@@ -1914,7 +1914,7 @@
           <p:cNvPr id="2" name="Left column">
             <a:extLst xmlns:a="http://schemas.openxmlformats.org/drawingml/2006/main">
               <a:ext uri="{FF2B5EF4-FFF2-40B4-BE49-F238E27FC236}">
-                <a16:creationId xmlns:a16="http://schemas.microsoft.com/office/drawing/2014/main" id="{06CE0F29-D3E0-4093-AAE3-33BF360204DC}"/>
+                <a16:creationId xmlns:a16="http://schemas.microsoft.com/office/drawing/2014/main" id="{D7344E96-722C-48AA-A9B8-94E74EF9848E}"/>
               </a:ext>
             </a:extLst>
           </p:cNvPr>
@@ -2143,7 +2143,7 @@
           <p:cNvPr id="3" name="Right column">
             <a:extLst xmlns:a="http://schemas.openxmlformats.org/drawingml/2006/main">
               <a:ext uri="{FF2B5EF4-FFF2-40B4-BE49-F238E27FC236}">
-                <a16:creationId xmlns:a16="http://schemas.microsoft.com/office/drawing/2014/main" id="{D1BC5D0E-465F-4CE6-B2F6-C66255A1358F}"/>
+                <a16:creationId xmlns:a16="http://schemas.microsoft.com/office/drawing/2014/main" id="{47A5DC7E-84C6-494C-A226-4FE6972448AE}"/>
               </a:ext>
             </a:extLst>
           </p:cNvPr>
@@ -2389,7 +2389,7 @@
           <p:cNvPr id="3" name="Title">
             <a:extLst xmlns:a="http://schemas.openxmlformats.org/drawingml/2006/main">
               <a:ext uri="{FF2B5EF4-FFF2-40B4-BE49-F238E27FC236}">
-                <a16:creationId xmlns:a16="http://schemas.microsoft.com/office/drawing/2014/main" id="{2972B973-4DFE-416E-A383-E21E24C4F17B}"/>
+                <a16:creationId xmlns:a16="http://schemas.microsoft.com/office/drawing/2014/main" id="{541C9FAC-A4C6-470B-8229-354C7B702F2D}"/>
               </a:ext>
             </a:extLst>
           </p:cNvPr>
@@ -2618,7 +2618,7 @@
           <p:cNvPr id="2" name="Left column">
             <a:extLst xmlns:a="http://schemas.openxmlformats.org/drawingml/2006/main">
               <a:ext uri="{FF2B5EF4-FFF2-40B4-BE49-F238E27FC236}">
-                <a16:creationId xmlns:a16="http://schemas.microsoft.com/office/drawing/2014/main" id="{29FA1E36-CF00-45A7-9EE2-17BE27F488F5}"/>
+                <a16:creationId xmlns:a16="http://schemas.microsoft.com/office/drawing/2014/main" id="{BC7E0CD2-48B2-4422-BEB5-3277059A74F7}"/>
               </a:ext>
             </a:extLst>
           </p:cNvPr>
@@ -2885,12 +2885,12 @@
   </p:cSld>
   <p:clrMap bg1="lt1" tx1="dk1" bg2="lt2" tx2="dk2" accent1="accent1" accent2="accent2" accent3="accent3" accent4="accent4" accent5="accent5" accent6="accent6" hlink="hlink" folHlink="folHlink"/>
   <p:sldLayoutIdLst>
-    <p:sldLayoutId xmlns:r="http://schemas.openxmlformats.org/officeDocument/2006/relationships" id="2147483649" r:id="R95710aeefba64c27"/>
-    <p:sldLayoutId xmlns:r="http://schemas.openxmlformats.org/officeDocument/2006/relationships" id="2147483650" r:id="Rf712e709639e4f80"/>
-    <p:sldLayoutId xmlns:r="http://schemas.openxmlformats.org/officeDocument/2006/relationships" id="2147483651" r:id="R29734f7a68a84798"/>
-    <p:sldLayoutId xmlns:r="http://schemas.openxmlformats.org/officeDocument/2006/relationships" id="2147483652" r:id="R9d52fba0e0bf461a"/>
-    <p:sldLayoutId xmlns:r="http://schemas.openxmlformats.org/officeDocument/2006/relationships" id="2147483653" r:id="Ra2ed83a587e6470f"/>
-    <p:sldLayoutId xmlns:r="http://schemas.openxmlformats.org/officeDocument/2006/relationships" id="2147483654" r:id="Rd555bde63c2d4c94"/>
+    <p:sldLayoutId xmlns:r="http://schemas.openxmlformats.org/officeDocument/2006/relationships" id="2147483649" r:id="Rb40d50c614da453e"/>
+    <p:sldLayoutId xmlns:r="http://schemas.openxmlformats.org/officeDocument/2006/relationships" id="2147483650" r:id="R2b5172b4502b42a9"/>
+    <p:sldLayoutId xmlns:r="http://schemas.openxmlformats.org/officeDocument/2006/relationships" id="2147483651" r:id="R676a8a6a8303435f"/>
+    <p:sldLayoutId xmlns:r="http://schemas.openxmlformats.org/officeDocument/2006/relationships" id="2147483652" r:id="Rd814fbdf71cc4864"/>
+    <p:sldLayoutId xmlns:r="http://schemas.openxmlformats.org/officeDocument/2006/relationships" id="2147483653" r:id="R2854fdb348ce412c"/>
+    <p:sldLayoutId xmlns:r="http://schemas.openxmlformats.org/officeDocument/2006/relationships" id="2147483654" r:id="R88345d678e79417a"/>
   </p:sldLayoutIdLst>
   <p:txStyles>
     <p:titleStyle>
@@ -3441,7 +3441,7 @@
           <p:cNvPr id="76" name="">
             <a:extLst xmlns:a="http://schemas.openxmlformats.org/drawingml/2006/main">
               <a:ext uri="{FF2B5EF4-FFF2-40B4-BE49-F238E27FC236}">
-                <a16:creationId xmlns:a16="http://schemas.microsoft.com/office/drawing/2014/main" id="{307F14FD-D820-4A32-B6F8-DA81B5E23C26}"/>
+                <a16:creationId xmlns:a16="http://schemas.microsoft.com/office/drawing/2014/main" id="{B124FBB7-B6C3-4104-A94E-7B3E70932BD9}"/>
               </a:ext>
             </a:extLst>
           </p:cNvPr>
@@ -3472,7 +3472,7 @@
           <p:cNvPr id="2" name="한국어 질의로 영어 학술·기술 문서를 검색하는">
             <a:extLst xmlns:a="http://schemas.openxmlformats.org/drawingml/2006/main">
               <a:ext uri="{FF2B5EF4-FFF2-40B4-BE49-F238E27FC236}">
-                <a16:creationId xmlns:a16="http://schemas.microsoft.com/office/drawing/2014/main" id="{20D8F3DB-04B5-49AD-92E5-BB7609AF52EF}"/>
+                <a16:creationId xmlns:a16="http://schemas.microsoft.com/office/drawing/2014/main" id="{C4A155D7-595D-4D8B-8658-CBCEFA4C0B57}"/>
               </a:ext>
             </a:extLst>
           </p:cNvPr>
@@ -3602,7 +3602,6 @@
           </a:lstStyle>
           <a:p xmlns:a="http://schemas.openxmlformats.org/drawingml/2006/main">
             <a:pPr algn="ctr">
-              <a:buNone/>
               <a:defRPr sz="5200" b="0">
                 <a:solidFill>
                   <a:srgbClr val="FFFFFF"/>
@@ -3631,7 +3630,7 @@
           <p:cNvPr id="3" name="RAG에서의 HyDE·CAD·SCD 조합 실험">
             <a:extLst xmlns:a="http://schemas.openxmlformats.org/drawingml/2006/main">
               <a:ext uri="{FF2B5EF4-FFF2-40B4-BE49-F238E27FC236}">
-                <a16:creationId xmlns:a16="http://schemas.microsoft.com/office/drawing/2014/main" id="{7083EE00-123C-4EA6-959F-B4FBDE8FAF6F}"/>
+                <a16:creationId xmlns:a16="http://schemas.microsoft.com/office/drawing/2014/main" id="{61FCBC9A-DB55-46F5-B594-3413370C521E}"/>
               </a:ext>
             </a:extLst>
           </p:cNvPr>
@@ -3761,7 +3760,6 @@
           </a:lstStyle>
           <a:p xmlns:a="http://schemas.openxmlformats.org/drawingml/2006/main">
             <a:pPr algn="ctr">
-              <a:buNone/>
               <a:defRPr sz="5200" b="0">
                 <a:solidFill>
                   <a:srgbClr val="FFFFFF"/>
@@ -3790,7 +3788,7 @@
           <p:cNvPr id="4" name="문종건 · 동국대학교 WISE캠퍼스 컴퓨터공학과 · 지도교수 김진석 · 2026.10.15">
             <a:extLst xmlns:a="http://schemas.openxmlformats.org/drawingml/2006/main">
               <a:ext uri="{FF2B5EF4-FFF2-40B4-BE49-F238E27FC236}">
-                <a16:creationId xmlns:a16="http://schemas.microsoft.com/office/drawing/2014/main" id="{DB4F0942-9BA0-4154-8754-85691FA8E5E3}"/>
+                <a16:creationId xmlns:a16="http://schemas.microsoft.com/office/drawing/2014/main" id="{C8071267-0157-4238-AFF5-9A1C36ED35AA}"/>
               </a:ext>
             </a:extLst>
           </p:cNvPr>
@@ -3920,7 +3918,6 @@
           </a:lstStyle>
           <a:p xmlns:a="http://schemas.openxmlformats.org/drawingml/2006/main">
             <a:pPr algn="ctr">
-              <a:buNone/>
               <a:defRPr sz="2000" b="0">
                 <a:solidFill>
                   <a:srgbClr val="FFFFFF"/>
@@ -3949,7 +3946,7 @@
           <p:cNvPr id="5" name="">
             <a:extLst xmlns:a="http://schemas.openxmlformats.org/drawingml/2006/main">
               <a:ext uri="{FF2B5EF4-FFF2-40B4-BE49-F238E27FC236}">
-                <a16:creationId xmlns:a16="http://schemas.microsoft.com/office/drawing/2014/main" id="{5FBEE7C2-81E1-458E-BA69-A6A743423CDC}"/>
+                <a16:creationId xmlns:a16="http://schemas.microsoft.com/office/drawing/2014/main" id="{082CA7EC-C4E0-43F4-BD91-C095BB74736F}"/>
               </a:ext>
             </a:extLst>
           </p:cNvPr>
@@ -3980,7 +3977,7 @@
           <p:cNvPr id="6" name="01 연구 배경과 목적">
             <a:extLst xmlns:a="http://schemas.openxmlformats.org/drawingml/2006/main">
               <a:ext uri="{FF2B5EF4-FFF2-40B4-BE49-F238E27FC236}">
-                <a16:creationId xmlns:a16="http://schemas.microsoft.com/office/drawing/2014/main" id="{45E9146F-86D4-47FE-A6C7-F8E25AA605F7}"/>
+                <a16:creationId xmlns:a16="http://schemas.microsoft.com/office/drawing/2014/main" id="{8D949CEF-55A8-4FDD-8B6B-28C4630F12D3}"/>
               </a:ext>
             </a:extLst>
           </p:cNvPr>
@@ -4110,7 +4107,6 @@
           </a:lstStyle>
           <a:p xmlns:a="http://schemas.openxmlformats.org/drawingml/2006/main">
             <a:pPr algn="l">
-              <a:buNone/>
               <a:defRPr sz="2400" b="0">
                 <a:solidFill>
                   <a:srgbClr val="FFFFFF"/>
@@ -4139,7 +4135,7 @@
           <p:cNvPr id="7" name="검색 증강 생성(Retrieval-Augmented Generation, RAG)은 관련 문서 구간을 검색하고 그 텍">
             <a:extLst xmlns:a="http://schemas.openxmlformats.org/drawingml/2006/main">
               <a:ext uri="{FF2B5EF4-FFF2-40B4-BE49-F238E27FC236}">
-                <a16:creationId xmlns:a16="http://schemas.microsoft.com/office/drawing/2014/main" id="{07AF80D9-A184-4AFC-92E9-410FC0349FD2}"/>
+                <a16:creationId xmlns:a16="http://schemas.microsoft.com/office/drawing/2014/main" id="{F944E483-B7D7-4898-B573-13EF8871D6BD}"/>
               </a:ext>
             </a:extLst>
           </p:cNvPr>
@@ -4269,7 +4265,6 @@
           </a:lstStyle>
           <a:p xmlns:a="http://schemas.openxmlformats.org/drawingml/2006/main">
             <a:pPr algn="l">
-              <a:buNone/>
               <a:defRPr sz="1800" b="0">
                 <a:solidFill>
                   <a:srgbClr val="24324A"/>
@@ -4293,7 +4288,6 @@
           </a:p>
           <a:p xmlns:a="http://schemas.openxmlformats.org/drawingml/2006/main">
             <a:pPr algn="l">
-              <a:buNone/>
               <a:defRPr sz="1800" b="0">
                 <a:solidFill>
                   <a:srgbClr val="24324A"/>
@@ -4322,7 +4316,7 @@
           <p:cNvPr id="8" name="HyDE: 가상 문서 임베딩(Hypothetical Document Embeddings) 가상 문서 검색 입력 구성[">
             <a:extLst xmlns:a="http://schemas.openxmlformats.org/drawingml/2006/main">
               <a:ext uri="{FF2B5EF4-FFF2-40B4-BE49-F238E27FC236}">
-                <a16:creationId xmlns:a16="http://schemas.microsoft.com/office/drawing/2014/main" id="{BA0DDB7B-38EF-4C53-8B35-4597DAA72049}"/>
+                <a16:creationId xmlns:a16="http://schemas.microsoft.com/office/drawing/2014/main" id="{CC390CE8-B618-40EF-92AE-9EB9F1A862AF}"/>
               </a:ext>
             </a:extLst>
           </p:cNvPr>
@@ -4452,7 +4446,6 @@
           </a:lstStyle>
           <a:p xmlns:a="http://schemas.openxmlformats.org/drawingml/2006/main">
             <a:pPr algn="l">
-              <a:buNone/>
               <a:defRPr sz="1800" b="0">
                 <a:solidFill>
                   <a:srgbClr val="24324A"/>
@@ -4476,7 +4469,6 @@
           </a:p>
           <a:p xmlns:a="http://schemas.openxmlformats.org/drawingml/2006/main">
             <a:pPr algn="l">
-              <a:buNone/>
               <a:defRPr sz="1800" b="0">
                 <a:solidFill>
                   <a:srgbClr val="24324A"/>
@@ -4500,7 +4492,6 @@
           </a:p>
           <a:p xmlns:a="http://schemas.openxmlformats.org/drawingml/2006/main">
             <a:pPr algn="l">
-              <a:buNone/>
               <a:defRPr sz="1800" b="0">
                 <a:solidFill>
                   <a:srgbClr val="24324A"/>
@@ -4524,7 +4515,6 @@
           </a:p>
           <a:p xmlns:a="http://schemas.openxmlformats.org/drawingml/2006/main">
             <a:pPr algn="l">
-              <a:buNone/>
               <a:defRPr sz="1800" b="0">
                 <a:solidFill>
                   <a:srgbClr val="24324A"/>
@@ -4548,7 +4538,6 @@
           </a:p>
           <a:p xmlns:a="http://schemas.openxmlformats.org/drawingml/2006/main">
             <a:pPr algn="l">
-              <a:buNone/>
               <a:defRPr sz="1800" b="0">
                 <a:solidFill>
                   <a:srgbClr val="24324A"/>
@@ -4572,7 +4561,6 @@
           </a:p>
           <a:p xmlns:a="http://schemas.openxmlformats.org/drawingml/2006/main">
             <a:pPr algn="l">
-              <a:buNone/>
               <a:defRPr sz="1800" b="0">
                 <a:solidFill>
                   <a:srgbClr val="24324A"/>
@@ -4598,10 +4586,10 @@
       </p:sp>
       <p:sp>
         <p:nvSpPr>
-          <p:cNvPr id="9" name="HyDE는 한국어 등 다국어 검색에서 평가되었다[2]. 본 연구는 한국어 질의–영어 근거의 표현·출력 언어 문제를 동">
+          <p:cNvPr id="9" name="HyDE는 한국어 등 다국어 검색에서 평가되었다[2]. 한국어 질의–영어 문서 환경에서 HyDE·CAD·SCD의 개별">
             <a:extLst xmlns:a="http://schemas.openxmlformats.org/drawingml/2006/main">
               <a:ext uri="{FF2B5EF4-FFF2-40B4-BE49-F238E27FC236}">
-                <a16:creationId xmlns:a16="http://schemas.microsoft.com/office/drawing/2014/main" id="{368ECF16-7A80-4F5D-8924-03128D4B6E30}"/>
+                <a16:creationId xmlns:a16="http://schemas.microsoft.com/office/drawing/2014/main" id="{7441512C-2F2D-4293-8A03-34A66CCD8C12}"/>
               </a:ext>
             </a:extLst>
           </p:cNvPr>
@@ -4731,7 +4719,6 @@
           </a:lstStyle>
           <a:p xmlns:a="http://schemas.openxmlformats.org/drawingml/2006/main">
             <a:pPr algn="l">
-              <a:buNone/>
               <a:defRPr sz="1800" b="1">
                 <a:solidFill>
                   <a:srgbClr val="24324A"/>
@@ -4755,7 +4742,6 @@
           </a:p>
           <a:p xmlns:a="http://schemas.openxmlformats.org/drawingml/2006/main">
             <a:pPr algn="l">
-              <a:buNone/>
               <a:defRPr sz="1800" b="1">
                 <a:solidFill>
                   <a:srgbClr val="24324A"/>
@@ -4779,7 +4765,6 @@
           </a:p>
           <a:p xmlns:a="http://schemas.openxmlformats.org/drawingml/2006/main">
             <a:pPr algn="l">
-              <a:buNone/>
               <a:defRPr sz="1800" b="1">
                 <a:solidFill>
                   <a:srgbClr val="24324A"/>
@@ -4808,7 +4793,7 @@
           <p:cNvPr id="10" name="">
             <a:extLst xmlns:a="http://schemas.openxmlformats.org/drawingml/2006/main">
               <a:ext uri="{FF2B5EF4-FFF2-40B4-BE49-F238E27FC236}">
-                <a16:creationId xmlns:a16="http://schemas.microsoft.com/office/drawing/2014/main" id="{C0816FCC-E820-408B-B85F-75E0A8E0F39F}"/>
+                <a16:creationId xmlns:a16="http://schemas.microsoft.com/office/drawing/2014/main" id="{AB18E6E9-6112-4C1C-BCA0-E7489CDAC183}"/>
               </a:ext>
             </a:extLst>
           </p:cNvPr>
@@ -4839,7 +4824,7 @@
           <p:cNvPr id="11" name="02 Paper-RAG 구조와 기법 적용 위치">
             <a:extLst xmlns:a="http://schemas.openxmlformats.org/drawingml/2006/main">
               <a:ext uri="{FF2B5EF4-FFF2-40B4-BE49-F238E27FC236}">
-                <a16:creationId xmlns:a16="http://schemas.microsoft.com/office/drawing/2014/main" id="{ABA491DE-CB5C-4A36-8F7E-0D6058C65509}"/>
+                <a16:creationId xmlns:a16="http://schemas.microsoft.com/office/drawing/2014/main" id="{438DC46B-263F-4FD4-9624-5D3338F4A549}"/>
               </a:ext>
             </a:extLst>
           </p:cNvPr>
@@ -4969,7 +4954,6 @@
           </a:lstStyle>
           <a:p xmlns:a="http://schemas.openxmlformats.org/drawingml/2006/main">
             <a:pPr algn="l">
-              <a:buNone/>
               <a:defRPr sz="2400" b="0">
                 <a:solidFill>
                   <a:srgbClr val="FFFFFF"/>
@@ -4995,10 +4979,10 @@
       </p:sp>
       <p:sp>
         <p:nvSpPr>
-          <p:cNvPr id="12" name="Paper-RAG는 본 연구의 고정 검색·생성 파이프라인이다.">
+          <p:cNvPr id="12" name="Paper-RAG는 실험에 사용한 고정 검색·생성 파이프라인이다.">
             <a:extLst xmlns:a="http://schemas.openxmlformats.org/drawingml/2006/main">
               <a:ext uri="{FF2B5EF4-FFF2-40B4-BE49-F238E27FC236}">
-                <a16:creationId xmlns:a16="http://schemas.microsoft.com/office/drawing/2014/main" id="{171987F4-43DE-4CA8-95DC-56A870D7326B}"/>
+                <a16:creationId xmlns:a16="http://schemas.microsoft.com/office/drawing/2014/main" id="{2F6CF8C0-9341-455F-A856-DB9A1C1CEE00}"/>
               </a:ext>
             </a:extLst>
           </p:cNvPr>
@@ -5128,7 +5112,6 @@
           </a:lstStyle>
           <a:p xmlns:a="http://schemas.openxmlformats.org/drawingml/2006/main">
             <a:pPr algn="l">
-              <a:buNone/>
               <a:defRPr sz="1800" b="0">
                 <a:solidFill>
                   <a:srgbClr val="24324A"/>
@@ -5157,7 +5140,7 @@
           <p:cNvPr id="13" name="">
             <a:extLst xmlns:a="http://schemas.openxmlformats.org/drawingml/2006/main">
               <a:ext uri="{FF2B5EF4-FFF2-40B4-BE49-F238E27FC236}">
-                <a16:creationId xmlns:a16="http://schemas.microsoft.com/office/drawing/2014/main" id="{D66388B6-9D9A-4493-BD65-8BF7C53BFDCF}"/>
+                <a16:creationId xmlns:a16="http://schemas.microsoft.com/office/drawing/2014/main" id="{09865E6C-21E1-4A73-A751-A2E6DDC42935}"/>
               </a:ext>
             </a:extLst>
           </p:cNvPr>
@@ -5190,7 +5173,7 @@
           <p:cNvPr id="14" name="한국어 질의 HyDE OFF: 원질의 HyDE ON: 영어 번역·가상 문서">
             <a:extLst xmlns:a="http://schemas.openxmlformats.org/drawingml/2006/main">
               <a:ext uri="{FF2B5EF4-FFF2-40B4-BE49-F238E27FC236}">
-                <a16:creationId xmlns:a16="http://schemas.microsoft.com/office/drawing/2014/main" id="{010504EF-242A-472A-AB90-567F4F6F27E5}"/>
+                <a16:creationId xmlns:a16="http://schemas.microsoft.com/office/drawing/2014/main" id="{F55DA3B3-354C-4EC8-9ABA-F2D601C96B30}"/>
               </a:ext>
             </a:extLst>
           </p:cNvPr>
@@ -5320,7 +5303,6 @@
           </a:lstStyle>
           <a:p xmlns:a="http://schemas.openxmlformats.org/drawingml/2006/main">
             <a:pPr algn="ctr">
-              <a:buNone/>
               <a:defRPr sz="1800" b="0">
                 <a:solidFill>
                   <a:srgbClr val="24324A"/>
@@ -5344,7 +5326,6 @@
           </a:p>
           <a:p xmlns:a="http://schemas.openxmlformats.org/drawingml/2006/main">
             <a:pPr algn="ctr">
-              <a:buNone/>
               <a:defRPr sz="1800" b="0">
                 <a:solidFill>
                   <a:srgbClr val="24324A"/>
@@ -5368,7 +5349,6 @@
           </a:p>
           <a:p xmlns:a="http://schemas.openxmlformats.org/drawingml/2006/main">
             <a:pPr algn="ctr">
-              <a:buNone/>
               <a:defRPr sz="1800" b="0">
                 <a:solidFill>
                   <a:srgbClr val="24324A"/>
@@ -5397,7 +5377,7 @@
           <p:cNvPr id="15" name="">
             <a:extLst xmlns:a="http://schemas.openxmlformats.org/drawingml/2006/main">
               <a:ext uri="{FF2B5EF4-FFF2-40B4-BE49-F238E27FC236}">
-                <a16:creationId xmlns:a16="http://schemas.microsoft.com/office/drawing/2014/main" id="{57B6A6DD-5D7B-4624-B5D9-9814D3FDF5DC}"/>
+                <a16:creationId xmlns:a16="http://schemas.microsoft.com/office/drawing/2014/main" id="{504C5182-1A93-4388-9B51-6982EB3B193E}"/>
               </a:ext>
             </a:extLst>
           </p:cNvPr>
@@ -5430,7 +5410,7 @@
           <p:cNvPr id="16" name="BM25 희소 검색[6] 한국어 원질의 사용">
             <a:extLst xmlns:a="http://schemas.openxmlformats.org/drawingml/2006/main">
               <a:ext uri="{FF2B5EF4-FFF2-40B4-BE49-F238E27FC236}">
-                <a16:creationId xmlns:a16="http://schemas.microsoft.com/office/drawing/2014/main" id="{ABBF49ED-CC33-4BF0-93EB-8C2A749C6AA5}"/>
+                <a16:creationId xmlns:a16="http://schemas.microsoft.com/office/drawing/2014/main" id="{D0DDEE65-E1A3-4BAD-844D-D57FBF0C4B3B}"/>
               </a:ext>
             </a:extLst>
           </p:cNvPr>
@@ -5560,7 +5540,6 @@
           </a:lstStyle>
           <a:p xmlns:a="http://schemas.openxmlformats.org/drawingml/2006/main">
             <a:pPr algn="ctr">
-              <a:buNone/>
               <a:defRPr sz="1800" b="0">
                 <a:solidFill>
                   <a:srgbClr val="24324A"/>
@@ -5584,7 +5563,6 @@
           </a:p>
           <a:p xmlns:a="http://schemas.openxmlformats.org/drawingml/2006/main">
             <a:pPr algn="ctr">
-              <a:buNone/>
               <a:defRPr sz="1800" b="0">
                 <a:solidFill>
                   <a:srgbClr val="24324A"/>
@@ -5613,7 +5591,7 @@
           <p:cNvPr id="17" name="">
             <a:extLst xmlns:a="http://schemas.openxmlformats.org/drawingml/2006/main">
               <a:ext uri="{FF2B5EF4-FFF2-40B4-BE49-F238E27FC236}">
-                <a16:creationId xmlns:a16="http://schemas.microsoft.com/office/drawing/2014/main" id="{14662856-405F-4C79-AB51-BDE3444C7CC6}"/>
+                <a16:creationId xmlns:a16="http://schemas.microsoft.com/office/drawing/2014/main" id="{D8D0A2E9-78F0-455D-BDDA-A947524DC343}"/>
               </a:ext>
             </a:extLst>
           </p:cNvPr>
@@ -5646,7 +5624,7 @@
           <p:cNvPr id="18" name="BGE-M3 밀집 검색[5]">
             <a:extLst xmlns:a="http://schemas.openxmlformats.org/drawingml/2006/main">
               <a:ext uri="{FF2B5EF4-FFF2-40B4-BE49-F238E27FC236}">
-                <a16:creationId xmlns:a16="http://schemas.microsoft.com/office/drawing/2014/main" id="{090FAF09-340A-4C07-BB4A-1F3E51851FFC}"/>
+                <a16:creationId xmlns:a16="http://schemas.microsoft.com/office/drawing/2014/main" id="{CA787A4A-1279-4BEF-AF99-57ED132FAEF5}"/>
               </a:ext>
             </a:extLst>
           </p:cNvPr>
@@ -5776,7 +5754,6 @@
           </a:lstStyle>
           <a:p xmlns:a="http://schemas.openxmlformats.org/drawingml/2006/main">
             <a:pPr algn="ctr">
-              <a:buNone/>
               <a:defRPr sz="1800" b="0">
                 <a:solidFill>
                   <a:srgbClr val="24324A"/>
@@ -5805,7 +5782,7 @@
           <p:cNvPr id="19" name="">
             <a:extLst xmlns:a="http://schemas.openxmlformats.org/drawingml/2006/main">
               <a:ext uri="{FF2B5EF4-FFF2-40B4-BE49-F238E27FC236}">
-                <a16:creationId xmlns:a16="http://schemas.microsoft.com/office/drawing/2014/main" id="{4B72F661-9B82-4B60-9557-46582FF7446B}"/>
+                <a16:creationId xmlns:a16="http://schemas.microsoft.com/office/drawing/2014/main" id="{CC366CB8-05E1-40E5-B4F5-D1B28B23F601}"/>
               </a:ext>
             </a:extLst>
           </p:cNvPr>
@@ -5838,7 +5815,7 @@
           <p:cNvPr id="20" name="가중 RRF[7] 0.6 / 0.4, k=60">
             <a:extLst xmlns:a="http://schemas.openxmlformats.org/drawingml/2006/main">
               <a:ext uri="{FF2B5EF4-FFF2-40B4-BE49-F238E27FC236}">
-                <a16:creationId xmlns:a16="http://schemas.microsoft.com/office/drawing/2014/main" id="{424BE6AF-0C1B-422C-AB8F-8A55C4999F6F}"/>
+                <a16:creationId xmlns:a16="http://schemas.microsoft.com/office/drawing/2014/main" id="{422344FA-B291-462F-B4A4-62F19C965A77}"/>
               </a:ext>
             </a:extLst>
           </p:cNvPr>
@@ -5968,7 +5945,6 @@
           </a:lstStyle>
           <a:p xmlns:a="http://schemas.openxmlformats.org/drawingml/2006/main">
             <a:pPr algn="ctr">
-              <a:buNone/>
               <a:defRPr sz="1800" b="0">
                 <a:solidFill>
                   <a:srgbClr val="24324A"/>
@@ -5992,7 +5968,6 @@
           </a:p>
           <a:p xmlns:a="http://schemas.openxmlformats.org/drawingml/2006/main">
             <a:pPr algn="ctr">
-              <a:buNone/>
               <a:defRPr sz="1800" b="0">
                 <a:solidFill>
                   <a:srgbClr val="24324A"/>
@@ -6021,7 +5996,7 @@
           <p:cNvPr id="21" name="">
             <a:extLst xmlns:a="http://schemas.openxmlformats.org/drawingml/2006/main">
               <a:ext uri="{FF2B5EF4-FFF2-40B4-BE49-F238E27FC236}">
-                <a16:creationId xmlns:a16="http://schemas.microsoft.com/office/drawing/2014/main" id="{C43A4057-0FCA-4D44-8226-15A94E1E42AD}"/>
+                <a16:creationId xmlns:a16="http://schemas.microsoft.com/office/drawing/2014/main" id="{F36FD694-979E-466F-A8AB-384F6A419CF5}"/>
               </a:ext>
             </a:extLst>
           </p:cNvPr>
@@ -6053,7 +6028,7 @@
           <p:cNvPr id="22" name="">
             <a:extLst xmlns:a="http://schemas.openxmlformats.org/drawingml/2006/main">
               <a:ext uri="{FF2B5EF4-FFF2-40B4-BE49-F238E27FC236}">
-                <a16:creationId xmlns:a16="http://schemas.microsoft.com/office/drawing/2014/main" id="{C90C8D40-5ACD-4ED8-AA51-D7DB4C79396D}"/>
+                <a16:creationId xmlns:a16="http://schemas.microsoft.com/office/drawing/2014/main" id="{E56784AF-6584-4DD1-AF92-D8DA6EE0A735}"/>
               </a:ext>
             </a:extLst>
           </p:cNvPr>
@@ -6085,7 +6060,7 @@
           <p:cNvPr id="23" name="">
             <a:extLst xmlns:a="http://schemas.openxmlformats.org/drawingml/2006/main">
               <a:ext uri="{FF2B5EF4-FFF2-40B4-BE49-F238E27FC236}">
-                <a16:creationId xmlns:a16="http://schemas.microsoft.com/office/drawing/2014/main" id="{8E0C67CE-FD28-49D8-B3AB-212E79663A08}"/>
+                <a16:creationId xmlns:a16="http://schemas.microsoft.com/office/drawing/2014/main" id="{5A85AD56-5C88-4164-A04C-2F19223412A4}"/>
               </a:ext>
             </a:extLst>
           </p:cNvPr>
@@ -6117,7 +6092,7 @@
           <p:cNvPr id="24" name="">
             <a:extLst xmlns:a="http://schemas.openxmlformats.org/drawingml/2006/main">
               <a:ext uri="{FF2B5EF4-FFF2-40B4-BE49-F238E27FC236}">
-                <a16:creationId xmlns:a16="http://schemas.microsoft.com/office/drawing/2014/main" id="{0339FDC4-49A8-4CA2-86C8-87BF00790BEB}"/>
+                <a16:creationId xmlns:a16="http://schemas.microsoft.com/office/drawing/2014/main" id="{46AB8170-94B5-4794-8576-54B098E8FD9B}"/>
               </a:ext>
             </a:extLst>
           </p:cNvPr>
@@ -6150,7 +6125,7 @@
           <p:cNvPr id="25" name="원질의·구간 쌍 CrossEncoder 재정렬[8][M2] 상위 5개 구간 선택·문맥 길이 관리">
             <a:extLst xmlns:a="http://schemas.openxmlformats.org/drawingml/2006/main">
               <a:ext uri="{FF2B5EF4-FFF2-40B4-BE49-F238E27FC236}">
-                <a16:creationId xmlns:a16="http://schemas.microsoft.com/office/drawing/2014/main" id="{1B13E56A-471A-4ECA-901B-39F9B367FA1D}"/>
+                <a16:creationId xmlns:a16="http://schemas.microsoft.com/office/drawing/2014/main" id="{9609FE25-57BA-43D1-89E6-3ADA9DA6D14B}"/>
               </a:ext>
             </a:extLst>
           </p:cNvPr>
@@ -6280,7 +6255,6 @@
           </a:lstStyle>
           <a:p xmlns:a="http://schemas.openxmlformats.org/drawingml/2006/main">
             <a:pPr algn="ctr">
-              <a:buNone/>
               <a:defRPr sz="1800" b="0">
                 <a:solidFill>
                   <a:srgbClr val="24324A"/>
@@ -6304,7 +6278,6 @@
           </a:p>
           <a:p xmlns:a="http://schemas.openxmlformats.org/drawingml/2006/main">
             <a:pPr algn="ctr">
-              <a:buNone/>
               <a:defRPr sz="1800" b="0">
                 <a:solidFill>
                   <a:srgbClr val="24324A"/>
@@ -6333,7 +6306,7 @@
           <p:cNvPr id="26" name="">
             <a:extLst xmlns:a="http://schemas.openxmlformats.org/drawingml/2006/main">
               <a:ext uri="{FF2B5EF4-FFF2-40B4-BE49-F238E27FC236}">
-                <a16:creationId xmlns:a16="http://schemas.microsoft.com/office/drawing/2014/main" id="{718F5B70-120D-43B0-9037-555C0C128F6F}"/>
+                <a16:creationId xmlns:a16="http://schemas.microsoft.com/office/drawing/2014/main" id="{EA25553B-72A8-424E-9D61-9A5DAC7C675E}"/>
               </a:ext>
             </a:extLst>
           </p:cNvPr>
@@ -6366,7 +6339,7 @@
           <p:cNvPr id="27" name="Mi:dm 2.0 Base Instruct[M1] CAD 로짓 결합 후 SCD 언어별 조정, 최종 답변 생성">
             <a:extLst xmlns:a="http://schemas.openxmlformats.org/drawingml/2006/main">
               <a:ext uri="{FF2B5EF4-FFF2-40B4-BE49-F238E27FC236}">
-                <a16:creationId xmlns:a16="http://schemas.microsoft.com/office/drawing/2014/main" id="{068F3D05-F039-4813-B53D-A0EEBD92A59A}"/>
+                <a16:creationId xmlns:a16="http://schemas.microsoft.com/office/drawing/2014/main" id="{518D69AC-0FBA-40C5-AB18-EADFA7303051}"/>
               </a:ext>
             </a:extLst>
           </p:cNvPr>
@@ -6496,7 +6469,6 @@
           </a:lstStyle>
           <a:p xmlns:a="http://schemas.openxmlformats.org/drawingml/2006/main">
             <a:pPr algn="ctr">
-              <a:buNone/>
               <a:defRPr sz="1800" b="0">
                 <a:solidFill>
                   <a:srgbClr val="24324A"/>
@@ -6520,7 +6492,6 @@
           </a:p>
           <a:p xmlns:a="http://schemas.openxmlformats.org/drawingml/2006/main">
             <a:pPr algn="ctr">
-              <a:buNone/>
               <a:defRPr sz="1800" b="0">
                 <a:solidFill>
                   <a:srgbClr val="24324A"/>
@@ -6549,7 +6520,7 @@
           <p:cNvPr id="28" name="">
             <a:extLst xmlns:a="http://schemas.openxmlformats.org/drawingml/2006/main">
               <a:ext uri="{FF2B5EF4-FFF2-40B4-BE49-F238E27FC236}">
-                <a16:creationId xmlns:a16="http://schemas.microsoft.com/office/drawing/2014/main" id="{546EBC49-52FF-4767-8D8B-0B1D3E759A29}"/>
+                <a16:creationId xmlns:a16="http://schemas.microsoft.com/office/drawing/2014/main" id="{01517BC2-6B58-4ADD-8AC2-666C5CB6D320}"/>
               </a:ext>
             </a:extLst>
           </p:cNvPr>
@@ -6581,7 +6552,7 @@
           <p:cNvPr id="29" name="">
             <a:extLst xmlns:a="http://schemas.openxmlformats.org/drawingml/2006/main">
               <a:ext uri="{FF2B5EF4-FFF2-40B4-BE49-F238E27FC236}">
-                <a16:creationId xmlns:a16="http://schemas.microsoft.com/office/drawing/2014/main" id="{961EA1D3-7005-48E9-86A8-71B377B1C10E}"/>
+                <a16:creationId xmlns:a16="http://schemas.microsoft.com/office/drawing/2014/main" id="{28721863-CA08-469C-96BC-485DE2265EF8}"/>
               </a:ext>
             </a:extLst>
           </p:cNvPr>
@@ -6613,7 +6584,7 @@
           <p:cNvPr id="30" name="">
             <a:extLst xmlns:a="http://schemas.openxmlformats.org/drawingml/2006/main">
               <a:ext uri="{FF2B5EF4-FFF2-40B4-BE49-F238E27FC236}">
-                <a16:creationId xmlns:a16="http://schemas.microsoft.com/office/drawing/2014/main" id="{BB8F461A-7AF8-41AD-BE4F-52D92103DA94}"/>
+                <a16:creationId xmlns:a16="http://schemas.microsoft.com/office/drawing/2014/main" id="{210B2802-B92D-4E74-AC9C-3D43C44E4F84}"/>
               </a:ext>
             </a:extLst>
           </p:cNvPr>
@@ -6644,7 +6615,7 @@
           <p:cNvPr id="31" name="03 3요인 완전요인 실험 설계">
             <a:extLst xmlns:a="http://schemas.openxmlformats.org/drawingml/2006/main">
               <a:ext uri="{FF2B5EF4-FFF2-40B4-BE49-F238E27FC236}">
-                <a16:creationId xmlns:a16="http://schemas.microsoft.com/office/drawing/2014/main" id="{06A8580A-BE3F-4FF1-A6B8-D43FFF35A2C2}"/>
+                <a16:creationId xmlns:a16="http://schemas.microsoft.com/office/drawing/2014/main" id="{78A3373B-0A9D-4529-8EF6-3AC3C96D63BD}"/>
               </a:ext>
             </a:extLst>
           </p:cNvPr>
@@ -6774,7 +6745,6 @@
           </a:lstStyle>
           <a:p xmlns:a="http://schemas.openxmlformats.org/drawingml/2006/main">
             <a:pPr algn="l">
-              <a:buNone/>
               <a:defRPr sz="2400" b="0">
                 <a:solidFill>
                   <a:srgbClr val="FFFFFF"/>
@@ -6803,7 +6773,7 @@
           <p:cNvPr id="32" name="H=HyDE, C=CAD, S=SCD   0=미적용, 1=적용">
             <a:extLst xmlns:a="http://schemas.openxmlformats.org/drawingml/2006/main">
               <a:ext uri="{FF2B5EF4-FFF2-40B4-BE49-F238E27FC236}">
-                <a16:creationId xmlns:a16="http://schemas.microsoft.com/office/drawing/2014/main" id="{6E658457-7906-4B22-A95B-B56CDF2A9AB1}"/>
+                <a16:creationId xmlns:a16="http://schemas.microsoft.com/office/drawing/2014/main" id="{D1D5D367-CA52-4DA3-AA01-5984FFC8B102}"/>
               </a:ext>
             </a:extLst>
           </p:cNvPr>
@@ -6933,7 +6903,6 @@
           </a:lstStyle>
           <a:p xmlns:a="http://schemas.openxmlformats.org/drawingml/2006/main">
             <a:pPr algn="l">
-              <a:buNone/>
               <a:defRPr sz="1800" b="0">
                 <a:solidFill>
                   <a:srgbClr val="24324A"/>
@@ -6962,7 +6931,7 @@
           <p:cNvPr id="33" name="">
             <a:extLst xmlns:a="http://schemas.openxmlformats.org/drawingml/2006/main">
               <a:ext uri="{FF2B5EF4-FFF2-40B4-BE49-F238E27FC236}">
-                <a16:creationId xmlns:a16="http://schemas.microsoft.com/office/drawing/2014/main" id="{827ADEC0-AA42-41F6-97FA-F99E4014E9E7}"/>
+                <a16:creationId xmlns:a16="http://schemas.microsoft.com/office/drawing/2014/main" id="{C3BC8A11-3B74-4240-9922-1C2A6D735EFC}"/>
               </a:ext>
             </a:extLst>
           </p:cNvPr>
@@ -6991,9 +6960,7 @@
                     </a:bodyPr>
                     <a:lstStyle/>
                     <a:p>
-                      <a:pPr algn="ctr">
-                        <a:buNone/>
-                      </a:pPr>
+                      <a:pPr algn="ctr"/>
                       <a:r>
                         <a:rPr sz="1800" b="1">
                           <a:solidFill>
@@ -7044,9 +7011,7 @@
                     </a:bodyPr>
                     <a:lstStyle/>
                     <a:p>
-                      <a:pPr algn="ctr">
-                        <a:buNone/>
-                      </a:pPr>
+                      <a:pPr algn="ctr"/>
                       <a:r>
                         <a:rPr sz="1800" b="1">
                           <a:solidFill>
@@ -7091,9 +7056,7 @@
                     </a:bodyPr>
                     <a:lstStyle/>
                     <a:p>
-                      <a:pPr algn="ctr">
-                        <a:buNone/>
-                      </a:pPr>
+                      <a:pPr algn="ctr"/>
                       <a:r>
                         <a:rPr sz="1800" b="1">
                           <a:solidFill>
@@ -7138,9 +7101,7 @@
                     </a:bodyPr>
                     <a:lstStyle/>
                     <a:p>
-                      <a:pPr algn="ctr">
-                        <a:buNone/>
-                      </a:pPr>
+                      <a:pPr algn="ctr"/>
                       <a:r>
                         <a:rPr sz="1800" b="1">
                           <a:solidFill>
@@ -7187,9 +7148,7 @@
                     </a:bodyPr>
                     <a:lstStyle/>
                     <a:p>
-                      <a:pPr algn="ctr">
-                        <a:buNone/>
-                      </a:pPr>
+                      <a:pPr algn="ctr"/>
                       <a:r>
                         <a:rPr sz="1800" b="0">
                           <a:solidFill>
@@ -7234,9 +7193,7 @@
                     </a:bodyPr>
                     <a:lstStyle/>
                     <a:p>
-                      <a:pPr algn="ctr">
-                        <a:buNone/>
-                      </a:pPr>
+                      <a:pPr algn="ctr"/>
                       <a:r>
                         <a:rPr sz="1800" b="0">
                           <a:solidFill>
@@ -7275,9 +7232,7 @@
                     </a:bodyPr>
                     <a:lstStyle/>
                     <a:p>
-                      <a:pPr algn="ctr">
-                        <a:buNone/>
-                      </a:pPr>
+                      <a:pPr algn="ctr"/>
                       <a:r>
                         <a:rPr sz="1800" b="0">
                           <a:solidFill>
@@ -7316,9 +7271,7 @@
                     </a:bodyPr>
                     <a:lstStyle/>
                     <a:p>
-                      <a:pPr algn="ctr">
-                        <a:buNone/>
-                      </a:pPr>
+                      <a:pPr algn="ctr"/>
                       <a:r>
                         <a:rPr sz="1800" b="0">
                           <a:solidFill>
@@ -7359,9 +7312,7 @@
                     </a:bodyPr>
                     <a:lstStyle/>
                     <a:p>
-                      <a:pPr algn="ctr">
-                        <a:buNone/>
-                      </a:pPr>
+                      <a:pPr algn="ctr"/>
                       <a:r>
                         <a:rPr sz="1800" b="0">
                           <a:solidFill>
@@ -7406,9 +7357,7 @@
                     </a:bodyPr>
                     <a:lstStyle/>
                     <a:p>
-                      <a:pPr algn="ctr">
-                        <a:buNone/>
-                      </a:pPr>
+                      <a:pPr algn="ctr"/>
                       <a:r>
                         <a:rPr sz="1800" b="0">
                           <a:solidFill>
@@ -7447,9 +7396,7 @@
                     </a:bodyPr>
                     <a:lstStyle/>
                     <a:p>
-                      <a:pPr algn="ctr">
-                        <a:buNone/>
-                      </a:pPr>
+                      <a:pPr algn="ctr"/>
                       <a:r>
                         <a:rPr sz="1800" b="0">
                           <a:solidFill>
@@ -7488,9 +7435,7 @@
                     </a:bodyPr>
                     <a:lstStyle/>
                     <a:p>
-                      <a:pPr algn="ctr">
-                        <a:buNone/>
-                      </a:pPr>
+                      <a:pPr algn="ctr"/>
                       <a:r>
                         <a:rPr sz="1800" b="0">
                           <a:solidFill>
@@ -7531,9 +7476,7 @@
                     </a:bodyPr>
                     <a:lstStyle/>
                     <a:p>
-                      <a:pPr algn="ctr">
-                        <a:buNone/>
-                      </a:pPr>
+                      <a:pPr algn="ctr"/>
                       <a:r>
                         <a:rPr sz="1800" b="0">
                           <a:solidFill>
@@ -7578,9 +7521,7 @@
                     </a:bodyPr>
                     <a:lstStyle/>
                     <a:p>
-                      <a:pPr algn="ctr">
-                        <a:buNone/>
-                      </a:pPr>
+                      <a:pPr algn="ctr"/>
                       <a:r>
                         <a:rPr sz="1800" b="0">
                           <a:solidFill>
@@ -7619,9 +7560,7 @@
                     </a:bodyPr>
                     <a:lstStyle/>
                     <a:p>
-                      <a:pPr algn="ctr">
-                        <a:buNone/>
-                      </a:pPr>
+                      <a:pPr algn="ctr"/>
                       <a:r>
                         <a:rPr sz="1800" b="0">
                           <a:solidFill>
@@ -7660,9 +7599,7 @@
                     </a:bodyPr>
                     <a:lstStyle/>
                     <a:p>
-                      <a:pPr algn="ctr">
-                        <a:buNone/>
-                      </a:pPr>
+                      <a:pPr algn="ctr"/>
                       <a:r>
                         <a:rPr sz="1800" b="0">
                           <a:solidFill>
@@ -7703,9 +7640,7 @@
                     </a:bodyPr>
                     <a:lstStyle/>
                     <a:p>
-                      <a:pPr algn="ctr">
-                        <a:buNone/>
-                      </a:pPr>
+                      <a:pPr algn="ctr"/>
                       <a:r>
                         <a:rPr sz="1800" b="0">
                           <a:solidFill>
@@ -7750,9 +7685,7 @@
                     </a:bodyPr>
                     <a:lstStyle/>
                     <a:p>
-                      <a:pPr algn="ctr">
-                        <a:buNone/>
-                      </a:pPr>
+                      <a:pPr algn="ctr"/>
                       <a:r>
                         <a:rPr sz="1800" b="0">
                           <a:solidFill>
@@ -7791,9 +7724,7 @@
                     </a:bodyPr>
                     <a:lstStyle/>
                     <a:p>
-                      <a:pPr algn="ctr">
-                        <a:buNone/>
-                      </a:pPr>
+                      <a:pPr algn="ctr"/>
                       <a:r>
                         <a:rPr sz="1800" b="0">
                           <a:solidFill>
@@ -7832,9 +7763,7 @@
                     </a:bodyPr>
                     <a:lstStyle/>
                     <a:p>
-                      <a:pPr algn="ctr">
-                        <a:buNone/>
-                      </a:pPr>
+                      <a:pPr algn="ctr"/>
                       <a:r>
                         <a:rPr sz="1800" b="0">
                           <a:solidFill>
@@ -7875,9 +7804,7 @@
                     </a:bodyPr>
                     <a:lstStyle/>
                     <a:p>
-                      <a:pPr algn="ctr">
-                        <a:buNone/>
-                      </a:pPr>
+                      <a:pPr algn="ctr"/>
                       <a:r>
                         <a:rPr sz="1800" b="0">
                           <a:solidFill>
@@ -7922,9 +7849,7 @@
                     </a:bodyPr>
                     <a:lstStyle/>
                     <a:p>
-                      <a:pPr algn="ctr">
-                        <a:buNone/>
-                      </a:pPr>
+                      <a:pPr algn="ctr"/>
                       <a:r>
                         <a:rPr sz="1800" b="0">
                           <a:solidFill>
@@ -7963,9 +7888,7 @@
                     </a:bodyPr>
                     <a:lstStyle/>
                     <a:p>
-                      <a:pPr algn="ctr">
-                        <a:buNone/>
-                      </a:pPr>
+                      <a:pPr algn="ctr"/>
                       <a:r>
                         <a:rPr sz="1800" b="0">
                           <a:solidFill>
@@ -8004,9 +7927,7 @@
                     </a:bodyPr>
                     <a:lstStyle/>
                     <a:p>
-                      <a:pPr algn="ctr">
-                        <a:buNone/>
-                      </a:pPr>
+                      <a:pPr algn="ctr"/>
                       <a:r>
                         <a:rPr sz="1800" b="0">
                           <a:solidFill>
@@ -8047,9 +7968,7 @@
                     </a:bodyPr>
                     <a:lstStyle/>
                     <a:p>
-                      <a:pPr algn="ctr">
-                        <a:buNone/>
-                      </a:pPr>
+                      <a:pPr algn="ctr"/>
                       <a:r>
                         <a:rPr sz="1800" b="0">
                           <a:solidFill>
@@ -8094,9 +8013,7 @@
                     </a:bodyPr>
                     <a:lstStyle/>
                     <a:p>
-                      <a:pPr algn="ctr">
-                        <a:buNone/>
-                      </a:pPr>
+                      <a:pPr algn="ctr"/>
                       <a:r>
                         <a:rPr sz="1800" b="0">
                           <a:solidFill>
@@ -8135,9 +8052,7 @@
                     </a:bodyPr>
                     <a:lstStyle/>
                     <a:p>
-                      <a:pPr algn="ctr">
-                        <a:buNone/>
-                      </a:pPr>
+                      <a:pPr algn="ctr"/>
                       <a:r>
                         <a:rPr sz="1800" b="0">
                           <a:solidFill>
@@ -8176,9 +8091,7 @@
                     </a:bodyPr>
                     <a:lstStyle/>
                     <a:p>
-                      <a:pPr algn="ctr">
-                        <a:buNone/>
-                      </a:pPr>
+                      <a:pPr algn="ctr"/>
                       <a:r>
                         <a:rPr sz="1800" b="0">
                           <a:solidFill>
@@ -8219,9 +8132,7 @@
                     </a:bodyPr>
                     <a:lstStyle/>
                     <a:p>
-                      <a:pPr algn="ctr">
-                        <a:buNone/>
-                      </a:pPr>
+                      <a:pPr algn="ctr"/>
                       <a:r>
                         <a:rPr sz="1800" b="0">
                           <a:solidFill>
@@ -8266,9 +8177,7 @@
                     </a:bodyPr>
                     <a:lstStyle/>
                     <a:p>
-                      <a:pPr algn="ctr">
-                        <a:buNone/>
-                      </a:pPr>
+                      <a:pPr algn="ctr"/>
                       <a:r>
                         <a:rPr sz="1800" b="0">
                           <a:solidFill>
@@ -8307,9 +8216,7 @@
                     </a:bodyPr>
                     <a:lstStyle/>
                     <a:p>
-                      <a:pPr algn="ctr">
-                        <a:buNone/>
-                      </a:pPr>
+                      <a:pPr algn="ctr"/>
                       <a:r>
                         <a:rPr sz="1800" b="0">
                           <a:solidFill>
@@ -8348,9 +8255,7 @@
                     </a:bodyPr>
                     <a:lstStyle/>
                     <a:p>
-                      <a:pPr algn="ctr">
-                        <a:buNone/>
-                      </a:pPr>
+                      <a:pPr algn="ctr"/>
                       <a:r>
                         <a:rPr sz="1800" b="0">
                           <a:solidFill>
@@ -8391,9 +8296,7 @@
                     </a:bodyPr>
                     <a:lstStyle/>
                     <a:p>
-                      <a:pPr algn="ctr">
-                        <a:buNone/>
-                      </a:pPr>
+                      <a:pPr algn="ctr"/>
                       <a:r>
                         <a:rPr sz="1800" b="0">
                           <a:solidFill>
@@ -8438,9 +8341,7 @@
                     </a:bodyPr>
                     <a:lstStyle/>
                     <a:p>
-                      <a:pPr algn="ctr">
-                        <a:buNone/>
-                      </a:pPr>
+                      <a:pPr algn="ctr"/>
                       <a:r>
                         <a:rPr sz="1800" b="0">
                           <a:solidFill>
@@ -8479,9 +8380,7 @@
                     </a:bodyPr>
                     <a:lstStyle/>
                     <a:p>
-                      <a:pPr algn="ctr">
-                        <a:buNone/>
-                      </a:pPr>
+                      <a:pPr algn="ctr"/>
                       <a:r>
                         <a:rPr sz="1800" b="0">
                           <a:solidFill>
@@ -8520,9 +8419,7 @@
                     </a:bodyPr>
                     <a:lstStyle/>
                     <a:p>
-                      <a:pPr algn="ctr">
-                        <a:buNone/>
-                      </a:pPr>
+                      <a:pPr algn="ctr"/>
                       <a:r>
                         <a:rPr sz="1800" b="0">
                           <a:solidFill>
@@ -8564,7 +8461,7 @@
           <p:cNvPr id="34" name="같은 질의 60개 × 8조건 반복측정 = 480개 생성 기록">
             <a:extLst xmlns:a="http://schemas.openxmlformats.org/drawingml/2006/main">
               <a:ext uri="{FF2B5EF4-FFF2-40B4-BE49-F238E27FC236}">
-                <a16:creationId xmlns:a16="http://schemas.microsoft.com/office/drawing/2014/main" id="{C13B4DE2-291F-4C28-806E-AD2A80E1CB53}"/>
+                <a16:creationId xmlns:a16="http://schemas.microsoft.com/office/drawing/2014/main" id="{078D1A9C-A262-4CDA-8905-D8DE88F863AD}"/>
               </a:ext>
             </a:extLst>
           </p:cNvPr>
@@ -8694,7 +8591,6 @@
           </a:lstStyle>
           <a:p xmlns:a="http://schemas.openxmlformats.org/drawingml/2006/main">
             <a:pPr algn="l">
-              <a:buNone/>
               <a:defRPr sz="1800" b="1">
                 <a:solidFill>
                   <a:srgbClr val="24324A"/>
@@ -8723,7 +8619,7 @@
           <p:cNvPr id="35" name="생성 512토큰, CAD α=0.5, SCD α=1.1·β=0.9·Tstart=5">
             <a:extLst xmlns:a="http://schemas.openxmlformats.org/drawingml/2006/main">
               <a:ext uri="{FF2B5EF4-FFF2-40B4-BE49-F238E27FC236}">
-                <a16:creationId xmlns:a16="http://schemas.microsoft.com/office/drawing/2014/main" id="{2B114CEE-7C1B-4DC7-9A97-476832105F41}"/>
+                <a16:creationId xmlns:a16="http://schemas.microsoft.com/office/drawing/2014/main" id="{E4A45FB3-1DB6-4774-9F72-C3F409182A83}"/>
               </a:ext>
             </a:extLst>
           </p:cNvPr>
@@ -8853,7 +8749,6 @@
           </a:lstStyle>
           <a:p xmlns:a="http://schemas.openxmlformats.org/drawingml/2006/main">
             <a:pPr algn="l">
-              <a:buNone/>
               <a:defRPr sz="1800" b="0">
                 <a:solidFill>
                   <a:srgbClr val="24324A"/>
@@ -8882,7 +8777,7 @@
           <p:cNvPr id="36" name="문서 요약을 15개 내용 단위로 나누어 질의를 작성하고, 총 60개 질의의 원문 페이지·정답 근거·답변 가능성을 확인">
             <a:extLst xmlns:a="http://schemas.openxmlformats.org/drawingml/2006/main">
               <a:ext uri="{FF2B5EF4-FFF2-40B4-BE49-F238E27FC236}">
-                <a16:creationId xmlns:a16="http://schemas.microsoft.com/office/drawing/2014/main" id="{1DB54CE9-20A9-49EC-8861-A0764339B16A}"/>
+                <a16:creationId xmlns:a16="http://schemas.microsoft.com/office/drawing/2014/main" id="{6DDA1723-3294-441D-83EB-9842CA8A28C9}"/>
               </a:ext>
             </a:extLst>
           </p:cNvPr>
@@ -9012,7 +8907,6 @@
           </a:lstStyle>
           <a:p xmlns:a="http://schemas.openxmlformats.org/drawingml/2006/main">
             <a:pPr algn="l">
-              <a:buNone/>
               <a:defRPr sz="1800" b="0">
                 <a:solidFill>
                   <a:srgbClr val="24324A"/>
@@ -9036,7 +8930,6 @@
           </a:p>
           <a:p xmlns:a="http://schemas.openxmlformats.org/drawingml/2006/main">
             <a:pPr algn="l">
-              <a:buNone/>
               <a:defRPr sz="1800" b="0">
                 <a:solidFill>
                   <a:srgbClr val="24324A"/>
@@ -9065,7 +8958,7 @@
           <p:cNvPr id="37" name="">
             <a:extLst xmlns:a="http://schemas.openxmlformats.org/drawingml/2006/main">
               <a:ext uri="{FF2B5EF4-FFF2-40B4-BE49-F238E27FC236}">
-                <a16:creationId xmlns:a16="http://schemas.microsoft.com/office/drawing/2014/main" id="{F62927B6-D60F-4201-B1B1-A68BB0300485}"/>
+                <a16:creationId xmlns:a16="http://schemas.microsoft.com/office/drawing/2014/main" id="{98BEAC82-B3FD-45C4-A0DA-C894B67D1ECA}"/>
               </a:ext>
             </a:extLst>
           </p:cNvPr>
@@ -9096,7 +8989,7 @@
           <p:cNvPr id="38" name="04 평가 지표 및 실험·통계 방법">
             <a:extLst xmlns:a="http://schemas.openxmlformats.org/drawingml/2006/main">
               <a:ext uri="{FF2B5EF4-FFF2-40B4-BE49-F238E27FC236}">
-                <a16:creationId xmlns:a16="http://schemas.microsoft.com/office/drawing/2014/main" id="{A9489E70-B301-48F2-B35A-F97337A797C9}"/>
+                <a16:creationId xmlns:a16="http://schemas.microsoft.com/office/drawing/2014/main" id="{1C2AC397-8D8E-4B7F-B11B-1C24458AF243}"/>
               </a:ext>
             </a:extLst>
           </p:cNvPr>
@@ -9226,7 +9119,6 @@
           </a:lstStyle>
           <a:p xmlns:a="http://schemas.openxmlformats.org/drawingml/2006/main">
             <a:pPr algn="l">
-              <a:buNone/>
               <a:defRPr sz="2400" b="0">
                 <a:solidFill>
                   <a:srgbClr val="FFFFFF"/>
@@ -9255,7 +9147,7 @@
           <p:cNvPr id="39" name="근거 충실도: 높을수록 검색 근거가 지지하는 답변 주장 비율이 크다. 답변 관련성: 높을수록 답변 기반 질문과 원질문">
             <a:extLst xmlns:a="http://schemas.openxmlformats.org/drawingml/2006/main">
               <a:ext uri="{FF2B5EF4-FFF2-40B4-BE49-F238E27FC236}">
-                <a16:creationId xmlns:a16="http://schemas.microsoft.com/office/drawing/2014/main" id="{8B9D0C8B-DE50-4B90-A878-60AFEB0DD8DA}"/>
+                <a16:creationId xmlns:a16="http://schemas.microsoft.com/office/drawing/2014/main" id="{5DA0CC21-F217-49D5-AE74-163C9AFD4D8D}"/>
               </a:ext>
             </a:extLst>
           </p:cNvPr>
@@ -9385,7 +9277,6 @@
           </a:lstStyle>
           <a:p xmlns:a="http://schemas.openxmlformats.org/drawingml/2006/main">
             <a:pPr algn="l">
-              <a:buNone/>
               <a:defRPr sz="1800" b="0">
                 <a:solidFill>
                   <a:srgbClr val="24324A"/>
@@ -9409,7 +9300,6 @@
           </a:p>
           <a:p xmlns:a="http://schemas.openxmlformats.org/drawingml/2006/main">
             <a:pPr algn="l">
-              <a:buNone/>
               <a:defRPr sz="1800" b="0">
                 <a:solidFill>
                   <a:srgbClr val="24324A"/>
@@ -9433,7 +9323,6 @@
           </a:p>
           <a:p xmlns:a="http://schemas.openxmlformats.org/drawingml/2006/main">
             <a:pPr algn="l">
-              <a:buNone/>
               <a:defRPr sz="1800" b="0">
                 <a:solidFill>
                   <a:srgbClr val="24324A"/>
@@ -9457,7 +9346,6 @@
           </a:p>
           <a:p xmlns:a="http://schemas.openxmlformats.org/drawingml/2006/main">
             <a:pPr algn="l">
-              <a:buNone/>
               <a:defRPr sz="1800" b="0">
                 <a:solidFill>
                   <a:srgbClr val="24324A"/>
@@ -9481,7 +9369,6 @@
           </a:p>
           <a:p xmlns:a="http://schemas.openxmlformats.org/drawingml/2006/main">
             <a:pPr algn="l">
-              <a:buNone/>
               <a:defRPr sz="1800" b="0">
                 <a:solidFill>
                   <a:srgbClr val="24324A"/>
@@ -9510,7 +9397,7 @@
           <p:cNvPr id="40" name="품질 관측값은 0~1이다. 관련성 +0.080은 ON−OFF 평균 차이 0.080점이다. SD는 질의별 분포의 표본표">
             <a:extLst xmlns:a="http://schemas.openxmlformats.org/drawingml/2006/main">
               <a:ext uri="{FF2B5EF4-FFF2-40B4-BE49-F238E27FC236}">
-                <a16:creationId xmlns:a16="http://schemas.microsoft.com/office/drawing/2014/main" id="{5C49F3F4-C621-4158-AA78-3690915A584D}"/>
+                <a16:creationId xmlns:a16="http://schemas.microsoft.com/office/drawing/2014/main" id="{C2E699DF-B4FA-48E9-971C-781E7B4B17C1}"/>
               </a:ext>
             </a:extLst>
           </p:cNvPr>
@@ -9640,7 +9527,6 @@
           </a:lstStyle>
           <a:p xmlns:a="http://schemas.openxmlformats.org/drawingml/2006/main">
             <a:pPr algn="l">
-              <a:buNone/>
               <a:defRPr sz="1800" b="0">
                 <a:solidFill>
                   <a:srgbClr val="24324A"/>
@@ -9664,7 +9550,6 @@
           </a:p>
           <a:p xmlns:a="http://schemas.openxmlformats.org/drawingml/2006/main">
             <a:pPr algn="l">
-              <a:buNone/>
               <a:defRPr sz="1800" b="0">
                 <a:solidFill>
                   <a:srgbClr val="24324A"/>
@@ -9688,7 +9573,6 @@
           </a:p>
           <a:p xmlns:a="http://schemas.openxmlformats.org/drawingml/2006/main">
             <a:pPr algn="l">
-              <a:buNone/>
               <a:defRPr sz="1800" b="0">
                 <a:solidFill>
                   <a:srgbClr val="24324A"/>
@@ -9717,7 +9601,7 @@
           <p:cNvPr id="41" name="평가 예시  ext_raptor_011, H0C0S0">
             <a:extLst xmlns:a="http://schemas.openxmlformats.org/drawingml/2006/main">
               <a:ext uri="{FF2B5EF4-FFF2-40B4-BE49-F238E27FC236}">
-                <a16:creationId xmlns:a16="http://schemas.microsoft.com/office/drawing/2014/main" id="{B0B826B3-3EF0-469E-B156-76B43250CC9C}"/>
+                <a16:creationId xmlns:a16="http://schemas.microsoft.com/office/drawing/2014/main" id="{E83DCFB9-23AE-4599-9D91-9CE6CD537763}"/>
               </a:ext>
             </a:extLst>
           </p:cNvPr>
@@ -9847,7 +9731,6 @@
           </a:lstStyle>
           <a:p xmlns:a="http://schemas.openxmlformats.org/drawingml/2006/main">
             <a:pPr algn="l">
-              <a:buNone/>
               <a:defRPr sz="1800" b="1">
                 <a:solidFill>
                   <a:srgbClr val="24324A"/>
@@ -9876,7 +9759,7 @@
           <p:cNvPr id="42" name="질문: Cinderella 사례의 정성 분석에서 RAPTOR의 tree-based retrieval이 DPR보다 주제">
             <a:extLst xmlns:a="http://schemas.openxmlformats.org/drawingml/2006/main">
               <a:ext uri="{FF2B5EF4-FFF2-40B4-BE49-F238E27FC236}">
-                <a16:creationId xmlns:a16="http://schemas.microsoft.com/office/drawing/2014/main" id="{87904639-62A9-4614-B066-40665DEA3566}"/>
+                <a16:creationId xmlns:a16="http://schemas.microsoft.com/office/drawing/2014/main" id="{8E532899-727A-4EAA-A060-E244AD849D8C}"/>
               </a:ext>
             </a:extLst>
           </p:cNvPr>
@@ -10006,7 +9889,6 @@
           </a:lstStyle>
           <a:p xmlns:a="http://schemas.openxmlformats.org/drawingml/2006/main">
             <a:pPr algn="l">
-              <a:buNone/>
               <a:defRPr sz="1800" b="0">
                 <a:solidFill>
                   <a:srgbClr val="24324A"/>
@@ -10030,7 +9912,6 @@
           </a:p>
           <a:p xmlns:a="http://schemas.openxmlformats.org/drawingml/2006/main">
             <a:pPr algn="l">
-              <a:buNone/>
               <a:defRPr sz="1800" b="0">
                 <a:solidFill>
                   <a:srgbClr val="24324A"/>
@@ -10059,7 +9940,7 @@
           <p:cNvPr id="43" name="검색 근거(PDF p.9): “By providing both the original text and higher-l">
             <a:extLst xmlns:a="http://schemas.openxmlformats.org/drawingml/2006/main">
               <a:ext uri="{FF2B5EF4-FFF2-40B4-BE49-F238E27FC236}">
-                <a16:creationId xmlns:a16="http://schemas.microsoft.com/office/drawing/2014/main" id="{3B679EB7-B7DC-4A60-A8B9-BA2E9FE038C2}"/>
+                <a16:creationId xmlns:a16="http://schemas.microsoft.com/office/drawing/2014/main" id="{E8B24F52-820F-438E-B9E2-E46199A906DB}"/>
               </a:ext>
             </a:extLst>
           </p:cNvPr>
@@ -10189,7 +10070,6 @@
           </a:lstStyle>
           <a:p xmlns:a="http://schemas.openxmlformats.org/drawingml/2006/main">
             <a:pPr algn="l">
-              <a:buNone/>
               <a:defRPr sz="1800" b="0">
                 <a:solidFill>
                   <a:srgbClr val="24324A"/>
@@ -10213,7 +10093,6 @@
           </a:p>
           <a:p xmlns:a="http://schemas.openxmlformats.org/drawingml/2006/main">
             <a:pPr algn="l">
-              <a:buNone/>
               <a:defRPr sz="1800" b="0">
                 <a:solidFill>
                   <a:srgbClr val="24324A"/>
@@ -10237,7 +10116,6 @@
           </a:p>
           <a:p xmlns:a="http://schemas.openxmlformats.org/drawingml/2006/main">
             <a:pPr algn="l">
-              <a:buNone/>
               <a:defRPr sz="1800" b="0">
                 <a:solidFill>
                   <a:srgbClr val="24324A"/>
@@ -10266,7 +10144,7 @@
           <p:cNvPr id="44" name="참조 답변 요지(PDF p.20): RAPTOR는 이야기의 주요 부분을, DPR은 이야기의 좁은 일부를 자세히 검색한">
             <a:extLst xmlns:a="http://schemas.openxmlformats.org/drawingml/2006/main">
               <a:ext uri="{FF2B5EF4-FFF2-40B4-BE49-F238E27FC236}">
-                <a16:creationId xmlns:a16="http://schemas.microsoft.com/office/drawing/2014/main" id="{DE0059C3-9038-4D15-AD7D-772E14CF57A8}"/>
+                <a16:creationId xmlns:a16="http://schemas.microsoft.com/office/drawing/2014/main" id="{5D70A1C8-A9DF-4E2F-B51C-31D407D194C7}"/>
               </a:ext>
             </a:extLst>
           </p:cNvPr>
@@ -10396,7 +10274,6 @@
           </a:lstStyle>
           <a:p xmlns:a="http://schemas.openxmlformats.org/drawingml/2006/main">
             <a:pPr algn="l">
-              <a:buNone/>
               <a:defRPr sz="1800" b="0">
                 <a:solidFill>
                   <a:srgbClr val="24324A"/>
@@ -10420,7 +10297,6 @@
           </a:p>
           <a:p xmlns:a="http://schemas.openxmlformats.org/drawingml/2006/main">
             <a:pPr algn="l">
-              <a:buNone/>
               <a:defRPr sz="1800" b="0">
                 <a:solidFill>
                   <a:srgbClr val="24324A"/>
@@ -10449,7 +10325,7 @@
           <p:cNvPr id="45" name="생성 답변 발췌: “질문의 요구사항에 따라 서로 다른 층위(layer)에서 노드를 선택할 수 있습니다.”">
             <a:extLst xmlns:a="http://schemas.openxmlformats.org/drawingml/2006/main">
               <a:ext uri="{FF2B5EF4-FFF2-40B4-BE49-F238E27FC236}">
-                <a16:creationId xmlns:a16="http://schemas.microsoft.com/office/drawing/2014/main" id="{9D73BECE-FD4F-491D-8ED6-DB58D43259BC}"/>
+                <a16:creationId xmlns:a16="http://schemas.microsoft.com/office/drawing/2014/main" id="{9C2C350A-3287-4938-9960-625A1AF9AC38}"/>
               </a:ext>
             </a:extLst>
           </p:cNvPr>
@@ -10579,7 +10455,6 @@
           </a:lstStyle>
           <a:p xmlns:a="http://schemas.openxmlformats.org/drawingml/2006/main">
             <a:pPr algn="l">
-              <a:buNone/>
               <a:defRPr sz="1800" b="0">
                 <a:solidFill>
                   <a:srgbClr val="24324A"/>
@@ -10603,7 +10478,6 @@
           </a:p>
           <a:p xmlns:a="http://schemas.openxmlformats.org/drawingml/2006/main">
             <a:pPr algn="l">
-              <a:buNone/>
               <a:defRPr sz="1800" b="0">
                 <a:solidFill>
                   <a:srgbClr val="24324A"/>
@@ -10632,7 +10506,7 @@
           <p:cNvPr id="46" name="충실도 1.000: 추출된 답변 주장을 검색 문맥이 모두 지지 관련성 0.937: 답변 기반 질문과 원질문의 평균 의">
             <a:extLst xmlns:a="http://schemas.openxmlformats.org/drawingml/2006/main">
               <a:ext uri="{FF2B5EF4-FFF2-40B4-BE49-F238E27FC236}">
-                <a16:creationId xmlns:a16="http://schemas.microsoft.com/office/drawing/2014/main" id="{10339883-484F-49D8-A7C8-F8777F63B8EF}"/>
+                <a16:creationId xmlns:a16="http://schemas.microsoft.com/office/drawing/2014/main" id="{492D705E-5CD0-4326-BF36-68E776982E4F}"/>
               </a:ext>
             </a:extLst>
           </p:cNvPr>
@@ -10762,7 +10636,6 @@
           </a:lstStyle>
           <a:p xmlns:a="http://schemas.openxmlformats.org/drawingml/2006/main">
             <a:pPr algn="l">
-              <a:buNone/>
               <a:defRPr sz="1800" b="0">
                 <a:solidFill>
                   <a:srgbClr val="24324A"/>
@@ -10786,7 +10659,6 @@
           </a:p>
           <a:p xmlns:a="http://schemas.openxmlformats.org/drawingml/2006/main">
             <a:pPr algn="l">
-              <a:buNone/>
               <a:defRPr sz="1800" b="0">
                 <a:solidFill>
                   <a:srgbClr val="24324A"/>
@@ -10815,7 +10687,7 @@
           <p:cNvPr id="47" name="평가: RAGAS 0.2.15[10]·gpt-4o·BGE-M3, 저장 답변 평가 S0 영어 / S1 한국어 번역 평가">
             <a:extLst xmlns:a="http://schemas.openxmlformats.org/drawingml/2006/main">
               <a:ext uri="{FF2B5EF4-FFF2-40B4-BE49-F238E27FC236}">
-                <a16:creationId xmlns:a16="http://schemas.microsoft.com/office/drawing/2014/main" id="{4C2F2814-28BF-4FAD-8E2F-938D04745754}"/>
+                <a16:creationId xmlns:a16="http://schemas.microsoft.com/office/drawing/2014/main" id="{C0CEBE01-FE8E-4ACB-A7DC-76BC2674A26F}"/>
               </a:ext>
             </a:extLst>
           </p:cNvPr>
@@ -10945,7 +10817,6 @@
           </a:lstStyle>
           <a:p xmlns:a="http://schemas.openxmlformats.org/drawingml/2006/main">
             <a:pPr algn="l">
-              <a:buNone/>
               <a:defRPr sz="1800" b="0">
                 <a:solidFill>
                   <a:srgbClr val="24324A"/>
@@ -10969,7 +10840,6 @@
           </a:p>
           <a:p xmlns:a="http://schemas.openxmlformats.org/drawingml/2006/main">
             <a:pPr algn="l">
-              <a:buNone/>
               <a:defRPr sz="1800" b="0">
                 <a:solidFill>
                   <a:srgbClr val="24324A"/>
@@ -10995,10 +10865,10 @@
       </p:sp>
       <p:sp>
         <p:nvSpPr>
-          <p:cNvPr id="48" name="반복측정 분산분석(ANOVA)·대응 t-검정·Holm, α=0.05 품질 S별 H×C / 문자·시간 H×C×S, SC">
+          <p:cNvPr id="48" name="반복측정 분산분석(ANOVA)·대응 t-검정, 양측 α=0.05 품질 S별 H×C / 문자·시간 H×C×S, SCD ">
             <a:extLst xmlns:a="http://schemas.openxmlformats.org/drawingml/2006/main">
               <a:ext uri="{FF2B5EF4-FFF2-40B4-BE49-F238E27FC236}">
-                <a16:creationId xmlns:a16="http://schemas.microsoft.com/office/drawing/2014/main" id="{734BF438-2E7D-4C31-86A6-7FCDA4E898BC}"/>
+                <a16:creationId xmlns:a16="http://schemas.microsoft.com/office/drawing/2014/main" id="{4779FA00-3925-420C-A2E6-5F22BD27451D}"/>
               </a:ext>
             </a:extLst>
           </p:cNvPr>
@@ -11128,7 +10998,6 @@
           </a:lstStyle>
           <a:p xmlns:a="http://schemas.openxmlformats.org/drawingml/2006/main">
             <a:pPr algn="l">
-              <a:buNone/>
               <a:defRPr sz="1800" b="1">
                 <a:solidFill>
                   <a:srgbClr val="24324A"/>
@@ -11147,12 +11016,11 @@
                 <a:ea typeface="Malgun Gothic"/>
                 <a:cs typeface="Malgun Gothic"/>
               </a:rPr>
-              <a:t>반복측정 분산분석(ANOVA)·대응 t-검정·Holm, α=0.05</a:t>
+              <a:t>반복측정 분산분석(ANOVA)·대응 t-검정, 양측 α=0.05</a:t>
             </a:r>
           </a:p>
           <a:p xmlns:a="http://schemas.openxmlformats.org/drawingml/2006/main">
             <a:pPr algn="l">
-              <a:buNone/>
               <a:defRPr sz="1800" b="1">
                 <a:solidFill>
                   <a:srgbClr val="24324A"/>
@@ -11181,7 +11049,7 @@
           <p:cNvPr id="49" name="">
             <a:extLst xmlns:a="http://schemas.openxmlformats.org/drawingml/2006/main">
               <a:ext uri="{FF2B5EF4-FFF2-40B4-BE49-F238E27FC236}">
-                <a16:creationId xmlns:a16="http://schemas.microsoft.com/office/drawing/2014/main" id="{E4F4DA52-820D-49E7-B186-4E0A7462F275}"/>
+                <a16:creationId xmlns:a16="http://schemas.microsoft.com/office/drawing/2014/main" id="{C0DECB3A-6188-4E31-BD60-0B3F9566883B}"/>
               </a:ext>
             </a:extLst>
           </p:cNvPr>
@@ -11212,7 +11080,7 @@
           <p:cNvPr id="50" name="05 조합별 결과와 통계 검정">
             <a:extLst xmlns:a="http://schemas.openxmlformats.org/drawingml/2006/main">
               <a:ext uri="{FF2B5EF4-FFF2-40B4-BE49-F238E27FC236}">
-                <a16:creationId xmlns:a16="http://schemas.microsoft.com/office/drawing/2014/main" id="{C76AF8FD-FE50-4762-BE8A-5D7CBBD1C539}"/>
+                <a16:creationId xmlns:a16="http://schemas.microsoft.com/office/drawing/2014/main" id="{10E30CC0-BFAE-4E54-B4F7-8FEA81626F19}"/>
               </a:ext>
             </a:extLst>
           </p:cNvPr>
@@ -11342,7 +11210,6 @@
           </a:lstStyle>
           <a:p xmlns:a="http://schemas.openxmlformats.org/drawingml/2006/main">
             <a:pPr algn="l">
-              <a:buNone/>
               <a:defRPr sz="2400" b="0">
                 <a:solidFill>
                   <a:srgbClr val="FFFFFF"/>
@@ -11371,7 +11238,7 @@
           <p:cNvPr id="51" name="HyDE·CAD·SCD 8조합의 품질·한국어 비율·시간 평균(SD)">
             <a:extLst xmlns:a="http://schemas.openxmlformats.org/drawingml/2006/main">
               <a:ext uri="{FF2B5EF4-FFF2-40B4-BE49-F238E27FC236}">
-                <a16:creationId xmlns:a16="http://schemas.microsoft.com/office/drawing/2014/main" id="{CB9973BD-C0E3-46E0-BB5C-726B7151E099}"/>
+                <a16:creationId xmlns:a16="http://schemas.microsoft.com/office/drawing/2014/main" id="{655E4F36-D737-408F-9826-78E163897E75}"/>
               </a:ext>
             </a:extLst>
           </p:cNvPr>
@@ -11501,7 +11368,6 @@
           </a:lstStyle>
           <a:p xmlns:a="http://schemas.openxmlformats.org/drawingml/2006/main">
             <a:pPr algn="l">
-              <a:buNone/>
               <a:defRPr sz="1800" b="1">
                 <a:solidFill>
                   <a:srgbClr val="24324A"/>
@@ -11530,7 +11396,7 @@
           <p:cNvPr id="52" name="">
             <a:extLst xmlns:a="http://schemas.openxmlformats.org/drawingml/2006/main">
               <a:ext uri="{FF2B5EF4-FFF2-40B4-BE49-F238E27FC236}">
-                <a16:creationId xmlns:a16="http://schemas.microsoft.com/office/drawing/2014/main" id="{5E562212-B51C-472A-92F9-3520A6B1D575}"/>
+                <a16:creationId xmlns:a16="http://schemas.microsoft.com/office/drawing/2014/main" id="{DAD4AA4A-2792-42EE-A0DE-B53ABDFF1205}"/>
               </a:ext>
             </a:extLst>
           </p:cNvPr>
@@ -11562,9 +11428,7 @@
                     </a:bodyPr>
                     <a:lstStyle/>
                     <a:p>
-                      <a:pPr algn="ctr">
-                        <a:buNone/>
-                      </a:pPr>
+                      <a:pPr algn="ctr"/>
                       <a:r>
                         <a:rPr sz="1800" b="1">
                           <a:solidFill>
@@ -11615,9 +11479,7 @@
                     </a:bodyPr>
                     <a:lstStyle/>
                     <a:p>
-                      <a:pPr algn="ctr">
-                        <a:buNone/>
-                      </a:pPr>
+                      <a:pPr algn="ctr"/>
                       <a:r>
                         <a:rPr sz="1800" b="1">
                           <a:solidFill>
@@ -11631,9 +11493,7 @@
                       </a:r>
                     </a:p>
                     <a:p>
-                      <a:pPr algn="ctr">
-                        <a:buNone/>
-                      </a:pPr>
+                      <a:pPr algn="ctr"/>
                       <a:r>
                         <a:rPr sz="1800" b="1">
                           <a:solidFill>
@@ -11678,9 +11538,7 @@
                     </a:bodyPr>
                     <a:lstStyle/>
                     <a:p>
-                      <a:pPr algn="ctr">
-                        <a:buNone/>
-                      </a:pPr>
+                      <a:pPr algn="ctr"/>
                       <a:r>
                         <a:rPr sz="1800" b="1">
                           <a:solidFill>
@@ -11694,9 +11552,7 @@
                       </a:r>
                     </a:p>
                     <a:p>
-                      <a:pPr algn="ctr">
-                        <a:buNone/>
-                      </a:pPr>
+                      <a:pPr algn="ctr"/>
                       <a:r>
                         <a:rPr sz="1800" b="1">
                           <a:solidFill>
@@ -11741,9 +11597,7 @@
                     </a:bodyPr>
                     <a:lstStyle/>
                     <a:p>
-                      <a:pPr algn="ctr">
-                        <a:buNone/>
-                      </a:pPr>
+                      <a:pPr algn="ctr"/>
                       <a:r>
                         <a:rPr sz="1800" b="1">
                           <a:solidFill>
@@ -11757,9 +11611,7 @@
                       </a:r>
                     </a:p>
                     <a:p>
-                      <a:pPr algn="ctr">
-                        <a:buNone/>
-                      </a:pPr>
+                      <a:pPr algn="ctr"/>
                       <a:r>
                         <a:rPr sz="1800" b="1">
                           <a:solidFill>
@@ -11804,9 +11656,7 @@
                     </a:bodyPr>
                     <a:lstStyle/>
                     <a:p>
-                      <a:pPr algn="ctr">
-                        <a:buNone/>
-                      </a:pPr>
+                      <a:pPr algn="ctr"/>
                       <a:r>
                         <a:rPr sz="1800" b="1">
                           <a:solidFill>
@@ -11820,9 +11670,7 @@
                       </a:r>
                     </a:p>
                     <a:p>
-                      <a:pPr algn="ctr">
-                        <a:buNone/>
-                      </a:pPr>
+                      <a:pPr algn="ctr"/>
                       <a:r>
                         <a:rPr sz="1800" b="1">
                           <a:solidFill>
@@ -11867,9 +11715,7 @@
                     </a:bodyPr>
                     <a:lstStyle/>
                     <a:p>
-                      <a:pPr algn="ctr">
-                        <a:buNone/>
-                      </a:pPr>
+                      <a:pPr algn="ctr"/>
                       <a:r>
                         <a:rPr sz="1800" b="1">
                           <a:solidFill>
@@ -11883,9 +11729,7 @@
                       </a:r>
                     </a:p>
                     <a:p>
-                      <a:pPr algn="ctr">
-                        <a:buNone/>
-                      </a:pPr>
+                      <a:pPr algn="ctr"/>
                       <a:r>
                         <a:rPr sz="1800" b="1">
                           <a:solidFill>
@@ -11930,9 +11774,7 @@
                     </a:bodyPr>
                     <a:lstStyle/>
                     <a:p>
-                      <a:pPr algn="ctr">
-                        <a:buNone/>
-                      </a:pPr>
+                      <a:pPr algn="ctr"/>
                       <a:r>
                         <a:rPr sz="1800" b="1">
                           <a:solidFill>
@@ -11946,9 +11788,7 @@
                       </a:r>
                     </a:p>
                     <a:p>
-                      <a:pPr algn="ctr">
-                        <a:buNone/>
-                      </a:pPr>
+                      <a:pPr algn="ctr"/>
                       <a:r>
                         <a:rPr sz="1800" b="1">
                           <a:solidFill>
@@ -11995,9 +11835,7 @@
                     </a:bodyPr>
                     <a:lstStyle/>
                     <a:p>
-                      <a:pPr algn="ctr">
-                        <a:buNone/>
-                      </a:pPr>
+                      <a:pPr algn="ctr"/>
                       <a:r>
                         <a:rPr sz="1800" b="0">
                           <a:solidFill>
@@ -12042,9 +11880,7 @@
                     </a:bodyPr>
                     <a:lstStyle/>
                     <a:p>
-                      <a:pPr algn="r">
-                        <a:buNone/>
-                      </a:pPr>
+                      <a:pPr algn="r"/>
                       <a:r>
                         <a:rPr sz="1800" b="0">
                           <a:solidFill>
@@ -12058,9 +11894,7 @@
                       </a:r>
                     </a:p>
                     <a:p>
-                      <a:pPr algn="r">
-                        <a:buNone/>
-                      </a:pPr>
+                      <a:pPr algn="r"/>
                       <a:r>
                         <a:rPr sz="1800" b="0">
                           <a:solidFill>
@@ -12099,9 +11933,7 @@
                     </a:bodyPr>
                     <a:lstStyle/>
                     <a:p>
-                      <a:pPr algn="r">
-                        <a:buNone/>
-                      </a:pPr>
+                      <a:pPr algn="r"/>
                       <a:r>
                         <a:rPr sz="1800" b="0">
                           <a:solidFill>
@@ -12115,9 +11947,7 @@
                       </a:r>
                     </a:p>
                     <a:p>
-                      <a:pPr algn="r">
-                        <a:buNone/>
-                      </a:pPr>
+                      <a:pPr algn="r"/>
                       <a:r>
                         <a:rPr sz="1800" b="0">
                           <a:solidFill>
@@ -12156,9 +11986,7 @@
                     </a:bodyPr>
                     <a:lstStyle/>
                     <a:p>
-                      <a:pPr algn="r">
-                        <a:buNone/>
-                      </a:pPr>
+                      <a:pPr algn="r"/>
                       <a:r>
                         <a:rPr sz="1800" b="0">
                           <a:solidFill>
@@ -12172,9 +12000,7 @@
                       </a:r>
                     </a:p>
                     <a:p>
-                      <a:pPr algn="r">
-                        <a:buNone/>
-                      </a:pPr>
+                      <a:pPr algn="r"/>
                       <a:r>
                         <a:rPr sz="1800" b="0">
                           <a:solidFill>
@@ -12213,9 +12039,7 @@
                     </a:bodyPr>
                     <a:lstStyle/>
                     <a:p>
-                      <a:pPr algn="r">
-                        <a:buNone/>
-                      </a:pPr>
+                      <a:pPr algn="r"/>
                       <a:r>
                         <a:rPr sz="1800" b="0">
                           <a:solidFill>
@@ -12229,9 +12053,7 @@
                       </a:r>
                     </a:p>
                     <a:p>
-                      <a:pPr algn="r">
-                        <a:buNone/>
-                      </a:pPr>
+                      <a:pPr algn="r"/>
                       <a:r>
                         <a:rPr sz="1800" b="0">
                           <a:solidFill>
@@ -12270,9 +12092,7 @@
                     </a:bodyPr>
                     <a:lstStyle/>
                     <a:p>
-                      <a:pPr algn="r">
-                        <a:buNone/>
-                      </a:pPr>
+                      <a:pPr algn="r"/>
                       <a:r>
                         <a:rPr sz="1800" b="0">
                           <a:solidFill>
@@ -12286,9 +12106,7 @@
                       </a:r>
                     </a:p>
                     <a:p>
-                      <a:pPr algn="r">
-                        <a:buNone/>
-                      </a:pPr>
+                      <a:pPr algn="r"/>
                       <a:r>
                         <a:rPr sz="1800" b="0">
                           <a:solidFill>
@@ -12327,9 +12145,7 @@
                     </a:bodyPr>
                     <a:lstStyle/>
                     <a:p>
-                      <a:pPr algn="r">
-                        <a:buNone/>
-                      </a:pPr>
+                      <a:pPr algn="r"/>
                       <a:r>
                         <a:rPr sz="1800" b="0">
                           <a:solidFill>
@@ -12343,9 +12159,7 @@
                       </a:r>
                     </a:p>
                     <a:p>
-                      <a:pPr algn="r">
-                        <a:buNone/>
-                      </a:pPr>
+                      <a:pPr algn="r"/>
                       <a:r>
                         <a:rPr sz="1800" b="0">
                           <a:solidFill>
@@ -12386,9 +12200,7 @@
                     </a:bodyPr>
                     <a:lstStyle/>
                     <a:p>
-                      <a:pPr algn="ctr">
-                        <a:buNone/>
-                      </a:pPr>
+                      <a:pPr algn="ctr"/>
                       <a:r>
                         <a:rPr sz="1800" b="0">
                           <a:solidFill>
@@ -12433,9 +12245,7 @@
                     </a:bodyPr>
                     <a:lstStyle/>
                     <a:p>
-                      <a:pPr algn="r">
-                        <a:buNone/>
-                      </a:pPr>
+                      <a:pPr algn="r"/>
                       <a:r>
                         <a:rPr sz="1800" b="0">
                           <a:solidFill>
@@ -12449,9 +12259,7 @@
                       </a:r>
                     </a:p>
                     <a:p>
-                      <a:pPr algn="r">
-                        <a:buNone/>
-                      </a:pPr>
+                      <a:pPr algn="r"/>
                       <a:r>
                         <a:rPr sz="1800" b="0">
                           <a:solidFill>
@@ -12490,9 +12298,7 @@
                     </a:bodyPr>
                     <a:lstStyle/>
                     <a:p>
-                      <a:pPr algn="r">
-                        <a:buNone/>
-                      </a:pPr>
+                      <a:pPr algn="r"/>
                       <a:r>
                         <a:rPr sz="1800" b="0">
                           <a:solidFill>
@@ -12506,9 +12312,7 @@
                       </a:r>
                     </a:p>
                     <a:p>
-                      <a:pPr algn="r">
-                        <a:buNone/>
-                      </a:pPr>
+                      <a:pPr algn="r"/>
                       <a:r>
                         <a:rPr sz="1800" b="0">
                           <a:solidFill>
@@ -12547,9 +12351,7 @@
                     </a:bodyPr>
                     <a:lstStyle/>
                     <a:p>
-                      <a:pPr algn="r">
-                        <a:buNone/>
-                      </a:pPr>
+                      <a:pPr algn="r"/>
                       <a:r>
                         <a:rPr sz="1800" b="0">
                           <a:solidFill>
@@ -12563,9 +12365,7 @@
                       </a:r>
                     </a:p>
                     <a:p>
-                      <a:pPr algn="r">
-                        <a:buNone/>
-                      </a:pPr>
+                      <a:pPr algn="r"/>
                       <a:r>
                         <a:rPr sz="1800" b="0">
                           <a:solidFill>
@@ -12604,9 +12404,7 @@
                     </a:bodyPr>
                     <a:lstStyle/>
                     <a:p>
-                      <a:pPr algn="r">
-                        <a:buNone/>
-                      </a:pPr>
+                      <a:pPr algn="r"/>
                       <a:r>
                         <a:rPr sz="1800" b="0">
                           <a:solidFill>
@@ -12620,9 +12418,7 @@
                       </a:r>
                     </a:p>
                     <a:p>
-                      <a:pPr algn="r">
-                        <a:buNone/>
-                      </a:pPr>
+                      <a:pPr algn="r"/>
                       <a:r>
                         <a:rPr sz="1800" b="0">
                           <a:solidFill>
@@ -12661,9 +12457,7 @@
                     </a:bodyPr>
                     <a:lstStyle/>
                     <a:p>
-                      <a:pPr algn="r">
-                        <a:buNone/>
-                      </a:pPr>
+                      <a:pPr algn="r"/>
                       <a:r>
                         <a:rPr sz="1800" b="0">
                           <a:solidFill>
@@ -12677,9 +12471,7 @@
                       </a:r>
                     </a:p>
                     <a:p>
-                      <a:pPr algn="r">
-                        <a:buNone/>
-                      </a:pPr>
+                      <a:pPr algn="r"/>
                       <a:r>
                         <a:rPr sz="1800" b="0">
                           <a:solidFill>
@@ -12718,9 +12510,7 @@
                     </a:bodyPr>
                     <a:lstStyle/>
                     <a:p>
-                      <a:pPr algn="r">
-                        <a:buNone/>
-                      </a:pPr>
+                      <a:pPr algn="r"/>
                       <a:r>
                         <a:rPr sz="1800" b="0">
                           <a:solidFill>
@@ -12734,9 +12524,7 @@
                       </a:r>
                     </a:p>
                     <a:p>
-                      <a:pPr algn="r">
-                        <a:buNone/>
-                      </a:pPr>
+                      <a:pPr algn="r"/>
                       <a:r>
                         <a:rPr sz="1800" b="0">
                           <a:solidFill>
@@ -12777,9 +12565,7 @@
                     </a:bodyPr>
                     <a:lstStyle/>
                     <a:p>
-                      <a:pPr algn="ctr">
-                        <a:buNone/>
-                      </a:pPr>
+                      <a:pPr algn="ctr"/>
                       <a:r>
                         <a:rPr sz="1800" b="0">
                           <a:solidFill>
@@ -12824,9 +12610,7 @@
                     </a:bodyPr>
                     <a:lstStyle/>
                     <a:p>
-                      <a:pPr algn="r">
-                        <a:buNone/>
-                      </a:pPr>
+                      <a:pPr algn="r"/>
                       <a:r>
                         <a:rPr sz="1800" b="0">
                           <a:solidFill>
@@ -12840,9 +12624,7 @@
                       </a:r>
                     </a:p>
                     <a:p>
-                      <a:pPr algn="r">
-                        <a:buNone/>
-                      </a:pPr>
+                      <a:pPr algn="r"/>
                       <a:r>
                         <a:rPr sz="1800" b="0">
                           <a:solidFill>
@@ -12881,9 +12663,7 @@
                     </a:bodyPr>
                     <a:lstStyle/>
                     <a:p>
-                      <a:pPr algn="r">
-                        <a:buNone/>
-                      </a:pPr>
+                      <a:pPr algn="r"/>
                       <a:r>
                         <a:rPr sz="1800" b="0">
                           <a:solidFill>
@@ -12897,9 +12677,7 @@
                       </a:r>
                     </a:p>
                     <a:p>
-                      <a:pPr algn="r">
-                        <a:buNone/>
-                      </a:pPr>
+                      <a:pPr algn="r"/>
                       <a:r>
                         <a:rPr sz="1800" b="0">
                           <a:solidFill>
@@ -12938,9 +12716,7 @@
                     </a:bodyPr>
                     <a:lstStyle/>
                     <a:p>
-                      <a:pPr algn="r">
-                        <a:buNone/>
-                      </a:pPr>
+                      <a:pPr algn="r"/>
                       <a:r>
                         <a:rPr sz="1800" b="0">
                           <a:solidFill>
@@ -12954,9 +12730,7 @@
                       </a:r>
                     </a:p>
                     <a:p>
-                      <a:pPr algn="r">
-                        <a:buNone/>
-                      </a:pPr>
+                      <a:pPr algn="r"/>
                       <a:r>
                         <a:rPr sz="1800" b="0">
                           <a:solidFill>
@@ -12995,9 +12769,7 @@
                     </a:bodyPr>
                     <a:lstStyle/>
                     <a:p>
-                      <a:pPr algn="r">
-                        <a:buNone/>
-                      </a:pPr>
+                      <a:pPr algn="r"/>
                       <a:r>
                         <a:rPr sz="1800" b="0">
                           <a:solidFill>
@@ -13011,9 +12783,7 @@
                       </a:r>
                     </a:p>
                     <a:p>
-                      <a:pPr algn="r">
-                        <a:buNone/>
-                      </a:pPr>
+                      <a:pPr algn="r"/>
                       <a:r>
                         <a:rPr sz="1800" b="0">
                           <a:solidFill>
@@ -13052,9 +12822,7 @@
                     </a:bodyPr>
                     <a:lstStyle/>
                     <a:p>
-                      <a:pPr algn="r">
-                        <a:buNone/>
-                      </a:pPr>
+                      <a:pPr algn="r"/>
                       <a:r>
                         <a:rPr sz="1800" b="0">
                           <a:solidFill>
@@ -13068,9 +12836,7 @@
                       </a:r>
                     </a:p>
                     <a:p>
-                      <a:pPr algn="r">
-                        <a:buNone/>
-                      </a:pPr>
+                      <a:pPr algn="r"/>
                       <a:r>
                         <a:rPr sz="1800" b="0">
                           <a:solidFill>
@@ -13109,9 +12875,7 @@
                     </a:bodyPr>
                     <a:lstStyle/>
                     <a:p>
-                      <a:pPr algn="r">
-                        <a:buNone/>
-                      </a:pPr>
+                      <a:pPr algn="r"/>
                       <a:r>
                         <a:rPr sz="1800" b="0">
                           <a:solidFill>
@@ -13125,9 +12889,7 @@
                       </a:r>
                     </a:p>
                     <a:p>
-                      <a:pPr algn="r">
-                        <a:buNone/>
-                      </a:pPr>
+                      <a:pPr algn="r"/>
                       <a:r>
                         <a:rPr sz="1800" b="0">
                           <a:solidFill>
@@ -13168,9 +12930,7 @@
                     </a:bodyPr>
                     <a:lstStyle/>
                     <a:p>
-                      <a:pPr algn="ctr">
-                        <a:buNone/>
-                      </a:pPr>
+                      <a:pPr algn="ctr"/>
                       <a:r>
                         <a:rPr sz="1800" b="0">
                           <a:solidFill>
@@ -13215,9 +12975,7 @@
                     </a:bodyPr>
                     <a:lstStyle/>
                     <a:p>
-                      <a:pPr algn="r">
-                        <a:buNone/>
-                      </a:pPr>
+                      <a:pPr algn="r"/>
                       <a:r>
                         <a:rPr sz="1800" b="0">
                           <a:solidFill>
@@ -13231,9 +12989,7 @@
                       </a:r>
                     </a:p>
                     <a:p>
-                      <a:pPr algn="r">
-                        <a:buNone/>
-                      </a:pPr>
+                      <a:pPr algn="r"/>
                       <a:r>
                         <a:rPr sz="1800" b="0">
                           <a:solidFill>
@@ -13272,9 +13028,7 @@
                     </a:bodyPr>
                     <a:lstStyle/>
                     <a:p>
-                      <a:pPr algn="r">
-                        <a:buNone/>
-                      </a:pPr>
+                      <a:pPr algn="r"/>
                       <a:r>
                         <a:rPr sz="1800" b="0">
                           <a:solidFill>
@@ -13288,9 +13042,7 @@
                       </a:r>
                     </a:p>
                     <a:p>
-                      <a:pPr algn="r">
-                        <a:buNone/>
-                      </a:pPr>
+                      <a:pPr algn="r"/>
                       <a:r>
                         <a:rPr sz="1800" b="0">
                           <a:solidFill>
@@ -13329,9 +13081,7 @@
                     </a:bodyPr>
                     <a:lstStyle/>
                     <a:p>
-                      <a:pPr algn="r">
-                        <a:buNone/>
-                      </a:pPr>
+                      <a:pPr algn="r"/>
                       <a:r>
                         <a:rPr sz="1800" b="0">
                           <a:solidFill>
@@ -13345,9 +13095,7 @@
                       </a:r>
                     </a:p>
                     <a:p>
-                      <a:pPr algn="r">
-                        <a:buNone/>
-                      </a:pPr>
+                      <a:pPr algn="r"/>
                       <a:r>
                         <a:rPr sz="1800" b="0">
                           <a:solidFill>
@@ -13386,9 +13134,7 @@
                     </a:bodyPr>
                     <a:lstStyle/>
                     <a:p>
-                      <a:pPr algn="r">
-                        <a:buNone/>
-                      </a:pPr>
+                      <a:pPr algn="r"/>
                       <a:r>
                         <a:rPr sz="1800" b="0">
                           <a:solidFill>
@@ -13402,9 +13148,7 @@
                       </a:r>
                     </a:p>
                     <a:p>
-                      <a:pPr algn="r">
-                        <a:buNone/>
-                      </a:pPr>
+                      <a:pPr algn="r"/>
                       <a:r>
                         <a:rPr sz="1800" b="0">
                           <a:solidFill>
@@ -13443,9 +13187,7 @@
                     </a:bodyPr>
                     <a:lstStyle/>
                     <a:p>
-                      <a:pPr algn="r">
-                        <a:buNone/>
-                      </a:pPr>
+                      <a:pPr algn="r"/>
                       <a:r>
                         <a:rPr sz="1800" b="0">
                           <a:solidFill>
@@ -13459,9 +13201,7 @@
                       </a:r>
                     </a:p>
                     <a:p>
-                      <a:pPr algn="r">
-                        <a:buNone/>
-                      </a:pPr>
+                      <a:pPr algn="r"/>
                       <a:r>
                         <a:rPr sz="1800" b="0">
                           <a:solidFill>
@@ -13500,9 +13240,7 @@
                     </a:bodyPr>
                     <a:lstStyle/>
                     <a:p>
-                      <a:pPr algn="r">
-                        <a:buNone/>
-                      </a:pPr>
+                      <a:pPr algn="r"/>
                       <a:r>
                         <a:rPr sz="1800" b="0">
                           <a:solidFill>
@@ -13516,9 +13254,7 @@
                       </a:r>
                     </a:p>
                     <a:p>
-                      <a:pPr algn="r">
-                        <a:buNone/>
-                      </a:pPr>
+                      <a:pPr algn="r"/>
                       <a:r>
                         <a:rPr sz="1800" b="0">
                           <a:solidFill>
@@ -13559,9 +13295,7 @@
                     </a:bodyPr>
                     <a:lstStyle/>
                     <a:p>
-                      <a:pPr algn="ctr">
-                        <a:buNone/>
-                      </a:pPr>
+                      <a:pPr algn="ctr"/>
                       <a:r>
                         <a:rPr sz="1800" b="0">
                           <a:solidFill>
@@ -13606,9 +13340,7 @@
                     </a:bodyPr>
                     <a:lstStyle/>
                     <a:p>
-                      <a:pPr algn="r">
-                        <a:buNone/>
-                      </a:pPr>
+                      <a:pPr algn="r"/>
                       <a:r>
                         <a:rPr sz="1800" b="0">
                           <a:solidFill>
@@ -13622,9 +13354,7 @@
                       </a:r>
                     </a:p>
                     <a:p>
-                      <a:pPr algn="r">
-                        <a:buNone/>
-                      </a:pPr>
+                      <a:pPr algn="r"/>
                       <a:r>
                         <a:rPr sz="1800" b="0">
                           <a:solidFill>
@@ -13663,9 +13393,7 @@
                     </a:bodyPr>
                     <a:lstStyle/>
                     <a:p>
-                      <a:pPr algn="r">
-                        <a:buNone/>
-                      </a:pPr>
+                      <a:pPr algn="r"/>
                       <a:r>
                         <a:rPr sz="1800" b="0">
                           <a:solidFill>
@@ -13679,9 +13407,7 @@
                       </a:r>
                     </a:p>
                     <a:p>
-                      <a:pPr algn="r">
-                        <a:buNone/>
-                      </a:pPr>
+                      <a:pPr algn="r"/>
                       <a:r>
                         <a:rPr sz="1800" b="0">
                           <a:solidFill>
@@ -13720,9 +13446,7 @@
                     </a:bodyPr>
                     <a:lstStyle/>
                     <a:p>
-                      <a:pPr algn="r">
-                        <a:buNone/>
-                      </a:pPr>
+                      <a:pPr algn="r"/>
                       <a:r>
                         <a:rPr sz="1800" b="0">
                           <a:solidFill>
@@ -13736,9 +13460,7 @@
                       </a:r>
                     </a:p>
                     <a:p>
-                      <a:pPr algn="r">
-                        <a:buNone/>
-                      </a:pPr>
+                      <a:pPr algn="r"/>
                       <a:r>
                         <a:rPr sz="1800" b="0">
                           <a:solidFill>
@@ -13777,9 +13499,7 @@
                     </a:bodyPr>
                     <a:lstStyle/>
                     <a:p>
-                      <a:pPr algn="r">
-                        <a:buNone/>
-                      </a:pPr>
+                      <a:pPr algn="r"/>
                       <a:r>
                         <a:rPr sz="1800" b="0">
                           <a:solidFill>
@@ -13793,9 +13513,7 @@
                       </a:r>
                     </a:p>
                     <a:p>
-                      <a:pPr algn="r">
-                        <a:buNone/>
-                      </a:pPr>
+                      <a:pPr algn="r"/>
                       <a:r>
                         <a:rPr sz="1800" b="0">
                           <a:solidFill>
@@ -13834,9 +13552,7 @@
                     </a:bodyPr>
                     <a:lstStyle/>
                     <a:p>
-                      <a:pPr algn="r">
-                        <a:buNone/>
-                      </a:pPr>
+                      <a:pPr algn="r"/>
                       <a:r>
                         <a:rPr sz="1800" b="0">
                           <a:solidFill>
@@ -13850,9 +13566,7 @@
                       </a:r>
                     </a:p>
                     <a:p>
-                      <a:pPr algn="r">
-                        <a:buNone/>
-                      </a:pPr>
+                      <a:pPr algn="r"/>
                       <a:r>
                         <a:rPr sz="1800" b="0">
                           <a:solidFill>
@@ -13891,9 +13605,7 @@
                     </a:bodyPr>
                     <a:lstStyle/>
                     <a:p>
-                      <a:pPr algn="r">
-                        <a:buNone/>
-                      </a:pPr>
+                      <a:pPr algn="r"/>
                       <a:r>
                         <a:rPr sz="1800" b="0">
                           <a:solidFill>
@@ -13907,9 +13619,7 @@
                       </a:r>
                     </a:p>
                     <a:p>
-                      <a:pPr algn="r">
-                        <a:buNone/>
-                      </a:pPr>
+                      <a:pPr algn="r"/>
                       <a:r>
                         <a:rPr sz="1800" b="0">
                           <a:solidFill>
@@ -13950,9 +13660,7 @@
                     </a:bodyPr>
                     <a:lstStyle/>
                     <a:p>
-                      <a:pPr algn="ctr">
-                        <a:buNone/>
-                      </a:pPr>
+                      <a:pPr algn="ctr"/>
                       <a:r>
                         <a:rPr sz="1800" b="0">
                           <a:solidFill>
@@ -13997,9 +13705,7 @@
                     </a:bodyPr>
                     <a:lstStyle/>
                     <a:p>
-                      <a:pPr algn="r">
-                        <a:buNone/>
-                      </a:pPr>
+                      <a:pPr algn="r"/>
                       <a:r>
                         <a:rPr sz="1800" b="0">
                           <a:solidFill>
@@ -14013,9 +13719,7 @@
                       </a:r>
                     </a:p>
                     <a:p>
-                      <a:pPr algn="r">
-                        <a:buNone/>
-                      </a:pPr>
+                      <a:pPr algn="r"/>
                       <a:r>
                         <a:rPr sz="1800" b="0">
                           <a:solidFill>
@@ -14054,9 +13758,7 @@
                     </a:bodyPr>
                     <a:lstStyle/>
                     <a:p>
-                      <a:pPr algn="r">
-                        <a:buNone/>
-                      </a:pPr>
+                      <a:pPr algn="r"/>
                       <a:r>
                         <a:rPr sz="1800" b="0">
                           <a:solidFill>
@@ -14070,9 +13772,7 @@
                       </a:r>
                     </a:p>
                     <a:p>
-                      <a:pPr algn="r">
-                        <a:buNone/>
-                      </a:pPr>
+                      <a:pPr algn="r"/>
                       <a:r>
                         <a:rPr sz="1800" b="0">
                           <a:solidFill>
@@ -14111,9 +13811,7 @@
                     </a:bodyPr>
                     <a:lstStyle/>
                     <a:p>
-                      <a:pPr algn="r">
-                        <a:buNone/>
-                      </a:pPr>
+                      <a:pPr algn="r"/>
                       <a:r>
                         <a:rPr sz="1800" b="0">
                           <a:solidFill>
@@ -14127,9 +13825,7 @@
                       </a:r>
                     </a:p>
                     <a:p>
-                      <a:pPr algn="r">
-                        <a:buNone/>
-                      </a:pPr>
+                      <a:pPr algn="r"/>
                       <a:r>
                         <a:rPr sz="1800" b="0">
                           <a:solidFill>
@@ -14168,9 +13864,7 @@
                     </a:bodyPr>
                     <a:lstStyle/>
                     <a:p>
-                      <a:pPr algn="r">
-                        <a:buNone/>
-                      </a:pPr>
+                      <a:pPr algn="r"/>
                       <a:r>
                         <a:rPr sz="1800" b="0">
                           <a:solidFill>
@@ -14184,9 +13878,7 @@
                       </a:r>
                     </a:p>
                     <a:p>
-                      <a:pPr algn="r">
-                        <a:buNone/>
-                      </a:pPr>
+                      <a:pPr algn="r"/>
                       <a:r>
                         <a:rPr sz="1800" b="0">
                           <a:solidFill>
@@ -14225,9 +13917,7 @@
                     </a:bodyPr>
                     <a:lstStyle/>
                     <a:p>
-                      <a:pPr algn="r">
-                        <a:buNone/>
-                      </a:pPr>
+                      <a:pPr algn="r"/>
                       <a:r>
                         <a:rPr sz="1800" b="0">
                           <a:solidFill>
@@ -14241,9 +13931,7 @@
                       </a:r>
                     </a:p>
                     <a:p>
-                      <a:pPr algn="r">
-                        <a:buNone/>
-                      </a:pPr>
+                      <a:pPr algn="r"/>
                       <a:r>
                         <a:rPr sz="1800" b="0">
                           <a:solidFill>
@@ -14282,9 +13970,7 @@
                     </a:bodyPr>
                     <a:lstStyle/>
                     <a:p>
-                      <a:pPr algn="r">
-                        <a:buNone/>
-                      </a:pPr>
+                      <a:pPr algn="r"/>
                       <a:r>
                         <a:rPr sz="1800" b="0">
                           <a:solidFill>
@@ -14298,9 +13984,7 @@
                       </a:r>
                     </a:p>
                     <a:p>
-                      <a:pPr algn="r">
-                        <a:buNone/>
-                      </a:pPr>
+                      <a:pPr algn="r"/>
                       <a:r>
                         <a:rPr sz="1800" b="0">
                           <a:solidFill>
@@ -14341,9 +14025,7 @@
                     </a:bodyPr>
                     <a:lstStyle/>
                     <a:p>
-                      <a:pPr algn="ctr">
-                        <a:buNone/>
-                      </a:pPr>
+                      <a:pPr algn="ctr"/>
                       <a:r>
                         <a:rPr sz="1800" b="0">
                           <a:solidFill>
@@ -14388,9 +14070,7 @@
                     </a:bodyPr>
                     <a:lstStyle/>
                     <a:p>
-                      <a:pPr algn="r">
-                        <a:buNone/>
-                      </a:pPr>
+                      <a:pPr algn="r"/>
                       <a:r>
                         <a:rPr sz="1800" b="0">
                           <a:solidFill>
@@ -14404,9 +14084,7 @@
                       </a:r>
                     </a:p>
                     <a:p>
-                      <a:pPr algn="r">
-                        <a:buNone/>
-                      </a:pPr>
+                      <a:pPr algn="r"/>
                       <a:r>
                         <a:rPr sz="1800" b="0">
                           <a:solidFill>
@@ -14445,9 +14123,7 @@
                     </a:bodyPr>
                     <a:lstStyle/>
                     <a:p>
-                      <a:pPr algn="r">
-                        <a:buNone/>
-                      </a:pPr>
+                      <a:pPr algn="r"/>
                       <a:r>
                         <a:rPr sz="1800" b="0">
                           <a:solidFill>
@@ -14461,9 +14137,7 @@
                       </a:r>
                     </a:p>
                     <a:p>
-                      <a:pPr algn="r">
-                        <a:buNone/>
-                      </a:pPr>
+                      <a:pPr algn="r"/>
                       <a:r>
                         <a:rPr sz="1800" b="0">
                           <a:solidFill>
@@ -14502,9 +14176,7 @@
                     </a:bodyPr>
                     <a:lstStyle/>
                     <a:p>
-                      <a:pPr algn="r">
-                        <a:buNone/>
-                      </a:pPr>
+                      <a:pPr algn="r"/>
                       <a:r>
                         <a:rPr sz="1800" b="0">
                           <a:solidFill>
@@ -14518,9 +14190,7 @@
                       </a:r>
                     </a:p>
                     <a:p>
-                      <a:pPr algn="r">
-                        <a:buNone/>
-                      </a:pPr>
+                      <a:pPr algn="r"/>
                       <a:r>
                         <a:rPr sz="1800" b="0">
                           <a:solidFill>
@@ -14559,9 +14229,7 @@
                     </a:bodyPr>
                     <a:lstStyle/>
                     <a:p>
-                      <a:pPr algn="r">
-                        <a:buNone/>
-                      </a:pPr>
+                      <a:pPr algn="r"/>
                       <a:r>
                         <a:rPr sz="1800" b="0">
                           <a:solidFill>
@@ -14575,9 +14243,7 @@
                       </a:r>
                     </a:p>
                     <a:p>
-                      <a:pPr algn="r">
-                        <a:buNone/>
-                      </a:pPr>
+                      <a:pPr algn="r"/>
                       <a:r>
                         <a:rPr sz="1800" b="0">
                           <a:solidFill>
@@ -14616,9 +14282,7 @@
                     </a:bodyPr>
                     <a:lstStyle/>
                     <a:p>
-                      <a:pPr algn="r">
-                        <a:buNone/>
-                      </a:pPr>
+                      <a:pPr algn="r"/>
                       <a:r>
                         <a:rPr sz="1800" b="0">
                           <a:solidFill>
@@ -14632,9 +14296,7 @@
                       </a:r>
                     </a:p>
                     <a:p>
-                      <a:pPr algn="r">
-                        <a:buNone/>
-                      </a:pPr>
+                      <a:pPr algn="r"/>
                       <a:r>
                         <a:rPr sz="1800" b="0">
                           <a:solidFill>
@@ -14673,9 +14335,7 @@
                     </a:bodyPr>
                     <a:lstStyle/>
                     <a:p>
-                      <a:pPr algn="r">
-                        <a:buNone/>
-                      </a:pPr>
+                      <a:pPr algn="r"/>
                       <a:r>
                         <a:rPr sz="1800" b="0">
                           <a:solidFill>
@@ -14689,9 +14349,7 @@
                       </a:r>
                     </a:p>
                     <a:p>
-                      <a:pPr algn="r">
-                        <a:buNone/>
-                      </a:pPr>
+                      <a:pPr algn="r"/>
                       <a:r>
                         <a:rPr sz="1800" b="0">
                           <a:solidFill>
@@ -14732,9 +14390,7 @@
                     </a:bodyPr>
                     <a:lstStyle/>
                     <a:p>
-                      <a:pPr algn="ctr">
-                        <a:buNone/>
-                      </a:pPr>
+                      <a:pPr algn="ctr"/>
                       <a:r>
                         <a:rPr sz="1800" b="0">
                           <a:solidFill>
@@ -14779,9 +14435,7 @@
                     </a:bodyPr>
                     <a:lstStyle/>
                     <a:p>
-                      <a:pPr algn="r">
-                        <a:buNone/>
-                      </a:pPr>
+                      <a:pPr algn="r"/>
                       <a:r>
                         <a:rPr sz="1800" b="0">
                           <a:solidFill>
@@ -14795,9 +14449,7 @@
                       </a:r>
                     </a:p>
                     <a:p>
-                      <a:pPr algn="r">
-                        <a:buNone/>
-                      </a:pPr>
+                      <a:pPr algn="r"/>
                       <a:r>
                         <a:rPr sz="1800" b="0">
                           <a:solidFill>
@@ -14836,9 +14488,7 @@
                     </a:bodyPr>
                     <a:lstStyle/>
                     <a:p>
-                      <a:pPr algn="r">
-                        <a:buNone/>
-                      </a:pPr>
+                      <a:pPr algn="r"/>
                       <a:r>
                         <a:rPr sz="1800" b="0">
                           <a:solidFill>
@@ -14852,9 +14502,7 @@
                       </a:r>
                     </a:p>
                     <a:p>
-                      <a:pPr algn="r">
-                        <a:buNone/>
-                      </a:pPr>
+                      <a:pPr algn="r"/>
                       <a:r>
                         <a:rPr sz="1800" b="0">
                           <a:solidFill>
@@ -14893,9 +14541,7 @@
                     </a:bodyPr>
                     <a:lstStyle/>
                     <a:p>
-                      <a:pPr algn="r">
-                        <a:buNone/>
-                      </a:pPr>
+                      <a:pPr algn="r"/>
                       <a:r>
                         <a:rPr sz="1800" b="0">
                           <a:solidFill>
@@ -14909,9 +14555,7 @@
                       </a:r>
                     </a:p>
                     <a:p>
-                      <a:pPr algn="r">
-                        <a:buNone/>
-                      </a:pPr>
+                      <a:pPr algn="r"/>
                       <a:r>
                         <a:rPr sz="1800" b="0">
                           <a:solidFill>
@@ -14950,9 +14594,7 @@
                     </a:bodyPr>
                     <a:lstStyle/>
                     <a:p>
-                      <a:pPr algn="r">
-                        <a:buNone/>
-                      </a:pPr>
+                      <a:pPr algn="r"/>
                       <a:r>
                         <a:rPr sz="1800" b="0">
                           <a:solidFill>
@@ -14966,9 +14608,7 @@
                       </a:r>
                     </a:p>
                     <a:p>
-                      <a:pPr algn="r">
-                        <a:buNone/>
-                      </a:pPr>
+                      <a:pPr algn="r"/>
                       <a:r>
                         <a:rPr sz="1800" b="0">
                           <a:solidFill>
@@ -15007,9 +14647,7 @@
                     </a:bodyPr>
                     <a:lstStyle/>
                     <a:p>
-                      <a:pPr algn="r">
-                        <a:buNone/>
-                      </a:pPr>
+                      <a:pPr algn="r"/>
                       <a:r>
                         <a:rPr sz="1800" b="0">
                           <a:solidFill>
@@ -15023,9 +14661,7 @@
                       </a:r>
                     </a:p>
                     <a:p>
-                      <a:pPr algn="r">
-                        <a:buNone/>
-                      </a:pPr>
+                      <a:pPr algn="r"/>
                       <a:r>
                         <a:rPr sz="1800" b="0">
                           <a:solidFill>
@@ -15064,9 +14700,7 @@
                     </a:bodyPr>
                     <a:lstStyle/>
                     <a:p>
-                      <a:pPr algn="r">
-                        <a:buNone/>
-                      </a:pPr>
+                      <a:pPr algn="r"/>
                       <a:r>
                         <a:rPr sz="1800" b="0">
                           <a:solidFill>
@@ -15080,9 +14714,7 @@
                       </a:r>
                     </a:p>
                     <a:p>
-                      <a:pPr algn="r">
-                        <a:buNone/>
-                      </a:pPr>
+                      <a:pPr algn="r"/>
                       <a:r>
                         <a:rPr sz="1800" b="0">
                           <a:solidFill>
@@ -15124,7 +14756,7 @@
           <p:cNvPr id="53" name="">
             <a:extLst xmlns:a="http://schemas.openxmlformats.org/drawingml/2006/main">
               <a:ext uri="{FF2B5EF4-FFF2-40B4-BE49-F238E27FC236}">
-                <a16:creationId xmlns:a16="http://schemas.microsoft.com/office/drawing/2014/main" id="{C52C554D-C602-410A-8371-34F0B5FB4AE1}"/>
+                <a16:creationId xmlns:a16="http://schemas.microsoft.com/office/drawing/2014/main" id="{A7B2EBAA-010F-4F67-83E3-9FE8736C1110}"/>
               </a:ext>
             </a:extLst>
           </p:cNvPr>
@@ -15155,7 +14787,7 @@
           <p:cNvPr id="54" name="S0: 영어 평가 문맥 / S1: 한국어 번역 평가 문맥 충실도 H0C1S0 n=58, H0C0S1 n=57, 나머지">
             <a:extLst xmlns:a="http://schemas.openxmlformats.org/drawingml/2006/main">
               <a:ext uri="{FF2B5EF4-FFF2-40B4-BE49-F238E27FC236}">
-                <a16:creationId xmlns:a16="http://schemas.microsoft.com/office/drawing/2014/main" id="{7BE12E8B-7593-4B72-B74F-B80C1C612C4F}"/>
+                <a16:creationId xmlns:a16="http://schemas.microsoft.com/office/drawing/2014/main" id="{2FE0393A-2664-4404-87A4-A694170D9EE1}"/>
               </a:ext>
             </a:extLst>
           </p:cNvPr>
@@ -15285,7 +14917,6 @@
           </a:lstStyle>
           <a:p xmlns:a="http://schemas.openxmlformats.org/drawingml/2006/main">
             <a:pPr algn="l">
-              <a:buNone/>
               <a:defRPr sz="1800" b="0">
                 <a:solidFill>
                   <a:srgbClr val="24324A"/>
@@ -15309,7 +14940,6 @@
           </a:p>
           <a:p xmlns:a="http://schemas.openxmlformats.org/drawingml/2006/main">
             <a:pPr algn="l">
-              <a:buNone/>
               <a:defRPr sz="1800" b="0">
                 <a:solidFill>
                   <a:srgbClr val="24324A"/>
@@ -15333,7 +14963,6 @@
           </a:p>
           <a:p xmlns:a="http://schemas.openxmlformats.org/drawingml/2006/main">
             <a:pPr algn="l">
-              <a:buNone/>
               <a:defRPr sz="1800" b="0">
                 <a:solidFill>
                   <a:srgbClr val="24324A"/>
@@ -15362,7 +14991,7 @@
           <p:cNvPr id="55" name="3요인 반복측정 ANOVA  ·  각 효과 df=(1,59)">
             <a:extLst xmlns:a="http://schemas.openxmlformats.org/drawingml/2006/main">
               <a:ext uri="{FF2B5EF4-FFF2-40B4-BE49-F238E27FC236}">
-                <a16:creationId xmlns:a16="http://schemas.microsoft.com/office/drawing/2014/main" id="{5EC029FB-D198-4410-BF48-B4883A842D6A}"/>
+                <a16:creationId xmlns:a16="http://schemas.microsoft.com/office/drawing/2014/main" id="{3E7DB54C-853A-4AA0-A9B5-B7EE4AE0C88D}"/>
               </a:ext>
             </a:extLst>
           </p:cNvPr>
@@ -15492,7 +15121,6 @@
           </a:lstStyle>
           <a:p xmlns:a="http://schemas.openxmlformats.org/drawingml/2006/main">
             <a:pPr algn="l">
-              <a:buNone/>
               <a:defRPr sz="1800" b="1">
                 <a:solidFill>
                   <a:srgbClr val="24324A"/>
@@ -15521,7 +15149,7 @@
           <p:cNvPr id="56" name="">
             <a:extLst xmlns:a="http://schemas.openxmlformats.org/drawingml/2006/main">
               <a:ext uri="{FF2B5EF4-FFF2-40B4-BE49-F238E27FC236}">
-                <a16:creationId xmlns:a16="http://schemas.microsoft.com/office/drawing/2014/main" id="{01E93656-F1C1-486B-9527-17888CB09419}"/>
+                <a16:creationId xmlns:a16="http://schemas.microsoft.com/office/drawing/2014/main" id="{D2BDEE2A-C865-4BF3-A1F2-454795AB3EF0}"/>
               </a:ext>
             </a:extLst>
           </p:cNvPr>
@@ -15551,9 +15179,7 @@
                     </a:bodyPr>
                     <a:lstStyle/>
                     <a:p>
-                      <a:pPr algn="ctr">
-                        <a:buNone/>
-                      </a:pPr>
+                      <a:pPr algn="ctr"/>
                       <a:r>
                         <a:rPr sz="1800" b="1">
                           <a:solidFill>
@@ -15604,9 +15230,7 @@
                     </a:bodyPr>
                     <a:lstStyle/>
                     <a:p>
-                      <a:pPr algn="ctr">
-                        <a:buNone/>
-                      </a:pPr>
+                      <a:pPr algn="ctr"/>
                       <a:r>
                         <a:rPr sz="1800" b="1">
                           <a:solidFill>
@@ -15620,9 +15244,7 @@
                       </a:r>
                     </a:p>
                     <a:p>
-                      <a:pPr algn="ctr">
-                        <a:buNone/>
-                      </a:pPr>
+                      <a:pPr algn="ctr"/>
                       <a:r>
                         <a:rPr sz="1800" b="1">
                           <a:solidFill>
@@ -15667,9 +15289,7 @@
                     </a:bodyPr>
                     <a:lstStyle/>
                     <a:p>
-                      <a:pPr algn="ctr">
-                        <a:buNone/>
-                      </a:pPr>
+                      <a:pPr algn="ctr"/>
                       <a:r>
                         <a:rPr sz="1800" b="1">
                           <a:solidFill>
@@ -15679,7 +15299,7 @@
                           <a:ea typeface="Malgun Gothic"/>
                           <a:cs typeface="Malgun Gothic"/>
                         </a:rPr>
-                        <a:t>보정 p</a:t>
+                        <a:t>p</a:t>
                       </a:r>
                     </a:p>
                   </a:txBody>
@@ -15714,9 +15334,7 @@
                     </a:bodyPr>
                     <a:lstStyle/>
                     <a:p>
-                      <a:pPr algn="ctr">
-                        <a:buNone/>
-                      </a:pPr>
+                      <a:pPr algn="ctr"/>
                       <a:r>
                         <a:rPr sz="1800" b="1">
                           <a:solidFill>
@@ -15730,9 +15348,7 @@
                       </a:r>
                     </a:p>
                     <a:p>
-                      <a:pPr algn="ctr">
-                        <a:buNone/>
-                      </a:pPr>
+                      <a:pPr algn="ctr"/>
                       <a:r>
                         <a:rPr sz="1800" b="1">
                           <a:solidFill>
@@ -15777,9 +15393,7 @@
                     </a:bodyPr>
                     <a:lstStyle/>
                     <a:p>
-                      <a:pPr algn="ctr">
-                        <a:buNone/>
-                      </a:pPr>
+                      <a:pPr algn="ctr"/>
                       <a:r>
                         <a:rPr sz="1800" b="1">
                           <a:solidFill>
@@ -15789,7 +15403,7 @@
                           <a:ea typeface="Malgun Gothic"/>
                           <a:cs typeface="Malgun Gothic"/>
                         </a:rPr>
-                        <a:t>보정 p</a:t>
+                        <a:t>p</a:t>
                       </a:r>
                     </a:p>
                   </a:txBody>
@@ -15826,9 +15440,7 @@
                     </a:bodyPr>
                     <a:lstStyle/>
                     <a:p>
-                      <a:pPr algn="ctr">
-                        <a:buNone/>
-                      </a:pPr>
+                      <a:pPr algn="ctr"/>
                       <a:r>
                         <a:rPr sz="1800" b="0">
                           <a:solidFill>
@@ -15873,9 +15485,7 @@
                     </a:bodyPr>
                     <a:lstStyle/>
                     <a:p>
-                      <a:pPr algn="r">
-                        <a:buNone/>
-                      </a:pPr>
+                      <a:pPr algn="r"/>
                       <a:r>
                         <a:rPr sz="1800" b="0">
                           <a:solidFill>
@@ -15914,9 +15524,7 @@
                     </a:bodyPr>
                     <a:lstStyle/>
                     <a:p>
-                      <a:pPr algn="r">
-                        <a:buNone/>
-                      </a:pPr>
+                      <a:pPr algn="r"/>
                       <a:r>
                         <a:rPr sz="1800" b="0">
                           <a:solidFill>
@@ -15926,7 +15534,7 @@
                           <a:ea typeface="Malgun Gothic"/>
                           <a:cs typeface="Malgun Gothic"/>
                         </a:rPr>
-                        <a:t>0.370</a:t>
+                        <a:t>0.093</a:t>
                       </a:r>
                     </a:p>
                   </a:txBody>
@@ -15955,9 +15563,7 @@
                     </a:bodyPr>
                     <a:lstStyle/>
                     <a:p>
-                      <a:pPr algn="r">
-                        <a:buNone/>
-                      </a:pPr>
+                      <a:pPr algn="r"/>
                       <a:r>
                         <a:rPr sz="1800" b="0">
                           <a:solidFill>
@@ -15996,9 +15602,7 @@
                     </a:bodyPr>
                     <a:lstStyle/>
                     <a:p>
-                      <a:pPr algn="r">
-                        <a:buNone/>
-                      </a:pPr>
+                      <a:pPr algn="r"/>
                       <a:r>
                         <a:rPr sz="1800" b="0">
                           <a:solidFill>
@@ -16039,9 +15643,7 @@
                     </a:bodyPr>
                     <a:lstStyle/>
                     <a:p>
-                      <a:pPr algn="ctr">
-                        <a:buNone/>
-                      </a:pPr>
+                      <a:pPr algn="ctr"/>
                       <a:r>
                         <a:rPr sz="1800" b="0">
                           <a:solidFill>
@@ -16086,9 +15688,7 @@
                     </a:bodyPr>
                     <a:lstStyle/>
                     <a:p>
-                      <a:pPr algn="r">
-                        <a:buNone/>
-                      </a:pPr>
+                      <a:pPr algn="r"/>
                       <a:r>
                         <a:rPr sz="1800" b="0">
                           <a:solidFill>
@@ -16127,9 +15727,7 @@
                     </a:bodyPr>
                     <a:lstStyle/>
                     <a:p>
-                      <a:pPr algn="r">
-                        <a:buNone/>
-                      </a:pPr>
+                      <a:pPr algn="r"/>
                       <a:r>
                         <a:rPr sz="1800" b="0">
                           <a:solidFill>
@@ -16139,7 +15737,7 @@
                           <a:ea typeface="Malgun Gothic"/>
                           <a:cs typeface="Malgun Gothic"/>
                         </a:rPr>
-                        <a:t>0.358</a:t>
+                        <a:t>0.072</a:t>
                       </a:r>
                     </a:p>
                   </a:txBody>
@@ -16168,9 +15766,7 @@
                     </a:bodyPr>
                     <a:lstStyle/>
                     <a:p>
-                      <a:pPr algn="r">
-                        <a:buNone/>
-                      </a:pPr>
+                      <a:pPr algn="r"/>
                       <a:r>
                         <a:rPr sz="1800" b="0">
                           <a:solidFill>
@@ -16209,9 +15805,7 @@
                     </a:bodyPr>
                     <a:lstStyle/>
                     <a:p>
-                      <a:pPr algn="r">
-                        <a:buNone/>
-                      </a:pPr>
+                      <a:pPr algn="r"/>
                       <a:r>
                         <a:rPr sz="1800" b="0">
                           <a:solidFill>
@@ -16252,9 +15846,7 @@
                     </a:bodyPr>
                     <a:lstStyle/>
                     <a:p>
-                      <a:pPr algn="ctr">
-                        <a:buNone/>
-                      </a:pPr>
+                      <a:pPr algn="ctr"/>
                       <a:r>
                         <a:rPr sz="1800" b="0">
                           <a:solidFill>
@@ -16299,9 +15891,7 @@
                     </a:bodyPr>
                     <a:lstStyle/>
                     <a:p>
-                      <a:pPr algn="r">
-                        <a:buNone/>
-                      </a:pPr>
+                      <a:pPr algn="r"/>
                       <a:r>
                         <a:rPr sz="1800" b="0">
                           <a:solidFill>
@@ -16340,9 +15930,7 @@
                     </a:bodyPr>
                     <a:lstStyle/>
                     <a:p>
-                      <a:pPr algn="r">
-                        <a:buNone/>
-                      </a:pPr>
+                      <a:pPr algn="r"/>
                       <a:r>
                         <a:rPr sz="1800" b="0">
                           <a:solidFill>
@@ -16381,9 +15969,7 @@
                     </a:bodyPr>
                     <a:lstStyle/>
                     <a:p>
-                      <a:pPr algn="r">
-                        <a:buNone/>
-                      </a:pPr>
+                      <a:pPr algn="r"/>
                       <a:r>
                         <a:rPr sz="1800" b="0">
                           <a:solidFill>
@@ -16422,9 +16008,7 @@
                     </a:bodyPr>
                     <a:lstStyle/>
                     <a:p>
-                      <a:pPr algn="r">
-                        <a:buNone/>
-                      </a:pPr>
+                      <a:pPr algn="r"/>
                       <a:r>
                         <a:rPr sz="1800" b="0">
                           <a:solidFill>
@@ -16434,7 +16018,7 @@
                           <a:ea typeface="Malgun Gothic"/>
                           <a:cs typeface="Malgun Gothic"/>
                         </a:rPr>
-                        <a:t>0.066</a:t>
+                        <a:t>0.016</a:t>
                       </a:r>
                     </a:p>
                   </a:txBody>
@@ -16465,9 +16049,7 @@
                     </a:bodyPr>
                     <a:lstStyle/>
                     <a:p>
-                      <a:pPr algn="ctr">
-                        <a:buNone/>
-                      </a:pPr>
+                      <a:pPr algn="ctr"/>
                       <a:r>
                         <a:rPr sz="1800" b="0">
                           <a:solidFill>
@@ -16512,9 +16094,7 @@
                     </a:bodyPr>
                     <a:lstStyle/>
                     <a:p>
-                      <a:pPr algn="r">
-                        <a:buNone/>
-                      </a:pPr>
+                      <a:pPr algn="r"/>
                       <a:r>
                         <a:rPr sz="1800" b="0">
                           <a:solidFill>
@@ -16553,9 +16133,7 @@
                     </a:bodyPr>
                     <a:lstStyle/>
                     <a:p>
-                      <a:pPr algn="r">
-                        <a:buNone/>
-                      </a:pPr>
+                      <a:pPr algn="r"/>
                       <a:r>
                         <a:rPr sz="1800" b="0">
                           <a:solidFill>
@@ -16565,7 +16143,7 @@
                           <a:ea typeface="Malgun Gothic"/>
                           <a:cs typeface="Malgun Gothic"/>
                         </a:rPr>
-                        <a:t>0.239</a:t>
+                        <a:t>0.040</a:t>
                       </a:r>
                     </a:p>
                   </a:txBody>
@@ -16594,9 +16172,7 @@
                     </a:bodyPr>
                     <a:lstStyle/>
                     <a:p>
-                      <a:pPr algn="r">
-                        <a:buNone/>
-                      </a:pPr>
+                      <a:pPr algn="r"/>
                       <a:r>
                         <a:rPr sz="1800" b="0">
                           <a:solidFill>
@@ -16635,9 +16211,7 @@
                     </a:bodyPr>
                     <a:lstStyle/>
                     <a:p>
-                      <a:pPr algn="r">
-                        <a:buNone/>
-                      </a:pPr>
+                      <a:pPr algn="r"/>
                       <a:r>
                         <a:rPr sz="1800" b="0">
                           <a:solidFill>
@@ -16647,7 +16221,7 @@
                           <a:ea typeface="Malgun Gothic"/>
                           <a:cs typeface="Malgun Gothic"/>
                         </a:rPr>
-                        <a:t>0.414</a:t>
+                        <a:t>0.138</a:t>
                       </a:r>
                     </a:p>
                   </a:txBody>
@@ -16678,9 +16252,7 @@
                     </a:bodyPr>
                     <a:lstStyle/>
                     <a:p>
-                      <a:pPr algn="ctr">
-                        <a:buNone/>
-                      </a:pPr>
+                      <a:pPr algn="ctr"/>
                       <a:r>
                         <a:rPr sz="1800" b="0">
                           <a:solidFill>
@@ -16725,9 +16297,7 @@
                     </a:bodyPr>
                     <a:lstStyle/>
                     <a:p>
-                      <a:pPr algn="r">
-                        <a:buNone/>
-                      </a:pPr>
+                      <a:pPr algn="r"/>
                       <a:r>
                         <a:rPr sz="1800" b="0">
                           <a:solidFill>
@@ -16766,9 +16336,7 @@
                     </a:bodyPr>
                     <a:lstStyle/>
                     <a:p>
-                      <a:pPr algn="r">
-                        <a:buNone/>
-                      </a:pPr>
+                      <a:pPr algn="r"/>
                       <a:r>
                         <a:rPr sz="1800" b="0">
                           <a:solidFill>
@@ -16778,7 +16346,7 @@
                           <a:ea typeface="Malgun Gothic"/>
                           <a:cs typeface="Malgun Gothic"/>
                         </a:rPr>
-                        <a:t>0.940</a:t>
+                        <a:t>0.384</a:t>
                       </a:r>
                     </a:p>
                   </a:txBody>
@@ -16807,9 +16375,7 @@
                     </a:bodyPr>
                     <a:lstStyle/>
                     <a:p>
-                      <a:pPr algn="r">
-                        <a:buNone/>
-                      </a:pPr>
+                      <a:pPr algn="r"/>
                       <a:r>
                         <a:rPr sz="1800" b="0">
                           <a:solidFill>
@@ -16848,9 +16414,7 @@
                     </a:bodyPr>
                     <a:lstStyle/>
                     <a:p>
-                      <a:pPr algn="r">
-                        <a:buNone/>
-                      </a:pPr>
+                      <a:pPr algn="r"/>
                       <a:r>
                         <a:rPr sz="1800" b="0">
                           <a:solidFill>
@@ -16860,7 +16424,7 @@
                           <a:ea typeface="Malgun Gothic"/>
                           <a:cs typeface="Malgun Gothic"/>
                         </a:rPr>
-                        <a:t>0.976</a:t>
+                        <a:t>0.529</a:t>
                       </a:r>
                     </a:p>
                   </a:txBody>
@@ -16891,9 +16455,7 @@
                     </a:bodyPr>
                     <a:lstStyle/>
                     <a:p>
-                      <a:pPr algn="ctr">
-                        <a:buNone/>
-                      </a:pPr>
+                      <a:pPr algn="ctr"/>
                       <a:r>
                         <a:rPr sz="1800" b="0">
                           <a:solidFill>
@@ -16938,9 +16500,7 @@
                     </a:bodyPr>
                     <a:lstStyle/>
                     <a:p>
-                      <a:pPr algn="r">
-                        <a:buNone/>
-                      </a:pPr>
+                      <a:pPr algn="r"/>
                       <a:r>
                         <a:rPr sz="1800" b="0">
                           <a:solidFill>
@@ -16979,9 +16539,7 @@
                     </a:bodyPr>
                     <a:lstStyle/>
                     <a:p>
-                      <a:pPr algn="r">
-                        <a:buNone/>
-                      </a:pPr>
+                      <a:pPr algn="r"/>
                       <a:r>
                         <a:rPr sz="1800" b="0">
                           <a:solidFill>
@@ -16991,7 +16549,7 @@
                           <a:ea typeface="Malgun Gothic"/>
                           <a:cs typeface="Malgun Gothic"/>
                         </a:rPr>
-                        <a:t>0.940</a:t>
+                        <a:t>0.939</a:t>
                       </a:r>
                     </a:p>
                   </a:txBody>
@@ -17020,9 +16578,7 @@
                     </a:bodyPr>
                     <a:lstStyle/>
                     <a:p>
-                      <a:pPr algn="r">
-                        <a:buNone/>
-                      </a:pPr>
+                      <a:pPr algn="r"/>
                       <a:r>
                         <a:rPr sz="1800" b="0">
                           <a:solidFill>
@@ -17061,9 +16617,7 @@
                     </a:bodyPr>
                     <a:lstStyle/>
                     <a:p>
-                      <a:pPr algn="r">
-                        <a:buNone/>
-                      </a:pPr>
+                      <a:pPr algn="r"/>
                       <a:r>
                         <a:rPr sz="1800" b="0">
                           <a:solidFill>
@@ -17073,7 +16627,7 @@
                           <a:ea typeface="Malgun Gothic"/>
                           <a:cs typeface="Malgun Gothic"/>
                         </a:rPr>
-                        <a:t>0.005</a:t>
+                        <a:t>&lt;0.001</a:t>
                       </a:r>
                     </a:p>
                   </a:txBody>
@@ -17104,9 +16658,7 @@
                     </a:bodyPr>
                     <a:lstStyle/>
                     <a:p>
-                      <a:pPr algn="ctr">
-                        <a:buNone/>
-                      </a:pPr>
+                      <a:pPr algn="ctr"/>
                       <a:r>
                         <a:rPr sz="1800" b="0">
                           <a:solidFill>
@@ -17151,9 +16703,7 @@
                     </a:bodyPr>
                     <a:lstStyle/>
                     <a:p>
-                      <a:pPr algn="r">
-                        <a:buNone/>
-                      </a:pPr>
+                      <a:pPr algn="r"/>
                       <a:r>
                         <a:rPr sz="1800" b="0">
                           <a:solidFill>
@@ -17192,9 +16742,7 @@
                     </a:bodyPr>
                     <a:lstStyle/>
                     <a:p>
-                      <a:pPr algn="r">
-                        <a:buNone/>
-                      </a:pPr>
+                      <a:pPr algn="r"/>
                       <a:r>
                         <a:rPr sz="1800" b="0">
                           <a:solidFill>
@@ -17204,7 +16752,7 @@
                           <a:ea typeface="Malgun Gothic"/>
                           <a:cs typeface="Malgun Gothic"/>
                         </a:rPr>
-                        <a:t>0.940</a:t>
+                        <a:t>0.313</a:t>
                       </a:r>
                     </a:p>
                   </a:txBody>
@@ -17233,9 +16781,7 @@
                     </a:bodyPr>
                     <a:lstStyle/>
                     <a:p>
-                      <a:pPr algn="r">
-                        <a:buNone/>
-                      </a:pPr>
+                      <a:pPr algn="r"/>
                       <a:r>
                         <a:rPr sz="1800" b="0">
                           <a:solidFill>
@@ -17274,9 +16820,7 @@
                     </a:bodyPr>
                     <a:lstStyle/>
                     <a:p>
-                      <a:pPr algn="r">
-                        <a:buNone/>
-                      </a:pPr>
+                      <a:pPr algn="r"/>
                       <a:r>
                         <a:rPr sz="1800" b="0">
                           <a:solidFill>
@@ -17286,7 +16830,7 @@
                           <a:ea typeface="Malgun Gothic"/>
                           <a:cs typeface="Malgun Gothic"/>
                         </a:rPr>
-                        <a:t>0.976</a:t>
+                        <a:t>0.488</a:t>
                       </a:r>
                     </a:p>
                   </a:txBody>
@@ -17315,10 +16859,10 @@
       </p:graphicFrame>
       <p:sp>
         <p:nvSpPr>
-          <p:cNvPr id="57" name="문자 비율·시간은 각각 7검정에 Holm 보정. RAGAS H×C 검정은 평가 문맥 언어별로 수행했으며, 전체 24검">
+          <p:cNvPr id="57" name="p&lt;0.05: 한국어 비율 S·H×C / 실행 시간 H·C·S·C×S RAGAS H×C 검정은 평가 문맥 언어별로 수">
             <a:extLst xmlns:a="http://schemas.openxmlformats.org/drawingml/2006/main">
               <a:ext uri="{FF2B5EF4-FFF2-40B4-BE49-F238E27FC236}">
-                <a16:creationId xmlns:a16="http://schemas.microsoft.com/office/drawing/2014/main" id="{87B3D930-A71A-4ECE-A779-BD685224615C}"/>
+                <a16:creationId xmlns:a16="http://schemas.microsoft.com/office/drawing/2014/main" id="{94213441-4F82-48A8-9945-97196A39167F}"/>
               </a:ext>
             </a:extLst>
           </p:cNvPr>
@@ -17448,7 +16992,6 @@
           </a:lstStyle>
           <a:p xmlns:a="http://schemas.openxmlformats.org/drawingml/2006/main">
             <a:pPr algn="l">
-              <a:buNone/>
               <a:defRPr sz="1800" b="0">
                 <a:solidFill>
                   <a:srgbClr val="24324A"/>
@@ -17467,12 +17010,11 @@
                 <a:ea typeface="Malgun Gothic"/>
                 <a:cs typeface="Malgun Gothic"/>
               </a:rPr>
-              <a:t>문자 비율·시간은 각각 7검정에 Holm 보정.</a:t>
+              <a:t>p&lt;0.05: 한국어 비율 S·H×C / 실행 시간 H·C·S·C×S</a:t>
             </a:r>
           </a:p>
           <a:p xmlns:a="http://schemas.openxmlformats.org/drawingml/2006/main">
             <a:pPr algn="l">
-              <a:buNone/>
               <a:defRPr sz="1800" b="0">
                 <a:solidFill>
                   <a:srgbClr val="24324A"/>
@@ -17496,7 +17038,6 @@
           </a:p>
           <a:p xmlns:a="http://schemas.openxmlformats.org/drawingml/2006/main">
             <a:pPr algn="l">
-              <a:buNone/>
               <a:defRPr sz="1800" b="0">
                 <a:solidFill>
                   <a:srgbClr val="24324A"/>
@@ -17515,7 +17056,7 @@
                 <a:ea typeface="Malgun Gothic"/>
                 <a:cs typeface="Malgun Gothic"/>
               </a:rPr>
-              <a:t>전체 24검정의 Holm 보정 p는 모두 0.05 이상이었다.</a:t>
+              <a:t>품질 4지표 24검정의 p는 모두 0.05 이상이었다.</a:t>
             </a:r>
           </a:p>
         </p:txBody>
@@ -17525,7 +17066,7 @@
           <p:cNvPr id="58" name="기법별 대응 비교  ·  질의별 평균 차이, 양측 검정">
             <a:extLst xmlns:a="http://schemas.openxmlformats.org/drawingml/2006/main">
               <a:ext uri="{FF2B5EF4-FFF2-40B4-BE49-F238E27FC236}">
-                <a16:creationId xmlns:a16="http://schemas.microsoft.com/office/drawing/2014/main" id="{A6092A1F-E72C-4692-AE2C-D75D0A410C8C}"/>
+                <a16:creationId xmlns:a16="http://schemas.microsoft.com/office/drawing/2014/main" id="{A83A5B6B-9286-4C33-94B3-40C5A7056F10}"/>
               </a:ext>
             </a:extLst>
           </p:cNvPr>
@@ -17655,7 +17196,6 @@
           </a:lstStyle>
           <a:p xmlns:a="http://schemas.openxmlformats.org/drawingml/2006/main">
             <a:pPr algn="l">
-              <a:buNone/>
               <a:defRPr sz="1800" b="1">
                 <a:solidFill>
                   <a:srgbClr val="24324A"/>
@@ -17684,7 +17224,7 @@
           <p:cNvPr id="59" name="">
             <a:extLst xmlns:a="http://schemas.openxmlformats.org/drawingml/2006/main">
               <a:ext uri="{FF2B5EF4-FFF2-40B4-BE49-F238E27FC236}">
-                <a16:creationId xmlns:a16="http://schemas.microsoft.com/office/drawing/2014/main" id="{5B8A7DEB-9875-4EF4-9179-2CB8A1141FC7}"/>
+                <a16:creationId xmlns:a16="http://schemas.microsoft.com/office/drawing/2014/main" id="{4CA91D7B-4B10-4E60-95A1-D8BD85064931}"/>
               </a:ext>
             </a:extLst>
           </p:cNvPr>
@@ -17714,9 +17254,7 @@
                     </a:bodyPr>
                     <a:lstStyle/>
                     <a:p>
-                      <a:pPr algn="ctr">
-                        <a:buNone/>
-                      </a:pPr>
+                      <a:pPr algn="ctr"/>
                       <a:r>
                         <a:rPr sz="1800" b="1">
                           <a:solidFill>
@@ -17767,9 +17305,7 @@
                     </a:bodyPr>
                     <a:lstStyle/>
                     <a:p>
-                      <a:pPr algn="ctr">
-                        <a:buNone/>
-                      </a:pPr>
+                      <a:pPr algn="ctr"/>
                       <a:r>
                         <a:rPr sz="1800" b="1">
                           <a:solidFill>
@@ -17783,9 +17319,7 @@
                       </a:r>
                     </a:p>
                     <a:p>
-                      <a:pPr algn="ctr">
-                        <a:buNone/>
-                      </a:pPr>
+                      <a:pPr algn="ctr"/>
                       <a:r>
                         <a:rPr sz="1800" b="1">
                           <a:solidFill>
@@ -17830,9 +17364,7 @@
                     </a:bodyPr>
                     <a:lstStyle/>
                     <a:p>
-                      <a:pPr algn="ctr">
-                        <a:buNone/>
-                      </a:pPr>
+                      <a:pPr algn="ctr"/>
                       <a:r>
                         <a:rPr sz="1800" b="1">
                           <a:solidFill>
@@ -17877,25 +17409,7 @@
                     </a:bodyPr>
                     <a:lstStyle/>
                     <a:p>
-                      <a:pPr algn="ctr">
-                        <a:buNone/>
-                      </a:pPr>
-                      <a:r>
-                        <a:rPr sz="1800" b="1">
-                          <a:solidFill>
-                            <a:srgbClr val="24324A"/>
-                          </a:solidFill>
-                          <a:latin typeface="Malgun Gothic"/>
-                          <a:ea typeface="Malgun Gothic"/>
-                          <a:cs typeface="Malgun Gothic"/>
-                        </a:rPr>
-                        <a:t>보정 전</a:t>
-                      </a:r>
-                    </a:p>
-                    <a:p>
-                      <a:pPr algn="ctr">
-                        <a:buNone/>
-                      </a:pPr>
+                      <a:pPr algn="ctr"/>
                       <a:r>
                         <a:rPr sz="1800" b="1">
                           <a:solidFill>
@@ -17940,9 +17454,7 @@
                     </a:bodyPr>
                     <a:lstStyle/>
                     <a:p>
-                      <a:pPr algn="ctr">
-                        <a:buNone/>
-                      </a:pPr>
+                      <a:pPr algn="ctr"/>
                       <a:r>
                         <a:rPr sz="1800" b="1">
                           <a:solidFill>
@@ -17952,23 +17464,7 @@
                           <a:ea typeface="Malgun Gothic"/>
                           <a:cs typeface="Malgun Gothic"/>
                         </a:rPr>
-                        <a:t>보정 후</a:t>
-                      </a:r>
-                    </a:p>
-                    <a:p>
-                      <a:pPr algn="ctr">
-                        <a:buNone/>
-                      </a:pPr>
-                      <a:r>
-                        <a:rPr sz="1800" b="1">
-                          <a:solidFill>
-                            <a:srgbClr val="24324A"/>
-                          </a:solidFill>
-                          <a:latin typeface="Malgun Gothic"/>
-                          <a:ea typeface="Malgun Gothic"/>
-                          <a:cs typeface="Malgun Gothic"/>
-                        </a:rPr>
-                        <a:t>p</a:t>
+                        <a:t>dz</a:t>
                       </a:r>
                     </a:p>
                   </a:txBody>
@@ -18005,9 +17501,7 @@
                     </a:bodyPr>
                     <a:lstStyle/>
                     <a:p>
-                      <a:pPr algn="l">
-                        <a:buNone/>
-                      </a:pPr>
+                      <a:pPr algn="l"/>
                       <a:r>
                         <a:rPr sz="1800" b="0">
                           <a:solidFill>
@@ -18021,9 +17515,7 @@
                       </a:r>
                     </a:p>
                     <a:p>
-                      <a:pPr algn="l">
-                        <a:buNone/>
-                      </a:pPr>
+                      <a:pPr algn="l"/>
                       <a:r>
                         <a:rPr sz="1800" b="0">
                           <a:solidFill>
@@ -18068,9 +17560,7 @@
                     </a:bodyPr>
                     <a:lstStyle/>
                     <a:p>
-                      <a:pPr algn="r">
-                        <a:buNone/>
-                      </a:pPr>
+                      <a:pPr algn="r"/>
                       <a:r>
                         <a:rPr sz="1800" b="0">
                           <a:solidFill>
@@ -18084,9 +17574,7 @@
                       </a:r>
                     </a:p>
                     <a:p>
-                      <a:pPr algn="r">
-                        <a:buNone/>
-                      </a:pPr>
+                      <a:pPr algn="r"/>
                       <a:r>
                         <a:rPr sz="1800" b="0">
                           <a:solidFill>
@@ -18125,9 +17613,7 @@
                     </a:bodyPr>
                     <a:lstStyle/>
                     <a:p>
-                      <a:pPr algn="r">
-                        <a:buNone/>
-                      </a:pPr>
+                      <a:pPr algn="r"/>
                       <a:r>
                         <a:rPr sz="1800" b="0">
                           <a:solidFill>
@@ -18141,9 +17627,7 @@
                       </a:r>
                     </a:p>
                     <a:p>
-                      <a:pPr algn="r">
-                        <a:buNone/>
-                      </a:pPr>
+                      <a:pPr algn="r"/>
                       <a:r>
                         <a:rPr sz="1800" b="0">
                           <a:solidFill>
@@ -18182,9 +17666,7 @@
                     </a:bodyPr>
                     <a:lstStyle/>
                     <a:p>
-                      <a:pPr algn="r">
-                        <a:buNone/>
-                      </a:pPr>
+                      <a:pPr algn="r"/>
                       <a:r>
                         <a:rPr sz="1800" b="0">
                           <a:solidFill>
@@ -18223,9 +17705,7 @@
                     </a:bodyPr>
                     <a:lstStyle/>
                     <a:p>
-                      <a:pPr algn="r">
-                        <a:buNone/>
-                      </a:pPr>
+                      <a:pPr algn="r"/>
                       <a:r>
                         <a:rPr sz="1800" b="0">
                           <a:solidFill>
@@ -18235,7 +17715,7 @@
                           <a:ea typeface="Malgun Gothic"/>
                           <a:cs typeface="Malgun Gothic"/>
                         </a:rPr>
-                        <a:t>0.117</a:t>
+                        <a:t>0.289</a:t>
                       </a:r>
                     </a:p>
                   </a:txBody>
@@ -18266,9 +17746,7 @@
                     </a:bodyPr>
                     <a:lstStyle/>
                     <a:p>
-                      <a:pPr algn="l">
-                        <a:buNone/>
-                      </a:pPr>
+                      <a:pPr algn="l"/>
                       <a:r>
                         <a:rPr sz="1800" b="0">
                           <a:solidFill>
@@ -18282,9 +17760,7 @@
                       </a:r>
                     </a:p>
                     <a:p>
-                      <a:pPr algn="l">
-                        <a:buNone/>
-                      </a:pPr>
+                      <a:pPr algn="l"/>
                       <a:r>
                         <a:rPr sz="1800" b="0">
                           <a:solidFill>
@@ -18329,9 +17805,7 @@
                     </a:bodyPr>
                     <a:lstStyle/>
                     <a:p>
-                      <a:pPr algn="r">
-                        <a:buNone/>
-                      </a:pPr>
+                      <a:pPr algn="r"/>
                       <a:r>
                         <a:rPr sz="1800" b="0">
                           <a:solidFill>
@@ -18345,9 +17819,7 @@
                       </a:r>
                     </a:p>
                     <a:p>
-                      <a:pPr algn="r">
-                        <a:buNone/>
-                      </a:pPr>
+                      <a:pPr algn="r"/>
                       <a:r>
                         <a:rPr sz="1800" b="0">
                           <a:solidFill>
@@ -18386,9 +17858,7 @@
                     </a:bodyPr>
                     <a:lstStyle/>
                     <a:p>
-                      <a:pPr algn="r">
-                        <a:buNone/>
-                      </a:pPr>
+                      <a:pPr algn="r"/>
                       <a:r>
                         <a:rPr sz="1800" b="0">
                           <a:solidFill>
@@ -18402,9 +17872,7 @@
                       </a:r>
                     </a:p>
                     <a:p>
-                      <a:pPr algn="r">
-                        <a:buNone/>
-                      </a:pPr>
+                      <a:pPr algn="r"/>
                       <a:r>
                         <a:rPr sz="1800" b="0">
                           <a:solidFill>
@@ -18443,9 +17911,7 @@
                     </a:bodyPr>
                     <a:lstStyle/>
                     <a:p>
-                      <a:pPr algn="r">
-                        <a:buNone/>
-                      </a:pPr>
+                      <a:pPr algn="r"/>
                       <a:r>
                         <a:rPr sz="1800" b="0">
                           <a:solidFill>
@@ -18484,9 +17950,7 @@
                     </a:bodyPr>
                     <a:lstStyle/>
                     <a:p>
-                      <a:pPr algn="r">
-                        <a:buNone/>
-                      </a:pPr>
+                      <a:pPr algn="r"/>
                       <a:r>
                         <a:rPr sz="1800" b="0">
                           <a:solidFill>
@@ -18496,7 +17960,7 @@
                           <a:ea typeface="Malgun Gothic"/>
                           <a:cs typeface="Malgun Gothic"/>
                         </a:rPr>
-                        <a:t>1.000</a:t>
+                        <a:t>0.113</a:t>
                       </a:r>
                     </a:p>
                   </a:txBody>
@@ -18527,9 +17991,7 @@
                     </a:bodyPr>
                     <a:lstStyle/>
                     <a:p>
-                      <a:pPr algn="l">
-                        <a:buNone/>
-                      </a:pPr>
+                      <a:pPr algn="l"/>
                       <a:r>
                         <a:rPr sz="1800" b="0">
                           <a:solidFill>
@@ -18543,9 +18005,7 @@
                       </a:r>
                     </a:p>
                     <a:p>
-                      <a:pPr algn="l">
-                        <a:buNone/>
-                      </a:pPr>
+                      <a:pPr algn="l"/>
                       <a:r>
                         <a:rPr sz="1800" b="0">
                           <a:solidFill>
@@ -18590,9 +18050,7 @@
                     </a:bodyPr>
                     <a:lstStyle/>
                     <a:p>
-                      <a:pPr algn="r">
-                        <a:buNone/>
-                      </a:pPr>
+                      <a:pPr algn="r"/>
                       <a:r>
                         <a:rPr sz="1800" b="0">
                           <a:solidFill>
@@ -18606,9 +18064,7 @@
                       </a:r>
                     </a:p>
                     <a:p>
-                      <a:pPr algn="r">
-                        <a:buNone/>
-                      </a:pPr>
+                      <a:pPr algn="r"/>
                       <a:r>
                         <a:rPr sz="1800" b="0">
                           <a:solidFill>
@@ -18647,9 +18103,7 @@
                     </a:bodyPr>
                     <a:lstStyle/>
                     <a:p>
-                      <a:pPr algn="r">
-                        <a:buNone/>
-                      </a:pPr>
+                      <a:pPr algn="r"/>
                       <a:r>
                         <a:rPr sz="1800" b="0">
                           <a:solidFill>
@@ -18663,9 +18117,7 @@
                       </a:r>
                     </a:p>
                     <a:p>
-                      <a:pPr algn="r">
-                        <a:buNone/>
-                      </a:pPr>
+                      <a:pPr algn="r"/>
                       <a:r>
                         <a:rPr sz="1800" b="0">
                           <a:solidFill>
@@ -18704,9 +18156,7 @@
                     </a:bodyPr>
                     <a:lstStyle/>
                     <a:p>
-                      <a:pPr algn="r">
-                        <a:buNone/>
-                      </a:pPr>
+                      <a:pPr algn="r"/>
                       <a:r>
                         <a:rPr sz="1800" b="0">
                           <a:solidFill>
@@ -18745,9 +18195,7 @@
                     </a:bodyPr>
                     <a:lstStyle/>
                     <a:p>
-                      <a:pPr algn="r">
-                        <a:buNone/>
-                      </a:pPr>
+                      <a:pPr algn="r"/>
                       <a:r>
                         <a:rPr sz="1800" b="0">
                           <a:solidFill>
@@ -18757,7 +18205,7 @@
                           <a:ea typeface="Malgun Gothic"/>
                           <a:cs typeface="Malgun Gothic"/>
                         </a:rPr>
-                        <a:t>&lt;0.001</a:t>
+                        <a:t>1.801</a:t>
                       </a:r>
                     </a:p>
                   </a:txBody>
@@ -18786,10 +18234,10 @@
       </p:graphicFrame>
       <p:sp>
         <p:nvSpPr>
-          <p:cNvPr id="60" name="HyDE: C0S0, CAD: H0S0, SCD: H0의 CAD 상태 평균 보정: HyDE·CAD 각 4지표, SCD">
+          <p:cNvPr id="60" name="HyDE: C0S0, CAD: H0S0, SCD: H0의 CAD 상태 평균 p: 다중비교 보정 없는 양측 p, dz:">
             <a:extLst xmlns:a="http://schemas.openxmlformats.org/drawingml/2006/main">
               <a:ext uri="{FF2B5EF4-FFF2-40B4-BE49-F238E27FC236}">
-                <a16:creationId xmlns:a16="http://schemas.microsoft.com/office/drawing/2014/main" id="{C735DB22-B016-4190-B8C8-4B18C57289F7}"/>
+                <a16:creationId xmlns:a16="http://schemas.microsoft.com/office/drawing/2014/main" id="{0360F373-C7A8-4BAB-9CBF-9DA230CC9A38}"/>
               </a:ext>
             </a:extLst>
           </p:cNvPr>
@@ -18919,7 +18367,6 @@
           </a:lstStyle>
           <a:p xmlns:a="http://schemas.openxmlformats.org/drawingml/2006/main">
             <a:pPr algn="l">
-              <a:buNone/>
               <a:defRPr sz="1800" b="0">
                 <a:solidFill>
                   <a:srgbClr val="24324A"/>
@@ -18943,7 +18390,6 @@
           </a:p>
           <a:p xmlns:a="http://schemas.openxmlformats.org/drawingml/2006/main">
             <a:pPr algn="l">
-              <a:buNone/>
               <a:defRPr sz="1800" b="0">
                 <a:solidFill>
                   <a:srgbClr val="24324A"/>
@@ -18962,12 +18408,11 @@
                 <a:ea typeface="Malgun Gothic"/>
                 <a:cs typeface="Malgun Gothic"/>
               </a:rPr>
-              <a:t>보정: HyDE·CAD 각 4지표, SCD 주·전체 비교 2검정</a:t>
+              <a:t>p: 다중비교 보정 없는 양측 p, dz: 차이 평균/차이 SD</a:t>
             </a:r>
           </a:p>
           <a:p xmlns:a="http://schemas.openxmlformats.org/drawingml/2006/main">
             <a:pPr algn="l">
-              <a:buNone/>
               <a:defRPr sz="1800" b="0">
                 <a:solidFill>
                   <a:srgbClr val="24324A"/>
@@ -18991,7 +18436,6 @@
           </a:p>
           <a:p xmlns:a="http://schemas.openxmlformats.org/drawingml/2006/main">
             <a:pPr algn="l">
-              <a:buNone/>
               <a:defRPr sz="1800" b="0">
                 <a:solidFill>
                   <a:srgbClr val="24324A"/>
@@ -19020,7 +18464,7 @@
           <p:cNvPr id="61" name="">
             <a:extLst xmlns:a="http://schemas.openxmlformats.org/drawingml/2006/main">
               <a:ext uri="{FF2B5EF4-FFF2-40B4-BE49-F238E27FC236}">
-                <a16:creationId xmlns:a16="http://schemas.microsoft.com/office/drawing/2014/main" id="{36ED8F9F-DEAE-422A-AB18-47EFDC8F2F48}"/>
+                <a16:creationId xmlns:a16="http://schemas.microsoft.com/office/drawing/2014/main" id="{24CF6432-AA43-4634-93A7-26B2FEE8C8F6}"/>
               </a:ext>
             </a:extLst>
           </p:cNvPr>
@@ -19051,7 +18495,7 @@
           <p:cNvPr id="62" name="06 결과 해석">
             <a:extLst xmlns:a="http://schemas.openxmlformats.org/drawingml/2006/main">
               <a:ext uri="{FF2B5EF4-FFF2-40B4-BE49-F238E27FC236}">
-                <a16:creationId xmlns:a16="http://schemas.microsoft.com/office/drawing/2014/main" id="{9A3ACB9E-52AB-41C7-93FE-D17725FD7DCC}"/>
+                <a16:creationId xmlns:a16="http://schemas.microsoft.com/office/drawing/2014/main" id="{5C583980-A700-4E57-BBE1-4E0148BA7B3F}"/>
               </a:ext>
             </a:extLst>
           </p:cNvPr>
@@ -19181,7 +18625,6 @@
           </a:lstStyle>
           <a:p xmlns:a="http://schemas.openxmlformats.org/drawingml/2006/main">
             <a:pPr algn="l">
-              <a:buNone/>
               <a:defRPr sz="2400" b="0">
                 <a:solidFill>
                   <a:srgbClr val="FFFFFF"/>
@@ -19207,10 +18650,10 @@
       </p:sp>
       <p:sp>
         <p:nvSpPr>
-          <p:cNvPr id="63" name="HyDE의 양의 관련성 차이는 다중비교 보정 결과와 함께 해석한다. CAD는 질의별 충실도 변동과 추가 실행 시간을 ">
+          <p:cNvPr id="63" name="HyDE 관련성은 평균 +0.080점, t(59)=2.236, p=0.029였다. CAD 충실도는 평균 +0.029점">
             <a:extLst xmlns:a="http://schemas.openxmlformats.org/drawingml/2006/main">
               <a:ext uri="{FF2B5EF4-FFF2-40B4-BE49-F238E27FC236}">
-                <a16:creationId xmlns:a16="http://schemas.microsoft.com/office/drawing/2014/main" id="{3064354D-CF8D-4207-8EC6-6DB2D62CBF15}"/>
+                <a16:creationId xmlns:a16="http://schemas.microsoft.com/office/drawing/2014/main" id="{A598518B-D54E-4E6C-93BA-5EE623CBF783}"/>
               </a:ext>
             </a:extLst>
           </p:cNvPr>
@@ -19340,7 +18783,6 @@
           </a:lstStyle>
           <a:p xmlns:a="http://schemas.openxmlformats.org/drawingml/2006/main">
             <a:pPr algn="l">
-              <a:buNone/>
               <a:defRPr sz="1800" b="0">
                 <a:solidFill>
                   <a:srgbClr val="24324A"/>
@@ -19359,12 +18801,11 @@
                 <a:ea typeface="Malgun Gothic"/>
                 <a:cs typeface="Malgun Gothic"/>
               </a:rPr>
-              <a:t>HyDE 관련성은 평균 +0.080점, Holm 보정 p=0.117이었다.</a:t>
+              <a:t>HyDE 관련성은 평균 +0.080점, t(59)=2.236, p=0.029였다.</a:t>
             </a:r>
           </a:p>
           <a:p xmlns:a="http://schemas.openxmlformats.org/drawingml/2006/main">
             <a:pPr algn="l">
-              <a:buNone/>
               <a:defRPr sz="1800" b="0">
                 <a:solidFill>
                   <a:srgbClr val="24324A"/>
@@ -19383,12 +18824,11 @@
                 <a:ea typeface="Malgun Gothic"/>
                 <a:cs typeface="Malgun Gothic"/>
               </a:rPr>
-              <a:t>CAD 충실도는 평균 +0.029점이며 질의별 증감이 달랐다.</a:t>
+              <a:t>CAD 충실도는 평균 +0.029점, t(57)=0.862, p=0.393이었다.</a:t>
             </a:r>
           </a:p>
           <a:p xmlns:a="http://schemas.openxmlformats.org/drawingml/2006/main">
             <a:pPr algn="l">
-              <a:buNone/>
               <a:defRPr sz="1800" b="0">
                 <a:solidFill>
                   <a:srgbClr val="24324A"/>
@@ -19407,12 +18847,11 @@
                 <a:ea typeface="Malgun Gothic"/>
                 <a:cs typeface="Malgun Gothic"/>
               </a:rPr>
-              <a:t>SCD 주 비교의 한국어 문자 비율은 평균 21.822%p 높았다.</a:t>
+              <a:t>SCD 주 비교의 한국어 비율은 21.822%p 높았다(p&lt;0.001).</a:t>
             </a:r>
           </a:p>
           <a:p xmlns:a="http://schemas.openxmlformats.org/drawingml/2006/main">
             <a:pPr algn="l">
-              <a:buNone/>
               <a:defRPr sz="1800" b="0">
                 <a:solidFill>
                   <a:srgbClr val="24324A"/>
@@ -19441,7 +18880,7 @@
           <p:cNvPr id="64" name="">
             <a:extLst xmlns:a="http://schemas.openxmlformats.org/drawingml/2006/main">
               <a:ext uri="{FF2B5EF4-FFF2-40B4-BE49-F238E27FC236}">
-                <a16:creationId xmlns:a16="http://schemas.microsoft.com/office/drawing/2014/main" id="{335E4EE7-3A51-44EC-843E-3029AFF737CF}"/>
+                <a16:creationId xmlns:a16="http://schemas.microsoft.com/office/drawing/2014/main" id="{AEBE0219-1508-4E0C-89F7-49A2A74338CC}"/>
               </a:ext>
             </a:extLst>
           </p:cNvPr>
@@ -19472,7 +18911,7 @@
           <p:cNvPr id="65" name="07 결론">
             <a:extLst xmlns:a="http://schemas.openxmlformats.org/drawingml/2006/main">
               <a:ext uri="{FF2B5EF4-FFF2-40B4-BE49-F238E27FC236}">
-                <a16:creationId xmlns:a16="http://schemas.microsoft.com/office/drawing/2014/main" id="{3E89197A-0FFF-4F28-8AB4-FD0E50C31BF7}"/>
+                <a16:creationId xmlns:a16="http://schemas.microsoft.com/office/drawing/2014/main" id="{486B674A-61D8-4562-A6BB-5C45DFE1621E}"/>
               </a:ext>
             </a:extLst>
           </p:cNvPr>
@@ -19602,7 +19041,6 @@
           </a:lstStyle>
           <a:p xmlns:a="http://schemas.openxmlformats.org/drawingml/2006/main">
             <a:pPr algn="l">
-              <a:buNone/>
               <a:defRPr sz="2400" b="0">
                 <a:solidFill>
                   <a:srgbClr val="FFFFFF"/>
@@ -19628,10 +19066,10 @@
       </p:sp>
       <p:sp>
         <p:nvSpPr>
-          <p:cNvPr id="66" name="답변 품질은 평균 대응 차이와 보정 검정 결과로 판단한다. 한국어 사용 비중을 높이는 목적에는 SCD 결과를 참고한다">
+          <p:cNvPr id="66" name="HyDE는 C0S0에서 관련성을 높였고, CAD 충실도 차이는 유의하지 않았다. SCD는 같은 영어 근거에서 한국어 ">
             <a:extLst xmlns:a="http://schemas.openxmlformats.org/drawingml/2006/main">
               <a:ext uri="{FF2B5EF4-FFF2-40B4-BE49-F238E27FC236}">
-                <a16:creationId xmlns:a16="http://schemas.microsoft.com/office/drawing/2014/main" id="{AE010BAB-C317-447B-A51E-97D1FA975761}"/>
+                <a16:creationId xmlns:a16="http://schemas.microsoft.com/office/drawing/2014/main" id="{A6CFB91C-90C0-4EBF-92CC-5DFD802DF078}"/>
               </a:ext>
             </a:extLst>
           </p:cNvPr>
@@ -19761,7 +19199,6 @@
           </a:lstStyle>
           <a:p xmlns:a="http://schemas.openxmlformats.org/drawingml/2006/main">
             <a:pPr algn="l">
-              <a:buNone/>
               <a:defRPr sz="1800" b="0">
                 <a:solidFill>
                   <a:srgbClr val="24324A"/>
@@ -19780,12 +19217,11 @@
                 <a:ea typeface="Malgun Gothic"/>
                 <a:cs typeface="Malgun Gothic"/>
               </a:rPr>
-              <a:t>HyDE 관련성과 CAD 충실도는 Holm 보정 후 유의하지 않았다.</a:t>
+              <a:t>HyDE는 C0S0에서 관련성을 높였고, CAD 충실도 차이는 유의하지 않았다.</a:t>
             </a:r>
           </a:p>
           <a:p xmlns:a="http://schemas.openxmlformats.org/drawingml/2006/main">
             <a:pPr algn="l">
-              <a:buNone/>
               <a:defRPr sz="1800" b="0">
                 <a:solidFill>
                   <a:srgbClr val="24324A"/>
@@ -19809,7 +19245,6 @@
           </a:p>
           <a:p xmlns:a="http://schemas.openxmlformats.org/drawingml/2006/main">
             <a:pPr algn="l">
-              <a:buNone/>
               <a:defRPr sz="1800" b="0">
                 <a:solidFill>
                   <a:srgbClr val="24324A"/>
@@ -19833,7 +19268,6 @@
           </a:p>
           <a:p xmlns:a="http://schemas.openxmlformats.org/drawingml/2006/main">
             <a:pPr algn="l">
-              <a:buNone/>
               <a:defRPr sz="1800" b="0">
                 <a:solidFill>
                   <a:srgbClr val="24324A"/>
@@ -19857,7 +19291,6 @@
           </a:p>
           <a:p xmlns:a="http://schemas.openxmlformats.org/drawingml/2006/main">
             <a:pPr algn="l">
-              <a:buNone/>
               <a:defRPr sz="1800" b="0">
                 <a:solidFill>
                   <a:srgbClr val="24324A"/>
@@ -19886,7 +19319,7 @@
           <p:cNvPr id="67" name="">
             <a:extLst xmlns:a="http://schemas.openxmlformats.org/drawingml/2006/main">
               <a:ext uri="{FF2B5EF4-FFF2-40B4-BE49-F238E27FC236}">
-                <a16:creationId xmlns:a16="http://schemas.microsoft.com/office/drawing/2014/main" id="{EA928F77-F2EF-42C7-8912-E723DC9F84AB}"/>
+                <a16:creationId xmlns:a16="http://schemas.microsoft.com/office/drawing/2014/main" id="{BF9547DB-F8F2-4FAB-A13A-60CFC8E078CF}"/>
               </a:ext>
             </a:extLst>
           </p:cNvPr>
@@ -19917,7 +19350,7 @@
           <p:cNvPr id="68" name="08 주요 참고문헌">
             <a:extLst xmlns:a="http://schemas.openxmlformats.org/drawingml/2006/main">
               <a:ext uri="{FF2B5EF4-FFF2-40B4-BE49-F238E27FC236}">
-                <a16:creationId xmlns:a16="http://schemas.microsoft.com/office/drawing/2014/main" id="{397120A7-6652-4A46-B1DB-C62B417681E0}"/>
+                <a16:creationId xmlns:a16="http://schemas.microsoft.com/office/drawing/2014/main" id="{8E21C8BA-10A1-40E1-9AA9-6C82383CFB63}"/>
               </a:ext>
             </a:extLst>
           </p:cNvPr>
@@ -20047,7 +19480,6 @@
           </a:lstStyle>
           <a:p xmlns:a="http://schemas.openxmlformats.org/drawingml/2006/main">
             <a:pPr algn="l">
-              <a:buNone/>
               <a:defRPr sz="2400" b="0">
                 <a:solidFill>
                   <a:srgbClr val="FFFFFF"/>
@@ -20076,7 +19508,7 @@
           <p:cNvPr id="69" name="[1] Lewis et al. RAG. NeurIPS, 2020. [2] Gao et al. HyDE. ACL, 20">
             <a:extLst xmlns:a="http://schemas.openxmlformats.org/drawingml/2006/main">
               <a:ext uri="{FF2B5EF4-FFF2-40B4-BE49-F238E27FC236}">
-                <a16:creationId xmlns:a16="http://schemas.microsoft.com/office/drawing/2014/main" id="{63179EAE-09ED-447D-A0C7-72C8A7116635}"/>
+                <a16:creationId xmlns:a16="http://schemas.microsoft.com/office/drawing/2014/main" id="{9027F5CF-D9A8-40BC-AD80-2B5D08A5BF72}"/>
               </a:ext>
             </a:extLst>
           </p:cNvPr>
@@ -20206,7 +19638,6 @@
           </a:lstStyle>
           <a:p xmlns:a="http://schemas.openxmlformats.org/drawingml/2006/main">
             <a:pPr algn="l">
-              <a:buNone/>
               <a:defRPr sz="1600" b="0">
                 <a:solidFill>
                   <a:srgbClr val="24324A"/>
@@ -20230,7 +19661,6 @@
           </a:p>
           <a:p xmlns:a="http://schemas.openxmlformats.org/drawingml/2006/main">
             <a:pPr algn="l">
-              <a:buNone/>
               <a:defRPr sz="1600" b="0">
                 <a:solidFill>
                   <a:srgbClr val="24324A"/>
@@ -20254,7 +19684,6 @@
           </a:p>
           <a:p xmlns:a="http://schemas.openxmlformats.org/drawingml/2006/main">
             <a:pPr algn="l">
-              <a:buNone/>
               <a:defRPr sz="1600" b="0">
                 <a:solidFill>
                   <a:srgbClr val="24324A"/>
@@ -20283,7 +19712,7 @@
           <p:cNvPr id="70" name="[4] Li et al. Language Drift and SCD. AAAI, 2026. [5] Chen et al.">
             <a:extLst xmlns:a="http://schemas.openxmlformats.org/drawingml/2006/main">
               <a:ext uri="{FF2B5EF4-FFF2-40B4-BE49-F238E27FC236}">
-                <a16:creationId xmlns:a16="http://schemas.microsoft.com/office/drawing/2014/main" id="{E5E7E863-54BB-4C29-BCFA-80F5EE009DAD}"/>
+                <a16:creationId xmlns:a16="http://schemas.microsoft.com/office/drawing/2014/main" id="{BDE32D7C-C746-43C7-A10B-1D4ED4A0E095}"/>
               </a:ext>
             </a:extLst>
           </p:cNvPr>
@@ -20413,7 +19842,6 @@
           </a:lstStyle>
           <a:p xmlns:a="http://schemas.openxmlformats.org/drawingml/2006/main">
             <a:pPr algn="l">
-              <a:buNone/>
               <a:defRPr sz="1600" b="0">
                 <a:solidFill>
                   <a:srgbClr val="24324A"/>
@@ -20437,7 +19865,6 @@
           </a:p>
           <a:p xmlns:a="http://schemas.openxmlformats.org/drawingml/2006/main">
             <a:pPr algn="l">
-              <a:buNone/>
               <a:defRPr sz="1600" b="0">
                 <a:solidFill>
                   <a:srgbClr val="24324A"/>
@@ -20461,7 +19888,6 @@
           </a:p>
           <a:p xmlns:a="http://schemas.openxmlformats.org/drawingml/2006/main">
             <a:pPr algn="l">
-              <a:buNone/>
               <a:defRPr sz="1600" b="0">
                 <a:solidFill>
                   <a:srgbClr val="24324A"/>
@@ -20490,7 +19916,7 @@
           <p:cNvPr id="71" name="[6] Robertson et al. Okapi at TREC-3. NIST, 1995. [7] Cormack et ">
             <a:extLst xmlns:a="http://schemas.openxmlformats.org/drawingml/2006/main">
               <a:ext uri="{FF2B5EF4-FFF2-40B4-BE49-F238E27FC236}">
-                <a16:creationId xmlns:a16="http://schemas.microsoft.com/office/drawing/2014/main" id="{22D781C6-63DB-4A76-836E-7616E1BB7FB1}"/>
+                <a16:creationId xmlns:a16="http://schemas.microsoft.com/office/drawing/2014/main" id="{967E668E-7DDD-43D5-8531-7598CDF90764}"/>
               </a:ext>
             </a:extLst>
           </p:cNvPr>
@@ -20620,7 +20046,6 @@
           </a:lstStyle>
           <a:p xmlns:a="http://schemas.openxmlformats.org/drawingml/2006/main">
             <a:pPr algn="l">
-              <a:buNone/>
               <a:defRPr sz="1600" b="0">
                 <a:solidFill>
                   <a:srgbClr val="24324A"/>
@@ -20644,7 +20069,6 @@
           </a:p>
           <a:p xmlns:a="http://schemas.openxmlformats.org/drawingml/2006/main">
             <a:pPr algn="l">
-              <a:buNone/>
               <a:defRPr sz="1600" b="0">
                 <a:solidFill>
                   <a:srgbClr val="24324A"/>
@@ -20673,7 +20097,7 @@
           <p:cNvPr id="72" name="[8] MacAvaney et al. CEDR. SIGIR, 2019. 공식 모델  [M1] KT Mi:dm 2.0 ">
             <a:extLst xmlns:a="http://schemas.openxmlformats.org/drawingml/2006/main">
               <a:ext uri="{FF2B5EF4-FFF2-40B4-BE49-F238E27FC236}">
-                <a16:creationId xmlns:a16="http://schemas.microsoft.com/office/drawing/2014/main" id="{23856CA5-4F76-4A97-BCC1-7FFD4E9DFFAE}"/>
+                <a16:creationId xmlns:a16="http://schemas.microsoft.com/office/drawing/2014/main" id="{CDDB70DA-6C87-4FA4-92AB-9773A9A6BBF0}"/>
               </a:ext>
             </a:extLst>
           </p:cNvPr>
@@ -20803,7 +20227,6 @@
           </a:lstStyle>
           <a:p xmlns:a="http://schemas.openxmlformats.org/drawingml/2006/main">
             <a:pPr algn="l">
-              <a:buNone/>
               <a:defRPr sz="1600" b="0">
                 <a:solidFill>
                   <a:srgbClr val="24324A"/>
@@ -20827,7 +20250,6 @@
           </a:p>
           <a:p xmlns:a="http://schemas.openxmlformats.org/drawingml/2006/main">
             <a:pPr algn="l">
-              <a:buNone/>
               <a:defRPr sz="1600" b="0">
                 <a:solidFill>
                   <a:srgbClr val="24324A"/>
@@ -20853,10 +20275,10 @@
       </p:sp>
       <p:sp>
         <p:nvSpPr>
-          <p:cNvPr id="73" name="학술 22편·모델·자료 출처: 동봉 POSTER_REFERENCES_FULL.md · 통계·결측·민감도 분석: 동봉 ">
+          <p:cNvPr id="73" name="학술 22편·모델·자료 출처: FINALDOCS/VALIDATION/REFERENCES.md · 통계·민감도: 동봉 ">
             <a:extLst xmlns:a="http://schemas.openxmlformats.org/drawingml/2006/main">
               <a:ext uri="{FF2B5EF4-FFF2-40B4-BE49-F238E27FC236}">
-                <a16:creationId xmlns:a16="http://schemas.microsoft.com/office/drawing/2014/main" id="{A5E2237D-D31E-44E0-8008-6AA4979CDF7D}"/>
+                <a16:creationId xmlns:a16="http://schemas.microsoft.com/office/drawing/2014/main" id="{4317AC15-8CA5-4059-B48C-A4346EA72ECA}"/>
               </a:ext>
             </a:extLst>
           </p:cNvPr>
@@ -20986,7 +20408,6 @@
           </a:lstStyle>
           <a:p xmlns:a="http://schemas.openxmlformats.org/drawingml/2006/main">
             <a:pPr algn="l">
-              <a:buNone/>
               <a:defRPr sz="1600" b="0">
                 <a:solidFill>
                   <a:srgbClr val="24324A"/>
@@ -21015,7 +20436,7 @@
           <p:cNvPr id="74" name="영어 문서 4종 · 질의 60개 · 생성 모델 1종 · 질의별 반복측정">
             <a:extLst xmlns:a="http://schemas.openxmlformats.org/drawingml/2006/main">
               <a:ext uri="{FF2B5EF4-FFF2-40B4-BE49-F238E27FC236}">
-                <a16:creationId xmlns:a16="http://schemas.microsoft.com/office/drawing/2014/main" id="{14C402B1-41B4-4B19-BCF5-8CC97C5F7CBB}"/>
+                <a16:creationId xmlns:a16="http://schemas.microsoft.com/office/drawing/2014/main" id="{A4DEB587-C8F4-45DF-8AB7-C17238C39793}"/>
               </a:ext>
             </a:extLst>
           </p:cNvPr>
@@ -21145,7 +20566,6 @@
           </a:lstStyle>
           <a:p xmlns:a="http://schemas.openxmlformats.org/drawingml/2006/main">
             <a:pPr algn="l">
-              <a:buNone/>
               <a:defRPr sz="1400" b="0">
                 <a:solidFill>
                   <a:srgbClr val="695184"/>
@@ -21174,7 +20594,7 @@
           <p:cNvPr id="75" name="A1 594 × 841 mm">
             <a:extLst xmlns:a="http://schemas.openxmlformats.org/drawingml/2006/main">
               <a:ext uri="{FF2B5EF4-FFF2-40B4-BE49-F238E27FC236}">
-                <a16:creationId xmlns:a16="http://schemas.microsoft.com/office/drawing/2014/main" id="{054E15FE-62B2-4307-9CD2-8E5084005506}"/>
+                <a16:creationId xmlns:a16="http://schemas.microsoft.com/office/drawing/2014/main" id="{8495BF88-5658-434D-95EA-28B434C210D7}"/>
               </a:ext>
             </a:extLst>
           </p:cNvPr>
@@ -21304,7 +20724,6 @@
           </a:lstStyle>
           <a:p xmlns:a="http://schemas.openxmlformats.org/drawingml/2006/main">
             <a:pPr algn="r">
-              <a:buNone/>
               <a:defRPr sz="1050" b="0">
                 <a:solidFill>
                   <a:srgbClr val="695184"/>
@@ -21331,7 +20750,7 @@
     </p:spTree>
     <p:extLst>
       <p:ext uri="{BB962C8B-B14F-4D97-AF65-F5344CB8AC3E}">
-        <p14:creationId xmlns:p14="http://schemas.microsoft.com/office/powerpoint/2010/main" val="1012599631"/>
+        <p14:creationId xmlns:p14="http://schemas.microsoft.com/office/powerpoint/2010/main" val="2087134093"/>
       </p:ext>
     </p:extLst>
   </p:cSld>

--- a/FINALDOCS/POSTER/FINAL/M_RAG_A1_FINAL_EDITABLE.pptx
+++ b/FINALDOCS/POSTER/FINAL/M_RAG_A1_FINAL_EDITABLE.pptx
@@ -2,13 +2,13 @@
 <file path=ppt/presentation.xml><?xml version="1.0" encoding="utf-8"?>
 <p:presentation xmlns:p="http://schemas.openxmlformats.org/presentationml/2006/main">
   <p:sldMasterIdLst>
-    <p:sldMasterId xmlns:r="http://schemas.openxmlformats.org/officeDocument/2006/relationships" id="2147483648" r:id="R5417218fc1ae4ba1"/>
+    <p:sldMasterId xmlns:r="http://schemas.openxmlformats.org/officeDocument/2006/relationships" id="2147483648" r:id="R3b11d35200044fea"/>
   </p:sldMasterIdLst>
   <p:notesMasterIdLst>
-    <p:notesMasterId xmlns:r="http://schemas.openxmlformats.org/officeDocument/2006/relationships" r:id="R49f02fc842f04598"/>
+    <p:notesMasterId xmlns:r="http://schemas.openxmlformats.org/officeDocument/2006/relationships" r:id="R4949fc67fcff473a"/>
   </p:notesMasterIdLst>
   <p:sldIdLst>
-    <p:sldId xmlns:r="http://schemas.openxmlformats.org/officeDocument/2006/relationships" id="256" r:id="Reae5f24be768419a"/>
+    <p:sldId xmlns:r="http://schemas.openxmlformats.org/officeDocument/2006/relationships" id="256" r:id="Re562c2222906468f"/>
   </p:sldIdLst>
   <p:sldSz cx="21384000" cy="30276000"/>
   <p:notesSz cx="6858000" cy="9144000"/>
@@ -489,7 +489,7 @@
           <p:cNvPr id="3" name="Title">
             <a:extLst xmlns:a="http://schemas.openxmlformats.org/drawingml/2006/main">
               <a:ext uri="{FF2B5EF4-FFF2-40B4-BE49-F238E27FC236}">
-                <a16:creationId xmlns:a16="http://schemas.microsoft.com/office/drawing/2014/main" id="{707AB210-BD38-4486-97DB-EA36056D05B3}"/>
+                <a16:creationId xmlns:a16="http://schemas.microsoft.com/office/drawing/2014/main" id="{3AA86962-2AB5-423F-9184-841619492E28}"/>
               </a:ext>
             </a:extLst>
           </p:cNvPr>
@@ -718,7 +718,7 @@
           <p:cNvPr id="2" name="Subtitle">
             <a:extLst xmlns:a="http://schemas.openxmlformats.org/drawingml/2006/main">
               <a:ext uri="{FF2B5EF4-FFF2-40B4-BE49-F238E27FC236}">
-                <a16:creationId xmlns:a16="http://schemas.microsoft.com/office/drawing/2014/main" id="{812D2440-1B0F-4561-8FF5-5C56FF7FABBE}"/>
+                <a16:creationId xmlns:a16="http://schemas.microsoft.com/office/drawing/2014/main" id="{813FB6E7-6EF6-42BD-A34D-414BC2206906}"/>
               </a:ext>
             </a:extLst>
           </p:cNvPr>
@@ -964,7 +964,7 @@
           <p:cNvPr id="2" name="Section title">
             <a:extLst xmlns:a="http://schemas.openxmlformats.org/drawingml/2006/main">
               <a:ext uri="{FF2B5EF4-FFF2-40B4-BE49-F238E27FC236}">
-                <a16:creationId xmlns:a16="http://schemas.microsoft.com/office/drawing/2014/main" id="{8CB89280-5C8C-45A9-8BD8-A6F9CC1EE3DC}"/>
+                <a16:creationId xmlns:a16="http://schemas.microsoft.com/office/drawing/2014/main" id="{7C3B6948-9802-42E4-891A-2FDF91DB9D23}"/>
               </a:ext>
             </a:extLst>
           </p:cNvPr>
@@ -1210,7 +1210,7 @@
           <p:cNvPr id="3" name="Title">
             <a:extLst xmlns:a="http://schemas.openxmlformats.org/drawingml/2006/main">
               <a:ext uri="{FF2B5EF4-FFF2-40B4-BE49-F238E27FC236}">
-                <a16:creationId xmlns:a16="http://schemas.microsoft.com/office/drawing/2014/main" id="{088BABFC-DA41-4346-8F53-202C7A4AA4F6}"/>
+                <a16:creationId xmlns:a16="http://schemas.microsoft.com/office/drawing/2014/main" id="{613578F9-ADE6-4FE3-80B0-DEAB4999D3C7}"/>
               </a:ext>
             </a:extLst>
           </p:cNvPr>
@@ -1439,7 +1439,7 @@
           <p:cNvPr id="2" name="Body">
             <a:extLst xmlns:a="http://schemas.openxmlformats.org/drawingml/2006/main">
               <a:ext uri="{FF2B5EF4-FFF2-40B4-BE49-F238E27FC236}">
-                <a16:creationId xmlns:a16="http://schemas.microsoft.com/office/drawing/2014/main" id="{02A25B0B-B3B5-4736-8FA4-621DB9F0DC31}"/>
+                <a16:creationId xmlns:a16="http://schemas.microsoft.com/office/drawing/2014/main" id="{182CC6BC-3C4E-41DB-B691-BA7509FA687F}"/>
               </a:ext>
             </a:extLst>
           </p:cNvPr>
@@ -1685,7 +1685,7 @@
           <p:cNvPr id="4" name="Title">
             <a:extLst xmlns:a="http://schemas.openxmlformats.org/drawingml/2006/main">
               <a:ext uri="{FF2B5EF4-FFF2-40B4-BE49-F238E27FC236}">
-                <a16:creationId xmlns:a16="http://schemas.microsoft.com/office/drawing/2014/main" id="{9B8AB8E3-6DB0-4918-BF61-4EE2258585C8}"/>
+                <a16:creationId xmlns:a16="http://schemas.microsoft.com/office/drawing/2014/main" id="{E2A24762-7A6B-4A7B-A25E-B784FBBE4A2D}"/>
               </a:ext>
             </a:extLst>
           </p:cNvPr>
@@ -1914,7 +1914,7 @@
           <p:cNvPr id="2" name="Left column">
             <a:extLst xmlns:a="http://schemas.openxmlformats.org/drawingml/2006/main">
               <a:ext uri="{FF2B5EF4-FFF2-40B4-BE49-F238E27FC236}">
-                <a16:creationId xmlns:a16="http://schemas.microsoft.com/office/drawing/2014/main" id="{D7344E96-722C-48AA-A9B8-94E74EF9848E}"/>
+                <a16:creationId xmlns:a16="http://schemas.microsoft.com/office/drawing/2014/main" id="{B4C97ECD-3ECE-4C3B-B162-E85B6B5C5D50}"/>
               </a:ext>
             </a:extLst>
           </p:cNvPr>
@@ -2143,7 +2143,7 @@
           <p:cNvPr id="3" name="Right column">
             <a:extLst xmlns:a="http://schemas.openxmlformats.org/drawingml/2006/main">
               <a:ext uri="{FF2B5EF4-FFF2-40B4-BE49-F238E27FC236}">
-                <a16:creationId xmlns:a16="http://schemas.microsoft.com/office/drawing/2014/main" id="{47A5DC7E-84C6-494C-A226-4FE6972448AE}"/>
+                <a16:creationId xmlns:a16="http://schemas.microsoft.com/office/drawing/2014/main" id="{8D55F3E0-22BF-4E1B-AA61-83819AA920D5}"/>
               </a:ext>
             </a:extLst>
           </p:cNvPr>
@@ -2389,7 +2389,7 @@
           <p:cNvPr id="3" name="Title">
             <a:extLst xmlns:a="http://schemas.openxmlformats.org/drawingml/2006/main">
               <a:ext uri="{FF2B5EF4-FFF2-40B4-BE49-F238E27FC236}">
-                <a16:creationId xmlns:a16="http://schemas.microsoft.com/office/drawing/2014/main" id="{541C9FAC-A4C6-470B-8229-354C7B702F2D}"/>
+                <a16:creationId xmlns:a16="http://schemas.microsoft.com/office/drawing/2014/main" id="{E350ABDD-06B5-4000-B9F1-A7ABB4687E4B}"/>
               </a:ext>
             </a:extLst>
           </p:cNvPr>
@@ -2618,7 +2618,7 @@
           <p:cNvPr id="2" name="Left column">
             <a:extLst xmlns:a="http://schemas.openxmlformats.org/drawingml/2006/main">
               <a:ext uri="{FF2B5EF4-FFF2-40B4-BE49-F238E27FC236}">
-                <a16:creationId xmlns:a16="http://schemas.microsoft.com/office/drawing/2014/main" id="{BC7E0CD2-48B2-4422-BEB5-3277059A74F7}"/>
+                <a16:creationId xmlns:a16="http://schemas.microsoft.com/office/drawing/2014/main" id="{499283E6-2D31-4BF4-985F-57FBEFF928C6}"/>
               </a:ext>
             </a:extLst>
           </p:cNvPr>
@@ -2885,12 +2885,12 @@
   </p:cSld>
   <p:clrMap bg1="lt1" tx1="dk1" bg2="lt2" tx2="dk2" accent1="accent1" accent2="accent2" accent3="accent3" accent4="accent4" accent5="accent5" accent6="accent6" hlink="hlink" folHlink="folHlink"/>
   <p:sldLayoutIdLst>
-    <p:sldLayoutId xmlns:r="http://schemas.openxmlformats.org/officeDocument/2006/relationships" id="2147483649" r:id="Rb40d50c614da453e"/>
-    <p:sldLayoutId xmlns:r="http://schemas.openxmlformats.org/officeDocument/2006/relationships" id="2147483650" r:id="R2b5172b4502b42a9"/>
-    <p:sldLayoutId xmlns:r="http://schemas.openxmlformats.org/officeDocument/2006/relationships" id="2147483651" r:id="R676a8a6a8303435f"/>
-    <p:sldLayoutId xmlns:r="http://schemas.openxmlformats.org/officeDocument/2006/relationships" id="2147483652" r:id="Rd814fbdf71cc4864"/>
-    <p:sldLayoutId xmlns:r="http://schemas.openxmlformats.org/officeDocument/2006/relationships" id="2147483653" r:id="R2854fdb348ce412c"/>
-    <p:sldLayoutId xmlns:r="http://schemas.openxmlformats.org/officeDocument/2006/relationships" id="2147483654" r:id="R88345d678e79417a"/>
+    <p:sldLayoutId xmlns:r="http://schemas.openxmlformats.org/officeDocument/2006/relationships" id="2147483649" r:id="R795ce3ad7e394fb8"/>
+    <p:sldLayoutId xmlns:r="http://schemas.openxmlformats.org/officeDocument/2006/relationships" id="2147483650" r:id="R0b81810b648a49ad"/>
+    <p:sldLayoutId xmlns:r="http://schemas.openxmlformats.org/officeDocument/2006/relationships" id="2147483651" r:id="Rf696abf199374e04"/>
+    <p:sldLayoutId xmlns:r="http://schemas.openxmlformats.org/officeDocument/2006/relationships" id="2147483652" r:id="R3c9cb9491df94465"/>
+    <p:sldLayoutId xmlns:r="http://schemas.openxmlformats.org/officeDocument/2006/relationships" id="2147483653" r:id="Rbe4c6c5906ea4ead"/>
+    <p:sldLayoutId xmlns:r="http://schemas.openxmlformats.org/officeDocument/2006/relationships" id="2147483654" r:id="Rd5cb04c378844181"/>
   </p:sldLayoutIdLst>
   <p:txStyles>
     <p:titleStyle>
@@ -3441,7 +3441,7 @@
           <p:cNvPr id="76" name="">
             <a:extLst xmlns:a="http://schemas.openxmlformats.org/drawingml/2006/main">
               <a:ext uri="{FF2B5EF4-FFF2-40B4-BE49-F238E27FC236}">
-                <a16:creationId xmlns:a16="http://schemas.microsoft.com/office/drawing/2014/main" id="{B124FBB7-B6C3-4104-A94E-7B3E70932BD9}"/>
+                <a16:creationId xmlns:a16="http://schemas.microsoft.com/office/drawing/2014/main" id="{88C73751-82B4-443F-8071-6FB12B2BCB52}"/>
               </a:ext>
             </a:extLst>
           </p:cNvPr>
@@ -3472,7 +3472,7 @@
           <p:cNvPr id="2" name="한국어 질의로 영어 학술·기술 문서를 검색하는">
             <a:extLst xmlns:a="http://schemas.openxmlformats.org/drawingml/2006/main">
               <a:ext uri="{FF2B5EF4-FFF2-40B4-BE49-F238E27FC236}">
-                <a16:creationId xmlns:a16="http://schemas.microsoft.com/office/drawing/2014/main" id="{C4A155D7-595D-4D8B-8658-CBCEFA4C0B57}"/>
+                <a16:creationId xmlns:a16="http://schemas.microsoft.com/office/drawing/2014/main" id="{6915451A-423C-4826-9AEA-E7B12F3C45ED}"/>
               </a:ext>
             </a:extLst>
           </p:cNvPr>
@@ -3630,7 +3630,7 @@
           <p:cNvPr id="3" name="RAG에서의 HyDE·CAD·SCD 조합 실험">
             <a:extLst xmlns:a="http://schemas.openxmlformats.org/drawingml/2006/main">
               <a:ext uri="{FF2B5EF4-FFF2-40B4-BE49-F238E27FC236}">
-                <a16:creationId xmlns:a16="http://schemas.microsoft.com/office/drawing/2014/main" id="{61FCBC9A-DB55-46F5-B594-3413370C521E}"/>
+                <a16:creationId xmlns:a16="http://schemas.microsoft.com/office/drawing/2014/main" id="{AFB0096C-AD71-40B5-963D-8015F5AF9EFC}"/>
               </a:ext>
             </a:extLst>
           </p:cNvPr>
@@ -3788,7 +3788,7 @@
           <p:cNvPr id="4" name="문종건 · 동국대학교 WISE캠퍼스 컴퓨터공학과 · 지도교수 김진석 · 2026.10.15">
             <a:extLst xmlns:a="http://schemas.openxmlformats.org/drawingml/2006/main">
               <a:ext uri="{FF2B5EF4-FFF2-40B4-BE49-F238E27FC236}">
-                <a16:creationId xmlns:a16="http://schemas.microsoft.com/office/drawing/2014/main" id="{C8071267-0157-4238-AFF5-9A1C36ED35AA}"/>
+                <a16:creationId xmlns:a16="http://schemas.microsoft.com/office/drawing/2014/main" id="{4A94F85B-9C0D-42F4-8D3C-C46E7E3983D3}"/>
               </a:ext>
             </a:extLst>
           </p:cNvPr>
@@ -3946,7 +3946,7 @@
           <p:cNvPr id="5" name="">
             <a:extLst xmlns:a="http://schemas.openxmlformats.org/drawingml/2006/main">
               <a:ext uri="{FF2B5EF4-FFF2-40B4-BE49-F238E27FC236}">
-                <a16:creationId xmlns:a16="http://schemas.microsoft.com/office/drawing/2014/main" id="{082CA7EC-C4E0-43F4-BD91-C095BB74736F}"/>
+                <a16:creationId xmlns:a16="http://schemas.microsoft.com/office/drawing/2014/main" id="{0C6933EA-D2D1-41BA-8850-498B856C8D19}"/>
               </a:ext>
             </a:extLst>
           </p:cNvPr>
@@ -3977,7 +3977,7 @@
           <p:cNvPr id="6" name="01 연구 배경과 목적">
             <a:extLst xmlns:a="http://schemas.openxmlformats.org/drawingml/2006/main">
               <a:ext uri="{FF2B5EF4-FFF2-40B4-BE49-F238E27FC236}">
-                <a16:creationId xmlns:a16="http://schemas.microsoft.com/office/drawing/2014/main" id="{8D949CEF-55A8-4FDD-8B6B-28C4630F12D3}"/>
+                <a16:creationId xmlns:a16="http://schemas.microsoft.com/office/drawing/2014/main" id="{EB239701-7E97-41A0-BFB6-15D9D22685BC}"/>
               </a:ext>
             </a:extLst>
           </p:cNvPr>
@@ -4135,7 +4135,7 @@
           <p:cNvPr id="7" name="검색 증강 생성(Retrieval-Augmented Generation, RAG)은 관련 문서 구간을 검색하고 그 텍">
             <a:extLst xmlns:a="http://schemas.openxmlformats.org/drawingml/2006/main">
               <a:ext uri="{FF2B5EF4-FFF2-40B4-BE49-F238E27FC236}">
-                <a16:creationId xmlns:a16="http://schemas.microsoft.com/office/drawing/2014/main" id="{F944E483-B7D7-4898-B573-13EF8871D6BD}"/>
+                <a16:creationId xmlns:a16="http://schemas.microsoft.com/office/drawing/2014/main" id="{76735A99-0280-408C-A5EE-FDF2B836BB14}"/>
               </a:ext>
             </a:extLst>
           </p:cNvPr>
@@ -4316,7 +4316,7 @@
           <p:cNvPr id="8" name="HyDE: 가상 문서 임베딩(Hypothetical Document Embeddings) 가상 문서 검색 입력 구성[">
             <a:extLst xmlns:a="http://schemas.openxmlformats.org/drawingml/2006/main">
               <a:ext uri="{FF2B5EF4-FFF2-40B4-BE49-F238E27FC236}">
-                <a16:creationId xmlns:a16="http://schemas.microsoft.com/office/drawing/2014/main" id="{CC390CE8-B618-40EF-92AE-9EB9F1A862AF}"/>
+                <a16:creationId xmlns:a16="http://schemas.microsoft.com/office/drawing/2014/main" id="{264F7FE3-C1FC-4E6E-9445-0AB9A6668735}"/>
               </a:ext>
             </a:extLst>
           </p:cNvPr>
@@ -4586,10 +4586,10 @@
       </p:sp>
       <p:sp>
         <p:nvSpPr>
-          <p:cNvPr id="9" name="HyDE는 한국어 등 다국어 검색에서 평가되었다[2]. 한국어 질의–영어 문서 환경에서 HyDE·CAD·SCD의 개별">
+          <p:cNvPr id="9" name="HyDE는 한국어를 포함한 다국어 검색에서 평가되었다[2]. 한국어 질의–영어 문서 환경에서 HyDE·CAD·SCD의">
             <a:extLst xmlns:a="http://schemas.openxmlformats.org/drawingml/2006/main">
               <a:ext uri="{FF2B5EF4-FFF2-40B4-BE49-F238E27FC236}">
-                <a16:creationId xmlns:a16="http://schemas.microsoft.com/office/drawing/2014/main" id="{7441512C-2F2D-4293-8A03-34A66CCD8C12}"/>
+                <a16:creationId xmlns:a16="http://schemas.microsoft.com/office/drawing/2014/main" id="{EEE91773-F2A8-46BC-9F66-52F03F8BB5E2}"/>
               </a:ext>
             </a:extLst>
           </p:cNvPr>
@@ -4737,7 +4737,7 @@
                 <a:ea typeface="Malgun Gothic"/>
                 <a:cs typeface="Malgun Gothic"/>
               </a:rPr>
-              <a:t>HyDE는 한국어 등 다국어 검색에서 평가되었다[2].</a:t>
+              <a:t>HyDE는 한국어를 포함한 다국어 검색에서 평가되었다[2].</a:t>
             </a:r>
           </a:p>
           <a:p xmlns:a="http://schemas.openxmlformats.org/drawingml/2006/main">
@@ -4793,7 +4793,7 @@
           <p:cNvPr id="10" name="">
             <a:extLst xmlns:a="http://schemas.openxmlformats.org/drawingml/2006/main">
               <a:ext uri="{FF2B5EF4-FFF2-40B4-BE49-F238E27FC236}">
-                <a16:creationId xmlns:a16="http://schemas.microsoft.com/office/drawing/2014/main" id="{AB18E6E9-6112-4C1C-BCA0-E7489CDAC183}"/>
+                <a16:creationId xmlns:a16="http://schemas.microsoft.com/office/drawing/2014/main" id="{53DD512A-CA2D-4291-BB17-BC7D04DEF152}"/>
               </a:ext>
             </a:extLst>
           </p:cNvPr>
@@ -4824,7 +4824,7 @@
           <p:cNvPr id="11" name="02 Paper-RAG 구조와 기법 적용 위치">
             <a:extLst xmlns:a="http://schemas.openxmlformats.org/drawingml/2006/main">
               <a:ext uri="{FF2B5EF4-FFF2-40B4-BE49-F238E27FC236}">
-                <a16:creationId xmlns:a16="http://schemas.microsoft.com/office/drawing/2014/main" id="{438DC46B-263F-4FD4-9624-5D3338F4A549}"/>
+                <a16:creationId xmlns:a16="http://schemas.microsoft.com/office/drawing/2014/main" id="{70563DA3-6481-4079-82B2-1AC4167FD0F3}"/>
               </a:ext>
             </a:extLst>
           </p:cNvPr>
@@ -4982,7 +4982,7 @@
           <p:cNvPr id="12" name="Paper-RAG는 실험에 사용한 고정 검색·생성 파이프라인이다.">
             <a:extLst xmlns:a="http://schemas.openxmlformats.org/drawingml/2006/main">
               <a:ext uri="{FF2B5EF4-FFF2-40B4-BE49-F238E27FC236}">
-                <a16:creationId xmlns:a16="http://schemas.microsoft.com/office/drawing/2014/main" id="{2F6CF8C0-9341-455F-A856-DB9A1C1CEE00}"/>
+                <a16:creationId xmlns:a16="http://schemas.microsoft.com/office/drawing/2014/main" id="{A49FFED5-FCDF-426E-9C5A-1595DA814960}"/>
               </a:ext>
             </a:extLst>
           </p:cNvPr>
@@ -5140,7 +5140,7 @@
           <p:cNvPr id="13" name="">
             <a:extLst xmlns:a="http://schemas.openxmlformats.org/drawingml/2006/main">
               <a:ext uri="{FF2B5EF4-FFF2-40B4-BE49-F238E27FC236}">
-                <a16:creationId xmlns:a16="http://schemas.microsoft.com/office/drawing/2014/main" id="{09865E6C-21E1-4A73-A751-A2E6DDC42935}"/>
+                <a16:creationId xmlns:a16="http://schemas.microsoft.com/office/drawing/2014/main" id="{2B0329C8-30E4-47CB-8A82-D021831C9316}"/>
               </a:ext>
             </a:extLst>
           </p:cNvPr>
@@ -5173,7 +5173,7 @@
           <p:cNvPr id="14" name="한국어 질의 HyDE OFF: 원질의 HyDE ON: 영어 번역·가상 문서">
             <a:extLst xmlns:a="http://schemas.openxmlformats.org/drawingml/2006/main">
               <a:ext uri="{FF2B5EF4-FFF2-40B4-BE49-F238E27FC236}">
-                <a16:creationId xmlns:a16="http://schemas.microsoft.com/office/drawing/2014/main" id="{F55DA3B3-354C-4EC8-9ABA-F2D601C96B30}"/>
+                <a16:creationId xmlns:a16="http://schemas.microsoft.com/office/drawing/2014/main" id="{D0FA7350-3DF6-4C07-A792-00D91A4235A3}"/>
               </a:ext>
             </a:extLst>
           </p:cNvPr>
@@ -5377,7 +5377,7 @@
           <p:cNvPr id="15" name="">
             <a:extLst xmlns:a="http://schemas.openxmlformats.org/drawingml/2006/main">
               <a:ext uri="{FF2B5EF4-FFF2-40B4-BE49-F238E27FC236}">
-                <a16:creationId xmlns:a16="http://schemas.microsoft.com/office/drawing/2014/main" id="{504C5182-1A93-4388-9B51-6982EB3B193E}"/>
+                <a16:creationId xmlns:a16="http://schemas.microsoft.com/office/drawing/2014/main" id="{30AB55E9-E3F7-4106-9237-44C7C992A795}"/>
               </a:ext>
             </a:extLst>
           </p:cNvPr>
@@ -5410,7 +5410,7 @@
           <p:cNvPr id="16" name="BM25 희소 검색[6] 한국어 원질의 사용">
             <a:extLst xmlns:a="http://schemas.openxmlformats.org/drawingml/2006/main">
               <a:ext uri="{FF2B5EF4-FFF2-40B4-BE49-F238E27FC236}">
-                <a16:creationId xmlns:a16="http://schemas.microsoft.com/office/drawing/2014/main" id="{D0DDEE65-E1A3-4BAD-844D-D57FBF0C4B3B}"/>
+                <a16:creationId xmlns:a16="http://schemas.microsoft.com/office/drawing/2014/main" id="{22210D0C-A786-42DA-9311-386002A3CCE2}"/>
               </a:ext>
             </a:extLst>
           </p:cNvPr>
@@ -5591,7 +5591,7 @@
           <p:cNvPr id="17" name="">
             <a:extLst xmlns:a="http://schemas.openxmlformats.org/drawingml/2006/main">
               <a:ext uri="{FF2B5EF4-FFF2-40B4-BE49-F238E27FC236}">
-                <a16:creationId xmlns:a16="http://schemas.microsoft.com/office/drawing/2014/main" id="{D8D0A2E9-78F0-455D-BDDA-A947524DC343}"/>
+                <a16:creationId xmlns:a16="http://schemas.microsoft.com/office/drawing/2014/main" id="{BFA2BE0E-B09F-4C6F-8C71-61D5146D83D0}"/>
               </a:ext>
             </a:extLst>
           </p:cNvPr>
@@ -5624,7 +5624,7 @@
           <p:cNvPr id="18" name="BGE-M3 밀집 검색[5]">
             <a:extLst xmlns:a="http://schemas.openxmlformats.org/drawingml/2006/main">
               <a:ext uri="{FF2B5EF4-FFF2-40B4-BE49-F238E27FC236}">
-                <a16:creationId xmlns:a16="http://schemas.microsoft.com/office/drawing/2014/main" id="{CA787A4A-1279-4BEF-AF99-57ED132FAEF5}"/>
+                <a16:creationId xmlns:a16="http://schemas.microsoft.com/office/drawing/2014/main" id="{1270A6B1-1A25-43F6-A994-A4D2A4F1B766}"/>
               </a:ext>
             </a:extLst>
           </p:cNvPr>
@@ -5782,7 +5782,7 @@
           <p:cNvPr id="19" name="">
             <a:extLst xmlns:a="http://schemas.openxmlformats.org/drawingml/2006/main">
               <a:ext uri="{FF2B5EF4-FFF2-40B4-BE49-F238E27FC236}">
-                <a16:creationId xmlns:a16="http://schemas.microsoft.com/office/drawing/2014/main" id="{CC366CB8-05E1-40E5-B4F5-D1B28B23F601}"/>
+                <a16:creationId xmlns:a16="http://schemas.microsoft.com/office/drawing/2014/main" id="{ADE26CB3-643A-40DB-99A3-568E03727E57}"/>
               </a:ext>
             </a:extLst>
           </p:cNvPr>
@@ -5815,7 +5815,7 @@
           <p:cNvPr id="20" name="가중 RRF[7] 0.6 / 0.4, k=60">
             <a:extLst xmlns:a="http://schemas.openxmlformats.org/drawingml/2006/main">
               <a:ext uri="{FF2B5EF4-FFF2-40B4-BE49-F238E27FC236}">
-                <a16:creationId xmlns:a16="http://schemas.microsoft.com/office/drawing/2014/main" id="{422344FA-B291-462F-B4A4-62F19C965A77}"/>
+                <a16:creationId xmlns:a16="http://schemas.microsoft.com/office/drawing/2014/main" id="{5FE4BAF2-8425-45B5-930F-CCDB66245ED3}"/>
               </a:ext>
             </a:extLst>
           </p:cNvPr>
@@ -5996,7 +5996,7 @@
           <p:cNvPr id="21" name="">
             <a:extLst xmlns:a="http://schemas.openxmlformats.org/drawingml/2006/main">
               <a:ext uri="{FF2B5EF4-FFF2-40B4-BE49-F238E27FC236}">
-                <a16:creationId xmlns:a16="http://schemas.microsoft.com/office/drawing/2014/main" id="{F36FD694-979E-466F-A8AB-384F6A419CF5}"/>
+                <a16:creationId xmlns:a16="http://schemas.microsoft.com/office/drawing/2014/main" id="{F4114495-9911-43C1-8D10-29C3F435FF1C}"/>
               </a:ext>
             </a:extLst>
           </p:cNvPr>
@@ -6028,7 +6028,7 @@
           <p:cNvPr id="22" name="">
             <a:extLst xmlns:a="http://schemas.openxmlformats.org/drawingml/2006/main">
               <a:ext uri="{FF2B5EF4-FFF2-40B4-BE49-F238E27FC236}">
-                <a16:creationId xmlns:a16="http://schemas.microsoft.com/office/drawing/2014/main" id="{E56784AF-6584-4DD1-AF92-D8DA6EE0A735}"/>
+                <a16:creationId xmlns:a16="http://schemas.microsoft.com/office/drawing/2014/main" id="{8592AE65-097C-49D9-B3A9-A909775F771B}"/>
               </a:ext>
             </a:extLst>
           </p:cNvPr>
@@ -6060,7 +6060,7 @@
           <p:cNvPr id="23" name="">
             <a:extLst xmlns:a="http://schemas.openxmlformats.org/drawingml/2006/main">
               <a:ext uri="{FF2B5EF4-FFF2-40B4-BE49-F238E27FC236}">
-                <a16:creationId xmlns:a16="http://schemas.microsoft.com/office/drawing/2014/main" id="{5A85AD56-5C88-4164-A04C-2F19223412A4}"/>
+                <a16:creationId xmlns:a16="http://schemas.microsoft.com/office/drawing/2014/main" id="{637554CB-F632-4498-B350-93130DE07E53}"/>
               </a:ext>
             </a:extLst>
           </p:cNvPr>
@@ -6092,7 +6092,7 @@
           <p:cNvPr id="24" name="">
             <a:extLst xmlns:a="http://schemas.openxmlformats.org/drawingml/2006/main">
               <a:ext uri="{FF2B5EF4-FFF2-40B4-BE49-F238E27FC236}">
-                <a16:creationId xmlns:a16="http://schemas.microsoft.com/office/drawing/2014/main" id="{46AB8170-94B5-4794-8576-54B098E8FD9B}"/>
+                <a16:creationId xmlns:a16="http://schemas.microsoft.com/office/drawing/2014/main" id="{979EA324-C1B2-4649-8C34-753A713EBC8D}"/>
               </a:ext>
             </a:extLst>
           </p:cNvPr>
@@ -6122,10 +6122,10 @@
       </p:sp>
       <p:sp>
         <p:nvSpPr>
-          <p:cNvPr id="25" name="원질의·구간 쌍 CrossEncoder 재정렬[8][M2] 상위 5개 구간 선택·문맥 길이 관리">
+          <p:cNvPr id="25" name="원질의·구간 쌍 CrossEncoder 재정렬[8][M2] 상위 5개 구간 선택·입력 길이 관리">
             <a:extLst xmlns:a="http://schemas.openxmlformats.org/drawingml/2006/main">
               <a:ext uri="{FF2B5EF4-FFF2-40B4-BE49-F238E27FC236}">
-                <a16:creationId xmlns:a16="http://schemas.microsoft.com/office/drawing/2014/main" id="{9609FE25-57BA-43D1-89E6-3ADA9DA6D14B}"/>
+                <a16:creationId xmlns:a16="http://schemas.microsoft.com/office/drawing/2014/main" id="{25CC13DA-564B-47AE-89E2-AC22A18B9C06}"/>
               </a:ext>
             </a:extLst>
           </p:cNvPr>
@@ -6296,7 +6296,7 @@
                 <a:ea typeface="Malgun Gothic"/>
                 <a:cs typeface="Malgun Gothic"/>
               </a:rPr>
-              <a:t>상위 5개 구간 선택·문맥 길이 관리</a:t>
+              <a:t>상위 5개 구간 선택·입력 길이 관리</a:t>
             </a:r>
           </a:p>
         </p:txBody>
@@ -6306,7 +6306,7 @@
           <p:cNvPr id="26" name="">
             <a:extLst xmlns:a="http://schemas.openxmlformats.org/drawingml/2006/main">
               <a:ext uri="{FF2B5EF4-FFF2-40B4-BE49-F238E27FC236}">
-                <a16:creationId xmlns:a16="http://schemas.microsoft.com/office/drawing/2014/main" id="{EA25553B-72A8-424E-9D61-9A5DAC7C675E}"/>
+                <a16:creationId xmlns:a16="http://schemas.microsoft.com/office/drawing/2014/main" id="{D01E416E-7B92-451D-B666-13E59680B6E4}"/>
               </a:ext>
             </a:extLst>
           </p:cNvPr>
@@ -6339,7 +6339,7 @@
           <p:cNvPr id="27" name="Mi:dm 2.0 Base Instruct[M1] CAD 로짓 결합 후 SCD 언어별 조정, 최종 답변 생성">
             <a:extLst xmlns:a="http://schemas.openxmlformats.org/drawingml/2006/main">
               <a:ext uri="{FF2B5EF4-FFF2-40B4-BE49-F238E27FC236}">
-                <a16:creationId xmlns:a16="http://schemas.microsoft.com/office/drawing/2014/main" id="{518D69AC-0FBA-40C5-AB18-EADFA7303051}"/>
+                <a16:creationId xmlns:a16="http://schemas.microsoft.com/office/drawing/2014/main" id="{82D33F64-92E1-4669-8729-C1F040716127}"/>
               </a:ext>
             </a:extLst>
           </p:cNvPr>
@@ -6520,7 +6520,7 @@
           <p:cNvPr id="28" name="">
             <a:extLst xmlns:a="http://schemas.openxmlformats.org/drawingml/2006/main">
               <a:ext uri="{FF2B5EF4-FFF2-40B4-BE49-F238E27FC236}">
-                <a16:creationId xmlns:a16="http://schemas.microsoft.com/office/drawing/2014/main" id="{01517BC2-6B58-4ADD-8AC2-666C5CB6D320}"/>
+                <a16:creationId xmlns:a16="http://schemas.microsoft.com/office/drawing/2014/main" id="{F9FE418E-2F41-4A46-8A3F-E5F8AFA8F0E3}"/>
               </a:ext>
             </a:extLst>
           </p:cNvPr>
@@ -6552,7 +6552,7 @@
           <p:cNvPr id="29" name="">
             <a:extLst xmlns:a="http://schemas.openxmlformats.org/drawingml/2006/main">
               <a:ext uri="{FF2B5EF4-FFF2-40B4-BE49-F238E27FC236}">
-                <a16:creationId xmlns:a16="http://schemas.microsoft.com/office/drawing/2014/main" id="{28721863-CA08-469C-96BC-485DE2265EF8}"/>
+                <a16:creationId xmlns:a16="http://schemas.microsoft.com/office/drawing/2014/main" id="{A0B7D102-7142-4745-B2F3-5861AF5A6AD0}"/>
               </a:ext>
             </a:extLst>
           </p:cNvPr>
@@ -6584,7 +6584,7 @@
           <p:cNvPr id="30" name="">
             <a:extLst xmlns:a="http://schemas.openxmlformats.org/drawingml/2006/main">
               <a:ext uri="{FF2B5EF4-FFF2-40B4-BE49-F238E27FC236}">
-                <a16:creationId xmlns:a16="http://schemas.microsoft.com/office/drawing/2014/main" id="{210B2802-B92D-4E74-AC9C-3D43C44E4F84}"/>
+                <a16:creationId xmlns:a16="http://schemas.microsoft.com/office/drawing/2014/main" id="{07CB35E2-A813-44BF-890D-9B3C02238C1D}"/>
               </a:ext>
             </a:extLst>
           </p:cNvPr>
@@ -6615,7 +6615,7 @@
           <p:cNvPr id="31" name="03 3요인 완전요인 실험 설계">
             <a:extLst xmlns:a="http://schemas.openxmlformats.org/drawingml/2006/main">
               <a:ext uri="{FF2B5EF4-FFF2-40B4-BE49-F238E27FC236}">
-                <a16:creationId xmlns:a16="http://schemas.microsoft.com/office/drawing/2014/main" id="{78A3373B-0A9D-4529-8EF6-3AC3C96D63BD}"/>
+                <a16:creationId xmlns:a16="http://schemas.microsoft.com/office/drawing/2014/main" id="{0D8CA60C-18D4-4689-B927-38A94448A0B9}"/>
               </a:ext>
             </a:extLst>
           </p:cNvPr>
@@ -6773,7 +6773,7 @@
           <p:cNvPr id="32" name="H=HyDE, C=CAD, S=SCD   0=미적용, 1=적용">
             <a:extLst xmlns:a="http://schemas.openxmlformats.org/drawingml/2006/main">
               <a:ext uri="{FF2B5EF4-FFF2-40B4-BE49-F238E27FC236}">
-                <a16:creationId xmlns:a16="http://schemas.microsoft.com/office/drawing/2014/main" id="{D1D5D367-CA52-4DA3-AA01-5984FFC8B102}"/>
+                <a16:creationId xmlns:a16="http://schemas.microsoft.com/office/drawing/2014/main" id="{6B96E66F-F899-485C-ACBD-371F77DD727A}"/>
               </a:ext>
             </a:extLst>
           </p:cNvPr>
@@ -6931,7 +6931,7 @@
           <p:cNvPr id="33" name="">
             <a:extLst xmlns:a="http://schemas.openxmlformats.org/drawingml/2006/main">
               <a:ext uri="{FF2B5EF4-FFF2-40B4-BE49-F238E27FC236}">
-                <a16:creationId xmlns:a16="http://schemas.microsoft.com/office/drawing/2014/main" id="{C3BC8A11-3B74-4240-9922-1C2A6D735EFC}"/>
+                <a16:creationId xmlns:a16="http://schemas.microsoft.com/office/drawing/2014/main" id="{810D0D89-E0E5-486B-885C-C70AB4A728ED}"/>
               </a:ext>
             </a:extLst>
           </p:cNvPr>
@@ -8461,7 +8461,7 @@
           <p:cNvPr id="34" name="같은 질의 60개 × 8조건 반복측정 = 480개 생성 기록">
             <a:extLst xmlns:a="http://schemas.openxmlformats.org/drawingml/2006/main">
               <a:ext uri="{FF2B5EF4-FFF2-40B4-BE49-F238E27FC236}">
-                <a16:creationId xmlns:a16="http://schemas.microsoft.com/office/drawing/2014/main" id="{078D1A9C-A262-4CDA-8905-D8DE88F863AD}"/>
+                <a16:creationId xmlns:a16="http://schemas.microsoft.com/office/drawing/2014/main" id="{BECD48E8-8D7A-4887-9200-F8763108EA15}"/>
               </a:ext>
             </a:extLst>
           </p:cNvPr>
@@ -8619,7 +8619,7 @@
           <p:cNvPr id="35" name="생성 512토큰, CAD α=0.5, SCD α=1.1·β=0.9·Tstart=5">
             <a:extLst xmlns:a="http://schemas.openxmlformats.org/drawingml/2006/main">
               <a:ext uri="{FF2B5EF4-FFF2-40B4-BE49-F238E27FC236}">
-                <a16:creationId xmlns:a16="http://schemas.microsoft.com/office/drawing/2014/main" id="{E4A45FB3-1DB6-4774-9F72-C3F409182A83}"/>
+                <a16:creationId xmlns:a16="http://schemas.microsoft.com/office/drawing/2014/main" id="{7AF80AF9-8150-449F-9AB0-3D3BBCCA6313}"/>
               </a:ext>
             </a:extLst>
           </p:cNvPr>
@@ -8777,7 +8777,7 @@
           <p:cNvPr id="36" name="문서 요약을 15개 내용 단위로 나누어 질의를 작성하고, 총 60개 질의의 원문 페이지·정답 근거·답변 가능성을 확인">
             <a:extLst xmlns:a="http://schemas.openxmlformats.org/drawingml/2006/main">
               <a:ext uri="{FF2B5EF4-FFF2-40B4-BE49-F238E27FC236}">
-                <a16:creationId xmlns:a16="http://schemas.microsoft.com/office/drawing/2014/main" id="{6DDA1723-3294-441D-83EB-9842CA8A28C9}"/>
+                <a16:creationId xmlns:a16="http://schemas.microsoft.com/office/drawing/2014/main" id="{9DE22CE4-2591-4B6F-930E-8AE0E06FC3EE}"/>
               </a:ext>
             </a:extLst>
           </p:cNvPr>
@@ -8958,7 +8958,7 @@
           <p:cNvPr id="37" name="">
             <a:extLst xmlns:a="http://schemas.openxmlformats.org/drawingml/2006/main">
               <a:ext uri="{FF2B5EF4-FFF2-40B4-BE49-F238E27FC236}">
-                <a16:creationId xmlns:a16="http://schemas.microsoft.com/office/drawing/2014/main" id="{98BEAC82-B3FD-45C4-A0DA-C894B67D1ECA}"/>
+                <a16:creationId xmlns:a16="http://schemas.microsoft.com/office/drawing/2014/main" id="{BB7D6B8B-BC7B-4F32-BA88-CF986D56E9B0}"/>
               </a:ext>
             </a:extLst>
           </p:cNvPr>
@@ -8989,7 +8989,7 @@
           <p:cNvPr id="38" name="04 평가 지표 및 실험·통계 방법">
             <a:extLst xmlns:a="http://schemas.openxmlformats.org/drawingml/2006/main">
               <a:ext uri="{FF2B5EF4-FFF2-40B4-BE49-F238E27FC236}">
-                <a16:creationId xmlns:a16="http://schemas.microsoft.com/office/drawing/2014/main" id="{1C2AC397-8D8E-4B7F-B11B-1C24458AF243}"/>
+                <a16:creationId xmlns:a16="http://schemas.microsoft.com/office/drawing/2014/main" id="{1EFF305F-73A6-4621-9119-01D3B2F76CBE}"/>
               </a:ext>
             </a:extLst>
           </p:cNvPr>
@@ -9147,7 +9147,7 @@
           <p:cNvPr id="39" name="근거 충실도: 높을수록 검색 근거가 지지하는 답변 주장 비율이 크다. 답변 관련성: 높을수록 답변 기반 질문과 원질문">
             <a:extLst xmlns:a="http://schemas.openxmlformats.org/drawingml/2006/main">
               <a:ext uri="{FF2B5EF4-FFF2-40B4-BE49-F238E27FC236}">
-                <a16:creationId xmlns:a16="http://schemas.microsoft.com/office/drawing/2014/main" id="{5DA0CC21-F217-49D5-AE74-163C9AFD4D8D}"/>
+                <a16:creationId xmlns:a16="http://schemas.microsoft.com/office/drawing/2014/main" id="{FD0807A8-1646-437A-9DE4-245C02141654}"/>
               </a:ext>
             </a:extLst>
           </p:cNvPr>
@@ -9397,7 +9397,7 @@
           <p:cNvPr id="40" name="품질 관측값은 0~1이다. 관련성 +0.080은 ON−OFF 평균 차이 0.080점이다. SD는 질의별 분포의 표본표">
             <a:extLst xmlns:a="http://schemas.openxmlformats.org/drawingml/2006/main">
               <a:ext uri="{FF2B5EF4-FFF2-40B4-BE49-F238E27FC236}">
-                <a16:creationId xmlns:a16="http://schemas.microsoft.com/office/drawing/2014/main" id="{C2E699DF-B4FA-48E9-971C-781E7B4B17C1}"/>
+                <a16:creationId xmlns:a16="http://schemas.microsoft.com/office/drawing/2014/main" id="{7F4D7193-6242-48E4-B011-335BA633D070}"/>
               </a:ext>
             </a:extLst>
           </p:cNvPr>
@@ -9601,7 +9601,7 @@
           <p:cNvPr id="41" name="평가 예시  ext_raptor_011, H0C0S0">
             <a:extLst xmlns:a="http://schemas.openxmlformats.org/drawingml/2006/main">
               <a:ext uri="{FF2B5EF4-FFF2-40B4-BE49-F238E27FC236}">
-                <a16:creationId xmlns:a16="http://schemas.microsoft.com/office/drawing/2014/main" id="{E83DCFB9-23AE-4599-9D91-9CE6CD537763}"/>
+                <a16:creationId xmlns:a16="http://schemas.microsoft.com/office/drawing/2014/main" id="{C3412673-FF58-4B98-BDD5-3CBD33AAA2B1}"/>
               </a:ext>
             </a:extLst>
           </p:cNvPr>
@@ -9759,7 +9759,7 @@
           <p:cNvPr id="42" name="질문: Cinderella 사례의 정성 분석에서 RAPTOR의 tree-based retrieval이 DPR보다 주제">
             <a:extLst xmlns:a="http://schemas.openxmlformats.org/drawingml/2006/main">
               <a:ext uri="{FF2B5EF4-FFF2-40B4-BE49-F238E27FC236}">
-                <a16:creationId xmlns:a16="http://schemas.microsoft.com/office/drawing/2014/main" id="{8E532899-727A-4EAA-A060-E244AD849D8C}"/>
+                <a16:creationId xmlns:a16="http://schemas.microsoft.com/office/drawing/2014/main" id="{DEE45DEB-C207-4D3A-800A-9765715FE6CF}"/>
               </a:ext>
             </a:extLst>
           </p:cNvPr>
@@ -9940,7 +9940,7 @@
           <p:cNvPr id="43" name="검색 근거(PDF p.9): “By providing both the original text and higher-l">
             <a:extLst xmlns:a="http://schemas.openxmlformats.org/drawingml/2006/main">
               <a:ext uri="{FF2B5EF4-FFF2-40B4-BE49-F238E27FC236}">
-                <a16:creationId xmlns:a16="http://schemas.microsoft.com/office/drawing/2014/main" id="{E8B24F52-820F-438E-B9E2-E46199A906DB}"/>
+                <a16:creationId xmlns:a16="http://schemas.microsoft.com/office/drawing/2014/main" id="{39282E8E-0A93-46D3-B4DA-20F99524F491}"/>
               </a:ext>
             </a:extLst>
           </p:cNvPr>
@@ -10144,7 +10144,7 @@
           <p:cNvPr id="44" name="참조 답변 요지(PDF p.20): RAPTOR는 이야기의 주요 부분을, DPR은 이야기의 좁은 일부를 자세히 검색한">
             <a:extLst xmlns:a="http://schemas.openxmlformats.org/drawingml/2006/main">
               <a:ext uri="{FF2B5EF4-FFF2-40B4-BE49-F238E27FC236}">
-                <a16:creationId xmlns:a16="http://schemas.microsoft.com/office/drawing/2014/main" id="{5D70A1C8-A9DF-4E2F-B51C-31D407D194C7}"/>
+                <a16:creationId xmlns:a16="http://schemas.microsoft.com/office/drawing/2014/main" id="{0DC59136-55D7-4F06-9243-1C356041EBF9}"/>
               </a:ext>
             </a:extLst>
           </p:cNvPr>
@@ -10325,7 +10325,7 @@
           <p:cNvPr id="45" name="생성 답변 발췌: “질문의 요구사항에 따라 서로 다른 층위(layer)에서 노드를 선택할 수 있습니다.”">
             <a:extLst xmlns:a="http://schemas.openxmlformats.org/drawingml/2006/main">
               <a:ext uri="{FF2B5EF4-FFF2-40B4-BE49-F238E27FC236}">
-                <a16:creationId xmlns:a16="http://schemas.microsoft.com/office/drawing/2014/main" id="{9C2C350A-3287-4938-9960-625A1AF9AC38}"/>
+                <a16:creationId xmlns:a16="http://schemas.microsoft.com/office/drawing/2014/main" id="{0122C19A-96E0-4A2D-8EB6-9A5FC2D7D46F}"/>
               </a:ext>
             </a:extLst>
           </p:cNvPr>
@@ -10503,10 +10503,10 @@
       </p:sp>
       <p:sp>
         <p:nvSpPr>
-          <p:cNvPr id="46" name="충실도 1.000: 추출된 답변 주장을 검색 문맥이 모두 지지 관련성 0.937: 답변 기반 질문과 원질문의 평균 의">
+          <p:cNvPr id="46" name="충실도 1.000: 추출된 답변 주장을 검색 결과가 모두 지지 관련성 0.937: 답변 기반 질문과 원질문의 평균 의">
             <a:extLst xmlns:a="http://schemas.openxmlformats.org/drawingml/2006/main">
               <a:ext uri="{FF2B5EF4-FFF2-40B4-BE49-F238E27FC236}">
-                <a16:creationId xmlns:a16="http://schemas.microsoft.com/office/drawing/2014/main" id="{492D705E-5CD0-4326-BF36-68E776982E4F}"/>
+                <a16:creationId xmlns:a16="http://schemas.microsoft.com/office/drawing/2014/main" id="{0F0031D5-188C-400B-8DF3-C56BCB1C79F7}"/>
               </a:ext>
             </a:extLst>
           </p:cNvPr>
@@ -10654,7 +10654,7 @@
                 <a:ea typeface="Malgun Gothic"/>
                 <a:cs typeface="Malgun Gothic"/>
               </a:rPr>
-              <a:t>충실도 1.000: 추출된 답변 주장을 검색 문맥이 모두 지지</a:t>
+              <a:t>충실도 1.000: 추출된 답변 주장을 검색 결과가 모두 지지</a:t>
             </a:r>
           </a:p>
           <a:p xmlns:a="http://schemas.openxmlformats.org/drawingml/2006/main">
@@ -10684,10 +10684,10 @@
       </p:sp>
       <p:sp>
         <p:nvSpPr>
-          <p:cNvPr id="47" name="평가: RAGAS 0.2.15[10]·gpt-4o·BGE-M3, 저장 답변 평가 S0 영어 / S1 한국어 번역 평가">
+          <p:cNvPr id="47" name="평가: RAGAS 0.2.15[10]·gpt-4o·BGE-M3, 저장 답변 평가 평가 언어: S0 영어 / S1 한국">
             <a:extLst xmlns:a="http://schemas.openxmlformats.org/drawingml/2006/main">
               <a:ext uri="{FF2B5EF4-FFF2-40B4-BE49-F238E27FC236}">
-                <a16:creationId xmlns:a16="http://schemas.microsoft.com/office/drawing/2014/main" id="{C0CEBE01-FE8E-4ACB-A7DC-76BC2674A26F}"/>
+                <a16:creationId xmlns:a16="http://schemas.microsoft.com/office/drawing/2014/main" id="{11853166-0F27-42FA-8B71-7177C1D3BB98}"/>
               </a:ext>
             </a:extLst>
           </p:cNvPr>
@@ -10858,7 +10858,7 @@
                 <a:ea typeface="Malgun Gothic"/>
                 <a:cs typeface="Malgun Gothic"/>
               </a:rPr>
-              <a:t>S0 영어 / S1 한국어 번역 평가 문맥, 모든 생성 문맥은 영어</a:t>
+              <a:t>평가 언어: S0 영어 / S1 한국어 번역, 생성 입력은 모두 영어</a:t>
             </a:r>
           </a:p>
         </p:txBody>
@@ -10868,7 +10868,7 @@
           <p:cNvPr id="48" name="반복측정 분산분석(ANOVA)·대응 t-검정, 양측 α=0.05 품질 S별 H×C / 문자·시간 H×C×S, SCD ">
             <a:extLst xmlns:a="http://schemas.openxmlformats.org/drawingml/2006/main">
               <a:ext uri="{FF2B5EF4-FFF2-40B4-BE49-F238E27FC236}">
-                <a16:creationId xmlns:a16="http://schemas.microsoft.com/office/drawing/2014/main" id="{4779FA00-3925-420C-A2E6-5F22BD27451D}"/>
+                <a16:creationId xmlns:a16="http://schemas.microsoft.com/office/drawing/2014/main" id="{2C6E7E6B-0306-4EA9-822E-C4C88550DCCB}"/>
               </a:ext>
             </a:extLst>
           </p:cNvPr>
@@ -11049,7 +11049,7 @@
           <p:cNvPr id="49" name="">
             <a:extLst xmlns:a="http://schemas.openxmlformats.org/drawingml/2006/main">
               <a:ext uri="{FF2B5EF4-FFF2-40B4-BE49-F238E27FC236}">
-                <a16:creationId xmlns:a16="http://schemas.microsoft.com/office/drawing/2014/main" id="{C0DECB3A-6188-4E31-BD60-0B3F9566883B}"/>
+                <a16:creationId xmlns:a16="http://schemas.microsoft.com/office/drawing/2014/main" id="{FD264E1F-B597-4562-BC61-32470FDE4F2A}"/>
               </a:ext>
             </a:extLst>
           </p:cNvPr>
@@ -11080,7 +11080,7 @@
           <p:cNvPr id="50" name="05 조합별 결과와 통계 검정">
             <a:extLst xmlns:a="http://schemas.openxmlformats.org/drawingml/2006/main">
               <a:ext uri="{FF2B5EF4-FFF2-40B4-BE49-F238E27FC236}">
-                <a16:creationId xmlns:a16="http://schemas.microsoft.com/office/drawing/2014/main" id="{10E30CC0-BFAE-4E54-B4F7-8FEA81626F19}"/>
+                <a16:creationId xmlns:a16="http://schemas.microsoft.com/office/drawing/2014/main" id="{95678E53-9946-4562-A735-54D6DA885E15}"/>
               </a:ext>
             </a:extLst>
           </p:cNvPr>
@@ -11238,7 +11238,7 @@
           <p:cNvPr id="51" name="HyDE·CAD·SCD 8조합의 품질·한국어 비율·시간 평균(SD)">
             <a:extLst xmlns:a="http://schemas.openxmlformats.org/drawingml/2006/main">
               <a:ext uri="{FF2B5EF4-FFF2-40B4-BE49-F238E27FC236}">
-                <a16:creationId xmlns:a16="http://schemas.microsoft.com/office/drawing/2014/main" id="{655E4F36-D737-408F-9826-78E163897E75}"/>
+                <a16:creationId xmlns:a16="http://schemas.microsoft.com/office/drawing/2014/main" id="{0F99F741-6688-41A4-8823-BC4FFF749F26}"/>
               </a:ext>
             </a:extLst>
           </p:cNvPr>
@@ -11396,7 +11396,7 @@
           <p:cNvPr id="52" name="">
             <a:extLst xmlns:a="http://schemas.openxmlformats.org/drawingml/2006/main">
               <a:ext uri="{FF2B5EF4-FFF2-40B4-BE49-F238E27FC236}">
-                <a16:creationId xmlns:a16="http://schemas.microsoft.com/office/drawing/2014/main" id="{DAD4AA4A-2792-42EE-A0DE-B53ABDFF1205}"/>
+                <a16:creationId xmlns:a16="http://schemas.microsoft.com/office/drawing/2014/main" id="{907F3F6A-CA6B-4B42-9F65-A64A2DFC4A2A}"/>
               </a:ext>
             </a:extLst>
           </p:cNvPr>
@@ -14756,7 +14756,7 @@
           <p:cNvPr id="53" name="">
             <a:extLst xmlns:a="http://schemas.openxmlformats.org/drawingml/2006/main">
               <a:ext uri="{FF2B5EF4-FFF2-40B4-BE49-F238E27FC236}">
-                <a16:creationId xmlns:a16="http://schemas.microsoft.com/office/drawing/2014/main" id="{A7B2EBAA-010F-4F67-83E3-9FE8736C1110}"/>
+                <a16:creationId xmlns:a16="http://schemas.microsoft.com/office/drawing/2014/main" id="{50E735DA-2EE0-4406-9278-6C9407026C56}"/>
               </a:ext>
             </a:extLst>
           </p:cNvPr>
@@ -14784,10 +14784,10 @@
       </p:sp>
       <p:sp>
         <p:nvSpPr>
-          <p:cNvPr id="54" name="S0: 영어 평가 문맥 / S1: 한국어 번역 평가 문맥 충실도 H0C1S0 n=58, H0C0S1 n=57, 나머지">
+          <p:cNvPr id="54" name="S0: 영어로 평가 / S1: 한국어 번역으로 평가 충실도 H0C1S0 n=58, H0C0S1 n=57, 나머지 n=">
             <a:extLst xmlns:a="http://schemas.openxmlformats.org/drawingml/2006/main">
               <a:ext uri="{FF2B5EF4-FFF2-40B4-BE49-F238E27FC236}">
-                <a16:creationId xmlns:a16="http://schemas.microsoft.com/office/drawing/2014/main" id="{2FE0393A-2664-4404-87A4-A694170D9EE1}"/>
+                <a16:creationId xmlns:a16="http://schemas.microsoft.com/office/drawing/2014/main" id="{75046709-B8A9-4069-A223-55D1E6965471}"/>
               </a:ext>
             </a:extLst>
           </p:cNvPr>
@@ -14935,7 +14935,7 @@
                 <a:ea typeface="Malgun Gothic"/>
                 <a:cs typeface="Malgun Gothic"/>
               </a:rPr>
-              <a:t>S0: 영어 평가 문맥 / S1: 한국어 번역 평가 문맥</a:t>
+              <a:t>S0: 영어로 평가 / S1: 한국어 번역으로 평가</a:t>
             </a:r>
           </a:p>
           <a:p xmlns:a="http://schemas.openxmlformats.org/drawingml/2006/main">
@@ -14991,7 +14991,7 @@
           <p:cNvPr id="55" name="3요인 반복측정 ANOVA  ·  각 효과 df=(1,59)">
             <a:extLst xmlns:a="http://schemas.openxmlformats.org/drawingml/2006/main">
               <a:ext uri="{FF2B5EF4-FFF2-40B4-BE49-F238E27FC236}">
-                <a16:creationId xmlns:a16="http://schemas.microsoft.com/office/drawing/2014/main" id="{3E7DB54C-853A-4AA0-A9B5-B7EE4AE0C88D}"/>
+                <a16:creationId xmlns:a16="http://schemas.microsoft.com/office/drawing/2014/main" id="{3882FF16-E846-400D-9A81-05F42242403F}"/>
               </a:ext>
             </a:extLst>
           </p:cNvPr>
@@ -15149,7 +15149,7 @@
           <p:cNvPr id="56" name="">
             <a:extLst xmlns:a="http://schemas.openxmlformats.org/drawingml/2006/main">
               <a:ext uri="{FF2B5EF4-FFF2-40B4-BE49-F238E27FC236}">
-                <a16:creationId xmlns:a16="http://schemas.microsoft.com/office/drawing/2014/main" id="{D2BDEE2A-C865-4BF3-A1F2-454795AB3EF0}"/>
+                <a16:creationId xmlns:a16="http://schemas.microsoft.com/office/drawing/2014/main" id="{FBEFF174-3C7C-4C0E-A6AF-AD0B9E05ACA0}"/>
               </a:ext>
             </a:extLst>
           </p:cNvPr>
@@ -16859,10 +16859,10 @@
       </p:graphicFrame>
       <p:sp>
         <p:nvSpPr>
-          <p:cNvPr id="57" name="p&lt;0.05: 한국어 비율 S·H×C / 실행 시간 H·C·S·C×S RAGAS H×C 검정은 평가 문맥 언어별로 수">
+          <p:cNvPr id="57" name="p&lt;0.05: 한국어 비율 S·H×C / 실행 시간 H·C·S·C×S RAGAS H×C 검정은 평가 언어별로 수행했으">
             <a:extLst xmlns:a="http://schemas.openxmlformats.org/drawingml/2006/main">
               <a:ext uri="{FF2B5EF4-FFF2-40B4-BE49-F238E27FC236}">
-                <a16:creationId xmlns:a16="http://schemas.microsoft.com/office/drawing/2014/main" id="{94213441-4F82-48A8-9945-97196A39167F}"/>
+                <a16:creationId xmlns:a16="http://schemas.microsoft.com/office/drawing/2014/main" id="{B6008603-5833-4D74-AF42-AFDE4985F7D8}"/>
               </a:ext>
             </a:extLst>
           </p:cNvPr>
@@ -17033,7 +17033,7 @@
                 <a:ea typeface="Malgun Gothic"/>
                 <a:cs typeface="Malgun Gothic"/>
               </a:rPr>
-              <a:t>RAGAS H×C 검정은 평가 문맥 언어별로 수행했으며,</a:t>
+              <a:t>RAGAS H×C 검정은 평가 언어별로 수행했으며,</a:t>
             </a:r>
           </a:p>
           <a:p xmlns:a="http://schemas.openxmlformats.org/drawingml/2006/main">
@@ -17066,7 +17066,7 @@
           <p:cNvPr id="58" name="기법별 대응 비교  ·  질의별 평균 차이, 양측 검정">
             <a:extLst xmlns:a="http://schemas.openxmlformats.org/drawingml/2006/main">
               <a:ext uri="{FF2B5EF4-FFF2-40B4-BE49-F238E27FC236}">
-                <a16:creationId xmlns:a16="http://schemas.microsoft.com/office/drawing/2014/main" id="{A83A5B6B-9286-4C33-94B3-40C5A7056F10}"/>
+                <a16:creationId xmlns:a16="http://schemas.microsoft.com/office/drawing/2014/main" id="{E738EF54-CAFB-4DA8-B1B1-62B796968596}"/>
               </a:ext>
             </a:extLst>
           </p:cNvPr>
@@ -17224,7 +17224,7 @@
           <p:cNvPr id="59" name="">
             <a:extLst xmlns:a="http://schemas.openxmlformats.org/drawingml/2006/main">
               <a:ext uri="{FF2B5EF4-FFF2-40B4-BE49-F238E27FC236}">
-                <a16:creationId xmlns:a16="http://schemas.microsoft.com/office/drawing/2014/main" id="{4CA91D7B-4B10-4E60-95A1-D8BD85064931}"/>
+                <a16:creationId xmlns:a16="http://schemas.microsoft.com/office/drawing/2014/main" id="{C1FE5007-D33D-452F-B7E4-1159DE971303}"/>
               </a:ext>
             </a:extLst>
           </p:cNvPr>
@@ -18237,7 +18237,7 @@
           <p:cNvPr id="60" name="HyDE: C0S0, CAD: H0S0, SCD: H0의 CAD 상태 평균 p: 다중비교 보정 없는 양측 p, dz:">
             <a:extLst xmlns:a="http://schemas.openxmlformats.org/drawingml/2006/main">
               <a:ext uri="{FF2B5EF4-FFF2-40B4-BE49-F238E27FC236}">
-                <a16:creationId xmlns:a16="http://schemas.microsoft.com/office/drawing/2014/main" id="{0360F373-C7A8-4BAB-9CBF-9DA230CC9A38}"/>
+                <a16:creationId xmlns:a16="http://schemas.microsoft.com/office/drawing/2014/main" id="{FDC519F8-214C-4CE9-8A1E-FCFF5193EA6F}"/>
               </a:ext>
             </a:extLst>
           </p:cNvPr>
@@ -18464,7 +18464,7 @@
           <p:cNvPr id="61" name="">
             <a:extLst xmlns:a="http://schemas.openxmlformats.org/drawingml/2006/main">
               <a:ext uri="{FF2B5EF4-FFF2-40B4-BE49-F238E27FC236}">
-                <a16:creationId xmlns:a16="http://schemas.microsoft.com/office/drawing/2014/main" id="{24CF6432-AA43-4634-93A7-26B2FEE8C8F6}"/>
+                <a16:creationId xmlns:a16="http://schemas.microsoft.com/office/drawing/2014/main" id="{88A47597-C87D-49E1-B562-57E722E00F6B}"/>
               </a:ext>
             </a:extLst>
           </p:cNvPr>
@@ -18495,7 +18495,7 @@
           <p:cNvPr id="62" name="06 결과 해석">
             <a:extLst xmlns:a="http://schemas.openxmlformats.org/drawingml/2006/main">
               <a:ext uri="{FF2B5EF4-FFF2-40B4-BE49-F238E27FC236}">
-                <a16:creationId xmlns:a16="http://schemas.microsoft.com/office/drawing/2014/main" id="{5C583980-A700-4E57-BBE1-4E0148BA7B3F}"/>
+                <a16:creationId xmlns:a16="http://schemas.microsoft.com/office/drawing/2014/main" id="{F7C8BA24-D803-4068-9833-87ECD866E268}"/>
               </a:ext>
             </a:extLst>
           </p:cNvPr>
@@ -18653,7 +18653,7 @@
           <p:cNvPr id="63" name="HyDE 관련성은 평균 +0.080점, t(59)=2.236, p=0.029였다. CAD 충실도는 평균 +0.029점">
             <a:extLst xmlns:a="http://schemas.openxmlformats.org/drawingml/2006/main">
               <a:ext uri="{FF2B5EF4-FFF2-40B4-BE49-F238E27FC236}">
-                <a16:creationId xmlns:a16="http://schemas.microsoft.com/office/drawing/2014/main" id="{A598518B-D54E-4E6C-93BA-5EE623CBF783}"/>
+                <a16:creationId xmlns:a16="http://schemas.microsoft.com/office/drawing/2014/main" id="{6FD4FACA-8CCF-41E3-9547-9A10A217EB9D}"/>
               </a:ext>
             </a:extLst>
           </p:cNvPr>
@@ -18880,7 +18880,7 @@
           <p:cNvPr id="64" name="">
             <a:extLst xmlns:a="http://schemas.openxmlformats.org/drawingml/2006/main">
               <a:ext uri="{FF2B5EF4-FFF2-40B4-BE49-F238E27FC236}">
-                <a16:creationId xmlns:a16="http://schemas.microsoft.com/office/drawing/2014/main" id="{AEBE0219-1508-4E0C-89F7-49A2A74338CC}"/>
+                <a16:creationId xmlns:a16="http://schemas.microsoft.com/office/drawing/2014/main" id="{7DA0E778-FFE5-4E17-8764-81049E8D7078}"/>
               </a:ext>
             </a:extLst>
           </p:cNvPr>
@@ -18911,7 +18911,7 @@
           <p:cNvPr id="65" name="07 결론">
             <a:extLst xmlns:a="http://schemas.openxmlformats.org/drawingml/2006/main">
               <a:ext uri="{FF2B5EF4-FFF2-40B4-BE49-F238E27FC236}">
-                <a16:creationId xmlns:a16="http://schemas.microsoft.com/office/drawing/2014/main" id="{486B674A-61D8-4562-A6BB-5C45DFE1621E}"/>
+                <a16:creationId xmlns:a16="http://schemas.microsoft.com/office/drawing/2014/main" id="{BBA5CC2C-EA78-454B-9C85-4297DD269849}"/>
               </a:ext>
             </a:extLst>
           </p:cNvPr>
@@ -19066,10 +19066,10 @@
       </p:sp>
       <p:sp>
         <p:nvSpPr>
-          <p:cNvPr id="66" name="HyDE는 C0S0에서 관련성을 높였고, CAD 충실도 차이는 유의하지 않았다. SCD는 같은 영어 근거에서 한국어 ">
+          <p:cNvPr id="66" name="HyDE는 C0S0에서 관련성을 높였고(p=0.029), CAD 충실도 차이는 p=0.393이었다. SCD는 같은 영">
             <a:extLst xmlns:a="http://schemas.openxmlformats.org/drawingml/2006/main">
               <a:ext uri="{FF2B5EF4-FFF2-40B4-BE49-F238E27FC236}">
-                <a16:creationId xmlns:a16="http://schemas.microsoft.com/office/drawing/2014/main" id="{A6CFB91C-90C0-4EBF-92CC-5DFD802DF078}"/>
+                <a16:creationId xmlns:a16="http://schemas.microsoft.com/office/drawing/2014/main" id="{FE250D17-B2D7-4429-9AA1-CDA727DCE868}"/>
               </a:ext>
             </a:extLst>
           </p:cNvPr>
@@ -19217,7 +19217,7 @@
                 <a:ea typeface="Malgun Gothic"/>
                 <a:cs typeface="Malgun Gothic"/>
               </a:rPr>
-              <a:t>HyDE는 C0S0에서 관련성을 높였고, CAD 충실도 차이는 유의하지 않았다.</a:t>
+              <a:t>HyDE는 C0S0에서 관련성을 높였고(p=0.029), CAD 충실도 차이는 p=0.393이었다.</a:t>
             </a:r>
           </a:p>
           <a:p xmlns:a="http://schemas.openxmlformats.org/drawingml/2006/main">
@@ -19263,7 +19263,7 @@
                 <a:ea typeface="Malgun Gothic"/>
                 <a:cs typeface="Malgun Gothic"/>
               </a:rPr>
-              <a:t>CAD는 두 SCD 상태 모두 실행 시간이 늘었다.</a:t>
+              <a:t>CAD는 실행 시간을 SCD 미적용 3.1배, 적용 2.7배로 늘렸다.</a:t>
             </a:r>
           </a:p>
           <a:p xmlns:a="http://schemas.openxmlformats.org/drawingml/2006/main">
@@ -19319,7 +19319,7 @@
           <p:cNvPr id="67" name="">
             <a:extLst xmlns:a="http://schemas.openxmlformats.org/drawingml/2006/main">
               <a:ext uri="{FF2B5EF4-FFF2-40B4-BE49-F238E27FC236}">
-                <a16:creationId xmlns:a16="http://schemas.microsoft.com/office/drawing/2014/main" id="{BF9547DB-F8F2-4FAB-A13A-60CFC8E078CF}"/>
+                <a16:creationId xmlns:a16="http://schemas.microsoft.com/office/drawing/2014/main" id="{615B71FC-A346-4231-AF8D-A0CB757FFA38}"/>
               </a:ext>
             </a:extLst>
           </p:cNvPr>
@@ -19350,7 +19350,7 @@
           <p:cNvPr id="68" name="08 주요 참고문헌">
             <a:extLst xmlns:a="http://schemas.openxmlformats.org/drawingml/2006/main">
               <a:ext uri="{FF2B5EF4-FFF2-40B4-BE49-F238E27FC236}">
-                <a16:creationId xmlns:a16="http://schemas.microsoft.com/office/drawing/2014/main" id="{8E21C8BA-10A1-40E1-9AA9-6C82383CFB63}"/>
+                <a16:creationId xmlns:a16="http://schemas.microsoft.com/office/drawing/2014/main" id="{73C8002D-0CF4-4E30-AAC4-5FCDD9F3AE6E}"/>
               </a:ext>
             </a:extLst>
           </p:cNvPr>
@@ -19508,7 +19508,7 @@
           <p:cNvPr id="69" name="[1] Lewis et al. RAG. NeurIPS, 2020. [2] Gao et al. HyDE. ACL, 20">
             <a:extLst xmlns:a="http://schemas.openxmlformats.org/drawingml/2006/main">
               <a:ext uri="{FF2B5EF4-FFF2-40B4-BE49-F238E27FC236}">
-                <a16:creationId xmlns:a16="http://schemas.microsoft.com/office/drawing/2014/main" id="{9027F5CF-D9A8-40BC-AD80-2B5D08A5BF72}"/>
+                <a16:creationId xmlns:a16="http://schemas.microsoft.com/office/drawing/2014/main" id="{41E7049E-11D6-4A1F-BE20-646651CCEE37}"/>
               </a:ext>
             </a:extLst>
           </p:cNvPr>
@@ -19712,7 +19712,7 @@
           <p:cNvPr id="70" name="[4] Li et al. Language Drift and SCD. AAAI, 2026. [5] Chen et al.">
             <a:extLst xmlns:a="http://schemas.openxmlformats.org/drawingml/2006/main">
               <a:ext uri="{FF2B5EF4-FFF2-40B4-BE49-F238E27FC236}">
-                <a16:creationId xmlns:a16="http://schemas.microsoft.com/office/drawing/2014/main" id="{BDE32D7C-C746-43C7-A10B-1D4ED4A0E095}"/>
+                <a16:creationId xmlns:a16="http://schemas.microsoft.com/office/drawing/2014/main" id="{2896C016-835C-4B43-8751-EF7457D37FFB}"/>
               </a:ext>
             </a:extLst>
           </p:cNvPr>
@@ -19916,7 +19916,7 @@
           <p:cNvPr id="71" name="[6] Robertson et al. Okapi at TREC-3. NIST, 1995. [7] Cormack et ">
             <a:extLst xmlns:a="http://schemas.openxmlformats.org/drawingml/2006/main">
               <a:ext uri="{FF2B5EF4-FFF2-40B4-BE49-F238E27FC236}">
-                <a16:creationId xmlns:a16="http://schemas.microsoft.com/office/drawing/2014/main" id="{967E668E-7DDD-43D5-8531-7598CDF90764}"/>
+                <a16:creationId xmlns:a16="http://schemas.microsoft.com/office/drawing/2014/main" id="{683BF456-9D45-4BAC-9121-73490765EBD6}"/>
               </a:ext>
             </a:extLst>
           </p:cNvPr>
@@ -20097,7 +20097,7 @@
           <p:cNvPr id="72" name="[8] MacAvaney et al. CEDR. SIGIR, 2019. 공식 모델  [M1] KT Mi:dm 2.0 ">
             <a:extLst xmlns:a="http://schemas.openxmlformats.org/drawingml/2006/main">
               <a:ext uri="{FF2B5EF4-FFF2-40B4-BE49-F238E27FC236}">
-                <a16:creationId xmlns:a16="http://schemas.microsoft.com/office/drawing/2014/main" id="{CDDB70DA-6C87-4FA4-92AB-9773A9A6BBF0}"/>
+                <a16:creationId xmlns:a16="http://schemas.microsoft.com/office/drawing/2014/main" id="{655632E7-3B6A-41E8-8507-B51A203634B6}"/>
               </a:ext>
             </a:extLst>
           </p:cNvPr>
@@ -20275,10 +20275,10 @@
       </p:sp>
       <p:sp>
         <p:nvSpPr>
-          <p:cNvPr id="73" name="학술 22편·모델·자료 출처: FINALDOCS/VALIDATION/REFERENCES.md · 통계·민감도: 동봉 ">
+          <p:cNvPr id="73" name="전체 참고문헌 22편과 모델·자료 출처는 논문의 참고문헌에 수록">
             <a:extLst xmlns:a="http://schemas.openxmlformats.org/drawingml/2006/main">
               <a:ext uri="{FF2B5EF4-FFF2-40B4-BE49-F238E27FC236}">
-                <a16:creationId xmlns:a16="http://schemas.microsoft.com/office/drawing/2014/main" id="{4317AC15-8CA5-4059-B48C-A4346EA72ECA}"/>
+                <a16:creationId xmlns:a16="http://schemas.microsoft.com/office/drawing/2014/main" id="{E4E79B22-ABD6-442D-BE31-552D3F2694A1}"/>
               </a:ext>
             </a:extLst>
           </p:cNvPr>
@@ -20426,7 +20426,7 @@
                 <a:ea typeface="Malgun Gothic"/>
                 <a:cs typeface="Malgun Gothic"/>
               </a:rPr>
-              <a:t>학술 22편·모델·자료 출처: FINALDOCS/VALIDATION/REFERENCES.md · 통계·민감도: 동봉 상세표</a:t>
+              <a:t>전체 참고문헌 22편과 모델·자료 출처는 논문의 참고문헌에 수록</a:t>
             </a:r>
           </a:p>
         </p:txBody>
@@ -20436,7 +20436,7 @@
           <p:cNvPr id="74" name="영어 문서 4종 · 질의 60개 · 생성 모델 1종 · 질의별 반복측정">
             <a:extLst xmlns:a="http://schemas.openxmlformats.org/drawingml/2006/main">
               <a:ext uri="{FF2B5EF4-FFF2-40B4-BE49-F238E27FC236}">
-                <a16:creationId xmlns:a16="http://schemas.microsoft.com/office/drawing/2014/main" id="{A4DEB587-C8F4-45DF-8AB7-C17238C39793}"/>
+                <a16:creationId xmlns:a16="http://schemas.microsoft.com/office/drawing/2014/main" id="{E1AF734D-69B7-48D0-B1F4-ABEFB0216D42}"/>
               </a:ext>
             </a:extLst>
           </p:cNvPr>
@@ -20594,7 +20594,7 @@
           <p:cNvPr id="75" name="A1 594 × 841 mm">
             <a:extLst xmlns:a="http://schemas.openxmlformats.org/drawingml/2006/main">
               <a:ext uri="{FF2B5EF4-FFF2-40B4-BE49-F238E27FC236}">
-                <a16:creationId xmlns:a16="http://schemas.microsoft.com/office/drawing/2014/main" id="{8495BF88-5658-434D-95EA-28B434C210D7}"/>
+                <a16:creationId xmlns:a16="http://schemas.microsoft.com/office/drawing/2014/main" id="{13CEBAD9-9D63-45DD-AB62-1A79BE0DE151}"/>
               </a:ext>
             </a:extLst>
           </p:cNvPr>
@@ -20750,7 +20750,7 @@
     </p:spTree>
     <p:extLst>
       <p:ext uri="{BB962C8B-B14F-4D97-AF65-F5344CB8AC3E}">
-        <p14:creationId xmlns:p14="http://schemas.microsoft.com/office/powerpoint/2010/main" val="2087134093"/>
+        <p14:creationId xmlns:p14="http://schemas.microsoft.com/office/powerpoint/2010/main" val="1613744321"/>
       </p:ext>
     </p:extLst>
   </p:cSld>

--- a/FINALDOCS/POSTER/FINAL/M_RAG_A1_FINAL_EDITABLE.pptx
+++ b/FINALDOCS/POSTER/FINAL/M_RAG_A1_FINAL_EDITABLE.pptx
@@ -2,13 +2,13 @@
 <file path=ppt/presentation.xml><?xml version="1.0" encoding="utf-8"?>
 <p:presentation xmlns:p="http://schemas.openxmlformats.org/presentationml/2006/main">
   <p:sldMasterIdLst>
-    <p:sldMasterId xmlns:r="http://schemas.openxmlformats.org/officeDocument/2006/relationships" id="2147483648" r:id="R3b11d35200044fea"/>
+    <p:sldMasterId xmlns:r="http://schemas.openxmlformats.org/officeDocument/2006/relationships" id="2147483648" r:id="R6235bf1f6f664c81"/>
   </p:sldMasterIdLst>
   <p:notesMasterIdLst>
-    <p:notesMasterId xmlns:r="http://schemas.openxmlformats.org/officeDocument/2006/relationships" r:id="R4949fc67fcff473a"/>
+    <p:notesMasterId xmlns:r="http://schemas.openxmlformats.org/officeDocument/2006/relationships" r:id="Rdd3939f53baa400d"/>
   </p:notesMasterIdLst>
   <p:sldIdLst>
-    <p:sldId xmlns:r="http://schemas.openxmlformats.org/officeDocument/2006/relationships" id="256" r:id="Re562c2222906468f"/>
+    <p:sldId xmlns:r="http://schemas.openxmlformats.org/officeDocument/2006/relationships" id="256" r:id="Re375367e10cc407b"/>
   </p:sldIdLst>
   <p:sldSz cx="21384000" cy="30276000"/>
   <p:notesSz cx="6858000" cy="9144000"/>
@@ -489,7 +489,7 @@
           <p:cNvPr id="3" name="Title">
             <a:extLst xmlns:a="http://schemas.openxmlformats.org/drawingml/2006/main">
               <a:ext uri="{FF2B5EF4-FFF2-40B4-BE49-F238E27FC236}">
-                <a16:creationId xmlns:a16="http://schemas.microsoft.com/office/drawing/2014/main" id="{3AA86962-2AB5-423F-9184-841619492E28}"/>
+                <a16:creationId xmlns:a16="http://schemas.microsoft.com/office/drawing/2014/main" id="{07C0BAFA-B223-4E60-99AC-127FBC0D8590}"/>
               </a:ext>
             </a:extLst>
           </p:cNvPr>
@@ -718,7 +718,7 @@
           <p:cNvPr id="2" name="Subtitle">
             <a:extLst xmlns:a="http://schemas.openxmlformats.org/drawingml/2006/main">
               <a:ext uri="{FF2B5EF4-FFF2-40B4-BE49-F238E27FC236}">
-                <a16:creationId xmlns:a16="http://schemas.microsoft.com/office/drawing/2014/main" id="{813FB6E7-6EF6-42BD-A34D-414BC2206906}"/>
+                <a16:creationId xmlns:a16="http://schemas.microsoft.com/office/drawing/2014/main" id="{31722EE8-B848-4B0B-9468-5D6C68178045}"/>
               </a:ext>
             </a:extLst>
           </p:cNvPr>
@@ -964,7 +964,7 @@
           <p:cNvPr id="2" name="Section title">
             <a:extLst xmlns:a="http://schemas.openxmlformats.org/drawingml/2006/main">
               <a:ext uri="{FF2B5EF4-FFF2-40B4-BE49-F238E27FC236}">
-                <a16:creationId xmlns:a16="http://schemas.microsoft.com/office/drawing/2014/main" id="{7C3B6948-9802-42E4-891A-2FDF91DB9D23}"/>
+                <a16:creationId xmlns:a16="http://schemas.microsoft.com/office/drawing/2014/main" id="{E65C68E4-B19B-414A-999E-423151292715}"/>
               </a:ext>
             </a:extLst>
           </p:cNvPr>
@@ -1210,7 +1210,7 @@
           <p:cNvPr id="3" name="Title">
             <a:extLst xmlns:a="http://schemas.openxmlformats.org/drawingml/2006/main">
               <a:ext uri="{FF2B5EF4-FFF2-40B4-BE49-F238E27FC236}">
-                <a16:creationId xmlns:a16="http://schemas.microsoft.com/office/drawing/2014/main" id="{613578F9-ADE6-4FE3-80B0-DEAB4999D3C7}"/>
+                <a16:creationId xmlns:a16="http://schemas.microsoft.com/office/drawing/2014/main" id="{6F31241B-A97F-4299-A9AC-F0157EAABDED}"/>
               </a:ext>
             </a:extLst>
           </p:cNvPr>
@@ -1439,7 +1439,7 @@
           <p:cNvPr id="2" name="Body">
             <a:extLst xmlns:a="http://schemas.openxmlformats.org/drawingml/2006/main">
               <a:ext uri="{FF2B5EF4-FFF2-40B4-BE49-F238E27FC236}">
-                <a16:creationId xmlns:a16="http://schemas.microsoft.com/office/drawing/2014/main" id="{182CC6BC-3C4E-41DB-B691-BA7509FA687F}"/>
+                <a16:creationId xmlns:a16="http://schemas.microsoft.com/office/drawing/2014/main" id="{2E4E7E5E-1A2C-42E0-93CF-71AEC85BCC1B}"/>
               </a:ext>
             </a:extLst>
           </p:cNvPr>
@@ -1685,7 +1685,7 @@
           <p:cNvPr id="4" name="Title">
             <a:extLst xmlns:a="http://schemas.openxmlformats.org/drawingml/2006/main">
               <a:ext uri="{FF2B5EF4-FFF2-40B4-BE49-F238E27FC236}">
-                <a16:creationId xmlns:a16="http://schemas.microsoft.com/office/drawing/2014/main" id="{E2A24762-7A6B-4A7B-A25E-B784FBBE4A2D}"/>
+                <a16:creationId xmlns:a16="http://schemas.microsoft.com/office/drawing/2014/main" id="{5D5D812A-FDAF-4B24-9C9D-FB29B3C0FB07}"/>
               </a:ext>
             </a:extLst>
           </p:cNvPr>
@@ -1914,7 +1914,7 @@
           <p:cNvPr id="2" name="Left column">
             <a:extLst xmlns:a="http://schemas.openxmlformats.org/drawingml/2006/main">
               <a:ext uri="{FF2B5EF4-FFF2-40B4-BE49-F238E27FC236}">
-                <a16:creationId xmlns:a16="http://schemas.microsoft.com/office/drawing/2014/main" id="{B4C97ECD-3ECE-4C3B-B162-E85B6B5C5D50}"/>
+                <a16:creationId xmlns:a16="http://schemas.microsoft.com/office/drawing/2014/main" id="{F5D9849A-6575-4645-8D61-27673A9280F3}"/>
               </a:ext>
             </a:extLst>
           </p:cNvPr>
@@ -2143,7 +2143,7 @@
           <p:cNvPr id="3" name="Right column">
             <a:extLst xmlns:a="http://schemas.openxmlformats.org/drawingml/2006/main">
               <a:ext uri="{FF2B5EF4-FFF2-40B4-BE49-F238E27FC236}">
-                <a16:creationId xmlns:a16="http://schemas.microsoft.com/office/drawing/2014/main" id="{8D55F3E0-22BF-4E1B-AA61-83819AA920D5}"/>
+                <a16:creationId xmlns:a16="http://schemas.microsoft.com/office/drawing/2014/main" id="{5CFD4B5D-6546-4CF6-8A2B-7B1C789071A2}"/>
               </a:ext>
             </a:extLst>
           </p:cNvPr>
@@ -2389,7 +2389,7 @@
           <p:cNvPr id="3" name="Title">
             <a:extLst xmlns:a="http://schemas.openxmlformats.org/drawingml/2006/main">
               <a:ext uri="{FF2B5EF4-FFF2-40B4-BE49-F238E27FC236}">
-                <a16:creationId xmlns:a16="http://schemas.microsoft.com/office/drawing/2014/main" id="{E350ABDD-06B5-4000-B9F1-A7ABB4687E4B}"/>
+                <a16:creationId xmlns:a16="http://schemas.microsoft.com/office/drawing/2014/main" id="{5497BE03-BD2D-4F5F-8AA9-2FBA4F1FEDA7}"/>
               </a:ext>
             </a:extLst>
           </p:cNvPr>
@@ -2618,7 +2618,7 @@
           <p:cNvPr id="2" name="Left column">
             <a:extLst xmlns:a="http://schemas.openxmlformats.org/drawingml/2006/main">
               <a:ext uri="{FF2B5EF4-FFF2-40B4-BE49-F238E27FC236}">
-                <a16:creationId xmlns:a16="http://schemas.microsoft.com/office/drawing/2014/main" id="{499283E6-2D31-4BF4-985F-57FBEFF928C6}"/>
+                <a16:creationId xmlns:a16="http://schemas.microsoft.com/office/drawing/2014/main" id="{A2718882-54BE-4AE2-BBCF-118386EB170C}"/>
               </a:ext>
             </a:extLst>
           </p:cNvPr>
@@ -2885,12 +2885,12 @@
   </p:cSld>
   <p:clrMap bg1="lt1" tx1="dk1" bg2="lt2" tx2="dk2" accent1="accent1" accent2="accent2" accent3="accent3" accent4="accent4" accent5="accent5" accent6="accent6" hlink="hlink" folHlink="folHlink"/>
   <p:sldLayoutIdLst>
-    <p:sldLayoutId xmlns:r="http://schemas.openxmlformats.org/officeDocument/2006/relationships" id="2147483649" r:id="R795ce3ad7e394fb8"/>
-    <p:sldLayoutId xmlns:r="http://schemas.openxmlformats.org/officeDocument/2006/relationships" id="2147483650" r:id="R0b81810b648a49ad"/>
-    <p:sldLayoutId xmlns:r="http://schemas.openxmlformats.org/officeDocument/2006/relationships" id="2147483651" r:id="Rf696abf199374e04"/>
-    <p:sldLayoutId xmlns:r="http://schemas.openxmlformats.org/officeDocument/2006/relationships" id="2147483652" r:id="R3c9cb9491df94465"/>
-    <p:sldLayoutId xmlns:r="http://schemas.openxmlformats.org/officeDocument/2006/relationships" id="2147483653" r:id="Rbe4c6c5906ea4ead"/>
-    <p:sldLayoutId xmlns:r="http://schemas.openxmlformats.org/officeDocument/2006/relationships" id="2147483654" r:id="Rd5cb04c378844181"/>
+    <p:sldLayoutId xmlns:r="http://schemas.openxmlformats.org/officeDocument/2006/relationships" id="2147483649" r:id="R13ad1610903c456d"/>
+    <p:sldLayoutId xmlns:r="http://schemas.openxmlformats.org/officeDocument/2006/relationships" id="2147483650" r:id="Raa47b83c4b44442f"/>
+    <p:sldLayoutId xmlns:r="http://schemas.openxmlformats.org/officeDocument/2006/relationships" id="2147483651" r:id="Rd864ad15c57047f7"/>
+    <p:sldLayoutId xmlns:r="http://schemas.openxmlformats.org/officeDocument/2006/relationships" id="2147483652" r:id="R9d61913635c24bf8"/>
+    <p:sldLayoutId xmlns:r="http://schemas.openxmlformats.org/officeDocument/2006/relationships" id="2147483653" r:id="Rd70f9866964b4fb1"/>
+    <p:sldLayoutId xmlns:r="http://schemas.openxmlformats.org/officeDocument/2006/relationships" id="2147483654" r:id="R5547191a3a99437b"/>
   </p:sldLayoutIdLst>
   <p:txStyles>
     <p:titleStyle>
@@ -3441,7 +3441,7 @@
           <p:cNvPr id="76" name="">
             <a:extLst xmlns:a="http://schemas.openxmlformats.org/drawingml/2006/main">
               <a:ext uri="{FF2B5EF4-FFF2-40B4-BE49-F238E27FC236}">
-                <a16:creationId xmlns:a16="http://schemas.microsoft.com/office/drawing/2014/main" id="{88C73751-82B4-443F-8071-6FB12B2BCB52}"/>
+                <a16:creationId xmlns:a16="http://schemas.microsoft.com/office/drawing/2014/main" id="{E588A753-C5A7-4FB4-92AF-E8386BB8A7B6}"/>
               </a:ext>
             </a:extLst>
           </p:cNvPr>
@@ -3472,7 +3472,7 @@
           <p:cNvPr id="2" name="한국어 질의로 영어 학술·기술 문서를 검색하는">
             <a:extLst xmlns:a="http://schemas.openxmlformats.org/drawingml/2006/main">
               <a:ext uri="{FF2B5EF4-FFF2-40B4-BE49-F238E27FC236}">
-                <a16:creationId xmlns:a16="http://schemas.microsoft.com/office/drawing/2014/main" id="{6915451A-423C-4826-9AEA-E7B12F3C45ED}"/>
+                <a16:creationId xmlns:a16="http://schemas.microsoft.com/office/drawing/2014/main" id="{98D35406-EEF0-4CD4-9D0D-F9C774496311}"/>
               </a:ext>
             </a:extLst>
           </p:cNvPr>
@@ -3630,7 +3630,7 @@
           <p:cNvPr id="3" name="RAG에서의 HyDE·CAD·SCD 조합 실험">
             <a:extLst xmlns:a="http://schemas.openxmlformats.org/drawingml/2006/main">
               <a:ext uri="{FF2B5EF4-FFF2-40B4-BE49-F238E27FC236}">
-                <a16:creationId xmlns:a16="http://schemas.microsoft.com/office/drawing/2014/main" id="{AFB0096C-AD71-40B5-963D-8015F5AF9EFC}"/>
+                <a16:creationId xmlns:a16="http://schemas.microsoft.com/office/drawing/2014/main" id="{E408D2E7-5DC9-4E7B-A58D-61B1A75077A7}"/>
               </a:ext>
             </a:extLst>
           </p:cNvPr>
@@ -3788,7 +3788,7 @@
           <p:cNvPr id="4" name="문종건 · 동국대학교 WISE캠퍼스 컴퓨터공학과 · 지도교수 김진석 · 2026.10.15">
             <a:extLst xmlns:a="http://schemas.openxmlformats.org/drawingml/2006/main">
               <a:ext uri="{FF2B5EF4-FFF2-40B4-BE49-F238E27FC236}">
-                <a16:creationId xmlns:a16="http://schemas.microsoft.com/office/drawing/2014/main" id="{4A94F85B-9C0D-42F4-8D3C-C46E7E3983D3}"/>
+                <a16:creationId xmlns:a16="http://schemas.microsoft.com/office/drawing/2014/main" id="{33A74FED-624E-49DA-A8CD-D4E3025E1FAF}"/>
               </a:ext>
             </a:extLst>
           </p:cNvPr>
@@ -3946,7 +3946,7 @@
           <p:cNvPr id="5" name="">
             <a:extLst xmlns:a="http://schemas.openxmlformats.org/drawingml/2006/main">
               <a:ext uri="{FF2B5EF4-FFF2-40B4-BE49-F238E27FC236}">
-                <a16:creationId xmlns:a16="http://schemas.microsoft.com/office/drawing/2014/main" id="{0C6933EA-D2D1-41BA-8850-498B856C8D19}"/>
+                <a16:creationId xmlns:a16="http://schemas.microsoft.com/office/drawing/2014/main" id="{9D4DF89C-E278-440C-8963-49FB8E9EBD60}"/>
               </a:ext>
             </a:extLst>
           </p:cNvPr>
@@ -3977,7 +3977,7 @@
           <p:cNvPr id="6" name="01 연구 배경과 목적">
             <a:extLst xmlns:a="http://schemas.openxmlformats.org/drawingml/2006/main">
               <a:ext uri="{FF2B5EF4-FFF2-40B4-BE49-F238E27FC236}">
-                <a16:creationId xmlns:a16="http://schemas.microsoft.com/office/drawing/2014/main" id="{EB239701-7E97-41A0-BFB6-15D9D22685BC}"/>
+                <a16:creationId xmlns:a16="http://schemas.microsoft.com/office/drawing/2014/main" id="{BFF15FD1-5AE2-4B54-8FCD-DA7CD889F507}"/>
               </a:ext>
             </a:extLst>
           </p:cNvPr>
@@ -4135,7 +4135,7 @@
           <p:cNvPr id="7" name="검색 증강 생성(Retrieval-Augmented Generation, RAG)은 관련 문서 구간을 검색하고 그 텍">
             <a:extLst xmlns:a="http://schemas.openxmlformats.org/drawingml/2006/main">
               <a:ext uri="{FF2B5EF4-FFF2-40B4-BE49-F238E27FC236}">
-                <a16:creationId xmlns:a16="http://schemas.microsoft.com/office/drawing/2014/main" id="{76735A99-0280-408C-A5EE-FDF2B836BB14}"/>
+                <a16:creationId xmlns:a16="http://schemas.microsoft.com/office/drawing/2014/main" id="{A7CB3FE7-97E8-4D81-8342-D368E706BD61}"/>
               </a:ext>
             </a:extLst>
           </p:cNvPr>
@@ -4316,7 +4316,7 @@
           <p:cNvPr id="8" name="HyDE: 가상 문서 임베딩(Hypothetical Document Embeddings) 가상 문서 검색 입력 구성[">
             <a:extLst xmlns:a="http://schemas.openxmlformats.org/drawingml/2006/main">
               <a:ext uri="{FF2B5EF4-FFF2-40B4-BE49-F238E27FC236}">
-                <a16:creationId xmlns:a16="http://schemas.microsoft.com/office/drawing/2014/main" id="{264F7FE3-C1FC-4E6E-9445-0AB9A6668735}"/>
+                <a16:creationId xmlns:a16="http://schemas.microsoft.com/office/drawing/2014/main" id="{EC806C2C-1E27-4650-85F5-021605D0D260}"/>
               </a:ext>
             </a:extLst>
           </p:cNvPr>
@@ -4589,7 +4589,7 @@
           <p:cNvPr id="9" name="HyDE는 한국어를 포함한 다국어 검색에서 평가되었다[2]. 한국어 질의–영어 문서 환경에서 HyDE·CAD·SCD의">
             <a:extLst xmlns:a="http://schemas.openxmlformats.org/drawingml/2006/main">
               <a:ext uri="{FF2B5EF4-FFF2-40B4-BE49-F238E27FC236}">
-                <a16:creationId xmlns:a16="http://schemas.microsoft.com/office/drawing/2014/main" id="{EEE91773-F2A8-46BC-9F66-52F03F8BB5E2}"/>
+                <a16:creationId xmlns:a16="http://schemas.microsoft.com/office/drawing/2014/main" id="{702D493F-86F8-410D-8E8B-CB765BC158AE}"/>
               </a:ext>
             </a:extLst>
           </p:cNvPr>
@@ -4793,7 +4793,7 @@
           <p:cNvPr id="10" name="">
             <a:extLst xmlns:a="http://schemas.openxmlformats.org/drawingml/2006/main">
               <a:ext uri="{FF2B5EF4-FFF2-40B4-BE49-F238E27FC236}">
-                <a16:creationId xmlns:a16="http://schemas.microsoft.com/office/drawing/2014/main" id="{53DD512A-CA2D-4291-BB17-BC7D04DEF152}"/>
+                <a16:creationId xmlns:a16="http://schemas.microsoft.com/office/drawing/2014/main" id="{7DAAC475-77ED-4736-800A-8861726B01CE}"/>
               </a:ext>
             </a:extLst>
           </p:cNvPr>
@@ -4824,7 +4824,7 @@
           <p:cNvPr id="11" name="02 Paper-RAG 구조와 기법 적용 위치">
             <a:extLst xmlns:a="http://schemas.openxmlformats.org/drawingml/2006/main">
               <a:ext uri="{FF2B5EF4-FFF2-40B4-BE49-F238E27FC236}">
-                <a16:creationId xmlns:a16="http://schemas.microsoft.com/office/drawing/2014/main" id="{70563DA3-6481-4079-82B2-1AC4167FD0F3}"/>
+                <a16:creationId xmlns:a16="http://schemas.microsoft.com/office/drawing/2014/main" id="{E3BD0098-3652-4F43-8EA0-33F0BD15F5AB}"/>
               </a:ext>
             </a:extLst>
           </p:cNvPr>
@@ -4982,7 +4982,7 @@
           <p:cNvPr id="12" name="Paper-RAG는 실험에 사용한 고정 검색·생성 파이프라인이다.">
             <a:extLst xmlns:a="http://schemas.openxmlformats.org/drawingml/2006/main">
               <a:ext uri="{FF2B5EF4-FFF2-40B4-BE49-F238E27FC236}">
-                <a16:creationId xmlns:a16="http://schemas.microsoft.com/office/drawing/2014/main" id="{A49FFED5-FCDF-426E-9C5A-1595DA814960}"/>
+                <a16:creationId xmlns:a16="http://schemas.microsoft.com/office/drawing/2014/main" id="{65790FA7-706C-4CCD-9B50-B6AFFD43CEBA}"/>
               </a:ext>
             </a:extLst>
           </p:cNvPr>
@@ -5140,7 +5140,7 @@
           <p:cNvPr id="13" name="">
             <a:extLst xmlns:a="http://schemas.openxmlformats.org/drawingml/2006/main">
               <a:ext uri="{FF2B5EF4-FFF2-40B4-BE49-F238E27FC236}">
-                <a16:creationId xmlns:a16="http://schemas.microsoft.com/office/drawing/2014/main" id="{2B0329C8-30E4-47CB-8A82-D021831C9316}"/>
+                <a16:creationId xmlns:a16="http://schemas.microsoft.com/office/drawing/2014/main" id="{493D2AE8-1B79-4888-8F4C-99CAD857174F}"/>
               </a:ext>
             </a:extLst>
           </p:cNvPr>
@@ -5173,7 +5173,7 @@
           <p:cNvPr id="14" name="한국어 질의 HyDE OFF: 원질의 HyDE ON: 영어 번역·가상 문서">
             <a:extLst xmlns:a="http://schemas.openxmlformats.org/drawingml/2006/main">
               <a:ext uri="{FF2B5EF4-FFF2-40B4-BE49-F238E27FC236}">
-                <a16:creationId xmlns:a16="http://schemas.microsoft.com/office/drawing/2014/main" id="{D0FA7350-3DF6-4C07-A792-00D91A4235A3}"/>
+                <a16:creationId xmlns:a16="http://schemas.microsoft.com/office/drawing/2014/main" id="{3654D477-6733-454A-B7F7-C181647B48FD}"/>
               </a:ext>
             </a:extLst>
           </p:cNvPr>
@@ -5377,7 +5377,7 @@
           <p:cNvPr id="15" name="">
             <a:extLst xmlns:a="http://schemas.openxmlformats.org/drawingml/2006/main">
               <a:ext uri="{FF2B5EF4-FFF2-40B4-BE49-F238E27FC236}">
-                <a16:creationId xmlns:a16="http://schemas.microsoft.com/office/drawing/2014/main" id="{30AB55E9-E3F7-4106-9237-44C7C992A795}"/>
+                <a16:creationId xmlns:a16="http://schemas.microsoft.com/office/drawing/2014/main" id="{227747A0-E20C-4769-9D02-CF7A7DBCAA70}"/>
               </a:ext>
             </a:extLst>
           </p:cNvPr>
@@ -5410,7 +5410,7 @@
           <p:cNvPr id="16" name="BM25 희소 검색[6] 한국어 원질의 사용">
             <a:extLst xmlns:a="http://schemas.openxmlformats.org/drawingml/2006/main">
               <a:ext uri="{FF2B5EF4-FFF2-40B4-BE49-F238E27FC236}">
-                <a16:creationId xmlns:a16="http://schemas.microsoft.com/office/drawing/2014/main" id="{22210D0C-A786-42DA-9311-386002A3CCE2}"/>
+                <a16:creationId xmlns:a16="http://schemas.microsoft.com/office/drawing/2014/main" id="{ACDFC118-C032-478F-AD46-18EC7D77D91C}"/>
               </a:ext>
             </a:extLst>
           </p:cNvPr>
@@ -5591,7 +5591,7 @@
           <p:cNvPr id="17" name="">
             <a:extLst xmlns:a="http://schemas.openxmlformats.org/drawingml/2006/main">
               <a:ext uri="{FF2B5EF4-FFF2-40B4-BE49-F238E27FC236}">
-                <a16:creationId xmlns:a16="http://schemas.microsoft.com/office/drawing/2014/main" id="{BFA2BE0E-B09F-4C6F-8C71-61D5146D83D0}"/>
+                <a16:creationId xmlns:a16="http://schemas.microsoft.com/office/drawing/2014/main" id="{C774C2BD-B9B7-49EF-88CB-B5F38ED7BCA4}"/>
               </a:ext>
             </a:extLst>
           </p:cNvPr>
@@ -5624,7 +5624,7 @@
           <p:cNvPr id="18" name="BGE-M3 밀집 검색[5]">
             <a:extLst xmlns:a="http://schemas.openxmlformats.org/drawingml/2006/main">
               <a:ext uri="{FF2B5EF4-FFF2-40B4-BE49-F238E27FC236}">
-                <a16:creationId xmlns:a16="http://schemas.microsoft.com/office/drawing/2014/main" id="{1270A6B1-1A25-43F6-A994-A4D2A4F1B766}"/>
+                <a16:creationId xmlns:a16="http://schemas.microsoft.com/office/drawing/2014/main" id="{19EE5B8B-6472-465C-BD69-6E4EF3AF93A5}"/>
               </a:ext>
             </a:extLst>
           </p:cNvPr>
@@ -5782,7 +5782,7 @@
           <p:cNvPr id="19" name="">
             <a:extLst xmlns:a="http://schemas.openxmlformats.org/drawingml/2006/main">
               <a:ext uri="{FF2B5EF4-FFF2-40B4-BE49-F238E27FC236}">
-                <a16:creationId xmlns:a16="http://schemas.microsoft.com/office/drawing/2014/main" id="{ADE26CB3-643A-40DB-99A3-568E03727E57}"/>
+                <a16:creationId xmlns:a16="http://schemas.microsoft.com/office/drawing/2014/main" id="{3FD039B9-CFAE-4DBA-AC09-EA5D171D50C3}"/>
               </a:ext>
             </a:extLst>
           </p:cNvPr>
@@ -5815,7 +5815,7 @@
           <p:cNvPr id="20" name="가중 RRF[7] 0.6 / 0.4, k=60">
             <a:extLst xmlns:a="http://schemas.openxmlformats.org/drawingml/2006/main">
               <a:ext uri="{FF2B5EF4-FFF2-40B4-BE49-F238E27FC236}">
-                <a16:creationId xmlns:a16="http://schemas.microsoft.com/office/drawing/2014/main" id="{5FE4BAF2-8425-45B5-930F-CCDB66245ED3}"/>
+                <a16:creationId xmlns:a16="http://schemas.microsoft.com/office/drawing/2014/main" id="{F99617E2-4428-4175-A3F3-E0A3B2F9CDC9}"/>
               </a:ext>
             </a:extLst>
           </p:cNvPr>
@@ -5996,7 +5996,7 @@
           <p:cNvPr id="21" name="">
             <a:extLst xmlns:a="http://schemas.openxmlformats.org/drawingml/2006/main">
               <a:ext uri="{FF2B5EF4-FFF2-40B4-BE49-F238E27FC236}">
-                <a16:creationId xmlns:a16="http://schemas.microsoft.com/office/drawing/2014/main" id="{F4114495-9911-43C1-8D10-29C3F435FF1C}"/>
+                <a16:creationId xmlns:a16="http://schemas.microsoft.com/office/drawing/2014/main" id="{F2B7DFCE-5098-4056-B08C-A24DCDFCF6F6}"/>
               </a:ext>
             </a:extLst>
           </p:cNvPr>
@@ -6028,7 +6028,7 @@
           <p:cNvPr id="22" name="">
             <a:extLst xmlns:a="http://schemas.openxmlformats.org/drawingml/2006/main">
               <a:ext uri="{FF2B5EF4-FFF2-40B4-BE49-F238E27FC236}">
-                <a16:creationId xmlns:a16="http://schemas.microsoft.com/office/drawing/2014/main" id="{8592AE65-097C-49D9-B3A9-A909775F771B}"/>
+                <a16:creationId xmlns:a16="http://schemas.microsoft.com/office/drawing/2014/main" id="{72BA4699-CED3-4379-81D6-5C05350B7BA8}"/>
               </a:ext>
             </a:extLst>
           </p:cNvPr>
@@ -6060,7 +6060,7 @@
           <p:cNvPr id="23" name="">
             <a:extLst xmlns:a="http://schemas.openxmlformats.org/drawingml/2006/main">
               <a:ext uri="{FF2B5EF4-FFF2-40B4-BE49-F238E27FC236}">
-                <a16:creationId xmlns:a16="http://schemas.microsoft.com/office/drawing/2014/main" id="{637554CB-F632-4498-B350-93130DE07E53}"/>
+                <a16:creationId xmlns:a16="http://schemas.microsoft.com/office/drawing/2014/main" id="{84232A8F-9529-4010-8844-E0F6C238C2C8}"/>
               </a:ext>
             </a:extLst>
           </p:cNvPr>
@@ -6092,7 +6092,7 @@
           <p:cNvPr id="24" name="">
             <a:extLst xmlns:a="http://schemas.openxmlformats.org/drawingml/2006/main">
               <a:ext uri="{FF2B5EF4-FFF2-40B4-BE49-F238E27FC236}">
-                <a16:creationId xmlns:a16="http://schemas.microsoft.com/office/drawing/2014/main" id="{979EA324-C1B2-4649-8C34-753A713EBC8D}"/>
+                <a16:creationId xmlns:a16="http://schemas.microsoft.com/office/drawing/2014/main" id="{78048D26-F3E7-42D7-A017-56D562298958}"/>
               </a:ext>
             </a:extLst>
           </p:cNvPr>
@@ -6125,7 +6125,7 @@
           <p:cNvPr id="25" name="원질의·구간 쌍 CrossEncoder 재정렬[8][M2] 상위 5개 구간 선택·입력 길이 관리">
             <a:extLst xmlns:a="http://schemas.openxmlformats.org/drawingml/2006/main">
               <a:ext uri="{FF2B5EF4-FFF2-40B4-BE49-F238E27FC236}">
-                <a16:creationId xmlns:a16="http://schemas.microsoft.com/office/drawing/2014/main" id="{25CC13DA-564B-47AE-89E2-AC22A18B9C06}"/>
+                <a16:creationId xmlns:a16="http://schemas.microsoft.com/office/drawing/2014/main" id="{8EA43AF2-B64A-4825-9209-54524E873BC6}"/>
               </a:ext>
             </a:extLst>
           </p:cNvPr>
@@ -6306,7 +6306,7 @@
           <p:cNvPr id="26" name="">
             <a:extLst xmlns:a="http://schemas.openxmlformats.org/drawingml/2006/main">
               <a:ext uri="{FF2B5EF4-FFF2-40B4-BE49-F238E27FC236}">
-                <a16:creationId xmlns:a16="http://schemas.microsoft.com/office/drawing/2014/main" id="{D01E416E-7B92-451D-B666-13E59680B6E4}"/>
+                <a16:creationId xmlns:a16="http://schemas.microsoft.com/office/drawing/2014/main" id="{2666C21F-B1C2-495D-99E4-DEE4712767ED}"/>
               </a:ext>
             </a:extLst>
           </p:cNvPr>
@@ -6339,7 +6339,7 @@
           <p:cNvPr id="27" name="Mi:dm 2.0 Base Instruct[M1] CAD 로짓 결합 후 SCD 언어별 조정, 최종 답변 생성">
             <a:extLst xmlns:a="http://schemas.openxmlformats.org/drawingml/2006/main">
               <a:ext uri="{FF2B5EF4-FFF2-40B4-BE49-F238E27FC236}">
-                <a16:creationId xmlns:a16="http://schemas.microsoft.com/office/drawing/2014/main" id="{82D33F64-92E1-4669-8729-C1F040716127}"/>
+                <a16:creationId xmlns:a16="http://schemas.microsoft.com/office/drawing/2014/main" id="{D2C6A544-5047-4101-9718-9B4665AB6650}"/>
               </a:ext>
             </a:extLst>
           </p:cNvPr>
@@ -6520,7 +6520,7 @@
           <p:cNvPr id="28" name="">
             <a:extLst xmlns:a="http://schemas.openxmlformats.org/drawingml/2006/main">
               <a:ext uri="{FF2B5EF4-FFF2-40B4-BE49-F238E27FC236}">
-                <a16:creationId xmlns:a16="http://schemas.microsoft.com/office/drawing/2014/main" id="{F9FE418E-2F41-4A46-8A3F-E5F8AFA8F0E3}"/>
+                <a16:creationId xmlns:a16="http://schemas.microsoft.com/office/drawing/2014/main" id="{49AA8C1C-2718-487D-AEAC-C0F7205B48E6}"/>
               </a:ext>
             </a:extLst>
           </p:cNvPr>
@@ -6552,7 +6552,7 @@
           <p:cNvPr id="29" name="">
             <a:extLst xmlns:a="http://schemas.openxmlformats.org/drawingml/2006/main">
               <a:ext uri="{FF2B5EF4-FFF2-40B4-BE49-F238E27FC236}">
-                <a16:creationId xmlns:a16="http://schemas.microsoft.com/office/drawing/2014/main" id="{A0B7D102-7142-4745-B2F3-5861AF5A6AD0}"/>
+                <a16:creationId xmlns:a16="http://schemas.microsoft.com/office/drawing/2014/main" id="{5FE2221B-1614-44C7-A556-F8899D09CE55}"/>
               </a:ext>
             </a:extLst>
           </p:cNvPr>
@@ -6584,7 +6584,7 @@
           <p:cNvPr id="30" name="">
             <a:extLst xmlns:a="http://schemas.openxmlformats.org/drawingml/2006/main">
               <a:ext uri="{FF2B5EF4-FFF2-40B4-BE49-F238E27FC236}">
-                <a16:creationId xmlns:a16="http://schemas.microsoft.com/office/drawing/2014/main" id="{07CB35E2-A813-44BF-890D-9B3C02238C1D}"/>
+                <a16:creationId xmlns:a16="http://schemas.microsoft.com/office/drawing/2014/main" id="{8FF530EC-E47E-4AA1-BCA2-8125DD7D15C8}"/>
               </a:ext>
             </a:extLst>
           </p:cNvPr>
@@ -6615,7 +6615,7 @@
           <p:cNvPr id="31" name="03 3요인 완전요인 실험 설계">
             <a:extLst xmlns:a="http://schemas.openxmlformats.org/drawingml/2006/main">
               <a:ext uri="{FF2B5EF4-FFF2-40B4-BE49-F238E27FC236}">
-                <a16:creationId xmlns:a16="http://schemas.microsoft.com/office/drawing/2014/main" id="{0D8CA60C-18D4-4689-B927-38A94448A0B9}"/>
+                <a16:creationId xmlns:a16="http://schemas.microsoft.com/office/drawing/2014/main" id="{A69E3D3F-0F58-40D0-9834-C475E82D57E2}"/>
               </a:ext>
             </a:extLst>
           </p:cNvPr>
@@ -6773,7 +6773,7 @@
           <p:cNvPr id="32" name="H=HyDE, C=CAD, S=SCD   0=미적용, 1=적용">
             <a:extLst xmlns:a="http://schemas.openxmlformats.org/drawingml/2006/main">
               <a:ext uri="{FF2B5EF4-FFF2-40B4-BE49-F238E27FC236}">
-                <a16:creationId xmlns:a16="http://schemas.microsoft.com/office/drawing/2014/main" id="{6B96E66F-F899-485C-ACBD-371F77DD727A}"/>
+                <a16:creationId xmlns:a16="http://schemas.microsoft.com/office/drawing/2014/main" id="{71871DC1-BCB9-401D-9EAE-4465591893B3}"/>
               </a:ext>
             </a:extLst>
           </p:cNvPr>
@@ -6931,7 +6931,7 @@
           <p:cNvPr id="33" name="">
             <a:extLst xmlns:a="http://schemas.openxmlformats.org/drawingml/2006/main">
               <a:ext uri="{FF2B5EF4-FFF2-40B4-BE49-F238E27FC236}">
-                <a16:creationId xmlns:a16="http://schemas.microsoft.com/office/drawing/2014/main" id="{810D0D89-E0E5-486B-885C-C70AB4A728ED}"/>
+                <a16:creationId xmlns:a16="http://schemas.microsoft.com/office/drawing/2014/main" id="{8AD321E6-9B75-47AF-AF04-C2D002046E83}"/>
               </a:ext>
             </a:extLst>
           </p:cNvPr>
@@ -8461,7 +8461,7 @@
           <p:cNvPr id="34" name="같은 질의 60개 × 8조건 반복측정 = 480개 생성 기록">
             <a:extLst xmlns:a="http://schemas.openxmlformats.org/drawingml/2006/main">
               <a:ext uri="{FF2B5EF4-FFF2-40B4-BE49-F238E27FC236}">
-                <a16:creationId xmlns:a16="http://schemas.microsoft.com/office/drawing/2014/main" id="{BECD48E8-8D7A-4887-9200-F8763108EA15}"/>
+                <a16:creationId xmlns:a16="http://schemas.microsoft.com/office/drawing/2014/main" id="{116B4C4D-F43E-4030-BF53-304C1D03D96D}"/>
               </a:ext>
             </a:extLst>
           </p:cNvPr>
@@ -8619,7 +8619,7 @@
           <p:cNvPr id="35" name="생성 512토큰, CAD α=0.5, SCD α=1.1·β=0.9·Tstart=5">
             <a:extLst xmlns:a="http://schemas.openxmlformats.org/drawingml/2006/main">
               <a:ext uri="{FF2B5EF4-FFF2-40B4-BE49-F238E27FC236}">
-                <a16:creationId xmlns:a16="http://schemas.microsoft.com/office/drawing/2014/main" id="{7AF80AF9-8150-449F-9AB0-3D3BBCCA6313}"/>
+                <a16:creationId xmlns:a16="http://schemas.microsoft.com/office/drawing/2014/main" id="{31036749-CA9D-41BB-8831-0CDC2316E009}"/>
               </a:ext>
             </a:extLst>
           </p:cNvPr>
@@ -8777,7 +8777,7 @@
           <p:cNvPr id="36" name="문서 요약을 15개 내용 단위로 나누어 질의를 작성하고, 총 60개 질의의 원문 페이지·정답 근거·답변 가능성을 확인">
             <a:extLst xmlns:a="http://schemas.openxmlformats.org/drawingml/2006/main">
               <a:ext uri="{FF2B5EF4-FFF2-40B4-BE49-F238E27FC236}">
-                <a16:creationId xmlns:a16="http://schemas.microsoft.com/office/drawing/2014/main" id="{9DE22CE4-2591-4B6F-930E-8AE0E06FC3EE}"/>
+                <a16:creationId xmlns:a16="http://schemas.microsoft.com/office/drawing/2014/main" id="{E2A9BD50-6725-4102-A775-2019F889C72F}"/>
               </a:ext>
             </a:extLst>
           </p:cNvPr>
@@ -8958,7 +8958,7 @@
           <p:cNvPr id="37" name="">
             <a:extLst xmlns:a="http://schemas.openxmlformats.org/drawingml/2006/main">
               <a:ext uri="{FF2B5EF4-FFF2-40B4-BE49-F238E27FC236}">
-                <a16:creationId xmlns:a16="http://schemas.microsoft.com/office/drawing/2014/main" id="{BB7D6B8B-BC7B-4F32-BA88-CF986D56E9B0}"/>
+                <a16:creationId xmlns:a16="http://schemas.microsoft.com/office/drawing/2014/main" id="{C0303BCD-161F-4E51-9E8E-2C63C2D4017A}"/>
               </a:ext>
             </a:extLst>
           </p:cNvPr>
@@ -8989,7 +8989,7 @@
           <p:cNvPr id="38" name="04 평가 지표 및 실험·통계 방법">
             <a:extLst xmlns:a="http://schemas.openxmlformats.org/drawingml/2006/main">
               <a:ext uri="{FF2B5EF4-FFF2-40B4-BE49-F238E27FC236}">
-                <a16:creationId xmlns:a16="http://schemas.microsoft.com/office/drawing/2014/main" id="{1EFF305F-73A6-4621-9119-01D3B2F76CBE}"/>
+                <a16:creationId xmlns:a16="http://schemas.microsoft.com/office/drawing/2014/main" id="{E4C8F15C-80C5-4B90-9D18-F64AD1EDAA8C}"/>
               </a:ext>
             </a:extLst>
           </p:cNvPr>
@@ -9147,7 +9147,7 @@
           <p:cNvPr id="39" name="근거 충실도: 높을수록 검색 근거가 지지하는 답변 주장 비율이 크다. 답변 관련성: 높을수록 답변 기반 질문과 원질문">
             <a:extLst xmlns:a="http://schemas.openxmlformats.org/drawingml/2006/main">
               <a:ext uri="{FF2B5EF4-FFF2-40B4-BE49-F238E27FC236}">
-                <a16:creationId xmlns:a16="http://schemas.microsoft.com/office/drawing/2014/main" id="{FD0807A8-1646-437A-9DE4-245C02141654}"/>
+                <a16:creationId xmlns:a16="http://schemas.microsoft.com/office/drawing/2014/main" id="{34D4FEBF-3FAE-466A-90E0-F2D762690C7E}"/>
               </a:ext>
             </a:extLst>
           </p:cNvPr>
@@ -9397,7 +9397,7 @@
           <p:cNvPr id="40" name="품질 관측값은 0~1이다. 관련성 +0.080은 ON−OFF 평균 차이 0.080점이다. SD는 질의별 분포의 표본표">
             <a:extLst xmlns:a="http://schemas.openxmlformats.org/drawingml/2006/main">
               <a:ext uri="{FF2B5EF4-FFF2-40B4-BE49-F238E27FC236}">
-                <a16:creationId xmlns:a16="http://schemas.microsoft.com/office/drawing/2014/main" id="{7F4D7193-6242-48E4-B011-335BA633D070}"/>
+                <a16:creationId xmlns:a16="http://schemas.microsoft.com/office/drawing/2014/main" id="{88C0CADF-57BA-4362-A5A5-D47FC13ACD39}"/>
               </a:ext>
             </a:extLst>
           </p:cNvPr>
@@ -9601,7 +9601,7 @@
           <p:cNvPr id="41" name="평가 예시  ext_raptor_011, H0C0S0">
             <a:extLst xmlns:a="http://schemas.openxmlformats.org/drawingml/2006/main">
               <a:ext uri="{FF2B5EF4-FFF2-40B4-BE49-F238E27FC236}">
-                <a16:creationId xmlns:a16="http://schemas.microsoft.com/office/drawing/2014/main" id="{C3412673-FF58-4B98-BDD5-3CBD33AAA2B1}"/>
+                <a16:creationId xmlns:a16="http://schemas.microsoft.com/office/drawing/2014/main" id="{E37F1A37-A672-4B83-AEB7-C8CA70C6E8AC}"/>
               </a:ext>
             </a:extLst>
           </p:cNvPr>
@@ -9759,7 +9759,7 @@
           <p:cNvPr id="42" name="질문: Cinderella 사례의 정성 분석에서 RAPTOR의 tree-based retrieval이 DPR보다 주제">
             <a:extLst xmlns:a="http://schemas.openxmlformats.org/drawingml/2006/main">
               <a:ext uri="{FF2B5EF4-FFF2-40B4-BE49-F238E27FC236}">
-                <a16:creationId xmlns:a16="http://schemas.microsoft.com/office/drawing/2014/main" id="{DEE45DEB-C207-4D3A-800A-9765715FE6CF}"/>
+                <a16:creationId xmlns:a16="http://schemas.microsoft.com/office/drawing/2014/main" id="{DC3499A3-42C3-4F21-A0E8-20049CE17FB6}"/>
               </a:ext>
             </a:extLst>
           </p:cNvPr>
@@ -9940,7 +9940,7 @@
           <p:cNvPr id="43" name="검색 근거(PDF p.9): “By providing both the original text and higher-l">
             <a:extLst xmlns:a="http://schemas.openxmlformats.org/drawingml/2006/main">
               <a:ext uri="{FF2B5EF4-FFF2-40B4-BE49-F238E27FC236}">
-                <a16:creationId xmlns:a16="http://schemas.microsoft.com/office/drawing/2014/main" id="{39282E8E-0A93-46D3-B4DA-20F99524F491}"/>
+                <a16:creationId xmlns:a16="http://schemas.microsoft.com/office/drawing/2014/main" id="{C3ADAF69-E5B3-449E-A7FD-5356507FA591}"/>
               </a:ext>
             </a:extLst>
           </p:cNvPr>
@@ -10144,7 +10144,7 @@
           <p:cNvPr id="44" name="참조 답변 요지(PDF p.20): RAPTOR는 이야기의 주요 부분을, DPR은 이야기의 좁은 일부를 자세히 검색한">
             <a:extLst xmlns:a="http://schemas.openxmlformats.org/drawingml/2006/main">
               <a:ext uri="{FF2B5EF4-FFF2-40B4-BE49-F238E27FC236}">
-                <a16:creationId xmlns:a16="http://schemas.microsoft.com/office/drawing/2014/main" id="{0DC59136-55D7-4F06-9243-1C356041EBF9}"/>
+                <a16:creationId xmlns:a16="http://schemas.microsoft.com/office/drawing/2014/main" id="{9C0E3B67-A5CE-45EC-8464-516C9CBB59C8}"/>
               </a:ext>
             </a:extLst>
           </p:cNvPr>
@@ -10325,7 +10325,7 @@
           <p:cNvPr id="45" name="생성 답변 발췌: “질문의 요구사항에 따라 서로 다른 층위(layer)에서 노드를 선택할 수 있습니다.”">
             <a:extLst xmlns:a="http://schemas.openxmlformats.org/drawingml/2006/main">
               <a:ext uri="{FF2B5EF4-FFF2-40B4-BE49-F238E27FC236}">
-                <a16:creationId xmlns:a16="http://schemas.microsoft.com/office/drawing/2014/main" id="{0122C19A-96E0-4A2D-8EB6-9A5FC2D7D46F}"/>
+                <a16:creationId xmlns:a16="http://schemas.microsoft.com/office/drawing/2014/main" id="{A623D024-5FFC-45AF-95E6-B29CC4D9C109}"/>
               </a:ext>
             </a:extLst>
           </p:cNvPr>
@@ -10506,7 +10506,7 @@
           <p:cNvPr id="46" name="충실도 1.000: 추출된 답변 주장을 검색 결과가 모두 지지 관련성 0.937: 답변 기반 질문과 원질문의 평균 의">
             <a:extLst xmlns:a="http://schemas.openxmlformats.org/drawingml/2006/main">
               <a:ext uri="{FF2B5EF4-FFF2-40B4-BE49-F238E27FC236}">
-                <a16:creationId xmlns:a16="http://schemas.microsoft.com/office/drawing/2014/main" id="{0F0031D5-188C-400B-8DF3-C56BCB1C79F7}"/>
+                <a16:creationId xmlns:a16="http://schemas.microsoft.com/office/drawing/2014/main" id="{9A302188-48D6-4F4F-BCFF-73D34CA44E60}"/>
               </a:ext>
             </a:extLst>
           </p:cNvPr>
@@ -10687,7 +10687,7 @@
           <p:cNvPr id="47" name="평가: RAGAS 0.2.15[10]·gpt-4o·BGE-M3, 저장 답변 평가 평가 언어: S0 영어 / S1 한국">
             <a:extLst xmlns:a="http://schemas.openxmlformats.org/drawingml/2006/main">
               <a:ext uri="{FF2B5EF4-FFF2-40B4-BE49-F238E27FC236}">
-                <a16:creationId xmlns:a16="http://schemas.microsoft.com/office/drawing/2014/main" id="{11853166-0F27-42FA-8B71-7177C1D3BB98}"/>
+                <a16:creationId xmlns:a16="http://schemas.microsoft.com/office/drawing/2014/main" id="{0B8F4923-F7F9-43DE-8B49-D3938F05BFDC}"/>
               </a:ext>
             </a:extLst>
           </p:cNvPr>
@@ -10865,10 +10865,10 @@
       </p:sp>
       <p:sp>
         <p:nvSpPr>
-          <p:cNvPr id="48" name="반복측정 분산분석(ANOVA)·대응 t-검정, 양측 α=0.05 품질 S별 H×C / 문자·시간 H×C×S, SCD ">
+          <p:cNvPr id="48" name="반복측정 분산분석(ANOVA)·대응 t-검정, 양측 α=0.05 품질: SCD 상태별 H×C / 한국어 비율·시간: ">
             <a:extLst xmlns:a="http://schemas.openxmlformats.org/drawingml/2006/main">
               <a:ext uri="{FF2B5EF4-FFF2-40B4-BE49-F238E27FC236}">
-                <a16:creationId xmlns:a16="http://schemas.microsoft.com/office/drawing/2014/main" id="{2C6E7E6B-0306-4EA9-822E-C4C88550DCCB}"/>
+                <a16:creationId xmlns:a16="http://schemas.microsoft.com/office/drawing/2014/main" id="{EB0B9160-DBEB-4086-AF5F-982005DCCA1C}"/>
               </a:ext>
             </a:extLst>
           </p:cNvPr>
@@ -11039,7 +11039,7 @@
                 <a:ea typeface="Malgun Gothic"/>
                 <a:cs typeface="Malgun Gothic"/>
               </a:rPr>
-              <a:t>품질 S별 H×C / 문자·시간 H×C×S, SCD 120·240쌍→질의60</a:t>
+              <a:t>품질: SCD 상태별 H×C / 한국어 비율·시간: H×C×S, SCD 대응쌍은 질의별 평균(n=60)</a:t>
             </a:r>
           </a:p>
         </p:txBody>
@@ -11049,7 +11049,7 @@
           <p:cNvPr id="49" name="">
             <a:extLst xmlns:a="http://schemas.openxmlformats.org/drawingml/2006/main">
               <a:ext uri="{FF2B5EF4-FFF2-40B4-BE49-F238E27FC236}">
-                <a16:creationId xmlns:a16="http://schemas.microsoft.com/office/drawing/2014/main" id="{FD264E1F-B597-4562-BC61-32470FDE4F2A}"/>
+                <a16:creationId xmlns:a16="http://schemas.microsoft.com/office/drawing/2014/main" id="{20C34AB8-5FB9-44BC-8D41-E5CE950F9FA3}"/>
               </a:ext>
             </a:extLst>
           </p:cNvPr>
@@ -11080,7 +11080,7 @@
           <p:cNvPr id="50" name="05 조합별 결과와 통계 검정">
             <a:extLst xmlns:a="http://schemas.openxmlformats.org/drawingml/2006/main">
               <a:ext uri="{FF2B5EF4-FFF2-40B4-BE49-F238E27FC236}">
-                <a16:creationId xmlns:a16="http://schemas.microsoft.com/office/drawing/2014/main" id="{95678E53-9946-4562-A735-54D6DA885E15}"/>
+                <a16:creationId xmlns:a16="http://schemas.microsoft.com/office/drawing/2014/main" id="{B8026820-DC64-4CAE-846B-BBD1C4EB45AD}"/>
               </a:ext>
             </a:extLst>
           </p:cNvPr>
@@ -11238,7 +11238,7 @@
           <p:cNvPr id="51" name="HyDE·CAD·SCD 8조합의 품질·한국어 비율·시간 평균(SD)">
             <a:extLst xmlns:a="http://schemas.openxmlformats.org/drawingml/2006/main">
               <a:ext uri="{FF2B5EF4-FFF2-40B4-BE49-F238E27FC236}">
-                <a16:creationId xmlns:a16="http://schemas.microsoft.com/office/drawing/2014/main" id="{0F99F741-6688-41A4-8823-BC4FFF749F26}"/>
+                <a16:creationId xmlns:a16="http://schemas.microsoft.com/office/drawing/2014/main" id="{C8442F1B-C298-43B8-974A-C33CA8E52BCB}"/>
               </a:ext>
             </a:extLst>
           </p:cNvPr>
@@ -11396,7 +11396,7 @@
           <p:cNvPr id="52" name="">
             <a:extLst xmlns:a="http://schemas.openxmlformats.org/drawingml/2006/main">
               <a:ext uri="{FF2B5EF4-FFF2-40B4-BE49-F238E27FC236}">
-                <a16:creationId xmlns:a16="http://schemas.microsoft.com/office/drawing/2014/main" id="{907F3F6A-CA6B-4B42-9F65-A64A2DFC4A2A}"/>
+                <a16:creationId xmlns:a16="http://schemas.microsoft.com/office/drawing/2014/main" id="{81BFE966-BC00-4A78-B095-B71984F5A4EB}"/>
               </a:ext>
             </a:extLst>
           </p:cNvPr>
@@ -14756,7 +14756,7 @@
           <p:cNvPr id="53" name="">
             <a:extLst xmlns:a="http://schemas.openxmlformats.org/drawingml/2006/main">
               <a:ext uri="{FF2B5EF4-FFF2-40B4-BE49-F238E27FC236}">
-                <a16:creationId xmlns:a16="http://schemas.microsoft.com/office/drawing/2014/main" id="{50E735DA-2EE0-4406-9278-6C9407026C56}"/>
+                <a16:creationId xmlns:a16="http://schemas.microsoft.com/office/drawing/2014/main" id="{EEE5D3F3-A0F6-4031-BFA9-423A029CF023}"/>
               </a:ext>
             </a:extLst>
           </p:cNvPr>
@@ -14787,7 +14787,7 @@
           <p:cNvPr id="54" name="S0: 영어로 평가 / S1: 한국어 번역으로 평가 충실도 H0C1S0 n=58, H0C0S1 n=57, 나머지 n=">
             <a:extLst xmlns:a="http://schemas.openxmlformats.org/drawingml/2006/main">
               <a:ext uri="{FF2B5EF4-FFF2-40B4-BE49-F238E27FC236}">
-                <a16:creationId xmlns:a16="http://schemas.microsoft.com/office/drawing/2014/main" id="{75046709-B8A9-4069-A223-55D1E6965471}"/>
+                <a16:creationId xmlns:a16="http://schemas.microsoft.com/office/drawing/2014/main" id="{295E0488-BDFD-4C11-B933-812D2285EFAC}"/>
               </a:ext>
             </a:extLst>
           </p:cNvPr>
@@ -14991,7 +14991,7 @@
           <p:cNvPr id="55" name="3요인 반복측정 ANOVA  ·  각 효과 df=(1,59)">
             <a:extLst xmlns:a="http://schemas.openxmlformats.org/drawingml/2006/main">
               <a:ext uri="{FF2B5EF4-FFF2-40B4-BE49-F238E27FC236}">
-                <a16:creationId xmlns:a16="http://schemas.microsoft.com/office/drawing/2014/main" id="{3882FF16-E846-400D-9A81-05F42242403F}"/>
+                <a16:creationId xmlns:a16="http://schemas.microsoft.com/office/drawing/2014/main" id="{40531829-FA42-40F2-ABFC-4704220EC752}"/>
               </a:ext>
             </a:extLst>
           </p:cNvPr>
@@ -15149,7 +15149,7 @@
           <p:cNvPr id="56" name="">
             <a:extLst xmlns:a="http://schemas.openxmlformats.org/drawingml/2006/main">
               <a:ext uri="{FF2B5EF4-FFF2-40B4-BE49-F238E27FC236}">
-                <a16:creationId xmlns:a16="http://schemas.microsoft.com/office/drawing/2014/main" id="{FBEFF174-3C7C-4C0E-A6AF-AD0B9E05ACA0}"/>
+                <a16:creationId xmlns:a16="http://schemas.microsoft.com/office/drawing/2014/main" id="{393AD65B-8613-4291-8BAE-D64014BEB2C3}"/>
               </a:ext>
             </a:extLst>
           </p:cNvPr>
@@ -16862,7 +16862,7 @@
           <p:cNvPr id="57" name="p&lt;0.05: 한국어 비율 S·H×C / 실행 시간 H·C·S·C×S RAGAS H×C 검정은 평가 언어별로 수행했으">
             <a:extLst xmlns:a="http://schemas.openxmlformats.org/drawingml/2006/main">
               <a:ext uri="{FF2B5EF4-FFF2-40B4-BE49-F238E27FC236}">
-                <a16:creationId xmlns:a16="http://schemas.microsoft.com/office/drawing/2014/main" id="{B6008603-5833-4D74-AF42-AFDE4985F7D8}"/>
+                <a16:creationId xmlns:a16="http://schemas.microsoft.com/office/drawing/2014/main" id="{8D43E5C8-53AE-46BC-8AC2-0CAB42FBFE59}"/>
               </a:ext>
             </a:extLst>
           </p:cNvPr>
@@ -17066,7 +17066,7 @@
           <p:cNvPr id="58" name="기법별 대응 비교  ·  질의별 평균 차이, 양측 검정">
             <a:extLst xmlns:a="http://schemas.openxmlformats.org/drawingml/2006/main">
               <a:ext uri="{FF2B5EF4-FFF2-40B4-BE49-F238E27FC236}">
-                <a16:creationId xmlns:a16="http://schemas.microsoft.com/office/drawing/2014/main" id="{E738EF54-CAFB-4DA8-B1B1-62B796968596}"/>
+                <a16:creationId xmlns:a16="http://schemas.microsoft.com/office/drawing/2014/main" id="{1CBB8F47-5559-4E64-A827-F5A96B999554}"/>
               </a:ext>
             </a:extLst>
           </p:cNvPr>
@@ -17224,7 +17224,7 @@
           <p:cNvPr id="59" name="">
             <a:extLst xmlns:a="http://schemas.openxmlformats.org/drawingml/2006/main">
               <a:ext uri="{FF2B5EF4-FFF2-40B4-BE49-F238E27FC236}">
-                <a16:creationId xmlns:a16="http://schemas.microsoft.com/office/drawing/2014/main" id="{C1FE5007-D33D-452F-B7E4-1159DE971303}"/>
+                <a16:creationId xmlns:a16="http://schemas.microsoft.com/office/drawing/2014/main" id="{205563F7-B5A4-434B-8C44-4B92B7814EC4}"/>
               </a:ext>
             </a:extLst>
           </p:cNvPr>
@@ -18237,7 +18237,7 @@
           <p:cNvPr id="60" name="HyDE: C0S0, CAD: H0S0, SCD: H0의 CAD 상태 평균 p: 다중비교 보정 없는 양측 p, dz:">
             <a:extLst xmlns:a="http://schemas.openxmlformats.org/drawingml/2006/main">
               <a:ext uri="{FF2B5EF4-FFF2-40B4-BE49-F238E27FC236}">
-                <a16:creationId xmlns:a16="http://schemas.microsoft.com/office/drawing/2014/main" id="{FDC519F8-214C-4CE9-8A1E-FCFF5193EA6F}"/>
+                <a16:creationId xmlns:a16="http://schemas.microsoft.com/office/drawing/2014/main" id="{C0816845-668B-41BA-BDBE-562C26C50FEC}"/>
               </a:ext>
             </a:extLst>
           </p:cNvPr>
@@ -18464,7 +18464,7 @@
           <p:cNvPr id="61" name="">
             <a:extLst xmlns:a="http://schemas.openxmlformats.org/drawingml/2006/main">
               <a:ext uri="{FF2B5EF4-FFF2-40B4-BE49-F238E27FC236}">
-                <a16:creationId xmlns:a16="http://schemas.microsoft.com/office/drawing/2014/main" id="{88A47597-C87D-49E1-B562-57E722E00F6B}"/>
+                <a16:creationId xmlns:a16="http://schemas.microsoft.com/office/drawing/2014/main" id="{016D7BE4-F789-46BA-AD29-2F59AB9C1732}"/>
               </a:ext>
             </a:extLst>
           </p:cNvPr>
@@ -18495,7 +18495,7 @@
           <p:cNvPr id="62" name="06 결과 해석">
             <a:extLst xmlns:a="http://schemas.openxmlformats.org/drawingml/2006/main">
               <a:ext uri="{FF2B5EF4-FFF2-40B4-BE49-F238E27FC236}">
-                <a16:creationId xmlns:a16="http://schemas.microsoft.com/office/drawing/2014/main" id="{F7C8BA24-D803-4068-9833-87ECD866E268}"/>
+                <a16:creationId xmlns:a16="http://schemas.microsoft.com/office/drawing/2014/main" id="{6F48715C-D631-4F96-9C90-6B0BF34481F5}"/>
               </a:ext>
             </a:extLst>
           </p:cNvPr>
@@ -18653,7 +18653,7 @@
           <p:cNvPr id="63" name="HyDE 관련성은 평균 +0.080점, t(59)=2.236, p=0.029였다. CAD 충실도는 평균 +0.029점">
             <a:extLst xmlns:a="http://schemas.openxmlformats.org/drawingml/2006/main">
               <a:ext uri="{FF2B5EF4-FFF2-40B4-BE49-F238E27FC236}">
-                <a16:creationId xmlns:a16="http://schemas.microsoft.com/office/drawing/2014/main" id="{6FD4FACA-8CCF-41E3-9547-9A10A217EB9D}"/>
+                <a16:creationId xmlns:a16="http://schemas.microsoft.com/office/drawing/2014/main" id="{3E3E3D95-84C1-4D2B-B648-631C8BDC05EE}"/>
               </a:ext>
             </a:extLst>
           </p:cNvPr>
@@ -18847,7 +18847,7 @@
                 <a:ea typeface="Malgun Gothic"/>
                 <a:cs typeface="Malgun Gothic"/>
               </a:rPr>
-              <a:t>SCD 주 비교의 한국어 비율은 21.822%p 높았다(p&lt;0.001).</a:t>
+              <a:t>SCD 주 비교의 한국어 비율은 21.8%p 높았다(p&lt;0.001).</a:t>
             </a:r>
           </a:p>
           <a:p xmlns:a="http://schemas.openxmlformats.org/drawingml/2006/main">
@@ -18870,7 +18870,7 @@
                 <a:ea typeface="Malgun Gothic"/>
                 <a:cs typeface="Malgun Gothic"/>
               </a:rPr>
-              <a:t>CAD 시간 증가: SCD OFF +46.583초 / ON +37.747초.</a:t>
+              <a:t>CAD 시간 증가: SCD OFF +46.6초 / ON +37.7초.</a:t>
             </a:r>
           </a:p>
         </p:txBody>
@@ -18880,7 +18880,7 @@
           <p:cNvPr id="64" name="">
             <a:extLst xmlns:a="http://schemas.openxmlformats.org/drawingml/2006/main">
               <a:ext uri="{FF2B5EF4-FFF2-40B4-BE49-F238E27FC236}">
-                <a16:creationId xmlns:a16="http://schemas.microsoft.com/office/drawing/2014/main" id="{7DA0E778-FFE5-4E17-8764-81049E8D7078}"/>
+                <a16:creationId xmlns:a16="http://schemas.microsoft.com/office/drawing/2014/main" id="{0DDFB009-280C-4D25-8BD8-EC906DF8121E}"/>
               </a:ext>
             </a:extLst>
           </p:cNvPr>
@@ -18911,7 +18911,7 @@
           <p:cNvPr id="65" name="07 결론">
             <a:extLst xmlns:a="http://schemas.openxmlformats.org/drawingml/2006/main">
               <a:ext uri="{FF2B5EF4-FFF2-40B4-BE49-F238E27FC236}">
-                <a16:creationId xmlns:a16="http://schemas.microsoft.com/office/drawing/2014/main" id="{BBA5CC2C-EA78-454B-9C85-4297DD269849}"/>
+                <a16:creationId xmlns:a16="http://schemas.microsoft.com/office/drawing/2014/main" id="{BEF4C6BB-82A6-46F7-B90D-D803172EA2E4}"/>
               </a:ext>
             </a:extLst>
           </p:cNvPr>
@@ -19069,7 +19069,7 @@
           <p:cNvPr id="66" name="HyDE는 C0S0에서 관련성을 높였고(p=0.029), CAD 충실도 차이는 p=0.393이었다. SCD는 같은 영">
             <a:extLst xmlns:a="http://schemas.openxmlformats.org/drawingml/2006/main">
               <a:ext uri="{FF2B5EF4-FFF2-40B4-BE49-F238E27FC236}">
-                <a16:creationId xmlns:a16="http://schemas.microsoft.com/office/drawing/2014/main" id="{FE250D17-B2D7-4429-9AA1-CDA727DCE868}"/>
+                <a16:creationId xmlns:a16="http://schemas.microsoft.com/office/drawing/2014/main" id="{86590124-E2D6-4D2C-BCE9-2DA0B098CE85}"/>
               </a:ext>
             </a:extLst>
           </p:cNvPr>
@@ -19319,7 +19319,7 @@
           <p:cNvPr id="67" name="">
             <a:extLst xmlns:a="http://schemas.openxmlformats.org/drawingml/2006/main">
               <a:ext uri="{FF2B5EF4-FFF2-40B4-BE49-F238E27FC236}">
-                <a16:creationId xmlns:a16="http://schemas.microsoft.com/office/drawing/2014/main" id="{615B71FC-A346-4231-AF8D-A0CB757FFA38}"/>
+                <a16:creationId xmlns:a16="http://schemas.microsoft.com/office/drawing/2014/main" id="{836ABA67-7A8C-4E2E-91E6-A3D6200818D8}"/>
               </a:ext>
             </a:extLst>
           </p:cNvPr>
@@ -19350,7 +19350,7 @@
           <p:cNvPr id="68" name="08 주요 참고문헌">
             <a:extLst xmlns:a="http://schemas.openxmlformats.org/drawingml/2006/main">
               <a:ext uri="{FF2B5EF4-FFF2-40B4-BE49-F238E27FC236}">
-                <a16:creationId xmlns:a16="http://schemas.microsoft.com/office/drawing/2014/main" id="{73C8002D-0CF4-4E30-AAC4-5FCDD9F3AE6E}"/>
+                <a16:creationId xmlns:a16="http://schemas.microsoft.com/office/drawing/2014/main" id="{4D6854E6-000C-459A-B5ED-65287A85E009}"/>
               </a:ext>
             </a:extLst>
           </p:cNvPr>
@@ -19508,7 +19508,7 @@
           <p:cNvPr id="69" name="[1] Lewis et al. RAG. NeurIPS, 2020. [2] Gao et al. HyDE. ACL, 20">
             <a:extLst xmlns:a="http://schemas.openxmlformats.org/drawingml/2006/main">
               <a:ext uri="{FF2B5EF4-FFF2-40B4-BE49-F238E27FC236}">
-                <a16:creationId xmlns:a16="http://schemas.microsoft.com/office/drawing/2014/main" id="{41E7049E-11D6-4A1F-BE20-646651CCEE37}"/>
+                <a16:creationId xmlns:a16="http://schemas.microsoft.com/office/drawing/2014/main" id="{825D5A2E-31B9-4494-A2A9-4E4FF8352A4F}"/>
               </a:ext>
             </a:extLst>
           </p:cNvPr>
@@ -19712,7 +19712,7 @@
           <p:cNvPr id="70" name="[4] Li et al. Language Drift and SCD. AAAI, 2026. [5] Chen et al.">
             <a:extLst xmlns:a="http://schemas.openxmlformats.org/drawingml/2006/main">
               <a:ext uri="{FF2B5EF4-FFF2-40B4-BE49-F238E27FC236}">
-                <a16:creationId xmlns:a16="http://schemas.microsoft.com/office/drawing/2014/main" id="{2896C016-835C-4B43-8751-EF7457D37FFB}"/>
+                <a16:creationId xmlns:a16="http://schemas.microsoft.com/office/drawing/2014/main" id="{DE9E04A5-62CE-4805-8CFA-37769019A343}"/>
               </a:ext>
             </a:extLst>
           </p:cNvPr>
@@ -19916,7 +19916,7 @@
           <p:cNvPr id="71" name="[6] Robertson et al. Okapi at TREC-3. NIST, 1995. [7] Cormack et ">
             <a:extLst xmlns:a="http://schemas.openxmlformats.org/drawingml/2006/main">
               <a:ext uri="{FF2B5EF4-FFF2-40B4-BE49-F238E27FC236}">
-                <a16:creationId xmlns:a16="http://schemas.microsoft.com/office/drawing/2014/main" id="{683BF456-9D45-4BAC-9121-73490765EBD6}"/>
+                <a16:creationId xmlns:a16="http://schemas.microsoft.com/office/drawing/2014/main" id="{78204908-7C94-46F5-ABDD-4B5AEE8C319D}"/>
               </a:ext>
             </a:extLst>
           </p:cNvPr>
@@ -20097,7 +20097,7 @@
           <p:cNvPr id="72" name="[8] MacAvaney et al. CEDR. SIGIR, 2019. 공식 모델  [M1] KT Mi:dm 2.0 ">
             <a:extLst xmlns:a="http://schemas.openxmlformats.org/drawingml/2006/main">
               <a:ext uri="{FF2B5EF4-FFF2-40B4-BE49-F238E27FC236}">
-                <a16:creationId xmlns:a16="http://schemas.microsoft.com/office/drawing/2014/main" id="{655632E7-3B6A-41E8-8507-B51A203634B6}"/>
+                <a16:creationId xmlns:a16="http://schemas.microsoft.com/office/drawing/2014/main" id="{A19F4303-8579-495D-AFDA-452DB00C7124}"/>
               </a:ext>
             </a:extLst>
           </p:cNvPr>
@@ -20278,7 +20278,7 @@
           <p:cNvPr id="73" name="전체 참고문헌 22편과 모델·자료 출처는 논문의 참고문헌에 수록">
             <a:extLst xmlns:a="http://schemas.openxmlformats.org/drawingml/2006/main">
               <a:ext uri="{FF2B5EF4-FFF2-40B4-BE49-F238E27FC236}">
-                <a16:creationId xmlns:a16="http://schemas.microsoft.com/office/drawing/2014/main" id="{E4E79B22-ABD6-442D-BE31-552D3F2694A1}"/>
+                <a16:creationId xmlns:a16="http://schemas.microsoft.com/office/drawing/2014/main" id="{C324540F-2DBC-4D8F-9B96-472E99434986}"/>
               </a:ext>
             </a:extLst>
           </p:cNvPr>
@@ -20436,7 +20436,7 @@
           <p:cNvPr id="74" name="영어 문서 4종 · 질의 60개 · 생성 모델 1종 · 질의별 반복측정">
             <a:extLst xmlns:a="http://schemas.openxmlformats.org/drawingml/2006/main">
               <a:ext uri="{FF2B5EF4-FFF2-40B4-BE49-F238E27FC236}">
-                <a16:creationId xmlns:a16="http://schemas.microsoft.com/office/drawing/2014/main" id="{E1AF734D-69B7-48D0-B1F4-ABEFB0216D42}"/>
+                <a16:creationId xmlns:a16="http://schemas.microsoft.com/office/drawing/2014/main" id="{D495E1C2-3AAE-4CF5-9BE2-746AF70B155E}"/>
               </a:ext>
             </a:extLst>
           </p:cNvPr>
@@ -20594,7 +20594,7 @@
           <p:cNvPr id="75" name="A1 594 × 841 mm">
             <a:extLst xmlns:a="http://schemas.openxmlformats.org/drawingml/2006/main">
               <a:ext uri="{FF2B5EF4-FFF2-40B4-BE49-F238E27FC236}">
-                <a16:creationId xmlns:a16="http://schemas.microsoft.com/office/drawing/2014/main" id="{13CEBAD9-9D63-45DD-AB62-1A79BE0DE151}"/>
+                <a16:creationId xmlns:a16="http://schemas.microsoft.com/office/drawing/2014/main" id="{7AD36D54-2D25-403B-9A86-DCF8076F882E}"/>
               </a:ext>
             </a:extLst>
           </p:cNvPr>
@@ -20750,7 +20750,7 @@
     </p:spTree>
     <p:extLst>
       <p:ext uri="{BB962C8B-B14F-4D97-AF65-F5344CB8AC3E}">
-        <p14:creationId xmlns:p14="http://schemas.microsoft.com/office/powerpoint/2010/main" val="1613744321"/>
+        <p14:creationId xmlns:p14="http://schemas.microsoft.com/office/powerpoint/2010/main" val="2047551306"/>
       </p:ext>
     </p:extLst>
   </p:cSld>

--- a/FINALDOCS/POSTER/FINAL/M_RAG_A1_FINAL_EDITABLE.pptx
+++ b/FINALDOCS/POSTER/FINAL/M_RAG_A1_FINAL_EDITABLE.pptx
@@ -2,13 +2,13 @@
 <file path=ppt/presentation.xml><?xml version="1.0" encoding="utf-8"?>
 <p:presentation xmlns:p="http://schemas.openxmlformats.org/presentationml/2006/main">
   <p:sldMasterIdLst>
-    <p:sldMasterId xmlns:r="http://schemas.openxmlformats.org/officeDocument/2006/relationships" id="2147483648" r:id="R6235bf1f6f664c81"/>
+    <p:sldMasterId xmlns:r="http://schemas.openxmlformats.org/officeDocument/2006/relationships" id="2147483648" r:id="R78afd8e3b6eb4d84"/>
   </p:sldMasterIdLst>
   <p:notesMasterIdLst>
-    <p:notesMasterId xmlns:r="http://schemas.openxmlformats.org/officeDocument/2006/relationships" r:id="Rdd3939f53baa400d"/>
+    <p:notesMasterId xmlns:r="http://schemas.openxmlformats.org/officeDocument/2006/relationships" r:id="R53f3c389fc704493"/>
   </p:notesMasterIdLst>
   <p:sldIdLst>
-    <p:sldId xmlns:r="http://schemas.openxmlformats.org/officeDocument/2006/relationships" id="256" r:id="Re375367e10cc407b"/>
+    <p:sldId xmlns:r="http://schemas.openxmlformats.org/officeDocument/2006/relationships" id="256" r:id="Rc702f5a0ec6c4574"/>
   </p:sldIdLst>
   <p:sldSz cx="21384000" cy="30276000"/>
   <p:notesSz cx="6858000" cy="9144000"/>
@@ -489,7 +489,7 @@
           <p:cNvPr id="3" name="Title">
             <a:extLst xmlns:a="http://schemas.openxmlformats.org/drawingml/2006/main">
               <a:ext uri="{FF2B5EF4-FFF2-40B4-BE49-F238E27FC236}">
-                <a16:creationId xmlns:a16="http://schemas.microsoft.com/office/drawing/2014/main" id="{07C0BAFA-B223-4E60-99AC-127FBC0D8590}"/>
+                <a16:creationId xmlns:a16="http://schemas.microsoft.com/office/drawing/2014/main" id="{2289664F-4BAD-455F-A843-FE758703F648}"/>
               </a:ext>
             </a:extLst>
           </p:cNvPr>
@@ -718,7 +718,7 @@
           <p:cNvPr id="2" name="Subtitle">
             <a:extLst xmlns:a="http://schemas.openxmlformats.org/drawingml/2006/main">
               <a:ext uri="{FF2B5EF4-FFF2-40B4-BE49-F238E27FC236}">
-                <a16:creationId xmlns:a16="http://schemas.microsoft.com/office/drawing/2014/main" id="{31722EE8-B848-4B0B-9468-5D6C68178045}"/>
+                <a16:creationId xmlns:a16="http://schemas.microsoft.com/office/drawing/2014/main" id="{6806BBF0-0EB0-4FA4-AD43-B7CB5FC00D4D}"/>
               </a:ext>
             </a:extLst>
           </p:cNvPr>
@@ -964,7 +964,7 @@
           <p:cNvPr id="2" name="Section title">
             <a:extLst xmlns:a="http://schemas.openxmlformats.org/drawingml/2006/main">
               <a:ext uri="{FF2B5EF4-FFF2-40B4-BE49-F238E27FC236}">
-                <a16:creationId xmlns:a16="http://schemas.microsoft.com/office/drawing/2014/main" id="{E65C68E4-B19B-414A-999E-423151292715}"/>
+                <a16:creationId xmlns:a16="http://schemas.microsoft.com/office/drawing/2014/main" id="{AA42F1BD-BB3A-45EA-BEF4-E97982B6E594}"/>
               </a:ext>
             </a:extLst>
           </p:cNvPr>
@@ -1210,7 +1210,7 @@
           <p:cNvPr id="3" name="Title">
             <a:extLst xmlns:a="http://schemas.openxmlformats.org/drawingml/2006/main">
               <a:ext uri="{FF2B5EF4-FFF2-40B4-BE49-F238E27FC236}">
-                <a16:creationId xmlns:a16="http://schemas.microsoft.com/office/drawing/2014/main" id="{6F31241B-A97F-4299-A9AC-F0157EAABDED}"/>
+                <a16:creationId xmlns:a16="http://schemas.microsoft.com/office/drawing/2014/main" id="{CFD9C104-D843-4298-BC0A-9262CD460E44}"/>
               </a:ext>
             </a:extLst>
           </p:cNvPr>
@@ -1439,7 +1439,7 @@
           <p:cNvPr id="2" name="Body">
             <a:extLst xmlns:a="http://schemas.openxmlformats.org/drawingml/2006/main">
               <a:ext uri="{FF2B5EF4-FFF2-40B4-BE49-F238E27FC236}">
-                <a16:creationId xmlns:a16="http://schemas.microsoft.com/office/drawing/2014/main" id="{2E4E7E5E-1A2C-42E0-93CF-71AEC85BCC1B}"/>
+                <a16:creationId xmlns:a16="http://schemas.microsoft.com/office/drawing/2014/main" id="{FC452112-BDC6-47DD-9B0E-F20F3C12DCD0}"/>
               </a:ext>
             </a:extLst>
           </p:cNvPr>
@@ -1685,7 +1685,7 @@
           <p:cNvPr id="4" name="Title">
             <a:extLst xmlns:a="http://schemas.openxmlformats.org/drawingml/2006/main">
               <a:ext uri="{FF2B5EF4-FFF2-40B4-BE49-F238E27FC236}">
-                <a16:creationId xmlns:a16="http://schemas.microsoft.com/office/drawing/2014/main" id="{5D5D812A-FDAF-4B24-9C9D-FB29B3C0FB07}"/>
+                <a16:creationId xmlns:a16="http://schemas.microsoft.com/office/drawing/2014/main" id="{DE7D7297-F64C-4758-B596-BED90235E8BC}"/>
               </a:ext>
             </a:extLst>
           </p:cNvPr>
@@ -1914,7 +1914,7 @@
           <p:cNvPr id="2" name="Left column">
             <a:extLst xmlns:a="http://schemas.openxmlformats.org/drawingml/2006/main">
               <a:ext uri="{FF2B5EF4-FFF2-40B4-BE49-F238E27FC236}">
-                <a16:creationId xmlns:a16="http://schemas.microsoft.com/office/drawing/2014/main" id="{F5D9849A-6575-4645-8D61-27673A9280F3}"/>
+                <a16:creationId xmlns:a16="http://schemas.microsoft.com/office/drawing/2014/main" id="{4F2C80AE-DFF1-4F27-9F1B-EC6749770F90}"/>
               </a:ext>
             </a:extLst>
           </p:cNvPr>
@@ -2143,7 +2143,7 @@
           <p:cNvPr id="3" name="Right column">
             <a:extLst xmlns:a="http://schemas.openxmlformats.org/drawingml/2006/main">
               <a:ext uri="{FF2B5EF4-FFF2-40B4-BE49-F238E27FC236}">
-                <a16:creationId xmlns:a16="http://schemas.microsoft.com/office/drawing/2014/main" id="{5CFD4B5D-6546-4CF6-8A2B-7B1C789071A2}"/>
+                <a16:creationId xmlns:a16="http://schemas.microsoft.com/office/drawing/2014/main" id="{AD4B81D9-AF12-44CA-9E56-164D7F24E64B}"/>
               </a:ext>
             </a:extLst>
           </p:cNvPr>
@@ -2389,7 +2389,7 @@
           <p:cNvPr id="3" name="Title">
             <a:extLst xmlns:a="http://schemas.openxmlformats.org/drawingml/2006/main">
               <a:ext uri="{FF2B5EF4-FFF2-40B4-BE49-F238E27FC236}">
-                <a16:creationId xmlns:a16="http://schemas.microsoft.com/office/drawing/2014/main" id="{5497BE03-BD2D-4F5F-8AA9-2FBA4F1FEDA7}"/>
+                <a16:creationId xmlns:a16="http://schemas.microsoft.com/office/drawing/2014/main" id="{ACB77181-AB22-4E4B-B333-D0272E4A1C6F}"/>
               </a:ext>
             </a:extLst>
           </p:cNvPr>
@@ -2618,7 +2618,7 @@
           <p:cNvPr id="2" name="Left column">
             <a:extLst xmlns:a="http://schemas.openxmlformats.org/drawingml/2006/main">
               <a:ext uri="{FF2B5EF4-FFF2-40B4-BE49-F238E27FC236}">
-                <a16:creationId xmlns:a16="http://schemas.microsoft.com/office/drawing/2014/main" id="{A2718882-54BE-4AE2-BBCF-118386EB170C}"/>
+                <a16:creationId xmlns:a16="http://schemas.microsoft.com/office/drawing/2014/main" id="{2DE6CFAD-8C85-43A2-968E-62AAB1A15F7E}"/>
               </a:ext>
             </a:extLst>
           </p:cNvPr>
@@ -2885,12 +2885,12 @@
   </p:cSld>
   <p:clrMap bg1="lt1" tx1="dk1" bg2="lt2" tx2="dk2" accent1="accent1" accent2="accent2" accent3="accent3" accent4="accent4" accent5="accent5" accent6="accent6" hlink="hlink" folHlink="folHlink"/>
   <p:sldLayoutIdLst>
-    <p:sldLayoutId xmlns:r="http://schemas.openxmlformats.org/officeDocument/2006/relationships" id="2147483649" r:id="R13ad1610903c456d"/>
-    <p:sldLayoutId xmlns:r="http://schemas.openxmlformats.org/officeDocument/2006/relationships" id="2147483650" r:id="Raa47b83c4b44442f"/>
-    <p:sldLayoutId xmlns:r="http://schemas.openxmlformats.org/officeDocument/2006/relationships" id="2147483651" r:id="Rd864ad15c57047f7"/>
-    <p:sldLayoutId xmlns:r="http://schemas.openxmlformats.org/officeDocument/2006/relationships" id="2147483652" r:id="R9d61913635c24bf8"/>
-    <p:sldLayoutId xmlns:r="http://schemas.openxmlformats.org/officeDocument/2006/relationships" id="2147483653" r:id="Rd70f9866964b4fb1"/>
-    <p:sldLayoutId xmlns:r="http://schemas.openxmlformats.org/officeDocument/2006/relationships" id="2147483654" r:id="R5547191a3a99437b"/>
+    <p:sldLayoutId xmlns:r="http://schemas.openxmlformats.org/officeDocument/2006/relationships" id="2147483649" r:id="R1f60f0ded9034f6b"/>
+    <p:sldLayoutId xmlns:r="http://schemas.openxmlformats.org/officeDocument/2006/relationships" id="2147483650" r:id="Rb54d3af20ef84be9"/>
+    <p:sldLayoutId xmlns:r="http://schemas.openxmlformats.org/officeDocument/2006/relationships" id="2147483651" r:id="R05087f3bbfb347a5"/>
+    <p:sldLayoutId xmlns:r="http://schemas.openxmlformats.org/officeDocument/2006/relationships" id="2147483652" r:id="Ra9f3dc87f8584bb7"/>
+    <p:sldLayoutId xmlns:r="http://schemas.openxmlformats.org/officeDocument/2006/relationships" id="2147483653" r:id="Rc9f11f8eca024695"/>
+    <p:sldLayoutId xmlns:r="http://schemas.openxmlformats.org/officeDocument/2006/relationships" id="2147483654" r:id="Rf5144ccf0c2f4f2a"/>
   </p:sldLayoutIdLst>
   <p:txStyles>
     <p:titleStyle>
@@ -3441,7 +3441,7 @@
           <p:cNvPr id="76" name="">
             <a:extLst xmlns:a="http://schemas.openxmlformats.org/drawingml/2006/main">
               <a:ext uri="{FF2B5EF4-FFF2-40B4-BE49-F238E27FC236}">
-                <a16:creationId xmlns:a16="http://schemas.microsoft.com/office/drawing/2014/main" id="{E588A753-C5A7-4FB4-92AF-E8386BB8A7B6}"/>
+                <a16:creationId xmlns:a16="http://schemas.microsoft.com/office/drawing/2014/main" id="{7DDBC1E5-11EC-4264-86F0-4D73BE6C60EE}"/>
               </a:ext>
             </a:extLst>
           </p:cNvPr>
@@ -3472,7 +3472,7 @@
           <p:cNvPr id="2" name="한국어 질의로 영어 학술·기술 문서를 검색하는">
             <a:extLst xmlns:a="http://schemas.openxmlformats.org/drawingml/2006/main">
               <a:ext uri="{FF2B5EF4-FFF2-40B4-BE49-F238E27FC236}">
-                <a16:creationId xmlns:a16="http://schemas.microsoft.com/office/drawing/2014/main" id="{98D35406-EEF0-4CD4-9D0D-F9C774496311}"/>
+                <a16:creationId xmlns:a16="http://schemas.microsoft.com/office/drawing/2014/main" id="{2CF6C21B-E085-4FBC-8B30-21AF6DC6BE00}"/>
               </a:ext>
             </a:extLst>
           </p:cNvPr>
@@ -3630,7 +3630,7 @@
           <p:cNvPr id="3" name="RAG에서의 HyDE·CAD·SCD 조합 실험">
             <a:extLst xmlns:a="http://schemas.openxmlformats.org/drawingml/2006/main">
               <a:ext uri="{FF2B5EF4-FFF2-40B4-BE49-F238E27FC236}">
-                <a16:creationId xmlns:a16="http://schemas.microsoft.com/office/drawing/2014/main" id="{E408D2E7-5DC9-4E7B-A58D-61B1A75077A7}"/>
+                <a16:creationId xmlns:a16="http://schemas.microsoft.com/office/drawing/2014/main" id="{8BBF0810-01B4-4D75-8ACB-8A99638F984C}"/>
               </a:ext>
             </a:extLst>
           </p:cNvPr>
@@ -3788,7 +3788,7 @@
           <p:cNvPr id="4" name="문종건 · 동국대학교 WISE캠퍼스 컴퓨터공학과 · 지도교수 김진석 · 2026.10.15">
             <a:extLst xmlns:a="http://schemas.openxmlformats.org/drawingml/2006/main">
               <a:ext uri="{FF2B5EF4-FFF2-40B4-BE49-F238E27FC236}">
-                <a16:creationId xmlns:a16="http://schemas.microsoft.com/office/drawing/2014/main" id="{33A74FED-624E-49DA-A8CD-D4E3025E1FAF}"/>
+                <a16:creationId xmlns:a16="http://schemas.microsoft.com/office/drawing/2014/main" id="{2313F6F6-C728-497B-889B-8CE8987F9CBC}"/>
               </a:ext>
             </a:extLst>
           </p:cNvPr>
@@ -3946,7 +3946,7 @@
           <p:cNvPr id="5" name="">
             <a:extLst xmlns:a="http://schemas.openxmlformats.org/drawingml/2006/main">
               <a:ext uri="{FF2B5EF4-FFF2-40B4-BE49-F238E27FC236}">
-                <a16:creationId xmlns:a16="http://schemas.microsoft.com/office/drawing/2014/main" id="{9D4DF89C-E278-440C-8963-49FB8E9EBD60}"/>
+                <a16:creationId xmlns:a16="http://schemas.microsoft.com/office/drawing/2014/main" id="{F23FD162-E6FE-45F4-A9CB-5EDCAE044FE1}"/>
               </a:ext>
             </a:extLst>
           </p:cNvPr>
@@ -3977,7 +3977,7 @@
           <p:cNvPr id="6" name="01 연구 배경과 목적">
             <a:extLst xmlns:a="http://schemas.openxmlformats.org/drawingml/2006/main">
               <a:ext uri="{FF2B5EF4-FFF2-40B4-BE49-F238E27FC236}">
-                <a16:creationId xmlns:a16="http://schemas.microsoft.com/office/drawing/2014/main" id="{BFF15FD1-5AE2-4B54-8FCD-DA7CD889F507}"/>
+                <a16:creationId xmlns:a16="http://schemas.microsoft.com/office/drawing/2014/main" id="{C2CAA2EF-A643-4DC9-8684-E5B981AAE592}"/>
               </a:ext>
             </a:extLst>
           </p:cNvPr>
@@ -4135,7 +4135,7 @@
           <p:cNvPr id="7" name="검색 증강 생성(Retrieval-Augmented Generation, RAG)은 관련 문서 구간을 검색하고 그 텍">
             <a:extLst xmlns:a="http://schemas.openxmlformats.org/drawingml/2006/main">
               <a:ext uri="{FF2B5EF4-FFF2-40B4-BE49-F238E27FC236}">
-                <a16:creationId xmlns:a16="http://schemas.microsoft.com/office/drawing/2014/main" id="{A7CB3FE7-97E8-4D81-8342-D368E706BD61}"/>
+                <a16:creationId xmlns:a16="http://schemas.microsoft.com/office/drawing/2014/main" id="{5F147FA8-2BDD-4566-AB38-91B67205580D}"/>
               </a:ext>
             </a:extLst>
           </p:cNvPr>
@@ -4316,7 +4316,7 @@
           <p:cNvPr id="8" name="HyDE: 가상 문서 임베딩(Hypothetical Document Embeddings) 가상 문서 검색 입력 구성[">
             <a:extLst xmlns:a="http://schemas.openxmlformats.org/drawingml/2006/main">
               <a:ext uri="{FF2B5EF4-FFF2-40B4-BE49-F238E27FC236}">
-                <a16:creationId xmlns:a16="http://schemas.microsoft.com/office/drawing/2014/main" id="{EC806C2C-1E27-4650-85F5-021605D0D260}"/>
+                <a16:creationId xmlns:a16="http://schemas.microsoft.com/office/drawing/2014/main" id="{A45F7719-E4B1-4D0E-9E1B-C09BE6212C7E}"/>
               </a:ext>
             </a:extLst>
           </p:cNvPr>
@@ -4586,10 +4586,10 @@
       </p:sp>
       <p:sp>
         <p:nvSpPr>
-          <p:cNvPr id="9" name="HyDE는 한국어를 포함한 다국어 검색에서 평가되었다[2]. 한국어 질의–영어 문서 환경에서 HyDE·CAD·SCD의">
+          <p:cNvPr id="9" name="한국어 질의–영어 문서 RAG는 검색 어휘 차이, 근거 반영, 영어 출력(언어 이탈)의 문제를 함께 겪는다. 세 기법">
             <a:extLst xmlns:a="http://schemas.openxmlformats.org/drawingml/2006/main">
               <a:ext uri="{FF2B5EF4-FFF2-40B4-BE49-F238E27FC236}">
-                <a16:creationId xmlns:a16="http://schemas.microsoft.com/office/drawing/2014/main" id="{702D493F-86F8-410D-8E8B-CB765BC158AE}"/>
+                <a16:creationId xmlns:a16="http://schemas.microsoft.com/office/drawing/2014/main" id="{EB97F40D-DBF6-42FC-9C01-A4BCF26C2E96}"/>
               </a:ext>
             </a:extLst>
           </p:cNvPr>
@@ -4737,7 +4737,7 @@
                 <a:ea typeface="Malgun Gothic"/>
                 <a:cs typeface="Malgun Gothic"/>
               </a:rPr>
-              <a:t>HyDE는 한국어를 포함한 다국어 검색에서 평가되었다[2].</a:t>
+              <a:t>한국어 질의–영어 문서 RAG는 검색 어휘 차이, 근거 반영,</a:t>
             </a:r>
           </a:p>
           <a:p xmlns:a="http://schemas.openxmlformats.org/drawingml/2006/main">
@@ -4760,7 +4760,7 @@
                 <a:ea typeface="Malgun Gothic"/>
                 <a:cs typeface="Malgun Gothic"/>
               </a:rPr>
-              <a:t>한국어 질의–영어 문서 환경에서 HyDE·CAD·SCD의</a:t>
+              <a:t>영어 출력(언어 이탈)의 문제를 함께 겪는다. 세 기법의</a:t>
             </a:r>
           </a:p>
           <a:p xmlns:a="http://schemas.openxmlformats.org/drawingml/2006/main">
@@ -4783,7 +4783,7 @@
                 <a:ea typeface="Malgun Gothic"/>
                 <a:cs typeface="Malgun Gothic"/>
               </a:rPr>
-              <a:t>개별 차이와 조합 효과를 같은 파이프라인에서 비교하였다.</a:t>
+              <a:t>단독 효과와 조합 효과를 같은 파이프라인에서 비교하였다.</a:t>
             </a:r>
           </a:p>
         </p:txBody>
@@ -4793,7 +4793,7 @@
           <p:cNvPr id="10" name="">
             <a:extLst xmlns:a="http://schemas.openxmlformats.org/drawingml/2006/main">
               <a:ext uri="{FF2B5EF4-FFF2-40B4-BE49-F238E27FC236}">
-                <a16:creationId xmlns:a16="http://schemas.microsoft.com/office/drawing/2014/main" id="{7DAAC475-77ED-4736-800A-8861726B01CE}"/>
+                <a16:creationId xmlns:a16="http://schemas.microsoft.com/office/drawing/2014/main" id="{A2CDC6DC-5954-4C46-A4EE-365ED29BE15E}"/>
               </a:ext>
             </a:extLst>
           </p:cNvPr>
@@ -4824,7 +4824,7 @@
           <p:cNvPr id="11" name="02 Paper-RAG 구조와 기법 적용 위치">
             <a:extLst xmlns:a="http://schemas.openxmlformats.org/drawingml/2006/main">
               <a:ext uri="{FF2B5EF4-FFF2-40B4-BE49-F238E27FC236}">
-                <a16:creationId xmlns:a16="http://schemas.microsoft.com/office/drawing/2014/main" id="{E3BD0098-3652-4F43-8EA0-33F0BD15F5AB}"/>
+                <a16:creationId xmlns:a16="http://schemas.microsoft.com/office/drawing/2014/main" id="{62C38AF6-1253-4D6A-AC7B-1307FF33F75D}"/>
               </a:ext>
             </a:extLst>
           </p:cNvPr>
@@ -4982,7 +4982,7 @@
           <p:cNvPr id="12" name="Paper-RAG는 실험에 사용한 고정 검색·생성 파이프라인이다.">
             <a:extLst xmlns:a="http://schemas.openxmlformats.org/drawingml/2006/main">
               <a:ext uri="{FF2B5EF4-FFF2-40B4-BE49-F238E27FC236}">
-                <a16:creationId xmlns:a16="http://schemas.microsoft.com/office/drawing/2014/main" id="{65790FA7-706C-4CCD-9B50-B6AFFD43CEBA}"/>
+                <a16:creationId xmlns:a16="http://schemas.microsoft.com/office/drawing/2014/main" id="{2946413C-2FBF-44EE-B3D8-2DA83DE7EE62}"/>
               </a:ext>
             </a:extLst>
           </p:cNvPr>
@@ -5140,7 +5140,7 @@
           <p:cNvPr id="13" name="">
             <a:extLst xmlns:a="http://schemas.openxmlformats.org/drawingml/2006/main">
               <a:ext uri="{FF2B5EF4-FFF2-40B4-BE49-F238E27FC236}">
-                <a16:creationId xmlns:a16="http://schemas.microsoft.com/office/drawing/2014/main" id="{493D2AE8-1B79-4888-8F4C-99CAD857174F}"/>
+                <a16:creationId xmlns:a16="http://schemas.microsoft.com/office/drawing/2014/main" id="{19B9C244-15B9-4843-9945-97BDAA6CF0C1}"/>
               </a:ext>
             </a:extLst>
           </p:cNvPr>
@@ -5173,7 +5173,7 @@
           <p:cNvPr id="14" name="한국어 질의 HyDE OFF: 원질의 HyDE ON: 영어 번역·가상 문서">
             <a:extLst xmlns:a="http://schemas.openxmlformats.org/drawingml/2006/main">
               <a:ext uri="{FF2B5EF4-FFF2-40B4-BE49-F238E27FC236}">
-                <a16:creationId xmlns:a16="http://schemas.microsoft.com/office/drawing/2014/main" id="{3654D477-6733-454A-B7F7-C181647B48FD}"/>
+                <a16:creationId xmlns:a16="http://schemas.microsoft.com/office/drawing/2014/main" id="{F622BCE3-CDE8-40A1-AC25-2AEC832302E1}"/>
               </a:ext>
             </a:extLst>
           </p:cNvPr>
@@ -5377,7 +5377,7 @@
           <p:cNvPr id="15" name="">
             <a:extLst xmlns:a="http://schemas.openxmlformats.org/drawingml/2006/main">
               <a:ext uri="{FF2B5EF4-FFF2-40B4-BE49-F238E27FC236}">
-                <a16:creationId xmlns:a16="http://schemas.microsoft.com/office/drawing/2014/main" id="{227747A0-E20C-4769-9D02-CF7A7DBCAA70}"/>
+                <a16:creationId xmlns:a16="http://schemas.microsoft.com/office/drawing/2014/main" id="{053DFD87-1233-4A3F-9594-BEC167988E3F}"/>
               </a:ext>
             </a:extLst>
           </p:cNvPr>
@@ -5410,7 +5410,7 @@
           <p:cNvPr id="16" name="BM25 희소 검색[6] 한국어 원질의 사용">
             <a:extLst xmlns:a="http://schemas.openxmlformats.org/drawingml/2006/main">
               <a:ext uri="{FF2B5EF4-FFF2-40B4-BE49-F238E27FC236}">
-                <a16:creationId xmlns:a16="http://schemas.microsoft.com/office/drawing/2014/main" id="{ACDFC118-C032-478F-AD46-18EC7D77D91C}"/>
+                <a16:creationId xmlns:a16="http://schemas.microsoft.com/office/drawing/2014/main" id="{ABBB11B8-CF77-48B6-96FF-90880EBACDA9}"/>
               </a:ext>
             </a:extLst>
           </p:cNvPr>
@@ -5591,7 +5591,7 @@
           <p:cNvPr id="17" name="">
             <a:extLst xmlns:a="http://schemas.openxmlformats.org/drawingml/2006/main">
               <a:ext uri="{FF2B5EF4-FFF2-40B4-BE49-F238E27FC236}">
-                <a16:creationId xmlns:a16="http://schemas.microsoft.com/office/drawing/2014/main" id="{C774C2BD-B9B7-49EF-88CB-B5F38ED7BCA4}"/>
+                <a16:creationId xmlns:a16="http://schemas.microsoft.com/office/drawing/2014/main" id="{0BFDC7CE-CCBF-4F05-B39D-4A43C8FF08CB}"/>
               </a:ext>
             </a:extLst>
           </p:cNvPr>
@@ -5624,7 +5624,7 @@
           <p:cNvPr id="18" name="BGE-M3 밀집 검색[5]">
             <a:extLst xmlns:a="http://schemas.openxmlformats.org/drawingml/2006/main">
               <a:ext uri="{FF2B5EF4-FFF2-40B4-BE49-F238E27FC236}">
-                <a16:creationId xmlns:a16="http://schemas.microsoft.com/office/drawing/2014/main" id="{19EE5B8B-6472-465C-BD69-6E4EF3AF93A5}"/>
+                <a16:creationId xmlns:a16="http://schemas.microsoft.com/office/drawing/2014/main" id="{BC311CD6-D28F-4F1D-908C-16A33A7E1928}"/>
               </a:ext>
             </a:extLst>
           </p:cNvPr>
@@ -5782,7 +5782,7 @@
           <p:cNvPr id="19" name="">
             <a:extLst xmlns:a="http://schemas.openxmlformats.org/drawingml/2006/main">
               <a:ext uri="{FF2B5EF4-FFF2-40B4-BE49-F238E27FC236}">
-                <a16:creationId xmlns:a16="http://schemas.microsoft.com/office/drawing/2014/main" id="{3FD039B9-CFAE-4DBA-AC09-EA5D171D50C3}"/>
+                <a16:creationId xmlns:a16="http://schemas.microsoft.com/office/drawing/2014/main" id="{C7223DBD-C1D5-463B-8F95-07D5239E345B}"/>
               </a:ext>
             </a:extLst>
           </p:cNvPr>
@@ -5815,7 +5815,7 @@
           <p:cNvPr id="20" name="가중 RRF[7] 0.6 / 0.4, k=60">
             <a:extLst xmlns:a="http://schemas.openxmlformats.org/drawingml/2006/main">
               <a:ext uri="{FF2B5EF4-FFF2-40B4-BE49-F238E27FC236}">
-                <a16:creationId xmlns:a16="http://schemas.microsoft.com/office/drawing/2014/main" id="{F99617E2-4428-4175-A3F3-E0A3B2F9CDC9}"/>
+                <a16:creationId xmlns:a16="http://schemas.microsoft.com/office/drawing/2014/main" id="{42E02A47-9235-410F-BC20-EBE6725FA5C7}"/>
               </a:ext>
             </a:extLst>
           </p:cNvPr>
@@ -5996,7 +5996,7 @@
           <p:cNvPr id="21" name="">
             <a:extLst xmlns:a="http://schemas.openxmlformats.org/drawingml/2006/main">
               <a:ext uri="{FF2B5EF4-FFF2-40B4-BE49-F238E27FC236}">
-                <a16:creationId xmlns:a16="http://schemas.microsoft.com/office/drawing/2014/main" id="{F2B7DFCE-5098-4056-B08C-A24DCDFCF6F6}"/>
+                <a16:creationId xmlns:a16="http://schemas.microsoft.com/office/drawing/2014/main" id="{8B8EBC5E-9FCC-476F-8D0A-DD4335116A84}"/>
               </a:ext>
             </a:extLst>
           </p:cNvPr>
@@ -6028,7 +6028,7 @@
           <p:cNvPr id="22" name="">
             <a:extLst xmlns:a="http://schemas.openxmlformats.org/drawingml/2006/main">
               <a:ext uri="{FF2B5EF4-FFF2-40B4-BE49-F238E27FC236}">
-                <a16:creationId xmlns:a16="http://schemas.microsoft.com/office/drawing/2014/main" id="{72BA4699-CED3-4379-81D6-5C05350B7BA8}"/>
+                <a16:creationId xmlns:a16="http://schemas.microsoft.com/office/drawing/2014/main" id="{3FD3FE97-E9E5-4DFD-8317-2CE1D8FFF96F}"/>
               </a:ext>
             </a:extLst>
           </p:cNvPr>
@@ -6060,7 +6060,7 @@
           <p:cNvPr id="23" name="">
             <a:extLst xmlns:a="http://schemas.openxmlformats.org/drawingml/2006/main">
               <a:ext uri="{FF2B5EF4-FFF2-40B4-BE49-F238E27FC236}">
-                <a16:creationId xmlns:a16="http://schemas.microsoft.com/office/drawing/2014/main" id="{84232A8F-9529-4010-8844-E0F6C238C2C8}"/>
+                <a16:creationId xmlns:a16="http://schemas.microsoft.com/office/drawing/2014/main" id="{FD7C67A9-3A28-4A2D-981B-70A9497B5CE3}"/>
               </a:ext>
             </a:extLst>
           </p:cNvPr>
@@ -6092,7 +6092,7 @@
           <p:cNvPr id="24" name="">
             <a:extLst xmlns:a="http://schemas.openxmlformats.org/drawingml/2006/main">
               <a:ext uri="{FF2B5EF4-FFF2-40B4-BE49-F238E27FC236}">
-                <a16:creationId xmlns:a16="http://schemas.microsoft.com/office/drawing/2014/main" id="{78048D26-F3E7-42D7-A017-56D562298958}"/>
+                <a16:creationId xmlns:a16="http://schemas.microsoft.com/office/drawing/2014/main" id="{A036E9F2-9F1D-4611-BFC3-41DE23A07634}"/>
               </a:ext>
             </a:extLst>
           </p:cNvPr>
@@ -6125,7 +6125,7 @@
           <p:cNvPr id="25" name="원질의·구간 쌍 CrossEncoder 재정렬[8][M2] 상위 5개 구간 선택·입력 길이 관리">
             <a:extLst xmlns:a="http://schemas.openxmlformats.org/drawingml/2006/main">
               <a:ext uri="{FF2B5EF4-FFF2-40B4-BE49-F238E27FC236}">
-                <a16:creationId xmlns:a16="http://schemas.microsoft.com/office/drawing/2014/main" id="{8EA43AF2-B64A-4825-9209-54524E873BC6}"/>
+                <a16:creationId xmlns:a16="http://schemas.microsoft.com/office/drawing/2014/main" id="{A0ED452E-C2A3-4CF9-B091-1CBC6DF62573}"/>
               </a:ext>
             </a:extLst>
           </p:cNvPr>
@@ -6306,7 +6306,7 @@
           <p:cNvPr id="26" name="">
             <a:extLst xmlns:a="http://schemas.openxmlformats.org/drawingml/2006/main">
               <a:ext uri="{FF2B5EF4-FFF2-40B4-BE49-F238E27FC236}">
-                <a16:creationId xmlns:a16="http://schemas.microsoft.com/office/drawing/2014/main" id="{2666C21F-B1C2-495D-99E4-DEE4712767ED}"/>
+                <a16:creationId xmlns:a16="http://schemas.microsoft.com/office/drawing/2014/main" id="{052BDE01-5338-4F1D-9563-CC39949503D2}"/>
               </a:ext>
             </a:extLst>
           </p:cNvPr>
@@ -6339,7 +6339,7 @@
           <p:cNvPr id="27" name="Mi:dm 2.0 Base Instruct[M1] CAD 로짓 결합 후 SCD 언어별 조정, 최종 답변 생성">
             <a:extLst xmlns:a="http://schemas.openxmlformats.org/drawingml/2006/main">
               <a:ext uri="{FF2B5EF4-FFF2-40B4-BE49-F238E27FC236}">
-                <a16:creationId xmlns:a16="http://schemas.microsoft.com/office/drawing/2014/main" id="{D2C6A544-5047-4101-9718-9B4665AB6650}"/>
+                <a16:creationId xmlns:a16="http://schemas.microsoft.com/office/drawing/2014/main" id="{BA8A9FC7-6D6C-41A5-8243-80100D13252E}"/>
               </a:ext>
             </a:extLst>
           </p:cNvPr>
@@ -6520,7 +6520,7 @@
           <p:cNvPr id="28" name="">
             <a:extLst xmlns:a="http://schemas.openxmlformats.org/drawingml/2006/main">
               <a:ext uri="{FF2B5EF4-FFF2-40B4-BE49-F238E27FC236}">
-                <a16:creationId xmlns:a16="http://schemas.microsoft.com/office/drawing/2014/main" id="{49AA8C1C-2718-487D-AEAC-C0F7205B48E6}"/>
+                <a16:creationId xmlns:a16="http://schemas.microsoft.com/office/drawing/2014/main" id="{14354F1F-4B89-4781-AC78-F19B65F36CB0}"/>
               </a:ext>
             </a:extLst>
           </p:cNvPr>
@@ -6552,7 +6552,7 @@
           <p:cNvPr id="29" name="">
             <a:extLst xmlns:a="http://schemas.openxmlformats.org/drawingml/2006/main">
               <a:ext uri="{FF2B5EF4-FFF2-40B4-BE49-F238E27FC236}">
-                <a16:creationId xmlns:a16="http://schemas.microsoft.com/office/drawing/2014/main" id="{5FE2221B-1614-44C7-A556-F8899D09CE55}"/>
+                <a16:creationId xmlns:a16="http://schemas.microsoft.com/office/drawing/2014/main" id="{7AC54586-7A9D-4D76-909D-1212D2BBC287}"/>
               </a:ext>
             </a:extLst>
           </p:cNvPr>
@@ -6584,7 +6584,7 @@
           <p:cNvPr id="30" name="">
             <a:extLst xmlns:a="http://schemas.openxmlformats.org/drawingml/2006/main">
               <a:ext uri="{FF2B5EF4-FFF2-40B4-BE49-F238E27FC236}">
-                <a16:creationId xmlns:a16="http://schemas.microsoft.com/office/drawing/2014/main" id="{8FF530EC-E47E-4AA1-BCA2-8125DD7D15C8}"/>
+                <a16:creationId xmlns:a16="http://schemas.microsoft.com/office/drawing/2014/main" id="{72222C0E-2B02-44C9-B807-5B6BE468252C}"/>
               </a:ext>
             </a:extLst>
           </p:cNvPr>
@@ -6615,7 +6615,7 @@
           <p:cNvPr id="31" name="03 3요인 완전요인 실험 설계">
             <a:extLst xmlns:a="http://schemas.openxmlformats.org/drawingml/2006/main">
               <a:ext uri="{FF2B5EF4-FFF2-40B4-BE49-F238E27FC236}">
-                <a16:creationId xmlns:a16="http://schemas.microsoft.com/office/drawing/2014/main" id="{A69E3D3F-0F58-40D0-9834-C475E82D57E2}"/>
+                <a16:creationId xmlns:a16="http://schemas.microsoft.com/office/drawing/2014/main" id="{94AE48EC-342C-4BA7-ADDB-A47541147896}"/>
               </a:ext>
             </a:extLst>
           </p:cNvPr>
@@ -6773,7 +6773,7 @@
           <p:cNvPr id="32" name="H=HyDE, C=CAD, S=SCD   0=미적용, 1=적용">
             <a:extLst xmlns:a="http://schemas.openxmlformats.org/drawingml/2006/main">
               <a:ext uri="{FF2B5EF4-FFF2-40B4-BE49-F238E27FC236}">
-                <a16:creationId xmlns:a16="http://schemas.microsoft.com/office/drawing/2014/main" id="{71871DC1-BCB9-401D-9EAE-4465591893B3}"/>
+                <a16:creationId xmlns:a16="http://schemas.microsoft.com/office/drawing/2014/main" id="{5EC852D3-B192-4764-9CA6-BEAA9E8068E9}"/>
               </a:ext>
             </a:extLst>
           </p:cNvPr>
@@ -6931,7 +6931,7 @@
           <p:cNvPr id="33" name="">
             <a:extLst xmlns:a="http://schemas.openxmlformats.org/drawingml/2006/main">
               <a:ext uri="{FF2B5EF4-FFF2-40B4-BE49-F238E27FC236}">
-                <a16:creationId xmlns:a16="http://schemas.microsoft.com/office/drawing/2014/main" id="{8AD321E6-9B75-47AF-AF04-C2D002046E83}"/>
+                <a16:creationId xmlns:a16="http://schemas.microsoft.com/office/drawing/2014/main" id="{4A773E95-A37F-41D7-8DDC-AB5530DE49B7}"/>
               </a:ext>
             </a:extLst>
           </p:cNvPr>
@@ -8461,7 +8461,7 @@
           <p:cNvPr id="34" name="같은 질의 60개 × 8조건 반복측정 = 480개 생성 기록">
             <a:extLst xmlns:a="http://schemas.openxmlformats.org/drawingml/2006/main">
               <a:ext uri="{FF2B5EF4-FFF2-40B4-BE49-F238E27FC236}">
-                <a16:creationId xmlns:a16="http://schemas.microsoft.com/office/drawing/2014/main" id="{116B4C4D-F43E-4030-BF53-304C1D03D96D}"/>
+                <a16:creationId xmlns:a16="http://schemas.microsoft.com/office/drawing/2014/main" id="{D4F54AAC-AA7C-4AA8-B9B5-055A817CF194}"/>
               </a:ext>
             </a:extLst>
           </p:cNvPr>
@@ -8619,7 +8619,7 @@
           <p:cNvPr id="35" name="생성 512토큰, CAD α=0.5, SCD α=1.1·β=0.9·Tstart=5">
             <a:extLst xmlns:a="http://schemas.openxmlformats.org/drawingml/2006/main">
               <a:ext uri="{FF2B5EF4-FFF2-40B4-BE49-F238E27FC236}">
-                <a16:creationId xmlns:a16="http://schemas.microsoft.com/office/drawing/2014/main" id="{31036749-CA9D-41BB-8831-0CDC2316E009}"/>
+                <a16:creationId xmlns:a16="http://schemas.microsoft.com/office/drawing/2014/main" id="{1F4A2435-F7C6-40F0-A5A3-6EC49D072E29}"/>
               </a:ext>
             </a:extLst>
           </p:cNvPr>
@@ -8774,10 +8774,10 @@
       </p:sp>
       <p:sp>
         <p:nvSpPr>
-          <p:cNvPr id="36" name="문서 요약을 15개 내용 단위로 나누어 질의를 작성하고, 총 60개 질의의 원문 페이지·정답 근거·답변 가능성을 확인">
+          <p:cNvPr id="36" name="문서마다 주요 내용을 15개 단위로 요약해 단위별 질의를 작성하고, 총 60개 질의의 원문 페이지·정답 근거·답변 가">
             <a:extLst xmlns:a="http://schemas.openxmlformats.org/drawingml/2006/main">
               <a:ext uri="{FF2B5EF4-FFF2-40B4-BE49-F238E27FC236}">
-                <a16:creationId xmlns:a16="http://schemas.microsoft.com/office/drawing/2014/main" id="{E2A9BD50-6725-4102-A775-2019F889C72F}"/>
+                <a16:creationId xmlns:a16="http://schemas.microsoft.com/office/drawing/2014/main" id="{C4F2748D-DCA3-4DAC-9007-CEEB1963C77A}"/>
               </a:ext>
             </a:extLst>
           </p:cNvPr>
@@ -8925,7 +8925,7 @@
                 <a:ea typeface="Malgun Gothic"/>
                 <a:cs typeface="Malgun Gothic"/>
               </a:rPr>
-              <a:t>문서 요약을 15개 내용 단위로 나누어 질의를 작성하고,</a:t>
+              <a:t>문서마다 주요 내용을 15개 단위로 요약해 단위별 질의를 작성하고,</a:t>
             </a:r>
           </a:p>
           <a:p xmlns:a="http://schemas.openxmlformats.org/drawingml/2006/main">
@@ -8958,7 +8958,7 @@
           <p:cNvPr id="37" name="">
             <a:extLst xmlns:a="http://schemas.openxmlformats.org/drawingml/2006/main">
               <a:ext uri="{FF2B5EF4-FFF2-40B4-BE49-F238E27FC236}">
-                <a16:creationId xmlns:a16="http://schemas.microsoft.com/office/drawing/2014/main" id="{C0303BCD-161F-4E51-9E8E-2C63C2D4017A}"/>
+                <a16:creationId xmlns:a16="http://schemas.microsoft.com/office/drawing/2014/main" id="{260B7A32-207C-4841-ABD0-2E7D29AE0DCF}"/>
               </a:ext>
             </a:extLst>
           </p:cNvPr>
@@ -8989,7 +8989,7 @@
           <p:cNvPr id="38" name="04 평가 지표 및 실험·통계 방법">
             <a:extLst xmlns:a="http://schemas.openxmlformats.org/drawingml/2006/main">
               <a:ext uri="{FF2B5EF4-FFF2-40B4-BE49-F238E27FC236}">
-                <a16:creationId xmlns:a16="http://schemas.microsoft.com/office/drawing/2014/main" id="{E4C8F15C-80C5-4B90-9D18-F64AD1EDAA8C}"/>
+                <a16:creationId xmlns:a16="http://schemas.microsoft.com/office/drawing/2014/main" id="{1BEFB309-50C9-4879-B124-470919C6FDAC}"/>
               </a:ext>
             </a:extLst>
           </p:cNvPr>
@@ -9144,10 +9144,10 @@
       </p:sp>
       <p:sp>
         <p:nvSpPr>
-          <p:cNvPr id="39" name="근거 충실도: 높을수록 검색 근거가 지지하는 답변 주장 비율이 크다. 답변 관련성: 높을수록 답변 기반 질문과 원질문">
+          <p:cNvPr id="39" name="근거 충실도: 높을수록 검색 결과가 뒷받침하는 답변 주장 비율이 크다. 답변 관련성: 높을수록 답변 기반 질문과 원질">
             <a:extLst xmlns:a="http://schemas.openxmlformats.org/drawingml/2006/main">
               <a:ext uri="{FF2B5EF4-FFF2-40B4-BE49-F238E27FC236}">
-                <a16:creationId xmlns:a16="http://schemas.microsoft.com/office/drawing/2014/main" id="{34D4FEBF-3FAE-466A-90E0-F2D762690C7E}"/>
+                <a16:creationId xmlns:a16="http://schemas.microsoft.com/office/drawing/2014/main" id="{E72B5B61-6ED9-4961-9089-E50F16E0BE15}"/>
               </a:ext>
             </a:extLst>
           </p:cNvPr>
@@ -9295,7 +9295,7 @@
                 <a:ea typeface="Malgun Gothic"/>
                 <a:cs typeface="Malgun Gothic"/>
               </a:rPr>
-              <a:t>근거 충실도: 높을수록 검색 근거가 지지하는 답변 주장 비율이 크다.</a:t>
+              <a:t>근거 충실도: 높을수록 검색 결과가 뒷받침하는 답변 주장 비율이 크다.</a:t>
             </a:r>
           </a:p>
           <a:p xmlns:a="http://schemas.openxmlformats.org/drawingml/2006/main">
@@ -9394,10 +9394,10 @@
       </p:sp>
       <p:sp>
         <p:nvSpPr>
-          <p:cNvPr id="40" name="품질 관측값은 0~1이다. 관련성 +0.080은 ON−OFF 평균 차이 0.080점이다. SD는 질의별 분포의 표본표">
+          <p:cNvPr id="40" name="품질 관측값은 0~1이다. 차이는 ON−OFF 평균 차이다. 한국어 비율 0.700은 70.0%, 차이 +0.218은">
             <a:extLst xmlns:a="http://schemas.openxmlformats.org/drawingml/2006/main">
               <a:ext uri="{FF2B5EF4-FFF2-40B4-BE49-F238E27FC236}">
-                <a16:creationId xmlns:a16="http://schemas.microsoft.com/office/drawing/2014/main" id="{88C0CADF-57BA-4362-A5A5-D47FC13ACD39}"/>
+                <a16:creationId xmlns:a16="http://schemas.microsoft.com/office/drawing/2014/main" id="{978329CF-3F40-4C48-AD4D-46276CB81490}"/>
               </a:ext>
             </a:extLst>
           </p:cNvPr>
@@ -9545,30 +9545,7 @@
                 <a:ea typeface="Malgun Gothic"/>
                 <a:cs typeface="Malgun Gothic"/>
               </a:rPr>
-              <a:t>품질 관측값은 0~1이다. 관련성 +0.080은 ON−OFF 평균 차이</a:t>
-            </a:r>
-          </a:p>
-          <a:p xmlns:a="http://schemas.openxmlformats.org/drawingml/2006/main">
-            <a:pPr algn="l">
-              <a:defRPr sz="1800" b="0">
-                <a:solidFill>
-                  <a:srgbClr val="24324A"/>
-                </a:solidFill>
-                <a:latin typeface="Malgun Gothic"/>
-                <a:ea typeface="Malgun Gothic"/>
-                <a:cs typeface="Malgun Gothic"/>
-              </a:defRPr>
-            </a:pPr>
-            <a:r>
-              <a:rPr sz="1800" b="0">
-                <a:solidFill>
-                  <a:srgbClr val="24324A"/>
-                </a:solidFill>
-                <a:latin typeface="Malgun Gothic"/>
-                <a:ea typeface="Malgun Gothic"/>
-                <a:cs typeface="Malgun Gothic"/>
-              </a:rPr>
-              <a:t>0.080점이다. SD는 질의별 분포의 표본표준편차다.</a:t>
+              <a:t>품질 관측값은 0~1이다. 차이는 ON−OFF 평균 차이다.</a:t>
             </a:r>
           </a:p>
           <a:p xmlns:a="http://schemas.openxmlformats.org/drawingml/2006/main">
@@ -9601,7 +9578,7 @@
           <p:cNvPr id="41" name="평가 예시  ext_raptor_011, H0C0S0">
             <a:extLst xmlns:a="http://schemas.openxmlformats.org/drawingml/2006/main">
               <a:ext uri="{FF2B5EF4-FFF2-40B4-BE49-F238E27FC236}">
-                <a16:creationId xmlns:a16="http://schemas.microsoft.com/office/drawing/2014/main" id="{E37F1A37-A672-4B83-AEB7-C8CA70C6E8AC}"/>
+                <a16:creationId xmlns:a16="http://schemas.microsoft.com/office/drawing/2014/main" id="{70F0298E-F1E8-4DE7-8BA6-DA9947DA23FE}"/>
               </a:ext>
             </a:extLst>
           </p:cNvPr>
@@ -9759,7 +9736,7 @@
           <p:cNvPr id="42" name="질문: Cinderella 사례의 정성 분석에서 RAPTOR의 tree-based retrieval이 DPR보다 주제">
             <a:extLst xmlns:a="http://schemas.openxmlformats.org/drawingml/2006/main">
               <a:ext uri="{FF2B5EF4-FFF2-40B4-BE49-F238E27FC236}">
-                <a16:creationId xmlns:a16="http://schemas.microsoft.com/office/drawing/2014/main" id="{DC3499A3-42C3-4F21-A0E8-20049CE17FB6}"/>
+                <a16:creationId xmlns:a16="http://schemas.microsoft.com/office/drawing/2014/main" id="{9BD9AA2A-426D-4049-92BF-EDF6FC27791E}"/>
               </a:ext>
             </a:extLst>
           </p:cNvPr>
@@ -9940,7 +9917,7 @@
           <p:cNvPr id="43" name="검색 근거(PDF p.9): “By providing both the original text and higher-l">
             <a:extLst xmlns:a="http://schemas.openxmlformats.org/drawingml/2006/main">
               <a:ext uri="{FF2B5EF4-FFF2-40B4-BE49-F238E27FC236}">
-                <a16:creationId xmlns:a16="http://schemas.microsoft.com/office/drawing/2014/main" id="{C3ADAF69-E5B3-449E-A7FD-5356507FA591}"/>
+                <a16:creationId xmlns:a16="http://schemas.microsoft.com/office/drawing/2014/main" id="{3CAB2510-DC34-47A4-84ED-982C9A1BE75D}"/>
               </a:ext>
             </a:extLst>
           </p:cNvPr>
@@ -10144,7 +10121,7 @@
           <p:cNvPr id="44" name="참조 답변 요지(PDF p.20): RAPTOR는 이야기의 주요 부분을, DPR은 이야기의 좁은 일부를 자세히 검색한">
             <a:extLst xmlns:a="http://schemas.openxmlformats.org/drawingml/2006/main">
               <a:ext uri="{FF2B5EF4-FFF2-40B4-BE49-F238E27FC236}">
-                <a16:creationId xmlns:a16="http://schemas.microsoft.com/office/drawing/2014/main" id="{9C0E3B67-A5CE-45EC-8464-516C9CBB59C8}"/>
+                <a16:creationId xmlns:a16="http://schemas.microsoft.com/office/drawing/2014/main" id="{0C264AC3-4781-4E1C-B119-BF5365E8F10D}"/>
               </a:ext>
             </a:extLst>
           </p:cNvPr>
@@ -10325,7 +10302,7 @@
           <p:cNvPr id="45" name="생성 답변 발췌: “질문의 요구사항에 따라 서로 다른 층위(layer)에서 노드를 선택할 수 있습니다.”">
             <a:extLst xmlns:a="http://schemas.openxmlformats.org/drawingml/2006/main">
               <a:ext uri="{FF2B5EF4-FFF2-40B4-BE49-F238E27FC236}">
-                <a16:creationId xmlns:a16="http://schemas.microsoft.com/office/drawing/2014/main" id="{A623D024-5FFC-45AF-95E6-B29CC4D9C109}"/>
+                <a16:creationId xmlns:a16="http://schemas.microsoft.com/office/drawing/2014/main" id="{C5270960-255F-481D-811B-69FC61A2DC0E}"/>
               </a:ext>
             </a:extLst>
           </p:cNvPr>
@@ -10506,7 +10483,7 @@
           <p:cNvPr id="46" name="충실도 1.000: 추출된 답변 주장을 검색 결과가 모두 지지 관련성 0.937: 답변 기반 질문과 원질문의 평균 의">
             <a:extLst xmlns:a="http://schemas.openxmlformats.org/drawingml/2006/main">
               <a:ext uri="{FF2B5EF4-FFF2-40B4-BE49-F238E27FC236}">
-                <a16:creationId xmlns:a16="http://schemas.microsoft.com/office/drawing/2014/main" id="{9A302188-48D6-4F4F-BCFF-73D34CA44E60}"/>
+                <a16:creationId xmlns:a16="http://schemas.microsoft.com/office/drawing/2014/main" id="{71F80C61-FDA2-4789-9E3B-DA0A9D988ABF}"/>
               </a:ext>
             </a:extLst>
           </p:cNvPr>
@@ -10687,7 +10664,7 @@
           <p:cNvPr id="47" name="평가: RAGAS 0.2.15[10]·gpt-4o·BGE-M3, 저장 답변 평가 평가 언어: S0 영어 / S1 한국">
             <a:extLst xmlns:a="http://schemas.openxmlformats.org/drawingml/2006/main">
               <a:ext uri="{FF2B5EF4-FFF2-40B4-BE49-F238E27FC236}">
-                <a16:creationId xmlns:a16="http://schemas.microsoft.com/office/drawing/2014/main" id="{0B8F4923-F7F9-43DE-8B49-D3938F05BFDC}"/>
+                <a16:creationId xmlns:a16="http://schemas.microsoft.com/office/drawing/2014/main" id="{B33B7512-F3AE-486E-9A70-327951CCBA2B}"/>
               </a:ext>
             </a:extLst>
           </p:cNvPr>
@@ -10868,7 +10845,7 @@
           <p:cNvPr id="48" name="반복측정 분산분석(ANOVA)·대응 t-검정, 양측 α=0.05 품질: SCD 상태별 H×C / 한국어 비율·시간: ">
             <a:extLst xmlns:a="http://schemas.openxmlformats.org/drawingml/2006/main">
               <a:ext uri="{FF2B5EF4-FFF2-40B4-BE49-F238E27FC236}">
-                <a16:creationId xmlns:a16="http://schemas.microsoft.com/office/drawing/2014/main" id="{EB0B9160-DBEB-4086-AF5F-982005DCCA1C}"/>
+                <a16:creationId xmlns:a16="http://schemas.microsoft.com/office/drawing/2014/main" id="{BDB5008C-77D3-4DB9-A45E-CC1D81C8AC41}"/>
               </a:ext>
             </a:extLst>
           </p:cNvPr>
@@ -11049,7 +11026,7 @@
           <p:cNvPr id="49" name="">
             <a:extLst xmlns:a="http://schemas.openxmlformats.org/drawingml/2006/main">
               <a:ext uri="{FF2B5EF4-FFF2-40B4-BE49-F238E27FC236}">
-                <a16:creationId xmlns:a16="http://schemas.microsoft.com/office/drawing/2014/main" id="{20C34AB8-5FB9-44BC-8D41-E5CE950F9FA3}"/>
+                <a16:creationId xmlns:a16="http://schemas.microsoft.com/office/drawing/2014/main" id="{1974C881-D403-4C6B-B4A3-0D8881F39C10}"/>
               </a:ext>
             </a:extLst>
           </p:cNvPr>
@@ -11080,7 +11057,7 @@
           <p:cNvPr id="50" name="05 조합별 결과와 통계 검정">
             <a:extLst xmlns:a="http://schemas.openxmlformats.org/drawingml/2006/main">
               <a:ext uri="{FF2B5EF4-FFF2-40B4-BE49-F238E27FC236}">
-                <a16:creationId xmlns:a16="http://schemas.microsoft.com/office/drawing/2014/main" id="{B8026820-DC64-4CAE-846B-BBD1C4EB45AD}"/>
+                <a16:creationId xmlns:a16="http://schemas.microsoft.com/office/drawing/2014/main" id="{95B6A686-9609-465C-8912-84C9284509A6}"/>
               </a:ext>
             </a:extLst>
           </p:cNvPr>
@@ -11238,7 +11215,7 @@
           <p:cNvPr id="51" name="HyDE·CAD·SCD 8조합의 품질·한국어 비율·시간 평균(SD)">
             <a:extLst xmlns:a="http://schemas.openxmlformats.org/drawingml/2006/main">
               <a:ext uri="{FF2B5EF4-FFF2-40B4-BE49-F238E27FC236}">
-                <a16:creationId xmlns:a16="http://schemas.microsoft.com/office/drawing/2014/main" id="{C8442F1B-C298-43B8-974A-C33CA8E52BCB}"/>
+                <a16:creationId xmlns:a16="http://schemas.microsoft.com/office/drawing/2014/main" id="{EA0DD159-F5DF-4613-80C8-6FFF91606DBA}"/>
               </a:ext>
             </a:extLst>
           </p:cNvPr>
@@ -11396,7 +11373,7 @@
           <p:cNvPr id="52" name="">
             <a:extLst xmlns:a="http://schemas.openxmlformats.org/drawingml/2006/main">
               <a:ext uri="{FF2B5EF4-FFF2-40B4-BE49-F238E27FC236}">
-                <a16:creationId xmlns:a16="http://schemas.microsoft.com/office/drawing/2014/main" id="{81BFE966-BC00-4A78-B095-B71984F5A4EB}"/>
+                <a16:creationId xmlns:a16="http://schemas.microsoft.com/office/drawing/2014/main" id="{6EE18D62-9C4C-4FD0-89A9-57CB2E134EB6}"/>
               </a:ext>
             </a:extLst>
           </p:cNvPr>
@@ -14756,7 +14733,7 @@
           <p:cNvPr id="53" name="">
             <a:extLst xmlns:a="http://schemas.openxmlformats.org/drawingml/2006/main">
               <a:ext uri="{FF2B5EF4-FFF2-40B4-BE49-F238E27FC236}">
-                <a16:creationId xmlns:a16="http://schemas.microsoft.com/office/drawing/2014/main" id="{EEE5D3F3-A0F6-4031-BFA9-423A029CF023}"/>
+                <a16:creationId xmlns:a16="http://schemas.microsoft.com/office/drawing/2014/main" id="{0785FE23-E967-47BF-8A00-A526ED56788B}"/>
               </a:ext>
             </a:extLst>
           </p:cNvPr>
@@ -14787,7 +14764,7 @@
           <p:cNvPr id="54" name="S0: 영어로 평가 / S1: 한국어 번역으로 평가 충실도 H0C1S0 n=58, H0C0S1 n=57, 나머지 n=">
             <a:extLst xmlns:a="http://schemas.openxmlformats.org/drawingml/2006/main">
               <a:ext uri="{FF2B5EF4-FFF2-40B4-BE49-F238E27FC236}">
-                <a16:creationId xmlns:a16="http://schemas.microsoft.com/office/drawing/2014/main" id="{295E0488-BDFD-4C11-B933-812D2285EFAC}"/>
+                <a16:creationId xmlns:a16="http://schemas.microsoft.com/office/drawing/2014/main" id="{819B5E03-2B43-4114-A3FF-9B3CF9AFE6FE}"/>
               </a:ext>
             </a:extLst>
           </p:cNvPr>
@@ -14981,7 +14958,7 @@
                 <a:ea typeface="Malgun Gothic"/>
                 <a:cs typeface="Malgun Gothic"/>
               </a:rPr>
-              <a:t>한국어 비율·시간(초)은 생성 기록에서 직접 계산</a:t>
+              <a:t>한국어 비율·시간(초)은 답변과 실행 시간에서 직접 계산</a:t>
             </a:r>
           </a:p>
         </p:txBody>
@@ -14991,7 +14968,7 @@
           <p:cNvPr id="55" name="3요인 반복측정 ANOVA  ·  각 효과 df=(1,59)">
             <a:extLst xmlns:a="http://schemas.openxmlformats.org/drawingml/2006/main">
               <a:ext uri="{FF2B5EF4-FFF2-40B4-BE49-F238E27FC236}">
-                <a16:creationId xmlns:a16="http://schemas.microsoft.com/office/drawing/2014/main" id="{40531829-FA42-40F2-ABFC-4704220EC752}"/>
+                <a16:creationId xmlns:a16="http://schemas.microsoft.com/office/drawing/2014/main" id="{8E0281FD-F93A-4A7F-BEE8-E2E954B41BDA}"/>
               </a:ext>
             </a:extLst>
           </p:cNvPr>
@@ -15149,7 +15126,7 @@
           <p:cNvPr id="56" name="">
             <a:extLst xmlns:a="http://schemas.openxmlformats.org/drawingml/2006/main">
               <a:ext uri="{FF2B5EF4-FFF2-40B4-BE49-F238E27FC236}">
-                <a16:creationId xmlns:a16="http://schemas.microsoft.com/office/drawing/2014/main" id="{393AD65B-8613-4291-8BAE-D64014BEB2C3}"/>
+                <a16:creationId xmlns:a16="http://schemas.microsoft.com/office/drawing/2014/main" id="{C473657E-1C4E-499D-AE6C-13E525359B5B}"/>
               </a:ext>
             </a:extLst>
           </p:cNvPr>
@@ -16859,10 +16836,10 @@
       </p:graphicFrame>
       <p:sp>
         <p:nvSpPr>
-          <p:cNvPr id="57" name="p&lt;0.05: 한국어 비율 S·H×C / 실행 시간 H·C·S·C×S RAGAS H×C 검정은 평가 언어별로 수행했으">
+          <p:cNvPr id="57" name="p&lt;0.05: 한국어 비율 S·H×C* / 실행 시간 H·C·S*·C×S (*유의수준 근처의 탐색적 결과) RAGAS">
             <a:extLst xmlns:a="http://schemas.openxmlformats.org/drawingml/2006/main">
               <a:ext uri="{FF2B5EF4-FFF2-40B4-BE49-F238E27FC236}">
-                <a16:creationId xmlns:a16="http://schemas.microsoft.com/office/drawing/2014/main" id="{8D43E5C8-53AE-46BC-8AC2-0CAB42FBFE59}"/>
+                <a16:creationId xmlns:a16="http://schemas.microsoft.com/office/drawing/2014/main" id="{C469F927-E94D-4D5C-99DD-6D6DE9271A04}"/>
               </a:ext>
             </a:extLst>
           </p:cNvPr>
@@ -17010,7 +16987,7 @@
                 <a:ea typeface="Malgun Gothic"/>
                 <a:cs typeface="Malgun Gothic"/>
               </a:rPr>
-              <a:t>p&lt;0.05: 한국어 비율 S·H×C / 실행 시간 H·C·S·C×S</a:t>
+              <a:t>p&lt;0.05: 한국어 비율 S·H×C* / 실행 시간 H·C·S*·C×S (*유의수준 근처의 탐색적 결과)</a:t>
             </a:r>
           </a:p>
           <a:p xmlns:a="http://schemas.openxmlformats.org/drawingml/2006/main">
@@ -17066,7 +17043,7 @@
           <p:cNvPr id="58" name="기법별 대응 비교  ·  질의별 평균 차이, 양측 검정">
             <a:extLst xmlns:a="http://schemas.openxmlformats.org/drawingml/2006/main">
               <a:ext uri="{FF2B5EF4-FFF2-40B4-BE49-F238E27FC236}">
-                <a16:creationId xmlns:a16="http://schemas.microsoft.com/office/drawing/2014/main" id="{1CBB8F47-5559-4E64-A827-F5A96B999554}"/>
+                <a16:creationId xmlns:a16="http://schemas.microsoft.com/office/drawing/2014/main" id="{59D98C1E-67BB-4DB0-B2F8-F458F43D239A}"/>
               </a:ext>
             </a:extLst>
           </p:cNvPr>
@@ -17224,7 +17201,7 @@
           <p:cNvPr id="59" name="">
             <a:extLst xmlns:a="http://schemas.openxmlformats.org/drawingml/2006/main">
               <a:ext uri="{FF2B5EF4-FFF2-40B4-BE49-F238E27FC236}">
-                <a16:creationId xmlns:a16="http://schemas.microsoft.com/office/drawing/2014/main" id="{205563F7-B5A4-434B-8C44-4B92B7814EC4}"/>
+                <a16:creationId xmlns:a16="http://schemas.microsoft.com/office/drawing/2014/main" id="{A214632D-95AD-4F5B-A7E1-55689EC16105}"/>
               </a:ext>
             </a:extLst>
           </p:cNvPr>
@@ -18237,7 +18214,7 @@
           <p:cNvPr id="60" name="HyDE: C0S0, CAD: H0S0, SCD: H0의 CAD 상태 평균 p: 다중비교 보정 없는 양측 p, dz:">
             <a:extLst xmlns:a="http://schemas.openxmlformats.org/drawingml/2006/main">
               <a:ext uri="{FF2B5EF4-FFF2-40B4-BE49-F238E27FC236}">
-                <a16:creationId xmlns:a16="http://schemas.microsoft.com/office/drawing/2014/main" id="{C0816845-668B-41BA-BDBE-562C26C50FEC}"/>
+                <a16:creationId xmlns:a16="http://schemas.microsoft.com/office/drawing/2014/main" id="{8213D86D-36C6-43AC-8A5A-8CE473BC1062}"/>
               </a:ext>
             </a:extLst>
           </p:cNvPr>
@@ -18249,7 +18226,7 @@
         <p:spPr>
           <a:xfrm xmlns:a="http://schemas.openxmlformats.org/drawingml/2006/main">
             <a:off x="10949175" y="21564600"/>
-            <a:ext cx="9729975" cy="1143000"/>
+            <a:ext cx="9729975" cy="857250"/>
           </a:xfrm>
           <a:prstGeom xmlns:a="http://schemas.openxmlformats.org/drawingml/2006/main" prst="rect">
             <a:avLst/>
@@ -18431,29 +18408,6 @@
                 <a:ea typeface="Malgun Gothic"/>
                 <a:cs typeface="Malgun Gothic"/>
               </a:rPr>
-              <a:t>SCD 차이 +0.218은 한글 비중 +21.8%p에 해당</a:t>
-            </a:r>
-          </a:p>
-          <a:p xmlns:a="http://schemas.openxmlformats.org/drawingml/2006/main">
-            <a:pPr algn="l">
-              <a:defRPr sz="1800" b="0">
-                <a:solidFill>
-                  <a:srgbClr val="24324A"/>
-                </a:solidFill>
-                <a:latin typeface="Malgun Gothic"/>
-                <a:ea typeface="Malgun Gothic"/>
-                <a:cs typeface="Malgun Gothic"/>
-              </a:defRPr>
-            </a:pPr>
-            <a:r>
-              <a:rPr sz="1800" b="0">
-                <a:solidFill>
-                  <a:srgbClr val="24324A"/>
-                </a:solidFill>
-                <a:latin typeface="Malgun Gothic"/>
-                <a:ea typeface="Malgun Gothic"/>
-                <a:cs typeface="Malgun Gothic"/>
-              </a:rPr>
               <a:t>평균표 SD는 점수의 산포, 대응표 SD는 ON−OFF 차이의 산포</a:t>
             </a:r>
           </a:p>
@@ -18464,7 +18418,7 @@
           <p:cNvPr id="61" name="">
             <a:extLst xmlns:a="http://schemas.openxmlformats.org/drawingml/2006/main">
               <a:ext uri="{FF2B5EF4-FFF2-40B4-BE49-F238E27FC236}">
-                <a16:creationId xmlns:a16="http://schemas.microsoft.com/office/drawing/2014/main" id="{016D7BE4-F789-46BA-AD29-2F59AB9C1732}"/>
+                <a16:creationId xmlns:a16="http://schemas.microsoft.com/office/drawing/2014/main" id="{178A86DF-D64B-4ACF-A40F-B761E7FC4CBE}"/>
               </a:ext>
             </a:extLst>
           </p:cNvPr>
@@ -18475,7 +18429,7 @@
         </p:nvSpPr>
         <p:spPr>
           <a:xfrm xmlns:a="http://schemas.openxmlformats.org/drawingml/2006/main">
-            <a:off x="10949175" y="22812375"/>
+            <a:off x="10949175" y="22526625"/>
             <a:ext cx="9729975" cy="438150"/>
           </a:xfrm>
           <a:prstGeom xmlns:a="http://schemas.openxmlformats.org/drawingml/2006/main" prst="rect">
@@ -18495,7 +18449,7 @@
           <p:cNvPr id="62" name="06 결과 해석">
             <a:extLst xmlns:a="http://schemas.openxmlformats.org/drawingml/2006/main">
               <a:ext uri="{FF2B5EF4-FFF2-40B4-BE49-F238E27FC236}">
-                <a16:creationId xmlns:a16="http://schemas.microsoft.com/office/drawing/2014/main" id="{6F48715C-D631-4F96-9C90-6B0BF34481F5}"/>
+                <a16:creationId xmlns:a16="http://schemas.microsoft.com/office/drawing/2014/main" id="{EB7F33E0-937C-455E-B3B4-99C1ABF60FF2}"/>
               </a:ext>
             </a:extLst>
           </p:cNvPr>
@@ -18506,7 +18460,7 @@
         </p:nvSpPr>
         <p:spPr>
           <a:xfrm xmlns:a="http://schemas.openxmlformats.org/drawingml/2006/main">
-            <a:off x="11044425" y="22840950"/>
+            <a:off x="11044425" y="22555200"/>
             <a:ext cx="9539475" cy="381000"/>
           </a:xfrm>
           <a:prstGeom xmlns:a="http://schemas.openxmlformats.org/drawingml/2006/main" prst="rect">
@@ -18650,10 +18604,10 @@
       </p:sp>
       <p:sp>
         <p:nvSpPr>
-          <p:cNvPr id="63" name="HyDE 관련성은 평균 +0.080점, t(59)=2.236, p=0.029였다. CAD 충실도는 평균 +0.029점">
+          <p:cNvPr id="63" name="HyDE: 기본 조건에서 관련성이 유의하게 높았고(p=0.029), SCD 적용 조건의 추가 비교에서는 p=0.114">
             <a:extLst xmlns:a="http://schemas.openxmlformats.org/drawingml/2006/main">
               <a:ext uri="{FF2B5EF4-FFF2-40B4-BE49-F238E27FC236}">
-                <a16:creationId xmlns:a16="http://schemas.microsoft.com/office/drawing/2014/main" id="{3E3E3D95-84C1-4D2B-B648-631C8BDC05EE}"/>
+                <a16:creationId xmlns:a16="http://schemas.microsoft.com/office/drawing/2014/main" id="{3251FDC8-A947-417F-8BEA-38BAD53D0BCC}"/>
               </a:ext>
             </a:extLst>
           </p:cNvPr>
@@ -18664,8 +18618,8 @@
         </p:nvSpPr>
         <p:spPr>
           <a:xfrm xmlns:a="http://schemas.openxmlformats.org/drawingml/2006/main">
-            <a:off x="10949175" y="23336250"/>
-            <a:ext cx="9729975" cy="1219200"/>
+            <a:off x="10949175" y="23050500"/>
+            <a:ext cx="9729975" cy="1428750"/>
           </a:xfrm>
           <a:prstGeom xmlns:a="http://schemas.openxmlformats.org/drawingml/2006/main" prst="rect">
             <a:avLst/>
@@ -18801,7 +18755,7 @@
                 <a:ea typeface="Malgun Gothic"/>
                 <a:cs typeface="Malgun Gothic"/>
               </a:rPr>
-              <a:t>HyDE 관련성은 평균 +0.080점, t(59)=2.236, p=0.029였다.</a:t>
+              <a:t>HyDE: 기본 조건에서 관련성이 유의하게 높았고(p=0.029),</a:t>
             </a:r>
           </a:p>
           <a:p xmlns:a="http://schemas.openxmlformats.org/drawingml/2006/main">
@@ -18824,7 +18778,7 @@
                 <a:ea typeface="Malgun Gothic"/>
                 <a:cs typeface="Malgun Gothic"/>
               </a:rPr>
-              <a:t>CAD 충실도는 평균 +0.029점, t(57)=0.862, p=0.393이었다.</a:t>
+              <a:t>SCD 적용 조건의 추가 비교에서는 p=0.114였다.</a:t>
             </a:r>
           </a:p>
           <a:p xmlns:a="http://schemas.openxmlformats.org/drawingml/2006/main">
@@ -18847,7 +18801,7 @@
                 <a:ea typeface="Malgun Gothic"/>
                 <a:cs typeface="Malgun Gothic"/>
               </a:rPr>
-              <a:t>SCD 주 비교의 한국어 비율은 21.8%p 높았다(p&lt;0.001).</a:t>
+              <a:t>CAD: 충실도 차이는 작았고(p=0.393), 실행 시간은 약 2.9배였다.</a:t>
             </a:r>
           </a:p>
           <a:p xmlns:a="http://schemas.openxmlformats.org/drawingml/2006/main">
@@ -18870,7 +18824,30 @@
                 <a:ea typeface="Malgun Gothic"/>
                 <a:cs typeface="Malgun Gothic"/>
               </a:rPr>
-              <a:t>CAD 시간 증가: SCD OFF +46.6초 / ON +37.7초.</a:t>
+              <a:t>SCD: 네 조합 모두에서 한국어 문자 비율이 높았고, CAD와 함께</a:t>
+            </a:r>
+          </a:p>
+          <a:p xmlns:a="http://schemas.openxmlformats.org/drawingml/2006/main">
+            <a:pPr algn="l">
+              <a:defRPr sz="1800" b="0">
+                <a:solidFill>
+                  <a:srgbClr val="24324A"/>
+                </a:solidFill>
+                <a:latin typeface="Malgun Gothic"/>
+                <a:ea typeface="Malgun Gothic"/>
+                <a:cs typeface="Malgun Gothic"/>
+              </a:defRPr>
+            </a:pPr>
+            <a:r>
+              <a:rPr sz="1800" b="0">
+                <a:solidFill>
+                  <a:srgbClr val="24324A"/>
+                </a:solidFill>
+                <a:latin typeface="Malgun Gothic"/>
+                <a:ea typeface="Malgun Gothic"/>
+                <a:cs typeface="Malgun Gothic"/>
+              </a:rPr>
+              <a:t>쓰면 CAD의 추가 시간이 약 9초 줄었다(C×S, p&lt;0.001).</a:t>
             </a:r>
           </a:p>
         </p:txBody>
@@ -18880,7 +18857,7 @@
           <p:cNvPr id="64" name="">
             <a:extLst xmlns:a="http://schemas.openxmlformats.org/drawingml/2006/main">
               <a:ext uri="{FF2B5EF4-FFF2-40B4-BE49-F238E27FC236}">
-                <a16:creationId xmlns:a16="http://schemas.microsoft.com/office/drawing/2014/main" id="{0DDFB009-280C-4D25-8BD8-EC906DF8121E}"/>
+                <a16:creationId xmlns:a16="http://schemas.microsoft.com/office/drawing/2014/main" id="{44667C4C-20ED-40C2-AE18-B74E0F151612}"/>
               </a:ext>
             </a:extLst>
           </p:cNvPr>
@@ -18891,7 +18868,7 @@
         </p:nvSpPr>
         <p:spPr>
           <a:xfrm xmlns:a="http://schemas.openxmlformats.org/drawingml/2006/main">
-            <a:off x="10949175" y="24688800"/>
+            <a:off x="10949175" y="24593550"/>
             <a:ext cx="9729975" cy="438150"/>
           </a:xfrm>
           <a:prstGeom xmlns:a="http://schemas.openxmlformats.org/drawingml/2006/main" prst="rect">
@@ -18911,7 +18888,7 @@
           <p:cNvPr id="65" name="07 결론">
             <a:extLst xmlns:a="http://schemas.openxmlformats.org/drawingml/2006/main">
               <a:ext uri="{FF2B5EF4-FFF2-40B4-BE49-F238E27FC236}">
-                <a16:creationId xmlns:a16="http://schemas.microsoft.com/office/drawing/2014/main" id="{BEF4C6BB-82A6-46F7-B90D-D803172EA2E4}"/>
+                <a16:creationId xmlns:a16="http://schemas.microsoft.com/office/drawing/2014/main" id="{A4CAB35E-3269-4A25-88BC-74FA9811A45A}"/>
               </a:ext>
             </a:extLst>
           </p:cNvPr>
@@ -18922,7 +18899,7 @@
         </p:nvSpPr>
         <p:spPr>
           <a:xfrm xmlns:a="http://schemas.openxmlformats.org/drawingml/2006/main">
-            <a:off x="11044425" y="24717375"/>
+            <a:off x="11044425" y="24622125"/>
             <a:ext cx="9539475" cy="381000"/>
           </a:xfrm>
           <a:prstGeom xmlns:a="http://schemas.openxmlformats.org/drawingml/2006/main" prst="rect">
@@ -19066,10 +19043,10 @@
       </p:sp>
       <p:sp>
         <p:nvSpPr>
-          <p:cNvPr id="66" name="HyDE는 C0S0에서 관련성을 높였고(p=0.029), CAD 충실도 차이는 p=0.393이었다. SCD는 같은 영">
+          <p:cNvPr id="66" name="한국어 답변이 필요하면 SCD가 비용이 작은 선택이었다. HyDE의 관련성 향상은 기본 조건(C0S0)에서 관측되었고">
             <a:extLst xmlns:a="http://schemas.openxmlformats.org/drawingml/2006/main">
               <a:ext uri="{FF2B5EF4-FFF2-40B4-BE49-F238E27FC236}">
-                <a16:creationId xmlns:a16="http://schemas.microsoft.com/office/drawing/2014/main" id="{86590124-E2D6-4D2C-BCE9-2DA0B098CE85}"/>
+                <a16:creationId xmlns:a16="http://schemas.microsoft.com/office/drawing/2014/main" id="{447BEAE4-82FB-4924-86F1-7483C3E94D3D}"/>
               </a:ext>
             </a:extLst>
           </p:cNvPr>
@@ -19080,8 +19057,8 @@
         </p:nvSpPr>
         <p:spPr>
           <a:xfrm xmlns:a="http://schemas.openxmlformats.org/drawingml/2006/main">
-            <a:off x="10949175" y="25288875"/>
-            <a:ext cx="9729975" cy="1524000"/>
+            <a:off x="10949175" y="25193625"/>
+            <a:ext cx="9729975" cy="1733550"/>
           </a:xfrm>
           <a:prstGeom xmlns:a="http://schemas.openxmlformats.org/drawingml/2006/main" prst="rect">
             <a:avLst/>
@@ -19217,7 +19194,7 @@
                 <a:ea typeface="Malgun Gothic"/>
                 <a:cs typeface="Malgun Gothic"/>
               </a:rPr>
-              <a:t>HyDE는 C0S0에서 관련성을 높였고(p=0.029), CAD 충실도 차이는 p=0.393이었다.</a:t>
+              <a:t>한국어 답변이 필요하면 SCD가 비용이 작은 선택이었다.</a:t>
             </a:r>
           </a:p>
           <a:p xmlns:a="http://schemas.openxmlformats.org/drawingml/2006/main">
@@ -19240,7 +19217,7 @@
                 <a:ea typeface="Malgun Gothic"/>
                 <a:cs typeface="Malgun Gothic"/>
               </a:rPr>
-              <a:t>SCD는 같은 영어 근거에서 한국어 사용 비중을 높였다.</a:t>
+              <a:t>HyDE의 관련성 향상은 기본 조건(C0S0)에서 관측되었고,</a:t>
             </a:r>
           </a:p>
           <a:p xmlns:a="http://schemas.openxmlformats.org/drawingml/2006/main">
@@ -19263,7 +19240,7 @@
                 <a:ea typeface="Malgun Gothic"/>
                 <a:cs typeface="Malgun Gothic"/>
               </a:rPr>
-              <a:t>CAD는 실행 시간을 SCD 미적용 3.1배, 적용 2.7배로 늘렸다.</a:t>
+              <a:t>이 차이에는 질의 번역과 가상 문서 생성이 함께 포함되었다.</a:t>
             </a:r>
           </a:p>
           <a:p xmlns:a="http://schemas.openxmlformats.org/drawingml/2006/main">
@@ -19286,7 +19263,30 @@
                 <a:ea typeface="Malgun Gothic"/>
                 <a:cs typeface="Malgun Gothic"/>
               </a:rPr>
-              <a:t>HyDE 비교에는 질의 번역과 가상 문서 생성이 함께 포함됐다.</a:t>
+              <a:t>CAD는 충실도 차이가 작고 실행 시간이 약 2.9배로 늘었다</a:t>
+            </a:r>
+          </a:p>
+          <a:p xmlns:a="http://schemas.openxmlformats.org/drawingml/2006/main">
+            <a:pPr algn="l">
+              <a:defRPr sz="1800" b="0">
+                <a:solidFill>
+                  <a:srgbClr val="24324A"/>
+                </a:solidFill>
+                <a:latin typeface="Malgun Gothic"/>
+                <a:ea typeface="Malgun Gothic"/>
+                <a:cs typeface="Malgun Gothic"/>
+              </a:defRPr>
+            </a:pPr>
+            <a:r>
+              <a:rPr sz="1800" b="0">
+                <a:solidFill>
+                  <a:srgbClr val="24324A"/>
+                </a:solidFill>
+                <a:latin typeface="Malgun Gothic"/>
+                <a:ea typeface="Malgun Gothic"/>
+                <a:cs typeface="Malgun Gothic"/>
+              </a:rPr>
+              <a:t>(SCD 미적용 3.1배, 적용 2.7배).</a:t>
             </a:r>
           </a:p>
           <a:p xmlns:a="http://schemas.openxmlformats.org/drawingml/2006/main">
@@ -19319,7 +19319,7 @@
           <p:cNvPr id="67" name="">
             <a:extLst xmlns:a="http://schemas.openxmlformats.org/drawingml/2006/main">
               <a:ext uri="{FF2B5EF4-FFF2-40B4-BE49-F238E27FC236}">
-                <a16:creationId xmlns:a16="http://schemas.microsoft.com/office/drawing/2014/main" id="{836ABA67-7A8C-4E2E-91E6-A3D6200818D8}"/>
+                <a16:creationId xmlns:a16="http://schemas.microsoft.com/office/drawing/2014/main" id="{5334702A-A4A6-4632-B109-0EFB9FBCAD15}"/>
               </a:ext>
             </a:extLst>
           </p:cNvPr>
@@ -19350,7 +19350,7 @@
           <p:cNvPr id="68" name="08 주요 참고문헌">
             <a:extLst xmlns:a="http://schemas.openxmlformats.org/drawingml/2006/main">
               <a:ext uri="{FF2B5EF4-FFF2-40B4-BE49-F238E27FC236}">
-                <a16:creationId xmlns:a16="http://schemas.microsoft.com/office/drawing/2014/main" id="{4D6854E6-000C-459A-B5ED-65287A85E009}"/>
+                <a16:creationId xmlns:a16="http://schemas.microsoft.com/office/drawing/2014/main" id="{7AD350D8-D56A-41AC-BE65-3A82EAD8741D}"/>
               </a:ext>
             </a:extLst>
           </p:cNvPr>
@@ -19508,7 +19508,7 @@
           <p:cNvPr id="69" name="[1] Lewis et al. RAG. NeurIPS, 2020. [2] Gao et al. HyDE. ACL, 20">
             <a:extLst xmlns:a="http://schemas.openxmlformats.org/drawingml/2006/main">
               <a:ext uri="{FF2B5EF4-FFF2-40B4-BE49-F238E27FC236}">
-                <a16:creationId xmlns:a16="http://schemas.microsoft.com/office/drawing/2014/main" id="{825D5A2E-31B9-4494-A2A9-4E4FF8352A4F}"/>
+                <a16:creationId xmlns:a16="http://schemas.microsoft.com/office/drawing/2014/main" id="{29529266-6377-4562-A347-B87CFDA23584}"/>
               </a:ext>
             </a:extLst>
           </p:cNvPr>
@@ -19712,7 +19712,7 @@
           <p:cNvPr id="70" name="[4] Li et al. Language Drift and SCD. AAAI, 2026. [5] Chen et al.">
             <a:extLst xmlns:a="http://schemas.openxmlformats.org/drawingml/2006/main">
               <a:ext uri="{FF2B5EF4-FFF2-40B4-BE49-F238E27FC236}">
-                <a16:creationId xmlns:a16="http://schemas.microsoft.com/office/drawing/2014/main" id="{DE9E04A5-62CE-4805-8CFA-37769019A343}"/>
+                <a16:creationId xmlns:a16="http://schemas.microsoft.com/office/drawing/2014/main" id="{9A30954B-F151-4485-8628-382F33608EFD}"/>
               </a:ext>
             </a:extLst>
           </p:cNvPr>
@@ -19916,7 +19916,7 @@
           <p:cNvPr id="71" name="[6] Robertson et al. Okapi at TREC-3. NIST, 1995. [7] Cormack et ">
             <a:extLst xmlns:a="http://schemas.openxmlformats.org/drawingml/2006/main">
               <a:ext uri="{FF2B5EF4-FFF2-40B4-BE49-F238E27FC236}">
-                <a16:creationId xmlns:a16="http://schemas.microsoft.com/office/drawing/2014/main" id="{78204908-7C94-46F5-ABDD-4B5AEE8C319D}"/>
+                <a16:creationId xmlns:a16="http://schemas.microsoft.com/office/drawing/2014/main" id="{C9F590B0-C100-4C48-85BE-55FDD7C2D31A}"/>
               </a:ext>
             </a:extLst>
           </p:cNvPr>
@@ -20097,7 +20097,7 @@
           <p:cNvPr id="72" name="[8] MacAvaney et al. CEDR. SIGIR, 2019. 공식 모델  [M1] KT Mi:dm 2.0 ">
             <a:extLst xmlns:a="http://schemas.openxmlformats.org/drawingml/2006/main">
               <a:ext uri="{FF2B5EF4-FFF2-40B4-BE49-F238E27FC236}">
-                <a16:creationId xmlns:a16="http://schemas.microsoft.com/office/drawing/2014/main" id="{A19F4303-8579-495D-AFDA-452DB00C7124}"/>
+                <a16:creationId xmlns:a16="http://schemas.microsoft.com/office/drawing/2014/main" id="{AAD2C696-6DD4-491F-A93F-85698066FBBE}"/>
               </a:ext>
             </a:extLst>
           </p:cNvPr>
@@ -20278,7 +20278,7 @@
           <p:cNvPr id="73" name="전체 참고문헌 22편과 모델·자료 출처는 논문의 참고문헌에 수록">
             <a:extLst xmlns:a="http://schemas.openxmlformats.org/drawingml/2006/main">
               <a:ext uri="{FF2B5EF4-FFF2-40B4-BE49-F238E27FC236}">
-                <a16:creationId xmlns:a16="http://schemas.microsoft.com/office/drawing/2014/main" id="{C324540F-2DBC-4D8F-9B96-472E99434986}"/>
+                <a16:creationId xmlns:a16="http://schemas.microsoft.com/office/drawing/2014/main" id="{3AA73015-D3F4-44C7-BF92-76B9825D5D40}"/>
               </a:ext>
             </a:extLst>
           </p:cNvPr>
@@ -20436,7 +20436,7 @@
           <p:cNvPr id="74" name="영어 문서 4종 · 질의 60개 · 생성 모델 1종 · 질의별 반복측정">
             <a:extLst xmlns:a="http://schemas.openxmlformats.org/drawingml/2006/main">
               <a:ext uri="{FF2B5EF4-FFF2-40B4-BE49-F238E27FC236}">
-                <a16:creationId xmlns:a16="http://schemas.microsoft.com/office/drawing/2014/main" id="{D495E1C2-3AAE-4CF5-9BE2-746AF70B155E}"/>
+                <a16:creationId xmlns:a16="http://schemas.microsoft.com/office/drawing/2014/main" id="{94E4FC76-3D47-4121-ACC0-C18495B148AD}"/>
               </a:ext>
             </a:extLst>
           </p:cNvPr>
@@ -20594,7 +20594,7 @@
           <p:cNvPr id="75" name="A1 594 × 841 mm">
             <a:extLst xmlns:a="http://schemas.openxmlformats.org/drawingml/2006/main">
               <a:ext uri="{FF2B5EF4-FFF2-40B4-BE49-F238E27FC236}">
-                <a16:creationId xmlns:a16="http://schemas.microsoft.com/office/drawing/2014/main" id="{7AD36D54-2D25-403B-9A86-DCF8076F882E}"/>
+                <a16:creationId xmlns:a16="http://schemas.microsoft.com/office/drawing/2014/main" id="{8B4ECA7C-6541-497A-A2C4-30B1B838A3C5}"/>
               </a:ext>
             </a:extLst>
           </p:cNvPr>
@@ -20750,7 +20750,7 @@
     </p:spTree>
     <p:extLst>
       <p:ext uri="{BB962C8B-B14F-4D97-AF65-F5344CB8AC3E}">
-        <p14:creationId xmlns:p14="http://schemas.microsoft.com/office/powerpoint/2010/main" val="2047551306"/>
+        <p14:creationId xmlns:p14="http://schemas.microsoft.com/office/powerpoint/2010/main" val="1649542771"/>
       </p:ext>
     </p:extLst>
   </p:cSld>

--- a/FINALDOCS/POSTER/FINAL/M_RAG_A1_FINAL_EDITABLE.pptx
+++ b/FINALDOCS/POSTER/FINAL/M_RAG_A1_FINAL_EDITABLE.pptx
@@ -2,13 +2,13 @@
 <file path=ppt/presentation.xml><?xml version="1.0" encoding="utf-8"?>
 <p:presentation xmlns:p="http://schemas.openxmlformats.org/presentationml/2006/main">
   <p:sldMasterIdLst>
-    <p:sldMasterId xmlns:r="http://schemas.openxmlformats.org/officeDocument/2006/relationships" id="2147483648" r:id="R78afd8e3b6eb4d84"/>
+    <p:sldMasterId xmlns:r="http://schemas.openxmlformats.org/officeDocument/2006/relationships" id="2147483648" r:id="R384b91cfcdea4d7a"/>
   </p:sldMasterIdLst>
   <p:notesMasterIdLst>
-    <p:notesMasterId xmlns:r="http://schemas.openxmlformats.org/officeDocument/2006/relationships" r:id="R53f3c389fc704493"/>
+    <p:notesMasterId xmlns:r="http://schemas.openxmlformats.org/officeDocument/2006/relationships" r:id="Rc4ca206ce9304477"/>
   </p:notesMasterIdLst>
   <p:sldIdLst>
-    <p:sldId xmlns:r="http://schemas.openxmlformats.org/officeDocument/2006/relationships" id="256" r:id="Rc702f5a0ec6c4574"/>
+    <p:sldId xmlns:r="http://schemas.openxmlformats.org/officeDocument/2006/relationships" id="256" r:id="R21b8fa34b89d4f48"/>
   </p:sldIdLst>
   <p:sldSz cx="21384000" cy="30276000"/>
   <p:notesSz cx="6858000" cy="9144000"/>
@@ -489,7 +489,7 @@
           <p:cNvPr id="3" name="Title">
             <a:extLst xmlns:a="http://schemas.openxmlformats.org/drawingml/2006/main">
               <a:ext uri="{FF2B5EF4-FFF2-40B4-BE49-F238E27FC236}">
-                <a16:creationId xmlns:a16="http://schemas.microsoft.com/office/drawing/2014/main" id="{2289664F-4BAD-455F-A843-FE758703F648}"/>
+                <a16:creationId xmlns:a16="http://schemas.microsoft.com/office/drawing/2014/main" id="{DC96F6B4-55E3-4274-B911-18FE359FA562}"/>
               </a:ext>
             </a:extLst>
           </p:cNvPr>
@@ -718,7 +718,7 @@
           <p:cNvPr id="2" name="Subtitle">
             <a:extLst xmlns:a="http://schemas.openxmlformats.org/drawingml/2006/main">
               <a:ext uri="{FF2B5EF4-FFF2-40B4-BE49-F238E27FC236}">
-                <a16:creationId xmlns:a16="http://schemas.microsoft.com/office/drawing/2014/main" id="{6806BBF0-0EB0-4FA4-AD43-B7CB5FC00D4D}"/>
+                <a16:creationId xmlns:a16="http://schemas.microsoft.com/office/drawing/2014/main" id="{6AACB9B9-6BD2-42D9-865C-653991384C5A}"/>
               </a:ext>
             </a:extLst>
           </p:cNvPr>
@@ -964,7 +964,7 @@
           <p:cNvPr id="2" name="Section title">
             <a:extLst xmlns:a="http://schemas.openxmlformats.org/drawingml/2006/main">
               <a:ext uri="{FF2B5EF4-FFF2-40B4-BE49-F238E27FC236}">
-                <a16:creationId xmlns:a16="http://schemas.microsoft.com/office/drawing/2014/main" id="{AA42F1BD-BB3A-45EA-BEF4-E97982B6E594}"/>
+                <a16:creationId xmlns:a16="http://schemas.microsoft.com/office/drawing/2014/main" id="{7CE9E248-4CCC-46B3-AA09-977E62B8E6B3}"/>
               </a:ext>
             </a:extLst>
           </p:cNvPr>
@@ -1210,7 +1210,7 @@
           <p:cNvPr id="3" name="Title">
             <a:extLst xmlns:a="http://schemas.openxmlformats.org/drawingml/2006/main">
               <a:ext uri="{FF2B5EF4-FFF2-40B4-BE49-F238E27FC236}">
-                <a16:creationId xmlns:a16="http://schemas.microsoft.com/office/drawing/2014/main" id="{CFD9C104-D843-4298-BC0A-9262CD460E44}"/>
+                <a16:creationId xmlns:a16="http://schemas.microsoft.com/office/drawing/2014/main" id="{4CE874D7-964A-4D82-B6D2-CD6E74797A0C}"/>
               </a:ext>
             </a:extLst>
           </p:cNvPr>
@@ -1439,7 +1439,7 @@
           <p:cNvPr id="2" name="Body">
             <a:extLst xmlns:a="http://schemas.openxmlformats.org/drawingml/2006/main">
               <a:ext uri="{FF2B5EF4-FFF2-40B4-BE49-F238E27FC236}">
-                <a16:creationId xmlns:a16="http://schemas.microsoft.com/office/drawing/2014/main" id="{FC452112-BDC6-47DD-9B0E-F20F3C12DCD0}"/>
+                <a16:creationId xmlns:a16="http://schemas.microsoft.com/office/drawing/2014/main" id="{6CA17C00-DE63-4334-B9A8-872D67E92E3B}"/>
               </a:ext>
             </a:extLst>
           </p:cNvPr>
@@ -1685,7 +1685,7 @@
           <p:cNvPr id="4" name="Title">
             <a:extLst xmlns:a="http://schemas.openxmlformats.org/drawingml/2006/main">
               <a:ext uri="{FF2B5EF4-FFF2-40B4-BE49-F238E27FC236}">
-                <a16:creationId xmlns:a16="http://schemas.microsoft.com/office/drawing/2014/main" id="{DE7D7297-F64C-4758-B596-BED90235E8BC}"/>
+                <a16:creationId xmlns:a16="http://schemas.microsoft.com/office/drawing/2014/main" id="{6AA15563-599B-4919-AF0A-846C84CD29A8}"/>
               </a:ext>
             </a:extLst>
           </p:cNvPr>
@@ -1914,7 +1914,7 @@
           <p:cNvPr id="2" name="Left column">
             <a:extLst xmlns:a="http://schemas.openxmlformats.org/drawingml/2006/main">
               <a:ext uri="{FF2B5EF4-FFF2-40B4-BE49-F238E27FC236}">
-                <a16:creationId xmlns:a16="http://schemas.microsoft.com/office/drawing/2014/main" id="{4F2C80AE-DFF1-4F27-9F1B-EC6749770F90}"/>
+                <a16:creationId xmlns:a16="http://schemas.microsoft.com/office/drawing/2014/main" id="{8706D22C-BDD9-44B4-9293-D499F43FD834}"/>
               </a:ext>
             </a:extLst>
           </p:cNvPr>
@@ -2143,7 +2143,7 @@
           <p:cNvPr id="3" name="Right column">
             <a:extLst xmlns:a="http://schemas.openxmlformats.org/drawingml/2006/main">
               <a:ext uri="{FF2B5EF4-FFF2-40B4-BE49-F238E27FC236}">
-                <a16:creationId xmlns:a16="http://schemas.microsoft.com/office/drawing/2014/main" id="{AD4B81D9-AF12-44CA-9E56-164D7F24E64B}"/>
+                <a16:creationId xmlns:a16="http://schemas.microsoft.com/office/drawing/2014/main" id="{FB510E8B-B468-44F0-B60A-97B7EFE4C19D}"/>
               </a:ext>
             </a:extLst>
           </p:cNvPr>
@@ -2389,7 +2389,7 @@
           <p:cNvPr id="3" name="Title">
             <a:extLst xmlns:a="http://schemas.openxmlformats.org/drawingml/2006/main">
               <a:ext uri="{FF2B5EF4-FFF2-40B4-BE49-F238E27FC236}">
-                <a16:creationId xmlns:a16="http://schemas.microsoft.com/office/drawing/2014/main" id="{ACB77181-AB22-4E4B-B333-D0272E4A1C6F}"/>
+                <a16:creationId xmlns:a16="http://schemas.microsoft.com/office/drawing/2014/main" id="{2B1F5638-DFBC-4C9B-8EE0-BD3EDEC5D71F}"/>
               </a:ext>
             </a:extLst>
           </p:cNvPr>
@@ -2618,7 +2618,7 @@
           <p:cNvPr id="2" name="Left column">
             <a:extLst xmlns:a="http://schemas.openxmlformats.org/drawingml/2006/main">
               <a:ext uri="{FF2B5EF4-FFF2-40B4-BE49-F238E27FC236}">
-                <a16:creationId xmlns:a16="http://schemas.microsoft.com/office/drawing/2014/main" id="{2DE6CFAD-8C85-43A2-968E-62AAB1A15F7E}"/>
+                <a16:creationId xmlns:a16="http://schemas.microsoft.com/office/drawing/2014/main" id="{C8D7D895-8EE3-4269-BD22-61C8E6BAFDC0}"/>
               </a:ext>
             </a:extLst>
           </p:cNvPr>
@@ -2885,12 +2885,12 @@
   </p:cSld>
   <p:clrMap bg1="lt1" tx1="dk1" bg2="lt2" tx2="dk2" accent1="accent1" accent2="accent2" accent3="accent3" accent4="accent4" accent5="accent5" accent6="accent6" hlink="hlink" folHlink="folHlink"/>
   <p:sldLayoutIdLst>
-    <p:sldLayoutId xmlns:r="http://schemas.openxmlformats.org/officeDocument/2006/relationships" id="2147483649" r:id="R1f60f0ded9034f6b"/>
-    <p:sldLayoutId xmlns:r="http://schemas.openxmlformats.org/officeDocument/2006/relationships" id="2147483650" r:id="Rb54d3af20ef84be9"/>
-    <p:sldLayoutId xmlns:r="http://schemas.openxmlformats.org/officeDocument/2006/relationships" id="2147483651" r:id="R05087f3bbfb347a5"/>
-    <p:sldLayoutId xmlns:r="http://schemas.openxmlformats.org/officeDocument/2006/relationships" id="2147483652" r:id="Ra9f3dc87f8584bb7"/>
-    <p:sldLayoutId xmlns:r="http://schemas.openxmlformats.org/officeDocument/2006/relationships" id="2147483653" r:id="Rc9f11f8eca024695"/>
-    <p:sldLayoutId xmlns:r="http://schemas.openxmlformats.org/officeDocument/2006/relationships" id="2147483654" r:id="Rf5144ccf0c2f4f2a"/>
+    <p:sldLayoutId xmlns:r="http://schemas.openxmlformats.org/officeDocument/2006/relationships" id="2147483649" r:id="R6543d032034d4c8f"/>
+    <p:sldLayoutId xmlns:r="http://schemas.openxmlformats.org/officeDocument/2006/relationships" id="2147483650" r:id="R5cd30cb2624d4a8c"/>
+    <p:sldLayoutId xmlns:r="http://schemas.openxmlformats.org/officeDocument/2006/relationships" id="2147483651" r:id="R37d4214cf38d4ece"/>
+    <p:sldLayoutId xmlns:r="http://schemas.openxmlformats.org/officeDocument/2006/relationships" id="2147483652" r:id="R55f31ccb64f847b2"/>
+    <p:sldLayoutId xmlns:r="http://schemas.openxmlformats.org/officeDocument/2006/relationships" id="2147483653" r:id="R9a85a067869f41d5"/>
+    <p:sldLayoutId xmlns:r="http://schemas.openxmlformats.org/officeDocument/2006/relationships" id="2147483654" r:id="Rf8db2a51d3ba4cae"/>
   </p:sldLayoutIdLst>
   <p:txStyles>
     <p:titleStyle>
@@ -3441,7 +3441,7 @@
           <p:cNvPr id="76" name="">
             <a:extLst xmlns:a="http://schemas.openxmlformats.org/drawingml/2006/main">
               <a:ext uri="{FF2B5EF4-FFF2-40B4-BE49-F238E27FC236}">
-                <a16:creationId xmlns:a16="http://schemas.microsoft.com/office/drawing/2014/main" id="{7DDBC1E5-11EC-4264-86F0-4D73BE6C60EE}"/>
+                <a16:creationId xmlns:a16="http://schemas.microsoft.com/office/drawing/2014/main" id="{2FFCBA37-F8D8-413A-A9E5-1B2FBDFA9B5A}"/>
               </a:ext>
             </a:extLst>
           </p:cNvPr>
@@ -3472,7 +3472,7 @@
           <p:cNvPr id="2" name="한국어 질의로 영어 학술·기술 문서를 검색하는">
             <a:extLst xmlns:a="http://schemas.openxmlformats.org/drawingml/2006/main">
               <a:ext uri="{FF2B5EF4-FFF2-40B4-BE49-F238E27FC236}">
-                <a16:creationId xmlns:a16="http://schemas.microsoft.com/office/drawing/2014/main" id="{2CF6C21B-E085-4FBC-8B30-21AF6DC6BE00}"/>
+                <a16:creationId xmlns:a16="http://schemas.microsoft.com/office/drawing/2014/main" id="{CF6A9EFE-9309-41D9-B0E6-08CBC2A0CEB4}"/>
               </a:ext>
             </a:extLst>
           </p:cNvPr>
@@ -3630,7 +3630,7 @@
           <p:cNvPr id="3" name="RAG에서의 HyDE·CAD·SCD 조합 실험">
             <a:extLst xmlns:a="http://schemas.openxmlformats.org/drawingml/2006/main">
               <a:ext uri="{FF2B5EF4-FFF2-40B4-BE49-F238E27FC236}">
-                <a16:creationId xmlns:a16="http://schemas.microsoft.com/office/drawing/2014/main" id="{8BBF0810-01B4-4D75-8ACB-8A99638F984C}"/>
+                <a16:creationId xmlns:a16="http://schemas.microsoft.com/office/drawing/2014/main" id="{8229CE57-BF15-49C3-80FE-4CA3BBE844CB}"/>
               </a:ext>
             </a:extLst>
           </p:cNvPr>
@@ -3788,7 +3788,7 @@
           <p:cNvPr id="4" name="문종건 · 동국대학교 WISE캠퍼스 컴퓨터공학과 · 지도교수 김진석 · 2026.10.15">
             <a:extLst xmlns:a="http://schemas.openxmlformats.org/drawingml/2006/main">
               <a:ext uri="{FF2B5EF4-FFF2-40B4-BE49-F238E27FC236}">
-                <a16:creationId xmlns:a16="http://schemas.microsoft.com/office/drawing/2014/main" id="{2313F6F6-C728-497B-889B-8CE8987F9CBC}"/>
+                <a16:creationId xmlns:a16="http://schemas.microsoft.com/office/drawing/2014/main" id="{8121914F-3FC7-47FC-B553-17AF615186E2}"/>
               </a:ext>
             </a:extLst>
           </p:cNvPr>
@@ -3946,7 +3946,7 @@
           <p:cNvPr id="5" name="">
             <a:extLst xmlns:a="http://schemas.openxmlformats.org/drawingml/2006/main">
               <a:ext uri="{FF2B5EF4-FFF2-40B4-BE49-F238E27FC236}">
-                <a16:creationId xmlns:a16="http://schemas.microsoft.com/office/drawing/2014/main" id="{F23FD162-E6FE-45F4-A9CB-5EDCAE044FE1}"/>
+                <a16:creationId xmlns:a16="http://schemas.microsoft.com/office/drawing/2014/main" id="{98B09A36-D7BA-420F-B178-6486DBFE3C85}"/>
               </a:ext>
             </a:extLst>
           </p:cNvPr>
@@ -3977,7 +3977,7 @@
           <p:cNvPr id="6" name="01 연구 배경과 목적">
             <a:extLst xmlns:a="http://schemas.openxmlformats.org/drawingml/2006/main">
               <a:ext uri="{FF2B5EF4-FFF2-40B4-BE49-F238E27FC236}">
-                <a16:creationId xmlns:a16="http://schemas.microsoft.com/office/drawing/2014/main" id="{C2CAA2EF-A643-4DC9-8684-E5B981AAE592}"/>
+                <a16:creationId xmlns:a16="http://schemas.microsoft.com/office/drawing/2014/main" id="{A82D139F-A585-4C95-8778-0CA0C6DFB7BF}"/>
               </a:ext>
             </a:extLst>
           </p:cNvPr>
@@ -4135,7 +4135,7 @@
           <p:cNvPr id="7" name="검색 증강 생성(Retrieval-Augmented Generation, RAG)은 관련 문서 구간을 검색하고 그 텍">
             <a:extLst xmlns:a="http://schemas.openxmlformats.org/drawingml/2006/main">
               <a:ext uri="{FF2B5EF4-FFF2-40B4-BE49-F238E27FC236}">
-                <a16:creationId xmlns:a16="http://schemas.microsoft.com/office/drawing/2014/main" id="{5F147FA8-2BDD-4566-AB38-91B67205580D}"/>
+                <a16:creationId xmlns:a16="http://schemas.microsoft.com/office/drawing/2014/main" id="{EB6A7530-B94A-4EF1-90B3-61CB5257263A}"/>
               </a:ext>
             </a:extLst>
           </p:cNvPr>
@@ -4316,7 +4316,7 @@
           <p:cNvPr id="8" name="HyDE: 가상 문서 임베딩(Hypothetical Document Embeddings) 가상 문서 검색 입력 구성[">
             <a:extLst xmlns:a="http://schemas.openxmlformats.org/drawingml/2006/main">
               <a:ext uri="{FF2B5EF4-FFF2-40B4-BE49-F238E27FC236}">
-                <a16:creationId xmlns:a16="http://schemas.microsoft.com/office/drawing/2014/main" id="{A45F7719-E4B1-4D0E-9E1B-C09BE6212C7E}"/>
+                <a16:creationId xmlns:a16="http://schemas.microsoft.com/office/drawing/2014/main" id="{9AF43210-6670-4D94-A512-60E4E6B87B58}"/>
               </a:ext>
             </a:extLst>
           </p:cNvPr>
@@ -4589,7 +4589,7 @@
           <p:cNvPr id="9" name="한국어 질의–영어 문서 RAG는 검색 어휘 차이, 근거 반영, 영어 출력(언어 이탈)의 문제를 함께 겪는다. 세 기법">
             <a:extLst xmlns:a="http://schemas.openxmlformats.org/drawingml/2006/main">
               <a:ext uri="{FF2B5EF4-FFF2-40B4-BE49-F238E27FC236}">
-                <a16:creationId xmlns:a16="http://schemas.microsoft.com/office/drawing/2014/main" id="{EB97F40D-DBF6-42FC-9C01-A4BCF26C2E96}"/>
+                <a16:creationId xmlns:a16="http://schemas.microsoft.com/office/drawing/2014/main" id="{05CB1B7C-BA96-4FBE-9C4D-C6B3BC628399}"/>
               </a:ext>
             </a:extLst>
           </p:cNvPr>
@@ -4793,7 +4793,7 @@
           <p:cNvPr id="10" name="">
             <a:extLst xmlns:a="http://schemas.openxmlformats.org/drawingml/2006/main">
               <a:ext uri="{FF2B5EF4-FFF2-40B4-BE49-F238E27FC236}">
-                <a16:creationId xmlns:a16="http://schemas.microsoft.com/office/drawing/2014/main" id="{A2CDC6DC-5954-4C46-A4EE-365ED29BE15E}"/>
+                <a16:creationId xmlns:a16="http://schemas.microsoft.com/office/drawing/2014/main" id="{3029337B-1C3E-4E8A-A20B-25BCA4D2E4F0}"/>
               </a:ext>
             </a:extLst>
           </p:cNvPr>
@@ -4824,7 +4824,7 @@
           <p:cNvPr id="11" name="02 Paper-RAG 구조와 기법 적용 위치">
             <a:extLst xmlns:a="http://schemas.openxmlformats.org/drawingml/2006/main">
               <a:ext uri="{FF2B5EF4-FFF2-40B4-BE49-F238E27FC236}">
-                <a16:creationId xmlns:a16="http://schemas.microsoft.com/office/drawing/2014/main" id="{62C38AF6-1253-4D6A-AC7B-1307FF33F75D}"/>
+                <a16:creationId xmlns:a16="http://schemas.microsoft.com/office/drawing/2014/main" id="{2892CED4-99A6-4385-BD92-D7FDD0883291}"/>
               </a:ext>
             </a:extLst>
           </p:cNvPr>
@@ -4982,7 +4982,7 @@
           <p:cNvPr id="12" name="Paper-RAG는 실험에 사용한 고정 검색·생성 파이프라인이다.">
             <a:extLst xmlns:a="http://schemas.openxmlformats.org/drawingml/2006/main">
               <a:ext uri="{FF2B5EF4-FFF2-40B4-BE49-F238E27FC236}">
-                <a16:creationId xmlns:a16="http://schemas.microsoft.com/office/drawing/2014/main" id="{2946413C-2FBF-44EE-B3D8-2DA83DE7EE62}"/>
+                <a16:creationId xmlns:a16="http://schemas.microsoft.com/office/drawing/2014/main" id="{13A10CF4-65B0-49FC-A74D-8937610525C9}"/>
               </a:ext>
             </a:extLst>
           </p:cNvPr>
@@ -5140,7 +5140,7 @@
           <p:cNvPr id="13" name="">
             <a:extLst xmlns:a="http://schemas.openxmlformats.org/drawingml/2006/main">
               <a:ext uri="{FF2B5EF4-FFF2-40B4-BE49-F238E27FC236}">
-                <a16:creationId xmlns:a16="http://schemas.microsoft.com/office/drawing/2014/main" id="{19B9C244-15B9-4843-9945-97BDAA6CF0C1}"/>
+                <a16:creationId xmlns:a16="http://schemas.microsoft.com/office/drawing/2014/main" id="{BAE41FC7-0000-4C3C-BEB4-DCE88E033285}"/>
               </a:ext>
             </a:extLst>
           </p:cNvPr>
@@ -5173,7 +5173,7 @@
           <p:cNvPr id="14" name="한국어 질의 HyDE OFF: 원질의 HyDE ON: 영어 번역·가상 문서">
             <a:extLst xmlns:a="http://schemas.openxmlformats.org/drawingml/2006/main">
               <a:ext uri="{FF2B5EF4-FFF2-40B4-BE49-F238E27FC236}">
-                <a16:creationId xmlns:a16="http://schemas.microsoft.com/office/drawing/2014/main" id="{F622BCE3-CDE8-40A1-AC25-2AEC832302E1}"/>
+                <a16:creationId xmlns:a16="http://schemas.microsoft.com/office/drawing/2014/main" id="{795980B4-227C-42FB-A623-F1056DA6DD85}"/>
               </a:ext>
             </a:extLst>
           </p:cNvPr>
@@ -5377,7 +5377,7 @@
           <p:cNvPr id="15" name="">
             <a:extLst xmlns:a="http://schemas.openxmlformats.org/drawingml/2006/main">
               <a:ext uri="{FF2B5EF4-FFF2-40B4-BE49-F238E27FC236}">
-                <a16:creationId xmlns:a16="http://schemas.microsoft.com/office/drawing/2014/main" id="{053DFD87-1233-4A3F-9594-BEC167988E3F}"/>
+                <a16:creationId xmlns:a16="http://schemas.microsoft.com/office/drawing/2014/main" id="{7DC758B2-E228-43FE-BA10-AECD8326B48E}"/>
               </a:ext>
             </a:extLst>
           </p:cNvPr>
@@ -5410,7 +5410,7 @@
           <p:cNvPr id="16" name="BM25 희소 검색[6] 한국어 원질의 사용">
             <a:extLst xmlns:a="http://schemas.openxmlformats.org/drawingml/2006/main">
               <a:ext uri="{FF2B5EF4-FFF2-40B4-BE49-F238E27FC236}">
-                <a16:creationId xmlns:a16="http://schemas.microsoft.com/office/drawing/2014/main" id="{ABBB11B8-CF77-48B6-96FF-90880EBACDA9}"/>
+                <a16:creationId xmlns:a16="http://schemas.microsoft.com/office/drawing/2014/main" id="{980EF8C8-B2E1-4568-AB51-E366E17BB52E}"/>
               </a:ext>
             </a:extLst>
           </p:cNvPr>
@@ -5591,7 +5591,7 @@
           <p:cNvPr id="17" name="">
             <a:extLst xmlns:a="http://schemas.openxmlformats.org/drawingml/2006/main">
               <a:ext uri="{FF2B5EF4-FFF2-40B4-BE49-F238E27FC236}">
-                <a16:creationId xmlns:a16="http://schemas.microsoft.com/office/drawing/2014/main" id="{0BFDC7CE-CCBF-4F05-B39D-4A43C8FF08CB}"/>
+                <a16:creationId xmlns:a16="http://schemas.microsoft.com/office/drawing/2014/main" id="{92C85F8A-1885-4837-A756-64BAF5E68915}"/>
               </a:ext>
             </a:extLst>
           </p:cNvPr>
@@ -5624,7 +5624,7 @@
           <p:cNvPr id="18" name="BGE-M3 밀집 검색[5]">
             <a:extLst xmlns:a="http://schemas.openxmlformats.org/drawingml/2006/main">
               <a:ext uri="{FF2B5EF4-FFF2-40B4-BE49-F238E27FC236}">
-                <a16:creationId xmlns:a16="http://schemas.microsoft.com/office/drawing/2014/main" id="{BC311CD6-D28F-4F1D-908C-16A33A7E1928}"/>
+                <a16:creationId xmlns:a16="http://schemas.microsoft.com/office/drawing/2014/main" id="{E79DB14E-7872-48D6-836E-2E6B3595167E}"/>
               </a:ext>
             </a:extLst>
           </p:cNvPr>
@@ -5782,7 +5782,7 @@
           <p:cNvPr id="19" name="">
             <a:extLst xmlns:a="http://schemas.openxmlformats.org/drawingml/2006/main">
               <a:ext uri="{FF2B5EF4-FFF2-40B4-BE49-F238E27FC236}">
-                <a16:creationId xmlns:a16="http://schemas.microsoft.com/office/drawing/2014/main" id="{C7223DBD-C1D5-463B-8F95-07D5239E345B}"/>
+                <a16:creationId xmlns:a16="http://schemas.microsoft.com/office/drawing/2014/main" id="{3379877C-BC1F-48A9-A684-457C75D642FE}"/>
               </a:ext>
             </a:extLst>
           </p:cNvPr>
@@ -5815,7 +5815,7 @@
           <p:cNvPr id="20" name="가중 RRF[7] 0.6 / 0.4, k=60">
             <a:extLst xmlns:a="http://schemas.openxmlformats.org/drawingml/2006/main">
               <a:ext uri="{FF2B5EF4-FFF2-40B4-BE49-F238E27FC236}">
-                <a16:creationId xmlns:a16="http://schemas.microsoft.com/office/drawing/2014/main" id="{42E02A47-9235-410F-BC20-EBE6725FA5C7}"/>
+                <a16:creationId xmlns:a16="http://schemas.microsoft.com/office/drawing/2014/main" id="{5F4E13D4-09F5-4FF5-9ED4-D1107D7FD10C}"/>
               </a:ext>
             </a:extLst>
           </p:cNvPr>
@@ -5996,7 +5996,7 @@
           <p:cNvPr id="21" name="">
             <a:extLst xmlns:a="http://schemas.openxmlformats.org/drawingml/2006/main">
               <a:ext uri="{FF2B5EF4-FFF2-40B4-BE49-F238E27FC236}">
-                <a16:creationId xmlns:a16="http://schemas.microsoft.com/office/drawing/2014/main" id="{8B8EBC5E-9FCC-476F-8D0A-DD4335116A84}"/>
+                <a16:creationId xmlns:a16="http://schemas.microsoft.com/office/drawing/2014/main" id="{4D0EA997-5400-4A4F-A43A-AF16996CC915}"/>
               </a:ext>
             </a:extLst>
           </p:cNvPr>
@@ -6028,7 +6028,7 @@
           <p:cNvPr id="22" name="">
             <a:extLst xmlns:a="http://schemas.openxmlformats.org/drawingml/2006/main">
               <a:ext uri="{FF2B5EF4-FFF2-40B4-BE49-F238E27FC236}">
-                <a16:creationId xmlns:a16="http://schemas.microsoft.com/office/drawing/2014/main" id="{3FD3FE97-E9E5-4DFD-8317-2CE1D8FFF96F}"/>
+                <a16:creationId xmlns:a16="http://schemas.microsoft.com/office/drawing/2014/main" id="{26E4E3E8-67ED-45D4-8ED4-C5B5FE70B124}"/>
               </a:ext>
             </a:extLst>
           </p:cNvPr>
@@ -6060,7 +6060,7 @@
           <p:cNvPr id="23" name="">
             <a:extLst xmlns:a="http://schemas.openxmlformats.org/drawingml/2006/main">
               <a:ext uri="{FF2B5EF4-FFF2-40B4-BE49-F238E27FC236}">
-                <a16:creationId xmlns:a16="http://schemas.microsoft.com/office/drawing/2014/main" id="{FD7C67A9-3A28-4A2D-981B-70A9497B5CE3}"/>
+                <a16:creationId xmlns:a16="http://schemas.microsoft.com/office/drawing/2014/main" id="{00541AF2-3412-49F4-93F8-9AE4EFE18C72}"/>
               </a:ext>
             </a:extLst>
           </p:cNvPr>
@@ -6092,7 +6092,7 @@
           <p:cNvPr id="24" name="">
             <a:extLst xmlns:a="http://schemas.openxmlformats.org/drawingml/2006/main">
               <a:ext uri="{FF2B5EF4-FFF2-40B4-BE49-F238E27FC236}">
-                <a16:creationId xmlns:a16="http://schemas.microsoft.com/office/drawing/2014/main" id="{A036E9F2-9F1D-4611-BFC3-41DE23A07634}"/>
+                <a16:creationId xmlns:a16="http://schemas.microsoft.com/office/drawing/2014/main" id="{0336B8BC-4E9A-4C21-9FEB-09AE5EC69971}"/>
               </a:ext>
             </a:extLst>
           </p:cNvPr>
@@ -6125,7 +6125,7 @@
           <p:cNvPr id="25" name="원질의·구간 쌍 CrossEncoder 재정렬[8][M2] 상위 5개 구간 선택·입력 길이 관리">
             <a:extLst xmlns:a="http://schemas.openxmlformats.org/drawingml/2006/main">
               <a:ext uri="{FF2B5EF4-FFF2-40B4-BE49-F238E27FC236}">
-                <a16:creationId xmlns:a16="http://schemas.microsoft.com/office/drawing/2014/main" id="{A0ED452E-C2A3-4CF9-B091-1CBC6DF62573}"/>
+                <a16:creationId xmlns:a16="http://schemas.microsoft.com/office/drawing/2014/main" id="{9C29ECE3-36F5-48C7-8DBD-F64944535806}"/>
               </a:ext>
             </a:extLst>
           </p:cNvPr>
@@ -6306,7 +6306,7 @@
           <p:cNvPr id="26" name="">
             <a:extLst xmlns:a="http://schemas.openxmlformats.org/drawingml/2006/main">
               <a:ext uri="{FF2B5EF4-FFF2-40B4-BE49-F238E27FC236}">
-                <a16:creationId xmlns:a16="http://schemas.microsoft.com/office/drawing/2014/main" id="{052BDE01-5338-4F1D-9563-CC39949503D2}"/>
+                <a16:creationId xmlns:a16="http://schemas.microsoft.com/office/drawing/2014/main" id="{368EC72F-991D-4D8A-8AC6-AB92F94E3C9B}"/>
               </a:ext>
             </a:extLst>
           </p:cNvPr>
@@ -6339,7 +6339,7 @@
           <p:cNvPr id="27" name="Mi:dm 2.0 Base Instruct[M1] CAD 로짓 결합 후 SCD 언어별 조정, 최종 답변 생성">
             <a:extLst xmlns:a="http://schemas.openxmlformats.org/drawingml/2006/main">
               <a:ext uri="{FF2B5EF4-FFF2-40B4-BE49-F238E27FC236}">
-                <a16:creationId xmlns:a16="http://schemas.microsoft.com/office/drawing/2014/main" id="{BA8A9FC7-6D6C-41A5-8243-80100D13252E}"/>
+                <a16:creationId xmlns:a16="http://schemas.microsoft.com/office/drawing/2014/main" id="{386CB12E-7775-4250-8935-730C1362D5A1}"/>
               </a:ext>
             </a:extLst>
           </p:cNvPr>
@@ -6520,7 +6520,7 @@
           <p:cNvPr id="28" name="">
             <a:extLst xmlns:a="http://schemas.openxmlformats.org/drawingml/2006/main">
               <a:ext uri="{FF2B5EF4-FFF2-40B4-BE49-F238E27FC236}">
-                <a16:creationId xmlns:a16="http://schemas.microsoft.com/office/drawing/2014/main" id="{14354F1F-4B89-4781-AC78-F19B65F36CB0}"/>
+                <a16:creationId xmlns:a16="http://schemas.microsoft.com/office/drawing/2014/main" id="{D4213171-B882-4476-BE6E-85A35C5523B7}"/>
               </a:ext>
             </a:extLst>
           </p:cNvPr>
@@ -6552,7 +6552,7 @@
           <p:cNvPr id="29" name="">
             <a:extLst xmlns:a="http://schemas.openxmlformats.org/drawingml/2006/main">
               <a:ext uri="{FF2B5EF4-FFF2-40B4-BE49-F238E27FC236}">
-                <a16:creationId xmlns:a16="http://schemas.microsoft.com/office/drawing/2014/main" id="{7AC54586-7A9D-4D76-909D-1212D2BBC287}"/>
+                <a16:creationId xmlns:a16="http://schemas.microsoft.com/office/drawing/2014/main" id="{5ACECB89-D444-434C-A688-9DEDEF258D10}"/>
               </a:ext>
             </a:extLst>
           </p:cNvPr>
@@ -6584,7 +6584,7 @@
           <p:cNvPr id="30" name="">
             <a:extLst xmlns:a="http://schemas.openxmlformats.org/drawingml/2006/main">
               <a:ext uri="{FF2B5EF4-FFF2-40B4-BE49-F238E27FC236}">
-                <a16:creationId xmlns:a16="http://schemas.microsoft.com/office/drawing/2014/main" id="{72222C0E-2B02-44C9-B807-5B6BE468252C}"/>
+                <a16:creationId xmlns:a16="http://schemas.microsoft.com/office/drawing/2014/main" id="{3423C963-8242-4C34-BFA3-ED8F9DB78FAB}"/>
               </a:ext>
             </a:extLst>
           </p:cNvPr>
@@ -6615,7 +6615,7 @@
           <p:cNvPr id="31" name="03 3요인 완전요인 실험 설계">
             <a:extLst xmlns:a="http://schemas.openxmlformats.org/drawingml/2006/main">
               <a:ext uri="{FF2B5EF4-FFF2-40B4-BE49-F238E27FC236}">
-                <a16:creationId xmlns:a16="http://schemas.microsoft.com/office/drawing/2014/main" id="{94AE48EC-342C-4BA7-ADDB-A47541147896}"/>
+                <a16:creationId xmlns:a16="http://schemas.microsoft.com/office/drawing/2014/main" id="{4B0C7AC3-600C-46B2-AC18-8E09B2772B53}"/>
               </a:ext>
             </a:extLst>
           </p:cNvPr>
@@ -6773,7 +6773,7 @@
           <p:cNvPr id="32" name="H=HyDE, C=CAD, S=SCD   0=미적용, 1=적용">
             <a:extLst xmlns:a="http://schemas.openxmlformats.org/drawingml/2006/main">
               <a:ext uri="{FF2B5EF4-FFF2-40B4-BE49-F238E27FC236}">
-                <a16:creationId xmlns:a16="http://schemas.microsoft.com/office/drawing/2014/main" id="{5EC852D3-B192-4764-9CA6-BEAA9E8068E9}"/>
+                <a16:creationId xmlns:a16="http://schemas.microsoft.com/office/drawing/2014/main" id="{F7296614-64AC-4133-8F1B-7C78554DF43F}"/>
               </a:ext>
             </a:extLst>
           </p:cNvPr>
@@ -6931,7 +6931,7 @@
           <p:cNvPr id="33" name="">
             <a:extLst xmlns:a="http://schemas.openxmlformats.org/drawingml/2006/main">
               <a:ext uri="{FF2B5EF4-FFF2-40B4-BE49-F238E27FC236}">
-                <a16:creationId xmlns:a16="http://schemas.microsoft.com/office/drawing/2014/main" id="{4A773E95-A37F-41D7-8DDC-AB5530DE49B7}"/>
+                <a16:creationId xmlns:a16="http://schemas.microsoft.com/office/drawing/2014/main" id="{CB38EC8E-C0DE-4102-B6A4-FE68EF3AB2AE}"/>
               </a:ext>
             </a:extLst>
           </p:cNvPr>
@@ -8461,7 +8461,7 @@
           <p:cNvPr id="34" name="같은 질의 60개 × 8조건 반복측정 = 480개 생성 기록">
             <a:extLst xmlns:a="http://schemas.openxmlformats.org/drawingml/2006/main">
               <a:ext uri="{FF2B5EF4-FFF2-40B4-BE49-F238E27FC236}">
-                <a16:creationId xmlns:a16="http://schemas.microsoft.com/office/drawing/2014/main" id="{D4F54AAC-AA7C-4AA8-B9B5-055A817CF194}"/>
+                <a16:creationId xmlns:a16="http://schemas.microsoft.com/office/drawing/2014/main" id="{C00A9B81-3677-4337-8A34-32E9D8DB4C37}"/>
               </a:ext>
             </a:extLst>
           </p:cNvPr>
@@ -8619,7 +8619,7 @@
           <p:cNvPr id="35" name="생성 512토큰, CAD α=0.5, SCD α=1.1·β=0.9·Tstart=5">
             <a:extLst xmlns:a="http://schemas.openxmlformats.org/drawingml/2006/main">
               <a:ext uri="{FF2B5EF4-FFF2-40B4-BE49-F238E27FC236}">
-                <a16:creationId xmlns:a16="http://schemas.microsoft.com/office/drawing/2014/main" id="{1F4A2435-F7C6-40F0-A5A3-6EC49D072E29}"/>
+                <a16:creationId xmlns:a16="http://schemas.microsoft.com/office/drawing/2014/main" id="{31E06A9F-EFAD-4722-A4AA-B2664CBC8179}"/>
               </a:ext>
             </a:extLst>
           </p:cNvPr>
@@ -8777,7 +8777,7 @@
           <p:cNvPr id="36" name="문서마다 주요 내용을 15개 단위로 요약해 단위별 질의를 작성하고, 총 60개 질의의 원문 페이지·정답 근거·답변 가">
             <a:extLst xmlns:a="http://schemas.openxmlformats.org/drawingml/2006/main">
               <a:ext uri="{FF2B5EF4-FFF2-40B4-BE49-F238E27FC236}">
-                <a16:creationId xmlns:a16="http://schemas.microsoft.com/office/drawing/2014/main" id="{C4F2748D-DCA3-4DAC-9007-CEEB1963C77A}"/>
+                <a16:creationId xmlns:a16="http://schemas.microsoft.com/office/drawing/2014/main" id="{8A5A6229-6977-4288-90AB-2022F9442D7A}"/>
               </a:ext>
             </a:extLst>
           </p:cNvPr>
@@ -8958,7 +8958,7 @@
           <p:cNvPr id="37" name="">
             <a:extLst xmlns:a="http://schemas.openxmlformats.org/drawingml/2006/main">
               <a:ext uri="{FF2B5EF4-FFF2-40B4-BE49-F238E27FC236}">
-                <a16:creationId xmlns:a16="http://schemas.microsoft.com/office/drawing/2014/main" id="{260B7A32-207C-4841-ABD0-2E7D29AE0DCF}"/>
+                <a16:creationId xmlns:a16="http://schemas.microsoft.com/office/drawing/2014/main" id="{6538A734-E8FC-45E0-B051-76F6BE12F661}"/>
               </a:ext>
             </a:extLst>
           </p:cNvPr>
@@ -8989,7 +8989,7 @@
           <p:cNvPr id="38" name="04 평가 지표 및 실험·통계 방법">
             <a:extLst xmlns:a="http://schemas.openxmlformats.org/drawingml/2006/main">
               <a:ext uri="{FF2B5EF4-FFF2-40B4-BE49-F238E27FC236}">
-                <a16:creationId xmlns:a16="http://schemas.microsoft.com/office/drawing/2014/main" id="{1BEFB309-50C9-4879-B124-470919C6FDAC}"/>
+                <a16:creationId xmlns:a16="http://schemas.microsoft.com/office/drawing/2014/main" id="{42350E51-28E2-4290-87E7-5CCC12CF1398}"/>
               </a:ext>
             </a:extLst>
           </p:cNvPr>
@@ -9147,7 +9147,7 @@
           <p:cNvPr id="39" name="근거 충실도: 높을수록 검색 결과가 뒷받침하는 답변 주장 비율이 크다. 답변 관련성: 높을수록 답변 기반 질문과 원질">
             <a:extLst xmlns:a="http://schemas.openxmlformats.org/drawingml/2006/main">
               <a:ext uri="{FF2B5EF4-FFF2-40B4-BE49-F238E27FC236}">
-                <a16:creationId xmlns:a16="http://schemas.microsoft.com/office/drawing/2014/main" id="{E72B5B61-6ED9-4961-9089-E50F16E0BE15}"/>
+                <a16:creationId xmlns:a16="http://schemas.microsoft.com/office/drawing/2014/main" id="{0FC12234-BB8E-42E8-BDD8-10CCFAE0CF46}"/>
               </a:ext>
             </a:extLst>
           </p:cNvPr>
@@ -9394,10 +9394,10 @@
       </p:sp>
       <p:sp>
         <p:nvSpPr>
-          <p:cNvPr id="40" name="품질 관측값은 0~1이다. 차이는 ON−OFF 평균 차이다. 한국어 비율 0.700은 70.0%, 차이 +0.218은">
+          <p:cNvPr id="40" name="품질 관측값은 0~1이다. 차이 = ON − OFF 평균. 한국어 비율 0.700은 70.0%, 차이 +0.218은 ">
             <a:extLst xmlns:a="http://schemas.openxmlformats.org/drawingml/2006/main">
               <a:ext uri="{FF2B5EF4-FFF2-40B4-BE49-F238E27FC236}">
-                <a16:creationId xmlns:a16="http://schemas.microsoft.com/office/drawing/2014/main" id="{978329CF-3F40-4C48-AD4D-46276CB81490}"/>
+                <a16:creationId xmlns:a16="http://schemas.microsoft.com/office/drawing/2014/main" id="{052DBE33-B6D7-4FF5-BC2E-FE9919F45C6A}"/>
               </a:ext>
             </a:extLst>
           </p:cNvPr>
@@ -9545,7 +9545,7 @@
                 <a:ea typeface="Malgun Gothic"/>
                 <a:cs typeface="Malgun Gothic"/>
               </a:rPr>
-              <a:t>품질 관측값은 0~1이다. 차이는 ON−OFF 평균 차이다.</a:t>
+              <a:t>품질 관측값은 0~1이다. 차이 = ON − OFF 평균.</a:t>
             </a:r>
           </a:p>
           <a:p xmlns:a="http://schemas.openxmlformats.org/drawingml/2006/main">
@@ -9578,7 +9578,7 @@
           <p:cNvPr id="41" name="평가 예시  ext_raptor_011, H0C0S0">
             <a:extLst xmlns:a="http://schemas.openxmlformats.org/drawingml/2006/main">
               <a:ext uri="{FF2B5EF4-FFF2-40B4-BE49-F238E27FC236}">
-                <a16:creationId xmlns:a16="http://schemas.microsoft.com/office/drawing/2014/main" id="{70F0298E-F1E8-4DE7-8BA6-DA9947DA23FE}"/>
+                <a16:creationId xmlns:a16="http://schemas.microsoft.com/office/drawing/2014/main" id="{42463BC7-C840-4FFE-9853-E1E98292BC87}"/>
               </a:ext>
             </a:extLst>
           </p:cNvPr>
@@ -9736,7 +9736,7 @@
           <p:cNvPr id="42" name="질문: Cinderella 사례의 정성 분석에서 RAPTOR의 tree-based retrieval이 DPR보다 주제">
             <a:extLst xmlns:a="http://schemas.openxmlformats.org/drawingml/2006/main">
               <a:ext uri="{FF2B5EF4-FFF2-40B4-BE49-F238E27FC236}">
-                <a16:creationId xmlns:a16="http://schemas.microsoft.com/office/drawing/2014/main" id="{9BD9AA2A-426D-4049-92BF-EDF6FC27791E}"/>
+                <a16:creationId xmlns:a16="http://schemas.microsoft.com/office/drawing/2014/main" id="{D3195CCF-9D16-4A11-8D07-41D841788435}"/>
               </a:ext>
             </a:extLst>
           </p:cNvPr>
@@ -9917,7 +9917,7 @@
           <p:cNvPr id="43" name="검색 근거(PDF p.9): “By providing both the original text and higher-l">
             <a:extLst xmlns:a="http://schemas.openxmlformats.org/drawingml/2006/main">
               <a:ext uri="{FF2B5EF4-FFF2-40B4-BE49-F238E27FC236}">
-                <a16:creationId xmlns:a16="http://schemas.microsoft.com/office/drawing/2014/main" id="{3CAB2510-DC34-47A4-84ED-982C9A1BE75D}"/>
+                <a16:creationId xmlns:a16="http://schemas.microsoft.com/office/drawing/2014/main" id="{8759FD28-866F-42A1-A29E-61ED7741BF01}"/>
               </a:ext>
             </a:extLst>
           </p:cNvPr>
@@ -10121,7 +10121,7 @@
           <p:cNvPr id="44" name="참조 답변 요지(PDF p.20): RAPTOR는 이야기의 주요 부분을, DPR은 이야기의 좁은 일부를 자세히 검색한">
             <a:extLst xmlns:a="http://schemas.openxmlformats.org/drawingml/2006/main">
               <a:ext uri="{FF2B5EF4-FFF2-40B4-BE49-F238E27FC236}">
-                <a16:creationId xmlns:a16="http://schemas.microsoft.com/office/drawing/2014/main" id="{0C264AC3-4781-4E1C-B119-BF5365E8F10D}"/>
+                <a16:creationId xmlns:a16="http://schemas.microsoft.com/office/drawing/2014/main" id="{154FEC9A-6A38-417F-9D52-30F629604C78}"/>
               </a:ext>
             </a:extLst>
           </p:cNvPr>
@@ -10302,7 +10302,7 @@
           <p:cNvPr id="45" name="생성 답변 발췌: “질문의 요구사항에 따라 서로 다른 층위(layer)에서 노드를 선택할 수 있습니다.”">
             <a:extLst xmlns:a="http://schemas.openxmlformats.org/drawingml/2006/main">
               <a:ext uri="{FF2B5EF4-FFF2-40B4-BE49-F238E27FC236}">
-                <a16:creationId xmlns:a16="http://schemas.microsoft.com/office/drawing/2014/main" id="{C5270960-255F-481D-811B-69FC61A2DC0E}"/>
+                <a16:creationId xmlns:a16="http://schemas.microsoft.com/office/drawing/2014/main" id="{A5843330-FCC8-473E-B9C8-72232576A19E}"/>
               </a:ext>
             </a:extLst>
           </p:cNvPr>
@@ -10483,7 +10483,7 @@
           <p:cNvPr id="46" name="충실도 1.000: 추출된 답변 주장을 검색 결과가 모두 지지 관련성 0.937: 답변 기반 질문과 원질문의 평균 의">
             <a:extLst xmlns:a="http://schemas.openxmlformats.org/drawingml/2006/main">
               <a:ext uri="{FF2B5EF4-FFF2-40B4-BE49-F238E27FC236}">
-                <a16:creationId xmlns:a16="http://schemas.microsoft.com/office/drawing/2014/main" id="{71F80C61-FDA2-4789-9E3B-DA0A9D988ABF}"/>
+                <a16:creationId xmlns:a16="http://schemas.microsoft.com/office/drawing/2014/main" id="{C7D6F98D-F8B2-4BCD-8DB6-5D8BD9C181FC}"/>
               </a:ext>
             </a:extLst>
           </p:cNvPr>
@@ -10664,7 +10664,7 @@
           <p:cNvPr id="47" name="평가: RAGAS 0.2.15[10]·gpt-4o·BGE-M3, 저장 답변 평가 평가 언어: S0 영어 / S1 한국">
             <a:extLst xmlns:a="http://schemas.openxmlformats.org/drawingml/2006/main">
               <a:ext uri="{FF2B5EF4-FFF2-40B4-BE49-F238E27FC236}">
-                <a16:creationId xmlns:a16="http://schemas.microsoft.com/office/drawing/2014/main" id="{B33B7512-F3AE-486E-9A70-327951CCBA2B}"/>
+                <a16:creationId xmlns:a16="http://schemas.microsoft.com/office/drawing/2014/main" id="{5071E758-DA13-4CB7-8950-D2EC90A992D2}"/>
               </a:ext>
             </a:extLst>
           </p:cNvPr>
@@ -10845,7 +10845,7 @@
           <p:cNvPr id="48" name="반복측정 분산분석(ANOVA)·대응 t-검정, 양측 α=0.05 품질: SCD 상태별 H×C / 한국어 비율·시간: ">
             <a:extLst xmlns:a="http://schemas.openxmlformats.org/drawingml/2006/main">
               <a:ext uri="{FF2B5EF4-FFF2-40B4-BE49-F238E27FC236}">
-                <a16:creationId xmlns:a16="http://schemas.microsoft.com/office/drawing/2014/main" id="{BDB5008C-77D3-4DB9-A45E-CC1D81C8AC41}"/>
+                <a16:creationId xmlns:a16="http://schemas.microsoft.com/office/drawing/2014/main" id="{5E57602E-2261-42A2-9DB3-1EFC285C0C68}"/>
               </a:ext>
             </a:extLst>
           </p:cNvPr>
@@ -11026,7 +11026,7 @@
           <p:cNvPr id="49" name="">
             <a:extLst xmlns:a="http://schemas.openxmlformats.org/drawingml/2006/main">
               <a:ext uri="{FF2B5EF4-FFF2-40B4-BE49-F238E27FC236}">
-                <a16:creationId xmlns:a16="http://schemas.microsoft.com/office/drawing/2014/main" id="{1974C881-D403-4C6B-B4A3-0D8881F39C10}"/>
+                <a16:creationId xmlns:a16="http://schemas.microsoft.com/office/drawing/2014/main" id="{EAD37014-39C4-4F6D-BAE7-0DECC6DEBAB1}"/>
               </a:ext>
             </a:extLst>
           </p:cNvPr>
@@ -11057,7 +11057,7 @@
           <p:cNvPr id="50" name="05 조합별 결과와 통계 검정">
             <a:extLst xmlns:a="http://schemas.openxmlformats.org/drawingml/2006/main">
               <a:ext uri="{FF2B5EF4-FFF2-40B4-BE49-F238E27FC236}">
-                <a16:creationId xmlns:a16="http://schemas.microsoft.com/office/drawing/2014/main" id="{95B6A686-9609-465C-8912-84C9284509A6}"/>
+                <a16:creationId xmlns:a16="http://schemas.microsoft.com/office/drawing/2014/main" id="{17283022-CED4-43EC-A4A4-3DCE02B09C3D}"/>
               </a:ext>
             </a:extLst>
           </p:cNvPr>
@@ -11215,7 +11215,7 @@
           <p:cNvPr id="51" name="HyDE·CAD·SCD 8조합의 품질·한국어 비율·시간 평균(SD)">
             <a:extLst xmlns:a="http://schemas.openxmlformats.org/drawingml/2006/main">
               <a:ext uri="{FF2B5EF4-FFF2-40B4-BE49-F238E27FC236}">
-                <a16:creationId xmlns:a16="http://schemas.microsoft.com/office/drawing/2014/main" id="{EA0DD159-F5DF-4613-80C8-6FFF91606DBA}"/>
+                <a16:creationId xmlns:a16="http://schemas.microsoft.com/office/drawing/2014/main" id="{F1BBD6C3-D66C-4D86-B241-5F385271F9FE}"/>
               </a:ext>
             </a:extLst>
           </p:cNvPr>
@@ -11373,7 +11373,7 @@
           <p:cNvPr id="52" name="">
             <a:extLst xmlns:a="http://schemas.openxmlformats.org/drawingml/2006/main">
               <a:ext uri="{FF2B5EF4-FFF2-40B4-BE49-F238E27FC236}">
-                <a16:creationId xmlns:a16="http://schemas.microsoft.com/office/drawing/2014/main" id="{6EE18D62-9C4C-4FD0-89A9-57CB2E134EB6}"/>
+                <a16:creationId xmlns:a16="http://schemas.microsoft.com/office/drawing/2014/main" id="{94A0EB5B-A82B-45D7-AF25-903592368B34}"/>
               </a:ext>
             </a:extLst>
           </p:cNvPr>
@@ -14733,7 +14733,7 @@
           <p:cNvPr id="53" name="">
             <a:extLst xmlns:a="http://schemas.openxmlformats.org/drawingml/2006/main">
               <a:ext uri="{FF2B5EF4-FFF2-40B4-BE49-F238E27FC236}">
-                <a16:creationId xmlns:a16="http://schemas.microsoft.com/office/drawing/2014/main" id="{0785FE23-E967-47BF-8A00-A526ED56788B}"/>
+                <a16:creationId xmlns:a16="http://schemas.microsoft.com/office/drawing/2014/main" id="{AA4F8771-8813-4F9F-A387-3EE67CBB3B7F}"/>
               </a:ext>
             </a:extLst>
           </p:cNvPr>
@@ -14764,7 +14764,7 @@
           <p:cNvPr id="54" name="S0: 영어로 평가 / S1: 한국어 번역으로 평가 충실도 H0C1S0 n=58, H0C0S1 n=57, 나머지 n=">
             <a:extLst xmlns:a="http://schemas.openxmlformats.org/drawingml/2006/main">
               <a:ext uri="{FF2B5EF4-FFF2-40B4-BE49-F238E27FC236}">
-                <a16:creationId xmlns:a16="http://schemas.microsoft.com/office/drawing/2014/main" id="{819B5E03-2B43-4114-A3FF-9B3CF9AFE6FE}"/>
+                <a16:creationId xmlns:a16="http://schemas.microsoft.com/office/drawing/2014/main" id="{314DD4E3-DD82-4F16-9D78-EC57094DE293}"/>
               </a:ext>
             </a:extLst>
           </p:cNvPr>
@@ -14958,7 +14958,7 @@
                 <a:ea typeface="Malgun Gothic"/>
                 <a:cs typeface="Malgun Gothic"/>
               </a:rPr>
-              <a:t>한국어 비율·시간(초)은 답변과 실행 시간에서 직접 계산</a:t>
+              <a:t>한국어 비율·시간(초)은 RAGAS를 거치지 않고 직접 계산</a:t>
             </a:r>
           </a:p>
         </p:txBody>
@@ -14968,7 +14968,7 @@
           <p:cNvPr id="55" name="3요인 반복측정 ANOVA  ·  각 효과 df=(1,59)">
             <a:extLst xmlns:a="http://schemas.openxmlformats.org/drawingml/2006/main">
               <a:ext uri="{FF2B5EF4-FFF2-40B4-BE49-F238E27FC236}">
-                <a16:creationId xmlns:a16="http://schemas.microsoft.com/office/drawing/2014/main" id="{8E0281FD-F93A-4A7F-BEE8-E2E954B41BDA}"/>
+                <a16:creationId xmlns:a16="http://schemas.microsoft.com/office/drawing/2014/main" id="{6BF9FBDC-A32F-4789-AACC-54C2D48499A7}"/>
               </a:ext>
             </a:extLst>
           </p:cNvPr>
@@ -15126,7 +15126,7 @@
           <p:cNvPr id="56" name="">
             <a:extLst xmlns:a="http://schemas.openxmlformats.org/drawingml/2006/main">
               <a:ext uri="{FF2B5EF4-FFF2-40B4-BE49-F238E27FC236}">
-                <a16:creationId xmlns:a16="http://schemas.microsoft.com/office/drawing/2014/main" id="{C473657E-1C4E-499D-AE6C-13E525359B5B}"/>
+                <a16:creationId xmlns:a16="http://schemas.microsoft.com/office/drawing/2014/main" id="{9DDDF60B-3C9A-47EA-83CD-A6842FECA7C9}"/>
               </a:ext>
             </a:extLst>
           </p:cNvPr>
@@ -16839,7 +16839,7 @@
           <p:cNvPr id="57" name="p&lt;0.05: 한국어 비율 S·H×C* / 실행 시간 H·C·S*·C×S (*유의수준 근처의 탐색적 결과) RAGAS">
             <a:extLst xmlns:a="http://schemas.openxmlformats.org/drawingml/2006/main">
               <a:ext uri="{FF2B5EF4-FFF2-40B4-BE49-F238E27FC236}">
-                <a16:creationId xmlns:a16="http://schemas.microsoft.com/office/drawing/2014/main" id="{C469F927-E94D-4D5C-99DD-6D6DE9271A04}"/>
+                <a16:creationId xmlns:a16="http://schemas.microsoft.com/office/drawing/2014/main" id="{2C380E27-FBC0-4C2D-90F9-B53370C8244B}"/>
               </a:ext>
             </a:extLst>
           </p:cNvPr>
@@ -17043,7 +17043,7 @@
           <p:cNvPr id="58" name="기법별 대응 비교  ·  질의별 평균 차이, 양측 검정">
             <a:extLst xmlns:a="http://schemas.openxmlformats.org/drawingml/2006/main">
               <a:ext uri="{FF2B5EF4-FFF2-40B4-BE49-F238E27FC236}">
-                <a16:creationId xmlns:a16="http://schemas.microsoft.com/office/drawing/2014/main" id="{59D98C1E-67BB-4DB0-B2F8-F458F43D239A}"/>
+                <a16:creationId xmlns:a16="http://schemas.microsoft.com/office/drawing/2014/main" id="{A9FDAFE2-6273-4DDF-8593-E035E82398A3}"/>
               </a:ext>
             </a:extLst>
           </p:cNvPr>
@@ -17201,7 +17201,7 @@
           <p:cNvPr id="59" name="">
             <a:extLst xmlns:a="http://schemas.openxmlformats.org/drawingml/2006/main">
               <a:ext uri="{FF2B5EF4-FFF2-40B4-BE49-F238E27FC236}">
-                <a16:creationId xmlns:a16="http://schemas.microsoft.com/office/drawing/2014/main" id="{A214632D-95AD-4F5B-A7E1-55689EC16105}"/>
+                <a16:creationId xmlns:a16="http://schemas.microsoft.com/office/drawing/2014/main" id="{9F6A9977-4B0B-4527-B348-A389D9023DE4}"/>
               </a:ext>
             </a:extLst>
           </p:cNvPr>
@@ -18214,7 +18214,7 @@
           <p:cNvPr id="60" name="HyDE: C0S0, CAD: H0S0, SCD: H0의 CAD 상태 평균 p: 다중비교 보정 없는 양측 p, dz:">
             <a:extLst xmlns:a="http://schemas.openxmlformats.org/drawingml/2006/main">
               <a:ext uri="{FF2B5EF4-FFF2-40B4-BE49-F238E27FC236}">
-                <a16:creationId xmlns:a16="http://schemas.microsoft.com/office/drawing/2014/main" id="{8213D86D-36C6-43AC-8A5A-8CE473BC1062}"/>
+                <a16:creationId xmlns:a16="http://schemas.microsoft.com/office/drawing/2014/main" id="{1E2E695C-A79C-4009-B989-D09346E70F7A}"/>
               </a:ext>
             </a:extLst>
           </p:cNvPr>
@@ -18418,7 +18418,7 @@
           <p:cNvPr id="61" name="">
             <a:extLst xmlns:a="http://schemas.openxmlformats.org/drawingml/2006/main">
               <a:ext uri="{FF2B5EF4-FFF2-40B4-BE49-F238E27FC236}">
-                <a16:creationId xmlns:a16="http://schemas.microsoft.com/office/drawing/2014/main" id="{178A86DF-D64B-4ACF-A40F-B761E7FC4CBE}"/>
+                <a16:creationId xmlns:a16="http://schemas.microsoft.com/office/drawing/2014/main" id="{175C7A03-AEDB-454E-B226-0987C1C27142}"/>
               </a:ext>
             </a:extLst>
           </p:cNvPr>
@@ -18449,7 +18449,7 @@
           <p:cNvPr id="62" name="06 결과 해석">
             <a:extLst xmlns:a="http://schemas.openxmlformats.org/drawingml/2006/main">
               <a:ext uri="{FF2B5EF4-FFF2-40B4-BE49-F238E27FC236}">
-                <a16:creationId xmlns:a16="http://schemas.microsoft.com/office/drawing/2014/main" id="{EB7F33E0-937C-455E-B3B4-99C1ABF60FF2}"/>
+                <a16:creationId xmlns:a16="http://schemas.microsoft.com/office/drawing/2014/main" id="{7E6AD3EF-65F1-4B1C-9845-DB45F2C9C7B6}"/>
               </a:ext>
             </a:extLst>
           </p:cNvPr>
@@ -18604,10 +18604,10 @@
       </p:sp>
       <p:sp>
         <p:nvSpPr>
-          <p:cNvPr id="63" name="HyDE: 기본 조건에서 관련성이 유의하게 높았고(p=0.029), SCD 적용 조건의 추가 비교에서는 p=0.114">
+          <p:cNvPr id="63" name="HyDE: 기본 조건에서 관련성이 유의하게 높았으나(p=0.029), SCD 적용 조건의 추가 비교에서는 p=0.11">
             <a:extLst xmlns:a="http://schemas.openxmlformats.org/drawingml/2006/main">
               <a:ext uri="{FF2B5EF4-FFF2-40B4-BE49-F238E27FC236}">
-                <a16:creationId xmlns:a16="http://schemas.microsoft.com/office/drawing/2014/main" id="{3251FDC8-A947-417F-8BEA-38BAD53D0BCC}"/>
+                <a16:creationId xmlns:a16="http://schemas.microsoft.com/office/drawing/2014/main" id="{391FEC8D-D043-4DE0-90DC-C32E507BC223}"/>
               </a:ext>
             </a:extLst>
           </p:cNvPr>
@@ -18755,7 +18755,7 @@
                 <a:ea typeface="Malgun Gothic"/>
                 <a:cs typeface="Malgun Gothic"/>
               </a:rPr>
-              <a:t>HyDE: 기본 조건에서 관련성이 유의하게 높았고(p=0.029),</a:t>
+              <a:t>HyDE: 기본 조건에서 관련성이 유의하게 높았으나(p=0.029),</a:t>
             </a:r>
           </a:p>
           <a:p xmlns:a="http://schemas.openxmlformats.org/drawingml/2006/main">
@@ -18857,7 +18857,7 @@
           <p:cNvPr id="64" name="">
             <a:extLst xmlns:a="http://schemas.openxmlformats.org/drawingml/2006/main">
               <a:ext uri="{FF2B5EF4-FFF2-40B4-BE49-F238E27FC236}">
-                <a16:creationId xmlns:a16="http://schemas.microsoft.com/office/drawing/2014/main" id="{44667C4C-20ED-40C2-AE18-B74E0F151612}"/>
+                <a16:creationId xmlns:a16="http://schemas.microsoft.com/office/drawing/2014/main" id="{1E4E6D9F-FF64-426C-9282-B1292F0EABA8}"/>
               </a:ext>
             </a:extLst>
           </p:cNvPr>
@@ -18888,7 +18888,7 @@
           <p:cNvPr id="65" name="07 결론">
             <a:extLst xmlns:a="http://schemas.openxmlformats.org/drawingml/2006/main">
               <a:ext uri="{FF2B5EF4-FFF2-40B4-BE49-F238E27FC236}">
-                <a16:creationId xmlns:a16="http://schemas.microsoft.com/office/drawing/2014/main" id="{A4CAB35E-3269-4A25-88BC-74FA9811A45A}"/>
+                <a16:creationId xmlns:a16="http://schemas.microsoft.com/office/drawing/2014/main" id="{2FC9ABC9-3D15-44CE-81B0-0F678545E477}"/>
               </a:ext>
             </a:extLst>
           </p:cNvPr>
@@ -19043,10 +19043,10 @@
       </p:sp>
       <p:sp>
         <p:nvSpPr>
-          <p:cNvPr id="66" name="한국어 답변이 필요하면 SCD가 비용이 작은 선택이었다. HyDE의 관련성 향상은 기본 조건(C0S0)에서 관측되었고">
+          <p:cNvPr id="66" name="한국어 답변이 필요하면 SCD가 비용이 작은 선택지다. HyDE의 관련성 향상은 기본 조건(C0S0)에서 관측되었고,">
             <a:extLst xmlns:a="http://schemas.openxmlformats.org/drawingml/2006/main">
               <a:ext uri="{FF2B5EF4-FFF2-40B4-BE49-F238E27FC236}">
-                <a16:creationId xmlns:a16="http://schemas.microsoft.com/office/drawing/2014/main" id="{447BEAE4-82FB-4924-86F1-7483C3E94D3D}"/>
+                <a16:creationId xmlns:a16="http://schemas.microsoft.com/office/drawing/2014/main" id="{CC87F262-3418-49C9-A3A1-B0D141AA6D2C}"/>
               </a:ext>
             </a:extLst>
           </p:cNvPr>
@@ -19194,7 +19194,7 @@
                 <a:ea typeface="Malgun Gothic"/>
                 <a:cs typeface="Malgun Gothic"/>
               </a:rPr>
-              <a:t>한국어 답변이 필요하면 SCD가 비용이 작은 선택이었다.</a:t>
+              <a:t>한국어 답변이 필요하면 SCD가 비용이 작은 선택지다.</a:t>
             </a:r>
           </a:p>
           <a:p xmlns:a="http://schemas.openxmlformats.org/drawingml/2006/main">
@@ -19263,7 +19263,7 @@
                 <a:ea typeface="Malgun Gothic"/>
                 <a:cs typeface="Malgun Gothic"/>
               </a:rPr>
-              <a:t>CAD는 충실도 차이가 작고 실행 시간이 약 2.9배로 늘었다</a:t>
+              <a:t>CAD는 시간 비용이 커서(약 2.9배; SCD 미적용 3.1배, 적용 2.7배),</a:t>
             </a:r>
           </a:p>
           <a:p xmlns:a="http://schemas.openxmlformats.org/drawingml/2006/main">
@@ -19286,7 +19286,7 @@
                 <a:ea typeface="Malgun Gothic"/>
                 <a:cs typeface="Malgun Gothic"/>
               </a:rPr>
-              <a:t>(SCD 미적용 3.1배, 적용 2.7배).</a:t>
+              <a:t>지식 충돌형 질의처럼 효과가 기대될 때 선택적으로 검토한다.</a:t>
             </a:r>
           </a:p>
           <a:p xmlns:a="http://schemas.openxmlformats.org/drawingml/2006/main">
@@ -19319,7 +19319,7 @@
           <p:cNvPr id="67" name="">
             <a:extLst xmlns:a="http://schemas.openxmlformats.org/drawingml/2006/main">
               <a:ext uri="{FF2B5EF4-FFF2-40B4-BE49-F238E27FC236}">
-                <a16:creationId xmlns:a16="http://schemas.microsoft.com/office/drawing/2014/main" id="{5334702A-A4A6-4632-B109-0EFB9FBCAD15}"/>
+                <a16:creationId xmlns:a16="http://schemas.microsoft.com/office/drawing/2014/main" id="{16F16CB1-C36A-4429-A2D3-54C3A5D4D1E3}"/>
               </a:ext>
             </a:extLst>
           </p:cNvPr>
@@ -19350,7 +19350,7 @@
           <p:cNvPr id="68" name="08 주요 참고문헌">
             <a:extLst xmlns:a="http://schemas.openxmlformats.org/drawingml/2006/main">
               <a:ext uri="{FF2B5EF4-FFF2-40B4-BE49-F238E27FC236}">
-                <a16:creationId xmlns:a16="http://schemas.microsoft.com/office/drawing/2014/main" id="{7AD350D8-D56A-41AC-BE65-3A82EAD8741D}"/>
+                <a16:creationId xmlns:a16="http://schemas.microsoft.com/office/drawing/2014/main" id="{0D58FB18-D2FD-4165-BC4A-9C5E540399ED}"/>
               </a:ext>
             </a:extLst>
           </p:cNvPr>
@@ -19508,7 +19508,7 @@
           <p:cNvPr id="69" name="[1] Lewis et al. RAG. NeurIPS, 2020. [2] Gao et al. HyDE. ACL, 20">
             <a:extLst xmlns:a="http://schemas.openxmlformats.org/drawingml/2006/main">
               <a:ext uri="{FF2B5EF4-FFF2-40B4-BE49-F238E27FC236}">
-                <a16:creationId xmlns:a16="http://schemas.microsoft.com/office/drawing/2014/main" id="{29529266-6377-4562-A347-B87CFDA23584}"/>
+                <a16:creationId xmlns:a16="http://schemas.microsoft.com/office/drawing/2014/main" id="{E164C105-BD18-402E-BEED-BA5D4C47F0CA}"/>
               </a:ext>
             </a:extLst>
           </p:cNvPr>
@@ -19712,7 +19712,7 @@
           <p:cNvPr id="70" name="[4] Li et al. Language Drift and SCD. AAAI, 2026. [5] Chen et al.">
             <a:extLst xmlns:a="http://schemas.openxmlformats.org/drawingml/2006/main">
               <a:ext uri="{FF2B5EF4-FFF2-40B4-BE49-F238E27FC236}">
-                <a16:creationId xmlns:a16="http://schemas.microsoft.com/office/drawing/2014/main" id="{9A30954B-F151-4485-8628-382F33608EFD}"/>
+                <a16:creationId xmlns:a16="http://schemas.microsoft.com/office/drawing/2014/main" id="{8DBAD3F8-7E2B-4D1C-AA17-F50456C97380}"/>
               </a:ext>
             </a:extLst>
           </p:cNvPr>
@@ -19916,7 +19916,7 @@
           <p:cNvPr id="71" name="[6] Robertson et al. Okapi at TREC-3. NIST, 1995. [7] Cormack et ">
             <a:extLst xmlns:a="http://schemas.openxmlformats.org/drawingml/2006/main">
               <a:ext uri="{FF2B5EF4-FFF2-40B4-BE49-F238E27FC236}">
-                <a16:creationId xmlns:a16="http://schemas.microsoft.com/office/drawing/2014/main" id="{C9F590B0-C100-4C48-85BE-55FDD7C2D31A}"/>
+                <a16:creationId xmlns:a16="http://schemas.microsoft.com/office/drawing/2014/main" id="{1CFB87A3-25F3-4CF6-A411-DD9B3CF83386}"/>
               </a:ext>
             </a:extLst>
           </p:cNvPr>
@@ -20097,7 +20097,7 @@
           <p:cNvPr id="72" name="[8] MacAvaney et al. CEDR. SIGIR, 2019. 공식 모델  [M1] KT Mi:dm 2.0 ">
             <a:extLst xmlns:a="http://schemas.openxmlformats.org/drawingml/2006/main">
               <a:ext uri="{FF2B5EF4-FFF2-40B4-BE49-F238E27FC236}">
-                <a16:creationId xmlns:a16="http://schemas.microsoft.com/office/drawing/2014/main" id="{AAD2C696-6DD4-491F-A93F-85698066FBBE}"/>
+                <a16:creationId xmlns:a16="http://schemas.microsoft.com/office/drawing/2014/main" id="{FA0D2E31-FAB9-45E3-A944-0B1738148418}"/>
               </a:ext>
             </a:extLst>
           </p:cNvPr>
@@ -20278,7 +20278,7 @@
           <p:cNvPr id="73" name="전체 참고문헌 22편과 모델·자료 출처는 논문의 참고문헌에 수록">
             <a:extLst xmlns:a="http://schemas.openxmlformats.org/drawingml/2006/main">
               <a:ext uri="{FF2B5EF4-FFF2-40B4-BE49-F238E27FC236}">
-                <a16:creationId xmlns:a16="http://schemas.microsoft.com/office/drawing/2014/main" id="{3AA73015-D3F4-44C7-BF92-76B9825D5D40}"/>
+                <a16:creationId xmlns:a16="http://schemas.microsoft.com/office/drawing/2014/main" id="{E40C1743-BE43-4DD1-A944-0F2A948C14C0}"/>
               </a:ext>
             </a:extLst>
           </p:cNvPr>
@@ -20436,7 +20436,7 @@
           <p:cNvPr id="74" name="영어 문서 4종 · 질의 60개 · 생성 모델 1종 · 질의별 반복측정">
             <a:extLst xmlns:a="http://schemas.openxmlformats.org/drawingml/2006/main">
               <a:ext uri="{FF2B5EF4-FFF2-40B4-BE49-F238E27FC236}">
-                <a16:creationId xmlns:a16="http://schemas.microsoft.com/office/drawing/2014/main" id="{94E4FC76-3D47-4121-ACC0-C18495B148AD}"/>
+                <a16:creationId xmlns:a16="http://schemas.microsoft.com/office/drawing/2014/main" id="{4DC9917E-4A31-4AA2-B2DC-BE7BBA24E362}"/>
               </a:ext>
             </a:extLst>
           </p:cNvPr>
@@ -20594,7 +20594,7 @@
           <p:cNvPr id="75" name="A1 594 × 841 mm">
             <a:extLst xmlns:a="http://schemas.openxmlformats.org/drawingml/2006/main">
               <a:ext uri="{FF2B5EF4-FFF2-40B4-BE49-F238E27FC236}">
-                <a16:creationId xmlns:a16="http://schemas.microsoft.com/office/drawing/2014/main" id="{8B4ECA7C-6541-497A-A2C4-30B1B838A3C5}"/>
+                <a16:creationId xmlns:a16="http://schemas.microsoft.com/office/drawing/2014/main" id="{500B2A7D-9923-424D-B433-089D3CB2B750}"/>
               </a:ext>
             </a:extLst>
           </p:cNvPr>
@@ -20750,7 +20750,7 @@
     </p:spTree>
     <p:extLst>
       <p:ext uri="{BB962C8B-B14F-4D97-AF65-F5344CB8AC3E}">
-        <p14:creationId xmlns:p14="http://schemas.microsoft.com/office/powerpoint/2010/main" val="1649542771"/>
+        <p14:creationId xmlns:p14="http://schemas.microsoft.com/office/powerpoint/2010/main" val="1873406188"/>
       </p:ext>
     </p:extLst>
   </p:cSld>

--- a/FINALDOCS/POSTER/FINAL/M_RAG_A1_FINAL_EDITABLE.pptx
+++ b/FINALDOCS/POSTER/FINAL/M_RAG_A1_FINAL_EDITABLE.pptx
@@ -2,13 +2,13 @@
 <file path=ppt/presentation.xml><?xml version="1.0" encoding="utf-8"?>
 <p:presentation xmlns:p="http://schemas.openxmlformats.org/presentationml/2006/main">
   <p:sldMasterIdLst>
-    <p:sldMasterId xmlns:r="http://schemas.openxmlformats.org/officeDocument/2006/relationships" id="2147483648" r:id="R384b91cfcdea4d7a"/>
+    <p:sldMasterId xmlns:r="http://schemas.openxmlformats.org/officeDocument/2006/relationships" id="2147483648" r:id="R9fd2536a6f6b4f45"/>
   </p:sldMasterIdLst>
   <p:notesMasterIdLst>
-    <p:notesMasterId xmlns:r="http://schemas.openxmlformats.org/officeDocument/2006/relationships" r:id="Rc4ca206ce9304477"/>
+    <p:notesMasterId xmlns:r="http://schemas.openxmlformats.org/officeDocument/2006/relationships" r:id="Raba8f90d88304c22"/>
   </p:notesMasterIdLst>
   <p:sldIdLst>
-    <p:sldId xmlns:r="http://schemas.openxmlformats.org/officeDocument/2006/relationships" id="256" r:id="R21b8fa34b89d4f48"/>
+    <p:sldId xmlns:r="http://schemas.openxmlformats.org/officeDocument/2006/relationships" id="256" r:id="Rd87cafdcd80940b1"/>
   </p:sldIdLst>
   <p:sldSz cx="21384000" cy="30276000"/>
   <p:notesSz cx="6858000" cy="9144000"/>
@@ -489,7 +489,7 @@
           <p:cNvPr id="3" name="Title">
             <a:extLst xmlns:a="http://schemas.openxmlformats.org/drawingml/2006/main">
               <a:ext uri="{FF2B5EF4-FFF2-40B4-BE49-F238E27FC236}">
-                <a16:creationId xmlns:a16="http://schemas.microsoft.com/office/drawing/2014/main" id="{DC96F6B4-55E3-4274-B911-18FE359FA562}"/>
+                <a16:creationId xmlns:a16="http://schemas.microsoft.com/office/drawing/2014/main" id="{D832956D-08C3-4827-934F-220576271E5E}"/>
               </a:ext>
             </a:extLst>
           </p:cNvPr>
@@ -718,7 +718,7 @@
           <p:cNvPr id="2" name="Subtitle">
             <a:extLst xmlns:a="http://schemas.openxmlformats.org/drawingml/2006/main">
               <a:ext uri="{FF2B5EF4-FFF2-40B4-BE49-F238E27FC236}">
-                <a16:creationId xmlns:a16="http://schemas.microsoft.com/office/drawing/2014/main" id="{6AACB9B9-6BD2-42D9-865C-653991384C5A}"/>
+                <a16:creationId xmlns:a16="http://schemas.microsoft.com/office/drawing/2014/main" id="{E5356177-0C47-473C-9375-4BD5ECAD057B}"/>
               </a:ext>
             </a:extLst>
           </p:cNvPr>
@@ -964,7 +964,7 @@
           <p:cNvPr id="2" name="Section title">
             <a:extLst xmlns:a="http://schemas.openxmlformats.org/drawingml/2006/main">
               <a:ext uri="{FF2B5EF4-FFF2-40B4-BE49-F238E27FC236}">
-                <a16:creationId xmlns:a16="http://schemas.microsoft.com/office/drawing/2014/main" id="{7CE9E248-4CCC-46B3-AA09-977E62B8E6B3}"/>
+                <a16:creationId xmlns:a16="http://schemas.microsoft.com/office/drawing/2014/main" id="{6A8FDCE7-A4A1-47AE-89B8-BFEB787697D2}"/>
               </a:ext>
             </a:extLst>
           </p:cNvPr>
@@ -1210,7 +1210,7 @@
           <p:cNvPr id="3" name="Title">
             <a:extLst xmlns:a="http://schemas.openxmlformats.org/drawingml/2006/main">
               <a:ext uri="{FF2B5EF4-FFF2-40B4-BE49-F238E27FC236}">
-                <a16:creationId xmlns:a16="http://schemas.microsoft.com/office/drawing/2014/main" id="{4CE874D7-964A-4D82-B6D2-CD6E74797A0C}"/>
+                <a16:creationId xmlns:a16="http://schemas.microsoft.com/office/drawing/2014/main" id="{7E7B6CD9-A567-4EC3-BCED-E8168AF40BAA}"/>
               </a:ext>
             </a:extLst>
           </p:cNvPr>
@@ -1439,7 +1439,7 @@
           <p:cNvPr id="2" name="Body">
             <a:extLst xmlns:a="http://schemas.openxmlformats.org/drawingml/2006/main">
               <a:ext uri="{FF2B5EF4-FFF2-40B4-BE49-F238E27FC236}">
-                <a16:creationId xmlns:a16="http://schemas.microsoft.com/office/drawing/2014/main" id="{6CA17C00-DE63-4334-B9A8-872D67E92E3B}"/>
+                <a16:creationId xmlns:a16="http://schemas.microsoft.com/office/drawing/2014/main" id="{163F34AF-7718-48EC-AD21-4645F7C0D7A5}"/>
               </a:ext>
             </a:extLst>
           </p:cNvPr>
@@ -1685,7 +1685,7 @@
           <p:cNvPr id="4" name="Title">
             <a:extLst xmlns:a="http://schemas.openxmlformats.org/drawingml/2006/main">
               <a:ext uri="{FF2B5EF4-FFF2-40B4-BE49-F238E27FC236}">
-                <a16:creationId xmlns:a16="http://schemas.microsoft.com/office/drawing/2014/main" id="{6AA15563-599B-4919-AF0A-846C84CD29A8}"/>
+                <a16:creationId xmlns:a16="http://schemas.microsoft.com/office/drawing/2014/main" id="{DA253EC0-DF8F-41C3-926A-51E1BD19EE8F}"/>
               </a:ext>
             </a:extLst>
           </p:cNvPr>
@@ -1914,7 +1914,7 @@
           <p:cNvPr id="2" name="Left column">
             <a:extLst xmlns:a="http://schemas.openxmlformats.org/drawingml/2006/main">
               <a:ext uri="{FF2B5EF4-FFF2-40B4-BE49-F238E27FC236}">
-                <a16:creationId xmlns:a16="http://schemas.microsoft.com/office/drawing/2014/main" id="{8706D22C-BDD9-44B4-9293-D499F43FD834}"/>
+                <a16:creationId xmlns:a16="http://schemas.microsoft.com/office/drawing/2014/main" id="{1240EE67-E295-4693-91A7-0DBB61A2CBCF}"/>
               </a:ext>
             </a:extLst>
           </p:cNvPr>
@@ -2143,7 +2143,7 @@
           <p:cNvPr id="3" name="Right column">
             <a:extLst xmlns:a="http://schemas.openxmlformats.org/drawingml/2006/main">
               <a:ext uri="{FF2B5EF4-FFF2-40B4-BE49-F238E27FC236}">
-                <a16:creationId xmlns:a16="http://schemas.microsoft.com/office/drawing/2014/main" id="{FB510E8B-B468-44F0-B60A-97B7EFE4C19D}"/>
+                <a16:creationId xmlns:a16="http://schemas.microsoft.com/office/drawing/2014/main" id="{EF174303-D704-4893-AF2F-188D7CB54472}"/>
               </a:ext>
             </a:extLst>
           </p:cNvPr>
@@ -2389,7 +2389,7 @@
           <p:cNvPr id="3" name="Title">
             <a:extLst xmlns:a="http://schemas.openxmlformats.org/drawingml/2006/main">
               <a:ext uri="{FF2B5EF4-FFF2-40B4-BE49-F238E27FC236}">
-                <a16:creationId xmlns:a16="http://schemas.microsoft.com/office/drawing/2014/main" id="{2B1F5638-DFBC-4C9B-8EE0-BD3EDEC5D71F}"/>
+                <a16:creationId xmlns:a16="http://schemas.microsoft.com/office/drawing/2014/main" id="{5000D7CC-354A-4FAC-9941-1F897B165FB9}"/>
               </a:ext>
             </a:extLst>
           </p:cNvPr>
@@ -2618,7 +2618,7 @@
           <p:cNvPr id="2" name="Left column">
             <a:extLst xmlns:a="http://schemas.openxmlformats.org/drawingml/2006/main">
               <a:ext uri="{FF2B5EF4-FFF2-40B4-BE49-F238E27FC236}">
-                <a16:creationId xmlns:a16="http://schemas.microsoft.com/office/drawing/2014/main" id="{C8D7D895-8EE3-4269-BD22-61C8E6BAFDC0}"/>
+                <a16:creationId xmlns:a16="http://schemas.microsoft.com/office/drawing/2014/main" id="{1D8AF224-8DB7-4DF2-8970-9073A0A0A0E5}"/>
               </a:ext>
             </a:extLst>
           </p:cNvPr>
@@ -2885,12 +2885,12 @@
   </p:cSld>
   <p:clrMap bg1="lt1" tx1="dk1" bg2="lt2" tx2="dk2" accent1="accent1" accent2="accent2" accent3="accent3" accent4="accent4" accent5="accent5" accent6="accent6" hlink="hlink" folHlink="folHlink"/>
   <p:sldLayoutIdLst>
-    <p:sldLayoutId xmlns:r="http://schemas.openxmlformats.org/officeDocument/2006/relationships" id="2147483649" r:id="R6543d032034d4c8f"/>
-    <p:sldLayoutId xmlns:r="http://schemas.openxmlformats.org/officeDocument/2006/relationships" id="2147483650" r:id="R5cd30cb2624d4a8c"/>
-    <p:sldLayoutId xmlns:r="http://schemas.openxmlformats.org/officeDocument/2006/relationships" id="2147483651" r:id="R37d4214cf38d4ece"/>
-    <p:sldLayoutId xmlns:r="http://schemas.openxmlformats.org/officeDocument/2006/relationships" id="2147483652" r:id="R55f31ccb64f847b2"/>
-    <p:sldLayoutId xmlns:r="http://schemas.openxmlformats.org/officeDocument/2006/relationships" id="2147483653" r:id="R9a85a067869f41d5"/>
-    <p:sldLayoutId xmlns:r="http://schemas.openxmlformats.org/officeDocument/2006/relationships" id="2147483654" r:id="Rf8db2a51d3ba4cae"/>
+    <p:sldLayoutId xmlns:r="http://schemas.openxmlformats.org/officeDocument/2006/relationships" id="2147483649" r:id="Rbe3672cd7726401a"/>
+    <p:sldLayoutId xmlns:r="http://schemas.openxmlformats.org/officeDocument/2006/relationships" id="2147483650" r:id="R4b90d84b3fc04874"/>
+    <p:sldLayoutId xmlns:r="http://schemas.openxmlformats.org/officeDocument/2006/relationships" id="2147483651" r:id="R23cc4dbaab5e41a7"/>
+    <p:sldLayoutId xmlns:r="http://schemas.openxmlformats.org/officeDocument/2006/relationships" id="2147483652" r:id="R0ec99dcb015143ac"/>
+    <p:sldLayoutId xmlns:r="http://schemas.openxmlformats.org/officeDocument/2006/relationships" id="2147483653" r:id="R388b9bcff8a14444"/>
+    <p:sldLayoutId xmlns:r="http://schemas.openxmlformats.org/officeDocument/2006/relationships" id="2147483654" r:id="R2c2883c8f49540bd"/>
   </p:sldLayoutIdLst>
   <p:txStyles>
     <p:titleStyle>
@@ -3441,7 +3441,7 @@
           <p:cNvPr id="76" name="">
             <a:extLst xmlns:a="http://schemas.openxmlformats.org/drawingml/2006/main">
               <a:ext uri="{FF2B5EF4-FFF2-40B4-BE49-F238E27FC236}">
-                <a16:creationId xmlns:a16="http://schemas.microsoft.com/office/drawing/2014/main" id="{2FFCBA37-F8D8-413A-A9E5-1B2FBDFA9B5A}"/>
+                <a16:creationId xmlns:a16="http://schemas.microsoft.com/office/drawing/2014/main" id="{FBC9EE69-D9B4-43E6-B0DF-ABEF7A814717}"/>
               </a:ext>
             </a:extLst>
           </p:cNvPr>
@@ -3472,7 +3472,7 @@
           <p:cNvPr id="2" name="한국어 질의로 영어 학술·기술 문서를 검색하는">
             <a:extLst xmlns:a="http://schemas.openxmlformats.org/drawingml/2006/main">
               <a:ext uri="{FF2B5EF4-FFF2-40B4-BE49-F238E27FC236}">
-                <a16:creationId xmlns:a16="http://schemas.microsoft.com/office/drawing/2014/main" id="{CF6A9EFE-9309-41D9-B0E6-08CBC2A0CEB4}"/>
+                <a16:creationId xmlns:a16="http://schemas.microsoft.com/office/drawing/2014/main" id="{2610CEEF-D788-4E59-8D2F-1E55604178E0}"/>
               </a:ext>
             </a:extLst>
           </p:cNvPr>
@@ -3630,7 +3630,7 @@
           <p:cNvPr id="3" name="RAG에서의 HyDE·CAD·SCD 조합 실험">
             <a:extLst xmlns:a="http://schemas.openxmlformats.org/drawingml/2006/main">
               <a:ext uri="{FF2B5EF4-FFF2-40B4-BE49-F238E27FC236}">
-                <a16:creationId xmlns:a16="http://schemas.microsoft.com/office/drawing/2014/main" id="{8229CE57-BF15-49C3-80FE-4CA3BBE844CB}"/>
+                <a16:creationId xmlns:a16="http://schemas.microsoft.com/office/drawing/2014/main" id="{80200B53-05E6-4082-9DDD-06F687D0718E}"/>
               </a:ext>
             </a:extLst>
           </p:cNvPr>
@@ -3788,7 +3788,7 @@
           <p:cNvPr id="4" name="문종건 · 동국대학교 WISE캠퍼스 컴퓨터공학과 · 지도교수 김진석 · 2026.10.15">
             <a:extLst xmlns:a="http://schemas.openxmlformats.org/drawingml/2006/main">
               <a:ext uri="{FF2B5EF4-FFF2-40B4-BE49-F238E27FC236}">
-                <a16:creationId xmlns:a16="http://schemas.microsoft.com/office/drawing/2014/main" id="{8121914F-3FC7-47FC-B553-17AF615186E2}"/>
+                <a16:creationId xmlns:a16="http://schemas.microsoft.com/office/drawing/2014/main" id="{A3B73D07-497E-433F-ACE7-8743EB73ED0D}"/>
               </a:ext>
             </a:extLst>
           </p:cNvPr>
@@ -3946,7 +3946,7 @@
           <p:cNvPr id="5" name="">
             <a:extLst xmlns:a="http://schemas.openxmlformats.org/drawingml/2006/main">
               <a:ext uri="{FF2B5EF4-FFF2-40B4-BE49-F238E27FC236}">
-                <a16:creationId xmlns:a16="http://schemas.microsoft.com/office/drawing/2014/main" id="{98B09A36-D7BA-420F-B178-6486DBFE3C85}"/>
+                <a16:creationId xmlns:a16="http://schemas.microsoft.com/office/drawing/2014/main" id="{4458EC0B-EB3C-470C-808B-2D99A1797D65}"/>
               </a:ext>
             </a:extLst>
           </p:cNvPr>
@@ -3977,7 +3977,7 @@
           <p:cNvPr id="6" name="01 연구 배경과 목적">
             <a:extLst xmlns:a="http://schemas.openxmlformats.org/drawingml/2006/main">
               <a:ext uri="{FF2B5EF4-FFF2-40B4-BE49-F238E27FC236}">
-                <a16:creationId xmlns:a16="http://schemas.microsoft.com/office/drawing/2014/main" id="{A82D139F-A585-4C95-8778-0CA0C6DFB7BF}"/>
+                <a16:creationId xmlns:a16="http://schemas.microsoft.com/office/drawing/2014/main" id="{DA4F9ECA-4C0A-4C34-AB6D-64C9CAE56AC9}"/>
               </a:ext>
             </a:extLst>
           </p:cNvPr>
@@ -4135,7 +4135,7 @@
           <p:cNvPr id="7" name="검색 증강 생성(Retrieval-Augmented Generation, RAG)은 관련 문서 구간을 검색하고 그 텍">
             <a:extLst xmlns:a="http://schemas.openxmlformats.org/drawingml/2006/main">
               <a:ext uri="{FF2B5EF4-FFF2-40B4-BE49-F238E27FC236}">
-                <a16:creationId xmlns:a16="http://schemas.microsoft.com/office/drawing/2014/main" id="{EB6A7530-B94A-4EF1-90B3-61CB5257263A}"/>
+                <a16:creationId xmlns:a16="http://schemas.microsoft.com/office/drawing/2014/main" id="{37732FBB-1D96-498F-B313-57DA14906F71}"/>
               </a:ext>
             </a:extLst>
           </p:cNvPr>
@@ -4316,7 +4316,7 @@
           <p:cNvPr id="8" name="HyDE: 가상 문서 임베딩(Hypothetical Document Embeddings) 가상 문서 검색 입력 구성[">
             <a:extLst xmlns:a="http://schemas.openxmlformats.org/drawingml/2006/main">
               <a:ext uri="{FF2B5EF4-FFF2-40B4-BE49-F238E27FC236}">
-                <a16:creationId xmlns:a16="http://schemas.microsoft.com/office/drawing/2014/main" id="{9AF43210-6670-4D94-A512-60E4E6B87B58}"/>
+                <a16:creationId xmlns:a16="http://schemas.microsoft.com/office/drawing/2014/main" id="{944FFCBD-AE37-4055-AAB2-8BFC02DEADF5}"/>
               </a:ext>
             </a:extLst>
           </p:cNvPr>
@@ -4589,7 +4589,7 @@
           <p:cNvPr id="9" name="한국어 질의–영어 문서 RAG는 검색 어휘 차이, 근거 반영, 영어 출력(언어 이탈)의 문제를 함께 겪는다. 세 기법">
             <a:extLst xmlns:a="http://schemas.openxmlformats.org/drawingml/2006/main">
               <a:ext uri="{FF2B5EF4-FFF2-40B4-BE49-F238E27FC236}">
-                <a16:creationId xmlns:a16="http://schemas.microsoft.com/office/drawing/2014/main" id="{05CB1B7C-BA96-4FBE-9C4D-C6B3BC628399}"/>
+                <a16:creationId xmlns:a16="http://schemas.microsoft.com/office/drawing/2014/main" id="{DC753385-61BF-4AB3-9D4A-37D18A51C0FD}"/>
               </a:ext>
             </a:extLst>
           </p:cNvPr>
@@ -4793,7 +4793,7 @@
           <p:cNvPr id="10" name="">
             <a:extLst xmlns:a="http://schemas.openxmlformats.org/drawingml/2006/main">
               <a:ext uri="{FF2B5EF4-FFF2-40B4-BE49-F238E27FC236}">
-                <a16:creationId xmlns:a16="http://schemas.microsoft.com/office/drawing/2014/main" id="{3029337B-1C3E-4E8A-A20B-25BCA4D2E4F0}"/>
+                <a16:creationId xmlns:a16="http://schemas.microsoft.com/office/drawing/2014/main" id="{B696A5CE-CD46-46D9-BE8E-6C2B1F9CF97D}"/>
               </a:ext>
             </a:extLst>
           </p:cNvPr>
@@ -4824,7 +4824,7 @@
           <p:cNvPr id="11" name="02 Paper-RAG 구조와 기법 적용 위치">
             <a:extLst xmlns:a="http://schemas.openxmlformats.org/drawingml/2006/main">
               <a:ext uri="{FF2B5EF4-FFF2-40B4-BE49-F238E27FC236}">
-                <a16:creationId xmlns:a16="http://schemas.microsoft.com/office/drawing/2014/main" id="{2892CED4-99A6-4385-BD92-D7FDD0883291}"/>
+                <a16:creationId xmlns:a16="http://schemas.microsoft.com/office/drawing/2014/main" id="{2CBC84C6-F3E5-42A8-A4F7-5F3A18326D07}"/>
               </a:ext>
             </a:extLst>
           </p:cNvPr>
@@ -4982,7 +4982,7 @@
           <p:cNvPr id="12" name="Paper-RAG는 실험에 사용한 고정 검색·생성 파이프라인이다.">
             <a:extLst xmlns:a="http://schemas.openxmlformats.org/drawingml/2006/main">
               <a:ext uri="{FF2B5EF4-FFF2-40B4-BE49-F238E27FC236}">
-                <a16:creationId xmlns:a16="http://schemas.microsoft.com/office/drawing/2014/main" id="{13A10CF4-65B0-49FC-A74D-8937610525C9}"/>
+                <a16:creationId xmlns:a16="http://schemas.microsoft.com/office/drawing/2014/main" id="{C3B51E66-7D60-45F4-AB78-3510670A13A0}"/>
               </a:ext>
             </a:extLst>
           </p:cNvPr>
@@ -5140,7 +5140,7 @@
           <p:cNvPr id="13" name="">
             <a:extLst xmlns:a="http://schemas.openxmlformats.org/drawingml/2006/main">
               <a:ext uri="{FF2B5EF4-FFF2-40B4-BE49-F238E27FC236}">
-                <a16:creationId xmlns:a16="http://schemas.microsoft.com/office/drawing/2014/main" id="{BAE41FC7-0000-4C3C-BEB4-DCE88E033285}"/>
+                <a16:creationId xmlns:a16="http://schemas.microsoft.com/office/drawing/2014/main" id="{A65FCA5A-4287-44C9-8343-9DF8A3E03112}"/>
               </a:ext>
             </a:extLst>
           </p:cNvPr>
@@ -5173,7 +5173,7 @@
           <p:cNvPr id="14" name="한국어 질의 HyDE OFF: 원질의 HyDE ON: 영어 번역·가상 문서">
             <a:extLst xmlns:a="http://schemas.openxmlformats.org/drawingml/2006/main">
               <a:ext uri="{FF2B5EF4-FFF2-40B4-BE49-F238E27FC236}">
-                <a16:creationId xmlns:a16="http://schemas.microsoft.com/office/drawing/2014/main" id="{795980B4-227C-42FB-A623-F1056DA6DD85}"/>
+                <a16:creationId xmlns:a16="http://schemas.microsoft.com/office/drawing/2014/main" id="{162ECDEE-8A6D-4409-AC33-ED924EFAF55C}"/>
               </a:ext>
             </a:extLst>
           </p:cNvPr>
@@ -5377,7 +5377,7 @@
           <p:cNvPr id="15" name="">
             <a:extLst xmlns:a="http://schemas.openxmlformats.org/drawingml/2006/main">
               <a:ext uri="{FF2B5EF4-FFF2-40B4-BE49-F238E27FC236}">
-                <a16:creationId xmlns:a16="http://schemas.microsoft.com/office/drawing/2014/main" id="{7DC758B2-E228-43FE-BA10-AECD8326B48E}"/>
+                <a16:creationId xmlns:a16="http://schemas.microsoft.com/office/drawing/2014/main" id="{450BC193-C77A-41C1-A99F-FF84FEA235E2}"/>
               </a:ext>
             </a:extLst>
           </p:cNvPr>
@@ -5410,7 +5410,7 @@
           <p:cNvPr id="16" name="BM25 희소 검색[6] 한국어 원질의 사용">
             <a:extLst xmlns:a="http://schemas.openxmlformats.org/drawingml/2006/main">
               <a:ext uri="{FF2B5EF4-FFF2-40B4-BE49-F238E27FC236}">
-                <a16:creationId xmlns:a16="http://schemas.microsoft.com/office/drawing/2014/main" id="{980EF8C8-B2E1-4568-AB51-E366E17BB52E}"/>
+                <a16:creationId xmlns:a16="http://schemas.microsoft.com/office/drawing/2014/main" id="{573A5BBE-CAE9-4B5D-8908-A66414515B29}"/>
               </a:ext>
             </a:extLst>
           </p:cNvPr>
@@ -5591,7 +5591,7 @@
           <p:cNvPr id="17" name="">
             <a:extLst xmlns:a="http://schemas.openxmlformats.org/drawingml/2006/main">
               <a:ext uri="{FF2B5EF4-FFF2-40B4-BE49-F238E27FC236}">
-                <a16:creationId xmlns:a16="http://schemas.microsoft.com/office/drawing/2014/main" id="{92C85F8A-1885-4837-A756-64BAF5E68915}"/>
+                <a16:creationId xmlns:a16="http://schemas.microsoft.com/office/drawing/2014/main" id="{52A58E73-3E45-44A8-9F94-C2E2FE1EE271}"/>
               </a:ext>
             </a:extLst>
           </p:cNvPr>
@@ -5624,7 +5624,7 @@
           <p:cNvPr id="18" name="BGE-M3 밀집 검색[5]">
             <a:extLst xmlns:a="http://schemas.openxmlformats.org/drawingml/2006/main">
               <a:ext uri="{FF2B5EF4-FFF2-40B4-BE49-F238E27FC236}">
-                <a16:creationId xmlns:a16="http://schemas.microsoft.com/office/drawing/2014/main" id="{E79DB14E-7872-48D6-836E-2E6B3595167E}"/>
+                <a16:creationId xmlns:a16="http://schemas.microsoft.com/office/drawing/2014/main" id="{1BB0A00D-4780-4032-81E2-AFD57E2F775D}"/>
               </a:ext>
             </a:extLst>
           </p:cNvPr>
@@ -5782,7 +5782,7 @@
           <p:cNvPr id="19" name="">
             <a:extLst xmlns:a="http://schemas.openxmlformats.org/drawingml/2006/main">
               <a:ext uri="{FF2B5EF4-FFF2-40B4-BE49-F238E27FC236}">
-                <a16:creationId xmlns:a16="http://schemas.microsoft.com/office/drawing/2014/main" id="{3379877C-BC1F-48A9-A684-457C75D642FE}"/>
+                <a16:creationId xmlns:a16="http://schemas.microsoft.com/office/drawing/2014/main" id="{2C45909D-3951-4C3C-A69C-513F3CADF6DF}"/>
               </a:ext>
             </a:extLst>
           </p:cNvPr>
@@ -5815,7 +5815,7 @@
           <p:cNvPr id="20" name="가중 RRF[7] 0.6 / 0.4, k=60">
             <a:extLst xmlns:a="http://schemas.openxmlformats.org/drawingml/2006/main">
               <a:ext uri="{FF2B5EF4-FFF2-40B4-BE49-F238E27FC236}">
-                <a16:creationId xmlns:a16="http://schemas.microsoft.com/office/drawing/2014/main" id="{5F4E13D4-09F5-4FF5-9ED4-D1107D7FD10C}"/>
+                <a16:creationId xmlns:a16="http://schemas.microsoft.com/office/drawing/2014/main" id="{71A23238-3235-41FB-860A-ED5F13D97006}"/>
               </a:ext>
             </a:extLst>
           </p:cNvPr>
@@ -5996,7 +5996,7 @@
           <p:cNvPr id="21" name="">
             <a:extLst xmlns:a="http://schemas.openxmlformats.org/drawingml/2006/main">
               <a:ext uri="{FF2B5EF4-FFF2-40B4-BE49-F238E27FC236}">
-                <a16:creationId xmlns:a16="http://schemas.microsoft.com/office/drawing/2014/main" id="{4D0EA997-5400-4A4F-A43A-AF16996CC915}"/>
+                <a16:creationId xmlns:a16="http://schemas.microsoft.com/office/drawing/2014/main" id="{64E48D19-85DC-49B7-B949-E03F56682AEC}"/>
               </a:ext>
             </a:extLst>
           </p:cNvPr>
@@ -6028,7 +6028,7 @@
           <p:cNvPr id="22" name="">
             <a:extLst xmlns:a="http://schemas.openxmlformats.org/drawingml/2006/main">
               <a:ext uri="{FF2B5EF4-FFF2-40B4-BE49-F238E27FC236}">
-                <a16:creationId xmlns:a16="http://schemas.microsoft.com/office/drawing/2014/main" id="{26E4E3E8-67ED-45D4-8ED4-C5B5FE70B124}"/>
+                <a16:creationId xmlns:a16="http://schemas.microsoft.com/office/drawing/2014/main" id="{EFE69EC8-9BD8-4501-A8FD-98B7F348EA76}"/>
               </a:ext>
             </a:extLst>
           </p:cNvPr>
@@ -6060,7 +6060,7 @@
           <p:cNvPr id="23" name="">
             <a:extLst xmlns:a="http://schemas.openxmlformats.org/drawingml/2006/main">
               <a:ext uri="{FF2B5EF4-FFF2-40B4-BE49-F238E27FC236}">
-                <a16:creationId xmlns:a16="http://schemas.microsoft.com/office/drawing/2014/main" id="{00541AF2-3412-49F4-93F8-9AE4EFE18C72}"/>
+                <a16:creationId xmlns:a16="http://schemas.microsoft.com/office/drawing/2014/main" id="{AB39E55E-552F-4336-812F-F5D566453ADB}"/>
               </a:ext>
             </a:extLst>
           </p:cNvPr>
@@ -6092,7 +6092,7 @@
           <p:cNvPr id="24" name="">
             <a:extLst xmlns:a="http://schemas.openxmlformats.org/drawingml/2006/main">
               <a:ext uri="{FF2B5EF4-FFF2-40B4-BE49-F238E27FC236}">
-                <a16:creationId xmlns:a16="http://schemas.microsoft.com/office/drawing/2014/main" id="{0336B8BC-4E9A-4C21-9FEB-09AE5EC69971}"/>
+                <a16:creationId xmlns:a16="http://schemas.microsoft.com/office/drawing/2014/main" id="{E87E0602-DD22-4274-94C0-793086A9E58B}"/>
               </a:ext>
             </a:extLst>
           </p:cNvPr>
@@ -6125,7 +6125,7 @@
           <p:cNvPr id="25" name="원질의·구간 쌍 CrossEncoder 재정렬[8][M2] 상위 5개 구간 선택·입력 길이 관리">
             <a:extLst xmlns:a="http://schemas.openxmlformats.org/drawingml/2006/main">
               <a:ext uri="{FF2B5EF4-FFF2-40B4-BE49-F238E27FC236}">
-                <a16:creationId xmlns:a16="http://schemas.microsoft.com/office/drawing/2014/main" id="{9C29ECE3-36F5-48C7-8DBD-F64944535806}"/>
+                <a16:creationId xmlns:a16="http://schemas.microsoft.com/office/drawing/2014/main" id="{D6AB4637-83C2-421A-B357-24D28BFAFE42}"/>
               </a:ext>
             </a:extLst>
           </p:cNvPr>
@@ -6306,7 +6306,7 @@
           <p:cNvPr id="26" name="">
             <a:extLst xmlns:a="http://schemas.openxmlformats.org/drawingml/2006/main">
               <a:ext uri="{FF2B5EF4-FFF2-40B4-BE49-F238E27FC236}">
-                <a16:creationId xmlns:a16="http://schemas.microsoft.com/office/drawing/2014/main" id="{368EC72F-991D-4D8A-8AC6-AB92F94E3C9B}"/>
+                <a16:creationId xmlns:a16="http://schemas.microsoft.com/office/drawing/2014/main" id="{B8B32B50-93A7-407E-B177-15500264552F}"/>
               </a:ext>
             </a:extLst>
           </p:cNvPr>
@@ -6339,7 +6339,7 @@
           <p:cNvPr id="27" name="Mi:dm 2.0 Base Instruct[M1] CAD 로짓 결합 후 SCD 언어별 조정, 최종 답변 생성">
             <a:extLst xmlns:a="http://schemas.openxmlformats.org/drawingml/2006/main">
               <a:ext uri="{FF2B5EF4-FFF2-40B4-BE49-F238E27FC236}">
-                <a16:creationId xmlns:a16="http://schemas.microsoft.com/office/drawing/2014/main" id="{386CB12E-7775-4250-8935-730C1362D5A1}"/>
+                <a16:creationId xmlns:a16="http://schemas.microsoft.com/office/drawing/2014/main" id="{957EF757-9BAD-4FA9-9083-49A49EE7F86F}"/>
               </a:ext>
             </a:extLst>
           </p:cNvPr>
@@ -6520,7 +6520,7 @@
           <p:cNvPr id="28" name="">
             <a:extLst xmlns:a="http://schemas.openxmlformats.org/drawingml/2006/main">
               <a:ext uri="{FF2B5EF4-FFF2-40B4-BE49-F238E27FC236}">
-                <a16:creationId xmlns:a16="http://schemas.microsoft.com/office/drawing/2014/main" id="{D4213171-B882-4476-BE6E-85A35C5523B7}"/>
+                <a16:creationId xmlns:a16="http://schemas.microsoft.com/office/drawing/2014/main" id="{4B35EC58-AFE5-4CF2-AD48-1B2C1A18D245}"/>
               </a:ext>
             </a:extLst>
           </p:cNvPr>
@@ -6552,7 +6552,7 @@
           <p:cNvPr id="29" name="">
             <a:extLst xmlns:a="http://schemas.openxmlformats.org/drawingml/2006/main">
               <a:ext uri="{FF2B5EF4-FFF2-40B4-BE49-F238E27FC236}">
-                <a16:creationId xmlns:a16="http://schemas.microsoft.com/office/drawing/2014/main" id="{5ACECB89-D444-434C-A688-9DEDEF258D10}"/>
+                <a16:creationId xmlns:a16="http://schemas.microsoft.com/office/drawing/2014/main" id="{4B1C5C38-EE42-4CA2-86D5-7B9B54C952F7}"/>
               </a:ext>
             </a:extLst>
           </p:cNvPr>
@@ -6584,7 +6584,7 @@
           <p:cNvPr id="30" name="">
             <a:extLst xmlns:a="http://schemas.openxmlformats.org/drawingml/2006/main">
               <a:ext uri="{FF2B5EF4-FFF2-40B4-BE49-F238E27FC236}">
-                <a16:creationId xmlns:a16="http://schemas.microsoft.com/office/drawing/2014/main" id="{3423C963-8242-4C34-BFA3-ED8F9DB78FAB}"/>
+                <a16:creationId xmlns:a16="http://schemas.microsoft.com/office/drawing/2014/main" id="{42368525-13BF-4A18-ABBB-8D67FB999960}"/>
               </a:ext>
             </a:extLst>
           </p:cNvPr>
@@ -6615,7 +6615,7 @@
           <p:cNvPr id="31" name="03 3요인 완전요인 실험 설계">
             <a:extLst xmlns:a="http://schemas.openxmlformats.org/drawingml/2006/main">
               <a:ext uri="{FF2B5EF4-FFF2-40B4-BE49-F238E27FC236}">
-                <a16:creationId xmlns:a16="http://schemas.microsoft.com/office/drawing/2014/main" id="{4B0C7AC3-600C-46B2-AC18-8E09B2772B53}"/>
+                <a16:creationId xmlns:a16="http://schemas.microsoft.com/office/drawing/2014/main" id="{460122FC-05D0-4FD3-97B4-EA7AB67468C7}"/>
               </a:ext>
             </a:extLst>
           </p:cNvPr>
@@ -6773,7 +6773,7 @@
           <p:cNvPr id="32" name="H=HyDE, C=CAD, S=SCD   0=미적용, 1=적용">
             <a:extLst xmlns:a="http://schemas.openxmlformats.org/drawingml/2006/main">
               <a:ext uri="{FF2B5EF4-FFF2-40B4-BE49-F238E27FC236}">
-                <a16:creationId xmlns:a16="http://schemas.microsoft.com/office/drawing/2014/main" id="{F7296614-64AC-4133-8F1B-7C78554DF43F}"/>
+                <a16:creationId xmlns:a16="http://schemas.microsoft.com/office/drawing/2014/main" id="{25614993-AECC-417E-AD0D-9604E577C342}"/>
               </a:ext>
             </a:extLst>
           </p:cNvPr>
@@ -6931,7 +6931,7 @@
           <p:cNvPr id="33" name="">
             <a:extLst xmlns:a="http://schemas.openxmlformats.org/drawingml/2006/main">
               <a:ext uri="{FF2B5EF4-FFF2-40B4-BE49-F238E27FC236}">
-                <a16:creationId xmlns:a16="http://schemas.microsoft.com/office/drawing/2014/main" id="{CB38EC8E-C0DE-4102-B6A4-FE68EF3AB2AE}"/>
+                <a16:creationId xmlns:a16="http://schemas.microsoft.com/office/drawing/2014/main" id="{EEBEC788-B8DE-4224-812F-EEDF63626049}"/>
               </a:ext>
             </a:extLst>
           </p:cNvPr>
@@ -8461,7 +8461,7 @@
           <p:cNvPr id="34" name="같은 질의 60개 × 8조건 반복측정 = 480개 생성 기록">
             <a:extLst xmlns:a="http://schemas.openxmlformats.org/drawingml/2006/main">
               <a:ext uri="{FF2B5EF4-FFF2-40B4-BE49-F238E27FC236}">
-                <a16:creationId xmlns:a16="http://schemas.microsoft.com/office/drawing/2014/main" id="{C00A9B81-3677-4337-8A34-32E9D8DB4C37}"/>
+                <a16:creationId xmlns:a16="http://schemas.microsoft.com/office/drawing/2014/main" id="{61BA5296-0A5C-4F09-BBA3-AC2079A1B053}"/>
               </a:ext>
             </a:extLst>
           </p:cNvPr>
@@ -8619,7 +8619,7 @@
           <p:cNvPr id="35" name="생성 512토큰, CAD α=0.5, SCD α=1.1·β=0.9·Tstart=5">
             <a:extLst xmlns:a="http://schemas.openxmlformats.org/drawingml/2006/main">
               <a:ext uri="{FF2B5EF4-FFF2-40B4-BE49-F238E27FC236}">
-                <a16:creationId xmlns:a16="http://schemas.microsoft.com/office/drawing/2014/main" id="{31E06A9F-EFAD-4722-A4AA-B2664CBC8179}"/>
+                <a16:creationId xmlns:a16="http://schemas.microsoft.com/office/drawing/2014/main" id="{F2F1E7C6-531F-4FBE-9E71-5500F13CFDD3}"/>
               </a:ext>
             </a:extLst>
           </p:cNvPr>
@@ -8777,7 +8777,7 @@
           <p:cNvPr id="36" name="문서마다 주요 내용을 15개 단위로 요약해 단위별 질의를 작성하고, 총 60개 질의의 원문 페이지·정답 근거·답변 가">
             <a:extLst xmlns:a="http://schemas.openxmlformats.org/drawingml/2006/main">
               <a:ext uri="{FF2B5EF4-FFF2-40B4-BE49-F238E27FC236}">
-                <a16:creationId xmlns:a16="http://schemas.microsoft.com/office/drawing/2014/main" id="{8A5A6229-6977-4288-90AB-2022F9442D7A}"/>
+                <a16:creationId xmlns:a16="http://schemas.microsoft.com/office/drawing/2014/main" id="{F396F52A-1F1D-46A7-821E-61FB3659203C}"/>
               </a:ext>
             </a:extLst>
           </p:cNvPr>
@@ -8958,7 +8958,7 @@
           <p:cNvPr id="37" name="">
             <a:extLst xmlns:a="http://schemas.openxmlformats.org/drawingml/2006/main">
               <a:ext uri="{FF2B5EF4-FFF2-40B4-BE49-F238E27FC236}">
-                <a16:creationId xmlns:a16="http://schemas.microsoft.com/office/drawing/2014/main" id="{6538A734-E8FC-45E0-B051-76F6BE12F661}"/>
+                <a16:creationId xmlns:a16="http://schemas.microsoft.com/office/drawing/2014/main" id="{39B81B0F-A61B-4D01-BAB4-AE13A11613FF}"/>
               </a:ext>
             </a:extLst>
           </p:cNvPr>
@@ -8989,7 +8989,7 @@
           <p:cNvPr id="38" name="04 평가 지표 및 실험·통계 방법">
             <a:extLst xmlns:a="http://schemas.openxmlformats.org/drawingml/2006/main">
               <a:ext uri="{FF2B5EF4-FFF2-40B4-BE49-F238E27FC236}">
-                <a16:creationId xmlns:a16="http://schemas.microsoft.com/office/drawing/2014/main" id="{42350E51-28E2-4290-87E7-5CCC12CF1398}"/>
+                <a16:creationId xmlns:a16="http://schemas.microsoft.com/office/drawing/2014/main" id="{F13765E4-696C-4A33-A059-CF055D095393}"/>
               </a:ext>
             </a:extLst>
           </p:cNvPr>
@@ -9147,7 +9147,7 @@
           <p:cNvPr id="39" name="근거 충실도: 높을수록 검색 결과가 뒷받침하는 답변 주장 비율이 크다. 답변 관련성: 높을수록 답변 기반 질문과 원질">
             <a:extLst xmlns:a="http://schemas.openxmlformats.org/drawingml/2006/main">
               <a:ext uri="{FF2B5EF4-FFF2-40B4-BE49-F238E27FC236}">
-                <a16:creationId xmlns:a16="http://schemas.microsoft.com/office/drawing/2014/main" id="{0FC12234-BB8E-42E8-BDD8-10CCFAE0CF46}"/>
+                <a16:creationId xmlns:a16="http://schemas.microsoft.com/office/drawing/2014/main" id="{636E831F-D874-44D6-BEF6-CE3717F6F7EA}"/>
               </a:ext>
             </a:extLst>
           </p:cNvPr>
@@ -9397,7 +9397,7 @@
           <p:cNvPr id="40" name="품질 관측값은 0~1이다. 차이 = ON − OFF 평균. 한국어 비율 0.700은 70.0%, 차이 +0.218은 ">
             <a:extLst xmlns:a="http://schemas.openxmlformats.org/drawingml/2006/main">
               <a:ext uri="{FF2B5EF4-FFF2-40B4-BE49-F238E27FC236}">
-                <a16:creationId xmlns:a16="http://schemas.microsoft.com/office/drawing/2014/main" id="{052DBE33-B6D7-4FF5-BC2E-FE9919F45C6A}"/>
+                <a16:creationId xmlns:a16="http://schemas.microsoft.com/office/drawing/2014/main" id="{CCA67F45-C41A-4AF0-8CA0-51DC5FFFAA27}"/>
               </a:ext>
             </a:extLst>
           </p:cNvPr>
@@ -9578,7 +9578,7 @@
           <p:cNvPr id="41" name="평가 예시  ext_raptor_011, H0C0S0">
             <a:extLst xmlns:a="http://schemas.openxmlformats.org/drawingml/2006/main">
               <a:ext uri="{FF2B5EF4-FFF2-40B4-BE49-F238E27FC236}">
-                <a16:creationId xmlns:a16="http://schemas.microsoft.com/office/drawing/2014/main" id="{42463BC7-C840-4FFE-9853-E1E98292BC87}"/>
+                <a16:creationId xmlns:a16="http://schemas.microsoft.com/office/drawing/2014/main" id="{264E39CA-EF38-456A-A6CE-17FE94B06767}"/>
               </a:ext>
             </a:extLst>
           </p:cNvPr>
@@ -9736,7 +9736,7 @@
           <p:cNvPr id="42" name="질문: Cinderella 사례의 정성 분석에서 RAPTOR의 tree-based retrieval이 DPR보다 주제">
             <a:extLst xmlns:a="http://schemas.openxmlformats.org/drawingml/2006/main">
               <a:ext uri="{FF2B5EF4-FFF2-40B4-BE49-F238E27FC236}">
-                <a16:creationId xmlns:a16="http://schemas.microsoft.com/office/drawing/2014/main" id="{D3195CCF-9D16-4A11-8D07-41D841788435}"/>
+                <a16:creationId xmlns:a16="http://schemas.microsoft.com/office/drawing/2014/main" id="{F529F920-6248-453D-A5B1-BA94AB1E0F15}"/>
               </a:ext>
             </a:extLst>
           </p:cNvPr>
@@ -9917,7 +9917,7 @@
           <p:cNvPr id="43" name="검색 근거(PDF p.9): “By providing both the original text and higher-l">
             <a:extLst xmlns:a="http://schemas.openxmlformats.org/drawingml/2006/main">
               <a:ext uri="{FF2B5EF4-FFF2-40B4-BE49-F238E27FC236}">
-                <a16:creationId xmlns:a16="http://schemas.microsoft.com/office/drawing/2014/main" id="{8759FD28-866F-42A1-A29E-61ED7741BF01}"/>
+                <a16:creationId xmlns:a16="http://schemas.microsoft.com/office/drawing/2014/main" id="{E7B08066-6E5D-43E1-AE37-CDFFF208AC0F}"/>
               </a:ext>
             </a:extLst>
           </p:cNvPr>
@@ -10121,7 +10121,7 @@
           <p:cNvPr id="44" name="참조 답변 요지(PDF p.20): RAPTOR는 이야기의 주요 부분을, DPR은 이야기의 좁은 일부를 자세히 검색한">
             <a:extLst xmlns:a="http://schemas.openxmlformats.org/drawingml/2006/main">
               <a:ext uri="{FF2B5EF4-FFF2-40B4-BE49-F238E27FC236}">
-                <a16:creationId xmlns:a16="http://schemas.microsoft.com/office/drawing/2014/main" id="{154FEC9A-6A38-417F-9D52-30F629604C78}"/>
+                <a16:creationId xmlns:a16="http://schemas.microsoft.com/office/drawing/2014/main" id="{18964C21-A579-461E-85C4-78CD196A48E4}"/>
               </a:ext>
             </a:extLst>
           </p:cNvPr>
@@ -10302,7 +10302,7 @@
           <p:cNvPr id="45" name="생성 답변 발췌: “질문의 요구사항에 따라 서로 다른 층위(layer)에서 노드를 선택할 수 있습니다.”">
             <a:extLst xmlns:a="http://schemas.openxmlformats.org/drawingml/2006/main">
               <a:ext uri="{FF2B5EF4-FFF2-40B4-BE49-F238E27FC236}">
-                <a16:creationId xmlns:a16="http://schemas.microsoft.com/office/drawing/2014/main" id="{A5843330-FCC8-473E-B9C8-72232576A19E}"/>
+                <a16:creationId xmlns:a16="http://schemas.microsoft.com/office/drawing/2014/main" id="{F4FF1B30-905E-41E8-9D35-86BFC1AE8126}"/>
               </a:ext>
             </a:extLst>
           </p:cNvPr>
@@ -10483,7 +10483,7 @@
           <p:cNvPr id="46" name="충실도 1.000: 추출된 답변 주장을 검색 결과가 모두 지지 관련성 0.937: 답변 기반 질문과 원질문의 평균 의">
             <a:extLst xmlns:a="http://schemas.openxmlformats.org/drawingml/2006/main">
               <a:ext uri="{FF2B5EF4-FFF2-40B4-BE49-F238E27FC236}">
-                <a16:creationId xmlns:a16="http://schemas.microsoft.com/office/drawing/2014/main" id="{C7D6F98D-F8B2-4BCD-8DB6-5D8BD9C181FC}"/>
+                <a16:creationId xmlns:a16="http://schemas.microsoft.com/office/drawing/2014/main" id="{D9557E79-36C3-45EE-9035-27088B2DCE4F}"/>
               </a:ext>
             </a:extLst>
           </p:cNvPr>
@@ -10664,7 +10664,7 @@
           <p:cNvPr id="47" name="평가: RAGAS 0.2.15[10]·gpt-4o·BGE-M3, 저장 답변 평가 평가 언어: S0 영어 / S1 한국">
             <a:extLst xmlns:a="http://schemas.openxmlformats.org/drawingml/2006/main">
               <a:ext uri="{FF2B5EF4-FFF2-40B4-BE49-F238E27FC236}">
-                <a16:creationId xmlns:a16="http://schemas.microsoft.com/office/drawing/2014/main" id="{5071E758-DA13-4CB7-8950-D2EC90A992D2}"/>
+                <a16:creationId xmlns:a16="http://schemas.microsoft.com/office/drawing/2014/main" id="{566075CC-5BCA-4C4A-A538-DD990DCCB5A8}"/>
               </a:ext>
             </a:extLst>
           </p:cNvPr>
@@ -10845,7 +10845,7 @@
           <p:cNvPr id="48" name="반복측정 분산분석(ANOVA)·대응 t-검정, 양측 α=0.05 품질: SCD 상태별 H×C / 한국어 비율·시간: ">
             <a:extLst xmlns:a="http://schemas.openxmlformats.org/drawingml/2006/main">
               <a:ext uri="{FF2B5EF4-FFF2-40B4-BE49-F238E27FC236}">
-                <a16:creationId xmlns:a16="http://schemas.microsoft.com/office/drawing/2014/main" id="{5E57602E-2261-42A2-9DB3-1EFC285C0C68}"/>
+                <a16:creationId xmlns:a16="http://schemas.microsoft.com/office/drawing/2014/main" id="{78EC1220-8A54-4432-877F-E45B099FBD4B}"/>
               </a:ext>
             </a:extLst>
           </p:cNvPr>
@@ -11026,7 +11026,7 @@
           <p:cNvPr id="49" name="">
             <a:extLst xmlns:a="http://schemas.openxmlformats.org/drawingml/2006/main">
               <a:ext uri="{FF2B5EF4-FFF2-40B4-BE49-F238E27FC236}">
-                <a16:creationId xmlns:a16="http://schemas.microsoft.com/office/drawing/2014/main" id="{EAD37014-39C4-4F6D-BAE7-0DECC6DEBAB1}"/>
+                <a16:creationId xmlns:a16="http://schemas.microsoft.com/office/drawing/2014/main" id="{4BC480BD-DCDF-4524-A11F-C9A5BDE99DF8}"/>
               </a:ext>
             </a:extLst>
           </p:cNvPr>
@@ -11057,7 +11057,7 @@
           <p:cNvPr id="50" name="05 조합별 결과와 통계 검정">
             <a:extLst xmlns:a="http://schemas.openxmlformats.org/drawingml/2006/main">
               <a:ext uri="{FF2B5EF4-FFF2-40B4-BE49-F238E27FC236}">
-                <a16:creationId xmlns:a16="http://schemas.microsoft.com/office/drawing/2014/main" id="{17283022-CED4-43EC-A4A4-3DCE02B09C3D}"/>
+                <a16:creationId xmlns:a16="http://schemas.microsoft.com/office/drawing/2014/main" id="{F714C7E8-6361-4130-8482-93B0F4A77427}"/>
               </a:ext>
             </a:extLst>
           </p:cNvPr>
@@ -11215,7 +11215,7 @@
           <p:cNvPr id="51" name="HyDE·CAD·SCD 8조합의 품질·한국어 비율·시간 평균(SD)">
             <a:extLst xmlns:a="http://schemas.openxmlformats.org/drawingml/2006/main">
               <a:ext uri="{FF2B5EF4-FFF2-40B4-BE49-F238E27FC236}">
-                <a16:creationId xmlns:a16="http://schemas.microsoft.com/office/drawing/2014/main" id="{F1BBD6C3-D66C-4D86-B241-5F385271F9FE}"/>
+                <a16:creationId xmlns:a16="http://schemas.microsoft.com/office/drawing/2014/main" id="{EB38499C-7E90-416C-BF49-66DECC10B7F7}"/>
               </a:ext>
             </a:extLst>
           </p:cNvPr>
@@ -11373,7 +11373,7 @@
           <p:cNvPr id="52" name="">
             <a:extLst xmlns:a="http://schemas.openxmlformats.org/drawingml/2006/main">
               <a:ext uri="{FF2B5EF4-FFF2-40B4-BE49-F238E27FC236}">
-                <a16:creationId xmlns:a16="http://schemas.microsoft.com/office/drawing/2014/main" id="{94A0EB5B-A82B-45D7-AF25-903592368B34}"/>
+                <a16:creationId xmlns:a16="http://schemas.microsoft.com/office/drawing/2014/main" id="{1D106931-8371-43A6-93A2-E1402F194973}"/>
               </a:ext>
             </a:extLst>
           </p:cNvPr>
@@ -14733,7 +14733,7 @@
           <p:cNvPr id="53" name="">
             <a:extLst xmlns:a="http://schemas.openxmlformats.org/drawingml/2006/main">
               <a:ext uri="{FF2B5EF4-FFF2-40B4-BE49-F238E27FC236}">
-                <a16:creationId xmlns:a16="http://schemas.microsoft.com/office/drawing/2014/main" id="{AA4F8771-8813-4F9F-A387-3EE67CBB3B7F}"/>
+                <a16:creationId xmlns:a16="http://schemas.microsoft.com/office/drawing/2014/main" id="{45DC1508-9867-417C-BF3C-99A22EBCA065}"/>
               </a:ext>
             </a:extLst>
           </p:cNvPr>
@@ -14764,7 +14764,7 @@
           <p:cNvPr id="54" name="S0: 영어로 평가 / S1: 한국어 번역으로 평가 충실도 H0C1S0 n=58, H0C0S1 n=57, 나머지 n=">
             <a:extLst xmlns:a="http://schemas.openxmlformats.org/drawingml/2006/main">
               <a:ext uri="{FF2B5EF4-FFF2-40B4-BE49-F238E27FC236}">
-                <a16:creationId xmlns:a16="http://schemas.microsoft.com/office/drawing/2014/main" id="{314DD4E3-DD82-4F16-9D78-EC57094DE293}"/>
+                <a16:creationId xmlns:a16="http://schemas.microsoft.com/office/drawing/2014/main" id="{8814ADC1-2079-4018-812F-DFA8344F8042}"/>
               </a:ext>
             </a:extLst>
           </p:cNvPr>
@@ -14968,7 +14968,7 @@
           <p:cNvPr id="55" name="3요인 반복측정 ANOVA  ·  각 효과 df=(1,59)">
             <a:extLst xmlns:a="http://schemas.openxmlformats.org/drawingml/2006/main">
               <a:ext uri="{FF2B5EF4-FFF2-40B4-BE49-F238E27FC236}">
-                <a16:creationId xmlns:a16="http://schemas.microsoft.com/office/drawing/2014/main" id="{6BF9FBDC-A32F-4789-AACC-54C2D48499A7}"/>
+                <a16:creationId xmlns:a16="http://schemas.microsoft.com/office/drawing/2014/main" id="{523B2149-6F87-4389-BFDA-6E964593E23C}"/>
               </a:ext>
             </a:extLst>
           </p:cNvPr>
@@ -15126,7 +15126,7 @@
           <p:cNvPr id="56" name="">
             <a:extLst xmlns:a="http://schemas.openxmlformats.org/drawingml/2006/main">
               <a:ext uri="{FF2B5EF4-FFF2-40B4-BE49-F238E27FC236}">
-                <a16:creationId xmlns:a16="http://schemas.microsoft.com/office/drawing/2014/main" id="{9DDDF60B-3C9A-47EA-83CD-A6842FECA7C9}"/>
+                <a16:creationId xmlns:a16="http://schemas.microsoft.com/office/drawing/2014/main" id="{5CAEBC21-F0E0-4D6A-A3D5-BA19EA533133}"/>
               </a:ext>
             </a:extLst>
           </p:cNvPr>
@@ -16836,10 +16836,10 @@
       </p:graphicFrame>
       <p:sp>
         <p:nvSpPr>
-          <p:cNvPr id="57" name="p&lt;0.05: 한국어 비율 S·H×C* / 실행 시간 H·C·S*·C×S (*유의수준 근처의 탐색적 결과) RAGAS">
+          <p:cNvPr id="57" name="p&lt;0.05: 한국어 비율 S·H×C / 실행 시간 H·C·S·C×S RAGAS H×C 검정은 평가 언어별로 수행했으">
             <a:extLst xmlns:a="http://schemas.openxmlformats.org/drawingml/2006/main">
               <a:ext uri="{FF2B5EF4-FFF2-40B4-BE49-F238E27FC236}">
-                <a16:creationId xmlns:a16="http://schemas.microsoft.com/office/drawing/2014/main" id="{2C380E27-FBC0-4C2D-90F9-B53370C8244B}"/>
+                <a16:creationId xmlns:a16="http://schemas.microsoft.com/office/drawing/2014/main" id="{68415212-689D-4787-B9BC-D11576F36264}"/>
               </a:ext>
             </a:extLst>
           </p:cNvPr>
@@ -16987,7 +16987,7 @@
                 <a:ea typeface="Malgun Gothic"/>
                 <a:cs typeface="Malgun Gothic"/>
               </a:rPr>
-              <a:t>p&lt;0.05: 한국어 비율 S·H×C* / 실행 시간 H·C·S*·C×S (*유의수준 근처의 탐색적 결과)</a:t>
+              <a:t>p&lt;0.05: 한국어 비율 S·H×C / 실행 시간 H·C·S·C×S</a:t>
             </a:r>
           </a:p>
           <a:p xmlns:a="http://schemas.openxmlformats.org/drawingml/2006/main">
@@ -17043,7 +17043,7 @@
           <p:cNvPr id="58" name="기법별 대응 비교  ·  질의별 평균 차이, 양측 검정">
             <a:extLst xmlns:a="http://schemas.openxmlformats.org/drawingml/2006/main">
               <a:ext uri="{FF2B5EF4-FFF2-40B4-BE49-F238E27FC236}">
-                <a16:creationId xmlns:a16="http://schemas.microsoft.com/office/drawing/2014/main" id="{A9FDAFE2-6273-4DDF-8593-E035E82398A3}"/>
+                <a16:creationId xmlns:a16="http://schemas.microsoft.com/office/drawing/2014/main" id="{0A708DCF-AF52-4F8E-A661-5A4B290E7142}"/>
               </a:ext>
             </a:extLst>
           </p:cNvPr>
@@ -17201,7 +17201,7 @@
           <p:cNvPr id="59" name="">
             <a:extLst xmlns:a="http://schemas.openxmlformats.org/drawingml/2006/main">
               <a:ext uri="{FF2B5EF4-FFF2-40B4-BE49-F238E27FC236}">
-                <a16:creationId xmlns:a16="http://schemas.microsoft.com/office/drawing/2014/main" id="{9F6A9977-4B0B-4527-B348-A389D9023DE4}"/>
+                <a16:creationId xmlns:a16="http://schemas.microsoft.com/office/drawing/2014/main" id="{4DAB576C-0F1A-4DFF-A6F6-BA8547566394}"/>
               </a:ext>
             </a:extLst>
           </p:cNvPr>
@@ -18211,10 +18211,10 @@
       </p:graphicFrame>
       <p:sp>
         <p:nvSpPr>
-          <p:cNvPr id="60" name="HyDE: C0S0, CAD: H0S0, SCD: H0의 CAD 상태 평균 p: 다중비교 보정 없는 양측 p, dz:">
+          <p:cNvPr id="60" name="HyDE: C0S0, CAD: H0S0, SCD: H0의 CAD 상태 평균 p: 양측 p, dz: 차이 평균/차이 S">
             <a:extLst xmlns:a="http://schemas.openxmlformats.org/drawingml/2006/main">
               <a:ext uri="{FF2B5EF4-FFF2-40B4-BE49-F238E27FC236}">
-                <a16:creationId xmlns:a16="http://schemas.microsoft.com/office/drawing/2014/main" id="{1E2E695C-A79C-4009-B989-D09346E70F7A}"/>
+                <a16:creationId xmlns:a16="http://schemas.microsoft.com/office/drawing/2014/main" id="{5D6F7B2C-923C-4712-A536-E8560C5EF4F3}"/>
               </a:ext>
             </a:extLst>
           </p:cNvPr>
@@ -18385,7 +18385,7 @@
                 <a:ea typeface="Malgun Gothic"/>
                 <a:cs typeface="Malgun Gothic"/>
               </a:rPr>
-              <a:t>p: 다중비교 보정 없는 양측 p, dz: 차이 평균/차이 SD</a:t>
+              <a:t>p: 양측 p, dz: 차이 평균/차이 SD</a:t>
             </a:r>
           </a:p>
           <a:p xmlns:a="http://schemas.openxmlformats.org/drawingml/2006/main">
@@ -18418,7 +18418,7 @@
           <p:cNvPr id="61" name="">
             <a:extLst xmlns:a="http://schemas.openxmlformats.org/drawingml/2006/main">
               <a:ext uri="{FF2B5EF4-FFF2-40B4-BE49-F238E27FC236}">
-                <a16:creationId xmlns:a16="http://schemas.microsoft.com/office/drawing/2014/main" id="{175C7A03-AEDB-454E-B226-0987C1C27142}"/>
+                <a16:creationId xmlns:a16="http://schemas.microsoft.com/office/drawing/2014/main" id="{C06B35C2-3140-4DE0-ACD6-74441CC8A288}"/>
               </a:ext>
             </a:extLst>
           </p:cNvPr>
@@ -18449,7 +18449,7 @@
           <p:cNvPr id="62" name="06 결과 해석">
             <a:extLst xmlns:a="http://schemas.openxmlformats.org/drawingml/2006/main">
               <a:ext uri="{FF2B5EF4-FFF2-40B4-BE49-F238E27FC236}">
-                <a16:creationId xmlns:a16="http://schemas.microsoft.com/office/drawing/2014/main" id="{7E6AD3EF-65F1-4B1C-9845-DB45F2C9C7B6}"/>
+                <a16:creationId xmlns:a16="http://schemas.microsoft.com/office/drawing/2014/main" id="{96D7BF30-D1F8-4E35-8AE0-48B7ECE309EC}"/>
               </a:ext>
             </a:extLst>
           </p:cNvPr>
@@ -18607,7 +18607,7 @@
           <p:cNvPr id="63" name="HyDE: 기본 조건에서 관련성이 유의하게 높았으나(p=0.029), SCD 적용 조건의 추가 비교에서는 p=0.11">
             <a:extLst xmlns:a="http://schemas.openxmlformats.org/drawingml/2006/main">
               <a:ext uri="{FF2B5EF4-FFF2-40B4-BE49-F238E27FC236}">
-                <a16:creationId xmlns:a16="http://schemas.microsoft.com/office/drawing/2014/main" id="{391FEC8D-D043-4DE0-90DC-C32E507BC223}"/>
+                <a16:creationId xmlns:a16="http://schemas.microsoft.com/office/drawing/2014/main" id="{76584C04-50B2-44D3-89EF-107EA2449487}"/>
               </a:ext>
             </a:extLst>
           </p:cNvPr>
@@ -18857,7 +18857,7 @@
           <p:cNvPr id="64" name="">
             <a:extLst xmlns:a="http://schemas.openxmlformats.org/drawingml/2006/main">
               <a:ext uri="{FF2B5EF4-FFF2-40B4-BE49-F238E27FC236}">
-                <a16:creationId xmlns:a16="http://schemas.microsoft.com/office/drawing/2014/main" id="{1E4E6D9F-FF64-426C-9282-B1292F0EABA8}"/>
+                <a16:creationId xmlns:a16="http://schemas.microsoft.com/office/drawing/2014/main" id="{F7955013-B764-46DF-BDD7-5B0F9107001A}"/>
               </a:ext>
             </a:extLst>
           </p:cNvPr>
@@ -18888,7 +18888,7 @@
           <p:cNvPr id="65" name="07 결론">
             <a:extLst xmlns:a="http://schemas.openxmlformats.org/drawingml/2006/main">
               <a:ext uri="{FF2B5EF4-FFF2-40B4-BE49-F238E27FC236}">
-                <a16:creationId xmlns:a16="http://schemas.microsoft.com/office/drawing/2014/main" id="{2FC9ABC9-3D15-44CE-81B0-0F678545E477}"/>
+                <a16:creationId xmlns:a16="http://schemas.microsoft.com/office/drawing/2014/main" id="{8F9D01A6-2187-443F-BF7A-F7777E08CB39}"/>
               </a:ext>
             </a:extLst>
           </p:cNvPr>
@@ -19046,7 +19046,7 @@
           <p:cNvPr id="66" name="한국어 답변이 필요하면 SCD가 비용이 작은 선택지다. HyDE의 관련성 향상은 기본 조건(C0S0)에서 관측되었고,">
             <a:extLst xmlns:a="http://schemas.openxmlformats.org/drawingml/2006/main">
               <a:ext uri="{FF2B5EF4-FFF2-40B4-BE49-F238E27FC236}">
-                <a16:creationId xmlns:a16="http://schemas.microsoft.com/office/drawing/2014/main" id="{CC87F262-3418-49C9-A3A1-B0D141AA6D2C}"/>
+                <a16:creationId xmlns:a16="http://schemas.microsoft.com/office/drawing/2014/main" id="{D3A283A5-8665-4E04-94AC-FD2237E9D670}"/>
               </a:ext>
             </a:extLst>
           </p:cNvPr>
@@ -19319,7 +19319,7 @@
           <p:cNvPr id="67" name="">
             <a:extLst xmlns:a="http://schemas.openxmlformats.org/drawingml/2006/main">
               <a:ext uri="{FF2B5EF4-FFF2-40B4-BE49-F238E27FC236}">
-                <a16:creationId xmlns:a16="http://schemas.microsoft.com/office/drawing/2014/main" id="{16F16CB1-C36A-4429-A2D3-54C3A5D4D1E3}"/>
+                <a16:creationId xmlns:a16="http://schemas.microsoft.com/office/drawing/2014/main" id="{3E8E2E6C-A17C-4D4E-8C12-704584686269}"/>
               </a:ext>
             </a:extLst>
           </p:cNvPr>
@@ -19350,7 +19350,7 @@
           <p:cNvPr id="68" name="08 주요 참고문헌">
             <a:extLst xmlns:a="http://schemas.openxmlformats.org/drawingml/2006/main">
               <a:ext uri="{FF2B5EF4-FFF2-40B4-BE49-F238E27FC236}">
-                <a16:creationId xmlns:a16="http://schemas.microsoft.com/office/drawing/2014/main" id="{0D58FB18-D2FD-4165-BC4A-9C5E540399ED}"/>
+                <a16:creationId xmlns:a16="http://schemas.microsoft.com/office/drawing/2014/main" id="{B2D6977F-DA73-46B9-9F88-5B217A6B79E3}"/>
               </a:ext>
             </a:extLst>
           </p:cNvPr>
@@ -19508,7 +19508,7 @@
           <p:cNvPr id="69" name="[1] Lewis et al. RAG. NeurIPS, 2020. [2] Gao et al. HyDE. ACL, 20">
             <a:extLst xmlns:a="http://schemas.openxmlformats.org/drawingml/2006/main">
               <a:ext uri="{FF2B5EF4-FFF2-40B4-BE49-F238E27FC236}">
-                <a16:creationId xmlns:a16="http://schemas.microsoft.com/office/drawing/2014/main" id="{E164C105-BD18-402E-BEED-BA5D4C47F0CA}"/>
+                <a16:creationId xmlns:a16="http://schemas.microsoft.com/office/drawing/2014/main" id="{421CF83B-D3B0-4688-A147-F9F4AB5053F9}"/>
               </a:ext>
             </a:extLst>
           </p:cNvPr>
@@ -19712,7 +19712,7 @@
           <p:cNvPr id="70" name="[4] Li et al. Language Drift and SCD. AAAI, 2026. [5] Chen et al.">
             <a:extLst xmlns:a="http://schemas.openxmlformats.org/drawingml/2006/main">
               <a:ext uri="{FF2B5EF4-FFF2-40B4-BE49-F238E27FC236}">
-                <a16:creationId xmlns:a16="http://schemas.microsoft.com/office/drawing/2014/main" id="{8DBAD3F8-7E2B-4D1C-AA17-F50456C97380}"/>
+                <a16:creationId xmlns:a16="http://schemas.microsoft.com/office/drawing/2014/main" id="{996F7F1B-2882-4A97-8C29-6D444B3AA2A9}"/>
               </a:ext>
             </a:extLst>
           </p:cNvPr>
@@ -19916,7 +19916,7 @@
           <p:cNvPr id="71" name="[6] Robertson et al. Okapi at TREC-3. NIST, 1995. [7] Cormack et ">
             <a:extLst xmlns:a="http://schemas.openxmlformats.org/drawingml/2006/main">
               <a:ext uri="{FF2B5EF4-FFF2-40B4-BE49-F238E27FC236}">
-                <a16:creationId xmlns:a16="http://schemas.microsoft.com/office/drawing/2014/main" id="{1CFB87A3-25F3-4CF6-A411-DD9B3CF83386}"/>
+                <a16:creationId xmlns:a16="http://schemas.microsoft.com/office/drawing/2014/main" id="{2A15DEEB-666F-4975-8143-3A35A69A1E3F}"/>
               </a:ext>
             </a:extLst>
           </p:cNvPr>
@@ -20097,7 +20097,7 @@
           <p:cNvPr id="72" name="[8] MacAvaney et al. CEDR. SIGIR, 2019. 공식 모델  [M1] KT Mi:dm 2.0 ">
             <a:extLst xmlns:a="http://schemas.openxmlformats.org/drawingml/2006/main">
               <a:ext uri="{FF2B5EF4-FFF2-40B4-BE49-F238E27FC236}">
-                <a16:creationId xmlns:a16="http://schemas.microsoft.com/office/drawing/2014/main" id="{FA0D2E31-FAB9-45E3-A944-0B1738148418}"/>
+                <a16:creationId xmlns:a16="http://schemas.microsoft.com/office/drawing/2014/main" id="{B45BAEF3-0C63-4BC4-BA2D-6B806FF7615A}"/>
               </a:ext>
             </a:extLst>
           </p:cNvPr>
@@ -20278,7 +20278,7 @@
           <p:cNvPr id="73" name="전체 참고문헌 22편과 모델·자료 출처는 논문의 참고문헌에 수록">
             <a:extLst xmlns:a="http://schemas.openxmlformats.org/drawingml/2006/main">
               <a:ext uri="{FF2B5EF4-FFF2-40B4-BE49-F238E27FC236}">
-                <a16:creationId xmlns:a16="http://schemas.microsoft.com/office/drawing/2014/main" id="{E40C1743-BE43-4DD1-A944-0F2A948C14C0}"/>
+                <a16:creationId xmlns:a16="http://schemas.microsoft.com/office/drawing/2014/main" id="{6DC40DE2-6A21-4D73-B1A0-FF336936B3CE}"/>
               </a:ext>
             </a:extLst>
           </p:cNvPr>
@@ -20436,7 +20436,7 @@
           <p:cNvPr id="74" name="영어 문서 4종 · 질의 60개 · 생성 모델 1종 · 질의별 반복측정">
             <a:extLst xmlns:a="http://schemas.openxmlformats.org/drawingml/2006/main">
               <a:ext uri="{FF2B5EF4-FFF2-40B4-BE49-F238E27FC236}">
-                <a16:creationId xmlns:a16="http://schemas.microsoft.com/office/drawing/2014/main" id="{4DC9917E-4A31-4AA2-B2DC-BE7BBA24E362}"/>
+                <a16:creationId xmlns:a16="http://schemas.microsoft.com/office/drawing/2014/main" id="{43690470-C233-4BA5-9A1C-14A7894D9F04}"/>
               </a:ext>
             </a:extLst>
           </p:cNvPr>
@@ -20594,7 +20594,7 @@
           <p:cNvPr id="75" name="A1 594 × 841 mm">
             <a:extLst xmlns:a="http://schemas.openxmlformats.org/drawingml/2006/main">
               <a:ext uri="{FF2B5EF4-FFF2-40B4-BE49-F238E27FC236}">
-                <a16:creationId xmlns:a16="http://schemas.microsoft.com/office/drawing/2014/main" id="{500B2A7D-9923-424D-B433-089D3CB2B750}"/>
+                <a16:creationId xmlns:a16="http://schemas.microsoft.com/office/drawing/2014/main" id="{449DAA75-75FB-4026-8E11-AB907B4F01C2}"/>
               </a:ext>
             </a:extLst>
           </p:cNvPr>
@@ -20750,7 +20750,7 @@
     </p:spTree>
     <p:extLst>
       <p:ext uri="{BB962C8B-B14F-4D97-AF65-F5344CB8AC3E}">
-        <p14:creationId xmlns:p14="http://schemas.microsoft.com/office/powerpoint/2010/main" val="1873406188"/>
+        <p14:creationId xmlns:p14="http://schemas.microsoft.com/office/powerpoint/2010/main" val="45596023"/>
       </p:ext>
     </p:extLst>
   </p:cSld>

--- a/FINALDOCS/POSTER/FINAL/M_RAG_A1_FINAL_EDITABLE.pptx
+++ b/FINALDOCS/POSTER/FINAL/M_RAG_A1_FINAL_EDITABLE.pptx
@@ -2,13 +2,13 @@
 <file path=ppt/presentation.xml><?xml version="1.0" encoding="utf-8"?>
 <p:presentation xmlns:p="http://schemas.openxmlformats.org/presentationml/2006/main">
   <p:sldMasterIdLst>
-    <p:sldMasterId xmlns:r="http://schemas.openxmlformats.org/officeDocument/2006/relationships" id="2147483648" r:id="R9fd2536a6f6b4f45"/>
+    <p:sldMasterId xmlns:r="http://schemas.openxmlformats.org/officeDocument/2006/relationships" id="2147483648" r:id="Ra2c36bcd48a9477e"/>
   </p:sldMasterIdLst>
   <p:notesMasterIdLst>
-    <p:notesMasterId xmlns:r="http://schemas.openxmlformats.org/officeDocument/2006/relationships" r:id="Raba8f90d88304c22"/>
+    <p:notesMasterId xmlns:r="http://schemas.openxmlformats.org/officeDocument/2006/relationships" r:id="R06343fae3fb64c23"/>
   </p:notesMasterIdLst>
   <p:sldIdLst>
-    <p:sldId xmlns:r="http://schemas.openxmlformats.org/officeDocument/2006/relationships" id="256" r:id="Rd87cafdcd80940b1"/>
+    <p:sldId xmlns:r="http://schemas.openxmlformats.org/officeDocument/2006/relationships" id="256" r:id="R1781b0e238cd45a8"/>
   </p:sldIdLst>
   <p:sldSz cx="21384000" cy="30276000"/>
   <p:notesSz cx="6858000" cy="9144000"/>
@@ -489,7 +489,7 @@
           <p:cNvPr id="3" name="Title">
             <a:extLst xmlns:a="http://schemas.openxmlformats.org/drawingml/2006/main">
               <a:ext uri="{FF2B5EF4-FFF2-40B4-BE49-F238E27FC236}">
-                <a16:creationId xmlns:a16="http://schemas.microsoft.com/office/drawing/2014/main" id="{D832956D-08C3-4827-934F-220576271E5E}"/>
+                <a16:creationId xmlns:a16="http://schemas.microsoft.com/office/drawing/2014/main" id="{75F0FC80-33EF-4042-BD27-217C47BB66FC}"/>
               </a:ext>
             </a:extLst>
           </p:cNvPr>
@@ -718,7 +718,7 @@
           <p:cNvPr id="2" name="Subtitle">
             <a:extLst xmlns:a="http://schemas.openxmlformats.org/drawingml/2006/main">
               <a:ext uri="{FF2B5EF4-FFF2-40B4-BE49-F238E27FC236}">
-                <a16:creationId xmlns:a16="http://schemas.microsoft.com/office/drawing/2014/main" id="{E5356177-0C47-473C-9375-4BD5ECAD057B}"/>
+                <a16:creationId xmlns:a16="http://schemas.microsoft.com/office/drawing/2014/main" id="{5879261E-DE5F-490E-8673-8206B58A1724}"/>
               </a:ext>
             </a:extLst>
           </p:cNvPr>
@@ -964,7 +964,7 @@
           <p:cNvPr id="2" name="Section title">
             <a:extLst xmlns:a="http://schemas.openxmlformats.org/drawingml/2006/main">
               <a:ext uri="{FF2B5EF4-FFF2-40B4-BE49-F238E27FC236}">
-                <a16:creationId xmlns:a16="http://schemas.microsoft.com/office/drawing/2014/main" id="{6A8FDCE7-A4A1-47AE-89B8-BFEB787697D2}"/>
+                <a16:creationId xmlns:a16="http://schemas.microsoft.com/office/drawing/2014/main" id="{6044AF0A-1A94-429A-9D80-F6D58E867412}"/>
               </a:ext>
             </a:extLst>
           </p:cNvPr>
@@ -1210,7 +1210,7 @@
           <p:cNvPr id="3" name="Title">
             <a:extLst xmlns:a="http://schemas.openxmlformats.org/drawingml/2006/main">
               <a:ext uri="{FF2B5EF4-FFF2-40B4-BE49-F238E27FC236}">
-                <a16:creationId xmlns:a16="http://schemas.microsoft.com/office/drawing/2014/main" id="{7E7B6CD9-A567-4EC3-BCED-E8168AF40BAA}"/>
+                <a16:creationId xmlns:a16="http://schemas.microsoft.com/office/drawing/2014/main" id="{3C62F454-E1ED-4642-9A86-050B066F47A7}"/>
               </a:ext>
             </a:extLst>
           </p:cNvPr>
@@ -1439,7 +1439,7 @@
           <p:cNvPr id="2" name="Body">
             <a:extLst xmlns:a="http://schemas.openxmlformats.org/drawingml/2006/main">
               <a:ext uri="{FF2B5EF4-FFF2-40B4-BE49-F238E27FC236}">
-                <a16:creationId xmlns:a16="http://schemas.microsoft.com/office/drawing/2014/main" id="{163F34AF-7718-48EC-AD21-4645F7C0D7A5}"/>
+                <a16:creationId xmlns:a16="http://schemas.microsoft.com/office/drawing/2014/main" id="{BE2662AB-790A-4212-969F-F6A246AE1509}"/>
               </a:ext>
             </a:extLst>
           </p:cNvPr>
@@ -1685,7 +1685,7 @@
           <p:cNvPr id="4" name="Title">
             <a:extLst xmlns:a="http://schemas.openxmlformats.org/drawingml/2006/main">
               <a:ext uri="{FF2B5EF4-FFF2-40B4-BE49-F238E27FC236}">
-                <a16:creationId xmlns:a16="http://schemas.microsoft.com/office/drawing/2014/main" id="{DA253EC0-DF8F-41C3-926A-51E1BD19EE8F}"/>
+                <a16:creationId xmlns:a16="http://schemas.microsoft.com/office/drawing/2014/main" id="{5F9CD04D-6A29-4CCF-B3E1-B345337DCAF3}"/>
               </a:ext>
             </a:extLst>
           </p:cNvPr>
@@ -1914,7 +1914,7 @@
           <p:cNvPr id="2" name="Left column">
             <a:extLst xmlns:a="http://schemas.openxmlformats.org/drawingml/2006/main">
               <a:ext uri="{FF2B5EF4-FFF2-40B4-BE49-F238E27FC236}">
-                <a16:creationId xmlns:a16="http://schemas.microsoft.com/office/drawing/2014/main" id="{1240EE67-E295-4693-91A7-0DBB61A2CBCF}"/>
+                <a16:creationId xmlns:a16="http://schemas.microsoft.com/office/drawing/2014/main" id="{3811E2B2-623A-402D-A036-EA8AF17C4645}"/>
               </a:ext>
             </a:extLst>
           </p:cNvPr>
@@ -2143,7 +2143,7 @@
           <p:cNvPr id="3" name="Right column">
             <a:extLst xmlns:a="http://schemas.openxmlformats.org/drawingml/2006/main">
               <a:ext uri="{FF2B5EF4-FFF2-40B4-BE49-F238E27FC236}">
-                <a16:creationId xmlns:a16="http://schemas.microsoft.com/office/drawing/2014/main" id="{EF174303-D704-4893-AF2F-188D7CB54472}"/>
+                <a16:creationId xmlns:a16="http://schemas.microsoft.com/office/drawing/2014/main" id="{1F2B4204-233D-496B-82C2-FCEEC07520F7}"/>
               </a:ext>
             </a:extLst>
           </p:cNvPr>
@@ -2389,7 +2389,7 @@
           <p:cNvPr id="3" name="Title">
             <a:extLst xmlns:a="http://schemas.openxmlformats.org/drawingml/2006/main">
               <a:ext uri="{FF2B5EF4-FFF2-40B4-BE49-F238E27FC236}">
-                <a16:creationId xmlns:a16="http://schemas.microsoft.com/office/drawing/2014/main" id="{5000D7CC-354A-4FAC-9941-1F897B165FB9}"/>
+                <a16:creationId xmlns:a16="http://schemas.microsoft.com/office/drawing/2014/main" id="{A5697E72-E511-4986-BA80-805A34F6C371}"/>
               </a:ext>
             </a:extLst>
           </p:cNvPr>
@@ -2618,7 +2618,7 @@
           <p:cNvPr id="2" name="Left column">
             <a:extLst xmlns:a="http://schemas.openxmlformats.org/drawingml/2006/main">
               <a:ext uri="{FF2B5EF4-FFF2-40B4-BE49-F238E27FC236}">
-                <a16:creationId xmlns:a16="http://schemas.microsoft.com/office/drawing/2014/main" id="{1D8AF224-8DB7-4DF2-8970-9073A0A0A0E5}"/>
+                <a16:creationId xmlns:a16="http://schemas.microsoft.com/office/drawing/2014/main" id="{3D43CEBD-C7FA-44F0-9F0A-7186832BBF9D}"/>
               </a:ext>
             </a:extLst>
           </p:cNvPr>
@@ -2885,12 +2885,12 @@
   </p:cSld>
   <p:clrMap bg1="lt1" tx1="dk1" bg2="lt2" tx2="dk2" accent1="accent1" accent2="accent2" accent3="accent3" accent4="accent4" accent5="accent5" accent6="accent6" hlink="hlink" folHlink="folHlink"/>
   <p:sldLayoutIdLst>
-    <p:sldLayoutId xmlns:r="http://schemas.openxmlformats.org/officeDocument/2006/relationships" id="2147483649" r:id="Rbe3672cd7726401a"/>
-    <p:sldLayoutId xmlns:r="http://schemas.openxmlformats.org/officeDocument/2006/relationships" id="2147483650" r:id="R4b90d84b3fc04874"/>
-    <p:sldLayoutId xmlns:r="http://schemas.openxmlformats.org/officeDocument/2006/relationships" id="2147483651" r:id="R23cc4dbaab5e41a7"/>
-    <p:sldLayoutId xmlns:r="http://schemas.openxmlformats.org/officeDocument/2006/relationships" id="2147483652" r:id="R0ec99dcb015143ac"/>
-    <p:sldLayoutId xmlns:r="http://schemas.openxmlformats.org/officeDocument/2006/relationships" id="2147483653" r:id="R388b9bcff8a14444"/>
-    <p:sldLayoutId xmlns:r="http://schemas.openxmlformats.org/officeDocument/2006/relationships" id="2147483654" r:id="R2c2883c8f49540bd"/>
+    <p:sldLayoutId xmlns:r="http://schemas.openxmlformats.org/officeDocument/2006/relationships" id="2147483649" r:id="Red1039956fa94ce6"/>
+    <p:sldLayoutId xmlns:r="http://schemas.openxmlformats.org/officeDocument/2006/relationships" id="2147483650" r:id="Re1811be2820c4590"/>
+    <p:sldLayoutId xmlns:r="http://schemas.openxmlformats.org/officeDocument/2006/relationships" id="2147483651" r:id="Ra72ff968aa954554"/>
+    <p:sldLayoutId xmlns:r="http://schemas.openxmlformats.org/officeDocument/2006/relationships" id="2147483652" r:id="R61735ee285bc4135"/>
+    <p:sldLayoutId xmlns:r="http://schemas.openxmlformats.org/officeDocument/2006/relationships" id="2147483653" r:id="Rf484aaf6ff5145fc"/>
+    <p:sldLayoutId xmlns:r="http://schemas.openxmlformats.org/officeDocument/2006/relationships" id="2147483654" r:id="R8ed2df2b2041493f"/>
   </p:sldLayoutIdLst>
   <p:txStyles>
     <p:titleStyle>
@@ -3441,7 +3441,7 @@
           <p:cNvPr id="76" name="">
             <a:extLst xmlns:a="http://schemas.openxmlformats.org/drawingml/2006/main">
               <a:ext uri="{FF2B5EF4-FFF2-40B4-BE49-F238E27FC236}">
-                <a16:creationId xmlns:a16="http://schemas.microsoft.com/office/drawing/2014/main" id="{FBC9EE69-D9B4-43E6-B0DF-ABEF7A814717}"/>
+                <a16:creationId xmlns:a16="http://schemas.microsoft.com/office/drawing/2014/main" id="{E395722E-0320-4928-8250-988BC7EA8D83}"/>
               </a:ext>
             </a:extLst>
           </p:cNvPr>
@@ -3472,7 +3472,7 @@
           <p:cNvPr id="2" name="한국어 질의로 영어 학술·기술 문서를 검색하는">
             <a:extLst xmlns:a="http://schemas.openxmlformats.org/drawingml/2006/main">
               <a:ext uri="{FF2B5EF4-FFF2-40B4-BE49-F238E27FC236}">
-                <a16:creationId xmlns:a16="http://schemas.microsoft.com/office/drawing/2014/main" id="{2610CEEF-D788-4E59-8D2F-1E55604178E0}"/>
+                <a16:creationId xmlns:a16="http://schemas.microsoft.com/office/drawing/2014/main" id="{AB9618D4-BFA7-4F4D-8076-D0E1D2C7611C}"/>
               </a:ext>
             </a:extLst>
           </p:cNvPr>
@@ -3630,7 +3630,7 @@
           <p:cNvPr id="3" name="RAG에서의 HyDE·CAD·SCD 조합 실험">
             <a:extLst xmlns:a="http://schemas.openxmlformats.org/drawingml/2006/main">
               <a:ext uri="{FF2B5EF4-FFF2-40B4-BE49-F238E27FC236}">
-                <a16:creationId xmlns:a16="http://schemas.microsoft.com/office/drawing/2014/main" id="{80200B53-05E6-4082-9DDD-06F687D0718E}"/>
+                <a16:creationId xmlns:a16="http://schemas.microsoft.com/office/drawing/2014/main" id="{ECDAF47B-5C67-44D7-BE8A-84F59BDB4676}"/>
               </a:ext>
             </a:extLst>
           </p:cNvPr>
@@ -3788,7 +3788,7 @@
           <p:cNvPr id="4" name="문종건 · 동국대학교 WISE캠퍼스 컴퓨터공학과 · 지도교수 김진석 · 2026.10.15">
             <a:extLst xmlns:a="http://schemas.openxmlformats.org/drawingml/2006/main">
               <a:ext uri="{FF2B5EF4-FFF2-40B4-BE49-F238E27FC236}">
-                <a16:creationId xmlns:a16="http://schemas.microsoft.com/office/drawing/2014/main" id="{A3B73D07-497E-433F-ACE7-8743EB73ED0D}"/>
+                <a16:creationId xmlns:a16="http://schemas.microsoft.com/office/drawing/2014/main" id="{4297F5BD-F081-4226-8199-39790737565D}"/>
               </a:ext>
             </a:extLst>
           </p:cNvPr>
@@ -3946,7 +3946,7 @@
           <p:cNvPr id="5" name="">
             <a:extLst xmlns:a="http://schemas.openxmlformats.org/drawingml/2006/main">
               <a:ext uri="{FF2B5EF4-FFF2-40B4-BE49-F238E27FC236}">
-                <a16:creationId xmlns:a16="http://schemas.microsoft.com/office/drawing/2014/main" id="{4458EC0B-EB3C-470C-808B-2D99A1797D65}"/>
+                <a16:creationId xmlns:a16="http://schemas.microsoft.com/office/drawing/2014/main" id="{14C471D1-4109-42E2-BBCF-714202F853A4}"/>
               </a:ext>
             </a:extLst>
           </p:cNvPr>
@@ -3977,7 +3977,7 @@
           <p:cNvPr id="6" name="01 연구 배경과 목적">
             <a:extLst xmlns:a="http://schemas.openxmlformats.org/drawingml/2006/main">
               <a:ext uri="{FF2B5EF4-FFF2-40B4-BE49-F238E27FC236}">
-                <a16:creationId xmlns:a16="http://schemas.microsoft.com/office/drawing/2014/main" id="{DA4F9ECA-4C0A-4C34-AB6D-64C9CAE56AC9}"/>
+                <a16:creationId xmlns:a16="http://schemas.microsoft.com/office/drawing/2014/main" id="{E2DA5D83-0888-4563-944F-F26D139B051C}"/>
               </a:ext>
             </a:extLst>
           </p:cNvPr>
@@ -4135,7 +4135,7 @@
           <p:cNvPr id="7" name="검색 증강 생성(Retrieval-Augmented Generation, RAG)은 관련 문서 구간을 검색하고 그 텍">
             <a:extLst xmlns:a="http://schemas.openxmlformats.org/drawingml/2006/main">
               <a:ext uri="{FF2B5EF4-FFF2-40B4-BE49-F238E27FC236}">
-                <a16:creationId xmlns:a16="http://schemas.microsoft.com/office/drawing/2014/main" id="{37732FBB-1D96-498F-B313-57DA14906F71}"/>
+                <a16:creationId xmlns:a16="http://schemas.microsoft.com/office/drawing/2014/main" id="{AC9E3F68-78AB-4EF4-A307-EFE9528A6943}"/>
               </a:ext>
             </a:extLst>
           </p:cNvPr>
@@ -4316,7 +4316,7 @@
           <p:cNvPr id="8" name="HyDE: 가상 문서 임베딩(Hypothetical Document Embeddings) 가상 문서 검색 입력 구성[">
             <a:extLst xmlns:a="http://schemas.openxmlformats.org/drawingml/2006/main">
               <a:ext uri="{FF2B5EF4-FFF2-40B4-BE49-F238E27FC236}">
-                <a16:creationId xmlns:a16="http://schemas.microsoft.com/office/drawing/2014/main" id="{944FFCBD-AE37-4055-AAB2-8BFC02DEADF5}"/>
+                <a16:creationId xmlns:a16="http://schemas.microsoft.com/office/drawing/2014/main" id="{FA53EF0D-05F1-48BE-8ED6-1A5D975CF0CE}"/>
               </a:ext>
             </a:extLst>
           </p:cNvPr>
@@ -4589,7 +4589,7 @@
           <p:cNvPr id="9" name="한국어 질의–영어 문서 RAG는 검색 어휘 차이, 근거 반영, 영어 출력(언어 이탈)의 문제를 함께 겪는다. 세 기법">
             <a:extLst xmlns:a="http://schemas.openxmlformats.org/drawingml/2006/main">
               <a:ext uri="{FF2B5EF4-FFF2-40B4-BE49-F238E27FC236}">
-                <a16:creationId xmlns:a16="http://schemas.microsoft.com/office/drawing/2014/main" id="{DC753385-61BF-4AB3-9D4A-37D18A51C0FD}"/>
+                <a16:creationId xmlns:a16="http://schemas.microsoft.com/office/drawing/2014/main" id="{0ECA771E-89F8-4C64-90F6-8CBAF4EBA409}"/>
               </a:ext>
             </a:extLst>
           </p:cNvPr>
@@ -4793,7 +4793,7 @@
           <p:cNvPr id="10" name="">
             <a:extLst xmlns:a="http://schemas.openxmlformats.org/drawingml/2006/main">
               <a:ext uri="{FF2B5EF4-FFF2-40B4-BE49-F238E27FC236}">
-                <a16:creationId xmlns:a16="http://schemas.microsoft.com/office/drawing/2014/main" id="{B696A5CE-CD46-46D9-BE8E-6C2B1F9CF97D}"/>
+                <a16:creationId xmlns:a16="http://schemas.microsoft.com/office/drawing/2014/main" id="{54279545-A96C-4FC4-97D7-F0D2D431C51B}"/>
               </a:ext>
             </a:extLst>
           </p:cNvPr>
@@ -4824,7 +4824,7 @@
           <p:cNvPr id="11" name="02 Paper-RAG 구조와 기법 적용 위치">
             <a:extLst xmlns:a="http://schemas.openxmlformats.org/drawingml/2006/main">
               <a:ext uri="{FF2B5EF4-FFF2-40B4-BE49-F238E27FC236}">
-                <a16:creationId xmlns:a16="http://schemas.microsoft.com/office/drawing/2014/main" id="{2CBC84C6-F3E5-42A8-A4F7-5F3A18326D07}"/>
+                <a16:creationId xmlns:a16="http://schemas.microsoft.com/office/drawing/2014/main" id="{7A248187-DE65-46BD-A6AC-2BE83F3380C8}"/>
               </a:ext>
             </a:extLst>
           </p:cNvPr>
@@ -4982,7 +4982,7 @@
           <p:cNvPr id="12" name="Paper-RAG는 실험에 사용한 고정 검색·생성 파이프라인이다.">
             <a:extLst xmlns:a="http://schemas.openxmlformats.org/drawingml/2006/main">
               <a:ext uri="{FF2B5EF4-FFF2-40B4-BE49-F238E27FC236}">
-                <a16:creationId xmlns:a16="http://schemas.microsoft.com/office/drawing/2014/main" id="{C3B51E66-7D60-45F4-AB78-3510670A13A0}"/>
+                <a16:creationId xmlns:a16="http://schemas.microsoft.com/office/drawing/2014/main" id="{CEB0B2CA-8A61-4FBE-B1BC-2EB891E55ACA}"/>
               </a:ext>
             </a:extLst>
           </p:cNvPr>
@@ -5140,7 +5140,7 @@
           <p:cNvPr id="13" name="">
             <a:extLst xmlns:a="http://schemas.openxmlformats.org/drawingml/2006/main">
               <a:ext uri="{FF2B5EF4-FFF2-40B4-BE49-F238E27FC236}">
-                <a16:creationId xmlns:a16="http://schemas.microsoft.com/office/drawing/2014/main" id="{A65FCA5A-4287-44C9-8343-9DF8A3E03112}"/>
+                <a16:creationId xmlns:a16="http://schemas.microsoft.com/office/drawing/2014/main" id="{336A3D45-18C9-4C90-BC40-E4CF50E9F6B4}"/>
               </a:ext>
             </a:extLst>
           </p:cNvPr>
@@ -5173,7 +5173,7 @@
           <p:cNvPr id="14" name="한국어 질의 HyDE OFF: 원질의 HyDE ON: 영어 번역·가상 문서">
             <a:extLst xmlns:a="http://schemas.openxmlformats.org/drawingml/2006/main">
               <a:ext uri="{FF2B5EF4-FFF2-40B4-BE49-F238E27FC236}">
-                <a16:creationId xmlns:a16="http://schemas.microsoft.com/office/drawing/2014/main" id="{162ECDEE-8A6D-4409-AC33-ED924EFAF55C}"/>
+                <a16:creationId xmlns:a16="http://schemas.microsoft.com/office/drawing/2014/main" id="{08A5248D-BB03-4DC2-8E7C-2F925D9F8CE1}"/>
               </a:ext>
             </a:extLst>
           </p:cNvPr>
@@ -5377,7 +5377,7 @@
           <p:cNvPr id="15" name="">
             <a:extLst xmlns:a="http://schemas.openxmlformats.org/drawingml/2006/main">
               <a:ext uri="{FF2B5EF4-FFF2-40B4-BE49-F238E27FC236}">
-                <a16:creationId xmlns:a16="http://schemas.microsoft.com/office/drawing/2014/main" id="{450BC193-C77A-41C1-A99F-FF84FEA235E2}"/>
+                <a16:creationId xmlns:a16="http://schemas.microsoft.com/office/drawing/2014/main" id="{EF9178C6-C1DD-4AFA-830B-2335478E0B74}"/>
               </a:ext>
             </a:extLst>
           </p:cNvPr>
@@ -5410,7 +5410,7 @@
           <p:cNvPr id="16" name="BM25 희소 검색[6] 한국어 원질의 사용">
             <a:extLst xmlns:a="http://schemas.openxmlformats.org/drawingml/2006/main">
               <a:ext uri="{FF2B5EF4-FFF2-40B4-BE49-F238E27FC236}">
-                <a16:creationId xmlns:a16="http://schemas.microsoft.com/office/drawing/2014/main" id="{573A5BBE-CAE9-4B5D-8908-A66414515B29}"/>
+                <a16:creationId xmlns:a16="http://schemas.microsoft.com/office/drawing/2014/main" id="{4AB568C2-B6FB-4971-9D7D-1DBEC816F117}"/>
               </a:ext>
             </a:extLst>
           </p:cNvPr>
@@ -5591,7 +5591,7 @@
           <p:cNvPr id="17" name="">
             <a:extLst xmlns:a="http://schemas.openxmlformats.org/drawingml/2006/main">
               <a:ext uri="{FF2B5EF4-FFF2-40B4-BE49-F238E27FC236}">
-                <a16:creationId xmlns:a16="http://schemas.microsoft.com/office/drawing/2014/main" id="{52A58E73-3E45-44A8-9F94-C2E2FE1EE271}"/>
+                <a16:creationId xmlns:a16="http://schemas.microsoft.com/office/drawing/2014/main" id="{4149C74A-5070-4157-BAF7-EC83A59A990F}"/>
               </a:ext>
             </a:extLst>
           </p:cNvPr>
@@ -5624,7 +5624,7 @@
           <p:cNvPr id="18" name="BGE-M3 밀집 검색[5]">
             <a:extLst xmlns:a="http://schemas.openxmlformats.org/drawingml/2006/main">
               <a:ext uri="{FF2B5EF4-FFF2-40B4-BE49-F238E27FC236}">
-                <a16:creationId xmlns:a16="http://schemas.microsoft.com/office/drawing/2014/main" id="{1BB0A00D-4780-4032-81E2-AFD57E2F775D}"/>
+                <a16:creationId xmlns:a16="http://schemas.microsoft.com/office/drawing/2014/main" id="{A9D96583-7E4D-4DBB-AE35-7C8C822516A0}"/>
               </a:ext>
             </a:extLst>
           </p:cNvPr>
@@ -5782,7 +5782,7 @@
           <p:cNvPr id="19" name="">
             <a:extLst xmlns:a="http://schemas.openxmlformats.org/drawingml/2006/main">
               <a:ext uri="{FF2B5EF4-FFF2-40B4-BE49-F238E27FC236}">
-                <a16:creationId xmlns:a16="http://schemas.microsoft.com/office/drawing/2014/main" id="{2C45909D-3951-4C3C-A69C-513F3CADF6DF}"/>
+                <a16:creationId xmlns:a16="http://schemas.microsoft.com/office/drawing/2014/main" id="{CC42528C-4725-435B-AB16-536A67103A58}"/>
               </a:ext>
             </a:extLst>
           </p:cNvPr>
@@ -5815,7 +5815,7 @@
           <p:cNvPr id="20" name="가중 RRF[7] 0.6 / 0.4, k=60">
             <a:extLst xmlns:a="http://schemas.openxmlformats.org/drawingml/2006/main">
               <a:ext uri="{FF2B5EF4-FFF2-40B4-BE49-F238E27FC236}">
-                <a16:creationId xmlns:a16="http://schemas.microsoft.com/office/drawing/2014/main" id="{71A23238-3235-41FB-860A-ED5F13D97006}"/>
+                <a16:creationId xmlns:a16="http://schemas.microsoft.com/office/drawing/2014/main" id="{1679DDD9-8C86-47C7-85C6-84E80F1506E9}"/>
               </a:ext>
             </a:extLst>
           </p:cNvPr>
@@ -5996,7 +5996,7 @@
           <p:cNvPr id="21" name="">
             <a:extLst xmlns:a="http://schemas.openxmlformats.org/drawingml/2006/main">
               <a:ext uri="{FF2B5EF4-FFF2-40B4-BE49-F238E27FC236}">
-                <a16:creationId xmlns:a16="http://schemas.microsoft.com/office/drawing/2014/main" id="{64E48D19-85DC-49B7-B949-E03F56682AEC}"/>
+                <a16:creationId xmlns:a16="http://schemas.microsoft.com/office/drawing/2014/main" id="{3A00CBE0-38EE-455A-A7C9-AE5369A07D28}"/>
               </a:ext>
             </a:extLst>
           </p:cNvPr>
@@ -6028,7 +6028,7 @@
           <p:cNvPr id="22" name="">
             <a:extLst xmlns:a="http://schemas.openxmlformats.org/drawingml/2006/main">
               <a:ext uri="{FF2B5EF4-FFF2-40B4-BE49-F238E27FC236}">
-                <a16:creationId xmlns:a16="http://schemas.microsoft.com/office/drawing/2014/main" id="{EFE69EC8-9BD8-4501-A8FD-98B7F348EA76}"/>
+                <a16:creationId xmlns:a16="http://schemas.microsoft.com/office/drawing/2014/main" id="{14C75861-DBC2-4E0D-B5AE-F74E5A1C27D1}"/>
               </a:ext>
             </a:extLst>
           </p:cNvPr>
@@ -6060,7 +6060,7 @@
           <p:cNvPr id="23" name="">
             <a:extLst xmlns:a="http://schemas.openxmlformats.org/drawingml/2006/main">
               <a:ext uri="{FF2B5EF4-FFF2-40B4-BE49-F238E27FC236}">
-                <a16:creationId xmlns:a16="http://schemas.microsoft.com/office/drawing/2014/main" id="{AB39E55E-552F-4336-812F-F5D566453ADB}"/>
+                <a16:creationId xmlns:a16="http://schemas.microsoft.com/office/drawing/2014/main" id="{2608E98F-1AF5-42D5-910B-0F37B4140B9B}"/>
               </a:ext>
             </a:extLst>
           </p:cNvPr>
@@ -6092,7 +6092,7 @@
           <p:cNvPr id="24" name="">
             <a:extLst xmlns:a="http://schemas.openxmlformats.org/drawingml/2006/main">
               <a:ext uri="{FF2B5EF4-FFF2-40B4-BE49-F238E27FC236}">
-                <a16:creationId xmlns:a16="http://schemas.microsoft.com/office/drawing/2014/main" id="{E87E0602-DD22-4274-94C0-793086A9E58B}"/>
+                <a16:creationId xmlns:a16="http://schemas.microsoft.com/office/drawing/2014/main" id="{B4E5DB06-D7AF-4EA4-AD52-BC72E37608C6}"/>
               </a:ext>
             </a:extLst>
           </p:cNvPr>
@@ -6125,7 +6125,7 @@
           <p:cNvPr id="25" name="원질의·구간 쌍 CrossEncoder 재정렬[8][M2] 상위 5개 구간 선택·입력 길이 관리">
             <a:extLst xmlns:a="http://schemas.openxmlformats.org/drawingml/2006/main">
               <a:ext uri="{FF2B5EF4-FFF2-40B4-BE49-F238E27FC236}">
-                <a16:creationId xmlns:a16="http://schemas.microsoft.com/office/drawing/2014/main" id="{D6AB4637-83C2-421A-B357-24D28BFAFE42}"/>
+                <a16:creationId xmlns:a16="http://schemas.microsoft.com/office/drawing/2014/main" id="{E0C29DD9-3988-4BC3-85A2-FBAFD7EE4E97}"/>
               </a:ext>
             </a:extLst>
           </p:cNvPr>
@@ -6306,7 +6306,7 @@
           <p:cNvPr id="26" name="">
             <a:extLst xmlns:a="http://schemas.openxmlformats.org/drawingml/2006/main">
               <a:ext uri="{FF2B5EF4-FFF2-40B4-BE49-F238E27FC236}">
-                <a16:creationId xmlns:a16="http://schemas.microsoft.com/office/drawing/2014/main" id="{B8B32B50-93A7-407E-B177-15500264552F}"/>
+                <a16:creationId xmlns:a16="http://schemas.microsoft.com/office/drawing/2014/main" id="{F6193B95-3A6C-4CC6-BA9B-D3BE41E109DD}"/>
               </a:ext>
             </a:extLst>
           </p:cNvPr>
@@ -6339,7 +6339,7 @@
           <p:cNvPr id="27" name="Mi:dm 2.0 Base Instruct[M1] CAD 로짓 결합 후 SCD 언어별 조정, 최종 답변 생성">
             <a:extLst xmlns:a="http://schemas.openxmlformats.org/drawingml/2006/main">
               <a:ext uri="{FF2B5EF4-FFF2-40B4-BE49-F238E27FC236}">
-                <a16:creationId xmlns:a16="http://schemas.microsoft.com/office/drawing/2014/main" id="{957EF757-9BAD-4FA9-9083-49A49EE7F86F}"/>
+                <a16:creationId xmlns:a16="http://schemas.microsoft.com/office/drawing/2014/main" id="{74CEE050-1D7B-4011-BFEF-88462673056E}"/>
               </a:ext>
             </a:extLst>
           </p:cNvPr>
@@ -6520,7 +6520,7 @@
           <p:cNvPr id="28" name="">
             <a:extLst xmlns:a="http://schemas.openxmlformats.org/drawingml/2006/main">
               <a:ext uri="{FF2B5EF4-FFF2-40B4-BE49-F238E27FC236}">
-                <a16:creationId xmlns:a16="http://schemas.microsoft.com/office/drawing/2014/main" id="{4B35EC58-AFE5-4CF2-AD48-1B2C1A18D245}"/>
+                <a16:creationId xmlns:a16="http://schemas.microsoft.com/office/drawing/2014/main" id="{925D53B2-A524-4425-8BF7-C7BC158989EE}"/>
               </a:ext>
             </a:extLst>
           </p:cNvPr>
@@ -6552,7 +6552,7 @@
           <p:cNvPr id="29" name="">
             <a:extLst xmlns:a="http://schemas.openxmlformats.org/drawingml/2006/main">
               <a:ext uri="{FF2B5EF4-FFF2-40B4-BE49-F238E27FC236}">
-                <a16:creationId xmlns:a16="http://schemas.microsoft.com/office/drawing/2014/main" id="{4B1C5C38-EE42-4CA2-86D5-7B9B54C952F7}"/>
+                <a16:creationId xmlns:a16="http://schemas.microsoft.com/office/drawing/2014/main" id="{BBD6EE17-7979-41B2-875D-17A8110C23ED}"/>
               </a:ext>
             </a:extLst>
           </p:cNvPr>
@@ -6584,7 +6584,7 @@
           <p:cNvPr id="30" name="">
             <a:extLst xmlns:a="http://schemas.openxmlformats.org/drawingml/2006/main">
               <a:ext uri="{FF2B5EF4-FFF2-40B4-BE49-F238E27FC236}">
-                <a16:creationId xmlns:a16="http://schemas.microsoft.com/office/drawing/2014/main" id="{42368525-13BF-4A18-ABBB-8D67FB999960}"/>
+                <a16:creationId xmlns:a16="http://schemas.microsoft.com/office/drawing/2014/main" id="{324B9920-4910-4CDA-954E-F2EE24659288}"/>
               </a:ext>
             </a:extLst>
           </p:cNvPr>
@@ -6615,7 +6615,7 @@
           <p:cNvPr id="31" name="03 3요인 완전요인 실험 설계">
             <a:extLst xmlns:a="http://schemas.openxmlformats.org/drawingml/2006/main">
               <a:ext uri="{FF2B5EF4-FFF2-40B4-BE49-F238E27FC236}">
-                <a16:creationId xmlns:a16="http://schemas.microsoft.com/office/drawing/2014/main" id="{460122FC-05D0-4FD3-97B4-EA7AB67468C7}"/>
+                <a16:creationId xmlns:a16="http://schemas.microsoft.com/office/drawing/2014/main" id="{7CD99925-E4FC-4C66-BFB2-679BEA53432E}"/>
               </a:ext>
             </a:extLst>
           </p:cNvPr>
@@ -6773,7 +6773,7 @@
           <p:cNvPr id="32" name="H=HyDE, C=CAD, S=SCD   0=미적용, 1=적용">
             <a:extLst xmlns:a="http://schemas.openxmlformats.org/drawingml/2006/main">
               <a:ext uri="{FF2B5EF4-FFF2-40B4-BE49-F238E27FC236}">
-                <a16:creationId xmlns:a16="http://schemas.microsoft.com/office/drawing/2014/main" id="{25614993-AECC-417E-AD0D-9604E577C342}"/>
+                <a16:creationId xmlns:a16="http://schemas.microsoft.com/office/drawing/2014/main" id="{DAC40030-95F2-4374-B49F-F07E1783567E}"/>
               </a:ext>
             </a:extLst>
           </p:cNvPr>
@@ -6931,7 +6931,7 @@
           <p:cNvPr id="33" name="">
             <a:extLst xmlns:a="http://schemas.openxmlformats.org/drawingml/2006/main">
               <a:ext uri="{FF2B5EF4-FFF2-40B4-BE49-F238E27FC236}">
-                <a16:creationId xmlns:a16="http://schemas.microsoft.com/office/drawing/2014/main" id="{EEBEC788-B8DE-4224-812F-EEDF63626049}"/>
+                <a16:creationId xmlns:a16="http://schemas.microsoft.com/office/drawing/2014/main" id="{EDBA6536-99F7-48BA-AD4B-1B7D2FA2ADB7}"/>
               </a:ext>
             </a:extLst>
           </p:cNvPr>
@@ -8461,7 +8461,7 @@
           <p:cNvPr id="34" name="같은 질의 60개 × 8조건 반복측정 = 480개 생성 기록">
             <a:extLst xmlns:a="http://schemas.openxmlformats.org/drawingml/2006/main">
               <a:ext uri="{FF2B5EF4-FFF2-40B4-BE49-F238E27FC236}">
-                <a16:creationId xmlns:a16="http://schemas.microsoft.com/office/drawing/2014/main" id="{61BA5296-0A5C-4F09-BBA3-AC2079A1B053}"/>
+                <a16:creationId xmlns:a16="http://schemas.microsoft.com/office/drawing/2014/main" id="{D1307836-4D2E-497C-9E8F-CFCF5CDB237C}"/>
               </a:ext>
             </a:extLst>
           </p:cNvPr>
@@ -8619,7 +8619,7 @@
           <p:cNvPr id="35" name="생성 512토큰, CAD α=0.5, SCD α=1.1·β=0.9·Tstart=5">
             <a:extLst xmlns:a="http://schemas.openxmlformats.org/drawingml/2006/main">
               <a:ext uri="{FF2B5EF4-FFF2-40B4-BE49-F238E27FC236}">
-                <a16:creationId xmlns:a16="http://schemas.microsoft.com/office/drawing/2014/main" id="{F2F1E7C6-531F-4FBE-9E71-5500F13CFDD3}"/>
+                <a16:creationId xmlns:a16="http://schemas.microsoft.com/office/drawing/2014/main" id="{7367A58D-DB4E-469D-A8B4-92717C3C0EE6}"/>
               </a:ext>
             </a:extLst>
           </p:cNvPr>
@@ -8777,7 +8777,7 @@
           <p:cNvPr id="36" name="문서마다 주요 내용을 15개 단위로 요약해 단위별 질의를 작성하고, 총 60개 질의의 원문 페이지·정답 근거·답변 가">
             <a:extLst xmlns:a="http://schemas.openxmlformats.org/drawingml/2006/main">
               <a:ext uri="{FF2B5EF4-FFF2-40B4-BE49-F238E27FC236}">
-                <a16:creationId xmlns:a16="http://schemas.microsoft.com/office/drawing/2014/main" id="{F396F52A-1F1D-46A7-821E-61FB3659203C}"/>
+                <a16:creationId xmlns:a16="http://schemas.microsoft.com/office/drawing/2014/main" id="{7FF39FDF-F991-41D3-8CAA-0977B3DCD24C}"/>
               </a:ext>
             </a:extLst>
           </p:cNvPr>
@@ -8958,7 +8958,7 @@
           <p:cNvPr id="37" name="">
             <a:extLst xmlns:a="http://schemas.openxmlformats.org/drawingml/2006/main">
               <a:ext uri="{FF2B5EF4-FFF2-40B4-BE49-F238E27FC236}">
-                <a16:creationId xmlns:a16="http://schemas.microsoft.com/office/drawing/2014/main" id="{39B81B0F-A61B-4D01-BAB4-AE13A11613FF}"/>
+                <a16:creationId xmlns:a16="http://schemas.microsoft.com/office/drawing/2014/main" id="{E055367C-74E7-4EFE-AB67-BDC63436E62F}"/>
               </a:ext>
             </a:extLst>
           </p:cNvPr>
@@ -8989,7 +8989,7 @@
           <p:cNvPr id="38" name="04 평가 지표 및 실험·통계 방법">
             <a:extLst xmlns:a="http://schemas.openxmlformats.org/drawingml/2006/main">
               <a:ext uri="{FF2B5EF4-FFF2-40B4-BE49-F238E27FC236}">
-                <a16:creationId xmlns:a16="http://schemas.microsoft.com/office/drawing/2014/main" id="{F13765E4-696C-4A33-A059-CF055D095393}"/>
+                <a16:creationId xmlns:a16="http://schemas.microsoft.com/office/drawing/2014/main" id="{2483ABE8-8E6C-429E-84D9-93D779E4D9D7}"/>
               </a:ext>
             </a:extLst>
           </p:cNvPr>
@@ -9147,7 +9147,7 @@
           <p:cNvPr id="39" name="근거 충실도: 높을수록 검색 결과가 뒷받침하는 답변 주장 비율이 크다. 답변 관련성: 높을수록 답변 기반 질문과 원질">
             <a:extLst xmlns:a="http://schemas.openxmlformats.org/drawingml/2006/main">
               <a:ext uri="{FF2B5EF4-FFF2-40B4-BE49-F238E27FC236}">
-                <a16:creationId xmlns:a16="http://schemas.microsoft.com/office/drawing/2014/main" id="{636E831F-D874-44D6-BEF6-CE3717F6F7EA}"/>
+                <a16:creationId xmlns:a16="http://schemas.microsoft.com/office/drawing/2014/main" id="{9827BE99-BE23-418E-97A9-EE205D0C5A2C}"/>
               </a:ext>
             </a:extLst>
           </p:cNvPr>
@@ -9397,7 +9397,7 @@
           <p:cNvPr id="40" name="품질 관측값은 0~1이다. 차이 = ON − OFF 평균. 한국어 비율 0.700은 70.0%, 차이 +0.218은 ">
             <a:extLst xmlns:a="http://schemas.openxmlformats.org/drawingml/2006/main">
               <a:ext uri="{FF2B5EF4-FFF2-40B4-BE49-F238E27FC236}">
-                <a16:creationId xmlns:a16="http://schemas.microsoft.com/office/drawing/2014/main" id="{CCA67F45-C41A-4AF0-8CA0-51DC5FFFAA27}"/>
+                <a16:creationId xmlns:a16="http://schemas.microsoft.com/office/drawing/2014/main" id="{C99A31BB-4C98-4AA8-8688-6153E15A3411}"/>
               </a:ext>
             </a:extLst>
           </p:cNvPr>
@@ -9578,7 +9578,7 @@
           <p:cNvPr id="41" name="평가 예시  ext_raptor_011, H0C0S0">
             <a:extLst xmlns:a="http://schemas.openxmlformats.org/drawingml/2006/main">
               <a:ext uri="{FF2B5EF4-FFF2-40B4-BE49-F238E27FC236}">
-                <a16:creationId xmlns:a16="http://schemas.microsoft.com/office/drawing/2014/main" id="{264E39CA-EF38-456A-A6CE-17FE94B06767}"/>
+                <a16:creationId xmlns:a16="http://schemas.microsoft.com/office/drawing/2014/main" id="{8DE8B263-2B27-46B0-B574-4E238802A01B}"/>
               </a:ext>
             </a:extLst>
           </p:cNvPr>
@@ -9736,7 +9736,7 @@
           <p:cNvPr id="42" name="질문: Cinderella 사례의 정성 분석에서 RAPTOR의 tree-based retrieval이 DPR보다 주제">
             <a:extLst xmlns:a="http://schemas.openxmlformats.org/drawingml/2006/main">
               <a:ext uri="{FF2B5EF4-FFF2-40B4-BE49-F238E27FC236}">
-                <a16:creationId xmlns:a16="http://schemas.microsoft.com/office/drawing/2014/main" id="{F529F920-6248-453D-A5B1-BA94AB1E0F15}"/>
+                <a16:creationId xmlns:a16="http://schemas.microsoft.com/office/drawing/2014/main" id="{D5B67245-DB24-43E6-AAED-83F0CC6E1173}"/>
               </a:ext>
             </a:extLst>
           </p:cNvPr>
@@ -9917,7 +9917,7 @@
           <p:cNvPr id="43" name="검색 근거(PDF p.9): “By providing both the original text and higher-l">
             <a:extLst xmlns:a="http://schemas.openxmlformats.org/drawingml/2006/main">
               <a:ext uri="{FF2B5EF4-FFF2-40B4-BE49-F238E27FC236}">
-                <a16:creationId xmlns:a16="http://schemas.microsoft.com/office/drawing/2014/main" id="{E7B08066-6E5D-43E1-AE37-CDFFF208AC0F}"/>
+                <a16:creationId xmlns:a16="http://schemas.microsoft.com/office/drawing/2014/main" id="{16E6D16C-43E6-43BC-BA40-FA2D3F7137FD}"/>
               </a:ext>
             </a:extLst>
           </p:cNvPr>
@@ -10121,7 +10121,7 @@
           <p:cNvPr id="44" name="참조 답변 요지(PDF p.20): RAPTOR는 이야기의 주요 부분을, DPR은 이야기의 좁은 일부를 자세히 검색한">
             <a:extLst xmlns:a="http://schemas.openxmlformats.org/drawingml/2006/main">
               <a:ext uri="{FF2B5EF4-FFF2-40B4-BE49-F238E27FC236}">
-                <a16:creationId xmlns:a16="http://schemas.microsoft.com/office/drawing/2014/main" id="{18964C21-A579-461E-85C4-78CD196A48E4}"/>
+                <a16:creationId xmlns:a16="http://schemas.microsoft.com/office/drawing/2014/main" id="{C984E1B1-06F0-4546-AB26-D56DFE55119F}"/>
               </a:ext>
             </a:extLst>
           </p:cNvPr>
@@ -10302,7 +10302,7 @@
           <p:cNvPr id="45" name="생성 답변 발췌: “질문의 요구사항에 따라 서로 다른 층위(layer)에서 노드를 선택할 수 있습니다.”">
             <a:extLst xmlns:a="http://schemas.openxmlformats.org/drawingml/2006/main">
               <a:ext uri="{FF2B5EF4-FFF2-40B4-BE49-F238E27FC236}">
-                <a16:creationId xmlns:a16="http://schemas.microsoft.com/office/drawing/2014/main" id="{F4FF1B30-905E-41E8-9D35-86BFC1AE8126}"/>
+                <a16:creationId xmlns:a16="http://schemas.microsoft.com/office/drawing/2014/main" id="{31FA4CAA-1322-4492-9885-FC87E83A0360}"/>
               </a:ext>
             </a:extLst>
           </p:cNvPr>
@@ -10483,7 +10483,7 @@
           <p:cNvPr id="46" name="충실도 1.000: 추출된 답변 주장을 검색 결과가 모두 지지 관련성 0.937: 답변 기반 질문과 원질문의 평균 의">
             <a:extLst xmlns:a="http://schemas.openxmlformats.org/drawingml/2006/main">
               <a:ext uri="{FF2B5EF4-FFF2-40B4-BE49-F238E27FC236}">
-                <a16:creationId xmlns:a16="http://schemas.microsoft.com/office/drawing/2014/main" id="{D9557E79-36C3-45EE-9035-27088B2DCE4F}"/>
+                <a16:creationId xmlns:a16="http://schemas.microsoft.com/office/drawing/2014/main" id="{8B152D4F-8DF7-4E42-AE91-AE86C32DF585}"/>
               </a:ext>
             </a:extLst>
           </p:cNvPr>
@@ -10664,7 +10664,7 @@
           <p:cNvPr id="47" name="평가: RAGAS 0.2.15[10]·gpt-4o·BGE-M3, 저장 답변 평가 평가 언어: S0 영어 / S1 한국">
             <a:extLst xmlns:a="http://schemas.openxmlformats.org/drawingml/2006/main">
               <a:ext uri="{FF2B5EF4-FFF2-40B4-BE49-F238E27FC236}">
-                <a16:creationId xmlns:a16="http://schemas.microsoft.com/office/drawing/2014/main" id="{566075CC-5BCA-4C4A-A538-DD990DCCB5A8}"/>
+                <a16:creationId xmlns:a16="http://schemas.microsoft.com/office/drawing/2014/main" id="{1CED883F-9B88-4197-8F87-EC16A612D522}"/>
               </a:ext>
             </a:extLst>
           </p:cNvPr>
@@ -10845,7 +10845,7 @@
           <p:cNvPr id="48" name="반복측정 분산분석(ANOVA)·대응 t-검정, 양측 α=0.05 품질: SCD 상태별 H×C / 한국어 비율·시간: ">
             <a:extLst xmlns:a="http://schemas.openxmlformats.org/drawingml/2006/main">
               <a:ext uri="{FF2B5EF4-FFF2-40B4-BE49-F238E27FC236}">
-                <a16:creationId xmlns:a16="http://schemas.microsoft.com/office/drawing/2014/main" id="{78EC1220-8A54-4432-877F-E45B099FBD4B}"/>
+                <a16:creationId xmlns:a16="http://schemas.microsoft.com/office/drawing/2014/main" id="{3CBAC86F-EA9F-4B6E-A065-3779A1B11406}"/>
               </a:ext>
             </a:extLst>
           </p:cNvPr>
@@ -11026,7 +11026,7 @@
           <p:cNvPr id="49" name="">
             <a:extLst xmlns:a="http://schemas.openxmlformats.org/drawingml/2006/main">
               <a:ext uri="{FF2B5EF4-FFF2-40B4-BE49-F238E27FC236}">
-                <a16:creationId xmlns:a16="http://schemas.microsoft.com/office/drawing/2014/main" id="{4BC480BD-DCDF-4524-A11F-C9A5BDE99DF8}"/>
+                <a16:creationId xmlns:a16="http://schemas.microsoft.com/office/drawing/2014/main" id="{F841973D-C4C2-4654-8747-3902723A5438}"/>
               </a:ext>
             </a:extLst>
           </p:cNvPr>
@@ -11057,7 +11057,7 @@
           <p:cNvPr id="50" name="05 조합별 결과와 통계 검정">
             <a:extLst xmlns:a="http://schemas.openxmlformats.org/drawingml/2006/main">
               <a:ext uri="{FF2B5EF4-FFF2-40B4-BE49-F238E27FC236}">
-                <a16:creationId xmlns:a16="http://schemas.microsoft.com/office/drawing/2014/main" id="{F714C7E8-6361-4130-8482-93B0F4A77427}"/>
+                <a16:creationId xmlns:a16="http://schemas.microsoft.com/office/drawing/2014/main" id="{EEB64929-40A4-4038-A628-40DEE23F4DBD}"/>
               </a:ext>
             </a:extLst>
           </p:cNvPr>
@@ -11215,7 +11215,7 @@
           <p:cNvPr id="51" name="HyDE·CAD·SCD 8조합의 품질·한국어 비율·시간 평균(SD)">
             <a:extLst xmlns:a="http://schemas.openxmlformats.org/drawingml/2006/main">
               <a:ext uri="{FF2B5EF4-FFF2-40B4-BE49-F238E27FC236}">
-                <a16:creationId xmlns:a16="http://schemas.microsoft.com/office/drawing/2014/main" id="{EB38499C-7E90-416C-BF49-66DECC10B7F7}"/>
+                <a16:creationId xmlns:a16="http://schemas.microsoft.com/office/drawing/2014/main" id="{18C0E817-91B0-42EA-A32F-DA2D009E1C8B}"/>
               </a:ext>
             </a:extLst>
           </p:cNvPr>
@@ -11373,7 +11373,7 @@
           <p:cNvPr id="52" name="">
             <a:extLst xmlns:a="http://schemas.openxmlformats.org/drawingml/2006/main">
               <a:ext uri="{FF2B5EF4-FFF2-40B4-BE49-F238E27FC236}">
-                <a16:creationId xmlns:a16="http://schemas.microsoft.com/office/drawing/2014/main" id="{1D106931-8371-43A6-93A2-E1402F194973}"/>
+                <a16:creationId xmlns:a16="http://schemas.microsoft.com/office/drawing/2014/main" id="{D4900C09-C005-4EA1-BF88-11EA0CD1433C}"/>
               </a:ext>
             </a:extLst>
           </p:cNvPr>
@@ -14733,7 +14733,7 @@
           <p:cNvPr id="53" name="">
             <a:extLst xmlns:a="http://schemas.openxmlformats.org/drawingml/2006/main">
               <a:ext uri="{FF2B5EF4-FFF2-40B4-BE49-F238E27FC236}">
-                <a16:creationId xmlns:a16="http://schemas.microsoft.com/office/drawing/2014/main" id="{45DC1508-9867-417C-BF3C-99A22EBCA065}"/>
+                <a16:creationId xmlns:a16="http://schemas.microsoft.com/office/drawing/2014/main" id="{3BD22C05-26C4-4437-B932-1A5A5A3EA66F}"/>
               </a:ext>
             </a:extLst>
           </p:cNvPr>
@@ -14764,7 +14764,7 @@
           <p:cNvPr id="54" name="S0: 영어로 평가 / S1: 한국어 번역으로 평가 충실도 H0C1S0 n=58, H0C0S1 n=57, 나머지 n=">
             <a:extLst xmlns:a="http://schemas.openxmlformats.org/drawingml/2006/main">
               <a:ext uri="{FF2B5EF4-FFF2-40B4-BE49-F238E27FC236}">
-                <a16:creationId xmlns:a16="http://schemas.microsoft.com/office/drawing/2014/main" id="{8814ADC1-2079-4018-812F-DFA8344F8042}"/>
+                <a16:creationId xmlns:a16="http://schemas.microsoft.com/office/drawing/2014/main" id="{EBC22191-FA2C-4FD2-A327-A0ABEAEF3868}"/>
               </a:ext>
             </a:extLst>
           </p:cNvPr>
@@ -14968,7 +14968,7 @@
           <p:cNvPr id="55" name="3요인 반복측정 ANOVA  ·  각 효과 df=(1,59)">
             <a:extLst xmlns:a="http://schemas.openxmlformats.org/drawingml/2006/main">
               <a:ext uri="{FF2B5EF4-FFF2-40B4-BE49-F238E27FC236}">
-                <a16:creationId xmlns:a16="http://schemas.microsoft.com/office/drawing/2014/main" id="{523B2149-6F87-4389-BFDA-6E964593E23C}"/>
+                <a16:creationId xmlns:a16="http://schemas.microsoft.com/office/drawing/2014/main" id="{BB6D5BF9-D43F-4F36-B547-2FC61036FBDC}"/>
               </a:ext>
             </a:extLst>
           </p:cNvPr>
@@ -15126,7 +15126,7 @@
           <p:cNvPr id="56" name="">
             <a:extLst xmlns:a="http://schemas.openxmlformats.org/drawingml/2006/main">
               <a:ext uri="{FF2B5EF4-FFF2-40B4-BE49-F238E27FC236}">
-                <a16:creationId xmlns:a16="http://schemas.microsoft.com/office/drawing/2014/main" id="{5CAEBC21-F0E0-4D6A-A3D5-BA19EA533133}"/>
+                <a16:creationId xmlns:a16="http://schemas.microsoft.com/office/drawing/2014/main" id="{ABF09564-B404-4305-868A-67FD2D737F64}"/>
               </a:ext>
             </a:extLst>
           </p:cNvPr>
@@ -16839,7 +16839,7 @@
           <p:cNvPr id="57" name="p&lt;0.05: 한국어 비율 S·H×C / 실행 시간 H·C·S·C×S RAGAS H×C 검정은 평가 언어별로 수행했으">
             <a:extLst xmlns:a="http://schemas.openxmlformats.org/drawingml/2006/main">
               <a:ext uri="{FF2B5EF4-FFF2-40B4-BE49-F238E27FC236}">
-                <a16:creationId xmlns:a16="http://schemas.microsoft.com/office/drawing/2014/main" id="{68415212-689D-4787-B9BC-D11576F36264}"/>
+                <a16:creationId xmlns:a16="http://schemas.microsoft.com/office/drawing/2014/main" id="{38EB2C80-A5C2-40AF-AD3A-E18885C07E41}"/>
               </a:ext>
             </a:extLst>
           </p:cNvPr>
@@ -17043,7 +17043,7 @@
           <p:cNvPr id="58" name="기법별 대응 비교  ·  질의별 평균 차이, 양측 검정">
             <a:extLst xmlns:a="http://schemas.openxmlformats.org/drawingml/2006/main">
               <a:ext uri="{FF2B5EF4-FFF2-40B4-BE49-F238E27FC236}">
-                <a16:creationId xmlns:a16="http://schemas.microsoft.com/office/drawing/2014/main" id="{0A708DCF-AF52-4F8E-A661-5A4B290E7142}"/>
+                <a16:creationId xmlns:a16="http://schemas.microsoft.com/office/drawing/2014/main" id="{9C452A79-733D-446C-93A6-120085116DDA}"/>
               </a:ext>
             </a:extLst>
           </p:cNvPr>
@@ -17201,7 +17201,7 @@
           <p:cNvPr id="59" name="">
             <a:extLst xmlns:a="http://schemas.openxmlformats.org/drawingml/2006/main">
               <a:ext uri="{FF2B5EF4-FFF2-40B4-BE49-F238E27FC236}">
-                <a16:creationId xmlns:a16="http://schemas.microsoft.com/office/drawing/2014/main" id="{4DAB576C-0F1A-4DFF-A6F6-BA8547566394}"/>
+                <a16:creationId xmlns:a16="http://schemas.microsoft.com/office/drawing/2014/main" id="{619E716F-F5B9-48A3-8899-DB884D51EE30}"/>
               </a:ext>
             </a:extLst>
           </p:cNvPr>
@@ -18214,7 +18214,7 @@
           <p:cNvPr id="60" name="HyDE: C0S0, CAD: H0S0, SCD: H0의 CAD 상태 평균 p: 양측 p, dz: 차이 평균/차이 S">
             <a:extLst xmlns:a="http://schemas.openxmlformats.org/drawingml/2006/main">
               <a:ext uri="{FF2B5EF4-FFF2-40B4-BE49-F238E27FC236}">
-                <a16:creationId xmlns:a16="http://schemas.microsoft.com/office/drawing/2014/main" id="{5D6F7B2C-923C-4712-A536-E8560C5EF4F3}"/>
+                <a16:creationId xmlns:a16="http://schemas.microsoft.com/office/drawing/2014/main" id="{D187388D-E0E5-4EB8-95C8-05E889484D8B}"/>
               </a:ext>
             </a:extLst>
           </p:cNvPr>
@@ -18418,7 +18418,7 @@
           <p:cNvPr id="61" name="">
             <a:extLst xmlns:a="http://schemas.openxmlformats.org/drawingml/2006/main">
               <a:ext uri="{FF2B5EF4-FFF2-40B4-BE49-F238E27FC236}">
-                <a16:creationId xmlns:a16="http://schemas.microsoft.com/office/drawing/2014/main" id="{C06B35C2-3140-4DE0-ACD6-74441CC8A288}"/>
+                <a16:creationId xmlns:a16="http://schemas.microsoft.com/office/drawing/2014/main" id="{EA2F5F60-D6C2-4A1F-B4FA-FDEFF5B71B1B}"/>
               </a:ext>
             </a:extLst>
           </p:cNvPr>
@@ -18449,7 +18449,7 @@
           <p:cNvPr id="62" name="06 결과 해석">
             <a:extLst xmlns:a="http://schemas.openxmlformats.org/drawingml/2006/main">
               <a:ext uri="{FF2B5EF4-FFF2-40B4-BE49-F238E27FC236}">
-                <a16:creationId xmlns:a16="http://schemas.microsoft.com/office/drawing/2014/main" id="{96D7BF30-D1F8-4E35-8AE0-48B7ECE309EC}"/>
+                <a16:creationId xmlns:a16="http://schemas.microsoft.com/office/drawing/2014/main" id="{9AAFB2FD-863F-41F1-85F1-E1BCDDCE870F}"/>
               </a:ext>
             </a:extLst>
           </p:cNvPr>
@@ -18607,7 +18607,7 @@
           <p:cNvPr id="63" name="HyDE: 기본 조건에서 관련성이 유의하게 높았으나(p=0.029), SCD 적용 조건의 추가 비교에서는 p=0.11">
             <a:extLst xmlns:a="http://schemas.openxmlformats.org/drawingml/2006/main">
               <a:ext uri="{FF2B5EF4-FFF2-40B4-BE49-F238E27FC236}">
-                <a16:creationId xmlns:a16="http://schemas.microsoft.com/office/drawing/2014/main" id="{76584C04-50B2-44D3-89EF-107EA2449487}"/>
+                <a16:creationId xmlns:a16="http://schemas.microsoft.com/office/drawing/2014/main" id="{2241DB9C-967A-4B2B-AFF2-9703313253E4}"/>
               </a:ext>
             </a:extLst>
           </p:cNvPr>
@@ -18847,7 +18847,7 @@
                 <a:ea typeface="Malgun Gothic"/>
                 <a:cs typeface="Malgun Gothic"/>
               </a:rPr>
-              <a:t>쓰면 CAD의 추가 시간이 약 9초 줄었다(C×S, p&lt;0.001).</a:t>
+              <a:t>쓰면 CAD의 추가 시간이 약 8.8초 줄었다(C×S, p&lt;0.001).</a:t>
             </a:r>
           </a:p>
         </p:txBody>
@@ -18857,7 +18857,7 @@
           <p:cNvPr id="64" name="">
             <a:extLst xmlns:a="http://schemas.openxmlformats.org/drawingml/2006/main">
               <a:ext uri="{FF2B5EF4-FFF2-40B4-BE49-F238E27FC236}">
-                <a16:creationId xmlns:a16="http://schemas.microsoft.com/office/drawing/2014/main" id="{F7955013-B764-46DF-BDD7-5B0F9107001A}"/>
+                <a16:creationId xmlns:a16="http://schemas.microsoft.com/office/drawing/2014/main" id="{6838B24F-5971-45CA-9C51-E7160AB52D8C}"/>
               </a:ext>
             </a:extLst>
           </p:cNvPr>
@@ -18888,7 +18888,7 @@
           <p:cNvPr id="65" name="07 결론">
             <a:extLst xmlns:a="http://schemas.openxmlformats.org/drawingml/2006/main">
               <a:ext uri="{FF2B5EF4-FFF2-40B4-BE49-F238E27FC236}">
-                <a16:creationId xmlns:a16="http://schemas.microsoft.com/office/drawing/2014/main" id="{8F9D01A6-2187-443F-BF7A-F7777E08CB39}"/>
+                <a16:creationId xmlns:a16="http://schemas.microsoft.com/office/drawing/2014/main" id="{718314C9-D4D0-49DA-96CE-635BAF3A5B97}"/>
               </a:ext>
             </a:extLst>
           </p:cNvPr>
@@ -19046,7 +19046,7 @@
           <p:cNvPr id="66" name="한국어 답변이 필요하면 SCD가 비용이 작은 선택지다. HyDE의 관련성 향상은 기본 조건(C0S0)에서 관측되었고,">
             <a:extLst xmlns:a="http://schemas.openxmlformats.org/drawingml/2006/main">
               <a:ext uri="{FF2B5EF4-FFF2-40B4-BE49-F238E27FC236}">
-                <a16:creationId xmlns:a16="http://schemas.microsoft.com/office/drawing/2014/main" id="{D3A283A5-8665-4E04-94AC-FD2237E9D670}"/>
+                <a16:creationId xmlns:a16="http://schemas.microsoft.com/office/drawing/2014/main" id="{8CE915E6-69C5-4058-ADF7-9302F18B843C}"/>
               </a:ext>
             </a:extLst>
           </p:cNvPr>
@@ -19319,7 +19319,7 @@
           <p:cNvPr id="67" name="">
             <a:extLst xmlns:a="http://schemas.openxmlformats.org/drawingml/2006/main">
               <a:ext uri="{FF2B5EF4-FFF2-40B4-BE49-F238E27FC236}">
-                <a16:creationId xmlns:a16="http://schemas.microsoft.com/office/drawing/2014/main" id="{3E8E2E6C-A17C-4D4E-8C12-704584686269}"/>
+                <a16:creationId xmlns:a16="http://schemas.microsoft.com/office/drawing/2014/main" id="{932BC51D-0505-4A2A-BE46-381816F72841}"/>
               </a:ext>
             </a:extLst>
           </p:cNvPr>
@@ -19350,7 +19350,7 @@
           <p:cNvPr id="68" name="08 주요 참고문헌">
             <a:extLst xmlns:a="http://schemas.openxmlformats.org/drawingml/2006/main">
               <a:ext uri="{FF2B5EF4-FFF2-40B4-BE49-F238E27FC236}">
-                <a16:creationId xmlns:a16="http://schemas.microsoft.com/office/drawing/2014/main" id="{B2D6977F-DA73-46B9-9F88-5B217A6B79E3}"/>
+                <a16:creationId xmlns:a16="http://schemas.microsoft.com/office/drawing/2014/main" id="{B9884EFE-C170-45C5-AA20-4229AD5F6467}"/>
               </a:ext>
             </a:extLst>
           </p:cNvPr>
@@ -19508,7 +19508,7 @@
           <p:cNvPr id="69" name="[1] Lewis et al. RAG. NeurIPS, 2020. [2] Gao et al. HyDE. ACL, 20">
             <a:extLst xmlns:a="http://schemas.openxmlformats.org/drawingml/2006/main">
               <a:ext uri="{FF2B5EF4-FFF2-40B4-BE49-F238E27FC236}">
-                <a16:creationId xmlns:a16="http://schemas.microsoft.com/office/drawing/2014/main" id="{421CF83B-D3B0-4688-A147-F9F4AB5053F9}"/>
+                <a16:creationId xmlns:a16="http://schemas.microsoft.com/office/drawing/2014/main" id="{74580B26-B021-426B-98D4-64380D755D33}"/>
               </a:ext>
             </a:extLst>
           </p:cNvPr>
@@ -19712,7 +19712,7 @@
           <p:cNvPr id="70" name="[4] Li et al. Language Drift and SCD. AAAI, 2026. [5] Chen et al.">
             <a:extLst xmlns:a="http://schemas.openxmlformats.org/drawingml/2006/main">
               <a:ext uri="{FF2B5EF4-FFF2-40B4-BE49-F238E27FC236}">
-                <a16:creationId xmlns:a16="http://schemas.microsoft.com/office/drawing/2014/main" id="{996F7F1B-2882-4A97-8C29-6D444B3AA2A9}"/>
+                <a16:creationId xmlns:a16="http://schemas.microsoft.com/office/drawing/2014/main" id="{EC5EEF81-0438-4142-9FD1-6DE96EDA6EAC}"/>
               </a:ext>
             </a:extLst>
           </p:cNvPr>
@@ -19916,7 +19916,7 @@
           <p:cNvPr id="71" name="[6] Robertson et al. Okapi at TREC-3. NIST, 1995. [7] Cormack et ">
             <a:extLst xmlns:a="http://schemas.openxmlformats.org/drawingml/2006/main">
               <a:ext uri="{FF2B5EF4-FFF2-40B4-BE49-F238E27FC236}">
-                <a16:creationId xmlns:a16="http://schemas.microsoft.com/office/drawing/2014/main" id="{2A15DEEB-666F-4975-8143-3A35A69A1E3F}"/>
+                <a16:creationId xmlns:a16="http://schemas.microsoft.com/office/drawing/2014/main" id="{F608A2BD-623A-46AC-AFD5-16A72F73A009}"/>
               </a:ext>
             </a:extLst>
           </p:cNvPr>
@@ -20097,7 +20097,7 @@
           <p:cNvPr id="72" name="[8] MacAvaney et al. CEDR. SIGIR, 2019. 공식 모델  [M1] KT Mi:dm 2.0 ">
             <a:extLst xmlns:a="http://schemas.openxmlformats.org/drawingml/2006/main">
               <a:ext uri="{FF2B5EF4-FFF2-40B4-BE49-F238E27FC236}">
-                <a16:creationId xmlns:a16="http://schemas.microsoft.com/office/drawing/2014/main" id="{B45BAEF3-0C63-4BC4-BA2D-6B806FF7615A}"/>
+                <a16:creationId xmlns:a16="http://schemas.microsoft.com/office/drawing/2014/main" id="{E5D7AFA4-F9A2-4852-9C77-163A96011D22}"/>
               </a:ext>
             </a:extLst>
           </p:cNvPr>
@@ -20278,7 +20278,7 @@
           <p:cNvPr id="73" name="전체 참고문헌 22편과 모델·자료 출처는 논문의 참고문헌에 수록">
             <a:extLst xmlns:a="http://schemas.openxmlformats.org/drawingml/2006/main">
               <a:ext uri="{FF2B5EF4-FFF2-40B4-BE49-F238E27FC236}">
-                <a16:creationId xmlns:a16="http://schemas.microsoft.com/office/drawing/2014/main" id="{6DC40DE2-6A21-4D73-B1A0-FF336936B3CE}"/>
+                <a16:creationId xmlns:a16="http://schemas.microsoft.com/office/drawing/2014/main" id="{2E8E43B5-0B52-4F3C-BE48-BA26BD728596}"/>
               </a:ext>
             </a:extLst>
           </p:cNvPr>
@@ -20436,7 +20436,7 @@
           <p:cNvPr id="74" name="영어 문서 4종 · 질의 60개 · 생성 모델 1종 · 질의별 반복측정">
             <a:extLst xmlns:a="http://schemas.openxmlformats.org/drawingml/2006/main">
               <a:ext uri="{FF2B5EF4-FFF2-40B4-BE49-F238E27FC236}">
-                <a16:creationId xmlns:a16="http://schemas.microsoft.com/office/drawing/2014/main" id="{43690470-C233-4BA5-9A1C-14A7894D9F04}"/>
+                <a16:creationId xmlns:a16="http://schemas.microsoft.com/office/drawing/2014/main" id="{423A4DE1-5A3A-44FC-9820-6DD679F40F64}"/>
               </a:ext>
             </a:extLst>
           </p:cNvPr>
@@ -20594,7 +20594,7 @@
           <p:cNvPr id="75" name="A1 594 × 841 mm">
             <a:extLst xmlns:a="http://schemas.openxmlformats.org/drawingml/2006/main">
               <a:ext uri="{FF2B5EF4-FFF2-40B4-BE49-F238E27FC236}">
-                <a16:creationId xmlns:a16="http://schemas.microsoft.com/office/drawing/2014/main" id="{449DAA75-75FB-4026-8E11-AB907B4F01C2}"/>
+                <a16:creationId xmlns:a16="http://schemas.microsoft.com/office/drawing/2014/main" id="{3906BF05-F89B-453D-ABE6-D29A74124344}"/>
               </a:ext>
             </a:extLst>
           </p:cNvPr>
@@ -20750,7 +20750,7 @@
     </p:spTree>
     <p:extLst>
       <p:ext uri="{BB962C8B-B14F-4D97-AF65-F5344CB8AC3E}">
-        <p14:creationId xmlns:p14="http://schemas.microsoft.com/office/powerpoint/2010/main" val="45596023"/>
+        <p14:creationId xmlns:p14="http://schemas.microsoft.com/office/powerpoint/2010/main" val="920580845"/>
       </p:ext>
     </p:extLst>
   </p:cSld>

--- a/FINALDOCS/POSTER/FINAL/M_RAG_A1_FINAL_EDITABLE.pptx
+++ b/FINALDOCS/POSTER/FINAL/M_RAG_A1_FINAL_EDITABLE.pptx
@@ -5558,8 +5558,8 @@
                 <a:latin typeface="Malgun Gothic"/>
                 <a:ea typeface="Malgun Gothic"/>
               </a:rPr>
-              <a:t>- HyDE: Hypothetical Document Embeddings
-  CAD: Context-Aware Decoding · SCD: Soft Constrained Decoding</a:t>
+              <a:t>- HyDE(Hypothetical Document Embeddings) · CAD(Context-Aware Decoding)
+  SCD(Soft Constrained Decoding)</a:t>
             </a:r>
           </a:p>
         </p:txBody>
@@ -5599,7 +5599,7 @@
                 <a:latin typeface="Malgun Gothic"/>
                 <a:ea typeface="Malgun Gothic"/>
               </a:rPr>
-              <a:t>- 품질 평가 근거: 조건 1~4 영어, 조건 5~8 한국어 번역</a:t>
+              <a:t>- 품질 평가는 조건 1~4는 영어 근거, 조건 5~8은 한국어 번역 근거로 수행</a:t>
             </a:r>
           </a:p>
         </p:txBody>
@@ -6843,92 +6843,22 @@
                 <a:latin typeface="Malgun Gothic"/>
                 <a:ea typeface="Malgun Gothic"/>
               </a:rPr>
-              <a:t>04 질문 유형별 HyDE의 답변 관련성</a:t>
-            </a:r>
-          </a:p>
-        </p:txBody>
-      </p:sp>
-      <p:sp>
-        <p:nvSpPr>
-          <p:cNvPr id="24" name="TextBox 23"/>
-          <p:cNvSpPr txBox="1"/>
-          <p:nvPr/>
-        </p:nvSpPr>
-        <p:spPr>
-          <a:xfrm>
-            <a:off x="10980000" y="4248000"/>
-            <a:ext cx="9612000" cy="288000"/>
-          </a:xfrm>
-          <a:prstGeom prst="rect">
-            <a:avLst/>
-          </a:prstGeom>
-          <a:noFill/>
-        </p:spPr>
-        <p:txBody>
-          <a:bodyPr wrap="square" lIns="0" rIns="0" tIns="0" bIns="0">
-            <a:spAutoFit/>
-          </a:bodyPr>
-          <a:lstStyle/>
-          <a:p>
-            <a:pPr algn="l">
-              <a:lnSpc>
-                <a:spcPct val="115000"/>
-              </a:lnSpc>
-            </a:pPr>
-            <a:r>
-              <a:rPr sz="1700" b="1">
-                <a:solidFill>
-                  <a:srgbClr val="263044"/>
-                </a:solidFill>
-                <a:latin typeface="Malgun Gothic"/>
-                <a:ea typeface="Malgun Gothic"/>
-              </a:rPr>
-              <a:t>영어 근거 평가</a:t>
-            </a:r>
-            <a:r>
-              <a:rPr sz="1700" b="0">
-                <a:solidFill>
-                  <a:srgbClr val="263044"/>
-                </a:solidFill>
-                <a:latin typeface="Malgun Gothic"/>
-                <a:ea typeface="Malgun Gothic"/>
-              </a:rPr>
-              <a:t>(미적용 → HyDE)  ·  </a:t>
-            </a:r>
-            <a:r>
-              <a:rPr sz="1700" b="1">
-                <a:solidFill>
-                  <a:srgbClr val="263044"/>
-                </a:solidFill>
-                <a:latin typeface="Malgun Gothic"/>
-                <a:ea typeface="Malgun Gothic"/>
-              </a:rPr>
-              <a:t>한국어 번역 근거 평가</a:t>
-            </a:r>
-            <a:r>
-              <a:rPr sz="1700" b="0">
-                <a:solidFill>
-                  <a:srgbClr val="263044"/>
-                </a:solidFill>
-                <a:latin typeface="Malgun Gothic"/>
-                <a:ea typeface="Malgun Gothic"/>
-              </a:rPr>
-              <a:t>(SCD → HyDE+SCD)</a:t>
+              <a:t>04 질문 유형별 단일 기법의 변화</a:t>
             </a:r>
           </a:p>
         </p:txBody>
       </p:sp>
       <p:graphicFrame>
         <p:nvGraphicFramePr>
-          <p:cNvPr id="25" name="Table 24"/>
+          <p:cNvPr id="24" name="Table 23"/>
           <p:cNvGraphicFramePr>
             <a:graphicFrameLocks noGrp="1"/>
           </p:cNvGraphicFramePr>
           <p:nvPr/>
         </p:nvGraphicFramePr>
         <p:xfrm>
-          <a:off x="10980000" y="4536000"/>
-          <a:ext cx="9611998" cy="2470764"/>
+          <a:off x="10980000" y="4284000"/>
+          <a:ext cx="9611997" cy="2470764"/>
         </p:xfrm>
         <a:graphic>
           <a:graphicData uri="http://schemas.openxmlformats.org/drawingml/2006/table">
@@ -6937,14 +6867,13 @@
                 <a:tableStyleId>{5940675A-B579-460E-94D1-54222C63F5DA}</a:tableStyleId>
               </a:tblPr>
               <a:tblGrid>
-                <a:gridCol w="1875512"/>
-                <a:gridCol w="937756"/>
-                <a:gridCol w="1172195"/>
-                <a:gridCol w="1125307"/>
-                <a:gridCol w="1125307"/>
-                <a:gridCol w="1078419"/>
-                <a:gridCol w="1172195"/>
-                <a:gridCol w="1125307"/>
+                <a:gridCol w="2017988"/>
+                <a:gridCol w="1274519"/>
+                <a:gridCol w="1168309"/>
+                <a:gridCol w="1274519"/>
+                <a:gridCol w="1168309"/>
+                <a:gridCol w="1540044"/>
+                <a:gridCol w="1168309"/>
               </a:tblGrid>
               <a:tr h="644219">
                 <a:tc>
@@ -7003,7 +6932,7 @@
                           </a:solidFill>
                           <a:latin typeface="Malgun Gothic"/>
                         </a:rPr>
-                        <a:t>질문</a:t>
+                        <a:t>HyDE</a:t>
                       </a:r>
                     </a:p>
                     <a:p>
@@ -7015,7 +6944,7 @@
                           </a:solidFill>
                           <a:latin typeface="Malgun Gothic"/>
                         </a:rPr>
-                        <a:t>수</a:t>
+                        <a:t>관련성</a:t>
                       </a:r>
                     </a:p>
                   </a:txBody>
@@ -7058,40 +6987,9 @@
                           </a:solidFill>
                           <a:latin typeface="Malgun Gothic"/>
                         </a:rPr>
-                        <a:t>미적용</a:t>
-                      </a:r>
-                    </a:p>
-                  </a:txBody>
-                  <a:tcPr marL="57600" marR="57600" marT="21600" marB="21600" anchor="ctr">
-                    <a:solidFill>
-                      <a:srgbClr val="FFFFFF"/>
-                    </a:solidFill>
-                    <a:lnL w="9525">
-                      <a:solidFill>
-                        <a:srgbClr val="777777"/>
-                      </a:solidFill>
-                    </a:lnL>
-                    <a:lnR w="9525">
-                      <a:solidFill>
-                        <a:srgbClr val="777777"/>
-                      </a:solidFill>
-                    </a:lnR>
-                    <a:lnT w="9525">
-                      <a:solidFill>
-                        <a:srgbClr val="777777"/>
-                      </a:solidFill>
-                    </a:lnT>
-                    <a:lnB w="9525">
-                      <a:solidFill>
-                        <a:srgbClr val="777777"/>
-                      </a:solidFill>
-                    </a:lnB>
-                  </a:tcPr>
-                </a:tc>
-                <a:tc>
-                  <a:txBody>
-                    <a:bodyPr wrap="square"/>
-                    <a:lstStyle/>
+                        <a:t>개선</a:t>
+                      </a:r>
+                    </a:p>
                     <a:p>
                       <a:pPr algn="ctr"/>
                       <a:r>
@@ -7101,7 +6999,7 @@
                           </a:solidFill>
                           <a:latin typeface="Malgun Gothic"/>
                         </a:rPr>
-                        <a:t>HyDE</a:t>
+                        <a:t>/악화</a:t>
                       </a:r>
                     </a:p>
                   </a:txBody>
@@ -7144,40 +7042,9 @@
                           </a:solidFill>
                           <a:latin typeface="Malgun Gothic"/>
                         </a:rPr>
-                        <a:t>변화</a:t>
-                      </a:r>
-                    </a:p>
-                  </a:txBody>
-                  <a:tcPr marL="57600" marR="57600" marT="21600" marB="21600" anchor="ctr">
-                    <a:solidFill>
-                      <a:srgbClr val="FFFFFF"/>
-                    </a:solidFill>
-                    <a:lnL w="9525">
-                      <a:solidFill>
-                        <a:srgbClr val="777777"/>
-                      </a:solidFill>
-                    </a:lnL>
-                    <a:lnR w="9525">
-                      <a:solidFill>
-                        <a:srgbClr val="777777"/>
-                      </a:solidFill>
-                    </a:lnR>
-                    <a:lnT w="9525">
-                      <a:solidFill>
-                        <a:srgbClr val="777777"/>
-                      </a:solidFill>
-                    </a:lnT>
-                    <a:lnB w="9525">
-                      <a:solidFill>
-                        <a:srgbClr val="777777"/>
-                      </a:solidFill>
-                    </a:lnB>
-                  </a:tcPr>
-                </a:tc>
-                <a:tc>
-                  <a:txBody>
-                    <a:bodyPr wrap="square"/>
-                    <a:lstStyle/>
+                        <a:t>CAD</a:t>
+                      </a:r>
+                    </a:p>
                     <a:p>
                       <a:pPr algn="ctr"/>
                       <a:r>
@@ -7187,40 +7054,107 @@
                           </a:solidFill>
                           <a:latin typeface="Malgun Gothic"/>
                         </a:rPr>
+                        <a:t>충실도</a:t>
+                      </a:r>
+                    </a:p>
+                  </a:txBody>
+                  <a:tcPr marL="57600" marR="57600" marT="21600" marB="21600" anchor="ctr">
+                    <a:solidFill>
+                      <a:srgbClr val="FFFFFF"/>
+                    </a:solidFill>
+                    <a:lnL w="9525">
+                      <a:solidFill>
+                        <a:srgbClr val="777777"/>
+                      </a:solidFill>
+                    </a:lnL>
+                    <a:lnR w="9525">
+                      <a:solidFill>
+                        <a:srgbClr val="777777"/>
+                      </a:solidFill>
+                    </a:lnR>
+                    <a:lnT w="9525">
+                      <a:solidFill>
+                        <a:srgbClr val="777777"/>
+                      </a:solidFill>
+                    </a:lnT>
+                    <a:lnB w="9525">
+                      <a:solidFill>
+                        <a:srgbClr val="777777"/>
+                      </a:solidFill>
+                    </a:lnB>
+                  </a:tcPr>
+                </a:tc>
+                <a:tc>
+                  <a:txBody>
+                    <a:bodyPr wrap="square"/>
+                    <a:lstStyle/>
+                    <a:p>
+                      <a:pPr algn="ctr"/>
+                      <a:r>
+                        <a:rPr sz="1800" b="1">
+                          <a:solidFill>
+                            <a:srgbClr val="263044"/>
+                          </a:solidFill>
+                          <a:latin typeface="Malgun Gothic"/>
+                        </a:rPr>
+                        <a:t>개선</a:t>
+                      </a:r>
+                    </a:p>
+                    <a:p>
+                      <a:pPr algn="ctr"/>
+                      <a:r>
+                        <a:rPr sz="1800" b="1">
+                          <a:solidFill>
+                            <a:srgbClr val="263044"/>
+                          </a:solidFill>
+                          <a:latin typeface="Malgun Gothic"/>
+                        </a:rPr>
+                        <a:t>/악화</a:t>
+                      </a:r>
+                    </a:p>
+                  </a:txBody>
+                  <a:tcPr marL="57600" marR="57600" marT="21600" marB="21600" anchor="ctr">
+                    <a:solidFill>
+                      <a:srgbClr val="FFFFFF"/>
+                    </a:solidFill>
+                    <a:lnL w="9525">
+                      <a:solidFill>
+                        <a:srgbClr val="777777"/>
+                      </a:solidFill>
+                    </a:lnL>
+                    <a:lnR w="9525">
+                      <a:solidFill>
+                        <a:srgbClr val="777777"/>
+                      </a:solidFill>
+                    </a:lnR>
+                    <a:lnT w="9525">
+                      <a:solidFill>
+                        <a:srgbClr val="777777"/>
+                      </a:solidFill>
+                    </a:lnT>
+                    <a:lnB w="9525">
+                      <a:solidFill>
+                        <a:srgbClr val="777777"/>
+                      </a:solidFill>
+                    </a:lnB>
+                  </a:tcPr>
+                </a:tc>
+                <a:tc>
+                  <a:txBody>
+                    <a:bodyPr wrap="square"/>
+                    <a:lstStyle/>
+                    <a:p>
+                      <a:pPr algn="ctr"/>
+                      <a:r>
+                        <a:rPr sz="1800" b="1">
+                          <a:solidFill>
+                            <a:srgbClr val="263044"/>
+                          </a:solidFill>
+                          <a:latin typeface="Malgun Gothic"/>
+                        </a:rPr>
                         <a:t>SCD</a:t>
                       </a:r>
                     </a:p>
-                  </a:txBody>
-                  <a:tcPr marL="57600" marR="57600" marT="21600" marB="21600" anchor="ctr">
-                    <a:solidFill>
-                      <a:srgbClr val="FFFFFF"/>
-                    </a:solidFill>
-                    <a:lnL w="9525">
-                      <a:solidFill>
-                        <a:srgbClr val="777777"/>
-                      </a:solidFill>
-                    </a:lnL>
-                    <a:lnR w="9525">
-                      <a:solidFill>
-                        <a:srgbClr val="777777"/>
-                      </a:solidFill>
-                    </a:lnR>
-                    <a:lnT w="9525">
-                      <a:solidFill>
-                        <a:srgbClr val="777777"/>
-                      </a:solidFill>
-                    </a:lnT>
-                    <a:lnB w="9525">
-                      <a:solidFill>
-                        <a:srgbClr val="777777"/>
-                      </a:solidFill>
-                    </a:lnB>
-                  </a:tcPr>
-                </a:tc>
-                <a:tc>
-                  <a:txBody>
-                    <a:bodyPr wrap="square"/>
-                    <a:lstStyle/>
                     <a:p>
                       <a:pPr algn="ctr"/>
                       <a:r>
@@ -7230,9 +7164,40 @@
                           </a:solidFill>
                           <a:latin typeface="Malgun Gothic"/>
                         </a:rPr>
-                        <a:t>HyDE</a:t>
-                      </a:r>
-                    </a:p>
+                        <a:t>한국어 비율</a:t>
+                      </a:r>
+                    </a:p>
+                  </a:txBody>
+                  <a:tcPr marL="57600" marR="57600" marT="21600" marB="21600" anchor="ctr">
+                    <a:solidFill>
+                      <a:srgbClr val="FFFFFF"/>
+                    </a:solidFill>
+                    <a:lnL w="9525">
+                      <a:solidFill>
+                        <a:srgbClr val="777777"/>
+                      </a:solidFill>
+                    </a:lnL>
+                    <a:lnR w="9525">
+                      <a:solidFill>
+                        <a:srgbClr val="777777"/>
+                      </a:solidFill>
+                    </a:lnR>
+                    <a:lnT w="9525">
+                      <a:solidFill>
+                        <a:srgbClr val="777777"/>
+                      </a:solidFill>
+                    </a:lnT>
+                    <a:lnB w="9525">
+                      <a:solidFill>
+                        <a:srgbClr val="777777"/>
+                      </a:solidFill>
+                    </a:lnB>
+                  </a:tcPr>
+                </a:tc>
+                <a:tc>
+                  <a:txBody>
+                    <a:bodyPr wrap="square"/>
+                    <a:lstStyle/>
                     <a:p>
                       <a:pPr algn="ctr"/>
                       <a:r>
@@ -7242,40 +7207,9 @@
                           </a:solidFill>
                           <a:latin typeface="Malgun Gothic"/>
                         </a:rPr>
-                        <a:t>+SCD</a:t>
-                      </a:r>
-                    </a:p>
-                  </a:txBody>
-                  <a:tcPr marL="57600" marR="57600" marT="21600" marB="21600" anchor="ctr">
-                    <a:solidFill>
-                      <a:srgbClr val="FFFFFF"/>
-                    </a:solidFill>
-                    <a:lnL w="9525">
-                      <a:solidFill>
-                        <a:srgbClr val="777777"/>
-                      </a:solidFill>
-                    </a:lnL>
-                    <a:lnR w="9525">
-                      <a:solidFill>
-                        <a:srgbClr val="777777"/>
-                      </a:solidFill>
-                    </a:lnR>
-                    <a:lnT w="9525">
-                      <a:solidFill>
-                        <a:srgbClr val="777777"/>
-                      </a:solidFill>
-                    </a:lnT>
-                    <a:lnB w="9525">
-                      <a:solidFill>
-                        <a:srgbClr val="777777"/>
-                      </a:solidFill>
-                    </a:lnB>
-                  </a:tcPr>
-                </a:tc>
-                <a:tc>
-                  <a:txBody>
-                    <a:bodyPr wrap="square"/>
-                    <a:lstStyle/>
+                        <a:t>증가</a:t>
+                      </a:r>
+                    </a:p>
                     <a:p>
                       <a:pPr algn="ctr"/>
                       <a:r>
@@ -7285,7 +7219,7 @@
                           </a:solidFill>
                           <a:latin typeface="Malgun Gothic"/>
                         </a:rPr>
-                        <a:t>변화</a:t>
+                        <a:t>/감소</a:t>
                       </a:r>
                     </a:p>
                   </a:txBody>
@@ -7373,7 +7307,7 @@
                           </a:solidFill>
                           <a:latin typeface="Malgun Gothic"/>
                         </a:rPr>
-                        <a:t>8</a:t>
+                        <a:t>+0.05</a:t>
                       </a:r>
                     </a:p>
                   </a:txBody>
@@ -7416,7 +7350,7 @@
                           </a:solidFill>
                           <a:latin typeface="Malgun Gothic"/>
                         </a:rPr>
-                        <a:t>0.78</a:t>
+                        <a:t>4/1</a:t>
                       </a:r>
                     </a:p>
                   </a:txBody>
@@ -7453,13 +7387,99 @@
                     <a:p>
                       <a:pPr algn="r"/>
                       <a:r>
+                        <a:rPr sz="1800" b="0">
+                          <a:solidFill>
+                            <a:srgbClr val="263044"/>
+                          </a:solidFill>
+                          <a:latin typeface="Malgun Gothic"/>
+                        </a:rPr>
+                        <a:t>0.00</a:t>
+                      </a:r>
+                    </a:p>
+                  </a:txBody>
+                  <a:tcPr marL="57600" marR="57600" marT="21600" marB="21600" anchor="ctr">
+                    <a:solidFill>
+                      <a:srgbClr val="FFFFFF"/>
+                    </a:solidFill>
+                    <a:lnL w="9525">
+                      <a:solidFill>
+                        <a:srgbClr val="777777"/>
+                      </a:solidFill>
+                    </a:lnL>
+                    <a:lnR w="9525">
+                      <a:solidFill>
+                        <a:srgbClr val="777777"/>
+                      </a:solidFill>
+                    </a:lnR>
+                    <a:lnT w="9525">
+                      <a:solidFill>
+                        <a:srgbClr val="777777"/>
+                      </a:solidFill>
+                    </a:lnT>
+                    <a:lnB w="9525">
+                      <a:solidFill>
+                        <a:srgbClr val="777777"/>
+                      </a:solidFill>
+                    </a:lnB>
+                  </a:tcPr>
+                </a:tc>
+                <a:tc>
+                  <a:txBody>
+                    <a:bodyPr wrap="square"/>
+                    <a:lstStyle/>
+                    <a:p>
+                      <a:pPr algn="r"/>
+                      <a:r>
+                        <a:rPr sz="1800" b="0">
+                          <a:solidFill>
+                            <a:srgbClr val="263044"/>
+                          </a:solidFill>
+                          <a:latin typeface="Malgun Gothic"/>
+                        </a:rPr>
+                        <a:t>2/4</a:t>
+                      </a:r>
+                    </a:p>
+                  </a:txBody>
+                  <a:tcPr marL="57600" marR="57600" marT="21600" marB="21600" anchor="ctr">
+                    <a:solidFill>
+                      <a:srgbClr val="FFFFFF"/>
+                    </a:solidFill>
+                    <a:lnL w="9525">
+                      <a:solidFill>
+                        <a:srgbClr val="777777"/>
+                      </a:solidFill>
+                    </a:lnL>
+                    <a:lnR w="9525">
+                      <a:solidFill>
+                        <a:srgbClr val="777777"/>
+                      </a:solidFill>
+                    </a:lnR>
+                    <a:lnT w="9525">
+                      <a:solidFill>
+                        <a:srgbClr val="777777"/>
+                      </a:solidFill>
+                    </a:lnT>
+                    <a:lnB w="9525">
+                      <a:solidFill>
+                        <a:srgbClr val="777777"/>
+                      </a:solidFill>
+                    </a:lnB>
+                  </a:tcPr>
+                </a:tc>
+                <a:tc>
+                  <a:txBody>
+                    <a:bodyPr wrap="square"/>
+                    <a:lstStyle/>
+                    <a:p>
+                      <a:pPr algn="r"/>
+                      <a:r>
                         <a:rPr sz="1800" b="1">
                           <a:solidFill>
                             <a:srgbClr val="263044"/>
                           </a:solidFill>
                           <a:latin typeface="Malgun Gothic"/>
                         </a:rPr>
-                        <a:t>0.82</a:t>
+                        <a:t>+0.28</a:t>
                       </a:r>
                     </a:p>
                   </a:txBody>
@@ -7502,136 +7522,7 @@
                           </a:solidFill>
                           <a:latin typeface="Malgun Gothic"/>
                         </a:rPr>
-                        <a:t>+0.05</a:t>
-                      </a:r>
-                    </a:p>
-                  </a:txBody>
-                  <a:tcPr marL="57600" marR="57600" marT="21600" marB="21600" anchor="ctr">
-                    <a:solidFill>
-                      <a:srgbClr val="FFFFFF"/>
-                    </a:solidFill>
-                    <a:lnL w="9525">
-                      <a:solidFill>
-                        <a:srgbClr val="777777"/>
-                      </a:solidFill>
-                    </a:lnL>
-                    <a:lnR w="9525">
-                      <a:solidFill>
-                        <a:srgbClr val="777777"/>
-                      </a:solidFill>
-                    </a:lnR>
-                    <a:lnT w="9525">
-                      <a:solidFill>
-                        <a:srgbClr val="777777"/>
-                      </a:solidFill>
-                    </a:lnT>
-                    <a:lnB w="9525">
-                      <a:solidFill>
-                        <a:srgbClr val="777777"/>
-                      </a:solidFill>
-                    </a:lnB>
-                  </a:tcPr>
-                </a:tc>
-                <a:tc>
-                  <a:txBody>
-                    <a:bodyPr wrap="square"/>
-                    <a:lstStyle/>
-                    <a:p>
-                      <a:pPr algn="r"/>
-                      <a:r>
-                        <a:rPr sz="1800" b="0">
-                          <a:solidFill>
-                            <a:srgbClr val="263044"/>
-                          </a:solidFill>
-                          <a:latin typeface="Malgun Gothic"/>
-                        </a:rPr>
-                        <a:t>0.70</a:t>
-                      </a:r>
-                    </a:p>
-                  </a:txBody>
-                  <a:tcPr marL="57600" marR="57600" marT="21600" marB="21600" anchor="ctr">
-                    <a:solidFill>
-                      <a:srgbClr val="FFFFFF"/>
-                    </a:solidFill>
-                    <a:lnL w="9525">
-                      <a:solidFill>
-                        <a:srgbClr val="777777"/>
-                      </a:solidFill>
-                    </a:lnL>
-                    <a:lnR w="9525">
-                      <a:solidFill>
-                        <a:srgbClr val="777777"/>
-                      </a:solidFill>
-                    </a:lnR>
-                    <a:lnT w="9525">
-                      <a:solidFill>
-                        <a:srgbClr val="777777"/>
-                      </a:solidFill>
-                    </a:lnT>
-                    <a:lnB w="9525">
-                      <a:solidFill>
-                        <a:srgbClr val="777777"/>
-                      </a:solidFill>
-                    </a:lnB>
-                  </a:tcPr>
-                </a:tc>
-                <a:tc>
-                  <a:txBody>
-                    <a:bodyPr wrap="square"/>
-                    <a:lstStyle/>
-                    <a:p>
-                      <a:pPr algn="r"/>
-                      <a:r>
-                        <a:rPr sz="1800" b="1">
-                          <a:solidFill>
-                            <a:srgbClr val="263044"/>
-                          </a:solidFill>
-                          <a:latin typeface="Malgun Gothic"/>
-                        </a:rPr>
-                        <a:t>0.79</a:t>
-                      </a:r>
-                    </a:p>
-                  </a:txBody>
-                  <a:tcPr marL="57600" marR="57600" marT="21600" marB="21600" anchor="ctr">
-                    <a:solidFill>
-                      <a:srgbClr val="FFFFFF"/>
-                    </a:solidFill>
-                    <a:lnL w="9525">
-                      <a:solidFill>
-                        <a:srgbClr val="777777"/>
-                      </a:solidFill>
-                    </a:lnL>
-                    <a:lnR w="9525">
-                      <a:solidFill>
-                        <a:srgbClr val="777777"/>
-                      </a:solidFill>
-                    </a:lnR>
-                    <a:lnT w="9525">
-                      <a:solidFill>
-                        <a:srgbClr val="777777"/>
-                      </a:solidFill>
-                    </a:lnT>
-                    <a:lnB w="9525">
-                      <a:solidFill>
-                        <a:srgbClr val="777777"/>
-                      </a:solidFill>
-                    </a:lnB>
-                  </a:tcPr>
-                </a:tc>
-                <a:tc>
-                  <a:txBody>
-                    <a:bodyPr wrap="square"/>
-                    <a:lstStyle/>
-                    <a:p>
-                      <a:pPr algn="r"/>
-                      <a:r>
-                        <a:rPr sz="1800" b="0">
-                          <a:solidFill>
-                            <a:srgbClr val="263044"/>
-                          </a:solidFill>
-                          <a:latin typeface="Malgun Gothic"/>
-                        </a:rPr>
-                        <a:t>+0.09</a:t>
+                        <a:t>8/0</a:t>
                       </a:r>
                     </a:p>
                   </a:txBody>
@@ -7713,13 +7604,56 @@
                     <a:p>
                       <a:pPr algn="r"/>
                       <a:r>
+                        <a:rPr sz="1800" b="1">
+                          <a:solidFill>
+                            <a:srgbClr val="263044"/>
+                          </a:solidFill>
+                          <a:latin typeface="Malgun Gothic"/>
+                        </a:rPr>
+                        <a:t>+0.07</a:t>
+                      </a:r>
+                    </a:p>
+                  </a:txBody>
+                  <a:tcPr marL="57600" marR="57600" marT="21600" marB="21600" anchor="ctr">
+                    <a:solidFill>
+                      <a:srgbClr val="FFFFFF"/>
+                    </a:solidFill>
+                    <a:lnL w="9525">
+                      <a:solidFill>
+                        <a:srgbClr val="777777"/>
+                      </a:solidFill>
+                    </a:lnL>
+                    <a:lnR w="9525">
+                      <a:solidFill>
+                        <a:srgbClr val="777777"/>
+                      </a:solidFill>
+                    </a:lnR>
+                    <a:lnT w="9525">
+                      <a:solidFill>
+                        <a:srgbClr val="777777"/>
+                      </a:solidFill>
+                    </a:lnT>
+                    <a:lnB w="9525">
+                      <a:solidFill>
+                        <a:srgbClr val="777777"/>
+                      </a:solidFill>
+                    </a:lnB>
+                  </a:tcPr>
+                </a:tc>
+                <a:tc>
+                  <a:txBody>
+                    <a:bodyPr wrap="square"/>
+                    <a:lstStyle/>
+                    <a:p>
+                      <a:pPr algn="r"/>
+                      <a:r>
                         <a:rPr sz="1800" b="0">
                           <a:solidFill>
                             <a:srgbClr val="263044"/>
                           </a:solidFill>
                           <a:latin typeface="Malgun Gothic"/>
                         </a:rPr>
-                        <a:t>29</a:t>
+                        <a:t>8/2</a:t>
                       </a:r>
                     </a:p>
                   </a:txBody>
@@ -7756,13 +7690,56 @@
                     <a:p>
                       <a:pPr algn="r"/>
                       <a:r>
+                        <a:rPr sz="1800" b="1">
+                          <a:solidFill>
+                            <a:srgbClr val="263044"/>
+                          </a:solidFill>
+                          <a:latin typeface="Malgun Gothic"/>
+                        </a:rPr>
+                        <a:t>+0.08</a:t>
+                      </a:r>
+                    </a:p>
+                  </a:txBody>
+                  <a:tcPr marL="57600" marR="57600" marT="21600" marB="21600" anchor="ctr">
+                    <a:solidFill>
+                      <a:srgbClr val="FFFFFF"/>
+                    </a:solidFill>
+                    <a:lnL w="9525">
+                      <a:solidFill>
+                        <a:srgbClr val="777777"/>
+                      </a:solidFill>
+                    </a:lnL>
+                    <a:lnR w="9525">
+                      <a:solidFill>
+                        <a:srgbClr val="777777"/>
+                      </a:solidFill>
+                    </a:lnR>
+                    <a:lnT w="9525">
+                      <a:solidFill>
+                        <a:srgbClr val="777777"/>
+                      </a:solidFill>
+                    </a:lnT>
+                    <a:lnB w="9525">
+                      <a:solidFill>
+                        <a:srgbClr val="777777"/>
+                      </a:solidFill>
+                    </a:lnB>
+                  </a:tcPr>
+                </a:tc>
+                <a:tc>
+                  <a:txBody>
+                    <a:bodyPr wrap="square"/>
+                    <a:lstStyle/>
+                    <a:p>
+                      <a:pPr algn="r"/>
+                      <a:r>
                         <a:rPr sz="1800" b="0">
                           <a:solidFill>
                             <a:srgbClr val="263044"/>
                           </a:solidFill>
                           <a:latin typeface="Malgun Gothic"/>
                         </a:rPr>
-                        <a:t>0.58</a:t>
+                        <a:t>10/7</a:t>
                       </a:r>
                     </a:p>
                   </a:txBody>
@@ -7805,7 +7782,7 @@
                           </a:solidFill>
                           <a:latin typeface="Malgun Gothic"/>
                         </a:rPr>
-                        <a:t>0.75</a:t>
+                        <a:t>+0.16</a:t>
                       </a:r>
                     </a:p>
                   </a:txBody>
@@ -7842,142 +7819,13 @@
                     <a:p>
                       <a:pPr algn="r"/>
                       <a:r>
-                        <a:rPr sz="1800" b="1">
-                          <a:solidFill>
-                            <a:srgbClr val="263044"/>
-                          </a:solidFill>
-                          <a:latin typeface="Malgun Gothic"/>
-                        </a:rPr>
-                        <a:t>+0.17</a:t>
-                      </a:r>
-                    </a:p>
-                  </a:txBody>
-                  <a:tcPr marL="57600" marR="57600" marT="21600" marB="21600" anchor="ctr">
-                    <a:solidFill>
-                      <a:srgbClr val="FFFFFF"/>
-                    </a:solidFill>
-                    <a:lnL w="9525">
-                      <a:solidFill>
-                        <a:srgbClr val="777777"/>
-                      </a:solidFill>
-                    </a:lnL>
-                    <a:lnR w="9525">
-                      <a:solidFill>
-                        <a:srgbClr val="777777"/>
-                      </a:solidFill>
-                    </a:lnR>
-                    <a:lnT w="9525">
-                      <a:solidFill>
-                        <a:srgbClr val="777777"/>
-                      </a:solidFill>
-                    </a:lnT>
-                    <a:lnB w="9525">
-                      <a:solidFill>
-                        <a:srgbClr val="777777"/>
-                      </a:solidFill>
-                    </a:lnB>
-                  </a:tcPr>
-                </a:tc>
-                <a:tc>
-                  <a:txBody>
-                    <a:bodyPr wrap="square"/>
-                    <a:lstStyle/>
-                    <a:p>
-                      <a:pPr algn="r"/>
-                      <a:r>
                         <a:rPr sz="1800" b="0">
                           <a:solidFill>
                             <a:srgbClr val="263044"/>
                           </a:solidFill>
                           <a:latin typeface="Malgun Gothic"/>
                         </a:rPr>
-                        <a:t>0.53</a:t>
-                      </a:r>
-                    </a:p>
-                  </a:txBody>
-                  <a:tcPr marL="57600" marR="57600" marT="21600" marB="21600" anchor="ctr">
-                    <a:solidFill>
-                      <a:srgbClr val="FFFFFF"/>
-                    </a:solidFill>
-                    <a:lnL w="9525">
-                      <a:solidFill>
-                        <a:srgbClr val="777777"/>
-                      </a:solidFill>
-                    </a:lnL>
-                    <a:lnR w="9525">
-                      <a:solidFill>
-                        <a:srgbClr val="777777"/>
-                      </a:solidFill>
-                    </a:lnR>
-                    <a:lnT w="9525">
-                      <a:solidFill>
-                        <a:srgbClr val="777777"/>
-                      </a:solidFill>
-                    </a:lnT>
-                    <a:lnB w="9525">
-                      <a:solidFill>
-                        <a:srgbClr val="777777"/>
-                      </a:solidFill>
-                    </a:lnB>
-                  </a:tcPr>
-                </a:tc>
-                <a:tc>
-                  <a:txBody>
-                    <a:bodyPr wrap="square"/>
-                    <a:lstStyle/>
-                    <a:p>
-                      <a:pPr algn="r"/>
-                      <a:r>
-                        <a:rPr sz="1800" b="0">
-                          <a:solidFill>
-                            <a:srgbClr val="263044"/>
-                          </a:solidFill>
-                          <a:latin typeface="Malgun Gothic"/>
-                        </a:rPr>
-                        <a:t>0.69</a:t>
-                      </a:r>
-                    </a:p>
-                  </a:txBody>
-                  <a:tcPr marL="57600" marR="57600" marT="21600" marB="21600" anchor="ctr">
-                    <a:solidFill>
-                      <a:srgbClr val="FFFFFF"/>
-                    </a:solidFill>
-                    <a:lnL w="9525">
-                      <a:solidFill>
-                        <a:srgbClr val="777777"/>
-                      </a:solidFill>
-                    </a:lnL>
-                    <a:lnR w="9525">
-                      <a:solidFill>
-                        <a:srgbClr val="777777"/>
-                      </a:solidFill>
-                    </a:lnR>
-                    <a:lnT w="9525">
-                      <a:solidFill>
-                        <a:srgbClr val="777777"/>
-                      </a:solidFill>
-                    </a:lnT>
-                    <a:lnB w="9525">
-                      <a:solidFill>
-                        <a:srgbClr val="777777"/>
-                      </a:solidFill>
-                    </a:lnB>
-                  </a:tcPr>
-                </a:tc>
-                <a:tc>
-                  <a:txBody>
-                    <a:bodyPr wrap="square"/>
-                    <a:lstStyle/>
-                    <a:p>
-                      <a:pPr algn="r"/>
-                      <a:r>
-                        <a:rPr sz="1800" b="1">
-                          <a:solidFill>
-                            <a:srgbClr val="263044"/>
-                          </a:solidFill>
-                          <a:latin typeface="Malgun Gothic"/>
-                        </a:rPr>
-                        <a:t>+0.16</a:t>
+                        <a:t>22/2</a:t>
                       </a:r>
                     </a:p>
                   </a:txBody>
@@ -8065,7 +7913,7 @@
                           </a:solidFill>
                           <a:latin typeface="Malgun Gothic"/>
                         </a:rPr>
-                        <a:t>20</a:t>
+                        <a:t>+0.02</a:t>
                       </a:r>
                     </a:p>
                   </a:txBody>
@@ -8108,7 +7956,7 @@
                           </a:solidFill>
                           <a:latin typeface="Malgun Gothic"/>
                         </a:rPr>
-                        <a:t>0.78</a:t>
+                        <a:t>4/1</a:t>
                       </a:r>
                     </a:p>
                   </a:txBody>
@@ -8151,7 +7999,7 @@
                           </a:solidFill>
                           <a:latin typeface="Malgun Gothic"/>
                         </a:rPr>
-                        <a:t>0.76</a:t>
+                        <a:t>0.00</a:t>
                       </a:r>
                     </a:p>
                   </a:txBody>
@@ -8194,7 +8042,7 @@
                           </a:solidFill>
                           <a:latin typeface="Malgun Gothic"/>
                         </a:rPr>
-                        <a:t>-0.02</a:t>
+                        <a:t>4/7</a:t>
                       </a:r>
                     </a:p>
                   </a:txBody>
@@ -8237,7 +8085,7 @@
                           </a:solidFill>
                           <a:latin typeface="Malgun Gothic"/>
                         </a:rPr>
-                        <a:t>0.74</a:t>
+                        <a:t>+0.25</a:t>
                       </a:r>
                     </a:p>
                   </a:txBody>
@@ -8280,50 +8128,7 @@
                           </a:solidFill>
                           <a:latin typeface="Malgun Gothic"/>
                         </a:rPr>
-                        <a:t>0.73</a:t>
-                      </a:r>
-                    </a:p>
-                  </a:txBody>
-                  <a:tcPr marL="57600" marR="57600" marT="21600" marB="21600" anchor="ctr">
-                    <a:solidFill>
-                      <a:srgbClr val="FFFFFF"/>
-                    </a:solidFill>
-                    <a:lnL w="9525">
-                      <a:solidFill>
-                        <a:srgbClr val="777777"/>
-                      </a:solidFill>
-                    </a:lnL>
-                    <a:lnR w="9525">
-                      <a:solidFill>
-                        <a:srgbClr val="777777"/>
-                      </a:solidFill>
-                    </a:lnR>
-                    <a:lnT w="9525">
-                      <a:solidFill>
-                        <a:srgbClr val="777777"/>
-                      </a:solidFill>
-                    </a:lnT>
-                    <a:lnB w="9525">
-                      <a:solidFill>
-                        <a:srgbClr val="777777"/>
-                      </a:solidFill>
-                    </a:lnB>
-                  </a:tcPr>
-                </a:tc>
-                <a:tc>
-                  <a:txBody>
-                    <a:bodyPr wrap="square"/>
-                    <a:lstStyle/>
-                    <a:p>
-                      <a:pPr algn="r"/>
-                      <a:r>
-                        <a:rPr sz="1800" b="0">
-                          <a:solidFill>
-                            <a:srgbClr val="263044"/>
-                          </a:solidFill>
-                          <a:latin typeface="Malgun Gothic"/>
-                        </a:rPr>
-                        <a:t>-0.01</a:t>
+                        <a:t>18/0</a:t>
                       </a:r>
                     </a:p>
                   </a:txBody>
@@ -8411,7 +8216,7 @@
                           </a:solidFill>
                           <a:latin typeface="Malgun Gothic"/>
                         </a:rPr>
-                        <a:t>3</a:t>
+                        <a:t>-0.03</a:t>
                       </a:r>
                     </a:p>
                   </a:txBody>
@@ -8454,7 +8259,7 @@
                           </a:solidFill>
                           <a:latin typeface="Malgun Gothic"/>
                         </a:rPr>
-                        <a:t>0.82</a:t>
+                        <a:t>0/1</a:t>
                       </a:r>
                     </a:p>
                   </a:txBody>
@@ -8497,7 +8302,7 @@
                           </a:solidFill>
                           <a:latin typeface="Malgun Gothic"/>
                         </a:rPr>
-                        <a:t>0.79</a:t>
+                        <a:t>-0.16</a:t>
                       </a:r>
                     </a:p>
                   </a:txBody>
@@ -8540,7 +8345,7 @@
                           </a:solidFill>
                           <a:latin typeface="Malgun Gothic"/>
                         </a:rPr>
-                        <a:t>-0.03</a:t>
+                        <a:t>0/1</a:t>
                       </a:r>
                     </a:p>
                   </a:txBody>
@@ -8583,7 +8388,7 @@
                           </a:solidFill>
                           <a:latin typeface="Malgun Gothic"/>
                         </a:rPr>
-                        <a:t>0.81</a:t>
+                        <a:t>+0.15</a:t>
                       </a:r>
                     </a:p>
                   </a:txBody>
@@ -8626,50 +8431,7 @@
                           </a:solidFill>
                           <a:latin typeface="Malgun Gothic"/>
                         </a:rPr>
-                        <a:t>0.59</a:t>
-                      </a:r>
-                    </a:p>
-                  </a:txBody>
-                  <a:tcPr marL="57600" marR="57600" marT="21600" marB="21600" anchor="ctr">
-                    <a:solidFill>
-                      <a:srgbClr val="FFFFFF"/>
-                    </a:solidFill>
-                    <a:lnL w="9525">
-                      <a:solidFill>
-                        <a:srgbClr val="777777"/>
-                      </a:solidFill>
-                    </a:lnL>
-                    <a:lnR w="9525">
-                      <a:solidFill>
-                        <a:srgbClr val="777777"/>
-                      </a:solidFill>
-                    </a:lnR>
-                    <a:lnT w="9525">
-                      <a:solidFill>
-                        <a:srgbClr val="777777"/>
-                      </a:solidFill>
-                    </a:lnT>
-                    <a:lnB w="9525">
-                      <a:solidFill>
-                        <a:srgbClr val="777777"/>
-                      </a:solidFill>
-                    </a:lnB>
-                  </a:tcPr>
-                </a:tc>
-                <a:tc>
-                  <a:txBody>
-                    <a:bodyPr wrap="square"/>
-                    <a:lstStyle/>
-                    <a:p>
-                      <a:pPr algn="r"/>
-                      <a:r>
-                        <a:rPr sz="1800" b="0">
-                          <a:solidFill>
-                            <a:srgbClr val="263044"/>
-                          </a:solidFill>
-                          <a:latin typeface="Malgun Gothic"/>
-                        </a:rPr>
-                        <a:t>-0.21</a:t>
+                        <a:t>2/1</a:t>
                       </a:r>
                     </a:p>
                   </a:txBody>
@@ -8714,7 +8476,7 @@
                           </a:solidFill>
                           <a:latin typeface="Malgun Gothic"/>
                         </a:rPr>
-                        <a:t>전체</a:t>
+                        <a:t>전체 60개</a:t>
                       </a:r>
                     </a:p>
                   </a:txBody>
@@ -8757,7 +8519,7 @@
                           </a:solidFill>
                           <a:latin typeface="Malgun Gothic"/>
                         </a:rPr>
-                        <a:t>60</a:t>
+                        <a:t>+0.04</a:t>
                       </a:r>
                     </a:p>
                   </a:txBody>
@@ -8800,7 +8562,7 @@
                           </a:solidFill>
                           <a:latin typeface="Malgun Gothic"/>
                         </a:rPr>
-                        <a:t>0.68</a:t>
+                        <a:t>16/5</a:t>
                       </a:r>
                     </a:p>
                   </a:txBody>
@@ -8843,7 +8605,7 @@
                           </a:solidFill>
                           <a:latin typeface="Malgun Gothic"/>
                         </a:rPr>
-                        <a:t>0.76</a:t>
+                        <a:t>+0.03</a:t>
                       </a:r>
                     </a:p>
                   </a:txBody>
@@ -8886,7 +8648,7 @@
                           </a:solidFill>
                           <a:latin typeface="Malgun Gothic"/>
                         </a:rPr>
-                        <a:t>+0.08</a:t>
+                        <a:t>16/19</a:t>
                       </a:r>
                     </a:p>
                   </a:txBody>
@@ -8929,7 +8691,7 @@
                           </a:solidFill>
                           <a:latin typeface="Malgun Gothic"/>
                         </a:rPr>
-                        <a:t>0.64</a:t>
+                        <a:t>+0.20</a:t>
                       </a:r>
                     </a:p>
                   </a:txBody>
@@ -8972,50 +8734,7 @@
                           </a:solidFill>
                           <a:latin typeface="Malgun Gothic"/>
                         </a:rPr>
-                        <a:t>0.71</a:t>
-                      </a:r>
-                    </a:p>
-                  </a:txBody>
-                  <a:tcPr marL="57600" marR="57600" marT="21600" marB="21600" anchor="ctr">
-                    <a:solidFill>
-                      <a:srgbClr val="FFFFFF"/>
-                    </a:solidFill>
-                    <a:lnL w="9525">
-                      <a:solidFill>
-                        <a:srgbClr val="777777"/>
-                      </a:solidFill>
-                    </a:lnL>
-                    <a:lnR w="9525">
-                      <a:solidFill>
-                        <a:srgbClr val="777777"/>
-                      </a:solidFill>
-                    </a:lnR>
-                    <a:lnT w="9525">
-                      <a:solidFill>
-                        <a:srgbClr val="777777"/>
-                      </a:solidFill>
-                    </a:lnT>
-                    <a:lnB w="9525">
-                      <a:solidFill>
-                        <a:srgbClr val="777777"/>
-                      </a:solidFill>
-                    </a:lnB>
-                  </a:tcPr>
-                </a:tc>
-                <a:tc>
-                  <a:txBody>
-                    <a:bodyPr wrap="square"/>
-                    <a:lstStyle/>
-                    <a:p>
-                      <a:pPr algn="r"/>
-                      <a:r>
-                        <a:rPr sz="1800" b="0">
-                          <a:solidFill>
-                            <a:srgbClr val="263044"/>
-                          </a:solidFill>
-                          <a:latin typeface="Malgun Gothic"/>
-                        </a:rPr>
-                        <a:t>+0.07</a:t>
+                        <a:t>50/3</a:t>
                       </a:r>
                     </a:p>
                   </a:txBody>
@@ -9052,13 +8771,13 @@
       </p:graphicFrame>
       <p:sp>
         <p:nvSpPr>
-          <p:cNvPr id="26" name="TextBox 25"/>
+          <p:cNvPr id="25" name="TextBox 24"/>
           <p:cNvSpPr txBox="1"/>
           <p:nvPr/>
         </p:nvSpPr>
         <p:spPr>
           <a:xfrm>
-            <a:off x="10980000" y="7114766"/>
+            <a:off x="10980000" y="6862766"/>
             <a:ext cx="9612000" cy="318536"/>
           </a:xfrm>
           <a:prstGeom prst="rect">
@@ -9085,20 +8804,20 @@
                 <a:latin typeface="Malgun Gothic"/>
                 <a:ea typeface="Malgun Gothic"/>
               </a:rPr>
-              <a:t>- 방법·절차: 두 평가 언어 모두 가장 크게 상승(+0.17, +0.16), 개선 14 · 악화 3</a:t>
+              <a:t>- 미적용 대비 평균 변화 · 관련성 비교는 0점 답변이 있는 질문 제외(이 표 9개)</a:t>
             </a:r>
           </a:p>
         </p:txBody>
       </p:sp>
       <p:sp>
         <p:nvSpPr>
-          <p:cNvPr id="27" name="TextBox 26"/>
+          <p:cNvPr id="26" name="TextBox 25"/>
           <p:cNvSpPr txBox="1"/>
           <p:nvPr/>
         </p:nvSpPr>
         <p:spPr>
           <a:xfrm>
-            <a:off x="10980000" y="7523303"/>
+            <a:off x="10980000" y="7271303"/>
             <a:ext cx="9612000" cy="318536"/>
           </a:xfrm>
           <a:prstGeom prst="rect">
@@ -9125,20 +8844,20 @@
                 <a:latin typeface="Malgun Gothic"/>
                 <a:ea typeface="Malgun Gothic"/>
               </a:rPr>
-              <a:t>- 방법·절차 6개는 회피 응답(0점)에서 답변으로 바뀜 · 결과·비교는 −0.02</a:t>
+              <a:t>- HyDE는 방법·절차 질문의 관련성을 가장 크게 높임(+0.07, 개선 8 · 악화 2)</a:t>
             </a:r>
           </a:p>
         </p:txBody>
       </p:sp>
       <p:sp>
         <p:nvSpPr>
-          <p:cNvPr id="28" name="Rectangle 27"/>
+          <p:cNvPr id="27" name="Rectangle 26"/>
           <p:cNvSpPr/>
           <p:nvPr/>
         </p:nvSpPr>
         <p:spPr>
           <a:xfrm>
-            <a:off x="10980000" y="8075839"/>
+            <a:off x="10980000" y="7823839"/>
             <a:ext cx="9612000" cy="468000"/>
           </a:xfrm>
           <a:prstGeom prst="rect">
@@ -9176,13 +8895,13 @@
       </p:sp>
       <p:sp>
         <p:nvSpPr>
-          <p:cNvPr id="29" name="TextBox 28"/>
+          <p:cNvPr id="28" name="TextBox 27"/>
           <p:cNvSpPr txBox="1"/>
           <p:nvPr/>
         </p:nvSpPr>
         <p:spPr>
           <a:xfrm>
-            <a:off x="11124000" y="8101039"/>
+            <a:off x="11124000" y="7849039"/>
             <a:ext cx="9324000" cy="360000"/>
           </a:xfrm>
           <a:prstGeom prst="rect">
@@ -9209,21 +8928,21 @@
                 <a:latin typeface="Malgun Gothic"/>
                 <a:ea typeface="Malgun Gothic"/>
               </a:rPr>
-              <a:t>05 기법을 더했을 때의 변화 (60개)</a:t>
+              <a:t>05 기법을 더했을 때의 관련성 변화</a:t>
             </a:r>
           </a:p>
         </p:txBody>
       </p:sp>
       <p:graphicFrame>
         <p:nvGraphicFramePr>
-          <p:cNvPr id="30" name="Table 29"/>
+          <p:cNvPr id="29" name="Table 28"/>
           <p:cNvGraphicFramePr>
             <a:graphicFrameLocks noGrp="1"/>
           </p:cNvGraphicFramePr>
           <p:nvPr/>
         </p:nvGraphicFramePr>
         <p:xfrm>
-          <a:off x="10980000" y="8687839"/>
+          <a:off x="10980000" y="8435839"/>
           <a:ext cx="9611999" cy="3566691"/>
         </p:xfrm>
         <a:graphic>
@@ -9295,7 +9014,7 @@
                           </a:solidFill>
                           <a:latin typeface="Malgun Gothic"/>
                         </a:rPr>
-                        <a:t>기준 → 적용 조건</a:t>
+                        <a:t>기법 적용 방법</a:t>
                       </a:r>
                     </a:p>
                   </a:txBody>
@@ -9493,7 +9212,7 @@
                           </a:solidFill>
                           <a:latin typeface="Malgun Gothic"/>
                         </a:rPr>
-                        <a:t>미적용 → HyDE</a:t>
+                        <a:t>미적용 상태에서 HyDE 적용</a:t>
                       </a:r>
                     </a:p>
                   </a:txBody>
@@ -9536,7 +9255,7 @@
                           </a:solidFill>
                           <a:latin typeface="Malgun Gothic"/>
                         </a:rPr>
-                        <a:t>+0.08</a:t>
+                        <a:t>+0.04</a:t>
                       </a:r>
                     </a:p>
                   </a:txBody>
@@ -9579,7 +9298,7 @@
                           </a:solidFill>
                           <a:latin typeface="Malgun Gothic"/>
                         </a:rPr>
-                        <a:t>22/7/31</a:t>
+                        <a:t>16/5/30</a:t>
                       </a:r>
                     </a:p>
                   </a:txBody>
@@ -9667,7 +9386,7 @@
                           </a:solidFill>
                           <a:latin typeface="Malgun Gothic"/>
                         </a:rPr>
-                        <a:t>CAD → HyDE+CAD</a:t>
+                        <a:t>CAD에 HyDE 추가</a:t>
                       </a:r>
                     </a:p>
                   </a:txBody>
@@ -9710,7 +9429,7 @@
                           </a:solidFill>
                           <a:latin typeface="Malgun Gothic"/>
                         </a:rPr>
-                        <a:t>+0.03</a:t>
+                        <a:t>+0.01</a:t>
                       </a:r>
                     </a:p>
                   </a:txBody>
@@ -9753,7 +9472,7 @@
                           </a:solidFill>
                           <a:latin typeface="Malgun Gothic"/>
                         </a:rPr>
-                        <a:t>15/13/32</a:t>
+                        <a:t>9/8/32</a:t>
                       </a:r>
                     </a:p>
                   </a:txBody>
@@ -9841,7 +9560,7 @@
                           </a:solidFill>
                           <a:latin typeface="Malgun Gothic"/>
                         </a:rPr>
-                        <a:t>SCD → HyDE+SCD</a:t>
+                        <a:t>SCD에 HyDE 추가</a:t>
                       </a:r>
                     </a:p>
                   </a:txBody>
@@ -9878,56 +9597,56 @@
                     <a:p>
                       <a:pPr algn="r"/>
                       <a:r>
+                        <a:rPr sz="1800" b="1">
+                          <a:solidFill>
+                            <a:srgbClr val="263044"/>
+                          </a:solidFill>
+                          <a:latin typeface="Malgun Gothic"/>
+                        </a:rPr>
+                        <a:t>+0.04</a:t>
+                      </a:r>
+                    </a:p>
+                  </a:txBody>
+                  <a:tcPr marL="57600" marR="57600" marT="21600" marB="21600" anchor="ctr">
+                    <a:solidFill>
+                      <a:srgbClr val="FFFFFF"/>
+                    </a:solidFill>
+                    <a:lnL w="9525">
+                      <a:solidFill>
+                        <a:srgbClr val="777777"/>
+                      </a:solidFill>
+                    </a:lnL>
+                    <a:lnR w="9525">
+                      <a:solidFill>
+                        <a:srgbClr val="777777"/>
+                      </a:solidFill>
+                    </a:lnR>
+                    <a:lnT w="9525">
+                      <a:solidFill>
+                        <a:srgbClr val="777777"/>
+                      </a:solidFill>
+                    </a:lnT>
+                    <a:lnB w="9525">
+                      <a:solidFill>
+                        <a:srgbClr val="777777"/>
+                      </a:solidFill>
+                    </a:lnB>
+                  </a:tcPr>
+                </a:tc>
+                <a:tc>
+                  <a:txBody>
+                    <a:bodyPr wrap="square"/>
+                    <a:lstStyle/>
+                    <a:p>
+                      <a:pPr algn="r"/>
+                      <a:r>
                         <a:rPr sz="1800" b="0">
                           <a:solidFill>
                             <a:srgbClr val="263044"/>
                           </a:solidFill>
                           <a:latin typeface="Malgun Gothic"/>
                         </a:rPr>
-                        <a:t>+0.07</a:t>
-                      </a:r>
-                    </a:p>
-                  </a:txBody>
-                  <a:tcPr marL="57600" marR="57600" marT="21600" marB="21600" anchor="ctr">
-                    <a:solidFill>
-                      <a:srgbClr val="FFFFFF"/>
-                    </a:solidFill>
-                    <a:lnL w="9525">
-                      <a:solidFill>
-                        <a:srgbClr val="777777"/>
-                      </a:solidFill>
-                    </a:lnL>
-                    <a:lnR w="9525">
-                      <a:solidFill>
-                        <a:srgbClr val="777777"/>
-                      </a:solidFill>
-                    </a:lnR>
-                    <a:lnT w="9525">
-                      <a:solidFill>
-                        <a:srgbClr val="777777"/>
-                      </a:solidFill>
-                    </a:lnT>
-                    <a:lnB w="9525">
-                      <a:solidFill>
-                        <a:srgbClr val="777777"/>
-                      </a:solidFill>
-                    </a:lnB>
-                  </a:tcPr>
-                </a:tc>
-                <a:tc>
-                  <a:txBody>
-                    <a:bodyPr wrap="square"/>
-                    <a:lstStyle/>
-                    <a:p>
-                      <a:pPr algn="r"/>
-                      <a:r>
-                        <a:rPr sz="1800" b="0">
-                          <a:solidFill>
-                            <a:srgbClr val="263044"/>
-                          </a:solidFill>
-                          <a:latin typeface="Malgun Gothic"/>
-                        </a:rPr>
-                        <a:t>20/14/26</a:t>
+                        <a:t>13/9/25</a:t>
                       </a:r>
                     </a:p>
                   </a:txBody>
@@ -10015,7 +9734,7 @@
                           </a:solidFill>
                           <a:latin typeface="Malgun Gothic"/>
                         </a:rPr>
-                        <a:t>CAD+SCD → HyDE+CAD+SCD</a:t>
+                        <a:t>CAD와 SCD에 HyDE 추가</a:t>
                       </a:r>
                     </a:p>
                   </a:txBody>
@@ -10058,7 +9777,7 @@
                           </a:solidFill>
                           <a:latin typeface="Malgun Gothic"/>
                         </a:rPr>
-                        <a:t>+0.07</a:t>
+                        <a:t>+0.01</a:t>
                       </a:r>
                     </a:p>
                   </a:txBody>
@@ -10101,7 +9820,7 @@
                           </a:solidFill>
                           <a:latin typeface="Malgun Gothic"/>
                         </a:rPr>
-                        <a:t>21/14/25</a:t>
+                        <a:t>12/8/23</a:t>
                       </a:r>
                     </a:p>
                   </a:txBody>
@@ -10189,7 +9908,7 @@
                           </a:solidFill>
                           <a:latin typeface="Malgun Gothic"/>
                         </a:rPr>
-                        <a:t>미적용 → CAD</a:t>
+                        <a:t>미적용 상태에서 CAD 적용</a:t>
                       </a:r>
                     </a:p>
                   </a:txBody>
@@ -10232,7 +9951,7 @@
                           </a:solidFill>
                           <a:latin typeface="Malgun Gothic"/>
                         </a:rPr>
-                        <a:t>-0.01</a:t>
+                        <a:t>-0.02</a:t>
                       </a:r>
                     </a:p>
                   </a:txBody>
@@ -10275,7 +9994,7 @@
                           </a:solidFill>
                           <a:latin typeface="Malgun Gothic"/>
                         </a:rPr>
-                        <a:t>14/19/27</a:t>
+                        <a:t>8/14/26</a:t>
                       </a:r>
                     </a:p>
                   </a:txBody>
@@ -10363,7 +10082,7 @@
                           </a:solidFill>
                           <a:latin typeface="Malgun Gothic"/>
                         </a:rPr>
-                        <a:t>HyDE → HyDE+CAD</a:t>
+                        <a:t>HyDE에 CAD 추가</a:t>
                       </a:r>
                     </a:p>
                   </a:txBody>
@@ -10406,7 +10125,7 @@
                           </a:solidFill>
                           <a:latin typeface="Malgun Gothic"/>
                         </a:rPr>
-                        <a:t>-0.06</a:t>
+                        <a:t>-0.03</a:t>
                       </a:r>
                     </a:p>
                   </a:txBody>
@@ -10449,7 +10168,7 @@
                           </a:solidFill>
                           <a:latin typeface="Malgun Gothic"/>
                         </a:rPr>
-                        <a:t>7/22/31</a:t>
+                        <a:t>5/18/30</a:t>
                       </a:r>
                     </a:p>
                   </a:txBody>
@@ -10537,7 +10256,7 @@
                           </a:solidFill>
                           <a:latin typeface="Malgun Gothic"/>
                         </a:rPr>
-                        <a:t>SCD → CAD+SCD</a:t>
+                        <a:t>SCD에 CAD 추가</a:t>
                       </a:r>
                     </a:p>
                   </a:txBody>
@@ -10580,7 +10299,7 @@
                           </a:solidFill>
                           <a:latin typeface="Malgun Gothic"/>
                         </a:rPr>
-                        <a:t>-0.04</a:t>
+                        <a:t>-0.02</a:t>
                       </a:r>
                     </a:p>
                   </a:txBody>
@@ -10623,7 +10342,7 @@
                           </a:solidFill>
                           <a:latin typeface="Malgun Gothic"/>
                         </a:rPr>
-                        <a:t>12/20/28</a:t>
+                        <a:t>8/13/24</a:t>
                       </a:r>
                     </a:p>
                   </a:txBody>
@@ -10711,7 +10430,7 @@
                           </a:solidFill>
                           <a:latin typeface="Malgun Gothic"/>
                         </a:rPr>
-                        <a:t>HyDE+SCD → HyDE+CAD+SCD</a:t>
+                        <a:t>HyDE와 SCD에 CAD 추가</a:t>
                       </a:r>
                     </a:p>
                   </a:txBody>
@@ -10754,7 +10473,7 @@
                           </a:solidFill>
                           <a:latin typeface="Malgun Gothic"/>
                         </a:rPr>
-                        <a:t>-0.04</a:t>
+                        <a:t>-0.03</a:t>
                       </a:r>
                     </a:p>
                   </a:txBody>
@@ -10797,7 +10516,7 @@
                           </a:solidFill>
                           <a:latin typeface="Malgun Gothic"/>
                         </a:rPr>
-                        <a:t>7/18/35</a:t>
+                        <a:t>5/14/31</a:t>
                       </a:r>
                     </a:p>
                   </a:txBody>
@@ -10834,13 +10553,13 @@
       </p:graphicFrame>
       <p:sp>
         <p:nvSpPr>
-          <p:cNvPr id="31" name="TextBox 30"/>
+          <p:cNvPr id="30" name="TextBox 29"/>
           <p:cNvSpPr txBox="1"/>
           <p:nvPr/>
         </p:nvSpPr>
         <p:spPr>
           <a:xfrm>
-            <a:off x="10980000" y="12362534"/>
+            <a:off x="10980000" y="12110534"/>
             <a:ext cx="9612000" cy="318536"/>
           </a:xfrm>
           <a:prstGeom prst="rect">
@@ -10874,13 +10593,13 @@
       </p:sp>
       <p:sp>
         <p:nvSpPr>
-          <p:cNvPr id="32" name="TextBox 31"/>
+          <p:cNvPr id="31" name="TextBox 30"/>
           <p:cNvSpPr txBox="1"/>
           <p:nvPr/>
         </p:nvSpPr>
         <p:spPr>
           <a:xfrm>
-            <a:off x="10980000" y="12771070"/>
+            <a:off x="10980000" y="12519070"/>
             <a:ext cx="9612000" cy="318536"/>
           </a:xfrm>
           <a:prstGeom prst="rect">
@@ -10907,20 +10626,20 @@
                 <a:latin typeface="Malgun Gothic"/>
                 <a:ea typeface="Malgun Gothic"/>
               </a:rPr>
-              <a:t>- CAD를 더한 네 비교는 모두 악화가 더 많음(예: HyDE → HyDE+CAD 7/22)</a:t>
+              <a:t>- CAD를 더한 네 비교는 모두 악화가 더 많음(HyDE에 CAD 추가 시 개선 5 · 악화 18)</a:t>
             </a:r>
           </a:p>
         </p:txBody>
       </p:sp>
       <p:sp>
         <p:nvSpPr>
-          <p:cNvPr id="33" name="Rectangle 32"/>
+          <p:cNvPr id="32" name="Rectangle 31"/>
           <p:cNvSpPr/>
           <p:nvPr/>
         </p:nvSpPr>
         <p:spPr>
           <a:xfrm>
-            <a:off x="10980000" y="13323606"/>
+            <a:off x="10980000" y="13071606"/>
             <a:ext cx="9612000" cy="468000"/>
           </a:xfrm>
           <a:prstGeom prst="rect">
@@ -10958,13 +10677,13 @@
       </p:sp>
       <p:sp>
         <p:nvSpPr>
-          <p:cNvPr id="34" name="TextBox 33"/>
+          <p:cNvPr id="33" name="TextBox 32"/>
           <p:cNvSpPr txBox="1"/>
           <p:nvPr/>
         </p:nvSpPr>
         <p:spPr>
           <a:xfrm>
-            <a:off x="11124000" y="13348806"/>
+            <a:off x="11124000" y="13096806"/>
             <a:ext cx="9324000" cy="360000"/>
           </a:xfrm>
           <a:prstGeom prst="rect">
@@ -10998,14 +10717,14 @@
       </p:sp>
       <p:graphicFrame>
         <p:nvGraphicFramePr>
-          <p:cNvPr id="35" name="Table 34"/>
+          <p:cNvPr id="34" name="Table 33"/>
           <p:cNvGraphicFramePr>
             <a:graphicFrameLocks noGrp="1"/>
           </p:cNvGraphicFramePr>
           <p:nvPr/>
         </p:nvGraphicFramePr>
         <p:xfrm>
-          <a:off x="10980000" y="13935606"/>
+          <a:off x="10980000" y="13683606"/>
           <a:ext cx="9612000" cy="1826545"/>
         </p:xfrm>
         <a:graphic>
@@ -12112,13 +11831,13 @@
       </p:graphicFrame>
       <p:sp>
         <p:nvSpPr>
-          <p:cNvPr id="36" name="TextBox 35"/>
+          <p:cNvPr id="35" name="TextBox 34"/>
           <p:cNvSpPr txBox="1"/>
           <p:nvPr/>
         </p:nvSpPr>
         <p:spPr>
           <a:xfrm>
-            <a:off x="10980000" y="15870154"/>
+            <a:off x="10980000" y="15618154"/>
             <a:ext cx="9612000" cy="318536"/>
           </a:xfrm>
           <a:prstGeom prst="rect">
@@ -12152,13 +11871,13 @@
       </p:sp>
       <p:sp>
         <p:nvSpPr>
-          <p:cNvPr id="37" name="TextBox 36"/>
+          <p:cNvPr id="36" name="TextBox 35"/>
           <p:cNvSpPr txBox="1"/>
           <p:nvPr/>
         </p:nvSpPr>
         <p:spPr>
           <a:xfrm>
-            <a:off x="10980000" y="16278690"/>
+            <a:off x="10980000" y="16026690"/>
             <a:ext cx="9612000" cy="318536"/>
           </a:xfrm>
           <a:prstGeom prst="rect">
@@ -12192,13 +11911,13 @@
       </p:sp>
       <p:sp>
         <p:nvSpPr>
-          <p:cNvPr id="38" name="Rectangle 37"/>
+          <p:cNvPr id="37" name="Rectangle 36"/>
           <p:cNvSpPr/>
           <p:nvPr/>
         </p:nvSpPr>
         <p:spPr>
           <a:xfrm>
-            <a:off x="10980000" y="16831226"/>
+            <a:off x="10980000" y="16579226"/>
             <a:ext cx="9612000" cy="468000"/>
           </a:xfrm>
           <a:prstGeom prst="rect">
@@ -12236,13 +11955,13 @@
       </p:sp>
       <p:sp>
         <p:nvSpPr>
-          <p:cNvPr id="39" name="TextBox 38"/>
+          <p:cNvPr id="38" name="TextBox 37"/>
           <p:cNvSpPr txBox="1"/>
           <p:nvPr/>
         </p:nvSpPr>
         <p:spPr>
           <a:xfrm>
-            <a:off x="11124000" y="16856426"/>
+            <a:off x="11124000" y="16604426"/>
             <a:ext cx="9324000" cy="360000"/>
           </a:xfrm>
           <a:prstGeom prst="rect">
@@ -12276,14 +11995,14 @@
       </p:sp>
       <p:graphicFrame>
         <p:nvGraphicFramePr>
-          <p:cNvPr id="40" name="Table 39"/>
+          <p:cNvPr id="39" name="Table 38"/>
           <p:cNvGraphicFramePr>
             <a:graphicFrameLocks noGrp="1"/>
           </p:cNvGraphicFramePr>
           <p:nvPr/>
         </p:nvGraphicFramePr>
         <p:xfrm>
-          <a:off x="10980000" y="17443226"/>
+          <a:off x="10980000" y="17191226"/>
           <a:ext cx="9611998" cy="1461236"/>
         </p:xfrm>
         <a:graphic>
@@ -13173,13 +12892,13 @@
       </p:graphicFrame>
       <p:sp>
         <p:nvSpPr>
-          <p:cNvPr id="41" name="TextBox 40"/>
+          <p:cNvPr id="40" name="TextBox 39"/>
           <p:cNvSpPr txBox="1"/>
           <p:nvPr/>
         </p:nvSpPr>
         <p:spPr>
           <a:xfrm>
-            <a:off x="10980000" y="19012465"/>
+            <a:off x="10980000" y="18760465"/>
             <a:ext cx="9612000" cy="318536"/>
           </a:xfrm>
           <a:prstGeom prst="rect">
@@ -13213,13 +12932,13 @@
       </p:sp>
       <p:sp>
         <p:nvSpPr>
-          <p:cNvPr id="42" name="Rectangle 41"/>
+          <p:cNvPr id="41" name="Rectangle 40"/>
           <p:cNvSpPr/>
           <p:nvPr/>
         </p:nvSpPr>
         <p:spPr>
           <a:xfrm>
-            <a:off x="792000" y="19565001"/>
+            <a:off x="792000" y="19312958"/>
             <a:ext cx="19800000" cy="468000"/>
           </a:xfrm>
           <a:prstGeom prst="rect">
@@ -13257,13 +12976,13 @@
       </p:sp>
       <p:sp>
         <p:nvSpPr>
-          <p:cNvPr id="43" name="TextBox 42"/>
+          <p:cNvPr id="42" name="TextBox 41"/>
           <p:cNvSpPr txBox="1"/>
           <p:nvPr/>
         </p:nvSpPr>
         <p:spPr>
           <a:xfrm>
-            <a:off x="936000" y="19590201"/>
+            <a:off x="936000" y="19338158"/>
             <a:ext cx="19512000" cy="360000"/>
           </a:xfrm>
           <a:prstGeom prst="rect">
@@ -13290,14 +13009,14 @@
                 <a:latin typeface="Malgun Gothic"/>
                 <a:ea typeface="Malgun Gothic"/>
               </a:rPr>
-              <a:t>08 질문 60개의 원점수 평행좌표: 미적용과 HyDE</a:t>
+              <a:t>08 HyDE 적용 후 질문 유형별 개별 점수</a:t>
             </a:r>
           </a:p>
         </p:txBody>
       </p:sp>
       <p:pic>
         <p:nvPicPr>
-          <p:cNvPr id="44" name="Picture 43" descr="poster_parallel.png"/>
+          <p:cNvPr id="43" name="Picture 42" descr="poster_parallel.png"/>
           <p:cNvPicPr>
             <a:picLocks noChangeAspect="1"/>
           </p:cNvPicPr>
@@ -13311,8 +13030,8 @@
         </p:blipFill>
         <p:spPr>
           <a:xfrm>
-            <a:off x="792000" y="20177001"/>
-            <a:ext cx="19800000" cy="6022120"/>
+            <a:off x="792000" y="19924958"/>
+            <a:ext cx="19800000" cy="6660829"/>
           </a:xfrm>
           <a:prstGeom prst="rect">
             <a:avLst/>
@@ -13321,13 +13040,13 @@
       </p:pic>
       <p:sp>
         <p:nvSpPr>
-          <p:cNvPr id="45" name="TextBox 44"/>
+          <p:cNvPr id="44" name="TextBox 43"/>
           <p:cNvSpPr txBox="1"/>
           <p:nvPr/>
         </p:nvSpPr>
         <p:spPr>
           <a:xfrm>
-            <a:off x="792000" y="26271121"/>
+            <a:off x="792000" y="26621787"/>
             <a:ext cx="19800000" cy="318536"/>
           </a:xfrm>
           <a:prstGeom prst="rect">
@@ -13354,20 +13073,20 @@
                 <a:latin typeface="Malgun Gothic"/>
                 <a:ea typeface="Malgun Gothic"/>
               </a:rPr>
-              <a:t>- 선 하나가 질문 하나 · 미적용에서 답변 관련성 0에 모인 방법·절차 질문이 HyDE 적용 후 위로 이동</a:t>
+              <a:t>- 선 하나는 질문 하나이며, 0점과 결측값에서는 선을 끊음. 처리 시간은 위쪽일수록 짧음. 굵은 선은 BIC 질문</a:t>
             </a:r>
           </a:p>
         </p:txBody>
       </p:sp>
       <p:sp>
         <p:nvSpPr>
-          <p:cNvPr id="46" name="Rectangle 45"/>
+          <p:cNvPr id="45" name="Rectangle 44"/>
           <p:cNvSpPr/>
           <p:nvPr/>
         </p:nvSpPr>
         <p:spPr>
           <a:xfrm>
-            <a:off x="792000" y="26787657"/>
+            <a:off x="792000" y="27102323"/>
             <a:ext cx="9612000" cy="468000"/>
           </a:xfrm>
           <a:prstGeom prst="rect">
@@ -13405,13 +13124,13 @@
       </p:sp>
       <p:sp>
         <p:nvSpPr>
-          <p:cNvPr id="47" name="TextBox 46"/>
+          <p:cNvPr id="46" name="TextBox 45"/>
           <p:cNvSpPr txBox="1"/>
           <p:nvPr/>
         </p:nvSpPr>
         <p:spPr>
           <a:xfrm>
-            <a:off x="936000" y="26812857"/>
+            <a:off x="936000" y="27127523"/>
             <a:ext cx="9324000" cy="360000"/>
           </a:xfrm>
           <a:prstGeom prst="rect">
@@ -13445,13 +13164,13 @@
       </p:sp>
       <p:sp>
         <p:nvSpPr>
-          <p:cNvPr id="48" name="TextBox 47"/>
+          <p:cNvPr id="47" name="TextBox 46"/>
           <p:cNvSpPr txBox="1"/>
           <p:nvPr/>
         </p:nvSpPr>
         <p:spPr>
           <a:xfrm>
-            <a:off x="792000" y="27399657"/>
+            <a:off x="792000" y="27714323"/>
             <a:ext cx="9612000" cy="335301"/>
           </a:xfrm>
           <a:prstGeom prst="rect">
@@ -13478,20 +13197,20 @@
                 <a:latin typeface="Malgun Gothic"/>
                 <a:ea typeface="Malgun Gothic"/>
               </a:rPr>
-              <a:t>- 방법·절차 질문: HyDE 적용</a:t>
+              <a:t>- 방법·절차 질문에는 HyDE 적용</a:t>
             </a:r>
           </a:p>
         </p:txBody>
       </p:sp>
       <p:sp>
         <p:nvSpPr>
-          <p:cNvPr id="49" name="TextBox 48"/>
+          <p:cNvPr id="48" name="TextBox 47"/>
           <p:cNvSpPr txBox="1"/>
           <p:nvPr/>
         </p:nvSpPr>
         <p:spPr>
           <a:xfrm>
-            <a:off x="792000" y="27824958"/>
+            <a:off x="792000" y="28139624"/>
             <a:ext cx="9612000" cy="335301"/>
           </a:xfrm>
           <a:prstGeom prst="rect">
@@ -13518,20 +13237,20 @@
                 <a:latin typeface="Malgun Gothic"/>
                 <a:ea typeface="Malgun Gothic"/>
               </a:rPr>
-              <a:t>- 한국어 답변이 필요할 때: SCD 추가</a:t>
+              <a:t>- 한국어 답변이 필요하면 SCD 추가</a:t>
             </a:r>
           </a:p>
         </p:txBody>
       </p:sp>
       <p:sp>
         <p:nvSpPr>
-          <p:cNvPr id="50" name="TextBox 49"/>
+          <p:cNvPr id="49" name="TextBox 48"/>
           <p:cNvSpPr txBox="1"/>
           <p:nvPr/>
         </p:nvSpPr>
         <p:spPr>
           <a:xfrm>
-            <a:off x="792000" y="28250259"/>
+            <a:off x="792000" y="28564926"/>
             <a:ext cx="9612000" cy="335301"/>
           </a:xfrm>
           <a:prstGeom prst="rect">
@@ -13558,20 +13277,20 @@
                 <a:latin typeface="Malgun Gothic"/>
                 <a:ea typeface="Malgun Gothic"/>
               </a:rPr>
-              <a:t>- 수치 질문: 정답 수치가 담긴 구간이 입력됐는지 확인</a:t>
+              <a:t>- 수치 질문은 정답 수치가 담긴 구간의 입력 여부를 먼저 확인</a:t>
             </a:r>
           </a:p>
         </p:txBody>
       </p:sp>
       <p:sp>
         <p:nvSpPr>
-          <p:cNvPr id="51" name="TextBox 50"/>
+          <p:cNvPr id="50" name="TextBox 49"/>
           <p:cNvSpPr txBox="1"/>
           <p:nvPr/>
         </p:nvSpPr>
         <p:spPr>
           <a:xfrm>
-            <a:off x="792000" y="28675560"/>
+            <a:off x="792000" y="28990227"/>
             <a:ext cx="9612000" cy="335301"/>
           </a:xfrm>
           <a:prstGeom prst="rect">
@@ -13598,20 +13317,20 @@
                 <a:latin typeface="Malgun Gothic"/>
                 <a:ea typeface="Malgun Gothic"/>
               </a:rPr>
-              <a:t>- CAD: 시간 3.1배, 관련성 변화 −0.01 → 지식 충돌 질문에서 별도 검토</a:t>
+              <a:t>- CAD는 시간 3.1배에 관련성 -0.02, 지식 충돌 질문에서 별도 검토</a:t>
             </a:r>
           </a:p>
         </p:txBody>
       </p:sp>
       <p:sp>
         <p:nvSpPr>
-          <p:cNvPr id="52" name="Rectangle 51"/>
+          <p:cNvPr id="51" name="Rectangle 50"/>
           <p:cNvSpPr/>
           <p:nvPr/>
         </p:nvSpPr>
         <p:spPr>
           <a:xfrm>
-            <a:off x="10980000" y="26787657"/>
+            <a:off x="10980000" y="27102323"/>
             <a:ext cx="9612000" cy="468000"/>
           </a:xfrm>
           <a:prstGeom prst="rect">
@@ -13649,13 +13368,13 @@
       </p:sp>
       <p:sp>
         <p:nvSpPr>
-          <p:cNvPr id="53" name="TextBox 52"/>
+          <p:cNvPr id="52" name="TextBox 51"/>
           <p:cNvSpPr txBox="1"/>
           <p:nvPr/>
         </p:nvSpPr>
         <p:spPr>
           <a:xfrm>
-            <a:off x="11124000" y="26812857"/>
+            <a:off x="11124000" y="27127523"/>
             <a:ext cx="9324000" cy="360000"/>
           </a:xfrm>
           <a:prstGeom prst="rect">
@@ -13689,13 +13408,13 @@
       </p:sp>
       <p:sp>
         <p:nvSpPr>
-          <p:cNvPr id="54" name="TextBox 53"/>
+          <p:cNvPr id="53" name="TextBox 52"/>
           <p:cNvSpPr txBox="1"/>
           <p:nvPr/>
         </p:nvSpPr>
         <p:spPr>
           <a:xfrm>
-            <a:off x="10980000" y="27399657"/>
+            <a:off x="10980000" y="27714323"/>
             <a:ext cx="9612000" cy="335301"/>
           </a:xfrm>
           <a:prstGeom prst="rect">
@@ -13722,20 +13441,20 @@
                 <a:latin typeface="Malgun Gothic"/>
                 <a:ea typeface="Malgun Gothic"/>
               </a:rPr>
-              <a:t>- BIC 질문: HyDE가 근거 구간을 찾아 관련성 0.00→0.89</a:t>
+              <a:t>- BIC 질문은 HyDE가 근거 구간을 찾아 관련성 0.00→0.89</a:t>
             </a:r>
           </a:p>
         </p:txBody>
       </p:sp>
       <p:sp>
         <p:nvSpPr>
-          <p:cNvPr id="55" name="TextBox 54"/>
+          <p:cNvPr id="54" name="TextBox 53"/>
           <p:cNvSpPr txBox="1"/>
           <p:nvPr/>
         </p:nvSpPr>
         <p:spPr>
           <a:xfrm>
-            <a:off x="10980000" y="27824958"/>
+            <a:off x="10980000" y="28139624"/>
             <a:ext cx="9612000" cy="335301"/>
           </a:xfrm>
           <a:prstGeom prst="rect">
@@ -13762,20 +13481,20 @@
                 <a:latin typeface="Malgun Gothic"/>
                 <a:ea typeface="Malgun Gothic"/>
               </a:rPr>
-              <a:t>- QuALITY 질문: 73.68이 빠져 관련성 0.87→0.00</a:t>
+              <a:t>- QuALITY 질문은 73.68이 빠져 관련성 0.87→0.00</a:t>
             </a:r>
           </a:p>
         </p:txBody>
       </p:sp>
       <p:sp>
         <p:nvSpPr>
-          <p:cNvPr id="56" name="TextBox 55"/>
+          <p:cNvPr id="55" name="TextBox 54"/>
           <p:cNvSpPr txBox="1"/>
           <p:nvPr/>
         </p:nvSpPr>
         <p:spPr>
           <a:xfrm>
-            <a:off x="10980000" y="28250259"/>
+            <a:off x="10980000" y="28564926"/>
             <a:ext cx="9612000" cy="335301"/>
           </a:xfrm>
           <a:prstGeom prst="rect">
@@ -13802,20 +13521,20 @@
                 <a:latin typeface="Malgun Gothic"/>
                 <a:ea typeface="Malgun Gothic"/>
               </a:rPr>
-              <a:t>- XSUM 질문: 다른 행 수치를 옮겼는데 충실도 0.53→0.87</a:t>
+              <a:t>- XSUM 질문은 다른 행 수치를 옮겼는데 충실도 0.53→0.87</a:t>
             </a:r>
           </a:p>
         </p:txBody>
       </p:sp>
       <p:sp>
         <p:nvSpPr>
-          <p:cNvPr id="57" name="TextBox 56"/>
+          <p:cNvPr id="56" name="TextBox 55"/>
           <p:cNvSpPr txBox="1"/>
           <p:nvPr/>
         </p:nvSpPr>
         <p:spPr>
           <a:xfrm>
-            <a:off x="792000" y="29208861"/>
+            <a:off x="792000" y="29523528"/>
             <a:ext cx="19800000" cy="504000"/>
           </a:xfrm>
           <a:prstGeom prst="rect">

--- a/FINALDOCS/POSTER/FINAL/M_RAG_A1_FINAL_EDITABLE.pptx
+++ b/FINALDOCS/POSTER/FINAL/M_RAG_A1_FINAL_EDITABLE.pptx
@@ -13278,7 +13278,7 @@
                 <a:latin typeface="Malgun Gothic"/>
                 <a:ea typeface="Malgun Gothic"/>
               </a:rPr>
-              <a:t>- CAD는 토큰마다 로짓을 두 번 계산해 처리 시간이 약 세 배, 굵은 값은 가장 긴 시간</a:t>
+              <a:t>- CAD는 토큰마다 로짓을 두 번 계산해 처리 시간이 약 세 배(굵은 값은 가장 긴 시간)</a:t>
             </a:r>
           </a:p>
         </p:txBody>

--- a/FINALDOCS/POSTER/FINAL/M_RAG_A1_FINAL_EDITABLE.pptx
+++ b/FINALDOCS/POSTER/FINAL/M_RAG_A1_FINAL_EDITABLE.pptx
@@ -13550,7 +13550,7 @@
                 <a:latin typeface="Malgun Gothic"/>
                 <a:ea typeface="Malgun Gothic"/>
               </a:rPr>
-              <a:t>- 방법 질문에는 HyDE, 한국어 답변이 필요하면 HyDE+SCD</a:t>
+              <a:t>- 한 지표가 중요하면 기법 하나(관련성, 개념과 결과 질문은 HyDE)</a:t>
             </a:r>
           </a:p>
         </p:txBody>
@@ -13590,7 +13590,7 @@
                 <a:latin typeface="Malgun Gothic"/>
                 <a:ea typeface="Malgun Gothic"/>
               </a:rPr>
-              <a:t>- 수치 질문은 정답 수치가 담긴 구간의 검색을 먼저 확인</a:t>
+              <a:t>- 수치 질문은 정답 구간의 검색을 확인하고 충실도는 HyDE+CAD</a:t>
             </a:r>
           </a:p>
         </p:txBody>
@@ -13630,7 +13630,7 @@
                 <a:latin typeface="Malgun Gothic"/>
                 <a:ea typeface="Malgun Gothic"/>
               </a:rPr>
-              <a:t>- 개념과 결과 질문에는 미적용이나 HyDE</a:t>
+              <a:t>- 고루 지키려면 세 기법, 방법 질문에서 네 품질 지표가 모두 상승</a:t>
             </a:r>
           </a:p>
         </p:txBody>
@@ -13670,7 +13670,7 @@
                 <a:latin typeface="Malgun Gothic"/>
                 <a:ea typeface="Malgun Gothic"/>
               </a:rPr>
-              <a:t>- 조합의 일관된 이득은 한국어 비율이므로 유형에 맞는 기법 하나에 SCD 추가</a:t>
+              <a:t>- 세 기법은 최고값 없이 한국어 비율 0.73, 처리 시간은 약 세 배</a:t>
             </a:r>
           </a:p>
         </p:txBody>

--- a/FINALDOCS/POSTER/FINAL/M_RAG_A1_FINAL_EDITABLE.pptx
+++ b/FINALDOCS/POSTER/FINAL/M_RAG_A1_FINAL_EDITABLE.pptx
@@ -3140,7 +3140,7 @@
         </p:nvSpPr>
         <p:spPr>
           <a:xfrm>
-            <a:off x="792000" y="468000"/>
+            <a:off x="792000" y="324000"/>
             <a:ext cx="19800000" cy="1800000"/>
           </a:xfrm>
           <a:prstGeom prst="rect">
@@ -3197,7 +3197,7 @@
         </p:nvSpPr>
         <p:spPr>
           <a:xfrm>
-            <a:off x="792000" y="2520000"/>
+            <a:off x="792000" y="2340000"/>
             <a:ext cx="19800000" cy="432000"/>
           </a:xfrm>
           <a:prstGeom prst="rect">
@@ -3231,7 +3231,47 @@
       </p:sp>
       <p:sp>
         <p:nvSpPr>
-          <p:cNvPr id="5" name="Rectangle 4"/>
+          <p:cNvPr id="5" name="TextBox 4"/>
+          <p:cNvSpPr txBox="1"/>
+          <p:nvPr/>
+        </p:nvSpPr>
+        <p:spPr>
+          <a:xfrm>
+            <a:off x="792000" y="2862000"/>
+            <a:ext cx="19800000" cy="288000"/>
+          </a:xfrm>
+          <a:prstGeom prst="rect">
+            <a:avLst/>
+          </a:prstGeom>
+          <a:noFill/>
+        </p:spPr>
+        <p:txBody>
+          <a:bodyPr wrap="square" lIns="0" rIns="0" tIns="0" bIns="0">
+            <a:spAutoFit/>
+          </a:bodyPr>
+          <a:lstStyle/>
+          <a:p>
+            <a:pPr algn="ctr">
+              <a:lnSpc>
+                <a:spcPct val="115000"/>
+              </a:lnSpc>
+            </a:pPr>
+            <a:r>
+              <a:rPr sz="2000" b="0">
+                <a:solidFill>
+                  <a:srgbClr val="FFFFFF"/>
+                </a:solidFill>
+                <a:latin typeface="Malgun Gothic"/>
+                <a:ea typeface="Malgun Gothic"/>
+              </a:rPr>
+              <a:t>[학과] [학번] [이름], 지도교수 [지도교수]</a:t>
+            </a:r>
+          </a:p>
+        </p:txBody>
+      </p:sp>
+      <p:sp>
+        <p:nvSpPr>
+          <p:cNvPr id="6" name="Rectangle 5"/>
           <p:cNvSpPr/>
           <p:nvPr/>
         </p:nvSpPr>
@@ -3275,7 +3315,7 @@
       </p:sp>
       <p:sp>
         <p:nvSpPr>
-          <p:cNvPr id="6" name="TextBox 5"/>
+          <p:cNvPr id="7" name="TextBox 6"/>
           <p:cNvSpPr txBox="1"/>
           <p:nvPr/>
         </p:nvSpPr>
@@ -3315,7 +3355,7 @@
       </p:sp>
       <p:sp>
         <p:nvSpPr>
-          <p:cNvPr id="7" name="TextBox 6"/>
+          <p:cNvPr id="8" name="TextBox 7"/>
           <p:cNvSpPr txBox="1"/>
           <p:nvPr/>
         </p:nvSpPr>
@@ -3355,7 +3395,7 @@
       </p:sp>
       <p:sp>
         <p:nvSpPr>
-          <p:cNvPr id="8" name="TextBox 7"/>
+          <p:cNvPr id="9" name="TextBox 8"/>
           <p:cNvSpPr txBox="1"/>
           <p:nvPr/>
         </p:nvSpPr>
@@ -3395,7 +3435,7 @@
       </p:sp>
       <p:sp>
         <p:nvSpPr>
-          <p:cNvPr id="9" name="TextBox 8"/>
+          <p:cNvPr id="10" name="TextBox 9"/>
           <p:cNvSpPr txBox="1"/>
           <p:nvPr/>
         </p:nvSpPr>
@@ -3435,7 +3475,7 @@
       </p:sp>
       <p:sp>
         <p:nvSpPr>
-          <p:cNvPr id="10" name="Rectangle 9"/>
+          <p:cNvPr id="11" name="Rectangle 10"/>
           <p:cNvSpPr/>
           <p:nvPr/>
         </p:nvSpPr>
@@ -3479,7 +3519,7 @@
       </p:sp>
       <p:sp>
         <p:nvSpPr>
-          <p:cNvPr id="11" name="TextBox 10"/>
+          <p:cNvPr id="12" name="TextBox 11"/>
           <p:cNvSpPr txBox="1"/>
           <p:nvPr/>
         </p:nvSpPr>
@@ -3519,7 +3559,7 @@
       </p:sp>
       <p:pic>
         <p:nvPicPr>
-          <p:cNvPr id="12" name="Picture 11" descr="poster_pipeline.png"/>
+          <p:cNvPr id="13" name="Picture 12" descr="poster_pipeline.png"/>
           <p:cNvPicPr>
             <a:picLocks noChangeAspect="1"/>
           </p:cNvPicPr>
@@ -3543,7 +3583,7 @@
       </p:pic>
       <p:graphicFrame>
         <p:nvGraphicFramePr>
-          <p:cNvPr id="13" name="Table 12"/>
+          <p:cNvPr id="14" name="Table 13"/>
           <p:cNvGraphicFramePr>
             <a:graphicFrameLocks noGrp="1"/>
           </p:cNvGraphicFramePr>
@@ -5525,7 +5565,7 @@
       </p:graphicFrame>
       <p:sp>
         <p:nvSpPr>
-          <p:cNvPr id="14" name="TextBox 13"/>
+          <p:cNvPr id="15" name="TextBox 14"/>
           <p:cNvSpPr txBox="1"/>
           <p:nvPr/>
         </p:nvSpPr>
@@ -5567,7 +5607,7 @@
       </p:sp>
       <p:sp>
         <p:nvSpPr>
-          <p:cNvPr id="15" name="Rectangle 14"/>
+          <p:cNvPr id="16" name="Rectangle 15"/>
           <p:cNvSpPr/>
           <p:nvPr/>
         </p:nvSpPr>
@@ -5611,7 +5651,7 @@
       </p:sp>
       <p:sp>
         <p:nvSpPr>
-          <p:cNvPr id="16" name="TextBox 15"/>
+          <p:cNvPr id="17" name="TextBox 16"/>
           <p:cNvSpPr txBox="1"/>
           <p:nvPr/>
         </p:nvSpPr>
@@ -5651,7 +5691,7 @@
       </p:sp>
       <p:sp>
         <p:nvSpPr>
-          <p:cNvPr id="17" name="TextBox 16"/>
+          <p:cNvPr id="18" name="TextBox 17"/>
           <p:cNvSpPr txBox="1"/>
           <p:nvPr/>
         </p:nvSpPr>
@@ -5691,7 +5731,7 @@
       </p:sp>
       <p:sp>
         <p:nvSpPr>
-          <p:cNvPr id="18" name="TextBox 17"/>
+          <p:cNvPr id="19" name="TextBox 18"/>
           <p:cNvSpPr txBox="1"/>
           <p:nvPr/>
         </p:nvSpPr>
@@ -5731,7 +5771,7 @@
       </p:sp>
       <p:graphicFrame>
         <p:nvGraphicFramePr>
-          <p:cNvPr id="19" name="Table 18"/>
+          <p:cNvPr id="20" name="Table 19"/>
           <p:cNvGraphicFramePr>
             <a:graphicFrameLocks noGrp="1"/>
           </p:cNvGraphicFramePr>
@@ -6687,7 +6727,7 @@
       </p:graphicFrame>
       <p:sp>
         <p:nvSpPr>
-          <p:cNvPr id="20" name="TextBox 19"/>
+          <p:cNvPr id="21" name="TextBox 20"/>
           <p:cNvSpPr txBox="1"/>
           <p:nvPr/>
         </p:nvSpPr>
@@ -6727,7 +6767,7 @@
       </p:sp>
       <p:sp>
         <p:nvSpPr>
-          <p:cNvPr id="21" name="Rectangle 20"/>
+          <p:cNvPr id="22" name="Rectangle 21"/>
           <p:cNvSpPr/>
           <p:nvPr/>
         </p:nvSpPr>
@@ -6771,7 +6811,7 @@
       </p:sp>
       <p:sp>
         <p:nvSpPr>
-          <p:cNvPr id="22" name="TextBox 21"/>
+          <p:cNvPr id="23" name="TextBox 22"/>
           <p:cNvSpPr txBox="1"/>
           <p:nvPr/>
         </p:nvSpPr>
@@ -6811,7 +6851,7 @@
       </p:sp>
       <p:graphicFrame>
         <p:nvGraphicFramePr>
-          <p:cNvPr id="23" name="Table 22"/>
+          <p:cNvPr id="24" name="Table 23"/>
           <p:cNvGraphicFramePr>
             <a:graphicFrameLocks noGrp="1"/>
           </p:cNvGraphicFramePr>
@@ -7535,7 +7575,7 @@
       </p:graphicFrame>
       <p:sp>
         <p:nvSpPr>
-          <p:cNvPr id="24" name="TextBox 23"/>
+          <p:cNvPr id="25" name="TextBox 24"/>
           <p:cNvSpPr txBox="1"/>
           <p:nvPr/>
         </p:nvSpPr>
@@ -7575,7 +7615,7 @@
       </p:sp>
       <p:sp>
         <p:nvSpPr>
-          <p:cNvPr id="25" name="Rectangle 24"/>
+          <p:cNvPr id="26" name="Rectangle 25"/>
           <p:cNvSpPr/>
           <p:nvPr/>
         </p:nvSpPr>
@@ -7619,7 +7659,7 @@
       </p:sp>
       <p:sp>
         <p:nvSpPr>
-          <p:cNvPr id="26" name="TextBox 25"/>
+          <p:cNvPr id="27" name="TextBox 26"/>
           <p:cNvSpPr txBox="1"/>
           <p:nvPr/>
         </p:nvSpPr>
@@ -7659,7 +7699,7 @@
       </p:sp>
       <p:graphicFrame>
         <p:nvGraphicFramePr>
-          <p:cNvPr id="27" name="Table 26"/>
+          <p:cNvPr id="28" name="Table 27"/>
           <p:cNvGraphicFramePr>
             <a:graphicFrameLocks noGrp="1"/>
           </p:cNvGraphicFramePr>
@@ -10089,7 +10129,7 @@
       </p:graphicFrame>
       <p:sp>
         <p:nvSpPr>
-          <p:cNvPr id="28" name="TextBox 27"/>
+          <p:cNvPr id="29" name="TextBox 28"/>
           <p:cNvSpPr txBox="1"/>
           <p:nvPr/>
         </p:nvSpPr>
@@ -10129,7 +10169,7 @@
       </p:sp>
       <p:sp>
         <p:nvSpPr>
-          <p:cNvPr id="29" name="Rectangle 28"/>
+          <p:cNvPr id="30" name="Rectangle 29"/>
           <p:cNvSpPr/>
           <p:nvPr/>
         </p:nvSpPr>
@@ -10173,7 +10213,7 @@
       </p:sp>
       <p:sp>
         <p:nvSpPr>
-          <p:cNvPr id="30" name="TextBox 29"/>
+          <p:cNvPr id="31" name="TextBox 30"/>
           <p:cNvSpPr txBox="1"/>
           <p:nvPr/>
         </p:nvSpPr>
@@ -10213,7 +10253,7 @@
       </p:sp>
       <p:graphicFrame>
         <p:nvGraphicFramePr>
-          <p:cNvPr id="31" name="Table 30"/>
+          <p:cNvPr id="32" name="Table 31"/>
           <p:cNvGraphicFramePr>
             <a:graphicFrameLocks noGrp="1"/>
           </p:cNvGraphicFramePr>
@@ -17213,7 +17253,7 @@
       </p:graphicFrame>
       <p:sp>
         <p:nvSpPr>
-          <p:cNvPr id="32" name="TextBox 31"/>
+          <p:cNvPr id="33" name="TextBox 32"/>
           <p:cNvSpPr txBox="1"/>
           <p:nvPr/>
         </p:nvSpPr>
@@ -17253,7 +17293,7 @@
       </p:sp>
       <p:sp>
         <p:nvSpPr>
-          <p:cNvPr id="33" name="Rectangle 32"/>
+          <p:cNvPr id="34" name="Rectangle 33"/>
           <p:cNvSpPr/>
           <p:nvPr/>
         </p:nvSpPr>
@@ -17297,7 +17337,7 @@
       </p:sp>
       <p:sp>
         <p:nvSpPr>
-          <p:cNvPr id="34" name="TextBox 33"/>
+          <p:cNvPr id="35" name="TextBox 34"/>
           <p:cNvSpPr txBox="1"/>
           <p:nvPr/>
         </p:nvSpPr>
@@ -17337,7 +17377,7 @@
       </p:sp>
       <p:pic>
         <p:nvPicPr>
-          <p:cNvPr id="35" name="Picture 34" descr="poster_parallel.png"/>
+          <p:cNvPr id="36" name="Picture 35" descr="poster_parallel.png"/>
           <p:cNvPicPr>
             <a:picLocks noChangeAspect="1"/>
           </p:cNvPicPr>
@@ -17352,7 +17392,7 @@
         <p:spPr>
           <a:xfrm>
             <a:off x="792000" y="21531351"/>
-            <a:ext cx="19800000" cy="5200922"/>
+            <a:ext cx="19800000" cy="4744700"/>
           </a:xfrm>
           <a:prstGeom prst="rect">
             <a:avLst/>
@@ -17361,13 +17401,13 @@
       </p:pic>
       <p:sp>
         <p:nvSpPr>
-          <p:cNvPr id="36" name="TextBox 35"/>
+          <p:cNvPr id="37" name="TextBox 36"/>
           <p:cNvSpPr txBox="1"/>
           <p:nvPr/>
         </p:nvSpPr>
         <p:spPr>
           <a:xfrm>
-            <a:off x="792000" y="26768273"/>
+            <a:off x="792000" y="26312051"/>
             <a:ext cx="19800000" cy="318536"/>
           </a:xfrm>
           <a:prstGeom prst="rect">
@@ -17401,13 +17441,13 @@
       </p:sp>
       <p:sp>
         <p:nvSpPr>
-          <p:cNvPr id="37" name="Rectangle 36"/>
+          <p:cNvPr id="38" name="Rectangle 37"/>
           <p:cNvSpPr/>
           <p:nvPr/>
         </p:nvSpPr>
         <p:spPr>
           <a:xfrm>
-            <a:off x="792000" y="27248809"/>
+            <a:off x="792000" y="26792587"/>
             <a:ext cx="9612000" cy="468000"/>
           </a:xfrm>
           <a:prstGeom prst="rect">
@@ -17445,13 +17485,13 @@
       </p:sp>
       <p:sp>
         <p:nvSpPr>
-          <p:cNvPr id="38" name="TextBox 37"/>
+          <p:cNvPr id="39" name="TextBox 38"/>
           <p:cNvSpPr txBox="1"/>
           <p:nvPr/>
         </p:nvSpPr>
         <p:spPr>
           <a:xfrm>
-            <a:off x="936000" y="27274009"/>
+            <a:off x="936000" y="26817787"/>
             <a:ext cx="9324000" cy="360000"/>
           </a:xfrm>
           <a:prstGeom prst="rect">
@@ -17485,13 +17525,13 @@
       </p:sp>
       <p:sp>
         <p:nvSpPr>
-          <p:cNvPr id="39" name="TextBox 38"/>
+          <p:cNvPr id="40" name="TextBox 39"/>
           <p:cNvSpPr txBox="1"/>
           <p:nvPr/>
         </p:nvSpPr>
         <p:spPr>
           <a:xfrm>
-            <a:off x="792000" y="27860809"/>
+            <a:off x="792000" y="27404587"/>
             <a:ext cx="9612000" cy="335301"/>
           </a:xfrm>
           <a:prstGeom prst="rect">
@@ -17525,13 +17565,13 @@
       </p:sp>
       <p:sp>
         <p:nvSpPr>
-          <p:cNvPr id="40" name="TextBox 39"/>
+          <p:cNvPr id="41" name="TextBox 40"/>
           <p:cNvSpPr txBox="1"/>
           <p:nvPr/>
         </p:nvSpPr>
         <p:spPr>
           <a:xfrm>
-            <a:off x="792000" y="28286110"/>
+            <a:off x="792000" y="27829888"/>
             <a:ext cx="9612000" cy="335301"/>
           </a:xfrm>
           <a:prstGeom prst="rect">
@@ -17565,13 +17605,13 @@
       </p:sp>
       <p:sp>
         <p:nvSpPr>
-          <p:cNvPr id="41" name="TextBox 40"/>
+          <p:cNvPr id="42" name="TextBox 41"/>
           <p:cNvSpPr txBox="1"/>
           <p:nvPr/>
         </p:nvSpPr>
         <p:spPr>
           <a:xfrm>
-            <a:off x="792000" y="28711412"/>
+            <a:off x="792000" y="28255190"/>
             <a:ext cx="9612000" cy="335301"/>
           </a:xfrm>
           <a:prstGeom prst="rect">
@@ -17605,13 +17645,13 @@
       </p:sp>
       <p:sp>
         <p:nvSpPr>
-          <p:cNvPr id="42" name="TextBox 41"/>
+          <p:cNvPr id="43" name="TextBox 42"/>
           <p:cNvSpPr txBox="1"/>
           <p:nvPr/>
         </p:nvSpPr>
         <p:spPr>
           <a:xfrm>
-            <a:off x="792000" y="29136713"/>
+            <a:off x="792000" y="28680491"/>
             <a:ext cx="9612000" cy="335301"/>
           </a:xfrm>
           <a:prstGeom prst="rect">
@@ -17645,13 +17685,13 @@
       </p:sp>
       <p:sp>
         <p:nvSpPr>
-          <p:cNvPr id="43" name="Rectangle 42"/>
+          <p:cNvPr id="44" name="Rectangle 43"/>
           <p:cNvSpPr/>
           <p:nvPr/>
         </p:nvSpPr>
         <p:spPr>
           <a:xfrm>
-            <a:off x="10980000" y="27248809"/>
+            <a:off x="10980000" y="26792587"/>
             <a:ext cx="9612000" cy="468000"/>
           </a:xfrm>
           <a:prstGeom prst="rect">
@@ -17689,13 +17729,13 @@
       </p:sp>
       <p:sp>
         <p:nvSpPr>
-          <p:cNvPr id="44" name="TextBox 43"/>
+          <p:cNvPr id="45" name="TextBox 44"/>
           <p:cNvSpPr txBox="1"/>
           <p:nvPr/>
         </p:nvSpPr>
         <p:spPr>
           <a:xfrm>
-            <a:off x="11124000" y="27274009"/>
+            <a:off x="11124000" y="26817787"/>
             <a:ext cx="9324000" cy="360000"/>
           </a:xfrm>
           <a:prstGeom prst="rect">
@@ -17729,13 +17769,13 @@
       </p:sp>
       <p:sp>
         <p:nvSpPr>
-          <p:cNvPr id="45" name="TextBox 44"/>
+          <p:cNvPr id="46" name="TextBox 45"/>
           <p:cNvSpPr txBox="1"/>
           <p:nvPr/>
         </p:nvSpPr>
         <p:spPr>
           <a:xfrm>
-            <a:off x="10980000" y="27860809"/>
+            <a:off x="10980000" y="27404587"/>
             <a:ext cx="9612000" cy="335301"/>
           </a:xfrm>
           <a:prstGeom prst="rect">
@@ -17769,13 +17809,13 @@
       </p:sp>
       <p:sp>
         <p:nvSpPr>
-          <p:cNvPr id="46" name="TextBox 45"/>
+          <p:cNvPr id="47" name="TextBox 46"/>
           <p:cNvSpPr txBox="1"/>
           <p:nvPr/>
         </p:nvSpPr>
         <p:spPr>
           <a:xfrm>
-            <a:off x="10980000" y="28286110"/>
+            <a:off x="10980000" y="27829888"/>
             <a:ext cx="9612000" cy="335301"/>
           </a:xfrm>
           <a:prstGeom prst="rect">
@@ -17809,13 +17849,13 @@
       </p:sp>
       <p:sp>
         <p:nvSpPr>
-          <p:cNvPr id="47" name="TextBox 46"/>
+          <p:cNvPr id="48" name="TextBox 47"/>
           <p:cNvSpPr txBox="1"/>
           <p:nvPr/>
         </p:nvSpPr>
         <p:spPr>
           <a:xfrm>
-            <a:off x="10980000" y="28711412"/>
+            <a:off x="10980000" y="28255190"/>
             <a:ext cx="9612000" cy="335301"/>
           </a:xfrm>
           <a:prstGeom prst="rect">
@@ -17849,13 +17889,13 @@
       </p:sp>
       <p:sp>
         <p:nvSpPr>
-          <p:cNvPr id="48" name="TextBox 47"/>
+          <p:cNvPr id="49" name="TextBox 48"/>
           <p:cNvSpPr txBox="1"/>
           <p:nvPr/>
         </p:nvSpPr>
         <p:spPr>
           <a:xfrm>
-            <a:off x="10980000" y="29136713"/>
+            <a:off x="10980000" y="28680491"/>
             <a:ext cx="9612000" cy="335301"/>
           </a:xfrm>
           <a:prstGeom prst="rect">
@@ -17889,14 +17929,14 @@
       </p:sp>
       <p:sp>
         <p:nvSpPr>
-          <p:cNvPr id="49" name="TextBox 48"/>
+          <p:cNvPr id="50" name="TextBox 49"/>
           <p:cNvSpPr txBox="1"/>
           <p:nvPr/>
         </p:nvSpPr>
         <p:spPr>
           <a:xfrm>
-            <a:off x="792000" y="29634014"/>
-            <a:ext cx="9612000" cy="396000"/>
+            <a:off x="792000" y="29177792"/>
+            <a:ext cx="9612000" cy="792000"/>
           </a:xfrm>
           <a:prstGeom prst="rect">
             <a:avLst/>
@@ -17915,14 +17955,14 @@
               </a:lnSpc>
             </a:pPr>
             <a:r>
-              <a:rPr sz="1500" b="0">
+              <a:rPr sz="1700" b="0">
                 <a:solidFill>
-                  <a:srgbClr val="777777"/>
+                  <a:srgbClr val="263044"/>
                 </a:solidFill>
                 <a:latin typeface="Malgun Gothic"/>
                 <a:ea typeface="Malgun Gothic"/>
               </a:rPr>
-              <a:t>[1] Lewis et al., RAG, NeurIPS 2020  [2] Gao et al., HyDE, ACL 2023  [3] Shi et al., CAD, NAACL 2024</a:t>
+              <a:t>[1] Lewis et al., RAG, NeurIPS 2020  [2] Gao et al., HyDE, ACL 2023</a:t>
             </a:r>
           </a:p>
           <a:p>
@@ -17932,14 +17972,31 @@
               </a:lnSpc>
             </a:pPr>
             <a:r>
-              <a:rPr sz="1500" b="0">
+              <a:rPr sz="1700" b="0">
                 <a:solidFill>
-                  <a:srgbClr val="777777"/>
+                  <a:srgbClr val="263044"/>
                 </a:solidFill>
                 <a:latin typeface="Malgun Gothic"/>
                 <a:ea typeface="Malgun Gothic"/>
               </a:rPr>
-              <a:t>[4] Li et al., SCD, AAAI 2026  [5] Es et al., RAGAs, EACL 2024</a:t>
+              <a:t>[3] Shi et al., CAD, NAACL 2024  [4] Li et al., SCD, AAAI 2026</a:t>
+            </a:r>
+          </a:p>
+          <a:p>
+            <a:pPr algn="l">
+              <a:lnSpc>
+                <a:spcPct val="115000"/>
+              </a:lnSpc>
+            </a:pPr>
+            <a:r>
+              <a:rPr sz="1700" b="0">
+                <a:solidFill>
+                  <a:srgbClr val="263044"/>
+                </a:solidFill>
+                <a:latin typeface="Malgun Gothic"/>
+                <a:ea typeface="Malgun Gothic"/>
+              </a:rPr>
+              <a:t>[5] Es et al., RAGAs, EACL 2024</a:t>
             </a:r>
           </a:p>
         </p:txBody>

--- a/FINALDOCS/POSTER/FINAL/M_RAG_A1_FINAL_EDITABLE.pptx
+++ b/FINALDOCS/POSTER/FINAL/M_RAG_A1_FINAL_EDITABLE.pptx
@@ -17638,7 +17638,7 @@
                 <a:latin typeface="Malgun Gothic"/>
                 <a:ea typeface="Malgun Gothic"/>
               </a:rPr>
-              <a:t>- 고루 지키려면 세 기법, 방법 질문에서 네 품질 지표가 모두 상승</a:t>
+              <a:t>- 고루 지키려면 세 기법(방법 질문의 네 품질 지표 모두 상승)</a:t>
             </a:r>
           </a:p>
         </p:txBody>
@@ -17678,7 +17678,7 @@
                 <a:latin typeface="Malgun Gothic"/>
                 <a:ea typeface="Malgun Gothic"/>
               </a:rPr>
-              <a:t>- 세 기법은 최고값 없이 한국어 비율 0.73, 처리 시간은 약 세 배</a:t>
+              <a:t>- 조합은 HyDE 단독보다 관련성이 낮고 일관된 이득은 SCD의 한국어 비율</a:t>
             </a:r>
           </a:p>
         </p:txBody>
@@ -17802,7 +17802,7 @@
                 <a:latin typeface="Malgun Gothic"/>
                 <a:ea typeface="Malgun Gothic"/>
               </a:rPr>
-              <a:t>- BIC 질문은 HyDE가 근거 구간을 찾아 관련성이 0.00에서 0.89로</a:t>
+              <a:t>- BIC 질문은 HyDE가 근거 구간을 찾아 관련성이 0.00에서 0.89로 오름</a:t>
             </a:r>
           </a:p>
         </p:txBody>
@@ -17842,7 +17842,7 @@
                 <a:latin typeface="Malgun Gothic"/>
                 <a:ea typeface="Malgun Gothic"/>
               </a:rPr>
-              <a:t>- QuALITY 질문은 HyDE 후 73.68이 빠져 관련성이 0.87에서 0.00으로</a:t>
+              <a:t>- QuALITY 질문은 HyDE 후 73.68이 빠져 관련성이 0.87에서 0.00으로 내림</a:t>
             </a:r>
           </a:p>
         </p:txBody>
@@ -17882,7 +17882,7 @@
                 <a:latin typeface="Malgun Gothic"/>
                 <a:ea typeface="Malgun Gothic"/>
               </a:rPr>
-              <a:t>- XSUM 질문은 CAD가 다른 행 수치를 옮겼는데 충실도가 0.53에서 0.87로</a:t>
+              <a:t>- XSUM 질문은 CAD가 다른 행 수치를 옮겼는데 충실도가 0.53에서 0.87로 오름</a:t>
             </a:r>
           </a:p>
         </p:txBody>
@@ -17922,7 +17922,7 @@
                 <a:latin typeface="Malgun Gothic"/>
                 <a:ea typeface="Malgun Gothic"/>
               </a:rPr>
-              <a:t>- RAG 이점 질문은 CAD 후 지시문만 남아 관련성이 0.90에서 0.00으로</a:t>
+              <a:t>- RAG 이점 질문은 CAD 후 지시문만 남아 관련성이 0.90에서 0.00으로 내림</a:t>
             </a:r>
           </a:p>
         </p:txBody>

--- a/FINALDOCS/POSTER/FINAL/M_RAG_A1_FINAL_EDITABLE.pptx
+++ b/FINALDOCS/POSTER/FINAL/M_RAG_A1_FINAL_EDITABLE.pptx
@@ -3097,7 +3097,7 @@
         <p:spPr>
           <a:xfrm>
             <a:off x="0" y="0"/>
-            <a:ext cx="21384000" cy="3312000"/>
+            <a:ext cx="21384000" cy="2880000"/>
           </a:xfrm>
           <a:prstGeom prst="rect">
             <a:avLst/>
@@ -3197,8 +3197,8 @@
         </p:nvSpPr>
         <p:spPr>
           <a:xfrm>
-            <a:off x="792000" y="2340000"/>
-            <a:ext cx="19800000" cy="432000"/>
+            <a:off x="792000" y="2376000"/>
+            <a:ext cx="19800000" cy="360000"/>
           </a:xfrm>
           <a:prstGeom prst="rect">
             <a:avLst/>
@@ -3217,47 +3217,7 @@
               </a:lnSpc>
             </a:pPr>
             <a:r>
-              <a:rPr sz="3000" b="0">
-                <a:solidFill>
-                  <a:srgbClr val="FFFFFF"/>
-                </a:solidFill>
-                <a:latin typeface="Malgun Gothic"/>
-                <a:ea typeface="Malgun Gothic"/>
-              </a:rPr>
-              <a:t>질문 유형별 원점수와 실제 답변 분석</a:t>
-            </a:r>
-          </a:p>
-        </p:txBody>
-      </p:sp>
-      <p:sp>
-        <p:nvSpPr>
-          <p:cNvPr id="5" name="TextBox 4"/>
-          <p:cNvSpPr txBox="1"/>
-          <p:nvPr/>
-        </p:nvSpPr>
-        <p:spPr>
-          <a:xfrm>
-            <a:off x="792000" y="2862000"/>
-            <a:ext cx="19800000" cy="288000"/>
-          </a:xfrm>
-          <a:prstGeom prst="rect">
-            <a:avLst/>
-          </a:prstGeom>
-          <a:noFill/>
-        </p:spPr>
-        <p:txBody>
-          <a:bodyPr wrap="square" lIns="0" rIns="0" tIns="0" bIns="0">
-            <a:spAutoFit/>
-          </a:bodyPr>
-          <a:lstStyle/>
-          <a:p>
-            <a:pPr algn="ctr">
-              <a:lnSpc>
-                <a:spcPct val="115000"/>
-              </a:lnSpc>
-            </a:pPr>
-            <a:r>
-              <a:rPr sz="2000" b="0">
+              <a:rPr sz="2400" b="0">
                 <a:solidFill>
                   <a:srgbClr val="FFFFFF"/>
                 </a:solidFill>
@@ -3271,13 +3231,13 @@
       </p:sp>
       <p:sp>
         <p:nvSpPr>
-          <p:cNvPr id="6" name="Rectangle 5"/>
+          <p:cNvPr id="5" name="Rectangle 4"/>
           <p:cNvSpPr/>
           <p:nvPr/>
         </p:nvSpPr>
         <p:spPr>
           <a:xfrm>
-            <a:off x="792000" y="3672000"/>
+            <a:off x="792000" y="3240000"/>
             <a:ext cx="9612000" cy="468000"/>
           </a:xfrm>
           <a:prstGeom prst="rect">
@@ -3315,13 +3275,13 @@
       </p:sp>
       <p:sp>
         <p:nvSpPr>
-          <p:cNvPr id="7" name="TextBox 6"/>
+          <p:cNvPr id="6" name="TextBox 5"/>
           <p:cNvSpPr txBox="1"/>
           <p:nvPr/>
         </p:nvSpPr>
         <p:spPr>
           <a:xfrm>
-            <a:off x="936000" y="3697200"/>
+            <a:off x="936000" y="3265200"/>
             <a:ext cx="9324000" cy="360000"/>
           </a:xfrm>
           <a:prstGeom prst="rect">
@@ -3355,13 +3315,13 @@
       </p:sp>
       <p:sp>
         <p:nvSpPr>
-          <p:cNvPr id="8" name="TextBox 7"/>
+          <p:cNvPr id="7" name="TextBox 6"/>
           <p:cNvSpPr txBox="1"/>
           <p:nvPr/>
         </p:nvSpPr>
         <p:spPr>
           <a:xfrm>
-            <a:off x="792000" y="4284000"/>
+            <a:off x="792000" y="3852000"/>
             <a:ext cx="9612000" cy="352066"/>
           </a:xfrm>
           <a:prstGeom prst="rect">
@@ -3395,13 +3355,13 @@
       </p:sp>
       <p:sp>
         <p:nvSpPr>
-          <p:cNvPr id="9" name="TextBox 8"/>
+          <p:cNvPr id="8" name="TextBox 7"/>
           <p:cNvSpPr txBox="1"/>
           <p:nvPr/>
         </p:nvSpPr>
         <p:spPr>
           <a:xfrm>
-            <a:off x="792000" y="4726066"/>
+            <a:off x="792000" y="4294066"/>
             <a:ext cx="9612000" cy="352066"/>
           </a:xfrm>
           <a:prstGeom prst="rect">
@@ -3435,13 +3395,13 @@
       </p:sp>
       <p:sp>
         <p:nvSpPr>
-          <p:cNvPr id="10" name="TextBox 9"/>
+          <p:cNvPr id="9" name="TextBox 8"/>
           <p:cNvSpPr txBox="1"/>
           <p:nvPr/>
         </p:nvSpPr>
         <p:spPr>
           <a:xfrm>
-            <a:off x="792000" y="5168132"/>
+            <a:off x="792000" y="4736132"/>
             <a:ext cx="9612000" cy="352066"/>
           </a:xfrm>
           <a:prstGeom prst="rect">
@@ -3475,13 +3435,13 @@
       </p:sp>
       <p:sp>
         <p:nvSpPr>
-          <p:cNvPr id="11" name="Rectangle 10"/>
+          <p:cNvPr id="10" name="Rectangle 9"/>
           <p:cNvSpPr/>
           <p:nvPr/>
         </p:nvSpPr>
         <p:spPr>
           <a:xfrm>
-            <a:off x="792000" y="6042198"/>
+            <a:off x="792000" y="5610198"/>
             <a:ext cx="9612000" cy="468000"/>
           </a:xfrm>
           <a:prstGeom prst="rect">
@@ -3519,13 +3479,13 @@
       </p:sp>
       <p:sp>
         <p:nvSpPr>
-          <p:cNvPr id="12" name="TextBox 11"/>
+          <p:cNvPr id="11" name="TextBox 10"/>
           <p:cNvSpPr txBox="1"/>
           <p:nvPr/>
         </p:nvSpPr>
         <p:spPr>
           <a:xfrm>
-            <a:off x="936000" y="6067398"/>
+            <a:off x="936000" y="5635398"/>
             <a:ext cx="9324000" cy="360000"/>
           </a:xfrm>
           <a:prstGeom prst="rect">
@@ -3559,7 +3519,7 @@
       </p:sp>
       <p:pic>
         <p:nvPicPr>
-          <p:cNvPr id="13" name="Picture 12" descr="poster_pipeline.png"/>
+          <p:cNvPr id="12" name="Picture 11" descr="poster_pipeline.png"/>
           <p:cNvPicPr>
             <a:picLocks noChangeAspect="1"/>
           </p:cNvPicPr>
@@ -3573,7 +3533,7 @@
         </p:blipFill>
         <p:spPr>
           <a:xfrm>
-            <a:off x="792000" y="6798198"/>
+            <a:off x="792000" y="6366198"/>
             <a:ext cx="9612000" cy="3661714"/>
           </a:xfrm>
           <a:prstGeom prst="rect">
@@ -3583,14 +3543,14 @@
       </p:pic>
       <p:graphicFrame>
         <p:nvGraphicFramePr>
-          <p:cNvPr id="14" name="Table 13"/>
+          <p:cNvPr id="13" name="Table 12"/>
           <p:cNvGraphicFramePr>
             <a:graphicFrameLocks noGrp="1"/>
           </p:cNvGraphicFramePr>
           <p:nvPr/>
         </p:nvGraphicFramePr>
         <p:xfrm>
-          <a:off x="792000" y="10819912"/>
+          <a:off x="792000" y="10387912"/>
           <a:ext cx="9612000" cy="3287781"/>
         </p:xfrm>
         <a:graphic>
@@ -5565,13 +5525,13 @@
       </p:graphicFrame>
       <p:sp>
         <p:nvSpPr>
-          <p:cNvPr id="15" name="TextBox 14"/>
+          <p:cNvPr id="14" name="TextBox 13"/>
           <p:cNvSpPr txBox="1"/>
           <p:nvPr/>
         </p:nvSpPr>
         <p:spPr>
           <a:xfrm>
-            <a:off x="792000" y="14215698"/>
+            <a:off x="792000" y="13783698"/>
             <a:ext cx="9612000" cy="905313"/>
           </a:xfrm>
           <a:prstGeom prst="rect">
@@ -5607,13 +5567,13 @@
       </p:sp>
       <p:sp>
         <p:nvSpPr>
-          <p:cNvPr id="16" name="Rectangle 15"/>
+          <p:cNvPr id="15" name="Rectangle 14"/>
           <p:cNvSpPr/>
           <p:nvPr/>
         </p:nvSpPr>
         <p:spPr>
           <a:xfrm>
-            <a:off x="10980000" y="3672000"/>
+            <a:off x="10980000" y="3240000"/>
             <a:ext cx="9612000" cy="468000"/>
           </a:xfrm>
           <a:prstGeom prst="rect">
@@ -5651,13 +5611,13 @@
       </p:sp>
       <p:sp>
         <p:nvSpPr>
-          <p:cNvPr id="17" name="TextBox 16"/>
+          <p:cNvPr id="16" name="TextBox 15"/>
           <p:cNvSpPr txBox="1"/>
           <p:nvPr/>
         </p:nvSpPr>
         <p:spPr>
           <a:xfrm>
-            <a:off x="11124000" y="3697200"/>
+            <a:off x="11124000" y="3265200"/>
             <a:ext cx="9324000" cy="360000"/>
           </a:xfrm>
           <a:prstGeom prst="rect">
@@ -5691,13 +5651,13 @@
       </p:sp>
       <p:sp>
         <p:nvSpPr>
-          <p:cNvPr id="18" name="TextBox 17"/>
+          <p:cNvPr id="17" name="TextBox 16"/>
           <p:cNvSpPr txBox="1"/>
           <p:nvPr/>
         </p:nvSpPr>
         <p:spPr>
           <a:xfrm>
-            <a:off x="10980000" y="4284000"/>
+            <a:off x="10980000" y="3852000"/>
             <a:ext cx="9612000" cy="352066"/>
           </a:xfrm>
           <a:prstGeom prst="rect">
@@ -5731,13 +5691,13 @@
       </p:sp>
       <p:sp>
         <p:nvSpPr>
-          <p:cNvPr id="19" name="TextBox 18"/>
+          <p:cNvPr id="18" name="TextBox 17"/>
           <p:cNvSpPr txBox="1"/>
           <p:nvPr/>
         </p:nvSpPr>
         <p:spPr>
           <a:xfrm>
-            <a:off x="10980000" y="4726066"/>
+            <a:off x="10980000" y="4294066"/>
             <a:ext cx="9612000" cy="352066"/>
           </a:xfrm>
           <a:prstGeom prst="rect">
@@ -5771,14 +5731,14 @@
       </p:sp>
       <p:graphicFrame>
         <p:nvGraphicFramePr>
-          <p:cNvPr id="20" name="Table 19"/>
+          <p:cNvPr id="19" name="Table 18"/>
           <p:cNvGraphicFramePr>
             <a:graphicFrameLocks noGrp="1"/>
           </p:cNvGraphicFramePr>
           <p:nvPr/>
         </p:nvGraphicFramePr>
         <p:xfrm>
-          <a:off x="10980000" y="5204132"/>
+          <a:off x="10980000" y="4772132"/>
           <a:ext cx="9611999" cy="2712113"/>
         </p:xfrm>
         <a:graphic>
@@ -6727,13 +6687,13 @@
       </p:graphicFrame>
       <p:sp>
         <p:nvSpPr>
-          <p:cNvPr id="21" name="TextBox 20"/>
+          <p:cNvPr id="20" name="TextBox 19"/>
           <p:cNvSpPr txBox="1"/>
           <p:nvPr/>
         </p:nvSpPr>
         <p:spPr>
           <a:xfrm>
-            <a:off x="10980000" y="7988249"/>
+            <a:off x="10980000" y="7556249"/>
             <a:ext cx="9612000" cy="288000"/>
           </a:xfrm>
           <a:prstGeom prst="rect">
@@ -6767,13 +6727,13 @@
       </p:sp>
       <p:sp>
         <p:nvSpPr>
-          <p:cNvPr id="22" name="Rectangle 21"/>
+          <p:cNvPr id="21" name="Rectangle 20"/>
           <p:cNvSpPr/>
           <p:nvPr/>
         </p:nvSpPr>
         <p:spPr>
           <a:xfrm>
-            <a:off x="10980000" y="8384249"/>
+            <a:off x="10980000" y="7952249"/>
             <a:ext cx="9612000" cy="468000"/>
           </a:xfrm>
           <a:prstGeom prst="rect">
@@ -6811,13 +6771,13 @@
       </p:sp>
       <p:sp>
         <p:nvSpPr>
-          <p:cNvPr id="23" name="TextBox 22"/>
+          <p:cNvPr id="22" name="TextBox 21"/>
           <p:cNvSpPr txBox="1"/>
           <p:nvPr/>
         </p:nvSpPr>
         <p:spPr>
           <a:xfrm>
-            <a:off x="11124000" y="8409449"/>
+            <a:off x="11124000" y="7977449"/>
             <a:ext cx="9324000" cy="360000"/>
           </a:xfrm>
           <a:prstGeom prst="rect">
@@ -6851,14 +6811,14 @@
       </p:sp>
       <p:graphicFrame>
         <p:nvGraphicFramePr>
-          <p:cNvPr id="24" name="Table 23"/>
+          <p:cNvPr id="23" name="Table 22"/>
           <p:cNvGraphicFramePr>
             <a:graphicFrameLocks noGrp="1"/>
           </p:cNvGraphicFramePr>
           <p:nvPr/>
         </p:nvGraphicFramePr>
         <p:xfrm>
-          <a:off x="10980000" y="8996249"/>
+          <a:off x="10980000" y="8564249"/>
           <a:ext cx="9611998" cy="1461236"/>
         </p:xfrm>
         <a:graphic>
@@ -7575,13 +7535,13 @@
       </p:graphicFrame>
       <p:sp>
         <p:nvSpPr>
-          <p:cNvPr id="25" name="TextBox 24"/>
+          <p:cNvPr id="24" name="TextBox 23"/>
           <p:cNvSpPr txBox="1"/>
           <p:nvPr/>
         </p:nvSpPr>
         <p:spPr>
           <a:xfrm>
-            <a:off x="10980000" y="10565487"/>
+            <a:off x="10980000" y="10133487"/>
             <a:ext cx="9612000" cy="318536"/>
           </a:xfrm>
           <a:prstGeom prst="rect">
@@ -7615,13 +7575,13 @@
       </p:sp>
       <p:sp>
         <p:nvSpPr>
-          <p:cNvPr id="26" name="Rectangle 25"/>
+          <p:cNvPr id="25" name="Rectangle 24"/>
           <p:cNvSpPr/>
           <p:nvPr/>
         </p:nvSpPr>
         <p:spPr>
           <a:xfrm>
-            <a:off x="10980000" y="11046023"/>
+            <a:off x="10980000" y="10614023"/>
             <a:ext cx="9612000" cy="468000"/>
           </a:xfrm>
           <a:prstGeom prst="rect">
@@ -7659,13 +7619,13 @@
       </p:sp>
       <p:sp>
         <p:nvSpPr>
-          <p:cNvPr id="27" name="TextBox 26"/>
+          <p:cNvPr id="26" name="TextBox 25"/>
           <p:cNvSpPr txBox="1"/>
           <p:nvPr/>
         </p:nvSpPr>
         <p:spPr>
           <a:xfrm>
-            <a:off x="11124000" y="11071223"/>
+            <a:off x="11124000" y="10639223"/>
             <a:ext cx="9324000" cy="360000"/>
           </a:xfrm>
           <a:prstGeom prst="rect">
@@ -7699,14 +7659,14 @@
       </p:sp>
       <p:graphicFrame>
         <p:nvGraphicFramePr>
-          <p:cNvPr id="28" name="Table 27"/>
+          <p:cNvPr id="27" name="Table 26"/>
           <p:cNvGraphicFramePr>
             <a:graphicFrameLocks noGrp="1"/>
           </p:cNvGraphicFramePr>
           <p:nvPr/>
         </p:nvGraphicFramePr>
         <p:xfrm>
-          <a:off x="10980000" y="11658023"/>
+          <a:off x="10980000" y="11226023"/>
           <a:ext cx="9611996" cy="3566691"/>
         </p:xfrm>
         <a:graphic>
@@ -10129,13 +10089,13 @@
       </p:graphicFrame>
       <p:sp>
         <p:nvSpPr>
-          <p:cNvPr id="29" name="TextBox 28"/>
+          <p:cNvPr id="28" name="TextBox 27"/>
           <p:cNvSpPr txBox="1"/>
           <p:nvPr/>
         </p:nvSpPr>
         <p:spPr>
           <a:xfrm>
-            <a:off x="10980000" y="15332719"/>
+            <a:off x="10980000" y="14900719"/>
             <a:ext cx="9612000" cy="318536"/>
           </a:xfrm>
           <a:prstGeom prst="rect">
@@ -10169,13 +10129,13 @@
       </p:sp>
       <p:sp>
         <p:nvSpPr>
-          <p:cNvPr id="30" name="Rectangle 29"/>
+          <p:cNvPr id="29" name="Rectangle 28"/>
           <p:cNvSpPr/>
           <p:nvPr/>
         </p:nvSpPr>
         <p:spPr>
           <a:xfrm>
-            <a:off x="792000" y="15885255"/>
+            <a:off x="792000" y="15453255"/>
             <a:ext cx="19800000" cy="468000"/>
           </a:xfrm>
           <a:prstGeom prst="rect">
@@ -10213,13 +10173,13 @@
       </p:sp>
       <p:sp>
         <p:nvSpPr>
-          <p:cNvPr id="31" name="TextBox 30"/>
+          <p:cNvPr id="30" name="TextBox 29"/>
           <p:cNvSpPr txBox="1"/>
           <p:nvPr/>
         </p:nvSpPr>
         <p:spPr>
           <a:xfrm>
-            <a:off x="936000" y="15910455"/>
+            <a:off x="936000" y="15478455"/>
             <a:ext cx="19512000" cy="360000"/>
           </a:xfrm>
           <a:prstGeom prst="rect">
@@ -10253,14 +10213,14 @@
       </p:sp>
       <p:graphicFrame>
         <p:nvGraphicFramePr>
-          <p:cNvPr id="32" name="Table 31"/>
+          <p:cNvPr id="31" name="Table 30"/>
           <p:cNvGraphicFramePr>
             <a:graphicFrameLocks noGrp="1"/>
           </p:cNvGraphicFramePr>
           <p:nvPr/>
         </p:nvGraphicFramePr>
         <p:xfrm>
-          <a:off x="792000" y="16497255"/>
+          <a:off x="792000" y="16065255"/>
           <a:ext cx="19799991" cy="3761555"/>
         </p:xfrm>
         <a:graphic>
@@ -17253,13 +17213,13 @@
       </p:graphicFrame>
       <p:sp>
         <p:nvSpPr>
-          <p:cNvPr id="33" name="TextBox 32"/>
+          <p:cNvPr id="32" name="TextBox 31"/>
           <p:cNvSpPr txBox="1"/>
           <p:nvPr/>
         </p:nvSpPr>
         <p:spPr>
           <a:xfrm>
-            <a:off x="792000" y="20366815"/>
+            <a:off x="792000" y="19934815"/>
             <a:ext cx="19800000" cy="318536"/>
           </a:xfrm>
           <a:prstGeom prst="rect">
@@ -17293,13 +17253,13 @@
       </p:sp>
       <p:sp>
         <p:nvSpPr>
-          <p:cNvPr id="34" name="Rectangle 33"/>
+          <p:cNvPr id="33" name="Rectangle 32"/>
           <p:cNvSpPr/>
           <p:nvPr/>
         </p:nvSpPr>
         <p:spPr>
           <a:xfrm>
-            <a:off x="792000" y="20919351"/>
+            <a:off x="792000" y="20487351"/>
             <a:ext cx="19800000" cy="468000"/>
           </a:xfrm>
           <a:prstGeom prst="rect">
@@ -17337,13 +17297,13 @@
       </p:sp>
       <p:sp>
         <p:nvSpPr>
-          <p:cNvPr id="35" name="TextBox 34"/>
+          <p:cNvPr id="34" name="TextBox 33"/>
           <p:cNvSpPr txBox="1"/>
           <p:nvPr/>
         </p:nvSpPr>
         <p:spPr>
           <a:xfrm>
-            <a:off x="936000" y="20944551"/>
+            <a:off x="936000" y="20512551"/>
             <a:ext cx="19512000" cy="360000"/>
           </a:xfrm>
           <a:prstGeom prst="rect">
@@ -17377,7 +17337,7 @@
       </p:sp>
       <p:pic>
         <p:nvPicPr>
-          <p:cNvPr id="36" name="Picture 35" descr="poster_parallel.png"/>
+          <p:cNvPr id="35" name="Picture 34" descr="poster_parallel.png"/>
           <p:cNvPicPr>
             <a:picLocks noChangeAspect="1"/>
           </p:cNvPicPr>
@@ -17391,8 +17351,8 @@
         </p:blipFill>
         <p:spPr>
           <a:xfrm>
-            <a:off x="792000" y="21531351"/>
-            <a:ext cx="19800000" cy="4744700"/>
+            <a:off x="792000" y="21099351"/>
+            <a:ext cx="19800000" cy="4470968"/>
           </a:xfrm>
           <a:prstGeom prst="rect">
             <a:avLst/>
@@ -17401,13 +17361,13 @@
       </p:pic>
       <p:sp>
         <p:nvSpPr>
-          <p:cNvPr id="37" name="TextBox 36"/>
+          <p:cNvPr id="36" name="TextBox 35"/>
           <p:cNvSpPr txBox="1"/>
           <p:nvPr/>
         </p:nvSpPr>
         <p:spPr>
           <a:xfrm>
-            <a:off x="792000" y="26312051"/>
+            <a:off x="792000" y="25606319"/>
             <a:ext cx="19800000" cy="318536"/>
           </a:xfrm>
           <a:prstGeom prst="rect">
@@ -17441,13 +17401,13 @@
       </p:sp>
       <p:sp>
         <p:nvSpPr>
-          <p:cNvPr id="38" name="Rectangle 37"/>
+          <p:cNvPr id="37" name="Rectangle 36"/>
           <p:cNvSpPr/>
           <p:nvPr/>
         </p:nvSpPr>
         <p:spPr>
           <a:xfrm>
-            <a:off x="792000" y="26792587"/>
+            <a:off x="792000" y="26086855"/>
             <a:ext cx="9612000" cy="468000"/>
           </a:xfrm>
           <a:prstGeom prst="rect">
@@ -17485,13 +17445,13 @@
       </p:sp>
       <p:sp>
         <p:nvSpPr>
-          <p:cNvPr id="39" name="TextBox 38"/>
+          <p:cNvPr id="38" name="TextBox 37"/>
           <p:cNvSpPr txBox="1"/>
           <p:nvPr/>
         </p:nvSpPr>
         <p:spPr>
           <a:xfrm>
-            <a:off x="936000" y="26817787"/>
+            <a:off x="936000" y="26112055"/>
             <a:ext cx="9324000" cy="360000"/>
           </a:xfrm>
           <a:prstGeom prst="rect">
@@ -17525,13 +17485,13 @@
       </p:sp>
       <p:sp>
         <p:nvSpPr>
-          <p:cNvPr id="40" name="TextBox 39"/>
+          <p:cNvPr id="39" name="TextBox 38"/>
           <p:cNvSpPr txBox="1"/>
           <p:nvPr/>
         </p:nvSpPr>
         <p:spPr>
           <a:xfrm>
-            <a:off x="792000" y="27404587"/>
+            <a:off x="792000" y="26698855"/>
             <a:ext cx="9612000" cy="335301"/>
           </a:xfrm>
           <a:prstGeom prst="rect">
@@ -17565,13 +17525,13 @@
       </p:sp>
       <p:sp>
         <p:nvSpPr>
-          <p:cNvPr id="41" name="TextBox 40"/>
+          <p:cNvPr id="40" name="TextBox 39"/>
           <p:cNvSpPr txBox="1"/>
           <p:nvPr/>
         </p:nvSpPr>
         <p:spPr>
           <a:xfrm>
-            <a:off x="792000" y="27829888"/>
+            <a:off x="792000" y="27124156"/>
             <a:ext cx="9612000" cy="335301"/>
           </a:xfrm>
           <a:prstGeom prst="rect">
@@ -17605,13 +17565,13 @@
       </p:sp>
       <p:sp>
         <p:nvSpPr>
-          <p:cNvPr id="42" name="TextBox 41"/>
+          <p:cNvPr id="41" name="TextBox 40"/>
           <p:cNvSpPr txBox="1"/>
           <p:nvPr/>
         </p:nvSpPr>
         <p:spPr>
           <a:xfrm>
-            <a:off x="792000" y="28255190"/>
+            <a:off x="792000" y="27549458"/>
             <a:ext cx="9612000" cy="335301"/>
           </a:xfrm>
           <a:prstGeom prst="rect">
@@ -17645,13 +17605,13 @@
       </p:sp>
       <p:sp>
         <p:nvSpPr>
-          <p:cNvPr id="43" name="TextBox 42"/>
+          <p:cNvPr id="42" name="TextBox 41"/>
           <p:cNvSpPr txBox="1"/>
           <p:nvPr/>
         </p:nvSpPr>
         <p:spPr>
           <a:xfrm>
-            <a:off x="792000" y="28680491"/>
+            <a:off x="792000" y="27974759"/>
             <a:ext cx="9612000" cy="335301"/>
           </a:xfrm>
           <a:prstGeom prst="rect">
@@ -17685,13 +17645,13 @@
       </p:sp>
       <p:sp>
         <p:nvSpPr>
-          <p:cNvPr id="44" name="Rectangle 43"/>
+          <p:cNvPr id="43" name="Rectangle 42"/>
           <p:cNvSpPr/>
           <p:nvPr/>
         </p:nvSpPr>
         <p:spPr>
           <a:xfrm>
-            <a:off x="10980000" y="26792587"/>
+            <a:off x="10980000" y="26086855"/>
             <a:ext cx="9612000" cy="468000"/>
           </a:xfrm>
           <a:prstGeom prst="rect">
@@ -17729,13 +17689,13 @@
       </p:sp>
       <p:sp>
         <p:nvSpPr>
-          <p:cNvPr id="45" name="TextBox 44"/>
+          <p:cNvPr id="44" name="TextBox 43"/>
           <p:cNvSpPr txBox="1"/>
           <p:nvPr/>
         </p:nvSpPr>
         <p:spPr>
           <a:xfrm>
-            <a:off x="11124000" y="26817787"/>
+            <a:off x="11124000" y="26112055"/>
             <a:ext cx="9324000" cy="360000"/>
           </a:xfrm>
           <a:prstGeom prst="rect">
@@ -17769,13 +17729,13 @@
       </p:sp>
       <p:sp>
         <p:nvSpPr>
-          <p:cNvPr id="46" name="TextBox 45"/>
+          <p:cNvPr id="45" name="TextBox 44"/>
           <p:cNvSpPr txBox="1"/>
           <p:nvPr/>
         </p:nvSpPr>
         <p:spPr>
           <a:xfrm>
-            <a:off x="10980000" y="27404587"/>
+            <a:off x="10980000" y="26698855"/>
             <a:ext cx="9612000" cy="335301"/>
           </a:xfrm>
           <a:prstGeom prst="rect">
@@ -17809,13 +17769,13 @@
       </p:sp>
       <p:sp>
         <p:nvSpPr>
-          <p:cNvPr id="47" name="TextBox 46"/>
+          <p:cNvPr id="46" name="TextBox 45"/>
           <p:cNvSpPr txBox="1"/>
           <p:nvPr/>
         </p:nvSpPr>
         <p:spPr>
           <a:xfrm>
-            <a:off x="10980000" y="27829888"/>
+            <a:off x="10980000" y="27124156"/>
             <a:ext cx="9612000" cy="335301"/>
           </a:xfrm>
           <a:prstGeom prst="rect">
@@ -17849,13 +17809,13 @@
       </p:sp>
       <p:sp>
         <p:nvSpPr>
-          <p:cNvPr id="48" name="TextBox 47"/>
+          <p:cNvPr id="47" name="TextBox 46"/>
           <p:cNvSpPr txBox="1"/>
           <p:nvPr/>
         </p:nvSpPr>
         <p:spPr>
           <a:xfrm>
-            <a:off x="10980000" y="28255190"/>
+            <a:off x="10980000" y="27549458"/>
             <a:ext cx="9612000" cy="335301"/>
           </a:xfrm>
           <a:prstGeom prst="rect">
@@ -17889,13 +17849,13 @@
       </p:sp>
       <p:sp>
         <p:nvSpPr>
-          <p:cNvPr id="49" name="TextBox 48"/>
+          <p:cNvPr id="48" name="TextBox 47"/>
           <p:cNvSpPr txBox="1"/>
           <p:nvPr/>
         </p:nvSpPr>
         <p:spPr>
           <a:xfrm>
-            <a:off x="10980000" y="28680491"/>
+            <a:off x="10980000" y="27974759"/>
             <a:ext cx="9612000" cy="335301"/>
           </a:xfrm>
           <a:prstGeom prst="rect">
@@ -17929,14 +17889,14 @@
       </p:sp>
       <p:sp>
         <p:nvSpPr>
-          <p:cNvPr id="50" name="TextBox 49"/>
+          <p:cNvPr id="49" name="TextBox 48"/>
           <p:cNvSpPr txBox="1"/>
           <p:nvPr/>
         </p:nvSpPr>
         <p:spPr>
           <a:xfrm>
-            <a:off x="792000" y="29177792"/>
-            <a:ext cx="9612000" cy="792000"/>
+            <a:off x="792000" y="28472060"/>
+            <a:ext cx="9612000" cy="1368000"/>
           </a:xfrm>
           <a:prstGeom prst="rect">
             <a:avLst/>
@@ -17962,7 +17922,7 @@
                 <a:latin typeface="Malgun Gothic"/>
                 <a:ea typeface="Malgun Gothic"/>
               </a:rPr>
-              <a:t>[1] Lewis et al., RAG, NeurIPS 2020  [2] Gao et al., HyDE, ACL 2023</a:t>
+              <a:t>[1] Lewis et al., RAG, NeurIPS 2020</a:t>
             </a:r>
           </a:p>
           <a:p>
@@ -17979,7 +17939,41 @@
                 <a:latin typeface="Malgun Gothic"/>
                 <a:ea typeface="Malgun Gothic"/>
               </a:rPr>
-              <a:t>[3] Shi et al., CAD, NAACL 2024  [4] Li et al., SCD, AAAI 2026</a:t>
+              <a:t>[2] Gao et al., HyDE, ACL 2023</a:t>
+            </a:r>
+          </a:p>
+          <a:p>
+            <a:pPr algn="l">
+              <a:lnSpc>
+                <a:spcPct val="115000"/>
+              </a:lnSpc>
+            </a:pPr>
+            <a:r>
+              <a:rPr sz="1700" b="0">
+                <a:solidFill>
+                  <a:srgbClr val="263044"/>
+                </a:solidFill>
+                <a:latin typeface="Malgun Gothic"/>
+                <a:ea typeface="Malgun Gothic"/>
+              </a:rPr>
+              <a:t>[3] Shi et al., CAD, NAACL 2024</a:t>
+            </a:r>
+          </a:p>
+          <a:p>
+            <a:pPr algn="l">
+              <a:lnSpc>
+                <a:spcPct val="115000"/>
+              </a:lnSpc>
+            </a:pPr>
+            <a:r>
+              <a:rPr sz="1700" b="0">
+                <a:solidFill>
+                  <a:srgbClr val="263044"/>
+                </a:solidFill>
+                <a:latin typeface="Malgun Gothic"/>
+                <a:ea typeface="Malgun Gothic"/>
+              </a:rPr>
+              <a:t>[4] Li et al., SCD, AAAI 2026</a:t>
             </a:r>
           </a:p>
           <a:p>

--- a/FINALDOCS/POSTER/FINAL/M_RAG_A1_FINAL_EDITABLE.pptx
+++ b/FINALDOCS/POSTER/FINAL/M_RAG_A1_FINAL_EDITABLE.pptx
@@ -17352,7 +17352,7 @@
         <p:spPr>
           <a:xfrm>
             <a:off x="792000" y="21099351"/>
-            <a:ext cx="19800000" cy="4470968"/>
+            <a:ext cx="19800000" cy="5292166"/>
           </a:xfrm>
           <a:prstGeom prst="rect">
             <a:avLst/>
@@ -17367,7 +17367,7 @@
         </p:nvSpPr>
         <p:spPr>
           <a:xfrm>
-            <a:off x="792000" y="25606319"/>
+            <a:off x="792000" y="26427517"/>
             <a:ext cx="19800000" cy="318536"/>
           </a:xfrm>
           <a:prstGeom prst="rect">
@@ -17407,7 +17407,7 @@
         </p:nvSpPr>
         <p:spPr>
           <a:xfrm>
-            <a:off x="792000" y="26086855"/>
+            <a:off x="792000" y="26908053"/>
             <a:ext cx="9612000" cy="468000"/>
           </a:xfrm>
           <a:prstGeom prst="rect">
@@ -17451,7 +17451,7 @@
         </p:nvSpPr>
         <p:spPr>
           <a:xfrm>
-            <a:off x="936000" y="26112055"/>
+            <a:off x="936000" y="26933253"/>
             <a:ext cx="9324000" cy="360000"/>
           </a:xfrm>
           <a:prstGeom prst="rect">
@@ -17491,7 +17491,7 @@
         </p:nvSpPr>
         <p:spPr>
           <a:xfrm>
-            <a:off x="792000" y="26698855"/>
+            <a:off x="792000" y="27520053"/>
             <a:ext cx="9612000" cy="335301"/>
           </a:xfrm>
           <a:prstGeom prst="rect">
@@ -17531,7 +17531,7 @@
         </p:nvSpPr>
         <p:spPr>
           <a:xfrm>
-            <a:off x="792000" y="27124156"/>
+            <a:off x="792000" y="27945354"/>
             <a:ext cx="9612000" cy="335301"/>
           </a:xfrm>
           <a:prstGeom prst="rect">
@@ -17571,7 +17571,7 @@
         </p:nvSpPr>
         <p:spPr>
           <a:xfrm>
-            <a:off x="792000" y="27549458"/>
+            <a:off x="792000" y="28370656"/>
             <a:ext cx="9612000" cy="335301"/>
           </a:xfrm>
           <a:prstGeom prst="rect">
@@ -17611,7 +17611,7 @@
         </p:nvSpPr>
         <p:spPr>
           <a:xfrm>
-            <a:off x="792000" y="27974759"/>
+            <a:off x="792000" y="28795957"/>
             <a:ext cx="9612000" cy="335301"/>
           </a:xfrm>
           <a:prstGeom prst="rect">
@@ -17651,7 +17651,7 @@
         </p:nvSpPr>
         <p:spPr>
           <a:xfrm>
-            <a:off x="10980000" y="26086855"/>
+            <a:off x="10980000" y="26908053"/>
             <a:ext cx="9612000" cy="468000"/>
           </a:xfrm>
           <a:prstGeom prst="rect">
@@ -17695,7 +17695,7 @@
         </p:nvSpPr>
         <p:spPr>
           <a:xfrm>
-            <a:off x="11124000" y="26112055"/>
+            <a:off x="11124000" y="26933253"/>
             <a:ext cx="9324000" cy="360000"/>
           </a:xfrm>
           <a:prstGeom prst="rect">
@@ -17735,7 +17735,7 @@
         </p:nvSpPr>
         <p:spPr>
           <a:xfrm>
-            <a:off x="10980000" y="26698855"/>
+            <a:off x="10980000" y="27520053"/>
             <a:ext cx="9612000" cy="335301"/>
           </a:xfrm>
           <a:prstGeom prst="rect">
@@ -17775,7 +17775,7 @@
         </p:nvSpPr>
         <p:spPr>
           <a:xfrm>
-            <a:off x="10980000" y="27124156"/>
+            <a:off x="10980000" y="27945354"/>
             <a:ext cx="9612000" cy="335301"/>
           </a:xfrm>
           <a:prstGeom prst="rect">
@@ -17815,7 +17815,7 @@
         </p:nvSpPr>
         <p:spPr>
           <a:xfrm>
-            <a:off x="10980000" y="27549458"/>
+            <a:off x="10980000" y="28370656"/>
             <a:ext cx="9612000" cy="335301"/>
           </a:xfrm>
           <a:prstGeom prst="rect">
@@ -17855,7 +17855,7 @@
         </p:nvSpPr>
         <p:spPr>
           <a:xfrm>
-            <a:off x="10980000" y="27974759"/>
+            <a:off x="10980000" y="28795957"/>
             <a:ext cx="9612000" cy="335301"/>
           </a:xfrm>
           <a:prstGeom prst="rect">
@@ -17895,8 +17895,8 @@
         </p:nvSpPr>
         <p:spPr>
           <a:xfrm>
-            <a:off x="792000" y="28472060"/>
-            <a:ext cx="9612000" cy="1368000"/>
+            <a:off x="792000" y="29329258"/>
+            <a:ext cx="19800000" cy="576000"/>
           </a:xfrm>
           <a:prstGeom prst="rect">
             <a:avLst/>
@@ -17922,7 +17922,7 @@
                 <a:latin typeface="Malgun Gothic"/>
                 <a:ea typeface="Malgun Gothic"/>
               </a:rPr>
-              <a:t>[1] Lewis et al., RAG, NeurIPS 2020</a:t>
+              <a:t>[1] Lewis et al., RAG, NeurIPS 2020      [2] Gao et al., HyDE, ACL 2023      [3] Shi et al., CAD, NAACL 2024</a:t>
             </a:r>
           </a:p>
           <a:p>
@@ -17939,58 +17939,7 @@
                 <a:latin typeface="Malgun Gothic"/>
                 <a:ea typeface="Malgun Gothic"/>
               </a:rPr>
-              <a:t>[2] Gao et al., HyDE, ACL 2023</a:t>
-            </a:r>
-          </a:p>
-          <a:p>
-            <a:pPr algn="l">
-              <a:lnSpc>
-                <a:spcPct val="115000"/>
-              </a:lnSpc>
-            </a:pPr>
-            <a:r>
-              <a:rPr sz="1700" b="0">
-                <a:solidFill>
-                  <a:srgbClr val="263044"/>
-                </a:solidFill>
-                <a:latin typeface="Malgun Gothic"/>
-                <a:ea typeface="Malgun Gothic"/>
-              </a:rPr>
-              <a:t>[3] Shi et al., CAD, NAACL 2024</a:t>
-            </a:r>
-          </a:p>
-          <a:p>
-            <a:pPr algn="l">
-              <a:lnSpc>
-                <a:spcPct val="115000"/>
-              </a:lnSpc>
-            </a:pPr>
-            <a:r>
-              <a:rPr sz="1700" b="0">
-                <a:solidFill>
-                  <a:srgbClr val="263044"/>
-                </a:solidFill>
-                <a:latin typeface="Malgun Gothic"/>
-                <a:ea typeface="Malgun Gothic"/>
-              </a:rPr>
-              <a:t>[4] Li et al., SCD, AAAI 2026</a:t>
-            </a:r>
-          </a:p>
-          <a:p>
-            <a:pPr algn="l">
-              <a:lnSpc>
-                <a:spcPct val="115000"/>
-              </a:lnSpc>
-            </a:pPr>
-            <a:r>
-              <a:rPr sz="1700" b="0">
-                <a:solidFill>
-                  <a:srgbClr val="263044"/>
-                </a:solidFill>
-                <a:latin typeface="Malgun Gothic"/>
-                <a:ea typeface="Malgun Gothic"/>
-              </a:rPr>
-              <a:t>[5] Es et al., RAGAs, EACL 2024</a:t>
+              <a:t>[4] Li et al., SCD, AAAI 2026      [5] Es et al., RAGAs, EACL 2024</a:t>
             </a:r>
           </a:p>
         </p:txBody>

--- a/FINALDOCS/POSTER/FINAL/M_RAG_A1_FINAL_EDITABLE.pptx
+++ b/FINALDOCS/POSTER/FINAL/M_RAG_A1_FINAL_EDITABLE.pptx
@@ -17352,7 +17352,7 @@
         <p:spPr>
           <a:xfrm>
             <a:off x="792000" y="21099351"/>
-            <a:ext cx="19800000" cy="5292166"/>
+            <a:ext cx="19800000" cy="5565899"/>
           </a:xfrm>
           <a:prstGeom prst="rect">
             <a:avLst/>
@@ -17367,7 +17367,7 @@
         </p:nvSpPr>
         <p:spPr>
           <a:xfrm>
-            <a:off x="792000" y="26427517"/>
+            <a:off x="792000" y="26701250"/>
             <a:ext cx="19800000" cy="318536"/>
           </a:xfrm>
           <a:prstGeom prst="rect">
@@ -17407,7 +17407,7 @@
         </p:nvSpPr>
         <p:spPr>
           <a:xfrm>
-            <a:off x="792000" y="26908053"/>
+            <a:off x="792000" y="27181786"/>
             <a:ext cx="9612000" cy="468000"/>
           </a:xfrm>
           <a:prstGeom prst="rect">
@@ -17451,7 +17451,7 @@
         </p:nvSpPr>
         <p:spPr>
           <a:xfrm>
-            <a:off x="936000" y="26933253"/>
+            <a:off x="936000" y="27206986"/>
             <a:ext cx="9324000" cy="360000"/>
           </a:xfrm>
           <a:prstGeom prst="rect">
@@ -17491,7 +17491,7 @@
         </p:nvSpPr>
         <p:spPr>
           <a:xfrm>
-            <a:off x="792000" y="27520053"/>
+            <a:off x="792000" y="27793786"/>
             <a:ext cx="9612000" cy="335301"/>
           </a:xfrm>
           <a:prstGeom prst="rect">
@@ -17531,7 +17531,7 @@
         </p:nvSpPr>
         <p:spPr>
           <a:xfrm>
-            <a:off x="792000" y="27945354"/>
+            <a:off x="792000" y="28219087"/>
             <a:ext cx="9612000" cy="335301"/>
           </a:xfrm>
           <a:prstGeom prst="rect">
@@ -17571,7 +17571,7 @@
         </p:nvSpPr>
         <p:spPr>
           <a:xfrm>
-            <a:off x="792000" y="28370656"/>
+            <a:off x="792000" y="28644389"/>
             <a:ext cx="9612000" cy="335301"/>
           </a:xfrm>
           <a:prstGeom prst="rect">
@@ -17611,7 +17611,7 @@
         </p:nvSpPr>
         <p:spPr>
           <a:xfrm>
-            <a:off x="792000" y="28795957"/>
+            <a:off x="792000" y="29069690"/>
             <a:ext cx="9612000" cy="335301"/>
           </a:xfrm>
           <a:prstGeom prst="rect">
@@ -17651,7 +17651,7 @@
         </p:nvSpPr>
         <p:spPr>
           <a:xfrm>
-            <a:off x="10980000" y="26908053"/>
+            <a:off x="10980000" y="27181786"/>
             <a:ext cx="9612000" cy="468000"/>
           </a:xfrm>
           <a:prstGeom prst="rect">
@@ -17695,7 +17695,7 @@
         </p:nvSpPr>
         <p:spPr>
           <a:xfrm>
-            <a:off x="11124000" y="26933253"/>
+            <a:off x="11124000" y="27206986"/>
             <a:ext cx="9324000" cy="360000"/>
           </a:xfrm>
           <a:prstGeom prst="rect">
@@ -17735,7 +17735,7 @@
         </p:nvSpPr>
         <p:spPr>
           <a:xfrm>
-            <a:off x="10980000" y="27520053"/>
+            <a:off x="10980000" y="27793786"/>
             <a:ext cx="9612000" cy="335301"/>
           </a:xfrm>
           <a:prstGeom prst="rect">
@@ -17775,7 +17775,7 @@
         </p:nvSpPr>
         <p:spPr>
           <a:xfrm>
-            <a:off x="10980000" y="27945354"/>
+            <a:off x="10980000" y="28219087"/>
             <a:ext cx="9612000" cy="335301"/>
           </a:xfrm>
           <a:prstGeom prst="rect">
@@ -17815,7 +17815,7 @@
         </p:nvSpPr>
         <p:spPr>
           <a:xfrm>
-            <a:off x="10980000" y="28370656"/>
+            <a:off x="10980000" y="28644389"/>
             <a:ext cx="9612000" cy="335301"/>
           </a:xfrm>
           <a:prstGeom prst="rect">
@@ -17855,7 +17855,7 @@
         </p:nvSpPr>
         <p:spPr>
           <a:xfrm>
-            <a:off x="10980000" y="28795957"/>
+            <a:off x="10980000" y="29069690"/>
             <a:ext cx="9612000" cy="335301"/>
           </a:xfrm>
           <a:prstGeom prst="rect">
@@ -17895,8 +17895,8 @@
         </p:nvSpPr>
         <p:spPr>
           <a:xfrm>
-            <a:off x="792000" y="29329258"/>
-            <a:ext cx="19800000" cy="576000"/>
+            <a:off x="792000" y="29602991"/>
+            <a:ext cx="19800000" cy="324000"/>
           </a:xfrm>
           <a:prstGeom prst="rect">
             <a:avLst/>
@@ -17922,24 +17922,7 @@
                 <a:latin typeface="Malgun Gothic"/>
                 <a:ea typeface="Malgun Gothic"/>
               </a:rPr>
-              <a:t>[1] Lewis et al., RAG, NeurIPS 2020      [2] Gao et al., HyDE, ACL 2023      [3] Shi et al., CAD, NAACL 2024</a:t>
-            </a:r>
-          </a:p>
-          <a:p>
-            <a:pPr algn="l">
-              <a:lnSpc>
-                <a:spcPct val="115000"/>
-              </a:lnSpc>
-            </a:pPr>
-            <a:r>
-              <a:rPr sz="1700" b="0">
-                <a:solidFill>
-                  <a:srgbClr val="263044"/>
-                </a:solidFill>
-                <a:latin typeface="Malgun Gothic"/>
-                <a:ea typeface="Malgun Gothic"/>
-              </a:rPr>
-              <a:t>[4] Li et al., SCD, AAAI 2026      [5] Es et al., RAGAs, EACL 2024</a:t>
+              <a:t>[1] Lewis et al., RAG, NeurIPS 2020   [2] Gao et al., HyDE, ACL 2023   [3] Shi et al., CAD, NAACL 2024   [4] Li et al., SCD, AAAI 2026   [5] Es et al., RAGAs, EACL 2024</a:t>
             </a:r>
           </a:p>
         </p:txBody>

--- a/FINALDOCS/POSTER/FINAL/M_RAG_A1_FINAL_EDITABLE.pptx
+++ b/FINALDOCS/POSTER/FINAL/M_RAG_A1_FINAL_EDITABLE.pptx
@@ -3238,6 +3238,438 @@
         <p:spPr>
           <a:xfrm>
             <a:off x="792000" y="3240000"/>
+            <a:ext cx="9612000" cy="468000"/>
+          </a:xfrm>
+          <a:prstGeom prst="rect">
+            <a:avLst/>
+          </a:prstGeom>
+          <a:solidFill>
+            <a:srgbClr val="695184"/>
+          </a:solidFill>
+          <a:ln>
+            <a:noFill/>
+          </a:ln>
+          <a:effectLst/>
+        </p:spPr>
+        <p:style>
+          <a:lnRef idx="1">
+            <a:schemeClr val="accent1"/>
+          </a:lnRef>
+          <a:fillRef idx="3">
+            <a:schemeClr val="accent1"/>
+          </a:fillRef>
+          <a:effectRef idx="2">
+            <a:schemeClr val="accent1"/>
+          </a:effectRef>
+          <a:fontRef idx="minor">
+            <a:schemeClr val="lt1"/>
+          </a:fontRef>
+        </p:style>
+        <p:txBody>
+          <a:bodyPr rtlCol="0" anchor="ctr"/>
+          <a:lstStyle/>
+          <a:p>
+            <a:pPr algn="ctr"/>
+          </a:p>
+        </p:txBody>
+      </p:sp>
+      <p:sp>
+        <p:nvSpPr>
+          <p:cNvPr id="6" name="TextBox 5"/>
+          <p:cNvSpPr txBox="1"/>
+          <p:nvPr/>
+        </p:nvSpPr>
+        <p:spPr>
+          <a:xfrm>
+            <a:off x="936000" y="3265200"/>
+            <a:ext cx="9324000" cy="360000"/>
+          </a:xfrm>
+          <a:prstGeom prst="rect">
+            <a:avLst/>
+          </a:prstGeom>
+          <a:noFill/>
+        </p:spPr>
+        <p:txBody>
+          <a:bodyPr wrap="square" lIns="0" rIns="0" tIns="0" bIns="0">
+            <a:spAutoFit/>
+          </a:bodyPr>
+          <a:lstStyle/>
+          <a:p>
+            <a:pPr algn="l">
+              <a:lnSpc>
+                <a:spcPct val="115000"/>
+              </a:lnSpc>
+            </a:pPr>
+            <a:r>
+              <a:rPr sz="2700" b="1">
+                <a:solidFill>
+                  <a:srgbClr val="FFFFFF"/>
+                </a:solidFill>
+                <a:latin typeface="Malgun Gothic"/>
+                <a:ea typeface="Malgun Gothic"/>
+              </a:rPr>
+              <a:t>01 연구 배경과 목적</a:t>
+            </a:r>
+          </a:p>
+        </p:txBody>
+      </p:sp>
+      <p:sp>
+        <p:nvSpPr>
+          <p:cNvPr id="7" name="TextBox 6"/>
+          <p:cNvSpPr txBox="1"/>
+          <p:nvPr/>
+        </p:nvSpPr>
+        <p:spPr>
+          <a:xfrm>
+            <a:off x="792000" y="3852000"/>
+            <a:ext cx="9612000" cy="352066"/>
+          </a:xfrm>
+          <a:prstGeom prst="rect">
+            <a:avLst/>
+          </a:prstGeom>
+          <a:noFill/>
+        </p:spPr>
+        <p:txBody>
+          <a:bodyPr wrap="square" lIns="0" rIns="0" tIns="0" bIns="0">
+            <a:spAutoFit/>
+          </a:bodyPr>
+          <a:lstStyle/>
+          <a:p>
+            <a:pPr algn="l">
+              <a:lnSpc>
+                <a:spcPct val="115000"/>
+              </a:lnSpc>
+            </a:pPr>
+            <a:r>
+              <a:rPr sz="2100" b="0">
+                <a:solidFill>
+                  <a:srgbClr val="263044"/>
+                </a:solidFill>
+                <a:latin typeface="Malgun Gothic"/>
+                <a:ea typeface="Malgun Gothic"/>
+              </a:rPr>
+              <a:t>- 한국어 질문으로 영어 논문을 찾아 한국어로 답하는 RAG</a:t>
+            </a:r>
+          </a:p>
+        </p:txBody>
+      </p:sp>
+      <p:sp>
+        <p:nvSpPr>
+          <p:cNvPr id="8" name="TextBox 7"/>
+          <p:cNvSpPr txBox="1"/>
+          <p:nvPr/>
+        </p:nvSpPr>
+        <p:spPr>
+          <a:xfrm>
+            <a:off x="792000" y="4294066"/>
+            <a:ext cx="9612000" cy="352066"/>
+          </a:xfrm>
+          <a:prstGeom prst="rect">
+            <a:avLst/>
+          </a:prstGeom>
+          <a:noFill/>
+        </p:spPr>
+        <p:txBody>
+          <a:bodyPr wrap="square" lIns="0" rIns="0" tIns="0" bIns="0">
+            <a:spAutoFit/>
+          </a:bodyPr>
+          <a:lstStyle/>
+          <a:p>
+            <a:pPr algn="l">
+              <a:lnSpc>
+                <a:spcPct val="115000"/>
+              </a:lnSpc>
+            </a:pPr>
+            <a:r>
+              <a:rPr sz="2100" b="0">
+                <a:solidFill>
+                  <a:srgbClr val="263044"/>
+                </a:solidFill>
+                <a:latin typeface="Malgun Gothic"/>
+                <a:ea typeface="Malgun Gothic"/>
+              </a:rPr>
+              <a:t>- 질문과 원문의 어휘가 달라 근거 구간을 찾기 어려움</a:t>
+            </a:r>
+          </a:p>
+        </p:txBody>
+      </p:sp>
+      <p:sp>
+        <p:nvSpPr>
+          <p:cNvPr id="9" name="TextBox 8"/>
+          <p:cNvSpPr txBox="1"/>
+          <p:nvPr/>
+        </p:nvSpPr>
+        <p:spPr>
+          <a:xfrm>
+            <a:off x="792000" y="4736132"/>
+            <a:ext cx="9612000" cy="352066"/>
+          </a:xfrm>
+          <a:prstGeom prst="rect">
+            <a:avLst/>
+          </a:prstGeom>
+          <a:noFill/>
+        </p:spPr>
+        <p:txBody>
+          <a:bodyPr wrap="square" lIns="0" rIns="0" tIns="0" bIns="0">
+            <a:spAutoFit/>
+          </a:bodyPr>
+          <a:lstStyle/>
+          <a:p>
+            <a:pPr algn="l">
+              <a:lnSpc>
+                <a:spcPct val="115000"/>
+              </a:lnSpc>
+            </a:pPr>
+            <a:r>
+              <a:rPr sz="2100" b="0">
+                <a:solidFill>
+                  <a:srgbClr val="263044"/>
+                </a:solidFill>
+                <a:latin typeface="Malgun Gothic"/>
+                <a:ea typeface="Malgun Gothic"/>
+              </a:rPr>
+              <a:t>- 영어 근거를 한국어 답변에 충실히 옮기기 어려움</a:t>
+            </a:r>
+          </a:p>
+        </p:txBody>
+      </p:sp>
+      <p:sp>
+        <p:nvSpPr>
+          <p:cNvPr id="10" name="TextBox 9"/>
+          <p:cNvSpPr txBox="1"/>
+          <p:nvPr/>
+        </p:nvSpPr>
+        <p:spPr>
+          <a:xfrm>
+            <a:off x="792000" y="5178198"/>
+            <a:ext cx="9612000" cy="352066"/>
+          </a:xfrm>
+          <a:prstGeom prst="rect">
+            <a:avLst/>
+          </a:prstGeom>
+          <a:noFill/>
+        </p:spPr>
+        <p:txBody>
+          <a:bodyPr wrap="square" lIns="0" rIns="0" tIns="0" bIns="0">
+            <a:spAutoFit/>
+          </a:bodyPr>
+          <a:lstStyle/>
+          <a:p>
+            <a:pPr algn="l">
+              <a:lnSpc>
+                <a:spcPct val="115000"/>
+              </a:lnSpc>
+            </a:pPr>
+            <a:r>
+              <a:rPr sz="2100" b="0">
+                <a:solidFill>
+                  <a:srgbClr val="263044"/>
+                </a:solidFill>
+                <a:latin typeface="Malgun Gothic"/>
+                <a:ea typeface="Malgun Gothic"/>
+              </a:rPr>
+              <a:t>- 답변이 근거를 따라 영어로 바뀌는 언어 이탈</a:t>
+            </a:r>
+          </a:p>
+        </p:txBody>
+      </p:sp>
+      <p:sp>
+        <p:nvSpPr>
+          <p:cNvPr id="11" name="TextBox 10"/>
+          <p:cNvSpPr txBox="1"/>
+          <p:nvPr/>
+        </p:nvSpPr>
+        <p:spPr>
+          <a:xfrm>
+            <a:off x="792000" y="5620264"/>
+            <a:ext cx="9612000" cy="352066"/>
+          </a:xfrm>
+          <a:prstGeom prst="rect">
+            <a:avLst/>
+          </a:prstGeom>
+          <a:noFill/>
+        </p:spPr>
+        <p:txBody>
+          <a:bodyPr wrap="square" lIns="0" rIns="0" tIns="0" bIns="0">
+            <a:spAutoFit/>
+          </a:bodyPr>
+          <a:lstStyle/>
+          <a:p>
+            <a:pPr algn="l">
+              <a:lnSpc>
+                <a:spcPct val="115000"/>
+              </a:lnSpc>
+            </a:pPr>
+            <a:r>
+              <a:rPr sz="2100" b="0">
+                <a:solidFill>
+                  <a:srgbClr val="263044"/>
+                </a:solidFill>
+                <a:latin typeface="Malgun Gothic"/>
+                <a:ea typeface="Malgun Gothic"/>
+              </a:rPr>
+              <a:t>- 세 문제에 맞춘 HyDE, CAD, SCD를 같은 질문 60개에 조합</a:t>
+            </a:r>
+          </a:p>
+        </p:txBody>
+      </p:sp>
+      <p:sp>
+        <p:nvSpPr>
+          <p:cNvPr id="12" name="TextBox 11"/>
+          <p:cNvSpPr txBox="1"/>
+          <p:nvPr/>
+        </p:nvSpPr>
+        <p:spPr>
+          <a:xfrm>
+            <a:off x="792000" y="6062330"/>
+            <a:ext cx="9612000" cy="352066"/>
+          </a:xfrm>
+          <a:prstGeom prst="rect">
+            <a:avLst/>
+          </a:prstGeom>
+          <a:noFill/>
+        </p:spPr>
+        <p:txBody>
+          <a:bodyPr wrap="square" lIns="0" rIns="0" tIns="0" bIns="0">
+            <a:spAutoFit/>
+          </a:bodyPr>
+          <a:lstStyle/>
+          <a:p>
+            <a:pPr algn="l">
+              <a:lnSpc>
+                <a:spcPct val="115000"/>
+              </a:lnSpc>
+            </a:pPr>
+            <a:r>
+              <a:rPr sz="2100" b="0">
+                <a:solidFill>
+                  <a:srgbClr val="263044"/>
+                </a:solidFill>
+                <a:latin typeface="Malgun Gothic"/>
+                <a:ea typeface="Malgun Gothic"/>
+              </a:rPr>
+              <a:t>- 질문 유형마다 각 기법의 이득과 손실을 비교</a:t>
+            </a:r>
+          </a:p>
+        </p:txBody>
+      </p:sp>
+      <p:sp>
+        <p:nvSpPr>
+          <p:cNvPr id="13" name="Rectangle 12"/>
+          <p:cNvSpPr/>
+          <p:nvPr/>
+        </p:nvSpPr>
+        <p:spPr>
+          <a:xfrm>
+            <a:off x="10980000" y="3240000"/>
+            <a:ext cx="9612000" cy="468000"/>
+          </a:xfrm>
+          <a:prstGeom prst="rect">
+            <a:avLst/>
+          </a:prstGeom>
+          <a:solidFill>
+            <a:srgbClr val="695184"/>
+          </a:solidFill>
+          <a:ln>
+            <a:noFill/>
+          </a:ln>
+          <a:effectLst/>
+        </p:spPr>
+        <p:style>
+          <a:lnRef idx="1">
+            <a:schemeClr val="accent1"/>
+          </a:lnRef>
+          <a:fillRef idx="3">
+            <a:schemeClr val="accent1"/>
+          </a:fillRef>
+          <a:effectRef idx="2">
+            <a:schemeClr val="accent1"/>
+          </a:effectRef>
+          <a:fontRef idx="minor">
+            <a:schemeClr val="lt1"/>
+          </a:fontRef>
+        </p:style>
+        <p:txBody>
+          <a:bodyPr rtlCol="0" anchor="ctr"/>
+          <a:lstStyle/>
+          <a:p>
+            <a:pPr algn="ctr"/>
+          </a:p>
+        </p:txBody>
+      </p:sp>
+      <p:sp>
+        <p:nvSpPr>
+          <p:cNvPr id="14" name="TextBox 13"/>
+          <p:cNvSpPr txBox="1"/>
+          <p:nvPr/>
+        </p:nvSpPr>
+        <p:spPr>
+          <a:xfrm>
+            <a:off x="11124000" y="3265200"/>
+            <a:ext cx="9324000" cy="360000"/>
+          </a:xfrm>
+          <a:prstGeom prst="rect">
+            <a:avLst/>
+          </a:prstGeom>
+          <a:noFill/>
+        </p:spPr>
+        <p:txBody>
+          <a:bodyPr wrap="square" lIns="0" rIns="0" tIns="0" bIns="0">
+            <a:spAutoFit/>
+          </a:bodyPr>
+          <a:lstStyle/>
+          <a:p>
+            <a:pPr algn="l">
+              <a:lnSpc>
+                <a:spcPct val="115000"/>
+              </a:lnSpc>
+            </a:pPr>
+            <a:r>
+              <a:rPr sz="2700" b="1">
+                <a:solidFill>
+                  <a:srgbClr val="FFFFFF"/>
+                </a:solidFill>
+                <a:latin typeface="Malgun Gothic"/>
+                <a:ea typeface="Malgun Gothic"/>
+              </a:rPr>
+              <a:t>02 파이프라인</a:t>
+            </a:r>
+          </a:p>
+        </p:txBody>
+      </p:sp>
+      <p:pic>
+        <p:nvPicPr>
+          <p:cNvPr id="15" name="Picture 14" descr="poster_pipeline.png"/>
+          <p:cNvPicPr>
+            <a:picLocks noChangeAspect="1"/>
+          </p:cNvPicPr>
+          <p:nvPr/>
+        </p:nvPicPr>
+        <p:blipFill>
+          <a:blip r:embed="rId2"/>
+          <a:stretch>
+            <a:fillRect/>
+          </a:stretch>
+        </p:blipFill>
+        <p:spPr>
+          <a:xfrm>
+            <a:off x="10980000" y="3852000"/>
+            <a:ext cx="9612000" cy="2746286"/>
+          </a:xfrm>
+          <a:prstGeom prst="rect">
+            <a:avLst/>
+          </a:prstGeom>
+        </p:spPr>
+      </p:pic>
+      <p:sp>
+        <p:nvSpPr>
+          <p:cNvPr id="16" name="Rectangle 15"/>
+          <p:cNvSpPr/>
+          <p:nvPr/>
+        </p:nvSpPr>
+        <p:spPr>
+          <a:xfrm>
+            <a:off x="792000" y="6706285"/>
             <a:ext cx="19800000" cy="468000"/>
           </a:xfrm>
           <a:prstGeom prst="rect">
@@ -3275,13 +3707,13 @@
       </p:sp>
       <p:sp>
         <p:nvSpPr>
-          <p:cNvPr id="6" name="TextBox 5"/>
+          <p:cNvPr id="17" name="TextBox 16"/>
           <p:cNvSpPr txBox="1"/>
           <p:nvPr/>
         </p:nvSpPr>
         <p:spPr>
           <a:xfrm>
-            <a:off x="936000" y="3265200"/>
+            <a:off x="936000" y="6731485"/>
             <a:ext cx="19512000" cy="360000"/>
           </a:xfrm>
           <a:prstGeom prst="rect">
@@ -3308,21 +3740,45 @@
                 <a:latin typeface="Malgun Gothic"/>
                 <a:ea typeface="Malgun Gothic"/>
               </a:rPr>
-              <a:t>01 연구 배경과 목적</a:t>
+              <a:t>03 예시 질문으로 본 단독 기법의 작동</a:t>
             </a:r>
           </a:p>
         </p:txBody>
       </p:sp>
+      <p:pic>
+        <p:nvPicPr>
+          <p:cNvPr id="18" name="Picture 17" descr="poster_mechanism.png"/>
+          <p:cNvPicPr>
+            <a:picLocks noChangeAspect="1"/>
+          </p:cNvPicPr>
+          <p:nvPr/>
+        </p:nvPicPr>
+        <p:blipFill>
+          <a:blip r:embed="rId3"/>
+          <a:stretch>
+            <a:fillRect/>
+          </a:stretch>
+        </p:blipFill>
+        <p:spPr>
+          <a:xfrm>
+            <a:off x="792000" y="7354285"/>
+            <a:ext cx="19800000" cy="7721926"/>
+          </a:xfrm>
+          <a:prstGeom prst="rect">
+            <a:avLst/>
+          </a:prstGeom>
+        </p:spPr>
+      </p:pic>
       <p:sp>
         <p:nvSpPr>
-          <p:cNvPr id="7" name="TextBox 6"/>
+          <p:cNvPr id="19" name="TextBox 18"/>
           <p:cNvSpPr txBox="1"/>
           <p:nvPr/>
         </p:nvSpPr>
         <p:spPr>
           <a:xfrm>
-            <a:off x="792000" y="3852000"/>
-            <a:ext cx="9612000" cy="352066"/>
+            <a:off x="792000" y="15112212"/>
+            <a:ext cx="19800000" cy="288000"/>
           </a:xfrm>
           <a:prstGeom prst="rect">
             <a:avLst/>
@@ -3341,227 +3797,27 @@
               </a:lnSpc>
             </a:pPr>
             <a:r>
-              <a:rPr sz="2100" b="0">
+              <a:rPr sz="1600" b="0">
                 <a:solidFill>
-                  <a:srgbClr val="263044"/>
+                  <a:srgbClr val="777777"/>
                 </a:solidFill>
                 <a:latin typeface="Malgun Gothic"/>
                 <a:ea typeface="Malgun Gothic"/>
               </a:rPr>
-              <a:t>- 한국어 질문으로 영어 논문을 찾아 한국어로 답하는 RAG</a:t>
+              <a:t>HyDE Hypothetical Document Embeddings   CAD Context-Aware Decoding   SCD Soft Constrained Decoding   패널마다 미적용과 단독 적용 조건을 비교, 점 위치와 글자 크기는 원리를 보인 개념도</a:t>
             </a:r>
           </a:p>
         </p:txBody>
       </p:sp>
       <p:sp>
         <p:nvSpPr>
-          <p:cNvPr id="8" name="TextBox 7"/>
-          <p:cNvSpPr txBox="1"/>
-          <p:nvPr/>
-        </p:nvSpPr>
-        <p:spPr>
-          <a:xfrm>
-            <a:off x="792000" y="4294066"/>
-            <a:ext cx="9612000" cy="352066"/>
-          </a:xfrm>
-          <a:prstGeom prst="rect">
-            <a:avLst/>
-          </a:prstGeom>
-          <a:noFill/>
-        </p:spPr>
-        <p:txBody>
-          <a:bodyPr wrap="square" lIns="0" rIns="0" tIns="0" bIns="0">
-            <a:spAutoFit/>
-          </a:bodyPr>
-          <a:lstStyle/>
-          <a:p>
-            <a:pPr algn="l">
-              <a:lnSpc>
-                <a:spcPct val="115000"/>
-              </a:lnSpc>
-            </a:pPr>
-            <a:r>
-              <a:rPr sz="2100" b="0">
-                <a:solidFill>
-                  <a:srgbClr val="263044"/>
-                </a:solidFill>
-                <a:latin typeface="Malgun Gothic"/>
-                <a:ea typeface="Malgun Gothic"/>
-              </a:rPr>
-              <a:t>- 질문과 원문의 어휘가 달라 근거 구간을 찾기 어려움</a:t>
-            </a:r>
-          </a:p>
-        </p:txBody>
-      </p:sp>
-      <p:sp>
-        <p:nvSpPr>
-          <p:cNvPr id="9" name="TextBox 8"/>
-          <p:cNvSpPr txBox="1"/>
-          <p:nvPr/>
-        </p:nvSpPr>
-        <p:spPr>
-          <a:xfrm>
-            <a:off x="792000" y="4736132"/>
-            <a:ext cx="9612000" cy="352066"/>
-          </a:xfrm>
-          <a:prstGeom prst="rect">
-            <a:avLst/>
-          </a:prstGeom>
-          <a:noFill/>
-        </p:spPr>
-        <p:txBody>
-          <a:bodyPr wrap="square" lIns="0" rIns="0" tIns="0" bIns="0">
-            <a:spAutoFit/>
-          </a:bodyPr>
-          <a:lstStyle/>
-          <a:p>
-            <a:pPr algn="l">
-              <a:lnSpc>
-                <a:spcPct val="115000"/>
-              </a:lnSpc>
-            </a:pPr>
-            <a:r>
-              <a:rPr sz="2100" b="0">
-                <a:solidFill>
-                  <a:srgbClr val="263044"/>
-                </a:solidFill>
-                <a:latin typeface="Malgun Gothic"/>
-                <a:ea typeface="Malgun Gothic"/>
-              </a:rPr>
-              <a:t>- 영어 근거를 한국어 답변에 충실히 옮기기 어려움</a:t>
-            </a:r>
-          </a:p>
-        </p:txBody>
-      </p:sp>
-      <p:sp>
-        <p:nvSpPr>
-          <p:cNvPr id="10" name="TextBox 9"/>
-          <p:cNvSpPr txBox="1"/>
-          <p:nvPr/>
-        </p:nvSpPr>
-        <p:spPr>
-          <a:xfrm>
-            <a:off x="10980000" y="3852000"/>
-            <a:ext cx="9612000" cy="352066"/>
-          </a:xfrm>
-          <a:prstGeom prst="rect">
-            <a:avLst/>
-          </a:prstGeom>
-          <a:noFill/>
-        </p:spPr>
-        <p:txBody>
-          <a:bodyPr wrap="square" lIns="0" rIns="0" tIns="0" bIns="0">
-            <a:spAutoFit/>
-          </a:bodyPr>
-          <a:lstStyle/>
-          <a:p>
-            <a:pPr algn="l">
-              <a:lnSpc>
-                <a:spcPct val="115000"/>
-              </a:lnSpc>
-            </a:pPr>
-            <a:r>
-              <a:rPr sz="2100" b="0">
-                <a:solidFill>
-                  <a:srgbClr val="263044"/>
-                </a:solidFill>
-                <a:latin typeface="Malgun Gothic"/>
-                <a:ea typeface="Malgun Gothic"/>
-              </a:rPr>
-              <a:t>- 답변이 근거를 따라 영어로 바뀌는 언어 이탈</a:t>
-            </a:r>
-          </a:p>
-        </p:txBody>
-      </p:sp>
-      <p:sp>
-        <p:nvSpPr>
-          <p:cNvPr id="11" name="TextBox 10"/>
-          <p:cNvSpPr txBox="1"/>
-          <p:nvPr/>
-        </p:nvSpPr>
-        <p:spPr>
-          <a:xfrm>
-            <a:off x="10980000" y="4294066"/>
-            <a:ext cx="9612000" cy="352066"/>
-          </a:xfrm>
-          <a:prstGeom prst="rect">
-            <a:avLst/>
-          </a:prstGeom>
-          <a:noFill/>
-        </p:spPr>
-        <p:txBody>
-          <a:bodyPr wrap="square" lIns="0" rIns="0" tIns="0" bIns="0">
-            <a:spAutoFit/>
-          </a:bodyPr>
-          <a:lstStyle/>
-          <a:p>
-            <a:pPr algn="l">
-              <a:lnSpc>
-                <a:spcPct val="115000"/>
-              </a:lnSpc>
-            </a:pPr>
-            <a:r>
-              <a:rPr sz="2100" b="0">
-                <a:solidFill>
-                  <a:srgbClr val="263044"/>
-                </a:solidFill>
-                <a:latin typeface="Malgun Gothic"/>
-                <a:ea typeface="Malgun Gothic"/>
-              </a:rPr>
-              <a:t>- 세 문제에 맞춘 HyDE, CAD, SCD를 같은 질문 60개에 조합</a:t>
-            </a:r>
-          </a:p>
-        </p:txBody>
-      </p:sp>
-      <p:sp>
-        <p:nvSpPr>
-          <p:cNvPr id="12" name="TextBox 11"/>
-          <p:cNvSpPr txBox="1"/>
-          <p:nvPr/>
-        </p:nvSpPr>
-        <p:spPr>
-          <a:xfrm>
-            <a:off x="10980000" y="4736132"/>
-            <a:ext cx="9612000" cy="352066"/>
-          </a:xfrm>
-          <a:prstGeom prst="rect">
-            <a:avLst/>
-          </a:prstGeom>
-          <a:noFill/>
-        </p:spPr>
-        <p:txBody>
-          <a:bodyPr wrap="square" lIns="0" rIns="0" tIns="0" bIns="0">
-            <a:spAutoFit/>
-          </a:bodyPr>
-          <a:lstStyle/>
-          <a:p>
-            <a:pPr algn="l">
-              <a:lnSpc>
-                <a:spcPct val="115000"/>
-              </a:lnSpc>
-            </a:pPr>
-            <a:r>
-              <a:rPr sz="2100" b="0">
-                <a:solidFill>
-                  <a:srgbClr val="263044"/>
-                </a:solidFill>
-                <a:latin typeface="Malgun Gothic"/>
-                <a:ea typeface="Malgun Gothic"/>
-              </a:rPr>
-              <a:t>- 질문 유형마다 각 기법의 이득과 손실을 비교</a:t>
-            </a:r>
-          </a:p>
-        </p:txBody>
-      </p:sp>
-      <p:sp>
-        <p:nvSpPr>
-          <p:cNvPr id="13" name="Rectangle 12"/>
+          <p:cNvPr id="20" name="Rectangle 19"/>
           <p:cNvSpPr/>
           <p:nvPr/>
         </p:nvSpPr>
         <p:spPr>
           <a:xfrm>
-            <a:off x="792000" y="5286198"/>
+            <a:off x="792000" y="15508212"/>
             <a:ext cx="19800000" cy="468000"/>
           </a:xfrm>
           <a:prstGeom prst="rect">
@@ -3599,13 +3855,13 @@
       </p:sp>
       <p:sp>
         <p:nvSpPr>
-          <p:cNvPr id="14" name="TextBox 13"/>
+          <p:cNvPr id="21" name="TextBox 20"/>
           <p:cNvSpPr txBox="1"/>
           <p:nvPr/>
         </p:nvSpPr>
         <p:spPr>
           <a:xfrm>
-            <a:off x="936000" y="5311398"/>
+            <a:off x="936000" y="15533411"/>
             <a:ext cx="19512000" cy="360000"/>
           </a:xfrm>
           <a:prstGeom prst="rect">
@@ -3632,45 +3888,21 @@
                 <a:latin typeface="Malgun Gothic"/>
                 <a:ea typeface="Malgun Gothic"/>
               </a:rPr>
-              <a:t>02 예시 질문으로 본 세 기법의 작동</a:t>
+              <a:t>04 질문과 평가</a:t>
             </a:r>
           </a:p>
         </p:txBody>
       </p:sp>
-      <p:pic>
-        <p:nvPicPr>
-          <p:cNvPr id="15" name="Picture 14" descr="poster_mechanism.png"/>
-          <p:cNvPicPr>
-            <a:picLocks noChangeAspect="1"/>
-          </p:cNvPicPr>
-          <p:nvPr/>
-        </p:nvPicPr>
-        <p:blipFill>
-          <a:blip r:embed="rId2"/>
-          <a:stretch>
-            <a:fillRect/>
-          </a:stretch>
-        </p:blipFill>
-        <p:spPr>
-          <a:xfrm>
-            <a:off x="792000" y="5934198"/>
-            <a:ext cx="19800000" cy="9066777"/>
-          </a:xfrm>
-          <a:prstGeom prst="rect">
-            <a:avLst/>
-          </a:prstGeom>
-        </p:spPr>
-      </p:pic>
       <p:sp>
         <p:nvSpPr>
-          <p:cNvPr id="16" name="TextBox 15"/>
+          <p:cNvPr id="22" name="TextBox 21"/>
           <p:cNvSpPr txBox="1"/>
           <p:nvPr/>
         </p:nvSpPr>
         <p:spPr>
           <a:xfrm>
-            <a:off x="792000" y="15036975"/>
-            <a:ext cx="19800000" cy="288000"/>
+            <a:off x="792000" y="16120212"/>
+            <a:ext cx="9612000" cy="335301"/>
           </a:xfrm>
           <a:prstGeom prst="rect">
             <a:avLst/>
@@ -3689,27 +3921,229 @@
               </a:lnSpc>
             </a:pPr>
             <a:r>
-              <a:rPr sz="1600" b="0">
+              <a:rPr sz="2000" b="0">
                 <a:solidFill>
-                  <a:srgbClr val="777777"/>
+                  <a:srgbClr val="263044"/>
                 </a:solidFill>
                 <a:latin typeface="Malgun Gothic"/>
                 <a:ea typeface="Malgun Gothic"/>
               </a:rPr>
-              <a:t>HyDE Hypothetical Document Embeddings   CAD Context-Aware Decoding   SCD Soft Constrained Decoding   점 위치와 글자 크기는 원리를 보인 개념도</a:t>
+              <a:t>- 영어 문서 4종에서 15개씩, 한국어 질문 60개</a:t>
             </a:r>
           </a:p>
         </p:txBody>
       </p:sp>
       <p:sp>
         <p:nvSpPr>
-          <p:cNvPr id="17" name="Rectangle 16"/>
+          <p:cNvPr id="23" name="TextBox 22"/>
+          <p:cNvSpPr txBox="1"/>
+          <p:nvPr/>
+        </p:nvSpPr>
+        <p:spPr>
+          <a:xfrm>
+            <a:off x="792000" y="16545513"/>
+            <a:ext cx="9612000" cy="335301"/>
+          </a:xfrm>
+          <a:prstGeom prst="rect">
+            <a:avLst/>
+          </a:prstGeom>
+          <a:noFill/>
+        </p:spPr>
+        <p:txBody>
+          <a:bodyPr wrap="square" lIns="0" rIns="0" tIns="0" bIns="0">
+            <a:spAutoFit/>
+          </a:bodyPr>
+          <a:lstStyle/>
+          <a:p>
+            <a:pPr algn="l">
+              <a:lnSpc>
+                <a:spcPct val="115000"/>
+              </a:lnSpc>
+            </a:pPr>
+            <a:r>
+              <a:rPr sz="2000" b="0">
+                <a:solidFill>
+                  <a:srgbClr val="263044"/>
+                </a:solidFill>
+                <a:latin typeface="Malgun Gothic"/>
+                <a:ea typeface="Malgun Gothic"/>
+              </a:rPr>
+              <a:t>- 수치 18개, 방법 25개, 개념과 결과 17개</a:t>
+            </a:r>
+          </a:p>
+        </p:txBody>
+      </p:sp>
+      <p:sp>
+        <p:nvSpPr>
+          <p:cNvPr id="24" name="TextBox 23"/>
+          <p:cNvSpPr txBox="1"/>
+          <p:nvPr/>
+        </p:nvSpPr>
+        <p:spPr>
+          <a:xfrm>
+            <a:off x="792000" y="16970814"/>
+            <a:ext cx="9612000" cy="335301"/>
+          </a:xfrm>
+          <a:prstGeom prst="rect">
+            <a:avLst/>
+          </a:prstGeom>
+          <a:noFill/>
+        </p:spPr>
+        <p:txBody>
+          <a:bodyPr wrap="square" lIns="0" rIns="0" tIns="0" bIns="0">
+            <a:spAutoFit/>
+          </a:bodyPr>
+          <a:lstStyle/>
+          <a:p>
+            <a:pPr algn="l">
+              <a:lnSpc>
+                <a:spcPct val="115000"/>
+              </a:lnSpc>
+            </a:pPr>
+            <a:r>
+              <a:rPr sz="2000" b="0">
+                <a:solidFill>
+                  <a:srgbClr val="263044"/>
+                </a:solidFill>
+                <a:latin typeface="Malgun Gothic"/>
+                <a:ea typeface="Malgun Gothic"/>
+              </a:rPr>
+              <a:t>- 세 기법의 적용 여부를 조합한 조건 8개, 답변 480개</a:t>
+            </a:r>
+          </a:p>
+        </p:txBody>
+      </p:sp>
+      <p:sp>
+        <p:nvSpPr>
+          <p:cNvPr id="25" name="TextBox 24"/>
+          <p:cNvSpPr txBox="1"/>
+          <p:nvPr/>
+        </p:nvSpPr>
+        <p:spPr>
+          <a:xfrm>
+            <a:off x="10980000" y="16120212"/>
+            <a:ext cx="9612000" cy="670602"/>
+          </a:xfrm>
+          <a:prstGeom prst="rect">
+            <a:avLst/>
+          </a:prstGeom>
+          <a:noFill/>
+        </p:spPr>
+        <p:txBody>
+          <a:bodyPr wrap="square" lIns="0" rIns="0" tIns="0" bIns="0">
+            <a:spAutoFit/>
+          </a:bodyPr>
+          <a:lstStyle/>
+          <a:p>
+            <a:pPr algn="l">
+              <a:lnSpc>
+                <a:spcPct val="115000"/>
+              </a:lnSpc>
+            </a:pPr>
+            <a:r>
+              <a:rPr sz="2000" b="0">
+                <a:solidFill>
+                  <a:srgbClr val="263044"/>
+                </a:solidFill>
+                <a:latin typeface="Malgun Gothic"/>
+                <a:ea typeface="Malgun Gothic"/>
+              </a:rPr>
+              <a:t>- 답변 품질은 RAGAS의 근거 충실도, 답변 관련성,
+  문맥 정밀도, 문맥 재현율(0에서 1)</a:t>
+            </a:r>
+          </a:p>
+        </p:txBody>
+      </p:sp>
+      <p:sp>
+        <p:nvSpPr>
+          <p:cNvPr id="26" name="TextBox 25"/>
+          <p:cNvSpPr txBox="1"/>
+          <p:nvPr/>
+        </p:nvSpPr>
+        <p:spPr>
+          <a:xfrm>
+            <a:off x="10980000" y="16880814"/>
+            <a:ext cx="9612000" cy="335301"/>
+          </a:xfrm>
+          <a:prstGeom prst="rect">
+            <a:avLst/>
+          </a:prstGeom>
+          <a:noFill/>
+        </p:spPr>
+        <p:txBody>
+          <a:bodyPr wrap="square" lIns="0" rIns="0" tIns="0" bIns="0">
+            <a:spAutoFit/>
+          </a:bodyPr>
+          <a:lstStyle/>
+          <a:p>
+            <a:pPr algn="l">
+              <a:lnSpc>
+                <a:spcPct val="115000"/>
+              </a:lnSpc>
+            </a:pPr>
+            <a:r>
+              <a:rPr sz="2000" b="0">
+                <a:solidFill>
+                  <a:srgbClr val="263044"/>
+                </a:solidFill>
+                <a:latin typeface="Malgun Gothic"/>
+                <a:ea typeface="Malgun Gothic"/>
+              </a:rPr>
+              <a:t>- 출력 언어는 한국어 문자 비율</a:t>
+            </a:r>
+          </a:p>
+        </p:txBody>
+      </p:sp>
+      <p:sp>
+        <p:nvSpPr>
+          <p:cNvPr id="27" name="TextBox 26"/>
+          <p:cNvSpPr txBox="1"/>
+          <p:nvPr/>
+        </p:nvSpPr>
+        <p:spPr>
+          <a:xfrm>
+            <a:off x="10980000" y="17306115"/>
+            <a:ext cx="9612000" cy="670602"/>
+          </a:xfrm>
+          <a:prstGeom prst="rect">
+            <a:avLst/>
+          </a:prstGeom>
+          <a:noFill/>
+        </p:spPr>
+        <p:txBody>
+          <a:bodyPr wrap="square" lIns="0" rIns="0" tIns="0" bIns="0">
+            <a:spAutoFit/>
+          </a:bodyPr>
+          <a:lstStyle/>
+          <a:p>
+            <a:pPr algn="l">
+              <a:lnSpc>
+                <a:spcPct val="115000"/>
+              </a:lnSpc>
+            </a:pPr>
+            <a:r>
+              <a:rPr sz="2000" b="0">
+                <a:solidFill>
+                  <a:srgbClr val="263044"/>
+                </a:solidFill>
+                <a:latin typeface="Malgun Gothic"/>
+                <a:ea typeface="Malgun Gothic"/>
+              </a:rPr>
+              <a:t>- SCD 조건 4, 6, 7, 8의 충실도, 정밀도, 재현율은
+  한국어 번역 근거로 평가해 같은 언어 조건끼리 비교</a:t>
+            </a:r>
+          </a:p>
+        </p:txBody>
+      </p:sp>
+      <p:sp>
+        <p:nvSpPr>
+          <p:cNvPr id="28" name="Rectangle 27"/>
           <p:cNvSpPr/>
           <p:nvPr/>
         </p:nvSpPr>
         <p:spPr>
           <a:xfrm>
-            <a:off x="792000" y="15432975"/>
+            <a:off x="792000" y="18210717"/>
             <a:ext cx="19800000" cy="468000"/>
           </a:xfrm>
           <a:prstGeom prst="rect">
@@ -3747,13 +4181,13 @@
       </p:sp>
       <p:sp>
         <p:nvSpPr>
-          <p:cNvPr id="18" name="TextBox 17"/>
+          <p:cNvPr id="29" name="TextBox 28"/>
           <p:cNvSpPr txBox="1"/>
           <p:nvPr/>
         </p:nvSpPr>
         <p:spPr>
           <a:xfrm>
-            <a:off x="936000" y="15458175"/>
+            <a:off x="936000" y="18235917"/>
             <a:ext cx="19512000" cy="360000"/>
           </a:xfrm>
           <a:prstGeom prst="rect">
@@ -3780,346 +4214,21 @@
                 <a:latin typeface="Malgun Gothic"/>
                 <a:ea typeface="Malgun Gothic"/>
               </a:rPr>
-              <a:t>03 질문과 평가</a:t>
-            </a:r>
-          </a:p>
-        </p:txBody>
-      </p:sp>
-      <p:sp>
-        <p:nvSpPr>
-          <p:cNvPr id="19" name="TextBox 18"/>
-          <p:cNvSpPr txBox="1"/>
-          <p:nvPr/>
-        </p:nvSpPr>
-        <p:spPr>
-          <a:xfrm>
-            <a:off x="792000" y="16044975"/>
-            <a:ext cx="9612000" cy="335301"/>
-          </a:xfrm>
-          <a:prstGeom prst="rect">
-            <a:avLst/>
-          </a:prstGeom>
-          <a:noFill/>
-        </p:spPr>
-        <p:txBody>
-          <a:bodyPr wrap="square" lIns="0" rIns="0" tIns="0" bIns="0">
-            <a:spAutoFit/>
-          </a:bodyPr>
-          <a:lstStyle/>
-          <a:p>
-            <a:pPr algn="l">
-              <a:lnSpc>
-                <a:spcPct val="115000"/>
-              </a:lnSpc>
-            </a:pPr>
-            <a:r>
-              <a:rPr sz="2000" b="0">
-                <a:solidFill>
-                  <a:srgbClr val="263044"/>
-                </a:solidFill>
-                <a:latin typeface="Malgun Gothic"/>
-                <a:ea typeface="Malgun Gothic"/>
-              </a:rPr>
-              <a:t>- 영어 문서 4종에서 15개씩, 한국어 질문 60개</a:t>
-            </a:r>
-          </a:p>
-        </p:txBody>
-      </p:sp>
-      <p:sp>
-        <p:nvSpPr>
-          <p:cNvPr id="20" name="TextBox 19"/>
-          <p:cNvSpPr txBox="1"/>
-          <p:nvPr/>
-        </p:nvSpPr>
-        <p:spPr>
-          <a:xfrm>
-            <a:off x="792000" y="16470276"/>
-            <a:ext cx="9612000" cy="335301"/>
-          </a:xfrm>
-          <a:prstGeom prst="rect">
-            <a:avLst/>
-          </a:prstGeom>
-          <a:noFill/>
-        </p:spPr>
-        <p:txBody>
-          <a:bodyPr wrap="square" lIns="0" rIns="0" tIns="0" bIns="0">
-            <a:spAutoFit/>
-          </a:bodyPr>
-          <a:lstStyle/>
-          <a:p>
-            <a:pPr algn="l">
-              <a:lnSpc>
-                <a:spcPct val="115000"/>
-              </a:lnSpc>
-            </a:pPr>
-            <a:r>
-              <a:rPr sz="2000" b="0">
-                <a:solidFill>
-                  <a:srgbClr val="263044"/>
-                </a:solidFill>
-                <a:latin typeface="Malgun Gothic"/>
-                <a:ea typeface="Malgun Gothic"/>
-              </a:rPr>
-              <a:t>- 수치 18개, 방법 25개, 개념과 결과 17개</a:t>
-            </a:r>
-          </a:p>
-        </p:txBody>
-      </p:sp>
-      <p:sp>
-        <p:nvSpPr>
-          <p:cNvPr id="21" name="TextBox 20"/>
-          <p:cNvSpPr txBox="1"/>
-          <p:nvPr/>
-        </p:nvSpPr>
-        <p:spPr>
-          <a:xfrm>
-            <a:off x="792000" y="16895577"/>
-            <a:ext cx="9612000" cy="335301"/>
-          </a:xfrm>
-          <a:prstGeom prst="rect">
-            <a:avLst/>
-          </a:prstGeom>
-          <a:noFill/>
-        </p:spPr>
-        <p:txBody>
-          <a:bodyPr wrap="square" lIns="0" rIns="0" tIns="0" bIns="0">
-            <a:spAutoFit/>
-          </a:bodyPr>
-          <a:lstStyle/>
-          <a:p>
-            <a:pPr algn="l">
-              <a:lnSpc>
-                <a:spcPct val="115000"/>
-              </a:lnSpc>
-            </a:pPr>
-            <a:r>
-              <a:rPr sz="2000" b="0">
-                <a:solidFill>
-                  <a:srgbClr val="263044"/>
-                </a:solidFill>
-                <a:latin typeface="Malgun Gothic"/>
-                <a:ea typeface="Malgun Gothic"/>
-              </a:rPr>
-              <a:t>- 세 기법의 적용 여부를 조합한 조건 8개, 답변 480개</a:t>
-            </a:r>
-          </a:p>
-        </p:txBody>
-      </p:sp>
-      <p:sp>
-        <p:nvSpPr>
-          <p:cNvPr id="22" name="TextBox 21"/>
-          <p:cNvSpPr txBox="1"/>
-          <p:nvPr/>
-        </p:nvSpPr>
-        <p:spPr>
-          <a:xfrm>
-            <a:off x="10980000" y="16044975"/>
-            <a:ext cx="9612000" cy="670602"/>
-          </a:xfrm>
-          <a:prstGeom prst="rect">
-            <a:avLst/>
-          </a:prstGeom>
-          <a:noFill/>
-        </p:spPr>
-        <p:txBody>
-          <a:bodyPr wrap="square" lIns="0" rIns="0" tIns="0" bIns="0">
-            <a:spAutoFit/>
-          </a:bodyPr>
-          <a:lstStyle/>
-          <a:p>
-            <a:pPr algn="l">
-              <a:lnSpc>
-                <a:spcPct val="115000"/>
-              </a:lnSpc>
-            </a:pPr>
-            <a:r>
-              <a:rPr sz="2000" b="0">
-                <a:solidFill>
-                  <a:srgbClr val="263044"/>
-                </a:solidFill>
-                <a:latin typeface="Malgun Gothic"/>
-                <a:ea typeface="Malgun Gothic"/>
-              </a:rPr>
-              <a:t>- 답변 품질은 RAGAS의 근거 충실도, 답변 관련성,
-  문맥 정밀도, 문맥 재현율(0에서 1)</a:t>
-            </a:r>
-          </a:p>
-        </p:txBody>
-      </p:sp>
-      <p:sp>
-        <p:nvSpPr>
-          <p:cNvPr id="23" name="TextBox 22"/>
-          <p:cNvSpPr txBox="1"/>
-          <p:nvPr/>
-        </p:nvSpPr>
-        <p:spPr>
-          <a:xfrm>
-            <a:off x="10980000" y="16805577"/>
-            <a:ext cx="9612000" cy="335301"/>
-          </a:xfrm>
-          <a:prstGeom prst="rect">
-            <a:avLst/>
-          </a:prstGeom>
-          <a:noFill/>
-        </p:spPr>
-        <p:txBody>
-          <a:bodyPr wrap="square" lIns="0" rIns="0" tIns="0" bIns="0">
-            <a:spAutoFit/>
-          </a:bodyPr>
-          <a:lstStyle/>
-          <a:p>
-            <a:pPr algn="l">
-              <a:lnSpc>
-                <a:spcPct val="115000"/>
-              </a:lnSpc>
-            </a:pPr>
-            <a:r>
-              <a:rPr sz="2000" b="0">
-                <a:solidFill>
-                  <a:srgbClr val="263044"/>
-                </a:solidFill>
-                <a:latin typeface="Malgun Gothic"/>
-                <a:ea typeface="Malgun Gothic"/>
-              </a:rPr>
-              <a:t>- 출력 언어는 한국어 문자 비율</a:t>
-            </a:r>
-          </a:p>
-        </p:txBody>
-      </p:sp>
-      <p:sp>
-        <p:nvSpPr>
-          <p:cNvPr id="24" name="TextBox 23"/>
-          <p:cNvSpPr txBox="1"/>
-          <p:nvPr/>
-        </p:nvSpPr>
-        <p:spPr>
-          <a:xfrm>
-            <a:off x="10980000" y="17230878"/>
-            <a:ext cx="9612000" cy="335301"/>
-          </a:xfrm>
-          <a:prstGeom prst="rect">
-            <a:avLst/>
-          </a:prstGeom>
-          <a:noFill/>
-        </p:spPr>
-        <p:txBody>
-          <a:bodyPr wrap="square" lIns="0" rIns="0" tIns="0" bIns="0">
-            <a:spAutoFit/>
-          </a:bodyPr>
-          <a:lstStyle/>
-          <a:p>
-            <a:pPr algn="l">
-              <a:lnSpc>
-                <a:spcPct val="115000"/>
-              </a:lnSpc>
-            </a:pPr>
-            <a:r>
-              <a:rPr sz="2000" b="0">
-                <a:solidFill>
-                  <a:srgbClr val="263044"/>
-                </a:solidFill>
-                <a:latin typeface="Malgun Gothic"/>
-                <a:ea typeface="Malgun Gothic"/>
-              </a:rPr>
-              <a:t>- SCD 조건 4, 6, 7, 8은 한국어 번역 근거로 평가</a:t>
-            </a:r>
-          </a:p>
-        </p:txBody>
-      </p:sp>
-      <p:sp>
-        <p:nvSpPr>
-          <p:cNvPr id="25" name="Rectangle 24"/>
-          <p:cNvSpPr/>
-          <p:nvPr/>
-        </p:nvSpPr>
-        <p:spPr>
-          <a:xfrm>
-            <a:off x="792000" y="17800180"/>
-            <a:ext cx="19800000" cy="468000"/>
-          </a:xfrm>
-          <a:prstGeom prst="rect">
-            <a:avLst/>
-          </a:prstGeom>
-          <a:solidFill>
-            <a:srgbClr val="695184"/>
-          </a:solidFill>
-          <a:ln>
-            <a:noFill/>
-          </a:ln>
-          <a:effectLst/>
-        </p:spPr>
-        <p:style>
-          <a:lnRef idx="1">
-            <a:schemeClr val="accent1"/>
-          </a:lnRef>
-          <a:fillRef idx="3">
-            <a:schemeClr val="accent1"/>
-          </a:fillRef>
-          <a:effectRef idx="2">
-            <a:schemeClr val="accent1"/>
-          </a:effectRef>
-          <a:fontRef idx="minor">
-            <a:schemeClr val="lt1"/>
-          </a:fontRef>
-        </p:style>
-        <p:txBody>
-          <a:bodyPr rtlCol="0" anchor="ctr"/>
-          <a:lstStyle/>
-          <a:p>
-            <a:pPr algn="ctr"/>
-          </a:p>
-        </p:txBody>
-      </p:sp>
-      <p:sp>
-        <p:nvSpPr>
-          <p:cNvPr id="26" name="TextBox 25"/>
-          <p:cNvSpPr txBox="1"/>
-          <p:nvPr/>
-        </p:nvSpPr>
-        <p:spPr>
-          <a:xfrm>
-            <a:off x="936000" y="17825380"/>
-            <a:ext cx="19512000" cy="360000"/>
-          </a:xfrm>
-          <a:prstGeom prst="rect">
-            <a:avLst/>
-          </a:prstGeom>
-          <a:noFill/>
-        </p:spPr>
-        <p:txBody>
-          <a:bodyPr wrap="square" lIns="0" rIns="0" tIns="0" bIns="0">
-            <a:spAutoFit/>
-          </a:bodyPr>
-          <a:lstStyle/>
-          <a:p>
-            <a:pPr algn="l">
-              <a:lnSpc>
-                <a:spcPct val="115000"/>
-              </a:lnSpc>
-            </a:pPr>
-            <a:r>
-              <a:rPr sz="2700" b="1">
-                <a:solidFill>
-                  <a:srgbClr val="FFFFFF"/>
-                </a:solidFill>
-                <a:latin typeface="Malgun Gothic"/>
-                <a:ea typeface="Malgun Gothic"/>
-              </a:rPr>
-              <a:t>04 질문 유형별 평균 점수</a:t>
+              <a:t>05 질문 유형별 평균 점수</a:t>
             </a:r>
           </a:p>
         </p:txBody>
       </p:sp>
       <p:graphicFrame>
         <p:nvGraphicFramePr>
-          <p:cNvPr id="27" name="Table 26"/>
+          <p:cNvPr id="30" name="Table 29"/>
           <p:cNvGraphicFramePr>
             <a:graphicFrameLocks noGrp="1"/>
           </p:cNvGraphicFramePr>
           <p:nvPr/>
         </p:nvGraphicFramePr>
         <p:xfrm>
-          <a:off x="792000" y="18412180"/>
+          <a:off x="792000" y="18822717"/>
           <a:ext cx="19799991" cy="3761555"/>
         </p:xfrm>
         <a:graphic>
@@ -5938,7 +6047,7 @@
                     <a:p>
                       <a:pPr algn="r"/>
                       <a:r>
-                        <a:rPr sz="1700" b="0">
+                        <a:rPr sz="1700" b="1">
                           <a:solidFill>
                             <a:srgbClr val="263044"/>
                           </a:solidFill>
@@ -5981,7 +6090,7 @@
                     <a:p>
                       <a:pPr algn="r"/>
                       <a:r>
-                        <a:rPr sz="1700" b="0">
+                        <a:rPr sz="1700" b="1">
                           <a:solidFill>
                             <a:srgbClr val="263044"/>
                           </a:solidFill>
@@ -7318,7 +7427,7 @@
                     <a:p>
                       <a:pPr algn="r"/>
                       <a:r>
-                        <a:rPr sz="1700" b="0">
+                        <a:rPr sz="1700" b="1">
                           <a:solidFill>
                             <a:srgbClr val="263044"/>
                           </a:solidFill>
@@ -8094,7 +8203,7 @@
                     <a:p>
                       <a:pPr algn="r"/>
                       <a:r>
-                        <a:rPr sz="1700" b="0">
+                        <a:rPr sz="1700" b="1">
                           <a:solidFill>
                             <a:srgbClr val="263044"/>
                           </a:solidFill>
@@ -8655,7 +8764,7 @@
                     <a:p>
                       <a:pPr algn="r"/>
                       <a:r>
-                        <a:rPr sz="1700" b="0">
+                        <a:rPr sz="1700" b="1">
                           <a:solidFill>
                             <a:srgbClr val="263044"/>
                           </a:solidFill>
@@ -8698,7 +8807,7 @@
                     <a:p>
                       <a:pPr algn="r"/>
                       <a:r>
-                        <a:rPr sz="1700" b="0">
+                        <a:rPr sz="1700" b="1">
                           <a:solidFill>
                             <a:srgbClr val="263044"/>
                           </a:solidFill>
@@ -9474,7 +9583,7 @@
                     <a:p>
                       <a:pPr algn="r"/>
                       <a:r>
-                        <a:rPr sz="1700" b="0">
+                        <a:rPr sz="1700" b="1">
                           <a:solidFill>
                             <a:srgbClr val="263044"/>
                           </a:solidFill>
@@ -10553,7 +10662,7 @@
                     <a:p>
                       <a:pPr algn="r"/>
                       <a:r>
-                        <a:rPr sz="1700" b="0">
+                        <a:rPr sz="1700" b="1">
                           <a:solidFill>
                             <a:srgbClr val="263044"/>
                           </a:solidFill>
@@ -11112,13 +11221,53 @@
       </p:graphicFrame>
       <p:sp>
         <p:nvSpPr>
-          <p:cNvPr id="28" name="TextBox 27"/>
+          <p:cNvPr id="31" name="TextBox 30"/>
           <p:cNvSpPr txBox="1"/>
           <p:nvPr/>
         </p:nvSpPr>
         <p:spPr>
           <a:xfrm>
-            <a:off x="792000" y="22281740"/>
+            <a:off x="792000" y="22692278"/>
+            <a:ext cx="19800000" cy="318536"/>
+          </a:xfrm>
+          <a:prstGeom prst="rect">
+            <a:avLst/>
+          </a:prstGeom>
+          <a:noFill/>
+        </p:spPr>
+        <p:txBody>
+          <a:bodyPr wrap="square" lIns="0" rIns="0" tIns="0" bIns="0">
+            <a:spAutoFit/>
+          </a:bodyPr>
+          <a:lstStyle/>
+          <a:p>
+            <a:pPr algn="l">
+              <a:lnSpc>
+                <a:spcPct val="115000"/>
+              </a:lnSpc>
+            </a:pPr>
+            <a:r>
+              <a:rPr sz="1900" b="0">
+                <a:solidFill>
+                  <a:srgbClr val="263044"/>
+                </a:solidFill>
+                <a:latin typeface="Malgun Gothic"/>
+                <a:ea typeface="Malgun Gothic"/>
+              </a:rPr>
+              <a:t>- 충실도, 정밀도, 재현율의 굵은 값은 SCD 미적용 조건과 적용 조건 안에서 각각 구한 최댓값</a:t>
+            </a:r>
+          </a:p>
+        </p:txBody>
+      </p:sp>
+      <p:sp>
+        <p:nvSpPr>
+          <p:cNvPr id="32" name="TextBox 31"/>
+          <p:cNvSpPr txBox="1"/>
+          <p:nvPr/>
+        </p:nvSpPr>
+        <p:spPr>
+          <a:xfrm>
+            <a:off x="792000" y="23100814"/>
             <a:ext cx="19800000" cy="318536"/>
           </a:xfrm>
           <a:prstGeom prst="rect">
@@ -11152,13 +11301,13 @@
       </p:sp>
       <p:sp>
         <p:nvSpPr>
-          <p:cNvPr id="29" name="Rectangle 28"/>
+          <p:cNvPr id="33" name="Rectangle 32"/>
           <p:cNvSpPr/>
           <p:nvPr/>
         </p:nvSpPr>
         <p:spPr>
           <a:xfrm>
-            <a:off x="10980000" y="22834276"/>
+            <a:off x="10980000" y="23653350"/>
             <a:ext cx="9612000" cy="468000"/>
           </a:xfrm>
           <a:prstGeom prst="rect">
@@ -11196,13 +11345,13 @@
       </p:sp>
       <p:sp>
         <p:nvSpPr>
-          <p:cNvPr id="30" name="TextBox 29"/>
+          <p:cNvPr id="34" name="TextBox 33"/>
           <p:cNvSpPr txBox="1"/>
           <p:nvPr/>
         </p:nvSpPr>
         <p:spPr>
           <a:xfrm>
-            <a:off x="11124000" y="22859476"/>
+            <a:off x="11124000" y="23678550"/>
             <a:ext cx="9324000" cy="360000"/>
           </a:xfrm>
           <a:prstGeom prst="rect">
@@ -11229,20 +11378,20 @@
                 <a:latin typeface="Malgun Gothic"/>
                 <a:ea typeface="Malgun Gothic"/>
               </a:rPr>
-              <a:t>06 결론</a:t>
+              <a:t>07 결론</a:t>
             </a:r>
           </a:p>
         </p:txBody>
       </p:sp>
       <p:sp>
         <p:nvSpPr>
-          <p:cNvPr id="31" name="TextBox 30"/>
+          <p:cNvPr id="35" name="TextBox 34"/>
           <p:cNvSpPr txBox="1"/>
           <p:nvPr/>
         </p:nvSpPr>
         <p:spPr>
           <a:xfrm>
-            <a:off x="10980000" y="23446276"/>
+            <a:off x="10980000" y="24265350"/>
             <a:ext cx="9612000" cy="352066"/>
           </a:xfrm>
           <a:prstGeom prst="rect">
@@ -11276,13 +11425,13 @@
       </p:sp>
       <p:sp>
         <p:nvSpPr>
-          <p:cNvPr id="32" name="TextBox 31"/>
+          <p:cNvPr id="36" name="TextBox 35"/>
           <p:cNvSpPr txBox="1"/>
           <p:nvPr/>
         </p:nvSpPr>
         <p:spPr>
           <a:xfrm>
-            <a:off x="10980000" y="23996342"/>
+            <a:off x="10980000" y="24828318"/>
             <a:ext cx="9612000" cy="352066"/>
           </a:xfrm>
           <a:prstGeom prst="rect">
@@ -11316,13 +11465,13 @@
       </p:sp>
       <p:sp>
         <p:nvSpPr>
-          <p:cNvPr id="33" name="TextBox 32"/>
+          <p:cNvPr id="37" name="TextBox 36"/>
           <p:cNvSpPr txBox="1"/>
           <p:nvPr/>
         </p:nvSpPr>
         <p:spPr>
           <a:xfrm>
-            <a:off x="10980000" y="24546408"/>
+            <a:off x="10980000" y="25391287"/>
             <a:ext cx="9612000" cy="352066"/>
           </a:xfrm>
           <a:prstGeom prst="rect">
@@ -11349,20 +11498,20 @@
                 <a:latin typeface="Malgun Gothic"/>
                 <a:ea typeface="Malgun Gothic"/>
               </a:rPr>
-              <a:t>- 고루 지키려면 세 기법(방법 질문의 네 품질 지표 모두 상승)</a:t>
+              <a:t>- 한국어 답변은 세 기법(방법 질문 세 지표가 SCD 단독보다 높음)</a:t>
             </a:r>
           </a:p>
         </p:txBody>
       </p:sp>
       <p:sp>
         <p:nvSpPr>
-          <p:cNvPr id="34" name="TextBox 33"/>
+          <p:cNvPr id="38" name="TextBox 37"/>
           <p:cNvSpPr txBox="1"/>
           <p:nvPr/>
         </p:nvSpPr>
         <p:spPr>
           <a:xfrm>
-            <a:off x="10980000" y="25096475"/>
+            <a:off x="10980000" y="25954255"/>
             <a:ext cx="9612000" cy="352066"/>
           </a:xfrm>
           <a:prstGeom prst="rect">
@@ -11396,13 +11545,13 @@
       </p:sp>
       <p:sp>
         <p:nvSpPr>
-          <p:cNvPr id="35" name="Rectangle 34"/>
+          <p:cNvPr id="39" name="Rectangle 38"/>
           <p:cNvSpPr/>
           <p:nvPr/>
         </p:nvSpPr>
         <p:spPr>
           <a:xfrm>
-            <a:off x="10980000" y="25862541"/>
+            <a:off x="10980000" y="26728126"/>
             <a:ext cx="9612000" cy="468000"/>
           </a:xfrm>
           <a:prstGeom prst="rect">
@@ -11440,13 +11589,13 @@
       </p:sp>
       <p:sp>
         <p:nvSpPr>
-          <p:cNvPr id="36" name="TextBox 35"/>
+          <p:cNvPr id="40" name="TextBox 39"/>
           <p:cNvSpPr txBox="1"/>
           <p:nvPr/>
         </p:nvSpPr>
         <p:spPr>
           <a:xfrm>
-            <a:off x="11124000" y="25887741"/>
+            <a:off x="11124000" y="26753326"/>
             <a:ext cx="9324000" cy="360000"/>
           </a:xfrm>
           <a:prstGeom prst="rect">
@@ -11473,20 +11622,20 @@
                 <a:latin typeface="Malgun Gothic"/>
                 <a:ea typeface="Malgun Gothic"/>
               </a:rPr>
-              <a:t>07 실제 답변에서 확인한 점</a:t>
+              <a:t>08 실제 답변에서 확인한 점</a:t>
             </a:r>
           </a:p>
         </p:txBody>
       </p:sp>
       <p:sp>
         <p:nvSpPr>
-          <p:cNvPr id="37" name="TextBox 36"/>
+          <p:cNvPr id="41" name="TextBox 40"/>
           <p:cNvSpPr txBox="1"/>
           <p:nvPr/>
         </p:nvSpPr>
         <p:spPr>
           <a:xfrm>
-            <a:off x="10980000" y="26474541"/>
+            <a:off x="10980000" y="27340126"/>
             <a:ext cx="9612000" cy="352066"/>
           </a:xfrm>
           <a:prstGeom prst="rect">
@@ -11520,13 +11669,13 @@
       </p:sp>
       <p:sp>
         <p:nvSpPr>
-          <p:cNvPr id="38" name="TextBox 37"/>
+          <p:cNvPr id="42" name="TextBox 41"/>
           <p:cNvSpPr txBox="1"/>
           <p:nvPr/>
         </p:nvSpPr>
         <p:spPr>
           <a:xfrm>
-            <a:off x="10980000" y="27024607"/>
+            <a:off x="10980000" y="27903094"/>
             <a:ext cx="9612000" cy="352066"/>
           </a:xfrm>
           <a:prstGeom prst="rect">
@@ -11560,13 +11709,13 @@
       </p:sp>
       <p:sp>
         <p:nvSpPr>
-          <p:cNvPr id="39" name="TextBox 38"/>
+          <p:cNvPr id="43" name="TextBox 42"/>
           <p:cNvSpPr txBox="1"/>
           <p:nvPr/>
         </p:nvSpPr>
         <p:spPr>
           <a:xfrm>
-            <a:off x="10980000" y="27574673"/>
+            <a:off x="10980000" y="28466063"/>
             <a:ext cx="9612000" cy="352066"/>
           </a:xfrm>
           <a:prstGeom prst="rect">
@@ -11600,13 +11749,13 @@
       </p:sp>
       <p:sp>
         <p:nvSpPr>
-          <p:cNvPr id="40" name="TextBox 39"/>
+          <p:cNvPr id="44" name="TextBox 43"/>
           <p:cNvSpPr txBox="1"/>
           <p:nvPr/>
         </p:nvSpPr>
         <p:spPr>
           <a:xfrm>
-            <a:off x="10980000" y="28124739"/>
+            <a:off x="10980000" y="29029031"/>
             <a:ext cx="9612000" cy="352066"/>
           </a:xfrm>
           <a:prstGeom prst="rect">
@@ -11640,13 +11789,13 @@
       </p:sp>
       <p:sp>
         <p:nvSpPr>
-          <p:cNvPr id="41" name="Rectangle 40"/>
+          <p:cNvPr id="45" name="Rectangle 44"/>
           <p:cNvSpPr/>
           <p:nvPr/>
         </p:nvSpPr>
         <p:spPr>
           <a:xfrm>
-            <a:off x="792000" y="22834276"/>
+            <a:off x="792000" y="23653350"/>
             <a:ext cx="9612000" cy="468000"/>
           </a:xfrm>
           <a:prstGeom prst="rect">
@@ -11684,13 +11833,13 @@
       </p:sp>
       <p:sp>
         <p:nvSpPr>
-          <p:cNvPr id="42" name="TextBox 41"/>
+          <p:cNvPr id="46" name="TextBox 45"/>
           <p:cNvSpPr txBox="1"/>
           <p:nvPr/>
         </p:nvSpPr>
         <p:spPr>
           <a:xfrm>
-            <a:off x="936000" y="22859476"/>
+            <a:off x="936000" y="23678550"/>
             <a:ext cx="9324000" cy="360000"/>
           </a:xfrm>
           <a:prstGeom prst="rect">
@@ -11717,29 +11866,29 @@
                 <a:latin typeface="Malgun Gothic"/>
                 <a:ea typeface="Malgun Gothic"/>
               </a:rPr>
-              <a:t>05 방법 질문 25개의 원점수 평행좌표</a:t>
+              <a:t>06 방법 질문 25개의 원점수 평행좌표</a:t>
             </a:r>
           </a:p>
         </p:txBody>
       </p:sp>
       <p:pic>
         <p:nvPicPr>
-          <p:cNvPr id="43" name="Picture 42" descr="poster_parallel.png"/>
+          <p:cNvPr id="47" name="Picture 46" descr="poster_parallel.png"/>
           <p:cNvPicPr>
             <a:picLocks noChangeAspect="1"/>
           </p:cNvPicPr>
           <p:nvPr/>
         </p:nvPicPr>
         <p:blipFill>
-          <a:blip r:embed="rId3"/>
+          <a:blip r:embed="rId4"/>
           <a:stretch>
             <a:fillRect/>
           </a:stretch>
         </p:blipFill>
         <p:spPr>
           <a:xfrm>
-            <a:off x="792000" y="23446276"/>
-            <a:ext cx="9612000" cy="5386744"/>
+            <a:off x="792000" y="24265350"/>
+            <a:ext cx="9612000" cy="4568215"/>
           </a:xfrm>
           <a:prstGeom prst="rect">
             <a:avLst/>
@@ -11748,13 +11897,13 @@
       </p:pic>
       <p:sp>
         <p:nvSpPr>
-          <p:cNvPr id="44" name="TextBox 43"/>
+          <p:cNvPr id="48" name="TextBox 47"/>
           <p:cNvSpPr txBox="1"/>
           <p:nvPr/>
         </p:nvSpPr>
         <p:spPr>
           <a:xfrm>
-            <a:off x="792000" y="28869020"/>
+            <a:off x="792000" y="28869565"/>
             <a:ext cx="9612000" cy="637072"/>
           </a:xfrm>
           <a:prstGeom prst="rect">
@@ -11789,13 +11938,13 @@
       </p:sp>
       <p:sp>
         <p:nvSpPr>
-          <p:cNvPr id="45" name="TextBox 44"/>
+          <p:cNvPr id="49" name="TextBox 48"/>
           <p:cNvSpPr txBox="1"/>
           <p:nvPr/>
         </p:nvSpPr>
         <p:spPr>
           <a:xfrm>
-            <a:off x="792000" y="29704092"/>
+            <a:off x="792000" y="29704637"/>
             <a:ext cx="19800000" cy="324000"/>
           </a:xfrm>
           <a:prstGeom prst="rect">

--- a/FINALDOCS/POSTER/FINAL/M_RAG_A1_FINAL_EDITABLE.pptx
+++ b/FINALDOCS/POSTER/FINAL/M_RAG_A1_FINAL_EDITABLE.pptx
@@ -11418,7 +11418,7 @@
                 <a:latin typeface="Malgun Gothic"/>
                 <a:ea typeface="Malgun Gothic"/>
               </a:rPr>
-              <a:t>- 한 지표가 중요하면 기법 하나(관련성, 개념과 결과 질문은 HyDE)</a:t>
+              <a:t>- 관련성과 응답 시간이 중요하면 HyDE 하나(개념과 결과 질문 포함)</a:t>
             </a:r>
           </a:p>
         </p:txBody>

--- a/FINALDOCS/POSTER/FINAL/M_RAG_A1_FINAL_EDITABLE.pptx
+++ b/FINALDOCS/POSTER/FINAL/M_RAG_A1_FINAL_EDITABLE.pptx
@@ -3941,7 +3941,7 @@
         </p:nvSpPr>
         <p:spPr>
           <a:xfrm>
-            <a:off x="792000" y="16545513"/>
+            <a:off x="792000" y="16527513"/>
             <a:ext cx="9612000" cy="335301"/>
           </a:xfrm>
           <a:prstGeom prst="rect">
@@ -3981,7 +3981,7 @@
         </p:nvSpPr>
         <p:spPr>
           <a:xfrm>
-            <a:off x="792000" y="16970814"/>
+            <a:off x="792000" y="16934814"/>
             <a:ext cx="9612000" cy="335301"/>
           </a:xfrm>
           <a:prstGeom prst="rect">
@@ -4021,8 +4021,8 @@
         </p:nvSpPr>
         <p:spPr>
           <a:xfrm>
-            <a:off x="10980000" y="16120212"/>
-            <a:ext cx="9612000" cy="670602"/>
+            <a:off x="792000" y="17342115"/>
+            <a:ext cx="9612000" cy="335301"/>
           </a:xfrm>
           <a:prstGeom prst="rect">
             <a:avLst/>
@@ -4048,8 +4048,7 @@
                 <a:latin typeface="Malgun Gothic"/>
                 <a:ea typeface="Malgun Gothic"/>
               </a:rPr>
-              <a:t>- 답변 품질은 RAGAS의 근거 충실도, 답변 관련성,
-  문맥 정밀도, 문맥 재현율(0에서 1)</a:t>
+              <a:t>- 관측값은 모두 0에서 1, 앞의 네 지표는 RAGAS로 계산</a:t>
             </a:r>
           </a:p>
         </p:txBody>
@@ -4062,47 +4061,7 @@
         </p:nvSpPr>
         <p:spPr>
           <a:xfrm>
-            <a:off x="10980000" y="16880814"/>
-            <a:ext cx="9612000" cy="335301"/>
-          </a:xfrm>
-          <a:prstGeom prst="rect">
-            <a:avLst/>
-          </a:prstGeom>
-          <a:noFill/>
-        </p:spPr>
-        <p:txBody>
-          <a:bodyPr wrap="square" lIns="0" rIns="0" tIns="0" bIns="0">
-            <a:spAutoFit/>
-          </a:bodyPr>
-          <a:lstStyle/>
-          <a:p>
-            <a:pPr algn="l">
-              <a:lnSpc>
-                <a:spcPct val="115000"/>
-              </a:lnSpc>
-            </a:pPr>
-            <a:r>
-              <a:rPr sz="2000" b="0">
-                <a:solidFill>
-                  <a:srgbClr val="263044"/>
-                </a:solidFill>
-                <a:latin typeface="Malgun Gothic"/>
-                <a:ea typeface="Malgun Gothic"/>
-              </a:rPr>
-              <a:t>- 출력 언어는 한국어 문자 비율</a:t>
-            </a:r>
-          </a:p>
-        </p:txBody>
-      </p:sp>
-      <p:sp>
-        <p:nvSpPr>
-          <p:cNvPr id="27" name="TextBox 26"/>
-          <p:cNvSpPr txBox="1"/>
-          <p:nvPr/>
-        </p:nvSpPr>
-        <p:spPr>
-          <a:xfrm>
-            <a:off x="10980000" y="17306115"/>
+            <a:off x="792000" y="17749416"/>
             <a:ext cx="9612000" cy="670602"/>
           </a:xfrm>
           <a:prstGeom prst="rect">
@@ -4135,6 +4094,831 @@
           </a:p>
         </p:txBody>
       </p:sp>
+      <p:graphicFrame>
+        <p:nvGraphicFramePr>
+          <p:cNvPr id="27" name="Table 26"/>
+          <p:cNvGraphicFramePr>
+            <a:graphicFrameLocks noGrp="1"/>
+          </p:cNvGraphicFramePr>
+          <p:nvPr/>
+        </p:nvGraphicFramePr>
+        <p:xfrm>
+          <a:off x="10980000" y="16120212"/>
+          <a:ext cx="9611999" cy="2362299"/>
+        </p:xfrm>
+        <a:graphic>
+          <a:graphicData uri="http://schemas.openxmlformats.org/drawingml/2006/table">
+            <a:tbl>
+              <a:tblPr firstRow="0" bandRow="0">
+                <a:tableStyleId>{5940675A-B579-460E-94D1-54222C63F5DA}</a:tableStyleId>
+              </a:tblPr>
+              <a:tblGrid>
+                <a:gridCol w="1848461"/>
+                <a:gridCol w="5083269"/>
+                <a:gridCol w="2680269"/>
+              </a:tblGrid>
+              <a:tr h="349814">
+                <a:tc>
+                  <a:txBody>
+                    <a:bodyPr wrap="square"/>
+                    <a:lstStyle/>
+                    <a:p>
+                      <a:pPr algn="ctr"/>
+                      <a:r>
+                        <a:rPr sz="1700" b="1">
+                          <a:solidFill>
+                            <a:srgbClr val="263044"/>
+                          </a:solidFill>
+                          <a:latin typeface="Malgun Gothic"/>
+                        </a:rPr>
+                        <a:t>지표</a:t>
+                      </a:r>
+                    </a:p>
+                  </a:txBody>
+                  <a:tcPr marL="57600" marR="57600" marT="21600" marB="21600" anchor="ctr">
+                    <a:solidFill>
+                      <a:srgbClr val="FFFFFF"/>
+                    </a:solidFill>
+                    <a:lnL w="9525">
+                      <a:solidFill>
+                        <a:srgbClr val="777777"/>
+                      </a:solidFill>
+                    </a:lnL>
+                    <a:lnR w="9525">
+                      <a:solidFill>
+                        <a:srgbClr val="777777"/>
+                      </a:solidFill>
+                    </a:lnR>
+                    <a:lnT w="9525">
+                      <a:solidFill>
+                        <a:srgbClr val="777777"/>
+                      </a:solidFill>
+                    </a:lnT>
+                    <a:lnB w="9525">
+                      <a:solidFill>
+                        <a:srgbClr val="777777"/>
+                      </a:solidFill>
+                    </a:lnB>
+                  </a:tcPr>
+                </a:tc>
+                <a:tc>
+                  <a:txBody>
+                    <a:bodyPr wrap="square"/>
+                    <a:lstStyle/>
+                    <a:p>
+                      <a:pPr algn="ctr"/>
+                      <a:r>
+                        <a:rPr sz="1700" b="1">
+                          <a:solidFill>
+                            <a:srgbClr val="263044"/>
+                          </a:solidFill>
+                          <a:latin typeface="Malgun Gothic"/>
+                        </a:rPr>
+                        <a:t>측정 내용</a:t>
+                      </a:r>
+                    </a:p>
+                  </a:txBody>
+                  <a:tcPr marL="57600" marR="57600" marT="21600" marB="21600" anchor="ctr">
+                    <a:solidFill>
+                      <a:srgbClr val="FFFFFF"/>
+                    </a:solidFill>
+                    <a:lnL w="9525">
+                      <a:solidFill>
+                        <a:srgbClr val="777777"/>
+                      </a:solidFill>
+                    </a:lnL>
+                    <a:lnR w="9525">
+                      <a:solidFill>
+                        <a:srgbClr val="777777"/>
+                      </a:solidFill>
+                    </a:lnR>
+                    <a:lnT w="9525">
+                      <a:solidFill>
+                        <a:srgbClr val="777777"/>
+                      </a:solidFill>
+                    </a:lnT>
+                    <a:lnB w="9525">
+                      <a:solidFill>
+                        <a:srgbClr val="777777"/>
+                      </a:solidFill>
+                    </a:lnB>
+                  </a:tcPr>
+                </a:tc>
+                <a:tc>
+                  <a:txBody>
+                    <a:bodyPr wrap="square"/>
+                    <a:lstStyle/>
+                    <a:p>
+                      <a:pPr algn="ctr"/>
+                      <a:r>
+                        <a:rPr sz="1700" b="1">
+                          <a:solidFill>
+                            <a:srgbClr val="263044"/>
+                          </a:solidFill>
+                          <a:latin typeface="Malgun Gothic"/>
+                        </a:rPr>
+                        <a:t>값의 방향</a:t>
+                      </a:r>
+                    </a:p>
+                  </a:txBody>
+                  <a:tcPr marL="57600" marR="57600" marT="21600" marB="21600" anchor="ctr">
+                    <a:solidFill>
+                      <a:srgbClr val="FFFFFF"/>
+                    </a:solidFill>
+                    <a:lnL w="9525">
+                      <a:solidFill>
+                        <a:srgbClr val="777777"/>
+                      </a:solidFill>
+                    </a:lnL>
+                    <a:lnR w="9525">
+                      <a:solidFill>
+                        <a:srgbClr val="777777"/>
+                      </a:solidFill>
+                    </a:lnR>
+                    <a:lnT w="9525">
+                      <a:solidFill>
+                        <a:srgbClr val="777777"/>
+                      </a:solidFill>
+                    </a:lnT>
+                    <a:lnB w="9525">
+                      <a:solidFill>
+                        <a:srgbClr val="777777"/>
+                      </a:solidFill>
+                    </a:lnB>
+                  </a:tcPr>
+                </a:tc>
+              </a:tr>
+              <a:tr h="349814">
+                <a:tc>
+                  <a:txBody>
+                    <a:bodyPr wrap="square"/>
+                    <a:lstStyle/>
+                    <a:p>
+                      <a:pPr algn="l"/>
+                      <a:r>
+                        <a:rPr sz="1700" b="0">
+                          <a:solidFill>
+                            <a:srgbClr val="263044"/>
+                          </a:solidFill>
+                          <a:latin typeface="Malgun Gothic"/>
+                        </a:rPr>
+                        <a:t>근거 충실도</a:t>
+                      </a:r>
+                    </a:p>
+                  </a:txBody>
+                  <a:tcPr marL="57600" marR="57600" marT="21600" marB="21600" anchor="ctr">
+                    <a:solidFill>
+                      <a:srgbClr val="FFFFFF"/>
+                    </a:solidFill>
+                    <a:lnL w="9525">
+                      <a:solidFill>
+                        <a:srgbClr val="777777"/>
+                      </a:solidFill>
+                    </a:lnL>
+                    <a:lnR w="9525">
+                      <a:solidFill>
+                        <a:srgbClr val="777777"/>
+                      </a:solidFill>
+                    </a:lnR>
+                    <a:lnT w="9525">
+                      <a:solidFill>
+                        <a:srgbClr val="777777"/>
+                      </a:solidFill>
+                    </a:lnT>
+                    <a:lnB w="9525">
+                      <a:solidFill>
+                        <a:srgbClr val="777777"/>
+                      </a:solidFill>
+                    </a:lnB>
+                  </a:tcPr>
+                </a:tc>
+                <a:tc>
+                  <a:txBody>
+                    <a:bodyPr wrap="square"/>
+                    <a:lstStyle/>
+                    <a:p>
+                      <a:pPr algn="l"/>
+                      <a:r>
+                        <a:rPr sz="1700" b="0">
+                          <a:solidFill>
+                            <a:srgbClr val="263044"/>
+                          </a:solidFill>
+                          <a:latin typeface="Malgun Gothic"/>
+                        </a:rPr>
+                        <a:t>답변의 주장 중 검색 구간이 뒷받침하는 비율</a:t>
+                      </a:r>
+                    </a:p>
+                  </a:txBody>
+                  <a:tcPr marL="57600" marR="57600" marT="21600" marB="21600" anchor="ctr">
+                    <a:solidFill>
+                      <a:srgbClr val="FFFFFF"/>
+                    </a:solidFill>
+                    <a:lnL w="9525">
+                      <a:solidFill>
+                        <a:srgbClr val="777777"/>
+                      </a:solidFill>
+                    </a:lnL>
+                    <a:lnR w="9525">
+                      <a:solidFill>
+                        <a:srgbClr val="777777"/>
+                      </a:solidFill>
+                    </a:lnR>
+                    <a:lnT w="9525">
+                      <a:solidFill>
+                        <a:srgbClr val="777777"/>
+                      </a:solidFill>
+                    </a:lnT>
+                    <a:lnB w="9525">
+                      <a:solidFill>
+                        <a:srgbClr val="777777"/>
+                      </a:solidFill>
+                    </a:lnB>
+                  </a:tcPr>
+                </a:tc>
+                <a:tc>
+                  <a:txBody>
+                    <a:bodyPr wrap="square"/>
+                    <a:lstStyle/>
+                    <a:p>
+                      <a:pPr algn="l"/>
+                      <a:r>
+                        <a:rPr sz="1700" b="0">
+                          <a:solidFill>
+                            <a:srgbClr val="263044"/>
+                          </a:solidFill>
+                          <a:latin typeface="Malgun Gothic"/>
+                        </a:rPr>
+                        <a:t>높을수록 근거에 충실</a:t>
+                      </a:r>
+                    </a:p>
+                  </a:txBody>
+                  <a:tcPr marL="57600" marR="57600" marT="21600" marB="21600" anchor="ctr">
+                    <a:solidFill>
+                      <a:srgbClr val="FFFFFF"/>
+                    </a:solidFill>
+                    <a:lnL w="9525">
+                      <a:solidFill>
+                        <a:srgbClr val="777777"/>
+                      </a:solidFill>
+                    </a:lnL>
+                    <a:lnR w="9525">
+                      <a:solidFill>
+                        <a:srgbClr val="777777"/>
+                      </a:solidFill>
+                    </a:lnR>
+                    <a:lnT w="9525">
+                      <a:solidFill>
+                        <a:srgbClr val="777777"/>
+                      </a:solidFill>
+                    </a:lnT>
+                    <a:lnB w="9525">
+                      <a:solidFill>
+                        <a:srgbClr val="777777"/>
+                      </a:solidFill>
+                    </a:lnB>
+                  </a:tcPr>
+                </a:tc>
+              </a:tr>
+              <a:tr h="613229">
+                <a:tc>
+                  <a:txBody>
+                    <a:bodyPr wrap="square"/>
+                    <a:lstStyle/>
+                    <a:p>
+                      <a:pPr algn="l"/>
+                      <a:r>
+                        <a:rPr sz="1700" b="0">
+                          <a:solidFill>
+                            <a:srgbClr val="263044"/>
+                          </a:solidFill>
+                          <a:latin typeface="Malgun Gothic"/>
+                        </a:rPr>
+                        <a:t>답변 관련성</a:t>
+                      </a:r>
+                    </a:p>
+                  </a:txBody>
+                  <a:tcPr marL="57600" marR="57600" marT="21600" marB="21600" anchor="ctr">
+                    <a:solidFill>
+                      <a:srgbClr val="FFFFFF"/>
+                    </a:solidFill>
+                    <a:lnL w="9525">
+                      <a:solidFill>
+                        <a:srgbClr val="777777"/>
+                      </a:solidFill>
+                    </a:lnL>
+                    <a:lnR w="9525">
+                      <a:solidFill>
+                        <a:srgbClr val="777777"/>
+                      </a:solidFill>
+                    </a:lnR>
+                    <a:lnT w="9525">
+                      <a:solidFill>
+                        <a:srgbClr val="777777"/>
+                      </a:solidFill>
+                    </a:lnT>
+                    <a:lnB w="9525">
+                      <a:solidFill>
+                        <a:srgbClr val="777777"/>
+                      </a:solidFill>
+                    </a:lnB>
+                  </a:tcPr>
+                </a:tc>
+                <a:tc>
+                  <a:txBody>
+                    <a:bodyPr wrap="square"/>
+                    <a:lstStyle/>
+                    <a:p>
+                      <a:pPr algn="l"/>
+                      <a:r>
+                        <a:rPr sz="1700" b="0">
+                          <a:solidFill>
+                            <a:srgbClr val="263044"/>
+                          </a:solidFill>
+                          <a:latin typeface="Malgun Gothic"/>
+                        </a:rPr>
+                        <a:t>답변에서 역으로 만든 질문과 원래 질문의 유사도</a:t>
+                      </a:r>
+                    </a:p>
+                    <a:p>
+                      <a:pPr algn="l"/>
+                      <a:r>
+                        <a:rPr sz="1700" b="0">
+                          <a:solidFill>
+                            <a:srgbClr val="263044"/>
+                          </a:solidFill>
+                          <a:latin typeface="Malgun Gothic"/>
+                        </a:rPr>
+                        <a:t>모호하거나 회피하는 답변은 0</a:t>
+                      </a:r>
+                    </a:p>
+                  </a:txBody>
+                  <a:tcPr marL="57600" marR="57600" marT="21600" marB="21600" anchor="ctr">
+                    <a:solidFill>
+                      <a:srgbClr val="FFFFFF"/>
+                    </a:solidFill>
+                    <a:lnL w="9525">
+                      <a:solidFill>
+                        <a:srgbClr val="777777"/>
+                      </a:solidFill>
+                    </a:lnL>
+                    <a:lnR w="9525">
+                      <a:solidFill>
+                        <a:srgbClr val="777777"/>
+                      </a:solidFill>
+                    </a:lnR>
+                    <a:lnT w="9525">
+                      <a:solidFill>
+                        <a:srgbClr val="777777"/>
+                      </a:solidFill>
+                    </a:lnT>
+                    <a:lnB w="9525">
+                      <a:solidFill>
+                        <a:srgbClr val="777777"/>
+                      </a:solidFill>
+                    </a:lnB>
+                  </a:tcPr>
+                </a:tc>
+                <a:tc>
+                  <a:txBody>
+                    <a:bodyPr wrap="square"/>
+                    <a:lstStyle/>
+                    <a:p>
+                      <a:pPr algn="l"/>
+                      <a:r>
+                        <a:rPr sz="1700" b="0">
+                          <a:solidFill>
+                            <a:srgbClr val="263044"/>
+                          </a:solidFill>
+                          <a:latin typeface="Malgun Gothic"/>
+                        </a:rPr>
+                        <a:t>높을수록 질문에 부합</a:t>
+                      </a:r>
+                    </a:p>
+                  </a:txBody>
+                  <a:tcPr marL="57600" marR="57600" marT="21600" marB="21600" anchor="ctr">
+                    <a:solidFill>
+                      <a:srgbClr val="FFFFFF"/>
+                    </a:solidFill>
+                    <a:lnL w="9525">
+                      <a:solidFill>
+                        <a:srgbClr val="777777"/>
+                      </a:solidFill>
+                    </a:lnL>
+                    <a:lnR w="9525">
+                      <a:solidFill>
+                        <a:srgbClr val="777777"/>
+                      </a:solidFill>
+                    </a:lnR>
+                    <a:lnT w="9525">
+                      <a:solidFill>
+                        <a:srgbClr val="777777"/>
+                      </a:solidFill>
+                    </a:lnT>
+                    <a:lnB w="9525">
+                      <a:solidFill>
+                        <a:srgbClr val="777777"/>
+                      </a:solidFill>
+                    </a:lnB>
+                  </a:tcPr>
+                </a:tc>
+              </a:tr>
+              <a:tr h="349814">
+                <a:tc>
+                  <a:txBody>
+                    <a:bodyPr wrap="square"/>
+                    <a:lstStyle/>
+                    <a:p>
+                      <a:pPr algn="l"/>
+                      <a:r>
+                        <a:rPr sz="1700" b="0">
+                          <a:solidFill>
+                            <a:srgbClr val="263044"/>
+                          </a:solidFill>
+                          <a:latin typeface="Malgun Gothic"/>
+                        </a:rPr>
+                        <a:t>문맥 정밀도</a:t>
+                      </a:r>
+                    </a:p>
+                  </a:txBody>
+                  <a:tcPr marL="57600" marR="57600" marT="21600" marB="21600" anchor="ctr">
+                    <a:solidFill>
+                      <a:srgbClr val="FFFFFF"/>
+                    </a:solidFill>
+                    <a:lnL w="9525">
+                      <a:solidFill>
+                        <a:srgbClr val="777777"/>
+                      </a:solidFill>
+                    </a:lnL>
+                    <a:lnR w="9525">
+                      <a:solidFill>
+                        <a:srgbClr val="777777"/>
+                      </a:solidFill>
+                    </a:lnR>
+                    <a:lnT w="9525">
+                      <a:solidFill>
+                        <a:srgbClr val="777777"/>
+                      </a:solidFill>
+                    </a:lnT>
+                    <a:lnB w="9525">
+                      <a:solidFill>
+                        <a:srgbClr val="777777"/>
+                      </a:solidFill>
+                    </a:lnB>
+                  </a:tcPr>
+                </a:tc>
+                <a:tc>
+                  <a:txBody>
+                    <a:bodyPr wrap="square"/>
+                    <a:lstStyle/>
+                    <a:p>
+                      <a:pPr algn="l"/>
+                      <a:r>
+                        <a:rPr sz="1700" b="0">
+                          <a:solidFill>
+                            <a:srgbClr val="263044"/>
+                          </a:solidFill>
+                          <a:latin typeface="Malgun Gothic"/>
+                        </a:rPr>
+                        <a:t>참조 답변에 유용한 구간의 순위가 높은 정도</a:t>
+                      </a:r>
+                    </a:p>
+                  </a:txBody>
+                  <a:tcPr marL="57600" marR="57600" marT="21600" marB="21600" anchor="ctr">
+                    <a:solidFill>
+                      <a:srgbClr val="FFFFFF"/>
+                    </a:solidFill>
+                    <a:lnL w="9525">
+                      <a:solidFill>
+                        <a:srgbClr val="777777"/>
+                      </a:solidFill>
+                    </a:lnL>
+                    <a:lnR w="9525">
+                      <a:solidFill>
+                        <a:srgbClr val="777777"/>
+                      </a:solidFill>
+                    </a:lnR>
+                    <a:lnT w="9525">
+                      <a:solidFill>
+                        <a:srgbClr val="777777"/>
+                      </a:solidFill>
+                    </a:lnT>
+                    <a:lnB w="9525">
+                      <a:solidFill>
+                        <a:srgbClr val="777777"/>
+                      </a:solidFill>
+                    </a:lnB>
+                  </a:tcPr>
+                </a:tc>
+                <a:tc>
+                  <a:txBody>
+                    <a:bodyPr wrap="square"/>
+                    <a:lstStyle/>
+                    <a:p>
+                      <a:pPr algn="l"/>
+                      <a:r>
+                        <a:rPr sz="1700" b="0">
+                          <a:solidFill>
+                            <a:srgbClr val="263044"/>
+                          </a:solidFill>
+                          <a:latin typeface="Malgun Gothic"/>
+                        </a:rPr>
+                        <a:t>높을수록 순위가 적절</a:t>
+                      </a:r>
+                    </a:p>
+                  </a:txBody>
+                  <a:tcPr marL="57600" marR="57600" marT="21600" marB="21600" anchor="ctr">
+                    <a:solidFill>
+                      <a:srgbClr val="FFFFFF"/>
+                    </a:solidFill>
+                    <a:lnL w="9525">
+                      <a:solidFill>
+                        <a:srgbClr val="777777"/>
+                      </a:solidFill>
+                    </a:lnL>
+                    <a:lnR w="9525">
+                      <a:solidFill>
+                        <a:srgbClr val="777777"/>
+                      </a:solidFill>
+                    </a:lnR>
+                    <a:lnT w="9525">
+                      <a:solidFill>
+                        <a:srgbClr val="777777"/>
+                      </a:solidFill>
+                    </a:lnT>
+                    <a:lnB w="9525">
+                      <a:solidFill>
+                        <a:srgbClr val="777777"/>
+                      </a:solidFill>
+                    </a:lnB>
+                  </a:tcPr>
+                </a:tc>
+              </a:tr>
+              <a:tr h="349814">
+                <a:tc>
+                  <a:txBody>
+                    <a:bodyPr wrap="square"/>
+                    <a:lstStyle/>
+                    <a:p>
+                      <a:pPr algn="l"/>
+                      <a:r>
+                        <a:rPr sz="1700" b="0">
+                          <a:solidFill>
+                            <a:srgbClr val="263044"/>
+                          </a:solidFill>
+                          <a:latin typeface="Malgun Gothic"/>
+                        </a:rPr>
+                        <a:t>문맥 재현율</a:t>
+                      </a:r>
+                    </a:p>
+                  </a:txBody>
+                  <a:tcPr marL="57600" marR="57600" marT="21600" marB="21600" anchor="ctr">
+                    <a:solidFill>
+                      <a:srgbClr val="FFFFFF"/>
+                    </a:solidFill>
+                    <a:lnL w="9525">
+                      <a:solidFill>
+                        <a:srgbClr val="777777"/>
+                      </a:solidFill>
+                    </a:lnL>
+                    <a:lnR w="9525">
+                      <a:solidFill>
+                        <a:srgbClr val="777777"/>
+                      </a:solidFill>
+                    </a:lnR>
+                    <a:lnT w="9525">
+                      <a:solidFill>
+                        <a:srgbClr val="777777"/>
+                      </a:solidFill>
+                    </a:lnT>
+                    <a:lnB w="9525">
+                      <a:solidFill>
+                        <a:srgbClr val="777777"/>
+                      </a:solidFill>
+                    </a:lnB>
+                  </a:tcPr>
+                </a:tc>
+                <a:tc>
+                  <a:txBody>
+                    <a:bodyPr wrap="square"/>
+                    <a:lstStyle/>
+                    <a:p>
+                      <a:pPr algn="l"/>
+                      <a:r>
+                        <a:rPr sz="1700" b="0">
+                          <a:solidFill>
+                            <a:srgbClr val="263044"/>
+                          </a:solidFill>
+                          <a:latin typeface="Malgun Gothic"/>
+                        </a:rPr>
+                        <a:t>참조 답변의 주장을 검색 구간이 뒷받침하는 비율</a:t>
+                      </a:r>
+                    </a:p>
+                  </a:txBody>
+                  <a:tcPr marL="57600" marR="57600" marT="21600" marB="21600" anchor="ctr">
+                    <a:solidFill>
+                      <a:srgbClr val="FFFFFF"/>
+                    </a:solidFill>
+                    <a:lnL w="9525">
+                      <a:solidFill>
+                        <a:srgbClr val="777777"/>
+                      </a:solidFill>
+                    </a:lnL>
+                    <a:lnR w="9525">
+                      <a:solidFill>
+                        <a:srgbClr val="777777"/>
+                      </a:solidFill>
+                    </a:lnR>
+                    <a:lnT w="9525">
+                      <a:solidFill>
+                        <a:srgbClr val="777777"/>
+                      </a:solidFill>
+                    </a:lnT>
+                    <a:lnB w="9525">
+                      <a:solidFill>
+                        <a:srgbClr val="777777"/>
+                      </a:solidFill>
+                    </a:lnB>
+                  </a:tcPr>
+                </a:tc>
+                <a:tc>
+                  <a:txBody>
+                    <a:bodyPr wrap="square"/>
+                    <a:lstStyle/>
+                    <a:p>
+                      <a:pPr algn="l"/>
+                      <a:r>
+                        <a:rPr sz="1700" b="0">
+                          <a:solidFill>
+                            <a:srgbClr val="263044"/>
+                          </a:solidFill>
+                          <a:latin typeface="Malgun Gothic"/>
+                        </a:rPr>
+                        <a:t>높을수록 정답 근거 확보</a:t>
+                      </a:r>
+                    </a:p>
+                  </a:txBody>
+                  <a:tcPr marL="57600" marR="57600" marT="21600" marB="21600" anchor="ctr">
+                    <a:solidFill>
+                      <a:srgbClr val="FFFFFF"/>
+                    </a:solidFill>
+                    <a:lnL w="9525">
+                      <a:solidFill>
+                        <a:srgbClr val="777777"/>
+                      </a:solidFill>
+                    </a:lnL>
+                    <a:lnR w="9525">
+                      <a:solidFill>
+                        <a:srgbClr val="777777"/>
+                      </a:solidFill>
+                    </a:lnR>
+                    <a:lnT w="9525">
+                      <a:solidFill>
+                        <a:srgbClr val="777777"/>
+                      </a:solidFill>
+                    </a:lnT>
+                    <a:lnB w="9525">
+                      <a:solidFill>
+                        <a:srgbClr val="777777"/>
+                      </a:solidFill>
+                    </a:lnB>
+                  </a:tcPr>
+                </a:tc>
+              </a:tr>
+              <a:tr h="349814">
+                <a:tc>
+                  <a:txBody>
+                    <a:bodyPr wrap="square"/>
+                    <a:lstStyle/>
+                    <a:p>
+                      <a:pPr algn="l"/>
+                      <a:r>
+                        <a:rPr sz="1700" b="0">
+                          <a:solidFill>
+                            <a:srgbClr val="263044"/>
+                          </a:solidFill>
+                          <a:latin typeface="Malgun Gothic"/>
+                        </a:rPr>
+                        <a:t>한국어 문자 비율</a:t>
+                      </a:r>
+                    </a:p>
+                  </a:txBody>
+                  <a:tcPr marL="57600" marR="57600" marT="21600" marB="21600" anchor="ctr">
+                    <a:solidFill>
+                      <a:srgbClr val="FFFFFF"/>
+                    </a:solidFill>
+                    <a:lnL w="9525">
+                      <a:solidFill>
+                        <a:srgbClr val="777777"/>
+                      </a:solidFill>
+                    </a:lnL>
+                    <a:lnR w="9525">
+                      <a:solidFill>
+                        <a:srgbClr val="777777"/>
+                      </a:solidFill>
+                    </a:lnR>
+                    <a:lnT w="9525">
+                      <a:solidFill>
+                        <a:srgbClr val="777777"/>
+                      </a:solidFill>
+                    </a:lnT>
+                    <a:lnB w="9525">
+                      <a:solidFill>
+                        <a:srgbClr val="777777"/>
+                      </a:solidFill>
+                    </a:lnB>
+                  </a:tcPr>
+                </a:tc>
+                <a:tc>
+                  <a:txBody>
+                    <a:bodyPr wrap="square"/>
+                    <a:lstStyle/>
+                    <a:p>
+                      <a:pPr algn="l"/>
+                      <a:r>
+                        <a:rPr sz="1700" b="0">
+                          <a:solidFill>
+                            <a:srgbClr val="263044"/>
+                          </a:solidFill>
+                          <a:latin typeface="Malgun Gothic"/>
+                        </a:rPr>
+                        <a:t>출력 언어, 한글 ÷ (한글 + ASCII 영문자)</a:t>
+                      </a:r>
+                    </a:p>
+                  </a:txBody>
+                  <a:tcPr marL="57600" marR="57600" marT="21600" marB="21600" anchor="ctr">
+                    <a:solidFill>
+                      <a:srgbClr val="FFFFFF"/>
+                    </a:solidFill>
+                    <a:lnL w="9525">
+                      <a:solidFill>
+                        <a:srgbClr val="777777"/>
+                      </a:solidFill>
+                    </a:lnL>
+                    <a:lnR w="9525">
+                      <a:solidFill>
+                        <a:srgbClr val="777777"/>
+                      </a:solidFill>
+                    </a:lnR>
+                    <a:lnT w="9525">
+                      <a:solidFill>
+                        <a:srgbClr val="777777"/>
+                      </a:solidFill>
+                    </a:lnT>
+                    <a:lnB w="9525">
+                      <a:solidFill>
+                        <a:srgbClr val="777777"/>
+                      </a:solidFill>
+                    </a:lnB>
+                  </a:tcPr>
+                </a:tc>
+                <a:tc>
+                  <a:txBody>
+                    <a:bodyPr wrap="square"/>
+                    <a:lstStyle/>
+                    <a:p>
+                      <a:pPr algn="l"/>
+                      <a:r>
+                        <a:rPr sz="1700" b="0">
+                          <a:solidFill>
+                            <a:srgbClr val="263044"/>
+                          </a:solidFill>
+                          <a:latin typeface="Malgun Gothic"/>
+                        </a:rPr>
+                        <a:t>높을수록 한국어 출력</a:t>
+                      </a:r>
+                    </a:p>
+                  </a:txBody>
+                  <a:tcPr marL="57600" marR="57600" marT="21600" marB="21600" anchor="ctr">
+                    <a:solidFill>
+                      <a:srgbClr val="FFFFFF"/>
+                    </a:solidFill>
+                    <a:lnL w="9525">
+                      <a:solidFill>
+                        <a:srgbClr val="777777"/>
+                      </a:solidFill>
+                    </a:lnL>
+                    <a:lnR w="9525">
+                      <a:solidFill>
+                        <a:srgbClr val="777777"/>
+                      </a:solidFill>
+                    </a:lnR>
+                    <a:lnT w="9525">
+                      <a:solidFill>
+                        <a:srgbClr val="777777"/>
+                      </a:solidFill>
+                    </a:lnT>
+                    <a:lnB w="9525">
+                      <a:solidFill>
+                        <a:srgbClr val="777777"/>
+                      </a:solidFill>
+                    </a:lnB>
+                  </a:tcPr>
+                </a:tc>
+              </a:tr>
+            </a:tbl>
+          </a:graphicData>
+        </a:graphic>
+      </p:graphicFrame>
       <p:sp>
         <p:nvSpPr>
           <p:cNvPr id="28" name="Rectangle 27"/>
@@ -4143,7 +4927,7 @@
         </p:nvSpPr>
         <p:spPr>
           <a:xfrm>
-            <a:off x="792000" y="18210717"/>
+            <a:off x="792000" y="18636018"/>
             <a:ext cx="19800000" cy="468000"/>
           </a:xfrm>
           <a:prstGeom prst="rect">
@@ -4187,7 +4971,7 @@
         </p:nvSpPr>
         <p:spPr>
           <a:xfrm>
-            <a:off x="936000" y="18235917"/>
+            <a:off x="936000" y="18661218"/>
             <a:ext cx="19512000" cy="360000"/>
           </a:xfrm>
           <a:prstGeom prst="rect">
@@ -4228,7 +5012,7 @@
           <p:nvPr/>
         </p:nvGraphicFramePr>
         <p:xfrm>
-          <a:off x="792000" y="18822717"/>
+          <a:off x="792000" y="19248018"/>
           <a:ext cx="19799991" cy="3761555"/>
         </p:xfrm>
         <a:graphic>
@@ -11227,7 +12011,7 @@
         </p:nvSpPr>
         <p:spPr>
           <a:xfrm>
-            <a:off x="792000" y="22692278"/>
+            <a:off x="792000" y="23117579"/>
             <a:ext cx="19800000" cy="318536"/>
           </a:xfrm>
           <a:prstGeom prst="rect">
@@ -11267,7 +12051,7 @@
         </p:nvSpPr>
         <p:spPr>
           <a:xfrm>
-            <a:off x="792000" y="23100814"/>
+            <a:off x="792000" y="23526115"/>
             <a:ext cx="19800000" cy="318536"/>
           </a:xfrm>
           <a:prstGeom prst="rect">
@@ -11307,7 +12091,7 @@
         </p:nvSpPr>
         <p:spPr>
           <a:xfrm>
-            <a:off x="10980000" y="23653350"/>
+            <a:off x="10980000" y="24078651"/>
             <a:ext cx="9612000" cy="468000"/>
           </a:xfrm>
           <a:prstGeom prst="rect">
@@ -11351,7 +12135,7 @@
         </p:nvSpPr>
         <p:spPr>
           <a:xfrm>
-            <a:off x="11124000" y="23678550"/>
+            <a:off x="11124000" y="24103851"/>
             <a:ext cx="9324000" cy="360000"/>
           </a:xfrm>
           <a:prstGeom prst="rect">
@@ -11391,8 +12175,8 @@
         </p:nvSpPr>
         <p:spPr>
           <a:xfrm>
-            <a:off x="10980000" y="24265350"/>
-            <a:ext cx="9612000" cy="352066"/>
+            <a:off x="10980000" y="24762651"/>
+            <a:ext cx="9612000" cy="804722"/>
           </a:xfrm>
           <a:prstGeom prst="rect">
             <a:avLst/>
@@ -11411,14 +12195,15 @@
               </a:lnSpc>
             </a:pPr>
             <a:r>
-              <a:rPr sz="2100" b="0">
+              <a:rPr sz="2400" b="0">
                 <a:solidFill>
                   <a:srgbClr val="263044"/>
                 </a:solidFill>
                 <a:latin typeface="Malgun Gothic"/>
                 <a:ea typeface="Malgun Gothic"/>
               </a:rPr>
-              <a:t>- 관련성과 응답 시간이 중요하면 HyDE 하나(개념과 결과 질문 포함)</a:t>
+              <a:t>- 관련성과 응답 시간이 중요하면 HyDE 하나
+  (개념과 결과 질문 포함)</a:t>
             </a:r>
           </a:p>
         </p:txBody>
@@ -11431,8 +12216,8 @@
         </p:nvSpPr>
         <p:spPr>
           <a:xfrm>
-            <a:off x="10980000" y="24828318"/>
-            <a:ext cx="9612000" cy="352066"/>
+            <a:off x="10980000" y="26071374"/>
+            <a:ext cx="9612000" cy="402361"/>
           </a:xfrm>
           <a:prstGeom prst="rect">
             <a:avLst/>
@@ -11451,7 +12236,7 @@
               </a:lnSpc>
             </a:pPr>
             <a:r>
-              <a:rPr sz="2100" b="0">
+              <a:rPr sz="2400" b="0">
                 <a:solidFill>
                   <a:srgbClr val="263044"/>
                 </a:solidFill>
@@ -11471,8 +12256,8 @@
         </p:nvSpPr>
         <p:spPr>
           <a:xfrm>
-            <a:off x="10980000" y="25391287"/>
-            <a:ext cx="9612000" cy="352066"/>
+            <a:off x="10980000" y="26977735"/>
+            <a:ext cx="9612000" cy="402361"/>
           </a:xfrm>
           <a:prstGeom prst="rect">
             <a:avLst/>
@@ -11491,7 +12276,7 @@
               </a:lnSpc>
             </a:pPr>
             <a:r>
-              <a:rPr sz="2100" b="0">
+              <a:rPr sz="2400" b="0">
                 <a:solidFill>
                   <a:srgbClr val="263044"/>
                 </a:solidFill>
@@ -11511,8 +12296,8 @@
         </p:nvSpPr>
         <p:spPr>
           <a:xfrm>
-            <a:off x="10980000" y="25954255"/>
-            <a:ext cx="9612000" cy="352066"/>
+            <a:off x="10980000" y="27884096"/>
+            <a:ext cx="9612000" cy="804722"/>
           </a:xfrm>
           <a:prstGeom prst="rect">
             <a:avLst/>
@@ -11531,14 +12316,15 @@
               </a:lnSpc>
             </a:pPr>
             <a:r>
-              <a:rPr sz="2100" b="0">
+              <a:rPr sz="2400" b="0">
                 <a:solidFill>
                   <a:srgbClr val="263044"/>
                 </a:solidFill>
                 <a:latin typeface="Malgun Gothic"/>
                 <a:ea typeface="Malgun Gothic"/>
               </a:rPr>
-              <a:t>- 조합은 HyDE 단독보다 관련성이 낮고 일관된 이득은 SCD의 한국어 비율</a:t>
+              <a:t>- 조합은 HyDE 단독보다 관련성이 낮고
+  일관된 이득은 SCD의 한국어 비율</a:t>
             </a:r>
           </a:p>
         </p:txBody>
@@ -11551,7 +12337,7 @@
         </p:nvSpPr>
         <p:spPr>
           <a:xfrm>
-            <a:off x="10980000" y="26728126"/>
+            <a:off x="792000" y="24078651"/>
             <a:ext cx="9612000" cy="468000"/>
           </a:xfrm>
           <a:prstGeom prst="rect">
@@ -11595,251 +12381,7 @@
         </p:nvSpPr>
         <p:spPr>
           <a:xfrm>
-            <a:off x="11124000" y="26753326"/>
-            <a:ext cx="9324000" cy="360000"/>
-          </a:xfrm>
-          <a:prstGeom prst="rect">
-            <a:avLst/>
-          </a:prstGeom>
-          <a:noFill/>
-        </p:spPr>
-        <p:txBody>
-          <a:bodyPr wrap="square" lIns="0" rIns="0" tIns="0" bIns="0">
-            <a:spAutoFit/>
-          </a:bodyPr>
-          <a:lstStyle/>
-          <a:p>
-            <a:pPr algn="l">
-              <a:lnSpc>
-                <a:spcPct val="115000"/>
-              </a:lnSpc>
-            </a:pPr>
-            <a:r>
-              <a:rPr sz="2700" b="1">
-                <a:solidFill>
-                  <a:srgbClr val="FFFFFF"/>
-                </a:solidFill>
-                <a:latin typeface="Malgun Gothic"/>
-                <a:ea typeface="Malgun Gothic"/>
-              </a:rPr>
-              <a:t>08 실제 답변에서 확인한 점</a:t>
-            </a:r>
-          </a:p>
-        </p:txBody>
-      </p:sp>
-      <p:sp>
-        <p:nvSpPr>
-          <p:cNvPr id="41" name="TextBox 40"/>
-          <p:cNvSpPr txBox="1"/>
-          <p:nvPr/>
-        </p:nvSpPr>
-        <p:spPr>
-          <a:xfrm>
-            <a:off x="10980000" y="27340126"/>
-            <a:ext cx="9612000" cy="352066"/>
-          </a:xfrm>
-          <a:prstGeom prst="rect">
-            <a:avLst/>
-          </a:prstGeom>
-          <a:noFill/>
-        </p:spPr>
-        <p:txBody>
-          <a:bodyPr wrap="square" lIns="0" rIns="0" tIns="0" bIns="0">
-            <a:spAutoFit/>
-          </a:bodyPr>
-          <a:lstStyle/>
-          <a:p>
-            <a:pPr algn="l">
-              <a:lnSpc>
-                <a:spcPct val="115000"/>
-              </a:lnSpc>
-            </a:pPr>
-            <a:r>
-              <a:rPr sz="2100" b="0">
-                <a:solidFill>
-                  <a:srgbClr val="263044"/>
-                </a:solidFill>
-                <a:latin typeface="Malgun Gothic"/>
-                <a:ea typeface="Malgun Gothic"/>
-              </a:rPr>
-              <a:t>- BIC 질문은 HyDE가 근거 구간을 찾아 관련성이 0.00에서 0.89로 오름</a:t>
-            </a:r>
-          </a:p>
-        </p:txBody>
-      </p:sp>
-      <p:sp>
-        <p:nvSpPr>
-          <p:cNvPr id="42" name="TextBox 41"/>
-          <p:cNvSpPr txBox="1"/>
-          <p:nvPr/>
-        </p:nvSpPr>
-        <p:spPr>
-          <a:xfrm>
-            <a:off x="10980000" y="27903094"/>
-            <a:ext cx="9612000" cy="352066"/>
-          </a:xfrm>
-          <a:prstGeom prst="rect">
-            <a:avLst/>
-          </a:prstGeom>
-          <a:noFill/>
-        </p:spPr>
-        <p:txBody>
-          <a:bodyPr wrap="square" lIns="0" rIns="0" tIns="0" bIns="0">
-            <a:spAutoFit/>
-          </a:bodyPr>
-          <a:lstStyle/>
-          <a:p>
-            <a:pPr algn="l">
-              <a:lnSpc>
-                <a:spcPct val="115000"/>
-              </a:lnSpc>
-            </a:pPr>
-            <a:r>
-              <a:rPr sz="2100" b="0">
-                <a:solidFill>
-                  <a:srgbClr val="263044"/>
-                </a:solidFill>
-                <a:latin typeface="Malgun Gothic"/>
-                <a:ea typeface="Malgun Gothic"/>
-              </a:rPr>
-              <a:t>- QuALITY 질문은 HyDE 후 73.68이 빠져 관련성이 0.87에서 0.00으로 내림</a:t>
-            </a:r>
-          </a:p>
-        </p:txBody>
-      </p:sp>
-      <p:sp>
-        <p:nvSpPr>
-          <p:cNvPr id="43" name="TextBox 42"/>
-          <p:cNvSpPr txBox="1"/>
-          <p:nvPr/>
-        </p:nvSpPr>
-        <p:spPr>
-          <a:xfrm>
-            <a:off x="10980000" y="28466063"/>
-            <a:ext cx="9612000" cy="352066"/>
-          </a:xfrm>
-          <a:prstGeom prst="rect">
-            <a:avLst/>
-          </a:prstGeom>
-          <a:noFill/>
-        </p:spPr>
-        <p:txBody>
-          <a:bodyPr wrap="square" lIns="0" rIns="0" tIns="0" bIns="0">
-            <a:spAutoFit/>
-          </a:bodyPr>
-          <a:lstStyle/>
-          <a:p>
-            <a:pPr algn="l">
-              <a:lnSpc>
-                <a:spcPct val="115000"/>
-              </a:lnSpc>
-            </a:pPr>
-            <a:r>
-              <a:rPr sz="2100" b="0">
-                <a:solidFill>
-                  <a:srgbClr val="263044"/>
-                </a:solidFill>
-                <a:latin typeface="Malgun Gothic"/>
-                <a:ea typeface="Malgun Gothic"/>
-              </a:rPr>
-              <a:t>- XSUM 질문은 CAD가 다른 행 수치를 옮겼는데 충실도가 0.53에서 0.87로 오름</a:t>
-            </a:r>
-          </a:p>
-        </p:txBody>
-      </p:sp>
-      <p:sp>
-        <p:nvSpPr>
-          <p:cNvPr id="44" name="TextBox 43"/>
-          <p:cNvSpPr txBox="1"/>
-          <p:nvPr/>
-        </p:nvSpPr>
-        <p:spPr>
-          <a:xfrm>
-            <a:off x="10980000" y="29029031"/>
-            <a:ext cx="9612000" cy="352066"/>
-          </a:xfrm>
-          <a:prstGeom prst="rect">
-            <a:avLst/>
-          </a:prstGeom>
-          <a:noFill/>
-        </p:spPr>
-        <p:txBody>
-          <a:bodyPr wrap="square" lIns="0" rIns="0" tIns="0" bIns="0">
-            <a:spAutoFit/>
-          </a:bodyPr>
-          <a:lstStyle/>
-          <a:p>
-            <a:pPr algn="l">
-              <a:lnSpc>
-                <a:spcPct val="115000"/>
-              </a:lnSpc>
-            </a:pPr>
-            <a:r>
-              <a:rPr sz="2100" b="0">
-                <a:solidFill>
-                  <a:srgbClr val="263044"/>
-                </a:solidFill>
-                <a:latin typeface="Malgun Gothic"/>
-                <a:ea typeface="Malgun Gothic"/>
-              </a:rPr>
-              <a:t>- RAG 이점 질문은 CAD 후 지시문만 남아 관련성이 0.90에서 0.00으로 내림</a:t>
-            </a:r>
-          </a:p>
-        </p:txBody>
-      </p:sp>
-      <p:sp>
-        <p:nvSpPr>
-          <p:cNvPr id="45" name="Rectangle 44"/>
-          <p:cNvSpPr/>
-          <p:nvPr/>
-        </p:nvSpPr>
-        <p:spPr>
-          <a:xfrm>
-            <a:off x="792000" y="23653350"/>
-            <a:ext cx="9612000" cy="468000"/>
-          </a:xfrm>
-          <a:prstGeom prst="rect">
-            <a:avLst/>
-          </a:prstGeom>
-          <a:solidFill>
-            <a:srgbClr val="695184"/>
-          </a:solidFill>
-          <a:ln>
-            <a:noFill/>
-          </a:ln>
-          <a:effectLst/>
-        </p:spPr>
-        <p:style>
-          <a:lnRef idx="1">
-            <a:schemeClr val="accent1"/>
-          </a:lnRef>
-          <a:fillRef idx="3">
-            <a:schemeClr val="accent1"/>
-          </a:fillRef>
-          <a:effectRef idx="2">
-            <a:schemeClr val="accent1"/>
-          </a:effectRef>
-          <a:fontRef idx="minor">
-            <a:schemeClr val="lt1"/>
-          </a:fontRef>
-        </p:style>
-        <p:txBody>
-          <a:bodyPr rtlCol="0" anchor="ctr"/>
-          <a:lstStyle/>
-          <a:p>
-            <a:pPr algn="ctr"/>
-          </a:p>
-        </p:txBody>
-      </p:sp>
-      <p:sp>
-        <p:nvSpPr>
-          <p:cNvPr id="46" name="TextBox 45"/>
-          <p:cNvSpPr txBox="1"/>
-          <p:nvPr/>
-        </p:nvSpPr>
-        <p:spPr>
-          <a:xfrm>
-            <a:off x="936000" y="23678550"/>
+            <a:off x="936000" y="24103851"/>
             <a:ext cx="9324000" cy="360000"/>
           </a:xfrm>
           <a:prstGeom prst="rect">
@@ -11873,7 +12415,7 @@
       </p:sp>
       <p:pic>
         <p:nvPicPr>
-          <p:cNvPr id="47" name="Picture 46" descr="poster_parallel.png"/>
+          <p:cNvPr id="41" name="Picture 40" descr="poster_parallel.png"/>
           <p:cNvPicPr>
             <a:picLocks noChangeAspect="1"/>
           </p:cNvPicPr>
@@ -11887,8 +12429,8 @@
         </p:blipFill>
         <p:spPr>
           <a:xfrm>
-            <a:off x="792000" y="24265350"/>
-            <a:ext cx="9612000" cy="4568215"/>
+            <a:off x="792000" y="24690651"/>
+            <a:ext cx="9612000" cy="4142946"/>
           </a:xfrm>
           <a:prstGeom prst="rect">
             <a:avLst/>
@@ -11897,13 +12439,13 @@
       </p:pic>
       <p:sp>
         <p:nvSpPr>
-          <p:cNvPr id="48" name="TextBox 47"/>
+          <p:cNvPr id="42" name="TextBox 41"/>
           <p:cNvSpPr txBox="1"/>
           <p:nvPr/>
         </p:nvSpPr>
         <p:spPr>
           <a:xfrm>
-            <a:off x="792000" y="28869565"/>
+            <a:off x="792000" y="28869597"/>
             <a:ext cx="9612000" cy="637072"/>
           </a:xfrm>
           <a:prstGeom prst="rect">
@@ -11938,13 +12480,13 @@
       </p:sp>
       <p:sp>
         <p:nvSpPr>
-          <p:cNvPr id="49" name="TextBox 48"/>
+          <p:cNvPr id="43" name="TextBox 42"/>
           <p:cNvSpPr txBox="1"/>
           <p:nvPr/>
         </p:nvSpPr>
         <p:spPr>
           <a:xfrm>
-            <a:off x="792000" y="29704637"/>
+            <a:off x="792000" y="29704669"/>
             <a:ext cx="19800000" cy="324000"/>
           </a:xfrm>
           <a:prstGeom prst="rect">

--- a/FINALDOCS/POSTER/FINAL/M_RAG_A1_FINAL_EDITABLE.pptx
+++ b/FINALDOCS/POSTER/FINAL/M_RAG_A1_FINAL_EDITABLE.pptx
@@ -12091,8 +12091,8 @@
         </p:nvSpPr>
         <p:spPr>
           <a:xfrm>
-            <a:off x="10980000" y="24078651"/>
-            <a:ext cx="9612000" cy="468000"/>
+            <a:off x="792000" y="24078651"/>
+            <a:ext cx="19800000" cy="468000"/>
           </a:xfrm>
           <a:prstGeom prst="rect">
             <a:avLst/>
@@ -12135,8 +12135,8 @@
         </p:nvSpPr>
         <p:spPr>
           <a:xfrm>
-            <a:off x="11124000" y="24103851"/>
-            <a:ext cx="9324000" cy="360000"/>
+            <a:off x="936000" y="24103851"/>
+            <a:ext cx="19512000" cy="360000"/>
           </a:xfrm>
           <a:prstGeom prst="rect">
             <a:avLst/>
@@ -12162,21 +12162,45 @@
                 <a:latin typeface="Malgun Gothic"/>
                 <a:ea typeface="Malgun Gothic"/>
               </a:rPr>
-              <a:t>07 결론</a:t>
+              <a:t>06 방법 질문 25개의 원점수 평행좌표</a:t>
             </a:r>
           </a:p>
         </p:txBody>
       </p:sp>
+      <p:pic>
+        <p:nvPicPr>
+          <p:cNvPr id="35" name="Picture 34" descr="poster_parallel.png"/>
+          <p:cNvPicPr>
+            <a:picLocks noChangeAspect="1"/>
+          </p:cNvPicPr>
+          <p:nvPr/>
+        </p:nvPicPr>
+        <p:blipFill>
+          <a:blip r:embed="rId4"/>
+          <a:stretch>
+            <a:fillRect/>
+          </a:stretch>
+        </p:blipFill>
+        <p:spPr>
+          <a:xfrm>
+            <a:off x="792000" y="24690651"/>
+            <a:ext cx="19800000" cy="2816813"/>
+          </a:xfrm>
+          <a:prstGeom prst="rect">
+            <a:avLst/>
+          </a:prstGeom>
+        </p:spPr>
+      </p:pic>
       <p:sp>
         <p:nvSpPr>
-          <p:cNvPr id="35" name="TextBox 34"/>
+          <p:cNvPr id="36" name="TextBox 35"/>
           <p:cNvSpPr txBox="1"/>
           <p:nvPr/>
         </p:nvSpPr>
         <p:spPr>
           <a:xfrm>
-            <a:off x="10980000" y="24762651"/>
-            <a:ext cx="9612000" cy="804722"/>
+            <a:off x="792000" y="27543464"/>
+            <a:ext cx="19800000" cy="318536"/>
           </a:xfrm>
           <a:prstGeom prst="rect">
             <a:avLst/>
@@ -12195,150 +12219,28 @@
               </a:lnSpc>
             </a:pPr>
             <a:r>
-              <a:rPr sz="2400" b="0">
+              <a:rPr sz="1900" b="0">
                 <a:solidFill>
                   <a:srgbClr val="263044"/>
                 </a:solidFill>
                 <a:latin typeface="Malgun Gothic"/>
                 <a:ea typeface="Malgun Gothic"/>
               </a:rPr>
-              <a:t>- 관련성과 응답 시간이 중요하면 HyDE 하나
-  (개념과 결과 질문 포함)</a:t>
+              <a:t>- HyDE 적용 후 관련성 축의 선이 위로 모이고 관련성 0점 답변이 5개에서 1개로 줄어듦</a:t>
             </a:r>
           </a:p>
         </p:txBody>
       </p:sp>
       <p:sp>
         <p:nvSpPr>
-          <p:cNvPr id="36" name="TextBox 35"/>
-          <p:cNvSpPr txBox="1"/>
-          <p:nvPr/>
-        </p:nvSpPr>
-        <p:spPr>
-          <a:xfrm>
-            <a:off x="10980000" y="26071374"/>
-            <a:ext cx="9612000" cy="402361"/>
-          </a:xfrm>
-          <a:prstGeom prst="rect">
-            <a:avLst/>
-          </a:prstGeom>
-          <a:noFill/>
-        </p:spPr>
-        <p:txBody>
-          <a:bodyPr wrap="square" lIns="0" rIns="0" tIns="0" bIns="0">
-            <a:spAutoFit/>
-          </a:bodyPr>
-          <a:lstStyle/>
-          <a:p>
-            <a:pPr algn="l">
-              <a:lnSpc>
-                <a:spcPct val="115000"/>
-              </a:lnSpc>
-            </a:pPr>
-            <a:r>
-              <a:rPr sz="2400" b="0">
-                <a:solidFill>
-                  <a:srgbClr val="263044"/>
-                </a:solidFill>
-                <a:latin typeface="Malgun Gothic"/>
-                <a:ea typeface="Malgun Gothic"/>
-              </a:rPr>
-              <a:t>- 수치 질문은 정답 구간의 검색을 확인하고 충실도는 HyDE+CAD</a:t>
-            </a:r>
-          </a:p>
-        </p:txBody>
-      </p:sp>
-      <p:sp>
-        <p:nvSpPr>
-          <p:cNvPr id="37" name="TextBox 36"/>
-          <p:cNvSpPr txBox="1"/>
-          <p:nvPr/>
-        </p:nvSpPr>
-        <p:spPr>
-          <a:xfrm>
-            <a:off x="10980000" y="26977735"/>
-            <a:ext cx="9612000" cy="402361"/>
-          </a:xfrm>
-          <a:prstGeom prst="rect">
-            <a:avLst/>
-          </a:prstGeom>
-          <a:noFill/>
-        </p:spPr>
-        <p:txBody>
-          <a:bodyPr wrap="square" lIns="0" rIns="0" tIns="0" bIns="0">
-            <a:spAutoFit/>
-          </a:bodyPr>
-          <a:lstStyle/>
-          <a:p>
-            <a:pPr algn="l">
-              <a:lnSpc>
-                <a:spcPct val="115000"/>
-              </a:lnSpc>
-            </a:pPr>
-            <a:r>
-              <a:rPr sz="2400" b="0">
-                <a:solidFill>
-                  <a:srgbClr val="263044"/>
-                </a:solidFill>
-                <a:latin typeface="Malgun Gothic"/>
-                <a:ea typeface="Malgun Gothic"/>
-              </a:rPr>
-              <a:t>- 한국어 답변은 세 기법(방법 질문 세 지표가 SCD 단독보다 높음)</a:t>
-            </a:r>
-          </a:p>
-        </p:txBody>
-      </p:sp>
-      <p:sp>
-        <p:nvSpPr>
-          <p:cNvPr id="38" name="TextBox 37"/>
-          <p:cNvSpPr txBox="1"/>
-          <p:nvPr/>
-        </p:nvSpPr>
-        <p:spPr>
-          <a:xfrm>
-            <a:off x="10980000" y="27884096"/>
-            <a:ext cx="9612000" cy="804722"/>
-          </a:xfrm>
-          <a:prstGeom prst="rect">
-            <a:avLst/>
-          </a:prstGeom>
-          <a:noFill/>
-        </p:spPr>
-        <p:txBody>
-          <a:bodyPr wrap="square" lIns="0" rIns="0" tIns="0" bIns="0">
-            <a:spAutoFit/>
-          </a:bodyPr>
-          <a:lstStyle/>
-          <a:p>
-            <a:pPr algn="l">
-              <a:lnSpc>
-                <a:spcPct val="115000"/>
-              </a:lnSpc>
-            </a:pPr>
-            <a:r>
-              <a:rPr sz="2400" b="0">
-                <a:solidFill>
-                  <a:srgbClr val="263044"/>
-                </a:solidFill>
-                <a:latin typeface="Malgun Gothic"/>
-                <a:ea typeface="Malgun Gothic"/>
-              </a:rPr>
-              <a:t>- 조합은 HyDE 단독보다 관련성이 낮고
-  일관된 이득은 SCD의 한국어 비율</a:t>
-            </a:r>
-          </a:p>
-        </p:txBody>
-      </p:sp>
-      <p:sp>
-        <p:nvSpPr>
-          <p:cNvPr id="39" name="Rectangle 38"/>
+          <p:cNvPr id="37" name="Rectangle 36"/>
           <p:cNvSpPr/>
           <p:nvPr/>
         </p:nvSpPr>
         <p:spPr>
           <a:xfrm>
-            <a:off x="792000" y="24078651"/>
-            <a:ext cx="9612000" cy="468000"/>
+            <a:off x="792000" y="28096000"/>
+            <a:ext cx="19800000" cy="468000"/>
           </a:xfrm>
           <a:prstGeom prst="rect">
             <a:avLst/>
@@ -12375,14 +12277,14 @@
       </p:sp>
       <p:sp>
         <p:nvSpPr>
-          <p:cNvPr id="40" name="TextBox 39"/>
+          <p:cNvPr id="38" name="TextBox 37"/>
           <p:cNvSpPr txBox="1"/>
           <p:nvPr/>
         </p:nvSpPr>
         <p:spPr>
           <a:xfrm>
-            <a:off x="936000" y="24103851"/>
-            <a:ext cx="9324000" cy="360000"/>
+            <a:off x="936000" y="28121200"/>
+            <a:ext cx="19512000" cy="360000"/>
           </a:xfrm>
           <a:prstGeom prst="rect">
             <a:avLst/>
@@ -12408,45 +12310,21 @@
                 <a:latin typeface="Malgun Gothic"/>
                 <a:ea typeface="Malgun Gothic"/>
               </a:rPr>
-              <a:t>06 방법 질문 25개의 원점수 평행좌표</a:t>
+              <a:t>07 결론</a:t>
             </a:r>
           </a:p>
         </p:txBody>
       </p:sp>
-      <p:pic>
-        <p:nvPicPr>
-          <p:cNvPr id="41" name="Picture 40" descr="poster_parallel.png"/>
-          <p:cNvPicPr>
-            <a:picLocks noChangeAspect="1"/>
-          </p:cNvPicPr>
-          <p:nvPr/>
-        </p:nvPicPr>
-        <p:blipFill>
-          <a:blip r:embed="rId4"/>
-          <a:stretch>
-            <a:fillRect/>
-          </a:stretch>
-        </p:blipFill>
-        <p:spPr>
-          <a:xfrm>
-            <a:off x="792000" y="24690651"/>
-            <a:ext cx="9612000" cy="4142946"/>
-          </a:xfrm>
-          <a:prstGeom prst="rect">
-            <a:avLst/>
-          </a:prstGeom>
-        </p:spPr>
-      </p:pic>
       <p:sp>
         <p:nvSpPr>
-          <p:cNvPr id="42" name="TextBox 41"/>
+          <p:cNvPr id="39" name="TextBox 38"/>
           <p:cNvSpPr txBox="1"/>
           <p:nvPr/>
         </p:nvSpPr>
         <p:spPr>
           <a:xfrm>
-            <a:off x="792000" y="28869597"/>
-            <a:ext cx="9612000" cy="637072"/>
+            <a:off x="792000" y="28708000"/>
+            <a:ext cx="9612000" cy="368831"/>
           </a:xfrm>
           <a:prstGeom prst="rect">
             <a:avLst/>
@@ -12465,15 +12343,134 @@
               </a:lnSpc>
             </a:pPr>
             <a:r>
-              <a:rPr sz="1900" b="0">
+              <a:rPr sz="2200" b="0">
                 <a:solidFill>
                   <a:srgbClr val="263044"/>
                 </a:solidFill>
                 <a:latin typeface="Malgun Gothic"/>
                 <a:ea typeface="Malgun Gothic"/>
               </a:rPr>
-              <a:t>- HyDE 적용 후 관련성 축의 선이 위로 모이고
-  관련성 0점 답변이 5개에서 1개로 줄어듦</a:t>
+              <a:t>- 관련성과 응답 시간이 중요하면 HyDE 하나(개념과 결과 질문 포함)</a:t>
+            </a:r>
+          </a:p>
+        </p:txBody>
+      </p:sp>
+      <p:sp>
+        <p:nvSpPr>
+          <p:cNvPr id="40" name="TextBox 39"/>
+          <p:cNvSpPr txBox="1"/>
+          <p:nvPr/>
+        </p:nvSpPr>
+        <p:spPr>
+          <a:xfrm>
+            <a:off x="792000" y="29148831"/>
+            <a:ext cx="9612000" cy="368831"/>
+          </a:xfrm>
+          <a:prstGeom prst="rect">
+            <a:avLst/>
+          </a:prstGeom>
+          <a:noFill/>
+        </p:spPr>
+        <p:txBody>
+          <a:bodyPr wrap="square" lIns="0" rIns="0" tIns="0" bIns="0">
+            <a:spAutoFit/>
+          </a:bodyPr>
+          <a:lstStyle/>
+          <a:p>
+            <a:pPr algn="l">
+              <a:lnSpc>
+                <a:spcPct val="115000"/>
+              </a:lnSpc>
+            </a:pPr>
+            <a:r>
+              <a:rPr sz="2200" b="0">
+                <a:solidFill>
+                  <a:srgbClr val="263044"/>
+                </a:solidFill>
+                <a:latin typeface="Malgun Gothic"/>
+                <a:ea typeface="Malgun Gothic"/>
+              </a:rPr>
+              <a:t>- 수치 질문은 정답 구간의 검색을 확인하고 충실도는 HyDE+CAD</a:t>
+            </a:r>
+          </a:p>
+        </p:txBody>
+      </p:sp>
+      <p:sp>
+        <p:nvSpPr>
+          <p:cNvPr id="41" name="TextBox 40"/>
+          <p:cNvSpPr txBox="1"/>
+          <p:nvPr/>
+        </p:nvSpPr>
+        <p:spPr>
+          <a:xfrm>
+            <a:off x="10980000" y="28708000"/>
+            <a:ext cx="9612000" cy="368831"/>
+          </a:xfrm>
+          <a:prstGeom prst="rect">
+            <a:avLst/>
+          </a:prstGeom>
+          <a:noFill/>
+        </p:spPr>
+        <p:txBody>
+          <a:bodyPr wrap="square" lIns="0" rIns="0" tIns="0" bIns="0">
+            <a:spAutoFit/>
+          </a:bodyPr>
+          <a:lstStyle/>
+          <a:p>
+            <a:pPr algn="l">
+              <a:lnSpc>
+                <a:spcPct val="115000"/>
+              </a:lnSpc>
+            </a:pPr>
+            <a:r>
+              <a:rPr sz="2200" b="0">
+                <a:solidFill>
+                  <a:srgbClr val="263044"/>
+                </a:solidFill>
+                <a:latin typeface="Malgun Gothic"/>
+                <a:ea typeface="Malgun Gothic"/>
+              </a:rPr>
+              <a:t>- 한국어 답변은 세 기법(방법 질문 세 지표가 SCD 단독보다 높음)</a:t>
+            </a:r>
+          </a:p>
+        </p:txBody>
+      </p:sp>
+      <p:sp>
+        <p:nvSpPr>
+          <p:cNvPr id="42" name="TextBox 41"/>
+          <p:cNvSpPr txBox="1"/>
+          <p:nvPr/>
+        </p:nvSpPr>
+        <p:spPr>
+          <a:xfrm>
+            <a:off x="10980000" y="29148831"/>
+            <a:ext cx="9612000" cy="368831"/>
+          </a:xfrm>
+          <a:prstGeom prst="rect">
+            <a:avLst/>
+          </a:prstGeom>
+          <a:noFill/>
+        </p:spPr>
+        <p:txBody>
+          <a:bodyPr wrap="square" lIns="0" rIns="0" tIns="0" bIns="0">
+            <a:spAutoFit/>
+          </a:bodyPr>
+          <a:lstStyle/>
+          <a:p>
+            <a:pPr algn="l">
+              <a:lnSpc>
+                <a:spcPct val="115000"/>
+              </a:lnSpc>
+            </a:pPr>
+            <a:r>
+              <a:rPr sz="2200" b="0">
+                <a:solidFill>
+                  <a:srgbClr val="263044"/>
+                </a:solidFill>
+                <a:latin typeface="Malgun Gothic"/>
+                <a:ea typeface="Malgun Gothic"/>
+              </a:rPr>
+              <a:t>- 조합은 HyDE 단독보다 관련성이 낮고 일관된 이득은 SCD의 한국어 비율</a:t>
             </a:r>
           </a:p>
         </p:txBody>
@@ -12486,7 +12483,7 @@
         </p:nvSpPr>
         <p:spPr>
           <a:xfrm>
-            <a:off x="792000" y="29704669"/>
+            <a:off x="792000" y="29661662"/>
             <a:ext cx="19800000" cy="324000"/>
           </a:xfrm>
           <a:prstGeom prst="rect">

--- a/FINALDOCS/POSTER/FINAL/M_RAG_A1_FINAL_EDITABLE.pptx
+++ b/FINALDOCS/POSTER/FINAL/M_RAG_A1_FINAL_EDITABLE.pptx
@@ -3804,7 +3804,7 @@
                 <a:latin typeface="Malgun Gothic"/>
                 <a:ea typeface="Malgun Gothic"/>
               </a:rPr>
-              <a:t>HyDE Hypothetical Document Embeddings   CAD Context-Aware Decoding   SCD Soft Constrained Decoding   패널마다 미적용과 단독 적용 조건을 비교, 점 위치와 글자 크기는 원리를 보인 개념도</a:t>
+              <a:t>HyDE Hypothetical Document Embeddings   CAD Context-Aware Decoding   SCD Soft Constrained Decoding   패널마다 미적용과 단독 적용 조건을 비교</a:t>
             </a:r>
           </a:p>
         </p:txBody>

--- a/FINALDOCS/POSTER/FINAL/M_RAG_A1_FINAL_EDITABLE.pptx
+++ b/FINALDOCS/POSTER/FINAL/M_RAG_A1_FINAL_EDITABLE.pptx
@@ -12350,7 +12350,7 @@
                 <a:latin typeface="Malgun Gothic"/>
                 <a:ea typeface="Malgun Gothic"/>
               </a:rPr>
-              <a:t>- 관련성과 응답 시간이 중요하면 HyDE 하나(개념과 결과 질문 포함)</a:t>
+              <a:t>- 관련성과 처리 시간이 중요하면 HyDE 하나(개념과 결과 질문 포함)</a:t>
             </a:r>
           </a:p>
         </p:txBody>
